--- a/dev/presentation/Elrggal_Mahmoud_SCEBE2026.pptx
+++ b/dev/presentation/Elrggal_Mahmoud_SCEBE2026.pptx
@@ -131,7 +131,7 @@
   <p:extLst>
     <p:ext uri="{521415D9-36F7-43E2-AB2F-B90AF26B5E84}">
       <p14:sectionLst xmlns:p14="http://schemas.microsoft.com/office/powerpoint/2010/main">
-        <p14:section name="Context" id="{7f61cd52-da98-6bcf-61c2-05ef9fb1d69a}">
+        <p14:section name="Context" id="{94884aa3-261f-4bbe-c77b-2be97a35b419}">
           <p14:sldIdLst>
             <p14:sldId id="256"/>
             <p14:sldId id="257"/>
@@ -140,7 +140,7 @@
             <p14:sldId id="260"/>
           </p14:sldIdLst>
         </p14:section>
-        <p14:section name="Question and approach" id="{32058e3f-f41c-5ad1-cc73-49ff3ff19d3a}">
+        <p14:section name="Question and approach" id="{e3da23a0-d364-c07b-69ef-002d57a2e0db}">
           <p14:sldIdLst>
             <p14:sldId id="261"/>
             <p14:sldId id="262"/>
@@ -149,24 +149,24 @@
             <p14:sldId id="265"/>
           </p14:sldIdLst>
         </p14:section>
-        <p14:section name="Preliminary results" id="{0c0271dc-e591-5449-5757-bb71d5cdf61d}">
+        <p14:section name="Preliminary results" id="{eba2f41c-3064-c8c0-0dcb-9a71f13b2df7}">
           <p14:sldIdLst>
             <p14:sldId id="266"/>
             <p14:sldId id="267"/>
             <p14:sldId id="268"/>
           </p14:sldIdLst>
         </p14:section>
-        <p14:section name="Contribution and next steps" id="{7ece7724-fbb7-4a9e-da92-169d4434b4d9}">
+        <p14:section name="Contribution and next steps" id="{a2e33362-9618-3c47-82f4-a3f118374bea}">
           <p14:sldIdLst>
             <p14:sldId id="269"/>
           </p14:sldIdLst>
         </p14:section>
-        <p14:section name="Input" id="{887c2958-35b7-7f3e-cd90-fab94cdf1245}">
+        <p14:section name="Input" id="{e06b4947-75fc-9a7c-6c92-cdefc12ffefb}">
           <p14:sldIdLst>
             <p14:sldId id="270"/>
           </p14:sldIdLst>
         </p14:section>
-        <p14:section name="Backup" id="{02debc45-9608-0574-581b-4cef58cea908}">
+        <p14:section name="Backup" id="{bb76348b-caea-ab76-0e20-ee0bf2f8accf}">
           <p14:sldIdLst>
             <p14:sldId id="271"/>
             <p14:sldId id="272"/>
@@ -5169,7 +5169,7 @@
                   <a:srgbClr val="1B1B1B"/>
                 </a:solidFill>
               </a:rPr>
-              <a:t>Second Supervisor: Kia</a:t>
+              <a:t>Second Supervisor: Dr Kia Dashtipour</a:t>
             </a:r>
             <a:endParaRPr lang="en-US" sz="1800" dirty="0"/>
           </a:p>
@@ -10406,7 +10406,7 @@
                   <a:srgbClr val="1B1B1B"/>
                 </a:solidFill>
               </a:rPr>
-              <a:t>Complete the qualitative study with healthcare professionals; finish the 16-model comparison</a:t>
+              <a:t>Complete the qualitative study (20 infectious disease and critical care consultants); finish the 16-model comparison</a:t>
             </a:r>
             <a:endParaRPr lang="en-US" sz="1300" dirty="0"/>
           </a:p>
@@ -19758,7 +19758,7 @@
                   <a:srgbClr val="1B1B1B"/>
                 </a:solidFill>
               </a:rPr>
-              <a:t>Clinician study: now the qualitative phase, in progress.</a:t>
+              <a:t>Clinician study: now the qualitative phase (20 consultants), nearly complete.</a:t>
             </a:r>
             <a:endParaRPr lang="en-US" sz="1350" dirty="0"/>
           </a:p>
@@ -27391,14 +27391,14 @@
               <a:buNone/>
             </a:pPr>
             <a:r>
-              <a:rPr lang="en-US" sz="1250" dirty="0">
+              <a:rPr lang="en-US" sz="1200" dirty="0">
                 <a:solidFill>
                   <a:srgbClr val="1B1B1B"/>
                 </a:solidFill>
               </a:rPr>
-              <a:t>Healthcare professionals: would they trust and act on the alert, what explanation do they need, what alarm burden is acceptable [26].</a:t>
-            </a:r>
-            <a:endParaRPr lang="en-US" sz="1250" dirty="0"/>
+              <a:t>Online interviews and round-table discussions with 20 infectious disease and critical care consultants from different hospitals: would they trust and act on the alert, what explanation do they need, what alarm burden is acceptable [26].</a:t>
+            </a:r>
+            <a:endParaRPr lang="en-US" sz="1200" dirty="0"/>
           </a:p>
         </p:txBody>
       </p:sp>

--- a/dev/presentation/Elrggal_Mahmoud_SCEBE2026.pptx
+++ b/dev/presentation/Elrggal_Mahmoud_SCEBE2026.pptx
@@ -131,7 +131,7 @@
   <p:extLst>
     <p:ext uri="{521415D9-36F7-43E2-AB2F-B90AF26B5E84}">
       <p14:sectionLst xmlns:p14="http://schemas.microsoft.com/office/powerpoint/2010/main">
-        <p14:section name="Context" id="{94884aa3-261f-4bbe-c77b-2be97a35b419}">
+        <p14:section name="Context" id="{eaf57215-b968-68ae-957a-b2fea3dbd97c}">
           <p14:sldIdLst>
             <p14:sldId id="256"/>
             <p14:sldId id="257"/>
@@ -140,7 +140,7 @@
             <p14:sldId id="260"/>
           </p14:sldIdLst>
         </p14:section>
-        <p14:section name="Question and approach" id="{e3da23a0-d364-c07b-69ef-002d57a2e0db}">
+        <p14:section name="Question and approach" id="{218615e4-fc27-aa34-5ce1-ffb161400dad}">
           <p14:sldIdLst>
             <p14:sldId id="261"/>
             <p14:sldId id="262"/>
@@ -149,24 +149,24 @@
             <p14:sldId id="265"/>
           </p14:sldIdLst>
         </p14:section>
-        <p14:section name="Preliminary results" id="{eba2f41c-3064-c8c0-0dcb-9a71f13b2df7}">
+        <p14:section name="Preliminary results" id="{cd3cc274-6744-c7cd-24da-c8e7323da6cb}">
           <p14:sldIdLst>
             <p14:sldId id="266"/>
             <p14:sldId id="267"/>
             <p14:sldId id="268"/>
           </p14:sldIdLst>
         </p14:section>
-        <p14:section name="Contribution and next steps" id="{a2e33362-9618-3c47-82f4-a3f118374bea}">
+        <p14:section name="Contribution and next steps" id="{e56940e4-5816-69fe-cadf-22fb9c016459}">
           <p14:sldIdLst>
             <p14:sldId id="269"/>
           </p14:sldIdLst>
         </p14:section>
-        <p14:section name="Input" id="{e06b4947-75fc-9a7c-6c92-cdefc12ffefb}">
+        <p14:section name="Input" id="{a64a9846-2220-233b-9ee1-dc25cb4cc983}">
           <p14:sldIdLst>
             <p14:sldId id="270"/>
           </p14:sldIdLst>
         </p14:section>
-        <p14:section name="Backup" id="{bb76348b-caea-ab76-0e20-ee0bf2f8accf}">
+        <p14:section name="Backup" id="{9818f1a3-2f85-9d30-340d-2a94800a4c6d}">
           <p14:sldIdLst>
             <p14:sldId id="271"/>
             <p14:sldId id="272"/>
@@ -714,7 +714,7 @@
             <c:bubble3D val="0"/>
             <c:spPr>
               <a:solidFill>
-                <a:srgbClr val="C8102E"/>
+                <a:srgbClr val="3A3A3A"/>
               </a:solidFill>
               <a:effectLst/>
             </c:spPr>
@@ -730,23 +730,37 @@
               <a:effectLst/>
             </c:spPr>
           </c:dPt>
+          <c:dPt>
+            <c:idx val="4"/>
+            <c:invertIfNegative val="0"/>
+            <c:bubble3D val="0"/>
+            <c:spPr>
+              <a:solidFill>
+                <a:srgbClr val="C8102E"/>
+              </a:solidFill>
+              <a:effectLst/>
+            </c:spPr>
+          </c:dPt>
           <c:cat>
             <c:multiLvlStrRef>
-              <c:f>Sheet1!$A$2:$A$5</c:f>
+              <c:f>Sheet1!$A$2:$A$6</c:f>
               <c:multiLvlStrCache>
-                <c:ptCount val="4"/>
+                <c:ptCount val="5"/>
                 <c:lvl>
                   <c:pt idx="0">
-                    <c:v>Winner, new patients, its 2 hospitals</c:v>
+                    <c:v>Winner, published: its 2 hospitals</c:v>
                   </c:pt>
                   <c:pt idx="1">
-                    <c:v>Winner, unseen third hospital</c:v>
+                    <c:v>Winner, published: unseen hospital</c:v>
                   </c:pt>
                   <c:pt idx="2">
-                    <c:v>Our causal OSTA, PhysioNet test</c:v>
+                    <c:v>Winner's method, rebuilt here</c:v>
                   </c:pt>
                   <c:pt idx="3">
-                    <c:v>Our best model, MIMIC-IV development test</c:v>
+                    <c:v>OSTA (this project)</c:v>
+                  </c:pt>
+                  <c:pt idx="4">
+                    <c:v>GRU-D (chosen on validation)</c:v>
                   </c:pt>
                 </c:lvl>
               </c:multiLvlStrCache>
@@ -754,10 +768,10 @@
           </c:cat>
           <c:val>
             <c:numRef>
-              <c:f>Sheet1!$B$2:$B$5</c:f>
+              <c:f>Sheet1!$B$2:$B$6</c:f>
               <c:numCache>
                 <c:formatCode>General</c:formatCode>
-                <c:ptCount val="4"/>
+                <c:ptCount val="5"/>
                 <c:pt idx="0">
                   <c:v>0.43</c:v>
                 </c:pt>
@@ -765,10 +779,13 @@
                   <c:v>-0.12</c:v>
                 </c:pt>
                 <c:pt idx="2">
-                  <c:v>0.22</c:v>
+                  <c:v>0.15</c:v>
                 </c:pt>
                 <c:pt idx="3">
-                  <c:v>0.18</c:v>
+                  <c:v>0.23</c:v>
+                </c:pt>
+                <c:pt idx="4">
+                  <c:v>0.19</c:v>
                 </c:pt>
               </c:numCache>
             </c:numRef>
@@ -798,7 +815,7 @@
           <c:showBubbleSize val="0"/>
           <c:showLeaderLines val="0"/>
         </c:dLbls>
-        <c:gapWidth val="45"/>
+        <c:gapWidth val="40"/>
         <c:overlap val="0"/>
         <c:axId val="2094734554"/>
         <c:axId val="2094734552"/>
@@ -2175,7 +2192,7 @@
           <a:p>
             <a:r>
               <a:rPr lang="en-US" dirty="0"/>
-              <a:t>1 min. Grey is the published winner: 0.43 on new patients from the hospitals it trained on, minus 0.12 on a hospital it had never seen. Red is this project. The point is not that 0.18 is high; it is positive, with its confidence interval above zero, on raw data scored causally. Say the caveats: preliminary, development split, holdout sealed.</a:t>
+              <a:t>1 min. Grey is the published winner: 0.43 on its own hospitals, minus 0.12 on an unseen one. Dark grey is the winner's own method rebuilt in our causal pipeline on MIMIC-IV: 0.15. Red is this project: OSTA 0.23, and GRU-D, the model the prespecified rule chose on validation, 0.19. All 21 models have positive utility with confidence intervals above zero. The organ grouping did not beat the same model without it at this sample size; that is reported as found. Say: preliminary, one run, development split.</a:t>
             </a:r>
             <a:endParaRPr lang="en-US" dirty="0"/>
           </a:p>
@@ -9011,7 +9028,7 @@
                 <a:ea typeface="Arial" pitchFamily="34" charset="-122"/>
                 <a:cs typeface="Arial" pitchFamily="34" charset="-120"/>
               </a:rPr>
-              <a:t>Result 3: positive utility on MIMIC-IV, where the challenge winner fell below zero on an unseen hospital</a:t>
+              <a:t>Result 3: on identical MIMIC-IV hours, all 21 models have positive utility, including the winner's method</a:t>
             </a:r>
             <a:endParaRPr lang="en-US" sz="2600" dirty="0"/>
           </a:p>
@@ -9041,7 +9058,7 @@
         </p:nvSpPr>
         <p:spPr>
           <a:xfrm>
-            <a:off x="822960" y="5532120"/>
+            <a:off x="640080" y="5532120"/>
             <a:ext cx="228600" cy="182880"/>
           </a:xfrm>
           <a:prstGeom prst="rect">
@@ -9066,8 +9083,8 @@
         </p:nvSpPr>
         <p:spPr>
           <a:xfrm>
-            <a:off x="1115568" y="5486400"/>
-            <a:ext cx="3017520" cy="274320"/>
+            <a:off x="932688" y="5486400"/>
+            <a:ext cx="1737360" cy="274320"/>
           </a:xfrm>
           <a:prstGeom prst="rect">
             <a:avLst/>
@@ -9088,7 +9105,7 @@
                   <a:srgbClr val="1B1B1B"/>
                 </a:solidFill>
               </a:rPr>
-              <a:t>Published challenge winner [15, 21]</a:t>
+              <a:t>Published [15, 21]</a:t>
             </a:r>
             <a:endParaRPr lang="en-US" sz="1200" dirty="0"/>
           </a:p>
@@ -9102,7 +9119,68 @@
         </p:nvSpPr>
         <p:spPr>
           <a:xfrm>
-            <a:off x="4206240" y="5532120"/>
+            <a:off x="2651760" y="5532120"/>
+            <a:ext cx="228600" cy="182880"/>
+          </a:xfrm>
+          <a:prstGeom prst="rect">
+            <a:avLst/>
+          </a:prstGeom>
+          <a:solidFill>
+            <a:srgbClr val="3A3A3A"/>
+          </a:solidFill>
+          <a:ln w="12700">
+            <a:solidFill>
+              <a:srgbClr val="3A3A3A"/>
+            </a:solidFill>
+            <a:prstDash val="solid"/>
+          </a:ln>
+        </p:spPr>
+      </p:sp>
+      <p:sp>
+        <p:nvSpPr>
+          <p:cNvPr id="10" name="text"/>
+          <p:cNvSpPr txBox="1"/>
+          <p:nvPr/>
+        </p:nvSpPr>
+        <p:spPr>
+          <a:xfrm>
+            <a:off x="2944368" y="5486400"/>
+            <a:ext cx="2286000" cy="274320"/>
+          </a:xfrm>
+          <a:prstGeom prst="rect">
+            <a:avLst/>
+          </a:prstGeom>
+          <a:noFill/>
+          <a:ln/>
+        </p:spPr>
+        <p:txBody>
+          <a:bodyPr wrap="square" lIns="0" tIns="0" rIns="0" bIns="0" rtlCol="0" anchor="ctr"/>
+          <a:lstStyle/>
+          <a:p>
+            <a:pPr algn="l" indent="0" marL="0">
+              <a:buNone/>
+            </a:pPr>
+            <a:r>
+              <a:rPr lang="en-US" sz="1200" dirty="0">
+                <a:solidFill>
+                  <a:srgbClr val="1B1B1B"/>
+                </a:solidFill>
+              </a:rPr>
+              <a:t>Winner's method, our pipeline</a:t>
+            </a:r>
+            <a:endParaRPr lang="en-US" sz="1200" dirty="0"/>
+          </a:p>
+        </p:txBody>
+      </p:sp>
+      <p:sp>
+        <p:nvSpPr>
+          <p:cNvPr id="11" name="legend swatch"/>
+          <p:cNvSpPr/>
+          <p:nvPr/>
+        </p:nvSpPr>
+        <p:spPr>
+          <a:xfrm>
+            <a:off x="5212080" y="5532120"/>
             <a:ext cx="228600" cy="182880"/>
           </a:xfrm>
           <a:prstGeom prst="rect">
@@ -9121,14 +9199,14 @@
       </p:sp>
       <p:sp>
         <p:nvSpPr>
-          <p:cNvPr id="10" name="text"/>
-          <p:cNvSpPr txBox="1"/>
-          <p:nvPr/>
-        </p:nvSpPr>
-        <p:spPr>
-          <a:xfrm>
-            <a:off x="4498848" y="5486400"/>
-            <a:ext cx="2834640" cy="274320"/>
+          <p:cNvPr id="12" name="text"/>
+          <p:cNvSpPr txBox="1"/>
+          <p:nvPr/>
+        </p:nvSpPr>
+        <p:spPr>
+          <a:xfrm>
+            <a:off x="5504688" y="5486400"/>
+            <a:ext cx="1828800" cy="274320"/>
           </a:xfrm>
           <a:prstGeom prst="rect">
             <a:avLst/>
@@ -9149,7 +9227,7 @@
                   <a:srgbClr val="1B1B1B"/>
                 </a:solidFill>
               </a:rPr>
-              <a:t>This project, causal evaluation [41]</a:t>
+              <a:t>This project [41]</a:t>
             </a:r>
             <a:endParaRPr lang="en-US" sz="1200" dirty="0"/>
           </a:p>
@@ -9157,7 +9235,7 @@
       </p:sp>
       <p:sp>
         <p:nvSpPr>
-          <p:cNvPr id="11" name="box"/>
+          <p:cNvPr id="13" name="box"/>
           <p:cNvSpPr/>
           <p:nvPr/>
         </p:nvSpPr>
@@ -9182,7 +9260,7 @@
       </p:sp>
       <p:sp>
         <p:nvSpPr>
-          <p:cNvPr id="12" name="text"/>
+          <p:cNvPr id="14" name="text"/>
           <p:cNvSpPr txBox="1"/>
           <p:nvPr/>
         </p:nvSpPr>
@@ -9218,7 +9296,7 @@
       </p:sp>
       <p:sp>
         <p:nvSpPr>
-          <p:cNvPr id="13" name="text"/>
+          <p:cNvPr id="15" name="text"/>
           <p:cNvSpPr txBox="1"/>
           <p:nvPr/>
         </p:nvSpPr>
@@ -9246,7 +9324,7 @@
                   <a:srgbClr val="5E5E5E"/>
                 </a:solidFill>
               </a:rPr>
-              <a:t>1,422 stays, 63,488 hours, 71 sepsis events</a:t>
+              <a:t>1,422 stays, 71 sepsis events, identical hours</a:t>
             </a:r>
             <a:endParaRPr lang="en-US" sz="1200" dirty="0"/>
           </a:p>
@@ -9254,14 +9332,14 @@
       </p:sp>
       <p:sp>
         <p:nvSpPr>
-          <p:cNvPr id="14" name="text"/>
-          <p:cNvSpPr txBox="1"/>
-          <p:nvPr/>
-        </p:nvSpPr>
-        <p:spPr>
-          <a:xfrm>
-            <a:off x="7726680" y="2331720"/>
-            <a:ext cx="1821028" cy="548640"/>
+          <p:cNvPr id="16" name="text"/>
+          <p:cNvSpPr txBox="1"/>
+          <p:nvPr/>
+        </p:nvSpPr>
+        <p:spPr>
+          <a:xfrm>
+            <a:off x="7726680" y="2286000"/>
+            <a:ext cx="1821028" cy="502920"/>
           </a:xfrm>
           <a:prstGeom prst="rect">
             <a:avLst/>
@@ -9277,12 +9355,156 @@
               <a:buNone/>
             </a:pPr>
             <a:r>
+              <a:rPr lang="en-US" sz="2200" b="1" dirty="0">
+                <a:solidFill>
+                  <a:srgbClr val="C8102E"/>
+                </a:solidFill>
+              </a:rPr>
+              <a:t>21 / 21</a:t>
+            </a:r>
+            <a:endParaRPr lang="en-US" sz="2200" dirty="0"/>
+          </a:p>
+        </p:txBody>
+      </p:sp>
+      <p:sp>
+        <p:nvSpPr>
+          <p:cNvPr id="17" name="text"/>
+          <p:cNvSpPr txBox="1"/>
+          <p:nvPr/>
+        </p:nvSpPr>
+        <p:spPr>
+          <a:xfrm>
+            <a:off x="7726680" y="2788920"/>
+            <a:ext cx="1775308" cy="640080"/>
+          </a:xfrm>
+          <a:prstGeom prst="rect">
+            <a:avLst/>
+          </a:prstGeom>
+          <a:noFill/>
+          <a:ln/>
+        </p:spPr>
+        <p:txBody>
+          <a:bodyPr wrap="square" lIns="0" tIns="0" rIns="0" bIns="0" rtlCol="0" anchor="t"/>
+          <a:lstStyle/>
+          <a:p>
+            <a:pPr algn="l" indent="0" marL="0">
+              <a:buNone/>
+            </a:pPr>
+            <a:r>
+              <a:rPr lang="en-US" sz="1150" dirty="0">
+                <a:solidFill>
+                  <a:srgbClr val="1B1B1B"/>
+                </a:solidFill>
+              </a:rPr>
+              <a:t>models with utility above zero, every 95 % CI above zero</a:t>
+            </a:r>
+            <a:endParaRPr lang="en-US" sz="1150" dirty="0"/>
+          </a:p>
+        </p:txBody>
+      </p:sp>
+      <p:sp>
+        <p:nvSpPr>
+          <p:cNvPr id="18" name="text"/>
+          <p:cNvSpPr txBox="1"/>
+          <p:nvPr/>
+        </p:nvSpPr>
+        <p:spPr>
+          <a:xfrm>
+            <a:off x="9593428" y="2286000"/>
+            <a:ext cx="1821028" cy="502920"/>
+          </a:xfrm>
+          <a:prstGeom prst="rect">
+            <a:avLst/>
+          </a:prstGeom>
+          <a:noFill/>
+          <a:ln/>
+        </p:spPr>
+        <p:txBody>
+          <a:bodyPr wrap="square" lIns="0" tIns="0" rIns="0" bIns="0" rtlCol="0" anchor="t"/>
+          <a:lstStyle/>
+          <a:p>
+            <a:pPr algn="l" indent="0" marL="0">
+              <a:buNone/>
+            </a:pPr>
+            <a:r>
+              <a:rPr lang="en-US" sz="2200" b="1" dirty="0">
+                <a:solidFill>
+                  <a:srgbClr val="C8102E"/>
+                </a:solidFill>
+              </a:rPr>
+              <a:t>0.08-0.29</a:t>
+            </a:r>
+            <a:endParaRPr lang="en-US" sz="2200" dirty="0"/>
+          </a:p>
+        </p:txBody>
+      </p:sp>
+      <p:sp>
+        <p:nvSpPr>
+          <p:cNvPr id="19" name="text"/>
+          <p:cNvSpPr txBox="1"/>
+          <p:nvPr/>
+        </p:nvSpPr>
+        <p:spPr>
+          <a:xfrm>
+            <a:off x="9593428" y="2788920"/>
+            <a:ext cx="1775308" cy="640080"/>
+          </a:xfrm>
+          <a:prstGeom prst="rect">
+            <a:avLst/>
+          </a:prstGeom>
+          <a:noFill/>
+          <a:ln/>
+        </p:spPr>
+        <p:txBody>
+          <a:bodyPr wrap="square" lIns="0" tIns="0" rIns="0" bIns="0" rtlCol="0" anchor="t"/>
+          <a:lstStyle/>
+          <a:p>
+            <a:pPr algn="l" indent="0" marL="0">
+              <a:buNone/>
+            </a:pPr>
+            <a:r>
+              <a:rPr lang="en-US" sz="1150" dirty="0">
+                <a:solidFill>
+                  <a:srgbClr val="1B1B1B"/>
+                </a:solidFill>
+              </a:rPr>
+              <a:t>utility range across all models</a:t>
+            </a:r>
+            <a:endParaRPr lang="en-US" sz="1150" dirty="0"/>
+          </a:p>
+        </p:txBody>
+      </p:sp>
+      <p:sp>
+        <p:nvSpPr>
+          <p:cNvPr id="20" name="text"/>
+          <p:cNvSpPr txBox="1"/>
+          <p:nvPr/>
+        </p:nvSpPr>
+        <p:spPr>
+          <a:xfrm>
+            <a:off x="7726680" y="3474720"/>
+            <a:ext cx="1821028" cy="502920"/>
+          </a:xfrm>
+          <a:prstGeom prst="rect">
+            <a:avLst/>
+          </a:prstGeom>
+          <a:noFill/>
+          <a:ln/>
+        </p:spPr>
+        <p:txBody>
+          <a:bodyPr wrap="square" lIns="0" tIns="0" rIns="0" bIns="0" rtlCol="0" anchor="t"/>
+          <a:lstStyle/>
+          <a:p>
+            <a:pPr algn="l" indent="0" marL="0">
+              <a:buNone/>
+            </a:pPr>
+            <a:r>
               <a:rPr lang="en-US" sz="2800" b="1" dirty="0">
                 <a:solidFill>
                   <a:srgbClr val="C8102E"/>
                 </a:solidFill>
               </a:rPr>
-              <a:t>0.81</a:t>
+              <a:t>0.23</a:t>
             </a:r>
             <a:endParaRPr lang="en-US" sz="2800" dirty="0"/>
           </a:p>
@@ -9290,14 +9512,14 @@
       </p:sp>
       <p:sp>
         <p:nvSpPr>
-          <p:cNvPr id="15" name="text"/>
-          <p:cNvSpPr txBox="1"/>
-          <p:nvPr/>
-        </p:nvSpPr>
-        <p:spPr>
-          <a:xfrm>
-            <a:off x="7726680" y="2880360"/>
-            <a:ext cx="1775308" cy="548640"/>
+          <p:cNvPr id="21" name="text"/>
+          <p:cNvSpPr txBox="1"/>
+          <p:nvPr/>
+        </p:nvSpPr>
+        <p:spPr>
+          <a:xfrm>
+            <a:off x="7726680" y="3977640"/>
+            <a:ext cx="1775308" cy="640080"/>
           </a:xfrm>
           <a:prstGeom prst="rect">
             <a:avLst/>
@@ -9313,27 +9535,27 @@
               <a:buNone/>
             </a:pPr>
             <a:r>
-              <a:rPr lang="en-US" sz="1200" dirty="0">
+              <a:rPr lang="en-US" sz="1150" dirty="0">
                 <a:solidFill>
                   <a:srgbClr val="1B1B1B"/>
                 </a:solidFill>
               </a:rPr>
-              <a:t>hourly AUROC, 3 seeds</a:t>
-            </a:r>
-            <a:endParaRPr lang="en-US" sz="1200" dirty="0"/>
-          </a:p>
-        </p:txBody>
-      </p:sp>
-      <p:sp>
-        <p:nvSpPr>
-          <p:cNvPr id="16" name="text"/>
-          <p:cNvSpPr txBox="1"/>
-          <p:nvPr/>
-        </p:nvSpPr>
-        <p:spPr>
-          <a:xfrm>
-            <a:off x="9593428" y="2331720"/>
-            <a:ext cx="1821028" cy="548640"/>
+              <a:t>OSTA, 95 % CI 0.13 to 0.34</a:t>
+            </a:r>
+            <a:endParaRPr lang="en-US" sz="1150" dirty="0"/>
+          </a:p>
+        </p:txBody>
+      </p:sp>
+      <p:sp>
+        <p:nvSpPr>
+          <p:cNvPr id="22" name="text"/>
+          <p:cNvSpPr txBox="1"/>
+          <p:nvPr/>
+        </p:nvSpPr>
+        <p:spPr>
+          <a:xfrm>
+            <a:off x="9593428" y="3474720"/>
+            <a:ext cx="1821028" cy="502920"/>
           </a:xfrm>
           <a:prstGeom prst="rect">
             <a:avLst/>
@@ -9354,7 +9576,7 @@
                   <a:srgbClr val="C8102E"/>
                 </a:solidFill>
               </a:rPr>
-              <a:t>5 h</a:t>
+              <a:t>0.15</a:t>
             </a:r>
             <a:endParaRPr lang="en-US" sz="2800" dirty="0"/>
           </a:p>
@@ -9362,14 +9584,14 @@
       </p:sp>
       <p:sp>
         <p:nvSpPr>
-          <p:cNvPr id="17" name="text"/>
-          <p:cNvSpPr txBox="1"/>
-          <p:nvPr/>
-        </p:nvSpPr>
-        <p:spPr>
-          <a:xfrm>
-            <a:off x="9593428" y="2880360"/>
-            <a:ext cx="1775308" cy="548640"/>
+          <p:cNvPr id="23" name="text"/>
+          <p:cNvSpPr txBox="1"/>
+          <p:nvPr/>
+        </p:nvSpPr>
+        <p:spPr>
+          <a:xfrm>
+            <a:off x="9593428" y="3977640"/>
+            <a:ext cx="1775308" cy="640080"/>
           </a:xfrm>
           <a:prstGeom prst="rect">
             <a:avLst/>
@@ -9385,27 +9607,27 @@
               <a:buNone/>
             </a:pPr>
             <a:r>
-              <a:rPr lang="en-US" sz="1200" dirty="0">
+              <a:rPr lang="en-US" sz="1150" dirty="0">
                 <a:solidFill>
                   <a:srgbClr val="1B1B1B"/>
                 </a:solidFill>
               </a:rPr>
-              <a:t>median warning before onset</a:t>
-            </a:r>
-            <a:endParaRPr lang="en-US" sz="1200" dirty="0"/>
-          </a:p>
-        </p:txBody>
-      </p:sp>
-      <p:sp>
-        <p:nvSpPr>
-          <p:cNvPr id="18" name="text"/>
-          <p:cNvSpPr txBox="1"/>
-          <p:nvPr/>
-        </p:nvSpPr>
-        <p:spPr>
-          <a:xfrm>
-            <a:off x="7726680" y="3566160"/>
-            <a:ext cx="1821028" cy="548640"/>
+              <a:t>winner's method, 95 % CI 0.06 to 0.22</a:t>
+            </a:r>
+            <a:endParaRPr lang="en-US" sz="1150" dirty="0"/>
+          </a:p>
+        </p:txBody>
+      </p:sp>
+      <p:sp>
+        <p:nvSpPr>
+          <p:cNvPr id="24" name="text"/>
+          <p:cNvSpPr txBox="1"/>
+          <p:nvPr/>
+        </p:nvSpPr>
+        <p:spPr>
+          <a:xfrm>
+            <a:off x="7726680" y="4709160"/>
+            <a:ext cx="3733495" cy="1005840"/>
           </a:xfrm>
           <a:prstGeom prst="rect">
             <a:avLst/>
@@ -9421,164 +9643,20 @@
               <a:buNone/>
             </a:pPr>
             <a:r>
-              <a:rPr lang="en-US" sz="2800" b="1" dirty="0">
-                <a:solidFill>
-                  <a:srgbClr val="C8102E"/>
-                </a:solidFill>
-              </a:rPr>
-              <a:t>1 in 2</a:t>
-            </a:r>
-            <a:endParaRPr lang="en-US" sz="2800" dirty="0"/>
-          </a:p>
-        </p:txBody>
-      </p:sp>
-      <p:sp>
-        <p:nvSpPr>
-          <p:cNvPr id="19" name="text"/>
-          <p:cNvSpPr txBox="1"/>
-          <p:nvPr/>
-        </p:nvSpPr>
-        <p:spPr>
-          <a:xfrm>
-            <a:off x="7726680" y="4114800"/>
-            <a:ext cx="1775308" cy="548640"/>
-          </a:xfrm>
-          <a:prstGeom prst="rect">
-            <a:avLst/>
-          </a:prstGeom>
-          <a:noFill/>
-          <a:ln/>
-        </p:spPr>
-        <p:txBody>
-          <a:bodyPr wrap="square" lIns="0" tIns="0" rIns="0" bIns="0" rtlCol="0" anchor="t"/>
-          <a:lstStyle/>
-          <a:p>
-            <a:pPr algn="l" indent="0" marL="0">
-              <a:buNone/>
-            </a:pPr>
-            <a:r>
-              <a:rPr lang="en-US" sz="1200" dirty="0">
-                <a:solidFill>
-                  <a:srgbClr val="1B1B1B"/>
-                </a:solidFill>
-              </a:rPr>
-              <a:t>sepsis events caught at 0.5 false alarms a day</a:t>
-            </a:r>
-            <a:endParaRPr lang="en-US" sz="1200" dirty="0"/>
-          </a:p>
-        </p:txBody>
-      </p:sp>
-      <p:sp>
-        <p:nvSpPr>
-          <p:cNvPr id="20" name="text"/>
-          <p:cNvSpPr txBox="1"/>
-          <p:nvPr/>
-        </p:nvSpPr>
-        <p:spPr>
-          <a:xfrm>
-            <a:off x="9593428" y="3566160"/>
-            <a:ext cx="1821028" cy="548640"/>
-          </a:xfrm>
-          <a:prstGeom prst="rect">
-            <a:avLst/>
-          </a:prstGeom>
-          <a:noFill/>
-          <a:ln/>
-        </p:spPr>
-        <p:txBody>
-          <a:bodyPr wrap="square" lIns="0" tIns="0" rIns="0" bIns="0" rtlCol="0" anchor="t"/>
-          <a:lstStyle/>
-          <a:p>
-            <a:pPr algn="l" indent="0" marL="0">
-              <a:buNone/>
-            </a:pPr>
-            <a:r>
-              <a:rPr lang="en-US" sz="2200" b="1" dirty="0">
-                <a:solidFill>
-                  <a:srgbClr val="C8102E"/>
-                </a:solidFill>
-              </a:rPr>
-              <a:t>0.08-0.27</a:t>
-            </a:r>
-            <a:endParaRPr lang="en-US" sz="2200" dirty="0"/>
-          </a:p>
-        </p:txBody>
-      </p:sp>
-      <p:sp>
-        <p:nvSpPr>
-          <p:cNvPr id="21" name="text"/>
-          <p:cNvSpPr txBox="1"/>
-          <p:nvPr/>
-        </p:nvSpPr>
-        <p:spPr>
-          <a:xfrm>
-            <a:off x="9593428" y="4114800"/>
-            <a:ext cx="1775308" cy="548640"/>
-          </a:xfrm>
-          <a:prstGeom prst="rect">
-            <a:avLst/>
-          </a:prstGeom>
-          <a:noFill/>
-          <a:ln/>
-        </p:spPr>
-        <p:txBody>
-          <a:bodyPr wrap="square" lIns="0" tIns="0" rIns="0" bIns="0" rtlCol="0" anchor="t"/>
-          <a:lstStyle/>
-          <a:p>
-            <a:pPr algn="l" indent="0" marL="0">
-              <a:buNone/>
-            </a:pPr>
-            <a:r>
-              <a:rPr lang="en-US" sz="1200" dirty="0">
-                <a:solidFill>
-                  <a:srgbClr val="1B1B1B"/>
-                </a:solidFill>
-              </a:rPr>
-              <a:t>95 % CI of utility 0.18</a:t>
-            </a:r>
-            <a:endParaRPr lang="en-US" sz="1200" dirty="0"/>
-          </a:p>
-        </p:txBody>
-      </p:sp>
-      <p:sp>
-        <p:nvSpPr>
-          <p:cNvPr id="22" name="text"/>
-          <p:cNvSpPr txBox="1"/>
-          <p:nvPr/>
-        </p:nvSpPr>
-        <p:spPr>
-          <a:xfrm>
-            <a:off x="7726680" y="4800600"/>
-            <a:ext cx="3733495" cy="914400"/>
-          </a:xfrm>
-          <a:prstGeom prst="rect">
-            <a:avLst/>
-          </a:prstGeom>
-          <a:noFill/>
-          <a:ln/>
-        </p:spPr>
-        <p:txBody>
-          <a:bodyPr wrap="square" lIns="0" tIns="0" rIns="0" bIns="0" rtlCol="0" anchor="t"/>
-          <a:lstStyle/>
-          <a:p>
-            <a:pPr algn="l" indent="0" marL="0">
-              <a:buNone/>
-            </a:pPr>
-            <a:r>
-              <a:rPr lang="en-US" sz="1200" dirty="0">
+              <a:rPr lang="en-US" sz="1150" dirty="0">
                 <a:solidFill>
                   <a:srgbClr val="5E5E5E"/>
                 </a:solidFill>
               </a:rPr>
-              <a:t>On 10,000-stay samples all neural models reach AUROC 0.80 to 0.81: the full cohort will separate them. The winner's method is being replicated on MIMIC-IV now.</a:t>
-            </a:r>
-            <a:endParaRPr lang="en-US" sz="1200" dirty="0"/>
-          </a:p>
-        </p:txBody>
-      </p:sp>
-      <p:sp>
-        <p:nvSpPr>
-          <p:cNvPr id="23" name="references"/>
+              <a:t>Rules fixed in advance, applied on validation: organ grouping did not beat the same model without it; GRU-D, TCN and flat OSTA shortlisted. Validation and test rankings disagree, so the full cohort decides.</a:t>
+            </a:r>
+            <a:endParaRPr lang="en-US" sz="1150" dirty="0"/>
+          </a:p>
+        </p:txBody>
+      </p:sp>
+      <p:sp>
+        <p:nvSpPr>
+          <p:cNvPr id="25" name="references"/>
           <p:cNvSpPr txBox="1"/>
           <p:nvPr/>
         </p:nvSpPr>
@@ -17504,7 +17582,7 @@
                 <a:ea typeface="Arial" pitchFamily="34" charset="-122"/>
                 <a:cs typeface="Arial" pitchFamily="34" charset="-120"/>
               </a:rPr>
-              <a:t>On 10,000 stays every model overfits within three epochs</a:t>
+              <a:t>On 10,000 stays models overfit fast and the validation split is too small to rank them</a:t>
             </a:r>
             <a:endParaRPr lang="en-US" sz="2400" dirty="0"/>
           </a:p>
@@ -17684,7 +17762,7 @@
                   <a:srgbClr val="C8102E"/>
                 </a:solidFill>
               </a:rPr>
-              <a:t>0.80 to 0.81</a:t>
+              <a:t>0.12 vs 0.28</a:t>
             </a:r>
             <a:endParaRPr lang="en-US" sz="3600" dirty="0"/>
           </a:p>
@@ -17720,7 +17798,7 @@
                   <a:srgbClr val="1B1B1B"/>
                 </a:solidFill>
               </a:rPr>
-              <a:t>AUROC of OSTA, CNN-Transformer, output fusion: differences below seed noise (SD 0.012)</a:t>
+              <a:t>validation utility of OSTA and flat OSTA, which tie on test (0.23): validation and test rankings disagree</a:t>
             </a:r>
             <a:endParaRPr lang="en-US" sz="1400" dirty="0"/>
           </a:p>

--- a/dev/presentation/Elrggal_Mahmoud_SCEBE2026.pptx
+++ b/dev/presentation/Elrggal_Mahmoud_SCEBE2026.pptx
@@ -30,9 +30,11 @@
     <p:sldId id="278" r:id="rId24"/>
     <p:sldId id="279" r:id="rId25"/>
     <p:sldId id="280" r:id="rId26"/>
+    <p:sldId id="281" r:id="rId27"/>
+    <p:sldId id="282" r:id="rId28"/>
   </p:sldIdLst>
   <p:notesMasterIdLst>
-    <p:notesMasterId r:id="rId27"/>
+    <p:notesMasterId r:id="rId29"/>
   </p:notesMasterIdLst>
   <p:sldSz cx="12192000" cy="6858000"/>
   <p:notesSz cx="6858000" cy="12192000"/>
@@ -131,7 +133,7 @@
   <p:extLst>
     <p:ext uri="{521415D9-36F7-43E2-AB2F-B90AF26B5E84}">
       <p14:sectionLst xmlns:p14="http://schemas.microsoft.com/office/powerpoint/2010/main">
-        <p14:section name="Context" id="{eaf57215-b968-68ae-957a-b2fea3dbd97c}">
+        <p14:section name="Context" id="{3e9c826c-a672-7f20-801e-983ec1b5a4fd}">
           <p14:sldIdLst>
             <p14:sldId id="256"/>
             <p14:sldId id="257"/>
@@ -140,7 +142,7 @@
             <p14:sldId id="260"/>
           </p14:sldIdLst>
         </p14:section>
-        <p14:section name="Question and approach" id="{218615e4-fc27-aa34-5ce1-ffb161400dad}">
+        <p14:section name="Question and approach" id="{f8ac2c04-29d4-a52d-49ed-797650485893}">
           <p14:sldIdLst>
             <p14:sldId id="261"/>
             <p14:sldId id="262"/>
@@ -149,24 +151,24 @@
             <p14:sldId id="265"/>
           </p14:sldIdLst>
         </p14:section>
-        <p14:section name="Preliminary results" id="{cd3cc274-6744-c7cd-24da-c8e7323da6cb}">
+        <p14:section name="Preliminary results" id="{b366a3b1-2409-a743-6b9a-d9cb749e3c89}">
           <p14:sldIdLst>
             <p14:sldId id="266"/>
             <p14:sldId id="267"/>
             <p14:sldId id="268"/>
           </p14:sldIdLst>
         </p14:section>
-        <p14:section name="Contribution and next steps" id="{e56940e4-5816-69fe-cadf-22fb9c016459}">
+        <p14:section name="Contribution and next steps" id="{b995f1ea-cfa9-4bf5-5e04-749c57113cf2}">
           <p14:sldIdLst>
             <p14:sldId id="269"/>
           </p14:sldIdLst>
         </p14:section>
-        <p14:section name="Input" id="{a64a9846-2220-233b-9ee1-dc25cb4cc983}">
+        <p14:section name="Input" id="{b2ac687c-848b-3909-87cb-02bc22bbda62}">
           <p14:sldIdLst>
             <p14:sldId id="270"/>
           </p14:sldIdLst>
         </p14:section>
-        <p14:section name="Backup" id="{9818f1a3-2f85-9d30-340d-2a94800a4c6d}">
+        <p14:section name="Backup" id="{b371ebf0-5a24-3e14-fdfb-904622e0f3bf}">
           <p14:sldIdLst>
             <p14:sldId id="271"/>
             <p14:sldId id="272"/>
@@ -178,6 +180,8 @@
             <p14:sldId id="278"/>
             <p14:sldId id="279"/>
             <p14:sldId id="280"/>
+            <p14:sldId id="281"/>
+            <p14:sldId id="282"/>
           </p14:sldIdLst>
         </p14:section>
       </p14:sectionLst>
@@ -3360,6 +3364,182 @@
             <a:fld id="{F7021451-1387-4CA6-816F-3879F97B5CBC}" type="slidenum">
               <a:rPr lang="en-US"/>
               <a:t>25</a:t>
+            </a:fld>
+            <a:endParaRPr lang="en-US"/>
+          </a:p>
+        </p:txBody>
+      </p:sp>
+    </p:spTree>
+    <p:extLst>
+      <p:ext uri="{BB962C8B-B14F-4D97-AF65-F5344CB8AC3E}">
+        <p14:creationId xmlns:p14="http://schemas.microsoft.com/office/powerpoint/2010/main" val="1024086991"/>
+      </p:ext>
+    </p:extLst>
+  </p:cSld>
+  <p:clrMapOvr>
+    <a:masterClrMapping/>
+  </p:clrMapOvr>
+</p:notes>
+</file>
+
+<file path=ppt/notesSlides/notesSlide26.xml><?xml version="1.0" encoding="utf-8"?>
+<p:notes xmlns:a="http://schemas.openxmlformats.org/drawingml/2006/main" xmlns:r="http://schemas.openxmlformats.org/officeDocument/2006/relationships" xmlns:p="http://schemas.openxmlformats.org/presentationml/2006/main">
+  <p:cSld>
+    <p:spTree>
+      <p:nvGrpSpPr>
+        <p:cNvPr id="1" name=""/>
+        <p:cNvGrpSpPr/>
+        <p:nvPr/>
+      </p:nvGrpSpPr>
+      <p:grpSpPr>
+        <a:xfrm>
+          <a:off x="0" y="0"/>
+          <a:ext cx="0" cy="0"/>
+          <a:chOff x="0" y="0"/>
+          <a:chExt cx="0" cy="0"/>
+        </a:xfrm>
+      </p:grpSpPr>
+      <p:sp>
+        <p:nvSpPr>
+          <p:cNvPr id="2" name="Slide Image Placeholder 1"/>
+          <p:cNvSpPr>
+            <a:spLocks noGrp="1" noRot="1" noChangeAspect="1"/>
+          </p:cNvSpPr>
+          <p:nvPr>
+            <p:ph type="sldImg"/>
+          </p:nvPr>
+        </p:nvSpPr>
+        <p:spPr/>
+      </p:sp>
+      <p:sp>
+        <p:nvSpPr>
+          <p:cNvPr id="3" name="Notes Placeholder 2"/>
+          <p:cNvSpPr>
+            <a:spLocks noGrp="1"/>
+          </p:cNvSpPr>
+          <p:nvPr>
+            <p:ph type="body" idx="1"/>
+          </p:nvPr>
+        </p:nvSpPr>
+        <p:spPr/>
+        <p:txBody>
+          <a:bodyPr/>
+          <a:lstStyle/>
+          <a:p>
+            <a:r>
+              <a:rPr lang="en-US" dirty="0"/>
+              <a:t/>
+            </a:r>
+            <a:endParaRPr lang="en-US" dirty="0"/>
+          </a:p>
+        </p:txBody>
+      </p:sp>
+      <p:sp>
+        <p:nvSpPr>
+          <p:cNvPr id="4" name="Slide Number Placeholder 3"/>
+          <p:cNvSpPr>
+            <a:spLocks noGrp="1"/>
+          </p:cNvSpPr>
+          <p:nvPr>
+            <p:ph type="sldNum" sz="quarter" idx="10"/>
+          </p:nvPr>
+        </p:nvSpPr>
+        <p:spPr/>
+        <p:txBody>
+          <a:bodyPr/>
+          <a:lstStyle/>
+          <a:p>
+            <a:fld id="{F7021451-1387-4CA6-816F-3879F97B5CBC}" type="slidenum">
+              <a:rPr lang="en-US"/>
+              <a:t>26</a:t>
+            </a:fld>
+            <a:endParaRPr lang="en-US"/>
+          </a:p>
+        </p:txBody>
+      </p:sp>
+    </p:spTree>
+    <p:extLst>
+      <p:ext uri="{BB962C8B-B14F-4D97-AF65-F5344CB8AC3E}">
+        <p14:creationId xmlns:p14="http://schemas.microsoft.com/office/powerpoint/2010/main" val="1024086991"/>
+      </p:ext>
+    </p:extLst>
+  </p:cSld>
+  <p:clrMapOvr>
+    <a:masterClrMapping/>
+  </p:clrMapOvr>
+</p:notes>
+</file>
+
+<file path=ppt/notesSlides/notesSlide27.xml><?xml version="1.0" encoding="utf-8"?>
+<p:notes xmlns:a="http://schemas.openxmlformats.org/drawingml/2006/main" xmlns:r="http://schemas.openxmlformats.org/officeDocument/2006/relationships" xmlns:p="http://schemas.openxmlformats.org/presentationml/2006/main">
+  <p:cSld>
+    <p:spTree>
+      <p:nvGrpSpPr>
+        <p:cNvPr id="1" name=""/>
+        <p:cNvGrpSpPr/>
+        <p:nvPr/>
+      </p:nvGrpSpPr>
+      <p:grpSpPr>
+        <a:xfrm>
+          <a:off x="0" y="0"/>
+          <a:ext cx="0" cy="0"/>
+          <a:chOff x="0" y="0"/>
+          <a:chExt cx="0" cy="0"/>
+        </a:xfrm>
+      </p:grpSpPr>
+      <p:sp>
+        <p:nvSpPr>
+          <p:cNvPr id="2" name="Slide Image Placeholder 1"/>
+          <p:cNvSpPr>
+            <a:spLocks noGrp="1" noRot="1" noChangeAspect="1"/>
+          </p:cNvSpPr>
+          <p:nvPr>
+            <p:ph type="sldImg"/>
+          </p:nvPr>
+        </p:nvSpPr>
+        <p:spPr/>
+      </p:sp>
+      <p:sp>
+        <p:nvSpPr>
+          <p:cNvPr id="3" name="Notes Placeholder 2"/>
+          <p:cNvSpPr>
+            <a:spLocks noGrp="1"/>
+          </p:cNvSpPr>
+          <p:nvPr>
+            <p:ph type="body" idx="1"/>
+          </p:nvPr>
+        </p:nvSpPr>
+        <p:spPr/>
+        <p:txBody>
+          <a:bodyPr/>
+          <a:lstStyle/>
+          <a:p>
+            <a:r>
+              <a:rPr lang="en-US" dirty="0"/>
+              <a:t/>
+            </a:r>
+            <a:endParaRPr lang="en-US" dirty="0"/>
+          </a:p>
+        </p:txBody>
+      </p:sp>
+      <p:sp>
+        <p:nvSpPr>
+          <p:cNvPr id="4" name="Slide Number Placeholder 3"/>
+          <p:cNvSpPr>
+            <a:spLocks noGrp="1"/>
+          </p:cNvSpPr>
+          <p:nvPr>
+            <p:ph type="sldNum" sz="quarter" idx="10"/>
+          </p:nvPr>
+        </p:nvSpPr>
+        <p:spPr/>
+        <p:txBody>
+          <a:bodyPr/>
+          <a:lstStyle/>
+          <a:p>
+            <a:fld id="{F7021451-1387-4CA6-816F-3879F97B5CBC}" type="slidenum">
+              <a:rPr lang="en-US"/>
+              <a:t>27</a:t>
             </a:fld>
             <a:endParaRPr lang="en-US"/>
           </a:p>
@@ -16276,7 +16456,7 @@
                 <a:ea typeface="Arial" pitchFamily="34" charset="-122"/>
                 <a:cs typeface="Arial" pitchFamily="34" charset="-120"/>
               </a:rPr>
-              <a:t>Cohorts, splits and the sealed holdout</a:t>
+              <a:t>Every model compared (1 of 2): baselines, the winner's method and sequence models</a:t>
             </a:r>
             <a:endParaRPr lang="en-US" sz="2400" dirty="0"/>
           </a:p>
@@ -16284,7 +16464,5249 @@
       </p:sp>
       <p:graphicFrame>
         <p:nvGraphicFramePr>
-          <p:cNvPr id="21" name="cohort table"/>
+          <p:cNvPr id="21" name="models table"/>
+          <p:cNvGraphicFramePr>
+            <a:graphicFrameLocks noGrp="1"/>
+          </p:cNvGraphicFramePr>
+          <p:nvPr>
+            <p:extLst>
+              <p:ext uri="{D42A27DB-BD31-4B8C-83A1-F6EECF244321}">
+                <p14:modId xmlns:p14="http://schemas.microsoft.com/office/powerpoint/2010/main" val="1579011935"/>
+              </p:ext>
+            </p:extLst>
+          </p:nvPr>
+        </p:nvGraphicFramePr>
+        <p:xfrm>
+          <a:off x="548640" y="1417320"/>
+          <a:ext cx="11094415" cy="914400"/>
+        </p:xfrm>
+        <a:graphic>
+          <a:graphicData uri="http://schemas.openxmlformats.org/drawingml/2006/table">
+            <a:tbl>
+              <a:tblPr/>
+              <a:tblGrid>
+                <a:gridCol w="2331720"/>
+                <a:gridCol w="4069080"/>
+                <a:gridCol w="3776472"/>
+                <a:gridCol w="914400"/>
+              </a:tblGrid>
+              <a:tr h="0">
+                <a:tc>
+                  <a:txBody>
+                    <a:bodyPr/>
+                    <a:lstStyle/>
+                    <a:p>
+                      <a:pPr indent="0" marL="0">
+                        <a:buNone/>
+                      </a:pPr>
+                      <a:r>
+                        <a:rPr lang="en-US" sz="1200" b="1" dirty="0">
+                          <a:solidFill>
+                            <a:srgbClr val="FFFFFF"/>
+                          </a:solidFill>
+                          <a:latin typeface="Arial" pitchFamily="34" charset="0"/>
+                          <a:ea typeface="Arial" pitchFamily="34" charset="-122"/>
+                          <a:cs typeface="Arial" pitchFamily="34" charset="-120"/>
+                        </a:rPr>
+                        <a:t>Model</a:t>
+                      </a:r>
+                      <a:endParaRPr lang="en-US" sz="1200" dirty="0">
+                        <a:latin typeface="Arial" charset="0"/>
+                        <a:ea typeface="Arial" charset="0"/>
+                        <a:cs typeface="Arial" charset="0"/>
+                      </a:endParaRPr>
+                    </a:p>
+                  </a:txBody>
+                  <a:tcPr marL="45720" marR="45720" marT="45720" marB="45720" anchor="ctr">
+                    <a:lnL w="9525" cap="flat" cmpd="sng" algn="ctr">
+                      <a:solidFill>
+                        <a:srgbClr val="BDBDBD"/>
+                      </a:solidFill>
+                      <a:prstDash val="solid"/>
+                      <a:round/>
+                      <a:headEnd type="none" w="med" len="med"/>
+                      <a:tailEnd type="none" w="med" len="med"/>
+                    </a:lnL>
+                    <a:lnR w="9525" cap="flat" cmpd="sng" algn="ctr">
+                      <a:solidFill>
+                        <a:srgbClr val="BDBDBD"/>
+                      </a:solidFill>
+                      <a:prstDash val="solid"/>
+                      <a:round/>
+                      <a:headEnd type="none" w="med" len="med"/>
+                      <a:tailEnd type="none" w="med" len="med"/>
+                    </a:lnR>
+                    <a:lnT w="9525" cap="flat" cmpd="sng" algn="ctr">
+                      <a:solidFill>
+                        <a:srgbClr val="BDBDBD"/>
+                      </a:solidFill>
+                      <a:prstDash val="solid"/>
+                      <a:round/>
+                      <a:headEnd type="none" w="med" len="med"/>
+                      <a:tailEnd type="none" w="med" len="med"/>
+                    </a:lnT>
+                    <a:lnB w="9525" cap="flat" cmpd="sng" algn="ctr">
+                      <a:solidFill>
+                        <a:srgbClr val="BDBDBD"/>
+                      </a:solidFill>
+                      <a:prstDash val="solid"/>
+                      <a:round/>
+                      <a:headEnd type="none" w="med" len="med"/>
+                      <a:tailEnd type="none" w="med" len="med"/>
+                    </a:lnB>
+                    <a:solidFill>
+                      <a:srgbClr val="1B1B1B"/>
+                    </a:solidFill>
+                  </a:tcPr>
+                </a:tc>
+                <a:tc>
+                  <a:txBody>
+                    <a:bodyPr/>
+                    <a:lstStyle/>
+                    <a:p>
+                      <a:pPr indent="0" marL="0">
+                        <a:buNone/>
+                      </a:pPr>
+                      <a:r>
+                        <a:rPr lang="en-US" sz="1200" b="1" dirty="0">
+                          <a:solidFill>
+                            <a:srgbClr val="FFFFFF"/>
+                          </a:solidFill>
+                          <a:latin typeface="Arial" pitchFamily="34" charset="0"/>
+                          <a:ea typeface="Arial" pitchFamily="34" charset="-122"/>
+                          <a:cs typeface="Arial" pitchFamily="34" charset="-120"/>
+                        </a:rPr>
+                        <a:t>Core idea</a:t>
+                      </a:r>
+                      <a:endParaRPr lang="en-US" sz="1200" dirty="0">
+                        <a:latin typeface="Arial" charset="0"/>
+                        <a:ea typeface="Arial" charset="0"/>
+                        <a:cs typeface="Arial" charset="0"/>
+                      </a:endParaRPr>
+                    </a:p>
+                  </a:txBody>
+                  <a:tcPr marL="45720" marR="45720" marT="45720" marB="45720" anchor="ctr">
+                    <a:lnL w="9525" cap="flat" cmpd="sng" algn="ctr">
+                      <a:solidFill>
+                        <a:srgbClr val="BDBDBD"/>
+                      </a:solidFill>
+                      <a:prstDash val="solid"/>
+                      <a:round/>
+                      <a:headEnd type="none" w="med" len="med"/>
+                      <a:tailEnd type="none" w="med" len="med"/>
+                    </a:lnL>
+                    <a:lnR w="9525" cap="flat" cmpd="sng" algn="ctr">
+                      <a:solidFill>
+                        <a:srgbClr val="BDBDBD"/>
+                      </a:solidFill>
+                      <a:prstDash val="solid"/>
+                      <a:round/>
+                      <a:headEnd type="none" w="med" len="med"/>
+                      <a:tailEnd type="none" w="med" len="med"/>
+                    </a:lnR>
+                    <a:lnT w="9525" cap="flat" cmpd="sng" algn="ctr">
+                      <a:solidFill>
+                        <a:srgbClr val="BDBDBD"/>
+                      </a:solidFill>
+                      <a:prstDash val="solid"/>
+                      <a:round/>
+                      <a:headEnd type="none" w="med" len="med"/>
+                      <a:tailEnd type="none" w="med" len="med"/>
+                    </a:lnT>
+                    <a:lnB w="9525" cap="flat" cmpd="sng" algn="ctr">
+                      <a:solidFill>
+                        <a:srgbClr val="BDBDBD"/>
+                      </a:solidFill>
+                      <a:prstDash val="solid"/>
+                      <a:round/>
+                      <a:headEnd type="none" w="med" len="med"/>
+                      <a:tailEnd type="none" w="med" len="med"/>
+                    </a:lnB>
+                    <a:solidFill>
+                      <a:srgbClr val="1B1B1B"/>
+                    </a:solidFill>
+                  </a:tcPr>
+                </a:tc>
+                <a:tc>
+                  <a:txBody>
+                    <a:bodyPr/>
+                    <a:lstStyle/>
+                    <a:p>
+                      <a:pPr indent="0" marL="0">
+                        <a:buNone/>
+                      </a:pPr>
+                      <a:r>
+                        <a:rPr lang="en-US" sz="1200" b="1" dirty="0">
+                          <a:solidFill>
+                            <a:srgbClr val="FFFFFF"/>
+                          </a:solidFill>
+                          <a:latin typeface="Arial" pitchFamily="34" charset="0"/>
+                          <a:ea typeface="Arial" pitchFamily="34" charset="-122"/>
+                          <a:cs typeface="Arial" pitchFamily="34" charset="-120"/>
+                        </a:rPr>
+                        <a:t>How it differs</a:t>
+                      </a:r>
+                      <a:endParaRPr lang="en-US" sz="1200" dirty="0">
+                        <a:latin typeface="Arial" charset="0"/>
+                        <a:ea typeface="Arial" charset="0"/>
+                        <a:cs typeface="Arial" charset="0"/>
+                      </a:endParaRPr>
+                    </a:p>
+                  </a:txBody>
+                  <a:tcPr marL="45720" marR="45720" marT="45720" marB="45720" anchor="ctr">
+                    <a:lnL w="9525" cap="flat" cmpd="sng" algn="ctr">
+                      <a:solidFill>
+                        <a:srgbClr val="BDBDBD"/>
+                      </a:solidFill>
+                      <a:prstDash val="solid"/>
+                      <a:round/>
+                      <a:headEnd type="none" w="med" len="med"/>
+                      <a:tailEnd type="none" w="med" len="med"/>
+                    </a:lnL>
+                    <a:lnR w="9525" cap="flat" cmpd="sng" algn="ctr">
+                      <a:solidFill>
+                        <a:srgbClr val="BDBDBD"/>
+                      </a:solidFill>
+                      <a:prstDash val="solid"/>
+                      <a:round/>
+                      <a:headEnd type="none" w="med" len="med"/>
+                      <a:tailEnd type="none" w="med" len="med"/>
+                    </a:lnR>
+                    <a:lnT w="9525" cap="flat" cmpd="sng" algn="ctr">
+                      <a:solidFill>
+                        <a:srgbClr val="BDBDBD"/>
+                      </a:solidFill>
+                      <a:prstDash val="solid"/>
+                      <a:round/>
+                      <a:headEnd type="none" w="med" len="med"/>
+                      <a:tailEnd type="none" w="med" len="med"/>
+                    </a:lnT>
+                    <a:lnB w="9525" cap="flat" cmpd="sng" algn="ctr">
+                      <a:solidFill>
+                        <a:srgbClr val="BDBDBD"/>
+                      </a:solidFill>
+                      <a:prstDash val="solid"/>
+                      <a:round/>
+                      <a:headEnd type="none" w="med" len="med"/>
+                      <a:tailEnd type="none" w="med" len="med"/>
+                    </a:lnB>
+                    <a:solidFill>
+                      <a:srgbClr val="1B1B1B"/>
+                    </a:solidFill>
+                  </a:tcPr>
+                </a:tc>
+                <a:tc>
+                  <a:txBody>
+                    <a:bodyPr/>
+                    <a:lstStyle/>
+                    <a:p>
+                      <a:pPr indent="0" marL="0">
+                        <a:buNone/>
+                      </a:pPr>
+                      <a:r>
+                        <a:rPr lang="en-US" sz="1200" b="1" dirty="0">
+                          <a:solidFill>
+                            <a:srgbClr val="FFFFFF"/>
+                          </a:solidFill>
+                          <a:latin typeface="Arial" pitchFamily="34" charset="0"/>
+                          <a:ea typeface="Arial" pitchFamily="34" charset="-122"/>
+                          <a:cs typeface="Arial" pitchFamily="34" charset="-120"/>
+                        </a:rPr>
+                        <a:t>Utility</a:t>
+                      </a:r>
+                      <a:endParaRPr lang="en-US" sz="1200" dirty="0">
+                        <a:latin typeface="Arial" charset="0"/>
+                        <a:ea typeface="Arial" charset="0"/>
+                        <a:cs typeface="Arial" charset="0"/>
+                      </a:endParaRPr>
+                    </a:p>
+                  </a:txBody>
+                  <a:tcPr marL="45720" marR="45720" marT="45720" marB="45720" anchor="ctr">
+                    <a:lnL w="9525" cap="flat" cmpd="sng" algn="ctr">
+                      <a:solidFill>
+                        <a:srgbClr val="BDBDBD"/>
+                      </a:solidFill>
+                      <a:prstDash val="solid"/>
+                      <a:round/>
+                      <a:headEnd type="none" w="med" len="med"/>
+                      <a:tailEnd type="none" w="med" len="med"/>
+                    </a:lnL>
+                    <a:lnR w="9525" cap="flat" cmpd="sng" algn="ctr">
+                      <a:solidFill>
+                        <a:srgbClr val="BDBDBD"/>
+                      </a:solidFill>
+                      <a:prstDash val="solid"/>
+                      <a:round/>
+                      <a:headEnd type="none" w="med" len="med"/>
+                      <a:tailEnd type="none" w="med" len="med"/>
+                    </a:lnR>
+                    <a:lnT w="9525" cap="flat" cmpd="sng" algn="ctr">
+                      <a:solidFill>
+                        <a:srgbClr val="BDBDBD"/>
+                      </a:solidFill>
+                      <a:prstDash val="solid"/>
+                      <a:round/>
+                      <a:headEnd type="none" w="med" len="med"/>
+                      <a:tailEnd type="none" w="med" len="med"/>
+                    </a:lnT>
+                    <a:lnB w="9525" cap="flat" cmpd="sng" algn="ctr">
+                      <a:solidFill>
+                        <a:srgbClr val="BDBDBD"/>
+                      </a:solidFill>
+                      <a:prstDash val="solid"/>
+                      <a:round/>
+                      <a:headEnd type="none" w="med" len="med"/>
+                      <a:tailEnd type="none" w="med" len="med"/>
+                    </a:lnB>
+                    <a:solidFill>
+                      <a:srgbClr val="1B1B1B"/>
+                    </a:solidFill>
+                  </a:tcPr>
+                </a:tc>
+              </a:tr>
+              <a:tr h="0">
+                <a:tc>
+                  <a:txBody>
+                    <a:bodyPr/>
+                    <a:lstStyle/>
+                    <a:p>
+                      <a:pPr indent="0" marL="0">
+                        <a:buNone/>
+                      </a:pPr>
+                      <a:r>
+                        <a:rPr lang="en-US" sz="1250" b="1" dirty="0">
+                          <a:solidFill>
+                            <a:srgbClr val="1B1B1B"/>
+                          </a:solidFill>
+                          <a:latin typeface="Arial" pitchFamily="34" charset="0"/>
+                          <a:ea typeface="Arial" pitchFamily="34" charset="-122"/>
+                          <a:cs typeface="Arial" pitchFamily="34" charset="-120"/>
+                        </a:rPr>
+                        <a:t>Logistic regression</a:t>
+                      </a:r>
+                      <a:endParaRPr lang="en-US" sz="1250" dirty="0">
+                        <a:latin typeface="Arial" charset="0"/>
+                        <a:ea typeface="Arial" charset="0"/>
+                        <a:cs typeface="Arial" charset="0"/>
+                      </a:endParaRPr>
+                    </a:p>
+                  </a:txBody>
+                  <a:tcPr marL="45720" marR="45720" marT="45720" marB="45720" anchor="ctr">
+                    <a:lnL w="9525" cap="flat" cmpd="sng" algn="ctr">
+                      <a:solidFill>
+                        <a:srgbClr val="BDBDBD"/>
+                      </a:solidFill>
+                      <a:prstDash val="solid"/>
+                      <a:round/>
+                      <a:headEnd type="none" w="med" len="med"/>
+                      <a:tailEnd type="none" w="med" len="med"/>
+                    </a:lnL>
+                    <a:lnR w="9525" cap="flat" cmpd="sng" algn="ctr">
+                      <a:solidFill>
+                        <a:srgbClr val="BDBDBD"/>
+                      </a:solidFill>
+                      <a:prstDash val="solid"/>
+                      <a:round/>
+                      <a:headEnd type="none" w="med" len="med"/>
+                      <a:tailEnd type="none" w="med" len="med"/>
+                    </a:lnR>
+                    <a:lnT w="9525" cap="flat" cmpd="sng" algn="ctr">
+                      <a:solidFill>
+                        <a:srgbClr val="BDBDBD"/>
+                      </a:solidFill>
+                      <a:prstDash val="solid"/>
+                      <a:round/>
+                      <a:headEnd type="none" w="med" len="med"/>
+                      <a:tailEnd type="none" w="med" len="med"/>
+                    </a:lnT>
+                    <a:lnB w="9525" cap="flat" cmpd="sng" algn="ctr">
+                      <a:solidFill>
+                        <a:srgbClr val="BDBDBD"/>
+                      </a:solidFill>
+                      <a:prstDash val="solid"/>
+                      <a:round/>
+                      <a:headEnd type="none" w="med" len="med"/>
+                      <a:tailEnd type="none" w="med" len="med"/>
+                    </a:lnB>
+                  </a:tcPr>
+                </a:tc>
+                <a:tc>
+                  <a:txBody>
+                    <a:bodyPr/>
+                    <a:lstStyle/>
+                    <a:p>
+                      <a:pPr indent="0" marL="0">
+                        <a:buNone/>
+                      </a:pPr>
+                      <a:r>
+                        <a:rPr lang="en-US" sz="1250" dirty="0">
+                          <a:solidFill>
+                            <a:srgbClr val="1B1B1B"/>
+                          </a:solidFill>
+                          <a:latin typeface="Arial" pitchFamily="34" charset="0"/>
+                          <a:ea typeface="Arial" pitchFamily="34" charset="-122"/>
+                          <a:cs typeface="Arial" pitchFamily="34" charset="-120"/>
+                        </a:rPr>
+                        <a:t>One weighted sum of the current hour's predictors</a:t>
+                      </a:r>
+                      <a:endParaRPr lang="en-US" sz="1250" dirty="0">
+                        <a:latin typeface="Arial" charset="0"/>
+                        <a:ea typeface="Arial" charset="0"/>
+                        <a:cs typeface="Arial" charset="0"/>
+                      </a:endParaRPr>
+                    </a:p>
+                  </a:txBody>
+                  <a:tcPr marL="45720" marR="45720" marT="45720" marB="45720" anchor="ctr">
+                    <a:lnL w="9525" cap="flat" cmpd="sng" algn="ctr">
+                      <a:solidFill>
+                        <a:srgbClr val="BDBDBD"/>
+                      </a:solidFill>
+                      <a:prstDash val="solid"/>
+                      <a:round/>
+                      <a:headEnd type="none" w="med" len="med"/>
+                      <a:tailEnd type="none" w="med" len="med"/>
+                    </a:lnL>
+                    <a:lnR w="9525" cap="flat" cmpd="sng" algn="ctr">
+                      <a:solidFill>
+                        <a:srgbClr val="BDBDBD"/>
+                      </a:solidFill>
+                      <a:prstDash val="solid"/>
+                      <a:round/>
+                      <a:headEnd type="none" w="med" len="med"/>
+                      <a:tailEnd type="none" w="med" len="med"/>
+                    </a:lnR>
+                    <a:lnT w="9525" cap="flat" cmpd="sng" algn="ctr">
+                      <a:solidFill>
+                        <a:srgbClr val="BDBDBD"/>
+                      </a:solidFill>
+                      <a:prstDash val="solid"/>
+                      <a:round/>
+                      <a:headEnd type="none" w="med" len="med"/>
+                      <a:tailEnd type="none" w="med" len="med"/>
+                    </a:lnT>
+                    <a:lnB w="9525" cap="flat" cmpd="sng" algn="ctr">
+                      <a:solidFill>
+                        <a:srgbClr val="BDBDBD"/>
+                      </a:solidFill>
+                      <a:prstDash val="solid"/>
+                      <a:round/>
+                      <a:headEnd type="none" w="med" len="med"/>
+                      <a:tailEnd type="none" w="med" len="med"/>
+                    </a:lnB>
+                  </a:tcPr>
+                </a:tc>
+                <a:tc>
+                  <a:txBody>
+                    <a:bodyPr/>
+                    <a:lstStyle/>
+                    <a:p>
+                      <a:pPr indent="0" marL="0">
+                        <a:buNone/>
+                      </a:pPr>
+                      <a:r>
+                        <a:rPr lang="en-US" sz="1250" dirty="0">
+                          <a:solidFill>
+                            <a:srgbClr val="1B1B1B"/>
+                          </a:solidFill>
+                          <a:latin typeface="Arial" pitchFamily="34" charset="0"/>
+                          <a:ea typeface="Arial" pitchFamily="34" charset="-122"/>
+                          <a:cs typeface="Arial" pitchFamily="34" charset="-120"/>
+                        </a:rPr>
+                        <a:t>No time modelling: the floor every model must beat</a:t>
+                      </a:r>
+                      <a:endParaRPr lang="en-US" sz="1250" dirty="0">
+                        <a:latin typeface="Arial" charset="0"/>
+                        <a:ea typeface="Arial" charset="0"/>
+                        <a:cs typeface="Arial" charset="0"/>
+                      </a:endParaRPr>
+                    </a:p>
+                  </a:txBody>
+                  <a:tcPr marL="45720" marR="45720" marT="45720" marB="45720" anchor="ctr">
+                    <a:lnL w="9525" cap="flat" cmpd="sng" algn="ctr">
+                      <a:solidFill>
+                        <a:srgbClr val="BDBDBD"/>
+                      </a:solidFill>
+                      <a:prstDash val="solid"/>
+                      <a:round/>
+                      <a:headEnd type="none" w="med" len="med"/>
+                      <a:tailEnd type="none" w="med" len="med"/>
+                    </a:lnL>
+                    <a:lnR w="9525" cap="flat" cmpd="sng" algn="ctr">
+                      <a:solidFill>
+                        <a:srgbClr val="BDBDBD"/>
+                      </a:solidFill>
+                      <a:prstDash val="solid"/>
+                      <a:round/>
+                      <a:headEnd type="none" w="med" len="med"/>
+                      <a:tailEnd type="none" w="med" len="med"/>
+                    </a:lnR>
+                    <a:lnT w="9525" cap="flat" cmpd="sng" algn="ctr">
+                      <a:solidFill>
+                        <a:srgbClr val="BDBDBD"/>
+                      </a:solidFill>
+                      <a:prstDash val="solid"/>
+                      <a:round/>
+                      <a:headEnd type="none" w="med" len="med"/>
+                      <a:tailEnd type="none" w="med" len="med"/>
+                    </a:lnT>
+                    <a:lnB w="9525" cap="flat" cmpd="sng" algn="ctr">
+                      <a:solidFill>
+                        <a:srgbClr val="BDBDBD"/>
+                      </a:solidFill>
+                      <a:prstDash val="solid"/>
+                      <a:round/>
+                      <a:headEnd type="none" w="med" len="med"/>
+                      <a:tailEnd type="none" w="med" len="med"/>
+                    </a:lnB>
+                  </a:tcPr>
+                </a:tc>
+                <a:tc>
+                  <a:txBody>
+                    <a:bodyPr/>
+                    <a:lstStyle/>
+                    <a:p>
+                      <a:pPr algn="ctr" indent="0" marL="0">
+                        <a:buNone/>
+                      </a:pPr>
+                      <a:r>
+                        <a:rPr lang="en-US" sz="1250" b="1" dirty="0">
+                          <a:solidFill>
+                            <a:srgbClr val="C8102E"/>
+                          </a:solidFill>
+                          <a:latin typeface="Arial" pitchFamily="34" charset="0"/>
+                          <a:ea typeface="Arial" pitchFamily="34" charset="-122"/>
+                          <a:cs typeface="Arial" pitchFamily="34" charset="-120"/>
+                        </a:rPr>
+                        <a:t>0.08</a:t>
+                      </a:r>
+                      <a:endParaRPr lang="en-US" sz="1250" dirty="0">
+                        <a:latin typeface="Arial" charset="0"/>
+                        <a:ea typeface="Arial" charset="0"/>
+                        <a:cs typeface="Arial" charset="0"/>
+                      </a:endParaRPr>
+                    </a:p>
+                  </a:txBody>
+                  <a:tcPr marL="45720" marR="45720" marT="45720" marB="45720" anchor="ctr">
+                    <a:lnL w="9525" cap="flat" cmpd="sng" algn="ctr">
+                      <a:solidFill>
+                        <a:srgbClr val="BDBDBD"/>
+                      </a:solidFill>
+                      <a:prstDash val="solid"/>
+                      <a:round/>
+                      <a:headEnd type="none" w="med" len="med"/>
+                      <a:tailEnd type="none" w="med" len="med"/>
+                    </a:lnL>
+                    <a:lnR w="9525" cap="flat" cmpd="sng" algn="ctr">
+                      <a:solidFill>
+                        <a:srgbClr val="BDBDBD"/>
+                      </a:solidFill>
+                      <a:prstDash val="solid"/>
+                      <a:round/>
+                      <a:headEnd type="none" w="med" len="med"/>
+                      <a:tailEnd type="none" w="med" len="med"/>
+                    </a:lnR>
+                    <a:lnT w="9525" cap="flat" cmpd="sng" algn="ctr">
+                      <a:solidFill>
+                        <a:srgbClr val="BDBDBD"/>
+                      </a:solidFill>
+                      <a:prstDash val="solid"/>
+                      <a:round/>
+                      <a:headEnd type="none" w="med" len="med"/>
+                      <a:tailEnd type="none" w="med" len="med"/>
+                    </a:lnT>
+                    <a:lnB w="9525" cap="flat" cmpd="sng" algn="ctr">
+                      <a:solidFill>
+                        <a:srgbClr val="BDBDBD"/>
+                      </a:solidFill>
+                      <a:prstDash val="solid"/>
+                      <a:round/>
+                      <a:headEnd type="none" w="med" len="med"/>
+                      <a:tailEnd type="none" w="med" len="med"/>
+                    </a:lnB>
+                  </a:tcPr>
+                </a:tc>
+              </a:tr>
+              <a:tr h="0">
+                <a:tc>
+                  <a:txBody>
+                    <a:bodyPr/>
+                    <a:lstStyle/>
+                    <a:p>
+                      <a:pPr indent="0" marL="0">
+                        <a:buNone/>
+                      </a:pPr>
+                      <a:r>
+                        <a:rPr lang="en-US" sz="1250" b="1" dirty="0">
+                          <a:solidFill>
+                            <a:srgbClr val="1B1B1B"/>
+                          </a:solidFill>
+                          <a:latin typeface="Arial" pitchFamily="34" charset="0"/>
+                          <a:ea typeface="Arial" pitchFamily="34" charset="-122"/>
+                          <a:cs typeface="Arial" pitchFamily="34" charset="-120"/>
+                        </a:rPr>
+                        <a:t>Boosted trees [46]</a:t>
+                      </a:r>
+                      <a:endParaRPr lang="en-US" sz="1250" dirty="0">
+                        <a:latin typeface="Arial" charset="0"/>
+                        <a:ea typeface="Arial" charset="0"/>
+                        <a:cs typeface="Arial" charset="0"/>
+                      </a:endParaRPr>
+                    </a:p>
+                  </a:txBody>
+                  <a:tcPr marL="45720" marR="45720" marT="45720" marB="45720" anchor="ctr">
+                    <a:lnL w="9525" cap="flat" cmpd="sng" algn="ctr">
+                      <a:solidFill>
+                        <a:srgbClr val="BDBDBD"/>
+                      </a:solidFill>
+                      <a:prstDash val="solid"/>
+                      <a:round/>
+                      <a:headEnd type="none" w="med" len="med"/>
+                      <a:tailEnd type="none" w="med" len="med"/>
+                    </a:lnL>
+                    <a:lnR w="9525" cap="flat" cmpd="sng" algn="ctr">
+                      <a:solidFill>
+                        <a:srgbClr val="BDBDBD"/>
+                      </a:solidFill>
+                      <a:prstDash val="solid"/>
+                      <a:round/>
+                      <a:headEnd type="none" w="med" len="med"/>
+                      <a:tailEnd type="none" w="med" len="med"/>
+                    </a:lnR>
+                    <a:lnT w="9525" cap="flat" cmpd="sng" algn="ctr">
+                      <a:solidFill>
+                        <a:srgbClr val="BDBDBD"/>
+                      </a:solidFill>
+                      <a:prstDash val="solid"/>
+                      <a:round/>
+                      <a:headEnd type="none" w="med" len="med"/>
+                      <a:tailEnd type="none" w="med" len="med"/>
+                    </a:lnT>
+                    <a:lnB w="9525" cap="flat" cmpd="sng" algn="ctr">
+                      <a:solidFill>
+                        <a:srgbClr val="BDBDBD"/>
+                      </a:solidFill>
+                      <a:prstDash val="solid"/>
+                      <a:round/>
+                      <a:headEnd type="none" w="med" len="med"/>
+                      <a:tailEnd type="none" w="med" len="med"/>
+                    </a:lnB>
+                  </a:tcPr>
+                </a:tc>
+                <a:tc>
+                  <a:txBody>
+                    <a:bodyPr/>
+                    <a:lstStyle/>
+                    <a:p>
+                      <a:pPr indent="0" marL="0">
+                        <a:buNone/>
+                      </a:pPr>
+                      <a:r>
+                        <a:rPr lang="en-US" sz="1250" dirty="0">
+                          <a:solidFill>
+                            <a:srgbClr val="1B1B1B"/>
+                          </a:solidFill>
+                          <a:latin typeface="Arial" pitchFamily="34" charset="0"/>
+                          <a:ea typeface="Arial" pitchFamily="34" charset="-122"/>
+                          <a:cs typeface="Arial" pitchFamily="34" charset="-120"/>
+                        </a:rPr>
+                        <a:t>Many small decision trees, each correcting the last</a:t>
+                      </a:r>
+                      <a:endParaRPr lang="en-US" sz="1250" dirty="0">
+                        <a:latin typeface="Arial" charset="0"/>
+                        <a:ea typeface="Arial" charset="0"/>
+                        <a:cs typeface="Arial" charset="0"/>
+                      </a:endParaRPr>
+                    </a:p>
+                  </a:txBody>
+                  <a:tcPr marL="45720" marR="45720" marT="45720" marB="45720" anchor="ctr">
+                    <a:lnL w="9525" cap="flat" cmpd="sng" algn="ctr">
+                      <a:solidFill>
+                        <a:srgbClr val="BDBDBD"/>
+                      </a:solidFill>
+                      <a:prstDash val="solid"/>
+                      <a:round/>
+                      <a:headEnd type="none" w="med" len="med"/>
+                      <a:tailEnd type="none" w="med" len="med"/>
+                    </a:lnL>
+                    <a:lnR w="9525" cap="flat" cmpd="sng" algn="ctr">
+                      <a:solidFill>
+                        <a:srgbClr val="BDBDBD"/>
+                      </a:solidFill>
+                      <a:prstDash val="solid"/>
+                      <a:round/>
+                      <a:headEnd type="none" w="med" len="med"/>
+                      <a:tailEnd type="none" w="med" len="med"/>
+                    </a:lnR>
+                    <a:lnT w="9525" cap="flat" cmpd="sng" algn="ctr">
+                      <a:solidFill>
+                        <a:srgbClr val="BDBDBD"/>
+                      </a:solidFill>
+                      <a:prstDash val="solid"/>
+                      <a:round/>
+                      <a:headEnd type="none" w="med" len="med"/>
+                      <a:tailEnd type="none" w="med" len="med"/>
+                    </a:lnT>
+                    <a:lnB w="9525" cap="flat" cmpd="sng" algn="ctr">
+                      <a:solidFill>
+                        <a:srgbClr val="BDBDBD"/>
+                      </a:solidFill>
+                      <a:prstDash val="solid"/>
+                      <a:round/>
+                      <a:headEnd type="none" w="med" len="med"/>
+                      <a:tailEnd type="none" w="med" len="med"/>
+                    </a:lnB>
+                  </a:tcPr>
+                </a:tc>
+                <a:tc>
+                  <a:txBody>
+                    <a:bodyPr/>
+                    <a:lstStyle/>
+                    <a:p>
+                      <a:pPr indent="0" marL="0">
+                        <a:buNone/>
+                      </a:pPr>
+                      <a:r>
+                        <a:rPr lang="en-US" sz="1250" dirty="0">
+                          <a:solidFill>
+                            <a:srgbClr val="1B1B1B"/>
+                          </a:solidFill>
+                          <a:latin typeface="Arial" pitchFamily="34" charset="0"/>
+                          <a:ea typeface="Arial" pitchFamily="34" charset="-122"/>
+                          <a:cs typeface="Arial" pitchFamily="34" charset="-120"/>
+                        </a:rPr>
+                        <a:t>Non-linear thresholds, but sees one hour at a time</a:t>
+                      </a:r>
+                      <a:endParaRPr lang="en-US" sz="1250" dirty="0">
+                        <a:latin typeface="Arial" charset="0"/>
+                        <a:ea typeface="Arial" charset="0"/>
+                        <a:cs typeface="Arial" charset="0"/>
+                      </a:endParaRPr>
+                    </a:p>
+                  </a:txBody>
+                  <a:tcPr marL="45720" marR="45720" marT="45720" marB="45720" anchor="ctr">
+                    <a:lnL w="9525" cap="flat" cmpd="sng" algn="ctr">
+                      <a:solidFill>
+                        <a:srgbClr val="BDBDBD"/>
+                      </a:solidFill>
+                      <a:prstDash val="solid"/>
+                      <a:round/>
+                      <a:headEnd type="none" w="med" len="med"/>
+                      <a:tailEnd type="none" w="med" len="med"/>
+                    </a:lnL>
+                    <a:lnR w="9525" cap="flat" cmpd="sng" algn="ctr">
+                      <a:solidFill>
+                        <a:srgbClr val="BDBDBD"/>
+                      </a:solidFill>
+                      <a:prstDash val="solid"/>
+                      <a:round/>
+                      <a:headEnd type="none" w="med" len="med"/>
+                      <a:tailEnd type="none" w="med" len="med"/>
+                    </a:lnR>
+                    <a:lnT w="9525" cap="flat" cmpd="sng" algn="ctr">
+                      <a:solidFill>
+                        <a:srgbClr val="BDBDBD"/>
+                      </a:solidFill>
+                      <a:prstDash val="solid"/>
+                      <a:round/>
+                      <a:headEnd type="none" w="med" len="med"/>
+                      <a:tailEnd type="none" w="med" len="med"/>
+                    </a:lnT>
+                    <a:lnB w="9525" cap="flat" cmpd="sng" algn="ctr">
+                      <a:solidFill>
+                        <a:srgbClr val="BDBDBD"/>
+                      </a:solidFill>
+                      <a:prstDash val="solid"/>
+                      <a:round/>
+                      <a:headEnd type="none" w="med" len="med"/>
+                      <a:tailEnd type="none" w="med" len="med"/>
+                    </a:lnB>
+                  </a:tcPr>
+                </a:tc>
+                <a:tc>
+                  <a:txBody>
+                    <a:bodyPr/>
+                    <a:lstStyle/>
+                    <a:p>
+                      <a:pPr algn="ctr" indent="0" marL="0">
+                        <a:buNone/>
+                      </a:pPr>
+                      <a:r>
+                        <a:rPr lang="en-US" sz="1250" b="1" dirty="0">
+                          <a:solidFill>
+                            <a:srgbClr val="C8102E"/>
+                          </a:solidFill>
+                          <a:latin typeface="Arial" pitchFamily="34" charset="0"/>
+                          <a:ea typeface="Arial" pitchFamily="34" charset="-122"/>
+                          <a:cs typeface="Arial" pitchFamily="34" charset="-120"/>
+                        </a:rPr>
+                        <a:t>0.10</a:t>
+                      </a:r>
+                      <a:endParaRPr lang="en-US" sz="1250" dirty="0">
+                        <a:latin typeface="Arial" charset="0"/>
+                        <a:ea typeface="Arial" charset="0"/>
+                        <a:cs typeface="Arial" charset="0"/>
+                      </a:endParaRPr>
+                    </a:p>
+                  </a:txBody>
+                  <a:tcPr marL="45720" marR="45720" marT="45720" marB="45720" anchor="ctr">
+                    <a:lnL w="9525" cap="flat" cmpd="sng" algn="ctr">
+                      <a:solidFill>
+                        <a:srgbClr val="BDBDBD"/>
+                      </a:solidFill>
+                      <a:prstDash val="solid"/>
+                      <a:round/>
+                      <a:headEnd type="none" w="med" len="med"/>
+                      <a:tailEnd type="none" w="med" len="med"/>
+                    </a:lnL>
+                    <a:lnR w="9525" cap="flat" cmpd="sng" algn="ctr">
+                      <a:solidFill>
+                        <a:srgbClr val="BDBDBD"/>
+                      </a:solidFill>
+                      <a:prstDash val="solid"/>
+                      <a:round/>
+                      <a:headEnd type="none" w="med" len="med"/>
+                      <a:tailEnd type="none" w="med" len="med"/>
+                    </a:lnR>
+                    <a:lnT w="9525" cap="flat" cmpd="sng" algn="ctr">
+                      <a:solidFill>
+                        <a:srgbClr val="BDBDBD"/>
+                      </a:solidFill>
+                      <a:prstDash val="solid"/>
+                      <a:round/>
+                      <a:headEnd type="none" w="med" len="med"/>
+                      <a:tailEnd type="none" w="med" len="med"/>
+                    </a:lnT>
+                    <a:lnB w="9525" cap="flat" cmpd="sng" algn="ctr">
+                      <a:solidFill>
+                        <a:srgbClr val="BDBDBD"/>
+                      </a:solidFill>
+                      <a:prstDash val="solid"/>
+                      <a:round/>
+                      <a:headEnd type="none" w="med" len="med"/>
+                      <a:tailEnd type="none" w="med" len="med"/>
+                    </a:lnB>
+                  </a:tcPr>
+                </a:tc>
+              </a:tr>
+              <a:tr h="0">
+                <a:tc>
+                  <a:txBody>
+                    <a:bodyPr/>
+                    <a:lstStyle/>
+                    <a:p>
+                      <a:pPr indent="0" marL="0">
+                        <a:buNone/>
+                      </a:pPr>
+                      <a:r>
+                        <a:rPr lang="en-US" sz="1250" b="1" dirty="0">
+                          <a:solidFill>
+                            <a:srgbClr val="1B1B1B"/>
+                          </a:solidFill>
+                          <a:latin typeface="Arial" pitchFamily="34" charset="0"/>
+                          <a:ea typeface="Arial" pitchFamily="34" charset="-122"/>
+                          <a:cs typeface="Arial" pitchFamily="34" charset="-120"/>
+                        </a:rPr>
+                        <a:t>Signatures + boosted trees [21]</a:t>
+                      </a:r>
+                      <a:endParaRPr lang="en-US" sz="1250" dirty="0">
+                        <a:latin typeface="Arial" charset="0"/>
+                        <a:ea typeface="Arial" charset="0"/>
+                        <a:cs typeface="Arial" charset="0"/>
+                      </a:endParaRPr>
+                    </a:p>
+                  </a:txBody>
+                  <a:tcPr marL="45720" marR="45720" marT="45720" marB="45720" anchor="ctr">
+                    <a:lnL w="9525" cap="flat" cmpd="sng" algn="ctr">
+                      <a:solidFill>
+                        <a:srgbClr val="BDBDBD"/>
+                      </a:solidFill>
+                      <a:prstDash val="solid"/>
+                      <a:round/>
+                      <a:headEnd type="none" w="med" len="med"/>
+                      <a:tailEnd type="none" w="med" len="med"/>
+                    </a:lnL>
+                    <a:lnR w="9525" cap="flat" cmpd="sng" algn="ctr">
+                      <a:solidFill>
+                        <a:srgbClr val="BDBDBD"/>
+                      </a:solidFill>
+                      <a:prstDash val="solid"/>
+                      <a:round/>
+                      <a:headEnd type="none" w="med" len="med"/>
+                      <a:tailEnd type="none" w="med" len="med"/>
+                    </a:lnR>
+                    <a:lnT w="9525" cap="flat" cmpd="sng" algn="ctr">
+                      <a:solidFill>
+                        <a:srgbClr val="BDBDBD"/>
+                      </a:solidFill>
+                      <a:prstDash val="solid"/>
+                      <a:round/>
+                      <a:headEnd type="none" w="med" len="med"/>
+                      <a:tailEnd type="none" w="med" len="med"/>
+                    </a:lnT>
+                    <a:lnB w="9525" cap="flat" cmpd="sng" algn="ctr">
+                      <a:solidFill>
+                        <a:srgbClr val="BDBDBD"/>
+                      </a:solidFill>
+                      <a:prstDash val="solid"/>
+                      <a:round/>
+                      <a:headEnd type="none" w="med" len="med"/>
+                      <a:tailEnd type="none" w="med" len="med"/>
+                    </a:lnB>
+                  </a:tcPr>
+                </a:tc>
+                <a:tc>
+                  <a:txBody>
+                    <a:bodyPr/>
+                    <a:lstStyle/>
+                    <a:p>
+                      <a:pPr indent="0" marL="0">
+                        <a:buNone/>
+                      </a:pPr>
+                      <a:r>
+                        <a:rPr lang="en-US" sz="1250" dirty="0">
+                          <a:solidFill>
+                            <a:srgbClr val="1B1B1B"/>
+                          </a:solidFill>
+                          <a:latin typeface="Arial" pitchFamily="34" charset="0"/>
+                          <a:ea typeface="Arial" pitchFamily="34" charset="-122"/>
+                          <a:cs typeface="Arial" pitchFamily="34" charset="-120"/>
+                        </a:rPr>
+                        <a:t>Recent trajectories summarised as path signatures, then boosted trees</a:t>
+                      </a:r>
+                      <a:endParaRPr lang="en-US" sz="1250" dirty="0">
+                        <a:latin typeface="Arial" charset="0"/>
+                        <a:ea typeface="Arial" charset="0"/>
+                        <a:cs typeface="Arial" charset="0"/>
+                      </a:endParaRPr>
+                    </a:p>
+                  </a:txBody>
+                  <a:tcPr marL="45720" marR="45720" marT="45720" marB="45720" anchor="ctr">
+                    <a:lnL w="9525" cap="flat" cmpd="sng" algn="ctr">
+                      <a:solidFill>
+                        <a:srgbClr val="BDBDBD"/>
+                      </a:solidFill>
+                      <a:prstDash val="solid"/>
+                      <a:round/>
+                      <a:headEnd type="none" w="med" len="med"/>
+                      <a:tailEnd type="none" w="med" len="med"/>
+                    </a:lnL>
+                    <a:lnR w="9525" cap="flat" cmpd="sng" algn="ctr">
+                      <a:solidFill>
+                        <a:srgbClr val="BDBDBD"/>
+                      </a:solidFill>
+                      <a:prstDash val="solid"/>
+                      <a:round/>
+                      <a:headEnd type="none" w="med" len="med"/>
+                      <a:tailEnd type="none" w="med" len="med"/>
+                    </a:lnR>
+                    <a:lnT w="9525" cap="flat" cmpd="sng" algn="ctr">
+                      <a:solidFill>
+                        <a:srgbClr val="BDBDBD"/>
+                      </a:solidFill>
+                      <a:prstDash val="solid"/>
+                      <a:round/>
+                      <a:headEnd type="none" w="med" len="med"/>
+                      <a:tailEnd type="none" w="med" len="med"/>
+                    </a:lnT>
+                    <a:lnB w="9525" cap="flat" cmpd="sng" algn="ctr">
+                      <a:solidFill>
+                        <a:srgbClr val="BDBDBD"/>
+                      </a:solidFill>
+                      <a:prstDash val="solid"/>
+                      <a:round/>
+                      <a:headEnd type="none" w="med" len="med"/>
+                      <a:tailEnd type="none" w="med" len="med"/>
+                    </a:lnB>
+                  </a:tcPr>
+                </a:tc>
+                <a:tc>
+                  <a:txBody>
+                    <a:bodyPr/>
+                    <a:lstStyle/>
+                    <a:p>
+                      <a:pPr indent="0" marL="0">
+                        <a:buNone/>
+                      </a:pPr>
+                      <a:r>
+                        <a:rPr lang="en-US" sz="1250" dirty="0">
+                          <a:solidFill>
+                            <a:srgbClr val="1B1B1B"/>
+                          </a:solidFill>
+                          <a:latin typeface="Arial" pitchFamily="34" charset="0"/>
+                          <a:ea typeface="Arial" pitchFamily="34" charset="-122"/>
+                          <a:cs typeface="Arial" pitchFamily="34" charset="-120"/>
+                        </a:rPr>
+                        <a:t>The PhysioNet 2019 winner's method; time enters through fixed summaries</a:t>
+                      </a:r>
+                      <a:endParaRPr lang="en-US" sz="1250" dirty="0">
+                        <a:latin typeface="Arial" charset="0"/>
+                        <a:ea typeface="Arial" charset="0"/>
+                        <a:cs typeface="Arial" charset="0"/>
+                      </a:endParaRPr>
+                    </a:p>
+                  </a:txBody>
+                  <a:tcPr marL="45720" marR="45720" marT="45720" marB="45720" anchor="ctr">
+                    <a:lnL w="9525" cap="flat" cmpd="sng" algn="ctr">
+                      <a:solidFill>
+                        <a:srgbClr val="BDBDBD"/>
+                      </a:solidFill>
+                      <a:prstDash val="solid"/>
+                      <a:round/>
+                      <a:headEnd type="none" w="med" len="med"/>
+                      <a:tailEnd type="none" w="med" len="med"/>
+                    </a:lnL>
+                    <a:lnR w="9525" cap="flat" cmpd="sng" algn="ctr">
+                      <a:solidFill>
+                        <a:srgbClr val="BDBDBD"/>
+                      </a:solidFill>
+                      <a:prstDash val="solid"/>
+                      <a:round/>
+                      <a:headEnd type="none" w="med" len="med"/>
+                      <a:tailEnd type="none" w="med" len="med"/>
+                    </a:lnR>
+                    <a:lnT w="9525" cap="flat" cmpd="sng" algn="ctr">
+                      <a:solidFill>
+                        <a:srgbClr val="BDBDBD"/>
+                      </a:solidFill>
+                      <a:prstDash val="solid"/>
+                      <a:round/>
+                      <a:headEnd type="none" w="med" len="med"/>
+                      <a:tailEnd type="none" w="med" len="med"/>
+                    </a:lnT>
+                    <a:lnB w="9525" cap="flat" cmpd="sng" algn="ctr">
+                      <a:solidFill>
+                        <a:srgbClr val="BDBDBD"/>
+                      </a:solidFill>
+                      <a:prstDash val="solid"/>
+                      <a:round/>
+                      <a:headEnd type="none" w="med" len="med"/>
+                      <a:tailEnd type="none" w="med" len="med"/>
+                    </a:lnB>
+                  </a:tcPr>
+                </a:tc>
+                <a:tc>
+                  <a:txBody>
+                    <a:bodyPr/>
+                    <a:lstStyle/>
+                    <a:p>
+                      <a:pPr algn="ctr" indent="0" marL="0">
+                        <a:buNone/>
+                      </a:pPr>
+                      <a:r>
+                        <a:rPr lang="en-US" sz="1250" b="1" dirty="0">
+                          <a:solidFill>
+                            <a:srgbClr val="C8102E"/>
+                          </a:solidFill>
+                          <a:latin typeface="Arial" pitchFamily="34" charset="0"/>
+                          <a:ea typeface="Arial" pitchFamily="34" charset="-122"/>
+                          <a:cs typeface="Arial" pitchFamily="34" charset="-120"/>
+                        </a:rPr>
+                        <a:t>0.15</a:t>
+                      </a:r>
+                      <a:endParaRPr lang="en-US" sz="1250" dirty="0">
+                        <a:latin typeface="Arial" charset="0"/>
+                        <a:ea typeface="Arial" charset="0"/>
+                        <a:cs typeface="Arial" charset="0"/>
+                      </a:endParaRPr>
+                    </a:p>
+                  </a:txBody>
+                  <a:tcPr marL="45720" marR="45720" marT="45720" marB="45720" anchor="ctr">
+                    <a:lnL w="9525" cap="flat" cmpd="sng" algn="ctr">
+                      <a:solidFill>
+                        <a:srgbClr val="BDBDBD"/>
+                      </a:solidFill>
+                      <a:prstDash val="solid"/>
+                      <a:round/>
+                      <a:headEnd type="none" w="med" len="med"/>
+                      <a:tailEnd type="none" w="med" len="med"/>
+                    </a:lnL>
+                    <a:lnR w="9525" cap="flat" cmpd="sng" algn="ctr">
+                      <a:solidFill>
+                        <a:srgbClr val="BDBDBD"/>
+                      </a:solidFill>
+                      <a:prstDash val="solid"/>
+                      <a:round/>
+                      <a:headEnd type="none" w="med" len="med"/>
+                      <a:tailEnd type="none" w="med" len="med"/>
+                    </a:lnR>
+                    <a:lnT w="9525" cap="flat" cmpd="sng" algn="ctr">
+                      <a:solidFill>
+                        <a:srgbClr val="BDBDBD"/>
+                      </a:solidFill>
+                      <a:prstDash val="solid"/>
+                      <a:round/>
+                      <a:headEnd type="none" w="med" len="med"/>
+                      <a:tailEnd type="none" w="med" len="med"/>
+                    </a:lnT>
+                    <a:lnB w="9525" cap="flat" cmpd="sng" algn="ctr">
+                      <a:solidFill>
+                        <a:srgbClr val="BDBDBD"/>
+                      </a:solidFill>
+                      <a:prstDash val="solid"/>
+                      <a:round/>
+                      <a:headEnd type="none" w="med" len="med"/>
+                      <a:tailEnd type="none" w="med" len="med"/>
+                    </a:lnB>
+                  </a:tcPr>
+                </a:tc>
+              </a:tr>
+              <a:tr h="0">
+                <a:tc>
+                  <a:txBody>
+                    <a:bodyPr/>
+                    <a:lstStyle/>
+                    <a:p>
+                      <a:pPr indent="0" marL="0">
+                        <a:buNone/>
+                      </a:pPr>
+                      <a:r>
+                        <a:rPr lang="en-US" sz="1250" b="1" dirty="0">
+                          <a:solidFill>
+                            <a:srgbClr val="1B1B1B"/>
+                          </a:solidFill>
+                          <a:latin typeface="Arial" pitchFamily="34" charset="0"/>
+                          <a:ea typeface="Arial" pitchFamily="34" charset="-122"/>
+                          <a:cs typeface="Arial" pitchFamily="34" charset="-120"/>
+                        </a:rPr>
+                        <a:t>OSTA (earlier work)</a:t>
+                      </a:r>
+                      <a:endParaRPr lang="en-US" sz="1250" dirty="0">
+                        <a:latin typeface="Arial" charset="0"/>
+                        <a:ea typeface="Arial" charset="0"/>
+                        <a:cs typeface="Arial" charset="0"/>
+                      </a:endParaRPr>
+                    </a:p>
+                  </a:txBody>
+                  <a:tcPr marL="45720" marR="45720" marT="45720" marB="45720" anchor="ctr">
+                    <a:lnL w="9525" cap="flat" cmpd="sng" algn="ctr">
+                      <a:solidFill>
+                        <a:srgbClr val="BDBDBD"/>
+                      </a:solidFill>
+                      <a:prstDash val="solid"/>
+                      <a:round/>
+                      <a:headEnd type="none" w="med" len="med"/>
+                      <a:tailEnd type="none" w="med" len="med"/>
+                    </a:lnL>
+                    <a:lnR w="9525" cap="flat" cmpd="sng" algn="ctr">
+                      <a:solidFill>
+                        <a:srgbClr val="BDBDBD"/>
+                      </a:solidFill>
+                      <a:prstDash val="solid"/>
+                      <a:round/>
+                      <a:headEnd type="none" w="med" len="med"/>
+                      <a:tailEnd type="none" w="med" len="med"/>
+                    </a:lnR>
+                    <a:lnT w="9525" cap="flat" cmpd="sng" algn="ctr">
+                      <a:solidFill>
+                        <a:srgbClr val="BDBDBD"/>
+                      </a:solidFill>
+                      <a:prstDash val="solid"/>
+                      <a:round/>
+                      <a:headEnd type="none" w="med" len="med"/>
+                      <a:tailEnd type="none" w="med" len="med"/>
+                    </a:lnT>
+                    <a:lnB w="9525" cap="flat" cmpd="sng" algn="ctr">
+                      <a:solidFill>
+                        <a:srgbClr val="BDBDBD"/>
+                      </a:solidFill>
+                      <a:prstDash val="solid"/>
+                      <a:round/>
+                      <a:headEnd type="none" w="med" len="med"/>
+                      <a:tailEnd type="none" w="med" len="med"/>
+                    </a:lnB>
+                  </a:tcPr>
+                </a:tc>
+                <a:tc>
+                  <a:txBody>
+                    <a:bodyPr/>
+                    <a:lstStyle/>
+                    <a:p>
+                      <a:pPr indent="0" marL="0">
+                        <a:buNone/>
+                      </a:pPr>
+                      <a:r>
+                        <a:rPr lang="en-US" sz="1250" dirty="0">
+                          <a:solidFill>
+                            <a:srgbClr val="1B1B1B"/>
+                          </a:solidFill>
+                          <a:latin typeface="Arial" pitchFamily="34" charset="0"/>
+                          <a:ea typeface="Arial" pitchFamily="34" charset="-122"/>
+                          <a:cs typeface="Arial" pitchFamily="34" charset="-120"/>
+                        </a:rPr>
+                        <a:t>Predictors grouped by organ, attention over time per organ, then across organs</a:t>
+                      </a:r>
+                      <a:endParaRPr lang="en-US" sz="1250" dirty="0">
+                        <a:latin typeface="Arial" charset="0"/>
+                        <a:ea typeface="Arial" charset="0"/>
+                        <a:cs typeface="Arial" charset="0"/>
+                      </a:endParaRPr>
+                    </a:p>
+                  </a:txBody>
+                  <a:tcPr marL="45720" marR="45720" marT="45720" marB="45720" anchor="ctr">
+                    <a:lnL w="9525" cap="flat" cmpd="sng" algn="ctr">
+                      <a:solidFill>
+                        <a:srgbClr val="BDBDBD"/>
+                      </a:solidFill>
+                      <a:prstDash val="solid"/>
+                      <a:round/>
+                      <a:headEnd type="none" w="med" len="med"/>
+                      <a:tailEnd type="none" w="med" len="med"/>
+                    </a:lnL>
+                    <a:lnR w="9525" cap="flat" cmpd="sng" algn="ctr">
+                      <a:solidFill>
+                        <a:srgbClr val="BDBDBD"/>
+                      </a:solidFill>
+                      <a:prstDash val="solid"/>
+                      <a:round/>
+                      <a:headEnd type="none" w="med" len="med"/>
+                      <a:tailEnd type="none" w="med" len="med"/>
+                    </a:lnR>
+                    <a:lnT w="9525" cap="flat" cmpd="sng" algn="ctr">
+                      <a:solidFill>
+                        <a:srgbClr val="BDBDBD"/>
+                      </a:solidFill>
+                      <a:prstDash val="solid"/>
+                      <a:round/>
+                      <a:headEnd type="none" w="med" len="med"/>
+                      <a:tailEnd type="none" w="med" len="med"/>
+                    </a:lnT>
+                    <a:lnB w="9525" cap="flat" cmpd="sng" algn="ctr">
+                      <a:solidFill>
+                        <a:srgbClr val="BDBDBD"/>
+                      </a:solidFill>
+                      <a:prstDash val="solid"/>
+                      <a:round/>
+                      <a:headEnd type="none" w="med" len="med"/>
+                      <a:tailEnd type="none" w="med" len="med"/>
+                    </a:lnB>
+                  </a:tcPr>
+                </a:tc>
+                <a:tc>
+                  <a:txBody>
+                    <a:bodyPr/>
+                    <a:lstStyle/>
+                    <a:p>
+                      <a:pPr indent="0" marL="0">
+                        <a:buNone/>
+                      </a:pPr>
+                      <a:r>
+                        <a:rPr lang="en-US" sz="1250" dirty="0">
+                          <a:solidFill>
+                            <a:srgbClr val="1B1B1B"/>
+                          </a:solidFill>
+                          <a:latin typeface="Arial" pitchFamily="34" charset="0"/>
+                          <a:ea typeface="Arial" pitchFamily="34" charset="-122"/>
+                          <a:cs typeface="Arial" pitchFamily="34" charset="-120"/>
+                        </a:rPr>
+                        <a:t>The reference model; risk per organ</a:t>
+                      </a:r>
+                      <a:endParaRPr lang="en-US" sz="1250" dirty="0">
+                        <a:latin typeface="Arial" charset="0"/>
+                        <a:ea typeface="Arial" charset="0"/>
+                        <a:cs typeface="Arial" charset="0"/>
+                      </a:endParaRPr>
+                    </a:p>
+                  </a:txBody>
+                  <a:tcPr marL="45720" marR="45720" marT="45720" marB="45720" anchor="ctr">
+                    <a:lnL w="9525" cap="flat" cmpd="sng" algn="ctr">
+                      <a:solidFill>
+                        <a:srgbClr val="BDBDBD"/>
+                      </a:solidFill>
+                      <a:prstDash val="solid"/>
+                      <a:round/>
+                      <a:headEnd type="none" w="med" len="med"/>
+                      <a:tailEnd type="none" w="med" len="med"/>
+                    </a:lnL>
+                    <a:lnR w="9525" cap="flat" cmpd="sng" algn="ctr">
+                      <a:solidFill>
+                        <a:srgbClr val="BDBDBD"/>
+                      </a:solidFill>
+                      <a:prstDash val="solid"/>
+                      <a:round/>
+                      <a:headEnd type="none" w="med" len="med"/>
+                      <a:tailEnd type="none" w="med" len="med"/>
+                    </a:lnR>
+                    <a:lnT w="9525" cap="flat" cmpd="sng" algn="ctr">
+                      <a:solidFill>
+                        <a:srgbClr val="BDBDBD"/>
+                      </a:solidFill>
+                      <a:prstDash val="solid"/>
+                      <a:round/>
+                      <a:headEnd type="none" w="med" len="med"/>
+                      <a:tailEnd type="none" w="med" len="med"/>
+                    </a:lnT>
+                    <a:lnB w="9525" cap="flat" cmpd="sng" algn="ctr">
+                      <a:solidFill>
+                        <a:srgbClr val="BDBDBD"/>
+                      </a:solidFill>
+                      <a:prstDash val="solid"/>
+                      <a:round/>
+                      <a:headEnd type="none" w="med" len="med"/>
+                      <a:tailEnd type="none" w="med" len="med"/>
+                    </a:lnB>
+                  </a:tcPr>
+                </a:tc>
+                <a:tc>
+                  <a:txBody>
+                    <a:bodyPr/>
+                    <a:lstStyle/>
+                    <a:p>
+                      <a:pPr algn="ctr" indent="0" marL="0">
+                        <a:buNone/>
+                      </a:pPr>
+                      <a:r>
+                        <a:rPr lang="en-US" sz="1250" b="1" dirty="0">
+                          <a:solidFill>
+                            <a:srgbClr val="C8102E"/>
+                          </a:solidFill>
+                          <a:latin typeface="Arial" pitchFamily="34" charset="0"/>
+                          <a:ea typeface="Arial" pitchFamily="34" charset="-122"/>
+                          <a:cs typeface="Arial" pitchFamily="34" charset="-120"/>
+                        </a:rPr>
+                        <a:t>0.23</a:t>
+                      </a:r>
+                      <a:endParaRPr lang="en-US" sz="1250" dirty="0">
+                        <a:latin typeface="Arial" charset="0"/>
+                        <a:ea typeface="Arial" charset="0"/>
+                        <a:cs typeface="Arial" charset="0"/>
+                      </a:endParaRPr>
+                    </a:p>
+                  </a:txBody>
+                  <a:tcPr marL="45720" marR="45720" marT="45720" marB="45720" anchor="ctr">
+                    <a:lnL w="9525" cap="flat" cmpd="sng" algn="ctr">
+                      <a:solidFill>
+                        <a:srgbClr val="BDBDBD"/>
+                      </a:solidFill>
+                      <a:prstDash val="solid"/>
+                      <a:round/>
+                      <a:headEnd type="none" w="med" len="med"/>
+                      <a:tailEnd type="none" w="med" len="med"/>
+                    </a:lnL>
+                    <a:lnR w="9525" cap="flat" cmpd="sng" algn="ctr">
+                      <a:solidFill>
+                        <a:srgbClr val="BDBDBD"/>
+                      </a:solidFill>
+                      <a:prstDash val="solid"/>
+                      <a:round/>
+                      <a:headEnd type="none" w="med" len="med"/>
+                      <a:tailEnd type="none" w="med" len="med"/>
+                    </a:lnR>
+                    <a:lnT w="9525" cap="flat" cmpd="sng" algn="ctr">
+                      <a:solidFill>
+                        <a:srgbClr val="BDBDBD"/>
+                      </a:solidFill>
+                      <a:prstDash val="solid"/>
+                      <a:round/>
+                      <a:headEnd type="none" w="med" len="med"/>
+                      <a:tailEnd type="none" w="med" len="med"/>
+                    </a:lnT>
+                    <a:lnB w="9525" cap="flat" cmpd="sng" algn="ctr">
+                      <a:solidFill>
+                        <a:srgbClr val="BDBDBD"/>
+                      </a:solidFill>
+                      <a:prstDash val="solid"/>
+                      <a:round/>
+                      <a:headEnd type="none" w="med" len="med"/>
+                      <a:tailEnd type="none" w="med" len="med"/>
+                    </a:lnB>
+                  </a:tcPr>
+                </a:tc>
+              </a:tr>
+              <a:tr h="0">
+                <a:tc>
+                  <a:txBody>
+                    <a:bodyPr/>
+                    <a:lstStyle/>
+                    <a:p>
+                      <a:pPr indent="0" marL="0">
+                        <a:buNone/>
+                      </a:pPr>
+                      <a:r>
+                        <a:rPr lang="en-US" sz="1250" b="1" dirty="0">
+                          <a:solidFill>
+                            <a:srgbClr val="1B1B1B"/>
+                          </a:solidFill>
+                          <a:latin typeface="Arial" pitchFamily="34" charset="0"/>
+                          <a:ea typeface="Arial" pitchFamily="34" charset="-122"/>
+                          <a:cs typeface="Arial" pitchFamily="34" charset="-120"/>
+                        </a:rPr>
+                        <a:t>Output fusion (earlier work)</a:t>
+                      </a:r>
+                      <a:endParaRPr lang="en-US" sz="1250" dirty="0">
+                        <a:latin typeface="Arial" charset="0"/>
+                        <a:ea typeface="Arial" charset="0"/>
+                        <a:cs typeface="Arial" charset="0"/>
+                      </a:endParaRPr>
+                    </a:p>
+                  </a:txBody>
+                  <a:tcPr marL="45720" marR="45720" marT="45720" marB="45720" anchor="ctr">
+                    <a:lnL w="9525" cap="flat" cmpd="sng" algn="ctr">
+                      <a:solidFill>
+                        <a:srgbClr val="BDBDBD"/>
+                      </a:solidFill>
+                      <a:prstDash val="solid"/>
+                      <a:round/>
+                      <a:headEnd type="none" w="med" len="med"/>
+                      <a:tailEnd type="none" w="med" len="med"/>
+                    </a:lnL>
+                    <a:lnR w="9525" cap="flat" cmpd="sng" algn="ctr">
+                      <a:solidFill>
+                        <a:srgbClr val="BDBDBD"/>
+                      </a:solidFill>
+                      <a:prstDash val="solid"/>
+                      <a:round/>
+                      <a:headEnd type="none" w="med" len="med"/>
+                      <a:tailEnd type="none" w="med" len="med"/>
+                    </a:lnR>
+                    <a:lnT w="9525" cap="flat" cmpd="sng" algn="ctr">
+                      <a:solidFill>
+                        <a:srgbClr val="BDBDBD"/>
+                      </a:solidFill>
+                      <a:prstDash val="solid"/>
+                      <a:round/>
+                      <a:headEnd type="none" w="med" len="med"/>
+                      <a:tailEnd type="none" w="med" len="med"/>
+                    </a:lnT>
+                    <a:lnB w="9525" cap="flat" cmpd="sng" algn="ctr">
+                      <a:solidFill>
+                        <a:srgbClr val="BDBDBD"/>
+                      </a:solidFill>
+                      <a:prstDash val="solid"/>
+                      <a:round/>
+                      <a:headEnd type="none" w="med" len="med"/>
+                      <a:tailEnd type="none" w="med" len="med"/>
+                    </a:lnB>
+                  </a:tcPr>
+                </a:tc>
+                <a:tc>
+                  <a:txBody>
+                    <a:bodyPr/>
+                    <a:lstStyle/>
+                    <a:p>
+                      <a:pPr indent="0" marL="0">
+                        <a:buNone/>
+                      </a:pPr>
+                      <a:r>
+                        <a:rPr lang="en-US" sz="1250" dirty="0">
+                          <a:solidFill>
+                            <a:srgbClr val="1B1B1B"/>
+                          </a:solidFill>
+                          <a:latin typeface="Arial" pitchFamily="34" charset="0"/>
+                          <a:ea typeface="Arial" pitchFamily="34" charset="-122"/>
+                          <a:cs typeface="Arial" pitchFamily="34" charset="-120"/>
+                        </a:rPr>
+                        <a:t>OSTA plus small per-organ models trained on separate patients, added at the output</a:t>
+                      </a:r>
+                      <a:endParaRPr lang="en-US" sz="1250" dirty="0">
+                        <a:latin typeface="Arial" charset="0"/>
+                        <a:ea typeface="Arial" charset="0"/>
+                        <a:cs typeface="Arial" charset="0"/>
+                      </a:endParaRPr>
+                    </a:p>
+                  </a:txBody>
+                  <a:tcPr marL="45720" marR="45720" marT="45720" marB="45720" anchor="ctr">
+                    <a:lnL w="9525" cap="flat" cmpd="sng" algn="ctr">
+                      <a:solidFill>
+                        <a:srgbClr val="BDBDBD"/>
+                      </a:solidFill>
+                      <a:prstDash val="solid"/>
+                      <a:round/>
+                      <a:headEnd type="none" w="med" len="med"/>
+                      <a:tailEnd type="none" w="med" len="med"/>
+                    </a:lnL>
+                    <a:lnR w="9525" cap="flat" cmpd="sng" algn="ctr">
+                      <a:solidFill>
+                        <a:srgbClr val="BDBDBD"/>
+                      </a:solidFill>
+                      <a:prstDash val="solid"/>
+                      <a:round/>
+                      <a:headEnd type="none" w="med" len="med"/>
+                      <a:tailEnd type="none" w="med" len="med"/>
+                    </a:lnR>
+                    <a:lnT w="9525" cap="flat" cmpd="sng" algn="ctr">
+                      <a:solidFill>
+                        <a:srgbClr val="BDBDBD"/>
+                      </a:solidFill>
+                      <a:prstDash val="solid"/>
+                      <a:round/>
+                      <a:headEnd type="none" w="med" len="med"/>
+                      <a:tailEnd type="none" w="med" len="med"/>
+                    </a:lnT>
+                    <a:lnB w="9525" cap="flat" cmpd="sng" algn="ctr">
+                      <a:solidFill>
+                        <a:srgbClr val="BDBDBD"/>
+                      </a:solidFill>
+                      <a:prstDash val="solid"/>
+                      <a:round/>
+                      <a:headEnd type="none" w="med" len="med"/>
+                      <a:tailEnd type="none" w="med" len="med"/>
+                    </a:lnB>
+                  </a:tcPr>
+                </a:tc>
+                <a:tc>
+                  <a:txBody>
+                    <a:bodyPr/>
+                    <a:lstStyle/>
+                    <a:p>
+                      <a:pPr indent="0" marL="0">
+                        <a:buNone/>
+                      </a:pPr>
+                      <a:r>
+                        <a:rPr lang="en-US" sz="1250" dirty="0">
+                          <a:solidFill>
+                            <a:srgbClr val="1B1B1B"/>
+                          </a:solidFill>
+                          <a:latin typeface="Arial" pitchFamily="34" charset="0"/>
+                          <a:ea typeface="Arial" pitchFamily="34" charset="-122"/>
+                          <a:cs typeface="Arial" pitchFamily="34" charset="-120"/>
+                        </a:rPr>
+                        <a:t>Independent per-organ second opinions fused at the end</a:t>
+                      </a:r>
+                      <a:endParaRPr lang="en-US" sz="1250" dirty="0">
+                        <a:latin typeface="Arial" charset="0"/>
+                        <a:ea typeface="Arial" charset="0"/>
+                        <a:cs typeface="Arial" charset="0"/>
+                      </a:endParaRPr>
+                    </a:p>
+                  </a:txBody>
+                  <a:tcPr marL="45720" marR="45720" marT="45720" marB="45720" anchor="ctr">
+                    <a:lnL w="9525" cap="flat" cmpd="sng" algn="ctr">
+                      <a:solidFill>
+                        <a:srgbClr val="BDBDBD"/>
+                      </a:solidFill>
+                      <a:prstDash val="solid"/>
+                      <a:round/>
+                      <a:headEnd type="none" w="med" len="med"/>
+                      <a:tailEnd type="none" w="med" len="med"/>
+                    </a:lnL>
+                    <a:lnR w="9525" cap="flat" cmpd="sng" algn="ctr">
+                      <a:solidFill>
+                        <a:srgbClr val="BDBDBD"/>
+                      </a:solidFill>
+                      <a:prstDash val="solid"/>
+                      <a:round/>
+                      <a:headEnd type="none" w="med" len="med"/>
+                      <a:tailEnd type="none" w="med" len="med"/>
+                    </a:lnR>
+                    <a:lnT w="9525" cap="flat" cmpd="sng" algn="ctr">
+                      <a:solidFill>
+                        <a:srgbClr val="BDBDBD"/>
+                      </a:solidFill>
+                      <a:prstDash val="solid"/>
+                      <a:round/>
+                      <a:headEnd type="none" w="med" len="med"/>
+                      <a:tailEnd type="none" w="med" len="med"/>
+                    </a:lnT>
+                    <a:lnB w="9525" cap="flat" cmpd="sng" algn="ctr">
+                      <a:solidFill>
+                        <a:srgbClr val="BDBDBD"/>
+                      </a:solidFill>
+                      <a:prstDash val="solid"/>
+                      <a:round/>
+                      <a:headEnd type="none" w="med" len="med"/>
+                      <a:tailEnd type="none" w="med" len="med"/>
+                    </a:lnB>
+                  </a:tcPr>
+                </a:tc>
+                <a:tc>
+                  <a:txBody>
+                    <a:bodyPr/>
+                    <a:lstStyle/>
+                    <a:p>
+                      <a:pPr algn="ctr" indent="0" marL="0">
+                        <a:buNone/>
+                      </a:pPr>
+                      <a:r>
+                        <a:rPr lang="en-US" sz="1250" b="1" dirty="0">
+                          <a:solidFill>
+                            <a:srgbClr val="C8102E"/>
+                          </a:solidFill>
+                          <a:latin typeface="Arial" pitchFamily="34" charset="0"/>
+                          <a:ea typeface="Arial" pitchFamily="34" charset="-122"/>
+                          <a:cs typeface="Arial" pitchFamily="34" charset="-120"/>
+                        </a:rPr>
+                        <a:t>0.25</a:t>
+                      </a:r>
+                      <a:endParaRPr lang="en-US" sz="1250" dirty="0">
+                        <a:latin typeface="Arial" charset="0"/>
+                        <a:ea typeface="Arial" charset="0"/>
+                        <a:cs typeface="Arial" charset="0"/>
+                      </a:endParaRPr>
+                    </a:p>
+                  </a:txBody>
+                  <a:tcPr marL="45720" marR="45720" marT="45720" marB="45720" anchor="ctr">
+                    <a:lnL w="9525" cap="flat" cmpd="sng" algn="ctr">
+                      <a:solidFill>
+                        <a:srgbClr val="BDBDBD"/>
+                      </a:solidFill>
+                      <a:prstDash val="solid"/>
+                      <a:round/>
+                      <a:headEnd type="none" w="med" len="med"/>
+                      <a:tailEnd type="none" w="med" len="med"/>
+                    </a:lnL>
+                    <a:lnR w="9525" cap="flat" cmpd="sng" algn="ctr">
+                      <a:solidFill>
+                        <a:srgbClr val="BDBDBD"/>
+                      </a:solidFill>
+                      <a:prstDash val="solid"/>
+                      <a:round/>
+                      <a:headEnd type="none" w="med" len="med"/>
+                      <a:tailEnd type="none" w="med" len="med"/>
+                    </a:lnR>
+                    <a:lnT w="9525" cap="flat" cmpd="sng" algn="ctr">
+                      <a:solidFill>
+                        <a:srgbClr val="BDBDBD"/>
+                      </a:solidFill>
+                      <a:prstDash val="solid"/>
+                      <a:round/>
+                      <a:headEnd type="none" w="med" len="med"/>
+                      <a:tailEnd type="none" w="med" len="med"/>
+                    </a:lnT>
+                    <a:lnB w="9525" cap="flat" cmpd="sng" algn="ctr">
+                      <a:solidFill>
+                        <a:srgbClr val="BDBDBD"/>
+                      </a:solidFill>
+                      <a:prstDash val="solid"/>
+                      <a:round/>
+                      <a:headEnd type="none" w="med" len="med"/>
+                      <a:tailEnd type="none" w="med" len="med"/>
+                    </a:lnB>
+                  </a:tcPr>
+                </a:tc>
+              </a:tr>
+              <a:tr h="0">
+                <a:tc>
+                  <a:txBody>
+                    <a:bodyPr/>
+                    <a:lstStyle/>
+                    <a:p>
+                      <a:pPr indent="0" marL="0">
+                        <a:buNone/>
+                      </a:pPr>
+                      <a:r>
+                        <a:rPr lang="en-US" sz="1250" b="1" dirty="0">
+                          <a:solidFill>
+                            <a:srgbClr val="1B1B1B"/>
+                          </a:solidFill>
+                          <a:latin typeface="Arial" pitchFamily="34" charset="0"/>
+                          <a:ea typeface="Arial" pitchFamily="34" charset="-122"/>
+                          <a:cs typeface="Arial" pitchFamily="34" charset="-120"/>
+                        </a:rPr>
+                        <a:t>CNN-Transformer (earlier work) [36]</a:t>
+                      </a:r>
+                      <a:endParaRPr lang="en-US" sz="1250" dirty="0">
+                        <a:latin typeface="Arial" charset="0"/>
+                        <a:ea typeface="Arial" charset="0"/>
+                        <a:cs typeface="Arial" charset="0"/>
+                      </a:endParaRPr>
+                    </a:p>
+                  </a:txBody>
+                  <a:tcPr marL="45720" marR="45720" marT="45720" marB="45720" anchor="ctr">
+                    <a:lnL w="9525" cap="flat" cmpd="sng" algn="ctr">
+                      <a:solidFill>
+                        <a:srgbClr val="BDBDBD"/>
+                      </a:solidFill>
+                      <a:prstDash val="solid"/>
+                      <a:round/>
+                      <a:headEnd type="none" w="med" len="med"/>
+                      <a:tailEnd type="none" w="med" len="med"/>
+                    </a:lnL>
+                    <a:lnR w="9525" cap="flat" cmpd="sng" algn="ctr">
+                      <a:solidFill>
+                        <a:srgbClr val="BDBDBD"/>
+                      </a:solidFill>
+                      <a:prstDash val="solid"/>
+                      <a:round/>
+                      <a:headEnd type="none" w="med" len="med"/>
+                      <a:tailEnd type="none" w="med" len="med"/>
+                    </a:lnR>
+                    <a:lnT w="9525" cap="flat" cmpd="sng" algn="ctr">
+                      <a:solidFill>
+                        <a:srgbClr val="BDBDBD"/>
+                      </a:solidFill>
+                      <a:prstDash val="solid"/>
+                      <a:round/>
+                      <a:headEnd type="none" w="med" len="med"/>
+                      <a:tailEnd type="none" w="med" len="med"/>
+                    </a:lnT>
+                    <a:lnB w="9525" cap="flat" cmpd="sng" algn="ctr">
+                      <a:solidFill>
+                        <a:srgbClr val="BDBDBD"/>
+                      </a:solidFill>
+                      <a:prstDash val="solid"/>
+                      <a:round/>
+                      <a:headEnd type="none" w="med" len="med"/>
+                      <a:tailEnd type="none" w="med" len="med"/>
+                    </a:lnB>
+                  </a:tcPr>
+                </a:tc>
+                <a:tc>
+                  <a:txBody>
+                    <a:bodyPr/>
+                    <a:lstStyle/>
+                    <a:p>
+                      <a:pPr indent="0" marL="0">
+                        <a:buNone/>
+                      </a:pPr>
+                      <a:r>
+                        <a:rPr lang="en-US" sz="1250" dirty="0">
+                          <a:solidFill>
+                            <a:srgbClr val="1B1B1B"/>
+                          </a:solidFill>
+                          <a:latin typeface="Arial" pitchFamily="34" charset="0"/>
+                          <a:ea typeface="Arial" pitchFamily="34" charset="-122"/>
+                          <a:cs typeface="Arial" pitchFamily="34" charset="-120"/>
+                        </a:rPr>
+                        <a:t>Convolution finds 1 to 12 h patterns, then attention</a:t>
+                      </a:r>
+                      <a:endParaRPr lang="en-US" sz="1250" dirty="0">
+                        <a:latin typeface="Arial" charset="0"/>
+                        <a:ea typeface="Arial" charset="0"/>
+                        <a:cs typeface="Arial" charset="0"/>
+                      </a:endParaRPr>
+                    </a:p>
+                  </a:txBody>
+                  <a:tcPr marL="45720" marR="45720" marT="45720" marB="45720" anchor="ctr">
+                    <a:lnL w="9525" cap="flat" cmpd="sng" algn="ctr">
+                      <a:solidFill>
+                        <a:srgbClr val="BDBDBD"/>
+                      </a:solidFill>
+                      <a:prstDash val="solid"/>
+                      <a:round/>
+                      <a:headEnd type="none" w="med" len="med"/>
+                      <a:tailEnd type="none" w="med" len="med"/>
+                    </a:lnL>
+                    <a:lnR w="9525" cap="flat" cmpd="sng" algn="ctr">
+                      <a:solidFill>
+                        <a:srgbClr val="BDBDBD"/>
+                      </a:solidFill>
+                      <a:prstDash val="solid"/>
+                      <a:round/>
+                      <a:headEnd type="none" w="med" len="med"/>
+                      <a:tailEnd type="none" w="med" len="med"/>
+                    </a:lnR>
+                    <a:lnT w="9525" cap="flat" cmpd="sng" algn="ctr">
+                      <a:solidFill>
+                        <a:srgbClr val="BDBDBD"/>
+                      </a:solidFill>
+                      <a:prstDash val="solid"/>
+                      <a:round/>
+                      <a:headEnd type="none" w="med" len="med"/>
+                      <a:tailEnd type="none" w="med" len="med"/>
+                    </a:lnT>
+                    <a:lnB w="9525" cap="flat" cmpd="sng" algn="ctr">
+                      <a:solidFill>
+                        <a:srgbClr val="BDBDBD"/>
+                      </a:solidFill>
+                      <a:prstDash val="solid"/>
+                      <a:round/>
+                      <a:headEnd type="none" w="med" len="med"/>
+                      <a:tailEnd type="none" w="med" len="med"/>
+                    </a:lnB>
+                  </a:tcPr>
+                </a:tc>
+                <a:tc>
+                  <a:txBody>
+                    <a:bodyPr/>
+                    <a:lstStyle/>
+                    <a:p>
+                      <a:pPr indent="0" marL="0">
+                        <a:buNone/>
+                      </a:pPr>
+                      <a:r>
+                        <a:rPr lang="en-US" sz="1250" dirty="0">
+                          <a:solidFill>
+                            <a:srgbClr val="1B1B1B"/>
+                          </a:solidFill>
+                          <a:latin typeface="Arial" pitchFamily="34" charset="0"/>
+                          <a:ea typeface="Arial" pitchFamily="34" charset="-122"/>
+                          <a:cs typeface="Arial" pitchFamily="34" charset="-120"/>
+                        </a:rPr>
+                        <a:t>No organ grouping</a:t>
+                      </a:r>
+                      <a:endParaRPr lang="en-US" sz="1250" dirty="0">
+                        <a:latin typeface="Arial" charset="0"/>
+                        <a:ea typeface="Arial" charset="0"/>
+                        <a:cs typeface="Arial" charset="0"/>
+                      </a:endParaRPr>
+                    </a:p>
+                  </a:txBody>
+                  <a:tcPr marL="45720" marR="45720" marT="45720" marB="45720" anchor="ctr">
+                    <a:lnL w="9525" cap="flat" cmpd="sng" algn="ctr">
+                      <a:solidFill>
+                        <a:srgbClr val="BDBDBD"/>
+                      </a:solidFill>
+                      <a:prstDash val="solid"/>
+                      <a:round/>
+                      <a:headEnd type="none" w="med" len="med"/>
+                      <a:tailEnd type="none" w="med" len="med"/>
+                    </a:lnL>
+                    <a:lnR w="9525" cap="flat" cmpd="sng" algn="ctr">
+                      <a:solidFill>
+                        <a:srgbClr val="BDBDBD"/>
+                      </a:solidFill>
+                      <a:prstDash val="solid"/>
+                      <a:round/>
+                      <a:headEnd type="none" w="med" len="med"/>
+                      <a:tailEnd type="none" w="med" len="med"/>
+                    </a:lnR>
+                    <a:lnT w="9525" cap="flat" cmpd="sng" algn="ctr">
+                      <a:solidFill>
+                        <a:srgbClr val="BDBDBD"/>
+                      </a:solidFill>
+                      <a:prstDash val="solid"/>
+                      <a:round/>
+                      <a:headEnd type="none" w="med" len="med"/>
+                      <a:tailEnd type="none" w="med" len="med"/>
+                    </a:lnT>
+                    <a:lnB w="9525" cap="flat" cmpd="sng" algn="ctr">
+                      <a:solidFill>
+                        <a:srgbClr val="BDBDBD"/>
+                      </a:solidFill>
+                      <a:prstDash val="solid"/>
+                      <a:round/>
+                      <a:headEnd type="none" w="med" len="med"/>
+                      <a:tailEnd type="none" w="med" len="med"/>
+                    </a:lnB>
+                  </a:tcPr>
+                </a:tc>
+                <a:tc>
+                  <a:txBody>
+                    <a:bodyPr/>
+                    <a:lstStyle/>
+                    <a:p>
+                      <a:pPr algn="ctr" indent="0" marL="0">
+                        <a:buNone/>
+                      </a:pPr>
+                      <a:r>
+                        <a:rPr lang="en-US" sz="1250" b="1" dirty="0">
+                          <a:solidFill>
+                            <a:srgbClr val="C8102E"/>
+                          </a:solidFill>
+                          <a:latin typeface="Arial" pitchFamily="34" charset="0"/>
+                          <a:ea typeface="Arial" pitchFamily="34" charset="-122"/>
+                          <a:cs typeface="Arial" pitchFamily="34" charset="-120"/>
+                        </a:rPr>
+                        <a:t>0.24</a:t>
+                      </a:r>
+                      <a:endParaRPr lang="en-US" sz="1250" dirty="0">
+                        <a:latin typeface="Arial" charset="0"/>
+                        <a:ea typeface="Arial" charset="0"/>
+                        <a:cs typeface="Arial" charset="0"/>
+                      </a:endParaRPr>
+                    </a:p>
+                  </a:txBody>
+                  <a:tcPr marL="45720" marR="45720" marT="45720" marB="45720" anchor="ctr">
+                    <a:lnL w="9525" cap="flat" cmpd="sng" algn="ctr">
+                      <a:solidFill>
+                        <a:srgbClr val="BDBDBD"/>
+                      </a:solidFill>
+                      <a:prstDash val="solid"/>
+                      <a:round/>
+                      <a:headEnd type="none" w="med" len="med"/>
+                      <a:tailEnd type="none" w="med" len="med"/>
+                    </a:lnL>
+                    <a:lnR w="9525" cap="flat" cmpd="sng" algn="ctr">
+                      <a:solidFill>
+                        <a:srgbClr val="BDBDBD"/>
+                      </a:solidFill>
+                      <a:prstDash val="solid"/>
+                      <a:round/>
+                      <a:headEnd type="none" w="med" len="med"/>
+                      <a:tailEnd type="none" w="med" len="med"/>
+                    </a:lnR>
+                    <a:lnT w="9525" cap="flat" cmpd="sng" algn="ctr">
+                      <a:solidFill>
+                        <a:srgbClr val="BDBDBD"/>
+                      </a:solidFill>
+                      <a:prstDash val="solid"/>
+                      <a:round/>
+                      <a:headEnd type="none" w="med" len="med"/>
+                      <a:tailEnd type="none" w="med" len="med"/>
+                    </a:lnT>
+                    <a:lnB w="9525" cap="flat" cmpd="sng" algn="ctr">
+                      <a:solidFill>
+                        <a:srgbClr val="BDBDBD"/>
+                      </a:solidFill>
+                      <a:prstDash val="solid"/>
+                      <a:round/>
+                      <a:headEnd type="none" w="med" len="med"/>
+                      <a:tailEnd type="none" w="med" len="med"/>
+                    </a:lnB>
+                  </a:tcPr>
+                </a:tc>
+              </a:tr>
+              <a:tr h="0">
+                <a:tc>
+                  <a:txBody>
+                    <a:bodyPr/>
+                    <a:lstStyle/>
+                    <a:p>
+                      <a:pPr indent="0" marL="0">
+                        <a:buNone/>
+                      </a:pPr>
+                      <a:r>
+                        <a:rPr lang="en-US" sz="1250" b="1" dirty="0">
+                          <a:solidFill>
+                            <a:srgbClr val="1B1B1B"/>
+                          </a:solidFill>
+                          <a:latin typeface="Arial" pitchFamily="34" charset="0"/>
+                          <a:ea typeface="Arial" pitchFamily="34" charset="-122"/>
+                          <a:cs typeface="Arial" pitchFamily="34" charset="-120"/>
+                        </a:rPr>
+                        <a:t>Flat OSTA</a:t>
+                      </a:r>
+                      <a:endParaRPr lang="en-US" sz="1250" dirty="0">
+                        <a:latin typeface="Arial" charset="0"/>
+                        <a:ea typeface="Arial" charset="0"/>
+                        <a:cs typeface="Arial" charset="0"/>
+                      </a:endParaRPr>
+                    </a:p>
+                  </a:txBody>
+                  <a:tcPr marL="45720" marR="45720" marT="45720" marB="45720" anchor="ctr">
+                    <a:lnL w="9525" cap="flat" cmpd="sng" algn="ctr">
+                      <a:solidFill>
+                        <a:srgbClr val="BDBDBD"/>
+                      </a:solidFill>
+                      <a:prstDash val="solid"/>
+                      <a:round/>
+                      <a:headEnd type="none" w="med" len="med"/>
+                      <a:tailEnd type="none" w="med" len="med"/>
+                    </a:lnL>
+                    <a:lnR w="9525" cap="flat" cmpd="sng" algn="ctr">
+                      <a:solidFill>
+                        <a:srgbClr val="BDBDBD"/>
+                      </a:solidFill>
+                      <a:prstDash val="solid"/>
+                      <a:round/>
+                      <a:headEnd type="none" w="med" len="med"/>
+                      <a:tailEnd type="none" w="med" len="med"/>
+                    </a:lnR>
+                    <a:lnT w="9525" cap="flat" cmpd="sng" algn="ctr">
+                      <a:solidFill>
+                        <a:srgbClr val="BDBDBD"/>
+                      </a:solidFill>
+                      <a:prstDash val="solid"/>
+                      <a:round/>
+                      <a:headEnd type="none" w="med" len="med"/>
+                      <a:tailEnd type="none" w="med" len="med"/>
+                    </a:lnT>
+                    <a:lnB w="9525" cap="flat" cmpd="sng" algn="ctr">
+                      <a:solidFill>
+                        <a:srgbClr val="BDBDBD"/>
+                      </a:solidFill>
+                      <a:prstDash val="solid"/>
+                      <a:round/>
+                      <a:headEnd type="none" w="med" len="med"/>
+                      <a:tailEnd type="none" w="med" len="med"/>
+                    </a:lnB>
+                  </a:tcPr>
+                </a:tc>
+                <a:tc>
+                  <a:txBody>
+                    <a:bodyPr/>
+                    <a:lstStyle/>
+                    <a:p>
+                      <a:pPr indent="0" marL="0">
+                        <a:buNone/>
+                      </a:pPr>
+                      <a:r>
+                        <a:rPr lang="en-US" sz="1250" dirty="0">
+                          <a:solidFill>
+                            <a:srgbClr val="1B1B1B"/>
+                          </a:solidFill>
+                          <a:latin typeface="Arial" pitchFamily="34" charset="0"/>
+                          <a:ea typeface="Arial" pitchFamily="34" charset="-122"/>
+                          <a:cs typeface="Arial" pitchFamily="34" charset="-120"/>
+                        </a:rPr>
+                        <a:t>OSTA with every predictor in one group</a:t>
+                      </a:r>
+                      <a:endParaRPr lang="en-US" sz="1250" dirty="0">
+                        <a:latin typeface="Arial" charset="0"/>
+                        <a:ea typeface="Arial" charset="0"/>
+                        <a:cs typeface="Arial" charset="0"/>
+                      </a:endParaRPr>
+                    </a:p>
+                  </a:txBody>
+                  <a:tcPr marL="45720" marR="45720" marT="45720" marB="45720" anchor="ctr">
+                    <a:lnL w="9525" cap="flat" cmpd="sng" algn="ctr">
+                      <a:solidFill>
+                        <a:srgbClr val="BDBDBD"/>
+                      </a:solidFill>
+                      <a:prstDash val="solid"/>
+                      <a:round/>
+                      <a:headEnd type="none" w="med" len="med"/>
+                      <a:tailEnd type="none" w="med" len="med"/>
+                    </a:lnL>
+                    <a:lnR w="9525" cap="flat" cmpd="sng" algn="ctr">
+                      <a:solidFill>
+                        <a:srgbClr val="BDBDBD"/>
+                      </a:solidFill>
+                      <a:prstDash val="solid"/>
+                      <a:round/>
+                      <a:headEnd type="none" w="med" len="med"/>
+                      <a:tailEnd type="none" w="med" len="med"/>
+                    </a:lnR>
+                    <a:lnT w="9525" cap="flat" cmpd="sng" algn="ctr">
+                      <a:solidFill>
+                        <a:srgbClr val="BDBDBD"/>
+                      </a:solidFill>
+                      <a:prstDash val="solid"/>
+                      <a:round/>
+                      <a:headEnd type="none" w="med" len="med"/>
+                      <a:tailEnd type="none" w="med" len="med"/>
+                    </a:lnT>
+                    <a:lnB w="9525" cap="flat" cmpd="sng" algn="ctr">
+                      <a:solidFill>
+                        <a:srgbClr val="BDBDBD"/>
+                      </a:solidFill>
+                      <a:prstDash val="solid"/>
+                      <a:round/>
+                      <a:headEnd type="none" w="med" len="med"/>
+                      <a:tailEnd type="none" w="med" len="med"/>
+                    </a:lnB>
+                  </a:tcPr>
+                </a:tc>
+                <a:tc>
+                  <a:txBody>
+                    <a:bodyPr/>
+                    <a:lstStyle/>
+                    <a:p>
+                      <a:pPr indent="0" marL="0">
+                        <a:buNone/>
+                      </a:pPr>
+                      <a:r>
+                        <a:rPr lang="en-US" sz="1250" dirty="0">
+                          <a:solidFill>
+                            <a:srgbClr val="1B1B1B"/>
+                          </a:solidFill>
+                          <a:latin typeface="Arial" pitchFamily="34" charset="0"/>
+                          <a:ea typeface="Arial" pitchFamily="34" charset="-122"/>
+                          <a:cs typeface="Arial" pitchFamily="34" charset="-120"/>
+                        </a:rPr>
+                        <a:t>Removes only the organ grouping: the decisive test</a:t>
+                      </a:r>
+                      <a:endParaRPr lang="en-US" sz="1250" dirty="0">
+                        <a:latin typeface="Arial" charset="0"/>
+                        <a:ea typeface="Arial" charset="0"/>
+                        <a:cs typeface="Arial" charset="0"/>
+                      </a:endParaRPr>
+                    </a:p>
+                  </a:txBody>
+                  <a:tcPr marL="45720" marR="45720" marT="45720" marB="45720" anchor="ctr">
+                    <a:lnL w="9525" cap="flat" cmpd="sng" algn="ctr">
+                      <a:solidFill>
+                        <a:srgbClr val="BDBDBD"/>
+                      </a:solidFill>
+                      <a:prstDash val="solid"/>
+                      <a:round/>
+                      <a:headEnd type="none" w="med" len="med"/>
+                      <a:tailEnd type="none" w="med" len="med"/>
+                    </a:lnL>
+                    <a:lnR w="9525" cap="flat" cmpd="sng" algn="ctr">
+                      <a:solidFill>
+                        <a:srgbClr val="BDBDBD"/>
+                      </a:solidFill>
+                      <a:prstDash val="solid"/>
+                      <a:round/>
+                      <a:headEnd type="none" w="med" len="med"/>
+                      <a:tailEnd type="none" w="med" len="med"/>
+                    </a:lnR>
+                    <a:lnT w="9525" cap="flat" cmpd="sng" algn="ctr">
+                      <a:solidFill>
+                        <a:srgbClr val="BDBDBD"/>
+                      </a:solidFill>
+                      <a:prstDash val="solid"/>
+                      <a:round/>
+                      <a:headEnd type="none" w="med" len="med"/>
+                      <a:tailEnd type="none" w="med" len="med"/>
+                    </a:lnT>
+                    <a:lnB w="9525" cap="flat" cmpd="sng" algn="ctr">
+                      <a:solidFill>
+                        <a:srgbClr val="BDBDBD"/>
+                      </a:solidFill>
+                      <a:prstDash val="solid"/>
+                      <a:round/>
+                      <a:headEnd type="none" w="med" len="med"/>
+                      <a:tailEnd type="none" w="med" len="med"/>
+                    </a:lnB>
+                  </a:tcPr>
+                </a:tc>
+                <a:tc>
+                  <a:txBody>
+                    <a:bodyPr/>
+                    <a:lstStyle/>
+                    <a:p>
+                      <a:pPr algn="ctr" indent="0" marL="0">
+                        <a:buNone/>
+                      </a:pPr>
+                      <a:r>
+                        <a:rPr lang="en-US" sz="1250" b="1" dirty="0">
+                          <a:solidFill>
+                            <a:srgbClr val="C8102E"/>
+                          </a:solidFill>
+                          <a:latin typeface="Arial" pitchFamily="34" charset="0"/>
+                          <a:ea typeface="Arial" pitchFamily="34" charset="-122"/>
+                          <a:cs typeface="Arial" pitchFamily="34" charset="-120"/>
+                        </a:rPr>
+                        <a:t>0.23</a:t>
+                      </a:r>
+                      <a:endParaRPr lang="en-US" sz="1250" dirty="0">
+                        <a:latin typeface="Arial" charset="0"/>
+                        <a:ea typeface="Arial" charset="0"/>
+                        <a:cs typeface="Arial" charset="0"/>
+                      </a:endParaRPr>
+                    </a:p>
+                  </a:txBody>
+                  <a:tcPr marL="45720" marR="45720" marT="45720" marB="45720" anchor="ctr">
+                    <a:lnL w="9525" cap="flat" cmpd="sng" algn="ctr">
+                      <a:solidFill>
+                        <a:srgbClr val="BDBDBD"/>
+                      </a:solidFill>
+                      <a:prstDash val="solid"/>
+                      <a:round/>
+                      <a:headEnd type="none" w="med" len="med"/>
+                      <a:tailEnd type="none" w="med" len="med"/>
+                    </a:lnL>
+                    <a:lnR w="9525" cap="flat" cmpd="sng" algn="ctr">
+                      <a:solidFill>
+                        <a:srgbClr val="BDBDBD"/>
+                      </a:solidFill>
+                      <a:prstDash val="solid"/>
+                      <a:round/>
+                      <a:headEnd type="none" w="med" len="med"/>
+                      <a:tailEnd type="none" w="med" len="med"/>
+                    </a:lnR>
+                    <a:lnT w="9525" cap="flat" cmpd="sng" algn="ctr">
+                      <a:solidFill>
+                        <a:srgbClr val="BDBDBD"/>
+                      </a:solidFill>
+                      <a:prstDash val="solid"/>
+                      <a:round/>
+                      <a:headEnd type="none" w="med" len="med"/>
+                      <a:tailEnd type="none" w="med" len="med"/>
+                    </a:lnT>
+                    <a:lnB w="9525" cap="flat" cmpd="sng" algn="ctr">
+                      <a:solidFill>
+                        <a:srgbClr val="BDBDBD"/>
+                      </a:solidFill>
+                      <a:prstDash val="solid"/>
+                      <a:round/>
+                      <a:headEnd type="none" w="med" len="med"/>
+                      <a:tailEnd type="none" w="med" len="med"/>
+                    </a:lnB>
+                  </a:tcPr>
+                </a:tc>
+              </a:tr>
+              <a:tr h="0">
+                <a:tc>
+                  <a:txBody>
+                    <a:bodyPr/>
+                    <a:lstStyle/>
+                    <a:p>
+                      <a:pPr indent="0" marL="0">
+                        <a:buNone/>
+                      </a:pPr>
+                      <a:r>
+                        <a:rPr lang="en-US" sz="1250" b="1" dirty="0">
+                          <a:solidFill>
+                            <a:srgbClr val="1B1B1B"/>
+                          </a:solidFill>
+                          <a:latin typeface="Arial" pitchFamily="34" charset="0"/>
+                          <a:ea typeface="Arial" pitchFamily="34" charset="-122"/>
+                          <a:cs typeface="Arial" pitchFamily="34" charset="-120"/>
+                        </a:rPr>
+                        <a:t>GRU-D [37]</a:t>
+                      </a:r>
+                      <a:endParaRPr lang="en-US" sz="1250" dirty="0">
+                        <a:latin typeface="Arial" charset="0"/>
+                        <a:ea typeface="Arial" charset="0"/>
+                        <a:cs typeface="Arial" charset="0"/>
+                      </a:endParaRPr>
+                    </a:p>
+                  </a:txBody>
+                  <a:tcPr marL="45720" marR="45720" marT="45720" marB="45720" anchor="ctr">
+                    <a:lnL w="9525" cap="flat" cmpd="sng" algn="ctr">
+                      <a:solidFill>
+                        <a:srgbClr val="BDBDBD"/>
+                      </a:solidFill>
+                      <a:prstDash val="solid"/>
+                      <a:round/>
+                      <a:headEnd type="none" w="med" len="med"/>
+                      <a:tailEnd type="none" w="med" len="med"/>
+                    </a:lnL>
+                    <a:lnR w="9525" cap="flat" cmpd="sng" algn="ctr">
+                      <a:solidFill>
+                        <a:srgbClr val="BDBDBD"/>
+                      </a:solidFill>
+                      <a:prstDash val="solid"/>
+                      <a:round/>
+                      <a:headEnd type="none" w="med" len="med"/>
+                      <a:tailEnd type="none" w="med" len="med"/>
+                    </a:lnR>
+                    <a:lnT w="9525" cap="flat" cmpd="sng" algn="ctr">
+                      <a:solidFill>
+                        <a:srgbClr val="BDBDBD"/>
+                      </a:solidFill>
+                      <a:prstDash val="solid"/>
+                      <a:round/>
+                      <a:headEnd type="none" w="med" len="med"/>
+                      <a:tailEnd type="none" w="med" len="med"/>
+                    </a:lnT>
+                    <a:lnB w="9525" cap="flat" cmpd="sng" algn="ctr">
+                      <a:solidFill>
+                        <a:srgbClr val="BDBDBD"/>
+                      </a:solidFill>
+                      <a:prstDash val="solid"/>
+                      <a:round/>
+                      <a:headEnd type="none" w="med" len="med"/>
+                      <a:tailEnd type="none" w="med" len="med"/>
+                    </a:lnB>
+                  </a:tcPr>
+                </a:tc>
+                <a:tc>
+                  <a:txBody>
+                    <a:bodyPr/>
+                    <a:lstStyle/>
+                    <a:p>
+                      <a:pPr indent="0" marL="0">
+                        <a:buNone/>
+                      </a:pPr>
+                      <a:r>
+                        <a:rPr lang="en-US" sz="1250" dirty="0">
+                          <a:solidFill>
+                            <a:srgbClr val="1B1B1B"/>
+                          </a:solidFill>
+                          <a:latin typeface="Arial" pitchFamily="34" charset="0"/>
+                          <a:ea typeface="Arial" pitchFamily="34" charset="-122"/>
+                          <a:cs typeface="Arial" pitchFamily="34" charset="-120"/>
+                        </a:rPr>
+                        <a:t>Recurrent memory; values fade towards normal as they age</a:t>
+                      </a:r>
+                      <a:endParaRPr lang="en-US" sz="1250" dirty="0">
+                        <a:latin typeface="Arial" charset="0"/>
+                        <a:ea typeface="Arial" charset="0"/>
+                        <a:cs typeface="Arial" charset="0"/>
+                      </a:endParaRPr>
+                    </a:p>
+                  </a:txBody>
+                  <a:tcPr marL="45720" marR="45720" marT="45720" marB="45720" anchor="ctr">
+                    <a:lnL w="9525" cap="flat" cmpd="sng" algn="ctr">
+                      <a:solidFill>
+                        <a:srgbClr val="BDBDBD"/>
+                      </a:solidFill>
+                      <a:prstDash val="solid"/>
+                      <a:round/>
+                      <a:headEnd type="none" w="med" len="med"/>
+                      <a:tailEnd type="none" w="med" len="med"/>
+                    </a:lnL>
+                    <a:lnR w="9525" cap="flat" cmpd="sng" algn="ctr">
+                      <a:solidFill>
+                        <a:srgbClr val="BDBDBD"/>
+                      </a:solidFill>
+                      <a:prstDash val="solid"/>
+                      <a:round/>
+                      <a:headEnd type="none" w="med" len="med"/>
+                      <a:tailEnd type="none" w="med" len="med"/>
+                    </a:lnR>
+                    <a:lnT w="9525" cap="flat" cmpd="sng" algn="ctr">
+                      <a:solidFill>
+                        <a:srgbClr val="BDBDBD"/>
+                      </a:solidFill>
+                      <a:prstDash val="solid"/>
+                      <a:round/>
+                      <a:headEnd type="none" w="med" len="med"/>
+                      <a:tailEnd type="none" w="med" len="med"/>
+                    </a:lnT>
+                    <a:lnB w="9525" cap="flat" cmpd="sng" algn="ctr">
+                      <a:solidFill>
+                        <a:srgbClr val="BDBDBD"/>
+                      </a:solidFill>
+                      <a:prstDash val="solid"/>
+                      <a:round/>
+                      <a:headEnd type="none" w="med" len="med"/>
+                      <a:tailEnd type="none" w="med" len="med"/>
+                    </a:lnB>
+                  </a:tcPr>
+                </a:tc>
+                <a:tc>
+                  <a:txBody>
+                    <a:bodyPr/>
+                    <a:lstStyle/>
+                    <a:p>
+                      <a:pPr indent="0" marL="0">
+                        <a:buNone/>
+                      </a:pPr>
+                      <a:r>
+                        <a:rPr lang="en-US" sz="1250" dirty="0">
+                          <a:solidFill>
+                            <a:srgbClr val="1B1B1B"/>
+                          </a:solidFill>
+                          <a:latin typeface="Arial" pitchFamily="34" charset="0"/>
+                          <a:ea typeface="Arial" pitchFamily="34" charset="-122"/>
+                          <a:cs typeface="Arial" pitchFamily="34" charset="-120"/>
+                        </a:rPr>
+                        <a:t>Models missing and stale data explicitly</a:t>
+                      </a:r>
+                      <a:endParaRPr lang="en-US" sz="1250" dirty="0">
+                        <a:latin typeface="Arial" charset="0"/>
+                        <a:ea typeface="Arial" charset="0"/>
+                        <a:cs typeface="Arial" charset="0"/>
+                      </a:endParaRPr>
+                    </a:p>
+                  </a:txBody>
+                  <a:tcPr marL="45720" marR="45720" marT="45720" marB="45720" anchor="ctr">
+                    <a:lnL w="9525" cap="flat" cmpd="sng" algn="ctr">
+                      <a:solidFill>
+                        <a:srgbClr val="BDBDBD"/>
+                      </a:solidFill>
+                      <a:prstDash val="solid"/>
+                      <a:round/>
+                      <a:headEnd type="none" w="med" len="med"/>
+                      <a:tailEnd type="none" w="med" len="med"/>
+                    </a:lnL>
+                    <a:lnR w="9525" cap="flat" cmpd="sng" algn="ctr">
+                      <a:solidFill>
+                        <a:srgbClr val="BDBDBD"/>
+                      </a:solidFill>
+                      <a:prstDash val="solid"/>
+                      <a:round/>
+                      <a:headEnd type="none" w="med" len="med"/>
+                      <a:tailEnd type="none" w="med" len="med"/>
+                    </a:lnR>
+                    <a:lnT w="9525" cap="flat" cmpd="sng" algn="ctr">
+                      <a:solidFill>
+                        <a:srgbClr val="BDBDBD"/>
+                      </a:solidFill>
+                      <a:prstDash val="solid"/>
+                      <a:round/>
+                      <a:headEnd type="none" w="med" len="med"/>
+                      <a:tailEnd type="none" w="med" len="med"/>
+                    </a:lnT>
+                    <a:lnB w="9525" cap="flat" cmpd="sng" algn="ctr">
+                      <a:solidFill>
+                        <a:srgbClr val="BDBDBD"/>
+                      </a:solidFill>
+                      <a:prstDash val="solid"/>
+                      <a:round/>
+                      <a:headEnd type="none" w="med" len="med"/>
+                      <a:tailEnd type="none" w="med" len="med"/>
+                    </a:lnB>
+                  </a:tcPr>
+                </a:tc>
+                <a:tc>
+                  <a:txBody>
+                    <a:bodyPr/>
+                    <a:lstStyle/>
+                    <a:p>
+                      <a:pPr algn="ctr" indent="0" marL="0">
+                        <a:buNone/>
+                      </a:pPr>
+                      <a:r>
+                        <a:rPr lang="en-US" sz="1250" b="1" dirty="0">
+                          <a:solidFill>
+                            <a:srgbClr val="C8102E"/>
+                          </a:solidFill>
+                          <a:latin typeface="Arial" pitchFamily="34" charset="0"/>
+                          <a:ea typeface="Arial" pitchFamily="34" charset="-122"/>
+                          <a:cs typeface="Arial" pitchFamily="34" charset="-120"/>
+                        </a:rPr>
+                        <a:t>0.19</a:t>
+                      </a:r>
+                      <a:endParaRPr lang="en-US" sz="1250" dirty="0">
+                        <a:latin typeface="Arial" charset="0"/>
+                        <a:ea typeface="Arial" charset="0"/>
+                        <a:cs typeface="Arial" charset="0"/>
+                      </a:endParaRPr>
+                    </a:p>
+                  </a:txBody>
+                  <a:tcPr marL="45720" marR="45720" marT="45720" marB="45720" anchor="ctr">
+                    <a:lnL w="9525" cap="flat" cmpd="sng" algn="ctr">
+                      <a:solidFill>
+                        <a:srgbClr val="BDBDBD"/>
+                      </a:solidFill>
+                      <a:prstDash val="solid"/>
+                      <a:round/>
+                      <a:headEnd type="none" w="med" len="med"/>
+                      <a:tailEnd type="none" w="med" len="med"/>
+                    </a:lnL>
+                    <a:lnR w="9525" cap="flat" cmpd="sng" algn="ctr">
+                      <a:solidFill>
+                        <a:srgbClr val="BDBDBD"/>
+                      </a:solidFill>
+                      <a:prstDash val="solid"/>
+                      <a:round/>
+                      <a:headEnd type="none" w="med" len="med"/>
+                      <a:tailEnd type="none" w="med" len="med"/>
+                    </a:lnR>
+                    <a:lnT w="9525" cap="flat" cmpd="sng" algn="ctr">
+                      <a:solidFill>
+                        <a:srgbClr val="BDBDBD"/>
+                      </a:solidFill>
+                      <a:prstDash val="solid"/>
+                      <a:round/>
+                      <a:headEnd type="none" w="med" len="med"/>
+                      <a:tailEnd type="none" w="med" len="med"/>
+                    </a:lnT>
+                    <a:lnB w="9525" cap="flat" cmpd="sng" algn="ctr">
+                      <a:solidFill>
+                        <a:srgbClr val="BDBDBD"/>
+                      </a:solidFill>
+                      <a:prstDash val="solid"/>
+                      <a:round/>
+                      <a:headEnd type="none" w="med" len="med"/>
+                      <a:tailEnd type="none" w="med" len="med"/>
+                    </a:lnB>
+                  </a:tcPr>
+                </a:tc>
+              </a:tr>
+              <a:tr h="0">
+                <a:tc>
+                  <a:txBody>
+                    <a:bodyPr/>
+                    <a:lstStyle/>
+                    <a:p>
+                      <a:pPr indent="0" marL="0">
+                        <a:buNone/>
+                      </a:pPr>
+                      <a:r>
+                        <a:rPr lang="en-US" sz="1250" b="1" dirty="0">
+                          <a:solidFill>
+                            <a:srgbClr val="1B1B1B"/>
+                          </a:solidFill>
+                          <a:latin typeface="Arial" pitchFamily="34" charset="0"/>
+                          <a:ea typeface="Arial" pitchFamily="34" charset="-122"/>
+                          <a:cs typeface="Arial" pitchFamily="34" charset="-120"/>
+                        </a:rPr>
+                        <a:t>TCN [38]</a:t>
+                      </a:r>
+                      <a:endParaRPr lang="en-US" sz="1250" dirty="0">
+                        <a:latin typeface="Arial" charset="0"/>
+                        <a:ea typeface="Arial" charset="0"/>
+                        <a:cs typeface="Arial" charset="0"/>
+                      </a:endParaRPr>
+                    </a:p>
+                  </a:txBody>
+                  <a:tcPr marL="45720" marR="45720" marT="45720" marB="45720" anchor="ctr">
+                    <a:lnL w="9525" cap="flat" cmpd="sng" algn="ctr">
+                      <a:solidFill>
+                        <a:srgbClr val="BDBDBD"/>
+                      </a:solidFill>
+                      <a:prstDash val="solid"/>
+                      <a:round/>
+                      <a:headEnd type="none" w="med" len="med"/>
+                      <a:tailEnd type="none" w="med" len="med"/>
+                    </a:lnL>
+                    <a:lnR w="9525" cap="flat" cmpd="sng" algn="ctr">
+                      <a:solidFill>
+                        <a:srgbClr val="BDBDBD"/>
+                      </a:solidFill>
+                      <a:prstDash val="solid"/>
+                      <a:round/>
+                      <a:headEnd type="none" w="med" len="med"/>
+                      <a:tailEnd type="none" w="med" len="med"/>
+                    </a:lnR>
+                    <a:lnT w="9525" cap="flat" cmpd="sng" algn="ctr">
+                      <a:solidFill>
+                        <a:srgbClr val="BDBDBD"/>
+                      </a:solidFill>
+                      <a:prstDash val="solid"/>
+                      <a:round/>
+                      <a:headEnd type="none" w="med" len="med"/>
+                      <a:tailEnd type="none" w="med" len="med"/>
+                    </a:lnT>
+                    <a:lnB w="9525" cap="flat" cmpd="sng" algn="ctr">
+                      <a:solidFill>
+                        <a:srgbClr val="BDBDBD"/>
+                      </a:solidFill>
+                      <a:prstDash val="solid"/>
+                      <a:round/>
+                      <a:headEnd type="none" w="med" len="med"/>
+                      <a:tailEnd type="none" w="med" len="med"/>
+                    </a:lnB>
+                  </a:tcPr>
+                </a:tc>
+                <a:tc>
+                  <a:txBody>
+                    <a:bodyPr/>
+                    <a:lstStyle/>
+                    <a:p>
+                      <a:pPr indent="0" marL="0">
+                        <a:buNone/>
+                      </a:pPr>
+                      <a:r>
+                        <a:rPr lang="en-US" sz="1250" dirty="0">
+                          <a:solidFill>
+                            <a:srgbClr val="1B1B1B"/>
+                          </a:solidFill>
+                          <a:latin typeface="Arial" pitchFamily="34" charset="0"/>
+                          <a:ea typeface="Arial" pitchFamily="34" charset="-122"/>
+                          <a:cs typeface="Arial" pitchFamily="34" charset="-120"/>
+                        </a:rPr>
+                        <a:t>Stacked causal convolutions with a widening reach</a:t>
+                      </a:r>
+                      <a:endParaRPr lang="en-US" sz="1250" dirty="0">
+                        <a:latin typeface="Arial" charset="0"/>
+                        <a:ea typeface="Arial" charset="0"/>
+                        <a:cs typeface="Arial" charset="0"/>
+                      </a:endParaRPr>
+                    </a:p>
+                  </a:txBody>
+                  <a:tcPr marL="45720" marR="45720" marT="45720" marB="45720" anchor="ctr">
+                    <a:lnL w="9525" cap="flat" cmpd="sng" algn="ctr">
+                      <a:solidFill>
+                        <a:srgbClr val="BDBDBD"/>
+                      </a:solidFill>
+                      <a:prstDash val="solid"/>
+                      <a:round/>
+                      <a:headEnd type="none" w="med" len="med"/>
+                      <a:tailEnd type="none" w="med" len="med"/>
+                    </a:lnL>
+                    <a:lnR w="9525" cap="flat" cmpd="sng" algn="ctr">
+                      <a:solidFill>
+                        <a:srgbClr val="BDBDBD"/>
+                      </a:solidFill>
+                      <a:prstDash val="solid"/>
+                      <a:round/>
+                      <a:headEnd type="none" w="med" len="med"/>
+                      <a:tailEnd type="none" w="med" len="med"/>
+                    </a:lnR>
+                    <a:lnT w="9525" cap="flat" cmpd="sng" algn="ctr">
+                      <a:solidFill>
+                        <a:srgbClr val="BDBDBD"/>
+                      </a:solidFill>
+                      <a:prstDash val="solid"/>
+                      <a:round/>
+                      <a:headEnd type="none" w="med" len="med"/>
+                      <a:tailEnd type="none" w="med" len="med"/>
+                    </a:lnT>
+                    <a:lnB w="9525" cap="flat" cmpd="sng" algn="ctr">
+                      <a:solidFill>
+                        <a:srgbClr val="BDBDBD"/>
+                      </a:solidFill>
+                      <a:prstDash val="solid"/>
+                      <a:round/>
+                      <a:headEnd type="none" w="med" len="med"/>
+                      <a:tailEnd type="none" w="med" len="med"/>
+                    </a:lnB>
+                  </a:tcPr>
+                </a:tc>
+                <a:tc>
+                  <a:txBody>
+                    <a:bodyPr/>
+                    <a:lstStyle/>
+                    <a:p>
+                      <a:pPr indent="0" marL="0">
+                        <a:buNone/>
+                      </a:pPr>
+                      <a:r>
+                        <a:rPr lang="en-US" sz="1250" dirty="0">
+                          <a:solidFill>
+                            <a:srgbClr val="1B1B1B"/>
+                          </a:solidFill>
+                          <a:latin typeface="Arial" pitchFamily="34" charset="0"/>
+                          <a:ea typeface="Arial" pitchFamily="34" charset="-122"/>
+                          <a:cs typeface="Arial" pitchFamily="34" charset="-120"/>
+                        </a:rPr>
+                        <a:t>No attention; fixed look-back</a:t>
+                      </a:r>
+                      <a:endParaRPr lang="en-US" sz="1250" dirty="0">
+                        <a:latin typeface="Arial" charset="0"/>
+                        <a:ea typeface="Arial" charset="0"/>
+                        <a:cs typeface="Arial" charset="0"/>
+                      </a:endParaRPr>
+                    </a:p>
+                  </a:txBody>
+                  <a:tcPr marL="45720" marR="45720" marT="45720" marB="45720" anchor="ctr">
+                    <a:lnL w="9525" cap="flat" cmpd="sng" algn="ctr">
+                      <a:solidFill>
+                        <a:srgbClr val="BDBDBD"/>
+                      </a:solidFill>
+                      <a:prstDash val="solid"/>
+                      <a:round/>
+                      <a:headEnd type="none" w="med" len="med"/>
+                      <a:tailEnd type="none" w="med" len="med"/>
+                    </a:lnL>
+                    <a:lnR w="9525" cap="flat" cmpd="sng" algn="ctr">
+                      <a:solidFill>
+                        <a:srgbClr val="BDBDBD"/>
+                      </a:solidFill>
+                      <a:prstDash val="solid"/>
+                      <a:round/>
+                      <a:headEnd type="none" w="med" len="med"/>
+                      <a:tailEnd type="none" w="med" len="med"/>
+                    </a:lnR>
+                    <a:lnT w="9525" cap="flat" cmpd="sng" algn="ctr">
+                      <a:solidFill>
+                        <a:srgbClr val="BDBDBD"/>
+                      </a:solidFill>
+                      <a:prstDash val="solid"/>
+                      <a:round/>
+                      <a:headEnd type="none" w="med" len="med"/>
+                      <a:tailEnd type="none" w="med" len="med"/>
+                    </a:lnT>
+                    <a:lnB w="9525" cap="flat" cmpd="sng" algn="ctr">
+                      <a:solidFill>
+                        <a:srgbClr val="BDBDBD"/>
+                      </a:solidFill>
+                      <a:prstDash val="solid"/>
+                      <a:round/>
+                      <a:headEnd type="none" w="med" len="med"/>
+                      <a:tailEnd type="none" w="med" len="med"/>
+                    </a:lnB>
+                  </a:tcPr>
+                </a:tc>
+                <a:tc>
+                  <a:txBody>
+                    <a:bodyPr/>
+                    <a:lstStyle/>
+                    <a:p>
+                      <a:pPr algn="ctr" indent="0" marL="0">
+                        <a:buNone/>
+                      </a:pPr>
+                      <a:r>
+                        <a:rPr lang="en-US" sz="1250" b="1" dirty="0">
+                          <a:solidFill>
+                            <a:srgbClr val="C8102E"/>
+                          </a:solidFill>
+                          <a:latin typeface="Arial" pitchFamily="34" charset="0"/>
+                          <a:ea typeface="Arial" pitchFamily="34" charset="-122"/>
+                          <a:cs typeface="Arial" pitchFamily="34" charset="-120"/>
+                        </a:rPr>
+                        <a:t>0.17</a:t>
+                      </a:r>
+                      <a:endParaRPr lang="en-US" sz="1250" dirty="0">
+                        <a:latin typeface="Arial" charset="0"/>
+                        <a:ea typeface="Arial" charset="0"/>
+                        <a:cs typeface="Arial" charset="0"/>
+                      </a:endParaRPr>
+                    </a:p>
+                  </a:txBody>
+                  <a:tcPr marL="45720" marR="45720" marT="45720" marB="45720" anchor="ctr">
+                    <a:lnL w="9525" cap="flat" cmpd="sng" algn="ctr">
+                      <a:solidFill>
+                        <a:srgbClr val="BDBDBD"/>
+                      </a:solidFill>
+                      <a:prstDash val="solid"/>
+                      <a:round/>
+                      <a:headEnd type="none" w="med" len="med"/>
+                      <a:tailEnd type="none" w="med" len="med"/>
+                    </a:lnL>
+                    <a:lnR w="9525" cap="flat" cmpd="sng" algn="ctr">
+                      <a:solidFill>
+                        <a:srgbClr val="BDBDBD"/>
+                      </a:solidFill>
+                      <a:prstDash val="solid"/>
+                      <a:round/>
+                      <a:headEnd type="none" w="med" len="med"/>
+                      <a:tailEnd type="none" w="med" len="med"/>
+                    </a:lnR>
+                    <a:lnT w="9525" cap="flat" cmpd="sng" algn="ctr">
+                      <a:solidFill>
+                        <a:srgbClr val="BDBDBD"/>
+                      </a:solidFill>
+                      <a:prstDash val="solid"/>
+                      <a:round/>
+                      <a:headEnd type="none" w="med" len="med"/>
+                      <a:tailEnd type="none" w="med" len="med"/>
+                    </a:lnT>
+                    <a:lnB w="9525" cap="flat" cmpd="sng" algn="ctr">
+                      <a:solidFill>
+                        <a:srgbClr val="BDBDBD"/>
+                      </a:solidFill>
+                      <a:prstDash val="solid"/>
+                      <a:round/>
+                      <a:headEnd type="none" w="med" len="med"/>
+                      <a:tailEnd type="none" w="med" len="med"/>
+                    </a:lnB>
+                  </a:tcPr>
+                </a:tc>
+              </a:tr>
+            </a:tbl>
+          </a:graphicData>
+        </a:graphic>
+      </p:graphicFrame>
+      <p:sp>
+        <p:nvSpPr>
+          <p:cNvPr id="5" name="text"/>
+          <p:cNvSpPr txBox="1"/>
+          <p:nvPr/>
+        </p:nvSpPr>
+        <p:spPr>
+          <a:xfrm>
+            <a:off x="548640" y="5760720"/>
+            <a:ext cx="11094415" cy="365760"/>
+          </a:xfrm>
+          <a:prstGeom prst="rect">
+            <a:avLst/>
+          </a:prstGeom>
+          <a:noFill/>
+          <a:ln/>
+        </p:spPr>
+        <p:txBody>
+          <a:bodyPr wrap="square" lIns="0" tIns="0" rIns="0" bIns="0" rtlCol="0" anchor="t"/>
+          <a:lstStyle/>
+          <a:p>
+            <a:pPr algn="l" indent="0" marL="0">
+              <a:buNone/>
+            </a:pPr>
+            <a:r>
+              <a:rPr lang="en-US" sz="1100" dirty="0">
+                <a:solidFill>
+                  <a:srgbClr val="5E5E5E"/>
+                </a:solidFill>
+              </a:rPr>
+              <a:t>Utility: normalised utility on the MIMIC-IV development test split, one seed, preliminary [41]. Every 95 % CI is above zero and the intervals overlap, so the order is not a ranking.</a:t>
+            </a:r>
+            <a:endParaRPr lang="en-US" sz="1100" dirty="0"/>
+          </a:p>
+        </p:txBody>
+      </p:sp>
+      <p:sp>
+        <p:nvSpPr>
+          <p:cNvPr id="6" name="references"/>
+          <p:cNvSpPr txBox="1"/>
+          <p:nvPr/>
+        </p:nvSpPr>
+        <p:spPr>
+          <a:xfrm>
+            <a:off x="548640" y="5943600"/>
+            <a:ext cx="10180015" cy="457200"/>
+          </a:xfrm>
+          <a:prstGeom prst="rect">
+            <a:avLst/>
+          </a:prstGeom>
+          <a:noFill/>
+          <a:ln/>
+        </p:spPr>
+        <p:txBody>
+          <a:bodyPr wrap="square" lIns="0" tIns="0" rIns="0" bIns="0" rtlCol="0" anchor="b"/>
+          <a:lstStyle/>
+          <a:p>
+            <a:pPr indent="0" marL="0">
+              <a:buNone/>
+            </a:pPr>
+            <a:r>
+              <a:rPr lang="en-US" sz="950" dirty="0">
+                <a:solidFill>
+                  <a:srgbClr val="5E5E5E"/>
+                </a:solidFill>
+              </a:rPr>
+              <a:t>[21] Morrill et al., Crit Care Med 2020   [36] Vaswani et al., NeurIPS 2017   [37] Che et al., Sci Rep 2018   [38] Bai et al., arXiv 2018   [46] Friedman, Ann Stat 2001</a:t>
+            </a:r>
+            <a:endParaRPr lang="en-US" sz="950" dirty="0"/>
+          </a:p>
+        </p:txBody>
+      </p:sp>
+      <p:sp>
+        <p:nvSpPr>
+          <p:cNvPr id="25" name="Slide Number Placeholder 0"/>
+          <p:cNvSpPr>
+            <a:spLocks noGrp="1"/>
+          </p:cNvSpPr>
+          <p:nvPr>
+            <p:ph type="sldNum" sz="quarter" idx="4294967295"/>
+          </p:nvPr>
+        </p:nvSpPr>
+        <p:spPr>
+          <a:xfrm>
+            <a:off x="10911535" y="6437376"/>
+            <a:ext cx="731520" cy="274320"/>
+          </a:xfrm>
+          <a:prstGeom prst="rect">
+            <a:avLst/>
+          </a:prstGeom>
+          <a:extLst>
+            <a:ext uri="{C572A759-6A51-4108-AA02-DFA0A04FC94B}">
+              <ma14:wrappingTextBoxFlag xmlns:ma14="http://schemas.microsoft.com/office/mac/drawingml/2011/main" val="0"/>
+            </a:ext>
+          </a:extLst>
+        </p:spPr>
+        <p:txBody>
+          <a:bodyPr/>
+          <a:lstStyle>
+            <a:lvl1pPr>
+              <a:defRPr sz="1200">
+                <a:solidFill>
+                  <a:srgbClr val="C8102E"/>
+                </a:solidFill>
+              </a:defRPr>
+            </a:lvl1pPr>
+          </a:lstStyle>
+          <a:p>
+            <a:pPr algn="r"/>
+            <a:fld id="{F7021451-1387-4CA6-816F-3879F97B5CBC}" type="slidenum">
+              <a:rPr b="1" lang="en-US"/>
+              <a:t>20</a:t>
+            </a:fld>
+            <a:endParaRPr lang="en-US"/>
+          </a:p>
+        </p:txBody>
+      </p:sp>
+    </p:spTree>
+  </p:cSld>
+  <p:clrMapOvr>
+    <a:masterClrMapping/>
+  </p:clrMapOvr>
+</p:sld>
+</file>
+
+<file path=ppt/slides/slide21.xml><?xml version="1.0" encoding="utf-8"?>
+<p:sld xmlns:a="http://schemas.openxmlformats.org/drawingml/2006/main" xmlns:r="http://schemas.openxmlformats.org/officeDocument/2006/relationships" xmlns:p="http://schemas.openxmlformats.org/presentationml/2006/main">
+  <p:cSld name="Slide 21">
+    <p:spTree>
+      <p:nvGrpSpPr>
+        <p:cNvPr id="1" name=""/>
+        <p:cNvGrpSpPr/>
+        <p:nvPr/>
+      </p:nvGrpSpPr>
+      <p:grpSpPr>
+        <a:xfrm>
+          <a:off x="0" y="0"/>
+          <a:ext cx="0" cy="0"/>
+          <a:chOff x="0" y="0"/>
+          <a:chExt cx="0" cy="0"/>
+        </a:xfrm>
+      </p:grpSpPr>
+      <p:sp>
+        <p:nvSpPr>
+          <p:cNvPr id="2" name="section label"/>
+          <p:cNvSpPr txBox="1"/>
+          <p:nvPr/>
+        </p:nvSpPr>
+        <p:spPr>
+          <a:xfrm>
+            <a:off x="548640" y="237744"/>
+            <a:ext cx="7315200" cy="274320"/>
+          </a:xfrm>
+          <a:prstGeom prst="rect">
+            <a:avLst/>
+          </a:prstGeom>
+          <a:noFill/>
+          <a:ln/>
+        </p:spPr>
+        <p:txBody>
+          <a:bodyPr wrap="square" lIns="0" tIns="0" rIns="0" bIns="0" rtlCol="0" anchor="t"/>
+          <a:lstStyle/>
+          <a:p>
+            <a:pPr algn="l" indent="0" marL="0">
+              <a:buNone/>
+            </a:pPr>
+            <a:r>
+              <a:rPr lang="en-US" sz="1100" b="1" dirty="0">
+                <a:solidFill>
+                  <a:srgbClr val="C8102E"/>
+                </a:solidFill>
+              </a:rPr>
+              <a:t>BACKUP</a:t>
+            </a:r>
+            <a:endParaRPr lang="en-US" sz="1100" dirty="0"/>
+          </a:p>
+        </p:txBody>
+      </p:sp>
+      <p:sp>
+        <p:nvSpPr>
+          <p:cNvPr id="3" name="Text 0"/>
+          <p:cNvSpPr/>
+          <p:nvPr>
+            <p:ph idx="100" type="title" hasCustomPrompt="1"/>
+          </p:nvPr>
+        </p:nvSpPr>
+        <p:spPr>
+          <a:xfrm>
+            <a:off x="548640" y="548640"/>
+            <a:ext cx="11094415" cy="868680"/>
+          </a:xfrm>
+          <a:prstGeom prst="rect">
+            <a:avLst/>
+          </a:prstGeom>
+          <a:noFill/>
+          <a:ln/>
+        </p:spPr>
+        <p:txBody>
+          <a:bodyPr wrap="square" lIns="0" tIns="0" rIns="0" bIns="0" rtlCol="0" anchor="t"/>
+          <a:lstStyle/>
+          <a:p>
+            <a:pPr algn="l" indent="0" marL="0">
+              <a:buNone/>
+            </a:pPr>
+            <a:r>
+              <a:rPr lang="en-US" sz="2400" b="1" dirty="0">
+                <a:solidFill>
+                  <a:srgbClr val="1B1B1B"/>
+                </a:solidFill>
+                <a:latin typeface="Arial" pitchFamily="34" charset="0"/>
+                <a:ea typeface="Arial" pitchFamily="34" charset="-122"/>
+                <a:cs typeface="Arial" pitchFamily="34" charset="-120"/>
+              </a:rPr>
+              <a:t>Every model compared (2 of 2): channel encoders, self-supervised pretraining, ensemble</a:t>
+            </a:r>
+            <a:endParaRPr lang="en-US" sz="2400" dirty="0"/>
+          </a:p>
+        </p:txBody>
+      </p:sp>
+      <p:graphicFrame>
+        <p:nvGraphicFramePr>
+          <p:cNvPr id="22" name="models table"/>
+          <p:cNvGraphicFramePr>
+            <a:graphicFrameLocks noGrp="1"/>
+          </p:cNvGraphicFramePr>
+          <p:nvPr>
+            <p:extLst>
+              <p:ext uri="{D42A27DB-BD31-4B8C-83A1-F6EECF244321}">
+                <p14:modId xmlns:p14="http://schemas.microsoft.com/office/powerpoint/2010/main" val="1579011935"/>
+              </p:ext>
+            </p:extLst>
+          </p:nvPr>
+        </p:nvGraphicFramePr>
+        <p:xfrm>
+          <a:off x="548640" y="1417320"/>
+          <a:ext cx="11094415" cy="914400"/>
+        </p:xfrm>
+        <a:graphic>
+          <a:graphicData uri="http://schemas.openxmlformats.org/drawingml/2006/table">
+            <a:tbl>
+              <a:tblPr/>
+              <a:tblGrid>
+                <a:gridCol w="2331720"/>
+                <a:gridCol w="4069080"/>
+                <a:gridCol w="3776472"/>
+                <a:gridCol w="914400"/>
+              </a:tblGrid>
+              <a:tr h="0">
+                <a:tc>
+                  <a:txBody>
+                    <a:bodyPr/>
+                    <a:lstStyle/>
+                    <a:p>
+                      <a:pPr indent="0" marL="0">
+                        <a:buNone/>
+                      </a:pPr>
+                      <a:r>
+                        <a:rPr lang="en-US" sz="1200" b="1" dirty="0">
+                          <a:solidFill>
+                            <a:srgbClr val="FFFFFF"/>
+                          </a:solidFill>
+                          <a:latin typeface="Arial" pitchFamily="34" charset="0"/>
+                          <a:ea typeface="Arial" pitchFamily="34" charset="-122"/>
+                          <a:cs typeface="Arial" pitchFamily="34" charset="-120"/>
+                        </a:rPr>
+                        <a:t>Model</a:t>
+                      </a:r>
+                      <a:endParaRPr lang="en-US" sz="1200" dirty="0">
+                        <a:latin typeface="Arial" charset="0"/>
+                        <a:ea typeface="Arial" charset="0"/>
+                        <a:cs typeface="Arial" charset="0"/>
+                      </a:endParaRPr>
+                    </a:p>
+                  </a:txBody>
+                  <a:tcPr marL="45720" marR="45720" marT="45720" marB="45720" anchor="ctr">
+                    <a:lnL w="9525" cap="flat" cmpd="sng" algn="ctr">
+                      <a:solidFill>
+                        <a:srgbClr val="BDBDBD"/>
+                      </a:solidFill>
+                      <a:prstDash val="solid"/>
+                      <a:round/>
+                      <a:headEnd type="none" w="med" len="med"/>
+                      <a:tailEnd type="none" w="med" len="med"/>
+                    </a:lnL>
+                    <a:lnR w="9525" cap="flat" cmpd="sng" algn="ctr">
+                      <a:solidFill>
+                        <a:srgbClr val="BDBDBD"/>
+                      </a:solidFill>
+                      <a:prstDash val="solid"/>
+                      <a:round/>
+                      <a:headEnd type="none" w="med" len="med"/>
+                      <a:tailEnd type="none" w="med" len="med"/>
+                    </a:lnR>
+                    <a:lnT w="9525" cap="flat" cmpd="sng" algn="ctr">
+                      <a:solidFill>
+                        <a:srgbClr val="BDBDBD"/>
+                      </a:solidFill>
+                      <a:prstDash val="solid"/>
+                      <a:round/>
+                      <a:headEnd type="none" w="med" len="med"/>
+                      <a:tailEnd type="none" w="med" len="med"/>
+                    </a:lnT>
+                    <a:lnB w="9525" cap="flat" cmpd="sng" algn="ctr">
+                      <a:solidFill>
+                        <a:srgbClr val="BDBDBD"/>
+                      </a:solidFill>
+                      <a:prstDash val="solid"/>
+                      <a:round/>
+                      <a:headEnd type="none" w="med" len="med"/>
+                      <a:tailEnd type="none" w="med" len="med"/>
+                    </a:lnB>
+                    <a:solidFill>
+                      <a:srgbClr val="1B1B1B"/>
+                    </a:solidFill>
+                  </a:tcPr>
+                </a:tc>
+                <a:tc>
+                  <a:txBody>
+                    <a:bodyPr/>
+                    <a:lstStyle/>
+                    <a:p>
+                      <a:pPr indent="0" marL="0">
+                        <a:buNone/>
+                      </a:pPr>
+                      <a:r>
+                        <a:rPr lang="en-US" sz="1200" b="1" dirty="0">
+                          <a:solidFill>
+                            <a:srgbClr val="FFFFFF"/>
+                          </a:solidFill>
+                          <a:latin typeface="Arial" pitchFamily="34" charset="0"/>
+                          <a:ea typeface="Arial" pitchFamily="34" charset="-122"/>
+                          <a:cs typeface="Arial" pitchFamily="34" charset="-120"/>
+                        </a:rPr>
+                        <a:t>Core idea</a:t>
+                      </a:r>
+                      <a:endParaRPr lang="en-US" sz="1200" dirty="0">
+                        <a:latin typeface="Arial" charset="0"/>
+                        <a:ea typeface="Arial" charset="0"/>
+                        <a:cs typeface="Arial" charset="0"/>
+                      </a:endParaRPr>
+                    </a:p>
+                  </a:txBody>
+                  <a:tcPr marL="45720" marR="45720" marT="45720" marB="45720" anchor="ctr">
+                    <a:lnL w="9525" cap="flat" cmpd="sng" algn="ctr">
+                      <a:solidFill>
+                        <a:srgbClr val="BDBDBD"/>
+                      </a:solidFill>
+                      <a:prstDash val="solid"/>
+                      <a:round/>
+                      <a:headEnd type="none" w="med" len="med"/>
+                      <a:tailEnd type="none" w="med" len="med"/>
+                    </a:lnL>
+                    <a:lnR w="9525" cap="flat" cmpd="sng" algn="ctr">
+                      <a:solidFill>
+                        <a:srgbClr val="BDBDBD"/>
+                      </a:solidFill>
+                      <a:prstDash val="solid"/>
+                      <a:round/>
+                      <a:headEnd type="none" w="med" len="med"/>
+                      <a:tailEnd type="none" w="med" len="med"/>
+                    </a:lnR>
+                    <a:lnT w="9525" cap="flat" cmpd="sng" algn="ctr">
+                      <a:solidFill>
+                        <a:srgbClr val="BDBDBD"/>
+                      </a:solidFill>
+                      <a:prstDash val="solid"/>
+                      <a:round/>
+                      <a:headEnd type="none" w="med" len="med"/>
+                      <a:tailEnd type="none" w="med" len="med"/>
+                    </a:lnT>
+                    <a:lnB w="9525" cap="flat" cmpd="sng" algn="ctr">
+                      <a:solidFill>
+                        <a:srgbClr val="BDBDBD"/>
+                      </a:solidFill>
+                      <a:prstDash val="solid"/>
+                      <a:round/>
+                      <a:headEnd type="none" w="med" len="med"/>
+                      <a:tailEnd type="none" w="med" len="med"/>
+                    </a:lnB>
+                    <a:solidFill>
+                      <a:srgbClr val="1B1B1B"/>
+                    </a:solidFill>
+                  </a:tcPr>
+                </a:tc>
+                <a:tc>
+                  <a:txBody>
+                    <a:bodyPr/>
+                    <a:lstStyle/>
+                    <a:p>
+                      <a:pPr indent="0" marL="0">
+                        <a:buNone/>
+                      </a:pPr>
+                      <a:r>
+                        <a:rPr lang="en-US" sz="1200" b="1" dirty="0">
+                          <a:solidFill>
+                            <a:srgbClr val="FFFFFF"/>
+                          </a:solidFill>
+                          <a:latin typeface="Arial" pitchFamily="34" charset="0"/>
+                          <a:ea typeface="Arial" pitchFamily="34" charset="-122"/>
+                          <a:cs typeface="Arial" pitchFamily="34" charset="-120"/>
+                        </a:rPr>
+                        <a:t>How it differs</a:t>
+                      </a:r>
+                      <a:endParaRPr lang="en-US" sz="1200" dirty="0">
+                        <a:latin typeface="Arial" charset="0"/>
+                        <a:ea typeface="Arial" charset="0"/>
+                        <a:cs typeface="Arial" charset="0"/>
+                      </a:endParaRPr>
+                    </a:p>
+                  </a:txBody>
+                  <a:tcPr marL="45720" marR="45720" marT="45720" marB="45720" anchor="ctr">
+                    <a:lnL w="9525" cap="flat" cmpd="sng" algn="ctr">
+                      <a:solidFill>
+                        <a:srgbClr val="BDBDBD"/>
+                      </a:solidFill>
+                      <a:prstDash val="solid"/>
+                      <a:round/>
+                      <a:headEnd type="none" w="med" len="med"/>
+                      <a:tailEnd type="none" w="med" len="med"/>
+                    </a:lnL>
+                    <a:lnR w="9525" cap="flat" cmpd="sng" algn="ctr">
+                      <a:solidFill>
+                        <a:srgbClr val="BDBDBD"/>
+                      </a:solidFill>
+                      <a:prstDash val="solid"/>
+                      <a:round/>
+                      <a:headEnd type="none" w="med" len="med"/>
+                      <a:tailEnd type="none" w="med" len="med"/>
+                    </a:lnR>
+                    <a:lnT w="9525" cap="flat" cmpd="sng" algn="ctr">
+                      <a:solidFill>
+                        <a:srgbClr val="BDBDBD"/>
+                      </a:solidFill>
+                      <a:prstDash val="solid"/>
+                      <a:round/>
+                      <a:headEnd type="none" w="med" len="med"/>
+                      <a:tailEnd type="none" w="med" len="med"/>
+                    </a:lnT>
+                    <a:lnB w="9525" cap="flat" cmpd="sng" algn="ctr">
+                      <a:solidFill>
+                        <a:srgbClr val="BDBDBD"/>
+                      </a:solidFill>
+                      <a:prstDash val="solid"/>
+                      <a:round/>
+                      <a:headEnd type="none" w="med" len="med"/>
+                      <a:tailEnd type="none" w="med" len="med"/>
+                    </a:lnB>
+                    <a:solidFill>
+                      <a:srgbClr val="1B1B1B"/>
+                    </a:solidFill>
+                  </a:tcPr>
+                </a:tc>
+                <a:tc>
+                  <a:txBody>
+                    <a:bodyPr/>
+                    <a:lstStyle/>
+                    <a:p>
+                      <a:pPr indent="0" marL="0">
+                        <a:buNone/>
+                      </a:pPr>
+                      <a:r>
+                        <a:rPr lang="en-US" sz="1200" b="1" dirty="0">
+                          <a:solidFill>
+                            <a:srgbClr val="FFFFFF"/>
+                          </a:solidFill>
+                          <a:latin typeface="Arial" pitchFamily="34" charset="0"/>
+                          <a:ea typeface="Arial" pitchFamily="34" charset="-122"/>
+                          <a:cs typeface="Arial" pitchFamily="34" charset="-120"/>
+                        </a:rPr>
+                        <a:t>Utility</a:t>
+                      </a:r>
+                      <a:endParaRPr lang="en-US" sz="1200" dirty="0">
+                        <a:latin typeface="Arial" charset="0"/>
+                        <a:ea typeface="Arial" charset="0"/>
+                        <a:cs typeface="Arial" charset="0"/>
+                      </a:endParaRPr>
+                    </a:p>
+                  </a:txBody>
+                  <a:tcPr marL="45720" marR="45720" marT="45720" marB="45720" anchor="ctr">
+                    <a:lnL w="9525" cap="flat" cmpd="sng" algn="ctr">
+                      <a:solidFill>
+                        <a:srgbClr val="BDBDBD"/>
+                      </a:solidFill>
+                      <a:prstDash val="solid"/>
+                      <a:round/>
+                      <a:headEnd type="none" w="med" len="med"/>
+                      <a:tailEnd type="none" w="med" len="med"/>
+                    </a:lnL>
+                    <a:lnR w="9525" cap="flat" cmpd="sng" algn="ctr">
+                      <a:solidFill>
+                        <a:srgbClr val="BDBDBD"/>
+                      </a:solidFill>
+                      <a:prstDash val="solid"/>
+                      <a:round/>
+                      <a:headEnd type="none" w="med" len="med"/>
+                      <a:tailEnd type="none" w="med" len="med"/>
+                    </a:lnR>
+                    <a:lnT w="9525" cap="flat" cmpd="sng" algn="ctr">
+                      <a:solidFill>
+                        <a:srgbClr val="BDBDBD"/>
+                      </a:solidFill>
+                      <a:prstDash val="solid"/>
+                      <a:round/>
+                      <a:headEnd type="none" w="med" len="med"/>
+                      <a:tailEnd type="none" w="med" len="med"/>
+                    </a:lnT>
+                    <a:lnB w="9525" cap="flat" cmpd="sng" algn="ctr">
+                      <a:solidFill>
+                        <a:srgbClr val="BDBDBD"/>
+                      </a:solidFill>
+                      <a:prstDash val="solid"/>
+                      <a:round/>
+                      <a:headEnd type="none" w="med" len="med"/>
+                      <a:tailEnd type="none" w="med" len="med"/>
+                    </a:lnB>
+                    <a:solidFill>
+                      <a:srgbClr val="1B1B1B"/>
+                    </a:solidFill>
+                  </a:tcPr>
+                </a:tc>
+              </a:tr>
+              <a:tr h="0">
+                <a:tc>
+                  <a:txBody>
+                    <a:bodyPr/>
+                    <a:lstStyle/>
+                    <a:p>
+                      <a:pPr indent="0" marL="0">
+                        <a:buNone/>
+                      </a:pPr>
+                      <a:r>
+                        <a:rPr lang="en-US" sz="1250" b="1" dirty="0">
+                          <a:solidFill>
+                            <a:srgbClr val="1B1B1B"/>
+                          </a:solidFill>
+                          <a:latin typeface="Arial" pitchFamily="34" charset="0"/>
+                          <a:ea typeface="Arial" pitchFamily="34" charset="-122"/>
+                          <a:cs typeface="Arial" pitchFamily="34" charset="-120"/>
+                        </a:rPr>
+                        <a:t>CNN to OSTA</a:t>
+                      </a:r>
+                      <a:endParaRPr lang="en-US" sz="1250" dirty="0">
+                        <a:latin typeface="Arial" charset="0"/>
+                        <a:ea typeface="Arial" charset="0"/>
+                        <a:cs typeface="Arial" charset="0"/>
+                      </a:endParaRPr>
+                    </a:p>
+                  </a:txBody>
+                  <a:tcPr marL="45720" marR="45720" marT="45720" marB="45720" anchor="ctr">
+                    <a:lnL w="9525" cap="flat" cmpd="sng" algn="ctr">
+                      <a:solidFill>
+                        <a:srgbClr val="BDBDBD"/>
+                      </a:solidFill>
+                      <a:prstDash val="solid"/>
+                      <a:round/>
+                      <a:headEnd type="none" w="med" len="med"/>
+                      <a:tailEnd type="none" w="med" len="med"/>
+                    </a:lnL>
+                    <a:lnR w="9525" cap="flat" cmpd="sng" algn="ctr">
+                      <a:solidFill>
+                        <a:srgbClr val="BDBDBD"/>
+                      </a:solidFill>
+                      <a:prstDash val="solid"/>
+                      <a:round/>
+                      <a:headEnd type="none" w="med" len="med"/>
+                      <a:tailEnd type="none" w="med" len="med"/>
+                    </a:lnR>
+                    <a:lnT w="9525" cap="flat" cmpd="sng" algn="ctr">
+                      <a:solidFill>
+                        <a:srgbClr val="BDBDBD"/>
+                      </a:solidFill>
+                      <a:prstDash val="solid"/>
+                      <a:round/>
+                      <a:headEnd type="none" w="med" len="med"/>
+                      <a:tailEnd type="none" w="med" len="med"/>
+                    </a:lnT>
+                    <a:lnB w="9525" cap="flat" cmpd="sng" algn="ctr">
+                      <a:solidFill>
+                        <a:srgbClr val="BDBDBD"/>
+                      </a:solidFill>
+                      <a:prstDash val="solid"/>
+                      <a:round/>
+                      <a:headEnd type="none" w="med" len="med"/>
+                      <a:tailEnd type="none" w="med" len="med"/>
+                    </a:lnB>
+                  </a:tcPr>
+                </a:tc>
+                <a:tc>
+                  <a:txBody>
+                    <a:bodyPr/>
+                    <a:lstStyle/>
+                    <a:p>
+                      <a:pPr indent="0" marL="0">
+                        <a:buNone/>
+                      </a:pPr>
+                      <a:r>
+                        <a:rPr lang="en-US" sz="1250" dirty="0">
+                          <a:solidFill>
+                            <a:srgbClr val="1B1B1B"/>
+                          </a:solidFill>
+                          <a:latin typeface="Arial" pitchFamily="34" charset="0"/>
+                          <a:ea typeface="Arial" pitchFamily="34" charset="-122"/>
+                          <a:cs typeface="Arial" pitchFamily="34" charset="-120"/>
+                        </a:rPr>
+                        <a:t>A small convolution per channel over value, measured flag and age, then OSTA</a:t>
+                      </a:r>
+                      <a:endParaRPr lang="en-US" sz="1250" dirty="0">
+                        <a:latin typeface="Arial" charset="0"/>
+                        <a:ea typeface="Arial" charset="0"/>
+                        <a:cs typeface="Arial" charset="0"/>
+                      </a:endParaRPr>
+                    </a:p>
+                  </a:txBody>
+                  <a:tcPr marL="45720" marR="45720" marT="45720" marB="45720" anchor="ctr">
+                    <a:lnL w="9525" cap="flat" cmpd="sng" algn="ctr">
+                      <a:solidFill>
+                        <a:srgbClr val="BDBDBD"/>
+                      </a:solidFill>
+                      <a:prstDash val="solid"/>
+                      <a:round/>
+                      <a:headEnd type="none" w="med" len="med"/>
+                      <a:tailEnd type="none" w="med" len="med"/>
+                    </a:lnL>
+                    <a:lnR w="9525" cap="flat" cmpd="sng" algn="ctr">
+                      <a:solidFill>
+                        <a:srgbClr val="BDBDBD"/>
+                      </a:solidFill>
+                      <a:prstDash val="solid"/>
+                      <a:round/>
+                      <a:headEnd type="none" w="med" len="med"/>
+                      <a:tailEnd type="none" w="med" len="med"/>
+                    </a:lnR>
+                    <a:lnT w="9525" cap="flat" cmpd="sng" algn="ctr">
+                      <a:solidFill>
+                        <a:srgbClr val="BDBDBD"/>
+                      </a:solidFill>
+                      <a:prstDash val="solid"/>
+                      <a:round/>
+                      <a:headEnd type="none" w="med" len="med"/>
+                      <a:tailEnd type="none" w="med" len="med"/>
+                    </a:lnT>
+                    <a:lnB w="9525" cap="flat" cmpd="sng" algn="ctr">
+                      <a:solidFill>
+                        <a:srgbClr val="BDBDBD"/>
+                      </a:solidFill>
+                      <a:prstDash val="solid"/>
+                      <a:round/>
+                      <a:headEnd type="none" w="med" len="med"/>
+                      <a:tailEnd type="none" w="med" len="med"/>
+                    </a:lnB>
+                  </a:tcPr>
+                </a:tc>
+                <a:tc>
+                  <a:txBody>
+                    <a:bodyPr/>
+                    <a:lstStyle/>
+                    <a:p>
+                      <a:pPr indent="0" marL="0">
+                        <a:buNone/>
+                      </a:pPr>
+                      <a:r>
+                        <a:rPr lang="en-US" sz="1250" dirty="0">
+                          <a:solidFill>
+                            <a:srgbClr val="1B1B1B"/>
+                          </a:solidFill>
+                          <a:latin typeface="Arial" pitchFamily="34" charset="0"/>
+                          <a:ea typeface="Arial" pitchFamily="34" charset="-122"/>
+                          <a:cs typeface="Arial" pitchFamily="34" charset="-120"/>
+                        </a:rPr>
+                        <a:t>Learns each signal's own pattern before organ grouping</a:t>
+                      </a:r>
+                      <a:endParaRPr lang="en-US" sz="1250" dirty="0">
+                        <a:latin typeface="Arial" charset="0"/>
+                        <a:ea typeface="Arial" charset="0"/>
+                        <a:cs typeface="Arial" charset="0"/>
+                      </a:endParaRPr>
+                    </a:p>
+                  </a:txBody>
+                  <a:tcPr marL="45720" marR="45720" marT="45720" marB="45720" anchor="ctr">
+                    <a:lnL w="9525" cap="flat" cmpd="sng" algn="ctr">
+                      <a:solidFill>
+                        <a:srgbClr val="BDBDBD"/>
+                      </a:solidFill>
+                      <a:prstDash val="solid"/>
+                      <a:round/>
+                      <a:headEnd type="none" w="med" len="med"/>
+                      <a:tailEnd type="none" w="med" len="med"/>
+                    </a:lnL>
+                    <a:lnR w="9525" cap="flat" cmpd="sng" algn="ctr">
+                      <a:solidFill>
+                        <a:srgbClr val="BDBDBD"/>
+                      </a:solidFill>
+                      <a:prstDash val="solid"/>
+                      <a:round/>
+                      <a:headEnd type="none" w="med" len="med"/>
+                      <a:tailEnd type="none" w="med" len="med"/>
+                    </a:lnR>
+                    <a:lnT w="9525" cap="flat" cmpd="sng" algn="ctr">
+                      <a:solidFill>
+                        <a:srgbClr val="BDBDBD"/>
+                      </a:solidFill>
+                      <a:prstDash val="solid"/>
+                      <a:round/>
+                      <a:headEnd type="none" w="med" len="med"/>
+                      <a:tailEnd type="none" w="med" len="med"/>
+                    </a:lnT>
+                    <a:lnB w="9525" cap="flat" cmpd="sng" algn="ctr">
+                      <a:solidFill>
+                        <a:srgbClr val="BDBDBD"/>
+                      </a:solidFill>
+                      <a:prstDash val="solid"/>
+                      <a:round/>
+                      <a:headEnd type="none" w="med" len="med"/>
+                      <a:tailEnd type="none" w="med" len="med"/>
+                    </a:lnB>
+                  </a:tcPr>
+                </a:tc>
+                <a:tc>
+                  <a:txBody>
+                    <a:bodyPr/>
+                    <a:lstStyle/>
+                    <a:p>
+                      <a:pPr algn="ctr" indent="0" marL="0">
+                        <a:buNone/>
+                      </a:pPr>
+                      <a:r>
+                        <a:rPr lang="en-US" sz="1250" b="1" dirty="0">
+                          <a:solidFill>
+                            <a:srgbClr val="C8102E"/>
+                          </a:solidFill>
+                          <a:latin typeface="Arial" pitchFamily="34" charset="0"/>
+                          <a:ea typeface="Arial" pitchFamily="34" charset="-122"/>
+                          <a:cs typeface="Arial" pitchFamily="34" charset="-120"/>
+                        </a:rPr>
+                        <a:t>0.28</a:t>
+                      </a:r>
+                      <a:endParaRPr lang="en-US" sz="1250" dirty="0">
+                        <a:latin typeface="Arial" charset="0"/>
+                        <a:ea typeface="Arial" charset="0"/>
+                        <a:cs typeface="Arial" charset="0"/>
+                      </a:endParaRPr>
+                    </a:p>
+                  </a:txBody>
+                  <a:tcPr marL="45720" marR="45720" marT="45720" marB="45720" anchor="ctr">
+                    <a:lnL w="9525" cap="flat" cmpd="sng" algn="ctr">
+                      <a:solidFill>
+                        <a:srgbClr val="BDBDBD"/>
+                      </a:solidFill>
+                      <a:prstDash val="solid"/>
+                      <a:round/>
+                      <a:headEnd type="none" w="med" len="med"/>
+                      <a:tailEnd type="none" w="med" len="med"/>
+                    </a:lnL>
+                    <a:lnR w="9525" cap="flat" cmpd="sng" algn="ctr">
+                      <a:solidFill>
+                        <a:srgbClr val="BDBDBD"/>
+                      </a:solidFill>
+                      <a:prstDash val="solid"/>
+                      <a:round/>
+                      <a:headEnd type="none" w="med" len="med"/>
+                      <a:tailEnd type="none" w="med" len="med"/>
+                    </a:lnR>
+                    <a:lnT w="9525" cap="flat" cmpd="sng" algn="ctr">
+                      <a:solidFill>
+                        <a:srgbClr val="BDBDBD"/>
+                      </a:solidFill>
+                      <a:prstDash val="solid"/>
+                      <a:round/>
+                      <a:headEnd type="none" w="med" len="med"/>
+                      <a:tailEnd type="none" w="med" len="med"/>
+                    </a:lnT>
+                    <a:lnB w="9525" cap="flat" cmpd="sng" algn="ctr">
+                      <a:solidFill>
+                        <a:srgbClr val="BDBDBD"/>
+                      </a:solidFill>
+                      <a:prstDash val="solid"/>
+                      <a:round/>
+                      <a:headEnd type="none" w="med" len="med"/>
+                      <a:tailEnd type="none" w="med" len="med"/>
+                    </a:lnB>
+                  </a:tcPr>
+                </a:tc>
+              </a:tr>
+              <a:tr h="0">
+                <a:tc>
+                  <a:txBody>
+                    <a:bodyPr/>
+                    <a:lstStyle/>
+                    <a:p>
+                      <a:pPr indent="0" marL="0">
+                        <a:buNone/>
+                      </a:pPr>
+                      <a:r>
+                        <a:rPr lang="en-US" sz="1250" b="1" dirty="0">
+                          <a:solidFill>
+                            <a:srgbClr val="1B1B1B"/>
+                          </a:solidFill>
+                          <a:latin typeface="Arial" pitchFamily="34" charset="0"/>
+                          <a:ea typeface="Arial" pitchFamily="34" charset="-122"/>
+                          <a:cs typeface="Arial" pitchFamily="34" charset="-120"/>
+                        </a:rPr>
+                        <a:t>Event OSTA [47]</a:t>
+                      </a:r>
+                      <a:endParaRPr lang="en-US" sz="1250" dirty="0">
+                        <a:latin typeface="Arial" charset="0"/>
+                        <a:ea typeface="Arial" charset="0"/>
+                        <a:cs typeface="Arial" charset="0"/>
+                      </a:endParaRPr>
+                    </a:p>
+                  </a:txBody>
+                  <a:tcPr marL="45720" marR="45720" marT="45720" marB="45720" anchor="ctr">
+                    <a:lnL w="9525" cap="flat" cmpd="sng" algn="ctr">
+                      <a:solidFill>
+                        <a:srgbClr val="BDBDBD"/>
+                      </a:solidFill>
+                      <a:prstDash val="solid"/>
+                      <a:round/>
+                      <a:headEnd type="none" w="med" len="med"/>
+                      <a:tailEnd type="none" w="med" len="med"/>
+                    </a:lnL>
+                    <a:lnR w="9525" cap="flat" cmpd="sng" algn="ctr">
+                      <a:solidFill>
+                        <a:srgbClr val="BDBDBD"/>
+                      </a:solidFill>
+                      <a:prstDash val="solid"/>
+                      <a:round/>
+                      <a:headEnd type="none" w="med" len="med"/>
+                      <a:tailEnd type="none" w="med" len="med"/>
+                    </a:lnR>
+                    <a:lnT w="9525" cap="flat" cmpd="sng" algn="ctr">
+                      <a:solidFill>
+                        <a:srgbClr val="BDBDBD"/>
+                      </a:solidFill>
+                      <a:prstDash val="solid"/>
+                      <a:round/>
+                      <a:headEnd type="none" w="med" len="med"/>
+                      <a:tailEnd type="none" w="med" len="med"/>
+                    </a:lnT>
+                    <a:lnB w="9525" cap="flat" cmpd="sng" algn="ctr">
+                      <a:solidFill>
+                        <a:srgbClr val="BDBDBD"/>
+                      </a:solidFill>
+                      <a:prstDash val="solid"/>
+                      <a:round/>
+                      <a:headEnd type="none" w="med" len="med"/>
+                      <a:tailEnd type="none" w="med" len="med"/>
+                    </a:lnB>
+                  </a:tcPr>
+                </a:tc>
+                <a:tc>
+                  <a:txBody>
+                    <a:bodyPr/>
+                    <a:lstStyle/>
+                    <a:p>
+                      <a:pPr indent="0" marL="0">
+                        <a:buNone/>
+                      </a:pPr>
+                      <a:r>
+                        <a:rPr lang="en-US" sz="1250" dirty="0">
+                          <a:solidFill>
+                            <a:srgbClr val="1B1B1B"/>
+                          </a:solidFill>
+                          <a:latin typeface="Arial" pitchFamily="34" charset="0"/>
+                          <a:ea typeface="Arial" pitchFamily="34" charset="-122"/>
+                          <a:cs typeface="Arial" pitchFamily="34" charset="-120"/>
+                        </a:rPr>
+                        <a:t>Each hour attends to fresh vital-sign measurements of the last 24 h</a:t>
+                      </a:r>
+                      <a:endParaRPr lang="en-US" sz="1250" dirty="0">
+                        <a:latin typeface="Arial" charset="0"/>
+                        <a:ea typeface="Arial" charset="0"/>
+                        <a:cs typeface="Arial" charset="0"/>
+                      </a:endParaRPr>
+                    </a:p>
+                  </a:txBody>
+                  <a:tcPr marL="45720" marR="45720" marT="45720" marB="45720" anchor="ctr">
+                    <a:lnL w="9525" cap="flat" cmpd="sng" algn="ctr">
+                      <a:solidFill>
+                        <a:srgbClr val="BDBDBD"/>
+                      </a:solidFill>
+                      <a:prstDash val="solid"/>
+                      <a:round/>
+                      <a:headEnd type="none" w="med" len="med"/>
+                      <a:tailEnd type="none" w="med" len="med"/>
+                    </a:lnL>
+                    <a:lnR w="9525" cap="flat" cmpd="sng" algn="ctr">
+                      <a:solidFill>
+                        <a:srgbClr val="BDBDBD"/>
+                      </a:solidFill>
+                      <a:prstDash val="solid"/>
+                      <a:round/>
+                      <a:headEnd type="none" w="med" len="med"/>
+                      <a:tailEnd type="none" w="med" len="med"/>
+                    </a:lnR>
+                    <a:lnT w="9525" cap="flat" cmpd="sng" algn="ctr">
+                      <a:solidFill>
+                        <a:srgbClr val="BDBDBD"/>
+                      </a:solidFill>
+                      <a:prstDash val="solid"/>
+                      <a:round/>
+                      <a:headEnd type="none" w="med" len="med"/>
+                      <a:tailEnd type="none" w="med" len="med"/>
+                    </a:lnT>
+                    <a:lnB w="9525" cap="flat" cmpd="sng" algn="ctr">
+                      <a:solidFill>
+                        <a:srgbClr val="BDBDBD"/>
+                      </a:solidFill>
+                      <a:prstDash val="solid"/>
+                      <a:round/>
+                      <a:headEnd type="none" w="med" len="med"/>
+                      <a:tailEnd type="none" w="med" len="med"/>
+                    </a:lnB>
+                  </a:tcPr>
+                </a:tc>
+                <a:tc>
+                  <a:txBody>
+                    <a:bodyPr/>
+                    <a:lstStyle/>
+                    <a:p>
+                      <a:pPr indent="0" marL="0">
+                        <a:buNone/>
+                      </a:pPr>
+                      <a:r>
+                        <a:rPr lang="en-US" sz="1250" dirty="0">
+                          <a:solidFill>
+                            <a:srgbClr val="1B1B1B"/>
+                          </a:solidFill>
+                          <a:latin typeface="Arial" pitchFamily="34" charset="0"/>
+                          <a:ea typeface="Arial" pitchFamily="34" charset="-122"/>
+                          <a:cs typeface="Arial" pitchFamily="34" charset="-120"/>
+                        </a:rPr>
+                        <a:t>Uses new measurements only, not carried-forward values</a:t>
+                      </a:r>
+                      <a:endParaRPr lang="en-US" sz="1250" dirty="0">
+                        <a:latin typeface="Arial" charset="0"/>
+                        <a:ea typeface="Arial" charset="0"/>
+                        <a:cs typeface="Arial" charset="0"/>
+                      </a:endParaRPr>
+                    </a:p>
+                  </a:txBody>
+                  <a:tcPr marL="45720" marR="45720" marT="45720" marB="45720" anchor="ctr">
+                    <a:lnL w="9525" cap="flat" cmpd="sng" algn="ctr">
+                      <a:solidFill>
+                        <a:srgbClr val="BDBDBD"/>
+                      </a:solidFill>
+                      <a:prstDash val="solid"/>
+                      <a:round/>
+                      <a:headEnd type="none" w="med" len="med"/>
+                      <a:tailEnd type="none" w="med" len="med"/>
+                    </a:lnL>
+                    <a:lnR w="9525" cap="flat" cmpd="sng" algn="ctr">
+                      <a:solidFill>
+                        <a:srgbClr val="BDBDBD"/>
+                      </a:solidFill>
+                      <a:prstDash val="solid"/>
+                      <a:round/>
+                      <a:headEnd type="none" w="med" len="med"/>
+                      <a:tailEnd type="none" w="med" len="med"/>
+                    </a:lnR>
+                    <a:lnT w="9525" cap="flat" cmpd="sng" algn="ctr">
+                      <a:solidFill>
+                        <a:srgbClr val="BDBDBD"/>
+                      </a:solidFill>
+                      <a:prstDash val="solid"/>
+                      <a:round/>
+                      <a:headEnd type="none" w="med" len="med"/>
+                      <a:tailEnd type="none" w="med" len="med"/>
+                    </a:lnT>
+                    <a:lnB w="9525" cap="flat" cmpd="sng" algn="ctr">
+                      <a:solidFill>
+                        <a:srgbClr val="BDBDBD"/>
+                      </a:solidFill>
+                      <a:prstDash val="solid"/>
+                      <a:round/>
+                      <a:headEnd type="none" w="med" len="med"/>
+                      <a:tailEnd type="none" w="med" len="med"/>
+                    </a:lnB>
+                  </a:tcPr>
+                </a:tc>
+                <a:tc>
+                  <a:txBody>
+                    <a:bodyPr/>
+                    <a:lstStyle/>
+                    <a:p>
+                      <a:pPr algn="ctr" indent="0" marL="0">
+                        <a:buNone/>
+                      </a:pPr>
+                      <a:r>
+                        <a:rPr lang="en-US" sz="1250" b="1" dirty="0">
+                          <a:solidFill>
+                            <a:srgbClr val="C8102E"/>
+                          </a:solidFill>
+                          <a:latin typeface="Arial" pitchFamily="34" charset="0"/>
+                          <a:ea typeface="Arial" pitchFamily="34" charset="-122"/>
+                          <a:cs typeface="Arial" pitchFamily="34" charset="-120"/>
+                        </a:rPr>
+                        <a:t>0.21</a:t>
+                      </a:r>
+                      <a:endParaRPr lang="en-US" sz="1250" dirty="0">
+                        <a:latin typeface="Arial" charset="0"/>
+                        <a:ea typeface="Arial" charset="0"/>
+                        <a:cs typeface="Arial" charset="0"/>
+                      </a:endParaRPr>
+                    </a:p>
+                  </a:txBody>
+                  <a:tcPr marL="45720" marR="45720" marT="45720" marB="45720" anchor="ctr">
+                    <a:lnL w="9525" cap="flat" cmpd="sng" algn="ctr">
+                      <a:solidFill>
+                        <a:srgbClr val="BDBDBD"/>
+                      </a:solidFill>
+                      <a:prstDash val="solid"/>
+                      <a:round/>
+                      <a:headEnd type="none" w="med" len="med"/>
+                      <a:tailEnd type="none" w="med" len="med"/>
+                    </a:lnL>
+                    <a:lnR w="9525" cap="flat" cmpd="sng" algn="ctr">
+                      <a:solidFill>
+                        <a:srgbClr val="BDBDBD"/>
+                      </a:solidFill>
+                      <a:prstDash val="solid"/>
+                      <a:round/>
+                      <a:headEnd type="none" w="med" len="med"/>
+                      <a:tailEnd type="none" w="med" len="med"/>
+                    </a:lnR>
+                    <a:lnT w="9525" cap="flat" cmpd="sng" algn="ctr">
+                      <a:solidFill>
+                        <a:srgbClr val="BDBDBD"/>
+                      </a:solidFill>
+                      <a:prstDash val="solid"/>
+                      <a:round/>
+                      <a:headEnd type="none" w="med" len="med"/>
+                      <a:tailEnd type="none" w="med" len="med"/>
+                    </a:lnT>
+                    <a:lnB w="9525" cap="flat" cmpd="sng" algn="ctr">
+                      <a:solidFill>
+                        <a:srgbClr val="BDBDBD"/>
+                      </a:solidFill>
+                      <a:prstDash val="solid"/>
+                      <a:round/>
+                      <a:headEnd type="none" w="med" len="med"/>
+                      <a:tailEnd type="none" w="med" len="med"/>
+                    </a:lnB>
+                  </a:tcPr>
+                </a:tc>
+              </a:tr>
+              <a:tr h="0">
+                <a:tc>
+                  <a:txBody>
+                    <a:bodyPr/>
+                    <a:lstStyle/>
+                    <a:p>
+                      <a:pPr indent="0" marL="0">
+                        <a:buNone/>
+                      </a:pPr>
+                      <a:r>
+                        <a:rPr lang="en-US" sz="1250" b="1" dirty="0">
+                          <a:solidFill>
+                            <a:srgbClr val="1B1B1B"/>
+                          </a:solidFill>
+                          <a:latin typeface="Arial" pitchFamily="34" charset="0"/>
+                          <a:ea typeface="Arial" pitchFamily="34" charset="-122"/>
+                          <a:cs typeface="Arial" pitchFamily="34" charset="-120"/>
+                        </a:rPr>
+                        <a:t>Self-supervised CNN to OSTA [39]</a:t>
+                      </a:r>
+                      <a:endParaRPr lang="en-US" sz="1250" dirty="0">
+                        <a:latin typeface="Arial" charset="0"/>
+                        <a:ea typeface="Arial" charset="0"/>
+                        <a:cs typeface="Arial" charset="0"/>
+                      </a:endParaRPr>
+                    </a:p>
+                  </a:txBody>
+                  <a:tcPr marL="45720" marR="45720" marT="45720" marB="45720" anchor="ctr">
+                    <a:lnL w="9525" cap="flat" cmpd="sng" algn="ctr">
+                      <a:solidFill>
+                        <a:srgbClr val="BDBDBD"/>
+                      </a:solidFill>
+                      <a:prstDash val="solid"/>
+                      <a:round/>
+                      <a:headEnd type="none" w="med" len="med"/>
+                      <a:tailEnd type="none" w="med" len="med"/>
+                    </a:lnL>
+                    <a:lnR w="9525" cap="flat" cmpd="sng" algn="ctr">
+                      <a:solidFill>
+                        <a:srgbClr val="BDBDBD"/>
+                      </a:solidFill>
+                      <a:prstDash val="solid"/>
+                      <a:round/>
+                      <a:headEnd type="none" w="med" len="med"/>
+                      <a:tailEnd type="none" w="med" len="med"/>
+                    </a:lnR>
+                    <a:lnT w="9525" cap="flat" cmpd="sng" algn="ctr">
+                      <a:solidFill>
+                        <a:srgbClr val="BDBDBD"/>
+                      </a:solidFill>
+                      <a:prstDash val="solid"/>
+                      <a:round/>
+                      <a:headEnd type="none" w="med" len="med"/>
+                      <a:tailEnd type="none" w="med" len="med"/>
+                    </a:lnT>
+                    <a:lnB w="9525" cap="flat" cmpd="sng" algn="ctr">
+                      <a:solidFill>
+                        <a:srgbClr val="BDBDBD"/>
+                      </a:solidFill>
+                      <a:prstDash val="solid"/>
+                      <a:round/>
+                      <a:headEnd type="none" w="med" len="med"/>
+                      <a:tailEnd type="none" w="med" len="med"/>
+                    </a:lnB>
+                  </a:tcPr>
+                </a:tc>
+                <a:tc>
+                  <a:txBody>
+                    <a:bodyPr/>
+                    <a:lstStyle/>
+                    <a:p>
+                      <a:pPr indent="0" marL="0">
+                        <a:buNone/>
+                      </a:pPr>
+                      <a:r>
+                        <a:rPr lang="en-US" sz="1250" dirty="0">
+                          <a:solidFill>
+                            <a:srgbClr val="1B1B1B"/>
+                          </a:solidFill>
+                          <a:latin typeface="Arial" pitchFamily="34" charset="0"/>
+                          <a:ea typeface="Arial" pitchFamily="34" charset="-122"/>
+                          <a:cs typeface="Arial" pitchFamily="34" charset="-120"/>
+                        </a:rPr>
+                        <a:t>The same encoder first trained on unlabelled stays to forecast values and organ scores</a:t>
+                      </a:r>
+                      <a:endParaRPr lang="en-US" sz="1250" dirty="0">
+                        <a:latin typeface="Arial" charset="0"/>
+                        <a:ea typeface="Arial" charset="0"/>
+                        <a:cs typeface="Arial" charset="0"/>
+                      </a:endParaRPr>
+                    </a:p>
+                  </a:txBody>
+                  <a:tcPr marL="45720" marR="45720" marT="45720" marB="45720" anchor="ctr">
+                    <a:lnL w="9525" cap="flat" cmpd="sng" algn="ctr">
+                      <a:solidFill>
+                        <a:srgbClr val="BDBDBD"/>
+                      </a:solidFill>
+                      <a:prstDash val="solid"/>
+                      <a:round/>
+                      <a:headEnd type="none" w="med" len="med"/>
+                      <a:tailEnd type="none" w="med" len="med"/>
+                    </a:lnL>
+                    <a:lnR w="9525" cap="flat" cmpd="sng" algn="ctr">
+                      <a:solidFill>
+                        <a:srgbClr val="BDBDBD"/>
+                      </a:solidFill>
+                      <a:prstDash val="solid"/>
+                      <a:round/>
+                      <a:headEnd type="none" w="med" len="med"/>
+                      <a:tailEnd type="none" w="med" len="med"/>
+                    </a:lnR>
+                    <a:lnT w="9525" cap="flat" cmpd="sng" algn="ctr">
+                      <a:solidFill>
+                        <a:srgbClr val="BDBDBD"/>
+                      </a:solidFill>
+                      <a:prstDash val="solid"/>
+                      <a:round/>
+                      <a:headEnd type="none" w="med" len="med"/>
+                      <a:tailEnd type="none" w="med" len="med"/>
+                    </a:lnT>
+                    <a:lnB w="9525" cap="flat" cmpd="sng" algn="ctr">
+                      <a:solidFill>
+                        <a:srgbClr val="BDBDBD"/>
+                      </a:solidFill>
+                      <a:prstDash val="solid"/>
+                      <a:round/>
+                      <a:headEnd type="none" w="med" len="med"/>
+                      <a:tailEnd type="none" w="med" len="med"/>
+                    </a:lnB>
+                  </a:tcPr>
+                </a:tc>
+                <a:tc>
+                  <a:txBody>
+                    <a:bodyPr/>
+                    <a:lstStyle/>
+                    <a:p>
+                      <a:pPr indent="0" marL="0">
+                        <a:buNone/>
+                      </a:pPr>
+                      <a:r>
+                        <a:rPr lang="en-US" sz="1250" dirty="0">
+                          <a:solidFill>
+                            <a:srgbClr val="1B1B1B"/>
+                          </a:solidFill>
+                          <a:latin typeface="Arial" pitchFamily="34" charset="0"/>
+                          <a:ea typeface="Arial" pitchFamily="34" charset="-122"/>
+                          <a:cs typeface="Arial" pitchFamily="34" charset="-120"/>
+                        </a:rPr>
+                        <a:t>Learns physiology before it sees a sepsis label</a:t>
+                      </a:r>
+                      <a:endParaRPr lang="en-US" sz="1250" dirty="0">
+                        <a:latin typeface="Arial" charset="0"/>
+                        <a:ea typeface="Arial" charset="0"/>
+                        <a:cs typeface="Arial" charset="0"/>
+                      </a:endParaRPr>
+                    </a:p>
+                  </a:txBody>
+                  <a:tcPr marL="45720" marR="45720" marT="45720" marB="45720" anchor="ctr">
+                    <a:lnL w="9525" cap="flat" cmpd="sng" algn="ctr">
+                      <a:solidFill>
+                        <a:srgbClr val="BDBDBD"/>
+                      </a:solidFill>
+                      <a:prstDash val="solid"/>
+                      <a:round/>
+                      <a:headEnd type="none" w="med" len="med"/>
+                      <a:tailEnd type="none" w="med" len="med"/>
+                    </a:lnL>
+                    <a:lnR w="9525" cap="flat" cmpd="sng" algn="ctr">
+                      <a:solidFill>
+                        <a:srgbClr val="BDBDBD"/>
+                      </a:solidFill>
+                      <a:prstDash val="solid"/>
+                      <a:round/>
+                      <a:headEnd type="none" w="med" len="med"/>
+                      <a:tailEnd type="none" w="med" len="med"/>
+                    </a:lnR>
+                    <a:lnT w="9525" cap="flat" cmpd="sng" algn="ctr">
+                      <a:solidFill>
+                        <a:srgbClr val="BDBDBD"/>
+                      </a:solidFill>
+                      <a:prstDash val="solid"/>
+                      <a:round/>
+                      <a:headEnd type="none" w="med" len="med"/>
+                      <a:tailEnd type="none" w="med" len="med"/>
+                    </a:lnT>
+                    <a:lnB w="9525" cap="flat" cmpd="sng" algn="ctr">
+                      <a:solidFill>
+                        <a:srgbClr val="BDBDBD"/>
+                      </a:solidFill>
+                      <a:prstDash val="solid"/>
+                      <a:round/>
+                      <a:headEnd type="none" w="med" len="med"/>
+                      <a:tailEnd type="none" w="med" len="med"/>
+                    </a:lnB>
+                  </a:tcPr>
+                </a:tc>
+                <a:tc>
+                  <a:txBody>
+                    <a:bodyPr/>
+                    <a:lstStyle/>
+                    <a:p>
+                      <a:pPr algn="ctr" indent="0" marL="0">
+                        <a:buNone/>
+                      </a:pPr>
+                      <a:r>
+                        <a:rPr lang="en-US" sz="1250" b="1" dirty="0">
+                          <a:solidFill>
+                            <a:srgbClr val="C8102E"/>
+                          </a:solidFill>
+                          <a:latin typeface="Arial" pitchFamily="34" charset="0"/>
+                          <a:ea typeface="Arial" pitchFamily="34" charset="-122"/>
+                          <a:cs typeface="Arial" pitchFamily="34" charset="-120"/>
+                        </a:rPr>
+                        <a:t>0.29</a:t>
+                      </a:r>
+                      <a:endParaRPr lang="en-US" sz="1250" dirty="0">
+                        <a:latin typeface="Arial" charset="0"/>
+                        <a:ea typeface="Arial" charset="0"/>
+                        <a:cs typeface="Arial" charset="0"/>
+                      </a:endParaRPr>
+                    </a:p>
+                  </a:txBody>
+                  <a:tcPr marL="45720" marR="45720" marT="45720" marB="45720" anchor="ctr">
+                    <a:lnL w="9525" cap="flat" cmpd="sng" algn="ctr">
+                      <a:solidFill>
+                        <a:srgbClr val="BDBDBD"/>
+                      </a:solidFill>
+                      <a:prstDash val="solid"/>
+                      <a:round/>
+                      <a:headEnd type="none" w="med" len="med"/>
+                      <a:tailEnd type="none" w="med" len="med"/>
+                    </a:lnL>
+                    <a:lnR w="9525" cap="flat" cmpd="sng" algn="ctr">
+                      <a:solidFill>
+                        <a:srgbClr val="BDBDBD"/>
+                      </a:solidFill>
+                      <a:prstDash val="solid"/>
+                      <a:round/>
+                      <a:headEnd type="none" w="med" len="med"/>
+                      <a:tailEnd type="none" w="med" len="med"/>
+                    </a:lnR>
+                    <a:lnT w="9525" cap="flat" cmpd="sng" algn="ctr">
+                      <a:solidFill>
+                        <a:srgbClr val="BDBDBD"/>
+                      </a:solidFill>
+                      <a:prstDash val="solid"/>
+                      <a:round/>
+                      <a:headEnd type="none" w="med" len="med"/>
+                      <a:tailEnd type="none" w="med" len="med"/>
+                    </a:lnT>
+                    <a:lnB w="9525" cap="flat" cmpd="sng" algn="ctr">
+                      <a:solidFill>
+                        <a:srgbClr val="BDBDBD"/>
+                      </a:solidFill>
+                      <a:prstDash val="solid"/>
+                      <a:round/>
+                      <a:headEnd type="none" w="med" len="med"/>
+                      <a:tailEnd type="none" w="med" len="med"/>
+                    </a:lnB>
+                  </a:tcPr>
+                </a:tc>
+              </a:tr>
+              <a:tr h="0">
+                <a:tc>
+                  <a:txBody>
+                    <a:bodyPr/>
+                    <a:lstStyle/>
+                    <a:p>
+                      <a:pPr indent="0" marL="0">
+                        <a:buNone/>
+                      </a:pPr>
+                      <a:r>
+                        <a:rPr lang="en-US" sz="1250" b="1" dirty="0">
+                          <a:solidFill>
+                            <a:srgbClr val="1B1B1B"/>
+                          </a:solidFill>
+                          <a:latin typeface="Arial" pitchFamily="34" charset="0"/>
+                          <a:ea typeface="Arial" pitchFamily="34" charset="-122"/>
+                          <a:cs typeface="Arial" pitchFamily="34" charset="-120"/>
+                        </a:rPr>
+                        <a:t>Self-supervised CNN, flat head</a:t>
+                      </a:r>
+                      <a:endParaRPr lang="en-US" sz="1250" dirty="0">
+                        <a:latin typeface="Arial" charset="0"/>
+                        <a:ea typeface="Arial" charset="0"/>
+                        <a:cs typeface="Arial" charset="0"/>
+                      </a:endParaRPr>
+                    </a:p>
+                  </a:txBody>
+                  <a:tcPr marL="45720" marR="45720" marT="45720" marB="45720" anchor="ctr">
+                    <a:lnL w="9525" cap="flat" cmpd="sng" algn="ctr">
+                      <a:solidFill>
+                        <a:srgbClr val="BDBDBD"/>
+                      </a:solidFill>
+                      <a:prstDash val="solid"/>
+                      <a:round/>
+                      <a:headEnd type="none" w="med" len="med"/>
+                      <a:tailEnd type="none" w="med" len="med"/>
+                    </a:lnL>
+                    <a:lnR w="9525" cap="flat" cmpd="sng" algn="ctr">
+                      <a:solidFill>
+                        <a:srgbClr val="BDBDBD"/>
+                      </a:solidFill>
+                      <a:prstDash val="solid"/>
+                      <a:round/>
+                      <a:headEnd type="none" w="med" len="med"/>
+                      <a:tailEnd type="none" w="med" len="med"/>
+                    </a:lnR>
+                    <a:lnT w="9525" cap="flat" cmpd="sng" algn="ctr">
+                      <a:solidFill>
+                        <a:srgbClr val="BDBDBD"/>
+                      </a:solidFill>
+                      <a:prstDash val="solid"/>
+                      <a:round/>
+                      <a:headEnd type="none" w="med" len="med"/>
+                      <a:tailEnd type="none" w="med" len="med"/>
+                    </a:lnT>
+                    <a:lnB w="9525" cap="flat" cmpd="sng" algn="ctr">
+                      <a:solidFill>
+                        <a:srgbClr val="BDBDBD"/>
+                      </a:solidFill>
+                      <a:prstDash val="solid"/>
+                      <a:round/>
+                      <a:headEnd type="none" w="med" len="med"/>
+                      <a:tailEnd type="none" w="med" len="med"/>
+                    </a:lnB>
+                  </a:tcPr>
+                </a:tc>
+                <a:tc>
+                  <a:txBody>
+                    <a:bodyPr/>
+                    <a:lstStyle/>
+                    <a:p>
+                      <a:pPr indent="0" marL="0">
+                        <a:buNone/>
+                      </a:pPr>
+                      <a:r>
+                        <a:rPr lang="en-US" sz="1250" dirty="0">
+                          <a:solidFill>
+                            <a:srgbClr val="1B1B1B"/>
+                          </a:solidFill>
+                          <a:latin typeface="Arial" pitchFamily="34" charset="0"/>
+                          <a:ea typeface="Arial" pitchFamily="34" charset="-122"/>
+                          <a:cs typeface="Arial" pitchFamily="34" charset="-120"/>
+                        </a:rPr>
+                        <a:t>The same pretrained encoder with one group</a:t>
+                      </a:r>
+                      <a:endParaRPr lang="en-US" sz="1250" dirty="0">
+                        <a:latin typeface="Arial" charset="0"/>
+                        <a:ea typeface="Arial" charset="0"/>
+                        <a:cs typeface="Arial" charset="0"/>
+                      </a:endParaRPr>
+                    </a:p>
+                  </a:txBody>
+                  <a:tcPr marL="45720" marR="45720" marT="45720" marB="45720" anchor="ctr">
+                    <a:lnL w="9525" cap="flat" cmpd="sng" algn="ctr">
+                      <a:solidFill>
+                        <a:srgbClr val="BDBDBD"/>
+                      </a:solidFill>
+                      <a:prstDash val="solid"/>
+                      <a:round/>
+                      <a:headEnd type="none" w="med" len="med"/>
+                      <a:tailEnd type="none" w="med" len="med"/>
+                    </a:lnL>
+                    <a:lnR w="9525" cap="flat" cmpd="sng" algn="ctr">
+                      <a:solidFill>
+                        <a:srgbClr val="BDBDBD"/>
+                      </a:solidFill>
+                      <a:prstDash val="solid"/>
+                      <a:round/>
+                      <a:headEnd type="none" w="med" len="med"/>
+                      <a:tailEnd type="none" w="med" len="med"/>
+                    </a:lnR>
+                    <a:lnT w="9525" cap="flat" cmpd="sng" algn="ctr">
+                      <a:solidFill>
+                        <a:srgbClr val="BDBDBD"/>
+                      </a:solidFill>
+                      <a:prstDash val="solid"/>
+                      <a:round/>
+                      <a:headEnd type="none" w="med" len="med"/>
+                      <a:tailEnd type="none" w="med" len="med"/>
+                    </a:lnT>
+                    <a:lnB w="9525" cap="flat" cmpd="sng" algn="ctr">
+                      <a:solidFill>
+                        <a:srgbClr val="BDBDBD"/>
+                      </a:solidFill>
+                      <a:prstDash val="solid"/>
+                      <a:round/>
+                      <a:headEnd type="none" w="med" len="med"/>
+                      <a:tailEnd type="none" w="med" len="med"/>
+                    </a:lnB>
+                  </a:tcPr>
+                </a:tc>
+                <a:tc>
+                  <a:txBody>
+                    <a:bodyPr/>
+                    <a:lstStyle/>
+                    <a:p>
+                      <a:pPr indent="0" marL="0">
+                        <a:buNone/>
+                      </a:pPr>
+                      <a:r>
+                        <a:rPr lang="en-US" sz="1250" dirty="0">
+                          <a:solidFill>
+                            <a:srgbClr val="1B1B1B"/>
+                          </a:solidFill>
+                          <a:latin typeface="Arial" pitchFamily="34" charset="0"/>
+                          <a:ea typeface="Arial" pitchFamily="34" charset="-122"/>
+                          <a:cs typeface="Arial" pitchFamily="34" charset="-120"/>
+                        </a:rPr>
+                        <a:t>Its organ ablation; added as a declared exploratory pair</a:t>
+                      </a:r>
+                      <a:endParaRPr lang="en-US" sz="1250" dirty="0">
+                        <a:latin typeface="Arial" charset="0"/>
+                        <a:ea typeface="Arial" charset="0"/>
+                        <a:cs typeface="Arial" charset="0"/>
+                      </a:endParaRPr>
+                    </a:p>
+                  </a:txBody>
+                  <a:tcPr marL="45720" marR="45720" marT="45720" marB="45720" anchor="ctr">
+                    <a:lnL w="9525" cap="flat" cmpd="sng" algn="ctr">
+                      <a:solidFill>
+                        <a:srgbClr val="BDBDBD"/>
+                      </a:solidFill>
+                      <a:prstDash val="solid"/>
+                      <a:round/>
+                      <a:headEnd type="none" w="med" len="med"/>
+                      <a:tailEnd type="none" w="med" len="med"/>
+                    </a:lnL>
+                    <a:lnR w="9525" cap="flat" cmpd="sng" algn="ctr">
+                      <a:solidFill>
+                        <a:srgbClr val="BDBDBD"/>
+                      </a:solidFill>
+                      <a:prstDash val="solid"/>
+                      <a:round/>
+                      <a:headEnd type="none" w="med" len="med"/>
+                      <a:tailEnd type="none" w="med" len="med"/>
+                    </a:lnR>
+                    <a:lnT w="9525" cap="flat" cmpd="sng" algn="ctr">
+                      <a:solidFill>
+                        <a:srgbClr val="BDBDBD"/>
+                      </a:solidFill>
+                      <a:prstDash val="solid"/>
+                      <a:round/>
+                      <a:headEnd type="none" w="med" len="med"/>
+                      <a:tailEnd type="none" w="med" len="med"/>
+                    </a:lnT>
+                    <a:lnB w="9525" cap="flat" cmpd="sng" algn="ctr">
+                      <a:solidFill>
+                        <a:srgbClr val="BDBDBD"/>
+                      </a:solidFill>
+                      <a:prstDash val="solid"/>
+                      <a:round/>
+                      <a:headEnd type="none" w="med" len="med"/>
+                      <a:tailEnd type="none" w="med" len="med"/>
+                    </a:lnB>
+                  </a:tcPr>
+                </a:tc>
+                <a:tc>
+                  <a:txBody>
+                    <a:bodyPr/>
+                    <a:lstStyle/>
+                    <a:p>
+                      <a:pPr algn="ctr" indent="0" marL="0">
+                        <a:buNone/>
+                      </a:pPr>
+                      <a:r>
+                        <a:rPr lang="en-US" sz="1250" b="1" dirty="0">
+                          <a:solidFill>
+                            <a:srgbClr val="C8102E"/>
+                          </a:solidFill>
+                          <a:latin typeface="Arial" pitchFamily="34" charset="0"/>
+                          <a:ea typeface="Arial" pitchFamily="34" charset="-122"/>
+                          <a:cs typeface="Arial" pitchFamily="34" charset="-120"/>
+                        </a:rPr>
+                        <a:t>0.21</a:t>
+                      </a:r>
+                      <a:endParaRPr lang="en-US" sz="1250" dirty="0">
+                        <a:latin typeface="Arial" charset="0"/>
+                        <a:ea typeface="Arial" charset="0"/>
+                        <a:cs typeface="Arial" charset="0"/>
+                      </a:endParaRPr>
+                    </a:p>
+                  </a:txBody>
+                  <a:tcPr marL="45720" marR="45720" marT="45720" marB="45720" anchor="ctr">
+                    <a:lnL w="9525" cap="flat" cmpd="sng" algn="ctr">
+                      <a:solidFill>
+                        <a:srgbClr val="BDBDBD"/>
+                      </a:solidFill>
+                      <a:prstDash val="solid"/>
+                      <a:round/>
+                      <a:headEnd type="none" w="med" len="med"/>
+                      <a:tailEnd type="none" w="med" len="med"/>
+                    </a:lnL>
+                    <a:lnR w="9525" cap="flat" cmpd="sng" algn="ctr">
+                      <a:solidFill>
+                        <a:srgbClr val="BDBDBD"/>
+                      </a:solidFill>
+                      <a:prstDash val="solid"/>
+                      <a:round/>
+                      <a:headEnd type="none" w="med" len="med"/>
+                      <a:tailEnd type="none" w="med" len="med"/>
+                    </a:lnR>
+                    <a:lnT w="9525" cap="flat" cmpd="sng" algn="ctr">
+                      <a:solidFill>
+                        <a:srgbClr val="BDBDBD"/>
+                      </a:solidFill>
+                      <a:prstDash val="solid"/>
+                      <a:round/>
+                      <a:headEnd type="none" w="med" len="med"/>
+                      <a:tailEnd type="none" w="med" len="med"/>
+                    </a:lnT>
+                    <a:lnB w="9525" cap="flat" cmpd="sng" algn="ctr">
+                      <a:solidFill>
+                        <a:srgbClr val="BDBDBD"/>
+                      </a:solidFill>
+                      <a:prstDash val="solid"/>
+                      <a:round/>
+                      <a:headEnd type="none" w="med" len="med"/>
+                      <a:tailEnd type="none" w="med" len="med"/>
+                    </a:lnB>
+                  </a:tcPr>
+                </a:tc>
+              </a:tr>
+              <a:tr h="0">
+                <a:tc>
+                  <a:txBody>
+                    <a:bodyPr/>
+                    <a:lstStyle/>
+                    <a:p>
+                      <a:pPr indent="0" marL="0">
+                        <a:buNone/>
+                      </a:pPr>
+                      <a:r>
+                        <a:rPr lang="en-US" sz="1250" b="1" dirty="0">
+                          <a:solidFill>
+                            <a:srgbClr val="1B1B1B"/>
+                          </a:solidFill>
+                          <a:latin typeface="Arial" pitchFamily="34" charset="0"/>
+                          <a:ea typeface="Arial" pitchFamily="34" charset="-122"/>
+                          <a:cs typeface="Arial" pitchFamily="34" charset="-120"/>
+                        </a:rPr>
+                        <a:t>Pooled encoder twins</a:t>
+                      </a:r>
+                      <a:endParaRPr lang="en-US" sz="1250" dirty="0">
+                        <a:latin typeface="Arial" charset="0"/>
+                        <a:ea typeface="Arial" charset="0"/>
+                        <a:cs typeface="Arial" charset="0"/>
+                      </a:endParaRPr>
+                    </a:p>
+                  </a:txBody>
+                  <a:tcPr marL="45720" marR="45720" marT="45720" marB="45720" anchor="ctr">
+                    <a:lnL w="9525" cap="flat" cmpd="sng" algn="ctr">
+                      <a:solidFill>
+                        <a:srgbClr val="BDBDBD"/>
+                      </a:solidFill>
+                      <a:prstDash val="solid"/>
+                      <a:round/>
+                      <a:headEnd type="none" w="med" len="med"/>
+                      <a:tailEnd type="none" w="med" len="med"/>
+                    </a:lnL>
+                    <a:lnR w="9525" cap="flat" cmpd="sng" algn="ctr">
+                      <a:solidFill>
+                        <a:srgbClr val="BDBDBD"/>
+                      </a:solidFill>
+                      <a:prstDash val="solid"/>
+                      <a:round/>
+                      <a:headEnd type="none" w="med" len="med"/>
+                      <a:tailEnd type="none" w="med" len="med"/>
+                    </a:lnR>
+                    <a:lnT w="9525" cap="flat" cmpd="sng" algn="ctr">
+                      <a:solidFill>
+                        <a:srgbClr val="BDBDBD"/>
+                      </a:solidFill>
+                      <a:prstDash val="solid"/>
+                      <a:round/>
+                      <a:headEnd type="none" w="med" len="med"/>
+                      <a:tailEnd type="none" w="med" len="med"/>
+                    </a:lnT>
+                    <a:lnB w="9525" cap="flat" cmpd="sng" algn="ctr">
+                      <a:solidFill>
+                        <a:srgbClr val="BDBDBD"/>
+                      </a:solidFill>
+                      <a:prstDash val="solid"/>
+                      <a:round/>
+                      <a:headEnd type="none" w="med" len="med"/>
+                      <a:tailEnd type="none" w="med" len="med"/>
+                    </a:lnB>
+                  </a:tcPr>
+                </a:tc>
+                <a:tc>
+                  <a:txBody>
+                    <a:bodyPr/>
+                    <a:lstStyle/>
+                    <a:p>
+                      <a:pPr indent="0" marL="0">
+                        <a:buNone/>
+                      </a:pPr>
+                      <a:r>
+                        <a:rPr lang="en-US" sz="1250" dirty="0">
+                          <a:solidFill>
+                            <a:srgbClr val="1B1B1B"/>
+                          </a:solidFill>
+                          <a:latin typeface="Arial" pitchFamily="34" charset="0"/>
+                          <a:ea typeface="Arial" pitchFamily="34" charset="-122"/>
+                          <a:cs typeface="Arial" pitchFamily="34" charset="-120"/>
+                        </a:rPr>
+                        <a:t>Encoder pretrained on both databases</a:t>
+                      </a:r>
+                      <a:endParaRPr lang="en-US" sz="1250" dirty="0">
+                        <a:latin typeface="Arial" charset="0"/>
+                        <a:ea typeface="Arial" charset="0"/>
+                        <a:cs typeface="Arial" charset="0"/>
+                      </a:endParaRPr>
+                    </a:p>
+                  </a:txBody>
+                  <a:tcPr marL="45720" marR="45720" marT="45720" marB="45720" anchor="ctr">
+                    <a:lnL w="9525" cap="flat" cmpd="sng" algn="ctr">
+                      <a:solidFill>
+                        <a:srgbClr val="BDBDBD"/>
+                      </a:solidFill>
+                      <a:prstDash val="solid"/>
+                      <a:round/>
+                      <a:headEnd type="none" w="med" len="med"/>
+                      <a:tailEnd type="none" w="med" len="med"/>
+                    </a:lnL>
+                    <a:lnR w="9525" cap="flat" cmpd="sng" algn="ctr">
+                      <a:solidFill>
+                        <a:srgbClr val="BDBDBD"/>
+                      </a:solidFill>
+                      <a:prstDash val="solid"/>
+                      <a:round/>
+                      <a:headEnd type="none" w="med" len="med"/>
+                      <a:tailEnd type="none" w="med" len="med"/>
+                    </a:lnR>
+                    <a:lnT w="9525" cap="flat" cmpd="sng" algn="ctr">
+                      <a:solidFill>
+                        <a:srgbClr val="BDBDBD"/>
+                      </a:solidFill>
+                      <a:prstDash val="solid"/>
+                      <a:round/>
+                      <a:headEnd type="none" w="med" len="med"/>
+                      <a:tailEnd type="none" w="med" len="med"/>
+                    </a:lnT>
+                    <a:lnB w="9525" cap="flat" cmpd="sng" algn="ctr">
+                      <a:solidFill>
+                        <a:srgbClr val="BDBDBD"/>
+                      </a:solidFill>
+                      <a:prstDash val="solid"/>
+                      <a:round/>
+                      <a:headEnd type="none" w="med" len="med"/>
+                      <a:tailEnd type="none" w="med" len="med"/>
+                    </a:lnB>
+                  </a:tcPr>
+                </a:tc>
+                <a:tc>
+                  <a:txBody>
+                    <a:bodyPr/>
+                    <a:lstStyle/>
+                    <a:p>
+                      <a:pPr indent="0" marL="0">
+                        <a:buNone/>
+                      </a:pPr>
+                      <a:r>
+                        <a:rPr lang="en-US" sz="1250" dirty="0">
+                          <a:solidFill>
+                            <a:srgbClr val="1B1B1B"/>
+                          </a:solidFill>
+                          <a:latin typeface="Arial" pitchFamily="34" charset="0"/>
+                          <a:ea typeface="Arial" pitchFamily="34" charset="-122"/>
+                          <a:cs typeface="Arial" pitchFamily="34" charset="-120"/>
+                        </a:rPr>
+                        <a:t>Adaptation across hospital systems</a:t>
+                      </a:r>
+                      <a:endParaRPr lang="en-US" sz="1250" dirty="0">
+                        <a:latin typeface="Arial" charset="0"/>
+                        <a:ea typeface="Arial" charset="0"/>
+                        <a:cs typeface="Arial" charset="0"/>
+                      </a:endParaRPr>
+                    </a:p>
+                  </a:txBody>
+                  <a:tcPr marL="45720" marR="45720" marT="45720" marB="45720" anchor="ctr">
+                    <a:lnL w="9525" cap="flat" cmpd="sng" algn="ctr">
+                      <a:solidFill>
+                        <a:srgbClr val="BDBDBD"/>
+                      </a:solidFill>
+                      <a:prstDash val="solid"/>
+                      <a:round/>
+                      <a:headEnd type="none" w="med" len="med"/>
+                      <a:tailEnd type="none" w="med" len="med"/>
+                    </a:lnL>
+                    <a:lnR w="9525" cap="flat" cmpd="sng" algn="ctr">
+                      <a:solidFill>
+                        <a:srgbClr val="BDBDBD"/>
+                      </a:solidFill>
+                      <a:prstDash val="solid"/>
+                      <a:round/>
+                      <a:headEnd type="none" w="med" len="med"/>
+                      <a:tailEnd type="none" w="med" len="med"/>
+                    </a:lnR>
+                    <a:lnT w="9525" cap="flat" cmpd="sng" algn="ctr">
+                      <a:solidFill>
+                        <a:srgbClr val="BDBDBD"/>
+                      </a:solidFill>
+                      <a:prstDash val="solid"/>
+                      <a:round/>
+                      <a:headEnd type="none" w="med" len="med"/>
+                      <a:tailEnd type="none" w="med" len="med"/>
+                    </a:lnT>
+                    <a:lnB w="9525" cap="flat" cmpd="sng" algn="ctr">
+                      <a:solidFill>
+                        <a:srgbClr val="BDBDBD"/>
+                      </a:solidFill>
+                      <a:prstDash val="solid"/>
+                      <a:round/>
+                      <a:headEnd type="none" w="med" len="med"/>
+                      <a:tailEnd type="none" w="med" len="med"/>
+                    </a:lnB>
+                  </a:tcPr>
+                </a:tc>
+                <a:tc>
+                  <a:txBody>
+                    <a:bodyPr/>
+                    <a:lstStyle/>
+                    <a:p>
+                      <a:pPr algn="ctr" indent="0" marL="0">
+                        <a:buNone/>
+                      </a:pPr>
+                      <a:r>
+                        <a:rPr lang="en-US" sz="1250" b="1" dirty="0">
+                          <a:solidFill>
+                            <a:srgbClr val="C8102E"/>
+                          </a:solidFill>
+                          <a:latin typeface="Arial" pitchFamily="34" charset="0"/>
+                          <a:ea typeface="Arial" pitchFamily="34" charset="-122"/>
+                          <a:cs typeface="Arial" pitchFamily="34" charset="-120"/>
+                        </a:rPr>
+                        <a:t>0.23 / 0.20</a:t>
+                      </a:r>
+                      <a:endParaRPr lang="en-US" sz="1250" dirty="0">
+                        <a:latin typeface="Arial" charset="0"/>
+                        <a:ea typeface="Arial" charset="0"/>
+                        <a:cs typeface="Arial" charset="0"/>
+                      </a:endParaRPr>
+                    </a:p>
+                  </a:txBody>
+                  <a:tcPr marL="45720" marR="45720" marT="45720" marB="45720" anchor="ctr">
+                    <a:lnL w="9525" cap="flat" cmpd="sng" algn="ctr">
+                      <a:solidFill>
+                        <a:srgbClr val="BDBDBD"/>
+                      </a:solidFill>
+                      <a:prstDash val="solid"/>
+                      <a:round/>
+                      <a:headEnd type="none" w="med" len="med"/>
+                      <a:tailEnd type="none" w="med" len="med"/>
+                    </a:lnL>
+                    <a:lnR w="9525" cap="flat" cmpd="sng" algn="ctr">
+                      <a:solidFill>
+                        <a:srgbClr val="BDBDBD"/>
+                      </a:solidFill>
+                      <a:prstDash val="solid"/>
+                      <a:round/>
+                      <a:headEnd type="none" w="med" len="med"/>
+                      <a:tailEnd type="none" w="med" len="med"/>
+                    </a:lnR>
+                    <a:lnT w="9525" cap="flat" cmpd="sng" algn="ctr">
+                      <a:solidFill>
+                        <a:srgbClr val="BDBDBD"/>
+                      </a:solidFill>
+                      <a:prstDash val="solid"/>
+                      <a:round/>
+                      <a:headEnd type="none" w="med" len="med"/>
+                      <a:tailEnd type="none" w="med" len="med"/>
+                    </a:lnT>
+                    <a:lnB w="9525" cap="flat" cmpd="sng" algn="ctr">
+                      <a:solidFill>
+                        <a:srgbClr val="BDBDBD"/>
+                      </a:solidFill>
+                      <a:prstDash val="solid"/>
+                      <a:round/>
+                      <a:headEnd type="none" w="med" len="med"/>
+                      <a:tailEnd type="none" w="med" len="med"/>
+                    </a:lnB>
+                  </a:tcPr>
+                </a:tc>
+              </a:tr>
+              <a:tr h="0">
+                <a:tc>
+                  <a:txBody>
+                    <a:bodyPr/>
+                    <a:lstStyle/>
+                    <a:p>
+                      <a:pPr indent="0" marL="0">
+                        <a:buNone/>
+                      </a:pPr>
+                      <a:r>
+                        <a:rPr lang="en-US" sz="1250" b="1" dirty="0">
+                          <a:solidFill>
+                            <a:srgbClr val="1B1B1B"/>
+                          </a:solidFill>
+                          <a:latin typeface="Arial" pitchFamily="34" charset="0"/>
+                          <a:ea typeface="Arial" pitchFamily="34" charset="-122"/>
+                          <a:cs typeface="Arial" pitchFamily="34" charset="-120"/>
+                        </a:rPr>
+                        <a:t>Hazard head [48]</a:t>
+                      </a:r>
+                      <a:endParaRPr lang="en-US" sz="1250" dirty="0">
+                        <a:latin typeface="Arial" charset="0"/>
+                        <a:ea typeface="Arial" charset="0"/>
+                        <a:cs typeface="Arial" charset="0"/>
+                      </a:endParaRPr>
+                    </a:p>
+                  </a:txBody>
+                  <a:tcPr marL="45720" marR="45720" marT="45720" marB="45720" anchor="ctr">
+                    <a:lnL w="9525" cap="flat" cmpd="sng" algn="ctr">
+                      <a:solidFill>
+                        <a:srgbClr val="BDBDBD"/>
+                      </a:solidFill>
+                      <a:prstDash val="solid"/>
+                      <a:round/>
+                      <a:headEnd type="none" w="med" len="med"/>
+                      <a:tailEnd type="none" w="med" len="med"/>
+                    </a:lnL>
+                    <a:lnR w="9525" cap="flat" cmpd="sng" algn="ctr">
+                      <a:solidFill>
+                        <a:srgbClr val="BDBDBD"/>
+                      </a:solidFill>
+                      <a:prstDash val="solid"/>
+                      <a:round/>
+                      <a:headEnd type="none" w="med" len="med"/>
+                      <a:tailEnd type="none" w="med" len="med"/>
+                    </a:lnR>
+                    <a:lnT w="9525" cap="flat" cmpd="sng" algn="ctr">
+                      <a:solidFill>
+                        <a:srgbClr val="BDBDBD"/>
+                      </a:solidFill>
+                      <a:prstDash val="solid"/>
+                      <a:round/>
+                      <a:headEnd type="none" w="med" len="med"/>
+                      <a:tailEnd type="none" w="med" len="med"/>
+                    </a:lnT>
+                    <a:lnB w="9525" cap="flat" cmpd="sng" algn="ctr">
+                      <a:solidFill>
+                        <a:srgbClr val="BDBDBD"/>
+                      </a:solidFill>
+                      <a:prstDash val="solid"/>
+                      <a:round/>
+                      <a:headEnd type="none" w="med" len="med"/>
+                      <a:tailEnd type="none" w="med" len="med"/>
+                    </a:lnB>
+                  </a:tcPr>
+                </a:tc>
+                <a:tc>
+                  <a:txBody>
+                    <a:bodyPr/>
+                    <a:lstStyle/>
+                    <a:p>
+                      <a:pPr indent="0" marL="0">
+                        <a:buNone/>
+                      </a:pPr>
+                      <a:r>
+                        <a:rPr lang="en-US" sz="1250" dirty="0">
+                          <a:solidFill>
+                            <a:srgbClr val="1B1B1B"/>
+                          </a:solidFill>
+                          <a:latin typeface="Arial" pitchFamily="34" charset="0"/>
+                          <a:ea typeface="Arial" pitchFamily="34" charset="-122"/>
+                          <a:cs typeface="Arial" pitchFamily="34" charset="-120"/>
+                        </a:rPr>
+                        <a:t>Risk at 1, 3, 6, 12 and 24 h as a survival curve</a:t>
+                      </a:r>
+                      <a:endParaRPr lang="en-US" sz="1250" dirty="0">
+                        <a:latin typeface="Arial" charset="0"/>
+                        <a:ea typeface="Arial" charset="0"/>
+                        <a:cs typeface="Arial" charset="0"/>
+                      </a:endParaRPr>
+                    </a:p>
+                  </a:txBody>
+                  <a:tcPr marL="45720" marR="45720" marT="45720" marB="45720" anchor="ctr">
+                    <a:lnL w="9525" cap="flat" cmpd="sng" algn="ctr">
+                      <a:solidFill>
+                        <a:srgbClr val="BDBDBD"/>
+                      </a:solidFill>
+                      <a:prstDash val="solid"/>
+                      <a:round/>
+                      <a:headEnd type="none" w="med" len="med"/>
+                      <a:tailEnd type="none" w="med" len="med"/>
+                    </a:lnL>
+                    <a:lnR w="9525" cap="flat" cmpd="sng" algn="ctr">
+                      <a:solidFill>
+                        <a:srgbClr val="BDBDBD"/>
+                      </a:solidFill>
+                      <a:prstDash val="solid"/>
+                      <a:round/>
+                      <a:headEnd type="none" w="med" len="med"/>
+                      <a:tailEnd type="none" w="med" len="med"/>
+                    </a:lnR>
+                    <a:lnT w="9525" cap="flat" cmpd="sng" algn="ctr">
+                      <a:solidFill>
+                        <a:srgbClr val="BDBDBD"/>
+                      </a:solidFill>
+                      <a:prstDash val="solid"/>
+                      <a:round/>
+                      <a:headEnd type="none" w="med" len="med"/>
+                      <a:tailEnd type="none" w="med" len="med"/>
+                    </a:lnT>
+                    <a:lnB w="9525" cap="flat" cmpd="sng" algn="ctr">
+                      <a:solidFill>
+                        <a:srgbClr val="BDBDBD"/>
+                      </a:solidFill>
+                      <a:prstDash val="solid"/>
+                      <a:round/>
+                      <a:headEnd type="none" w="med" len="med"/>
+                      <a:tailEnd type="none" w="med" len="med"/>
+                    </a:lnB>
+                  </a:tcPr>
+                </a:tc>
+                <a:tc>
+                  <a:txBody>
+                    <a:bodyPr/>
+                    <a:lstStyle/>
+                    <a:p>
+                      <a:pPr indent="0" marL="0">
+                        <a:buNone/>
+                      </a:pPr>
+                      <a:r>
+                        <a:rPr lang="en-US" sz="1250" dirty="0">
+                          <a:solidFill>
+                            <a:srgbClr val="1B1B1B"/>
+                          </a:solidFill>
+                          <a:latin typeface="Arial" pitchFamily="34" charset="0"/>
+                          <a:ea typeface="Arial" pitchFamily="34" charset="-122"/>
+                          <a:cs typeface="Arial" pitchFamily="34" charset="-120"/>
+                        </a:rPr>
+                        <a:t>Uses when onset happens, not only whether</a:t>
+                      </a:r>
+                      <a:endParaRPr lang="en-US" sz="1250" dirty="0">
+                        <a:latin typeface="Arial" charset="0"/>
+                        <a:ea typeface="Arial" charset="0"/>
+                        <a:cs typeface="Arial" charset="0"/>
+                      </a:endParaRPr>
+                    </a:p>
+                  </a:txBody>
+                  <a:tcPr marL="45720" marR="45720" marT="45720" marB="45720" anchor="ctr">
+                    <a:lnL w="9525" cap="flat" cmpd="sng" algn="ctr">
+                      <a:solidFill>
+                        <a:srgbClr val="BDBDBD"/>
+                      </a:solidFill>
+                      <a:prstDash val="solid"/>
+                      <a:round/>
+                      <a:headEnd type="none" w="med" len="med"/>
+                      <a:tailEnd type="none" w="med" len="med"/>
+                    </a:lnL>
+                    <a:lnR w="9525" cap="flat" cmpd="sng" algn="ctr">
+                      <a:solidFill>
+                        <a:srgbClr val="BDBDBD"/>
+                      </a:solidFill>
+                      <a:prstDash val="solid"/>
+                      <a:round/>
+                      <a:headEnd type="none" w="med" len="med"/>
+                      <a:tailEnd type="none" w="med" len="med"/>
+                    </a:lnR>
+                    <a:lnT w="9525" cap="flat" cmpd="sng" algn="ctr">
+                      <a:solidFill>
+                        <a:srgbClr val="BDBDBD"/>
+                      </a:solidFill>
+                      <a:prstDash val="solid"/>
+                      <a:round/>
+                      <a:headEnd type="none" w="med" len="med"/>
+                      <a:tailEnd type="none" w="med" len="med"/>
+                    </a:lnT>
+                    <a:lnB w="9525" cap="flat" cmpd="sng" algn="ctr">
+                      <a:solidFill>
+                        <a:srgbClr val="BDBDBD"/>
+                      </a:solidFill>
+                      <a:prstDash val="solid"/>
+                      <a:round/>
+                      <a:headEnd type="none" w="med" len="med"/>
+                      <a:tailEnd type="none" w="med" len="med"/>
+                    </a:lnB>
+                  </a:tcPr>
+                </a:tc>
+                <a:tc>
+                  <a:txBody>
+                    <a:bodyPr/>
+                    <a:lstStyle/>
+                    <a:p>
+                      <a:pPr algn="ctr" indent="0" marL="0">
+                        <a:buNone/>
+                      </a:pPr>
+                      <a:r>
+                        <a:rPr lang="en-US" sz="1250" b="1" dirty="0">
+                          <a:solidFill>
+                            <a:srgbClr val="C8102E"/>
+                          </a:solidFill>
+                          <a:latin typeface="Arial" pitchFamily="34" charset="0"/>
+                          <a:ea typeface="Arial" pitchFamily="34" charset="-122"/>
+                          <a:cs typeface="Arial" pitchFamily="34" charset="-120"/>
+                        </a:rPr>
+                        <a:t>0.18</a:t>
+                      </a:r>
+                      <a:endParaRPr lang="en-US" sz="1250" dirty="0">
+                        <a:latin typeface="Arial" charset="0"/>
+                        <a:ea typeface="Arial" charset="0"/>
+                        <a:cs typeface="Arial" charset="0"/>
+                      </a:endParaRPr>
+                    </a:p>
+                  </a:txBody>
+                  <a:tcPr marL="45720" marR="45720" marT="45720" marB="45720" anchor="ctr">
+                    <a:lnL w="9525" cap="flat" cmpd="sng" algn="ctr">
+                      <a:solidFill>
+                        <a:srgbClr val="BDBDBD"/>
+                      </a:solidFill>
+                      <a:prstDash val="solid"/>
+                      <a:round/>
+                      <a:headEnd type="none" w="med" len="med"/>
+                      <a:tailEnd type="none" w="med" len="med"/>
+                    </a:lnL>
+                    <a:lnR w="9525" cap="flat" cmpd="sng" algn="ctr">
+                      <a:solidFill>
+                        <a:srgbClr val="BDBDBD"/>
+                      </a:solidFill>
+                      <a:prstDash val="solid"/>
+                      <a:round/>
+                      <a:headEnd type="none" w="med" len="med"/>
+                      <a:tailEnd type="none" w="med" len="med"/>
+                    </a:lnR>
+                    <a:lnT w="9525" cap="flat" cmpd="sng" algn="ctr">
+                      <a:solidFill>
+                        <a:srgbClr val="BDBDBD"/>
+                      </a:solidFill>
+                      <a:prstDash val="solid"/>
+                      <a:round/>
+                      <a:headEnd type="none" w="med" len="med"/>
+                      <a:tailEnd type="none" w="med" len="med"/>
+                    </a:lnT>
+                    <a:lnB w="9525" cap="flat" cmpd="sng" algn="ctr">
+                      <a:solidFill>
+                        <a:srgbClr val="BDBDBD"/>
+                      </a:solidFill>
+                      <a:prstDash val="solid"/>
+                      <a:round/>
+                      <a:headEnd type="none" w="med" len="med"/>
+                      <a:tailEnd type="none" w="med" len="med"/>
+                    </a:lnB>
+                  </a:tcPr>
+                </a:tc>
+              </a:tr>
+              <a:tr h="0">
+                <a:tc>
+                  <a:txBody>
+                    <a:bodyPr/>
+                    <a:lstStyle/>
+                    <a:p>
+                      <a:pPr indent="0" marL="0">
+                        <a:buNone/>
+                      </a:pPr>
+                      <a:r>
+                        <a:rPr lang="en-US" sz="1250" b="1" dirty="0">
+                          <a:solidFill>
+                            <a:srgbClr val="1B1B1B"/>
+                          </a:solidFill>
+                          <a:latin typeface="Arial" pitchFamily="34" charset="0"/>
+                          <a:ea typeface="Arial" pitchFamily="34" charset="-122"/>
+                          <a:cs typeface="Arial" pitchFamily="34" charset="-120"/>
+                        </a:rPr>
+                        <a:t>Mean ensemble</a:t>
+                      </a:r>
+                      <a:endParaRPr lang="en-US" sz="1250" dirty="0">
+                        <a:latin typeface="Arial" charset="0"/>
+                        <a:ea typeface="Arial" charset="0"/>
+                        <a:cs typeface="Arial" charset="0"/>
+                      </a:endParaRPr>
+                    </a:p>
+                  </a:txBody>
+                  <a:tcPr marL="45720" marR="45720" marT="45720" marB="45720" anchor="ctr">
+                    <a:lnL w="9525" cap="flat" cmpd="sng" algn="ctr">
+                      <a:solidFill>
+                        <a:srgbClr val="BDBDBD"/>
+                      </a:solidFill>
+                      <a:prstDash val="solid"/>
+                      <a:round/>
+                      <a:headEnd type="none" w="med" len="med"/>
+                      <a:tailEnd type="none" w="med" len="med"/>
+                    </a:lnL>
+                    <a:lnR w="9525" cap="flat" cmpd="sng" algn="ctr">
+                      <a:solidFill>
+                        <a:srgbClr val="BDBDBD"/>
+                      </a:solidFill>
+                      <a:prstDash val="solid"/>
+                      <a:round/>
+                      <a:headEnd type="none" w="med" len="med"/>
+                      <a:tailEnd type="none" w="med" len="med"/>
+                    </a:lnR>
+                    <a:lnT w="9525" cap="flat" cmpd="sng" algn="ctr">
+                      <a:solidFill>
+                        <a:srgbClr val="BDBDBD"/>
+                      </a:solidFill>
+                      <a:prstDash val="solid"/>
+                      <a:round/>
+                      <a:headEnd type="none" w="med" len="med"/>
+                      <a:tailEnd type="none" w="med" len="med"/>
+                    </a:lnT>
+                    <a:lnB w="9525" cap="flat" cmpd="sng" algn="ctr">
+                      <a:solidFill>
+                        <a:srgbClr val="BDBDBD"/>
+                      </a:solidFill>
+                      <a:prstDash val="solid"/>
+                      <a:round/>
+                      <a:headEnd type="none" w="med" len="med"/>
+                      <a:tailEnd type="none" w="med" len="med"/>
+                    </a:lnB>
+                  </a:tcPr>
+                </a:tc>
+                <a:tc>
+                  <a:txBody>
+                    <a:bodyPr/>
+                    <a:lstStyle/>
+                    <a:p>
+                      <a:pPr indent="0" marL="0">
+                        <a:buNone/>
+                      </a:pPr>
+                      <a:r>
+                        <a:rPr lang="en-US" sz="1250" dirty="0">
+                          <a:solidFill>
+                            <a:srgbClr val="1B1B1B"/>
+                          </a:solidFill>
+                          <a:latin typeface="Arial" pitchFamily="34" charset="0"/>
+                          <a:ea typeface="Arial" pitchFamily="34" charset="-122"/>
+                          <a:cs typeface="Arial" pitchFamily="34" charset="-120"/>
+                        </a:rPr>
+                        <a:t>Average of OSTA, CNN-Transformer and self-supervised CNN to OSTA</a:t>
+                      </a:r>
+                      <a:endParaRPr lang="en-US" sz="1250" dirty="0">
+                        <a:latin typeface="Arial" charset="0"/>
+                        <a:ea typeface="Arial" charset="0"/>
+                        <a:cs typeface="Arial" charset="0"/>
+                      </a:endParaRPr>
+                    </a:p>
+                  </a:txBody>
+                  <a:tcPr marL="45720" marR="45720" marT="45720" marB="45720" anchor="ctr">
+                    <a:lnL w="9525" cap="flat" cmpd="sng" algn="ctr">
+                      <a:solidFill>
+                        <a:srgbClr val="BDBDBD"/>
+                      </a:solidFill>
+                      <a:prstDash val="solid"/>
+                      <a:round/>
+                      <a:headEnd type="none" w="med" len="med"/>
+                      <a:tailEnd type="none" w="med" len="med"/>
+                    </a:lnL>
+                    <a:lnR w="9525" cap="flat" cmpd="sng" algn="ctr">
+                      <a:solidFill>
+                        <a:srgbClr val="BDBDBD"/>
+                      </a:solidFill>
+                      <a:prstDash val="solid"/>
+                      <a:round/>
+                      <a:headEnd type="none" w="med" len="med"/>
+                      <a:tailEnd type="none" w="med" len="med"/>
+                    </a:lnR>
+                    <a:lnT w="9525" cap="flat" cmpd="sng" algn="ctr">
+                      <a:solidFill>
+                        <a:srgbClr val="BDBDBD"/>
+                      </a:solidFill>
+                      <a:prstDash val="solid"/>
+                      <a:round/>
+                      <a:headEnd type="none" w="med" len="med"/>
+                      <a:tailEnd type="none" w="med" len="med"/>
+                    </a:lnT>
+                    <a:lnB w="9525" cap="flat" cmpd="sng" algn="ctr">
+                      <a:solidFill>
+                        <a:srgbClr val="BDBDBD"/>
+                      </a:solidFill>
+                      <a:prstDash val="solid"/>
+                      <a:round/>
+                      <a:headEnd type="none" w="med" len="med"/>
+                      <a:tailEnd type="none" w="med" len="med"/>
+                    </a:lnB>
+                  </a:tcPr>
+                </a:tc>
+                <a:tc>
+                  <a:txBody>
+                    <a:bodyPr/>
+                    <a:lstStyle/>
+                    <a:p>
+                      <a:pPr indent="0" marL="0">
+                        <a:buNone/>
+                      </a:pPr>
+                      <a:r>
+                        <a:rPr lang="en-US" sz="1250" dirty="0">
+                          <a:solidFill>
+                            <a:srgbClr val="1B1B1B"/>
+                          </a:solidFill>
+                          <a:latin typeface="Arial" pitchFamily="34" charset="0"/>
+                          <a:ea typeface="Arial" pitchFamily="34" charset="-122"/>
+                          <a:cs typeface="Arial" pitchFamily="34" charset="-120"/>
+                        </a:rPr>
+                        <a:t>No learned weights</a:t>
+                      </a:r>
+                      <a:endParaRPr lang="en-US" sz="1250" dirty="0">
+                        <a:latin typeface="Arial" charset="0"/>
+                        <a:ea typeface="Arial" charset="0"/>
+                        <a:cs typeface="Arial" charset="0"/>
+                      </a:endParaRPr>
+                    </a:p>
+                  </a:txBody>
+                  <a:tcPr marL="45720" marR="45720" marT="45720" marB="45720" anchor="ctr">
+                    <a:lnL w="9525" cap="flat" cmpd="sng" algn="ctr">
+                      <a:solidFill>
+                        <a:srgbClr val="BDBDBD"/>
+                      </a:solidFill>
+                      <a:prstDash val="solid"/>
+                      <a:round/>
+                      <a:headEnd type="none" w="med" len="med"/>
+                      <a:tailEnd type="none" w="med" len="med"/>
+                    </a:lnL>
+                    <a:lnR w="9525" cap="flat" cmpd="sng" algn="ctr">
+                      <a:solidFill>
+                        <a:srgbClr val="BDBDBD"/>
+                      </a:solidFill>
+                      <a:prstDash val="solid"/>
+                      <a:round/>
+                      <a:headEnd type="none" w="med" len="med"/>
+                      <a:tailEnd type="none" w="med" len="med"/>
+                    </a:lnR>
+                    <a:lnT w="9525" cap="flat" cmpd="sng" algn="ctr">
+                      <a:solidFill>
+                        <a:srgbClr val="BDBDBD"/>
+                      </a:solidFill>
+                      <a:prstDash val="solid"/>
+                      <a:round/>
+                      <a:headEnd type="none" w="med" len="med"/>
+                      <a:tailEnd type="none" w="med" len="med"/>
+                    </a:lnT>
+                    <a:lnB w="9525" cap="flat" cmpd="sng" algn="ctr">
+                      <a:solidFill>
+                        <a:srgbClr val="BDBDBD"/>
+                      </a:solidFill>
+                      <a:prstDash val="solid"/>
+                      <a:round/>
+                      <a:headEnd type="none" w="med" len="med"/>
+                      <a:tailEnd type="none" w="med" len="med"/>
+                    </a:lnB>
+                  </a:tcPr>
+                </a:tc>
+                <a:tc>
+                  <a:txBody>
+                    <a:bodyPr/>
+                    <a:lstStyle/>
+                    <a:p>
+                      <a:pPr algn="ctr" indent="0" marL="0">
+                        <a:buNone/>
+                      </a:pPr>
+                      <a:r>
+                        <a:rPr lang="en-US" sz="1250" b="1" dirty="0">
+                          <a:solidFill>
+                            <a:srgbClr val="C8102E"/>
+                          </a:solidFill>
+                          <a:latin typeface="Arial" pitchFamily="34" charset="0"/>
+                          <a:ea typeface="Arial" pitchFamily="34" charset="-122"/>
+                          <a:cs typeface="Arial" pitchFamily="34" charset="-120"/>
+                        </a:rPr>
+                        <a:t>0.28</a:t>
+                      </a:r>
+                      <a:endParaRPr lang="en-US" sz="1250" dirty="0">
+                        <a:latin typeface="Arial" charset="0"/>
+                        <a:ea typeface="Arial" charset="0"/>
+                        <a:cs typeface="Arial" charset="0"/>
+                      </a:endParaRPr>
+                    </a:p>
+                  </a:txBody>
+                  <a:tcPr marL="45720" marR="45720" marT="45720" marB="45720" anchor="ctr">
+                    <a:lnL w="9525" cap="flat" cmpd="sng" algn="ctr">
+                      <a:solidFill>
+                        <a:srgbClr val="BDBDBD"/>
+                      </a:solidFill>
+                      <a:prstDash val="solid"/>
+                      <a:round/>
+                      <a:headEnd type="none" w="med" len="med"/>
+                      <a:tailEnd type="none" w="med" len="med"/>
+                    </a:lnL>
+                    <a:lnR w="9525" cap="flat" cmpd="sng" algn="ctr">
+                      <a:solidFill>
+                        <a:srgbClr val="BDBDBD"/>
+                      </a:solidFill>
+                      <a:prstDash val="solid"/>
+                      <a:round/>
+                      <a:headEnd type="none" w="med" len="med"/>
+                      <a:tailEnd type="none" w="med" len="med"/>
+                    </a:lnR>
+                    <a:lnT w="9525" cap="flat" cmpd="sng" algn="ctr">
+                      <a:solidFill>
+                        <a:srgbClr val="BDBDBD"/>
+                      </a:solidFill>
+                      <a:prstDash val="solid"/>
+                      <a:round/>
+                      <a:headEnd type="none" w="med" len="med"/>
+                      <a:tailEnd type="none" w="med" len="med"/>
+                    </a:lnT>
+                    <a:lnB w="9525" cap="flat" cmpd="sng" algn="ctr">
+                      <a:solidFill>
+                        <a:srgbClr val="BDBDBD"/>
+                      </a:solidFill>
+                      <a:prstDash val="solid"/>
+                      <a:round/>
+                      <a:headEnd type="none" w="med" len="med"/>
+                      <a:tailEnd type="none" w="med" len="med"/>
+                    </a:lnB>
+                  </a:tcPr>
+                </a:tc>
+              </a:tr>
+            </a:tbl>
+          </a:graphicData>
+        </a:graphic>
+      </p:graphicFrame>
+      <p:sp>
+        <p:nvSpPr>
+          <p:cNvPr id="5" name="text"/>
+          <p:cNvSpPr txBox="1"/>
+          <p:nvPr/>
+        </p:nvSpPr>
+        <p:spPr>
+          <a:xfrm>
+            <a:off x="548640" y="5257800"/>
+            <a:ext cx="11094415" cy="640080"/>
+          </a:xfrm>
+          <a:prstGeom prst="rect">
+            <a:avLst/>
+          </a:prstGeom>
+          <a:noFill/>
+          <a:ln/>
+        </p:spPr>
+        <p:txBody>
+          <a:bodyPr wrap="square" lIns="0" tIns="0" rIns="0" bIns="0" rtlCol="0" anchor="t"/>
+          <a:lstStyle/>
+          <a:p>
+            <a:pPr algn="l" indent="0" marL="0">
+              <a:buNone/>
+            </a:pPr>
+            <a:r>
+              <a:rPr lang="en-US" sz="1100" dirty="0">
+                <a:solidFill>
+                  <a:srgbClr val="5E5E5E"/>
+                </a:solidFill>
+              </a:rPr>
+              <a:t>Retired in earlier versions: gated and ungated attention and observer features, which did not differ from OSTA. Utility: normalised utility on the MIMIC-IV development test split, one seed, preliminary [41]. Every 95 % CI is above zero and the intervals overlap, so the order is not a ranking.</a:t>
+            </a:r>
+            <a:endParaRPr lang="en-US" sz="1100" dirty="0"/>
+          </a:p>
+        </p:txBody>
+      </p:sp>
+      <p:sp>
+        <p:nvSpPr>
+          <p:cNvPr id="6" name="references"/>
+          <p:cNvSpPr txBox="1"/>
+          <p:nvPr/>
+        </p:nvSpPr>
+        <p:spPr>
+          <a:xfrm>
+            <a:off x="548640" y="5943600"/>
+            <a:ext cx="10180015" cy="457200"/>
+          </a:xfrm>
+          <a:prstGeom prst="rect">
+            <a:avLst/>
+          </a:prstGeom>
+          <a:noFill/>
+          <a:ln/>
+        </p:spPr>
+        <p:txBody>
+          <a:bodyPr wrap="square" lIns="0" tIns="0" rIns="0" bIns="0" rtlCol="0" anchor="b"/>
+          <a:lstStyle/>
+          <a:p>
+            <a:pPr indent="0" marL="0">
+              <a:buNone/>
+            </a:pPr>
+            <a:r>
+              <a:rPr lang="en-US" sz="950" dirty="0">
+                <a:solidFill>
+                  <a:srgbClr val="5E5E5E"/>
+                </a:solidFill>
+              </a:rPr>
+              <a:t>[39] Yeche et al., ICML 2021   [47] Horn et al., ICML 2020   [48] Gensheimer and Narasimhan, PeerJ 2019</a:t>
+            </a:r>
+            <a:endParaRPr lang="en-US" sz="950" dirty="0"/>
+          </a:p>
+        </p:txBody>
+      </p:sp>
+      <p:sp>
+        <p:nvSpPr>
+          <p:cNvPr id="25" name="Slide Number Placeholder 0"/>
+          <p:cNvSpPr>
+            <a:spLocks noGrp="1"/>
+          </p:cNvSpPr>
+          <p:nvPr>
+            <p:ph type="sldNum" sz="quarter" idx="4294967295"/>
+          </p:nvPr>
+        </p:nvSpPr>
+        <p:spPr>
+          <a:xfrm>
+            <a:off x="10911535" y="6437376"/>
+            <a:ext cx="731520" cy="274320"/>
+          </a:xfrm>
+          <a:prstGeom prst="rect">
+            <a:avLst/>
+          </a:prstGeom>
+          <a:extLst>
+            <a:ext uri="{C572A759-6A51-4108-AA02-DFA0A04FC94B}">
+              <ma14:wrappingTextBoxFlag xmlns:ma14="http://schemas.microsoft.com/office/mac/drawingml/2011/main" val="0"/>
+            </a:ext>
+          </a:extLst>
+        </p:spPr>
+        <p:txBody>
+          <a:bodyPr/>
+          <a:lstStyle>
+            <a:lvl1pPr>
+              <a:defRPr sz="1200">
+                <a:solidFill>
+                  <a:srgbClr val="C8102E"/>
+                </a:solidFill>
+              </a:defRPr>
+            </a:lvl1pPr>
+          </a:lstStyle>
+          <a:p>
+            <a:pPr algn="r"/>
+            <a:fld id="{F7021451-1387-4CA6-816F-3879F97B5CBC}" type="slidenum">
+              <a:rPr b="1" lang="en-US"/>
+              <a:t>21</a:t>
+            </a:fld>
+            <a:endParaRPr lang="en-US"/>
+          </a:p>
+        </p:txBody>
+      </p:sp>
+    </p:spTree>
+  </p:cSld>
+  <p:clrMapOvr>
+    <a:masterClrMapping/>
+  </p:clrMapOvr>
+</p:sld>
+</file>
+
+<file path=ppt/slides/slide22.xml><?xml version="1.0" encoding="utf-8"?>
+<p:sld xmlns:a="http://schemas.openxmlformats.org/drawingml/2006/main" xmlns:r="http://schemas.openxmlformats.org/officeDocument/2006/relationships" xmlns:p="http://schemas.openxmlformats.org/presentationml/2006/main">
+  <p:cSld name="Slide 22">
+    <p:spTree>
+      <p:nvGrpSpPr>
+        <p:cNvPr id="1" name=""/>
+        <p:cNvGrpSpPr/>
+        <p:nvPr/>
+      </p:nvGrpSpPr>
+      <p:grpSpPr>
+        <a:xfrm>
+          <a:off x="0" y="0"/>
+          <a:ext cx="0" cy="0"/>
+          <a:chOff x="0" y="0"/>
+          <a:chExt cx="0" cy="0"/>
+        </a:xfrm>
+      </p:grpSpPr>
+      <p:sp>
+        <p:nvSpPr>
+          <p:cNvPr id="2" name="section label"/>
+          <p:cNvSpPr txBox="1"/>
+          <p:nvPr/>
+        </p:nvSpPr>
+        <p:spPr>
+          <a:xfrm>
+            <a:off x="548640" y="237744"/>
+            <a:ext cx="7315200" cy="274320"/>
+          </a:xfrm>
+          <a:prstGeom prst="rect">
+            <a:avLst/>
+          </a:prstGeom>
+          <a:noFill/>
+          <a:ln/>
+        </p:spPr>
+        <p:txBody>
+          <a:bodyPr wrap="square" lIns="0" tIns="0" rIns="0" bIns="0" rtlCol="0" anchor="t"/>
+          <a:lstStyle/>
+          <a:p>
+            <a:pPr algn="l" indent="0" marL="0">
+              <a:buNone/>
+            </a:pPr>
+            <a:r>
+              <a:rPr lang="en-US" sz="1100" b="1" dirty="0">
+                <a:solidFill>
+                  <a:srgbClr val="C8102E"/>
+                </a:solidFill>
+              </a:rPr>
+              <a:t>BACKUP</a:t>
+            </a:r>
+            <a:endParaRPr lang="en-US" sz="1100" dirty="0"/>
+          </a:p>
+        </p:txBody>
+      </p:sp>
+      <p:sp>
+        <p:nvSpPr>
+          <p:cNvPr id="3" name="Text 0"/>
+          <p:cNvSpPr/>
+          <p:nvPr>
+            <p:ph idx="100" type="title" hasCustomPrompt="1"/>
+          </p:nvPr>
+        </p:nvSpPr>
+        <p:spPr>
+          <a:xfrm>
+            <a:off x="548640" y="548640"/>
+            <a:ext cx="11094415" cy="868680"/>
+          </a:xfrm>
+          <a:prstGeom prst="rect">
+            <a:avLst/>
+          </a:prstGeom>
+          <a:noFill/>
+          <a:ln/>
+        </p:spPr>
+        <p:txBody>
+          <a:bodyPr wrap="square" lIns="0" tIns="0" rIns="0" bIns="0" rtlCol="0" anchor="t"/>
+          <a:lstStyle/>
+          <a:p>
+            <a:pPr algn="l" indent="0" marL="0">
+              <a:buNone/>
+            </a:pPr>
+            <a:r>
+              <a:rPr lang="en-US" sz="2400" b="1" dirty="0">
+                <a:solidFill>
+                  <a:srgbClr val="1B1B1B"/>
+                </a:solidFill>
+                <a:latin typeface="Arial" pitchFamily="34" charset="0"/>
+                <a:ea typeface="Arial" pitchFamily="34" charset="-122"/>
+                <a:cs typeface="Arial" pitchFamily="34" charset="-120"/>
+              </a:rPr>
+              <a:t>Cohorts, splits and the sealed holdout</a:t>
+            </a:r>
+            <a:endParaRPr lang="en-US" sz="2400" dirty="0"/>
+          </a:p>
+        </p:txBody>
+      </p:sp>
+      <p:graphicFrame>
+        <p:nvGraphicFramePr>
+          <p:cNvPr id="23" name="cohort table"/>
           <p:cNvGraphicFramePr>
             <a:graphicFrameLocks noGrp="1"/>
           </p:cNvGraphicFramePr>
@@ -17480,7 +22902,7 @@
             <a:pPr algn="r"/>
             <a:fld id="{F7021451-1387-4CA6-816F-3879F97B5CBC}" type="slidenum">
               <a:rPr b="1" lang="en-US"/>
-              <a:t>20</a:t>
+              <a:t>22</a:t>
             </a:fld>
             <a:endParaRPr lang="en-US"/>
           </a:p>
@@ -17494,9 +22916,9 @@
 </p:sld>
 </file>
 
-<file path=ppt/slides/slide21.xml><?xml version="1.0" encoding="utf-8"?>
+<file path=ppt/slides/slide23.xml><?xml version="1.0" encoding="utf-8"?>
 <p:sld xmlns:a="http://schemas.openxmlformats.org/drawingml/2006/main" xmlns:r="http://schemas.openxmlformats.org/officeDocument/2006/relationships" xmlns:p="http://schemas.openxmlformats.org/presentationml/2006/main">
-  <p:cSld name="Slide 21">
+  <p:cSld name="Slide 23">
     <p:spTree>
       <p:nvGrpSpPr>
         <p:cNvPr id="1" name=""/>
@@ -17937,7 +23359,7 @@
             <a:pPr algn="r"/>
             <a:fld id="{F7021451-1387-4CA6-816F-3879F97B5CBC}" type="slidenum">
               <a:rPr b="1" lang="en-US"/>
-              <a:t>21</a:t>
+              <a:t>23</a:t>
             </a:fld>
             <a:endParaRPr lang="en-US"/>
           </a:p>
@@ -17951,9 +23373,9 @@
 </p:sld>
 </file>
 
-<file path=ppt/slides/slide22.xml><?xml version="1.0" encoding="utf-8"?>
+<file path=ppt/slides/slide24.xml><?xml version="1.0" encoding="utf-8"?>
 <p:sld xmlns:a="http://schemas.openxmlformats.org/drawingml/2006/main" xmlns:r="http://schemas.openxmlformats.org/officeDocument/2006/relationships" xmlns:p="http://schemas.openxmlformats.org/presentationml/2006/main">
-  <p:cSld name="Slide 22">
+  <p:cSld name="Slide 24">
     <p:spTree>
       <p:nvGrpSpPr>
         <p:cNvPr id="1" name=""/>
@@ -18047,7 +23469,7 @@
       </p:sp>
       <p:graphicFrame>
         <p:nvGraphicFramePr>
-          <p:cNvPr id="23" name="publications table"/>
+          <p:cNvPr id="25" name="publications table"/>
           <p:cNvGraphicFramePr>
             <a:graphicFrameLocks noGrp="1"/>
           </p:cNvGraphicFramePr>
@@ -19474,1013 +24896,6 @@
             <a:pPr algn="r"/>
             <a:fld id="{F7021451-1387-4CA6-816F-3879F97B5CBC}" type="slidenum">
               <a:rPr b="1" lang="en-US"/>
-              <a:t>22</a:t>
-            </a:fld>
-            <a:endParaRPr lang="en-US"/>
-          </a:p>
-        </p:txBody>
-      </p:sp>
-    </p:spTree>
-  </p:cSld>
-  <p:clrMapOvr>
-    <a:masterClrMapping/>
-  </p:clrMapOvr>
-</p:sld>
-</file>
-
-<file path=ppt/slides/slide23.xml><?xml version="1.0" encoding="utf-8"?>
-<p:sld xmlns:a="http://schemas.openxmlformats.org/drawingml/2006/main" xmlns:r="http://schemas.openxmlformats.org/officeDocument/2006/relationships" xmlns:p="http://schemas.openxmlformats.org/presentationml/2006/main">
-  <p:cSld name="Slide 23">
-    <p:spTree>
-      <p:nvGrpSpPr>
-        <p:cNvPr id="1" name=""/>
-        <p:cNvGrpSpPr/>
-        <p:nvPr/>
-      </p:nvGrpSpPr>
-      <p:grpSpPr>
-        <a:xfrm>
-          <a:off x="0" y="0"/>
-          <a:ext cx="0" cy="0"/>
-          <a:chOff x="0" y="0"/>
-          <a:chExt cx="0" cy="0"/>
-        </a:xfrm>
-      </p:grpSpPr>
-      <p:sp>
-        <p:nvSpPr>
-          <p:cNvPr id="2" name="section label"/>
-          <p:cNvSpPr txBox="1"/>
-          <p:nvPr/>
-        </p:nvSpPr>
-        <p:spPr>
-          <a:xfrm>
-            <a:off x="548640" y="237744"/>
-            <a:ext cx="7315200" cy="274320"/>
-          </a:xfrm>
-          <a:prstGeom prst="rect">
-            <a:avLst/>
-          </a:prstGeom>
-          <a:noFill/>
-          <a:ln/>
-        </p:spPr>
-        <p:txBody>
-          <a:bodyPr wrap="square" lIns="0" tIns="0" rIns="0" bIns="0" rtlCol="0" anchor="t"/>
-          <a:lstStyle/>
-          <a:p>
-            <a:pPr algn="l" indent="0" marL="0">
-              <a:buNone/>
-            </a:pPr>
-            <a:r>
-              <a:rPr lang="en-US" sz="1100" b="1" dirty="0">
-                <a:solidFill>
-                  <a:srgbClr val="C8102E"/>
-                </a:solidFill>
-              </a:rPr>
-              <a:t>BACKUP</a:t>
-            </a:r>
-            <a:endParaRPr lang="en-US" sz="1100" dirty="0"/>
-          </a:p>
-        </p:txBody>
-      </p:sp>
-      <p:sp>
-        <p:nvSpPr>
-          <p:cNvPr id="3" name="Text 0"/>
-          <p:cNvSpPr/>
-          <p:nvPr>
-            <p:ph idx="100" type="title" hasCustomPrompt="1"/>
-          </p:nvPr>
-        </p:nvSpPr>
-        <p:spPr>
-          <a:xfrm>
-            <a:off x="548640" y="548640"/>
-            <a:ext cx="11094415" cy="868680"/>
-          </a:xfrm>
-          <a:prstGeom prst="rect">
-            <a:avLst/>
-          </a:prstGeom>
-          <a:noFill/>
-          <a:ln/>
-        </p:spPr>
-        <p:txBody>
-          <a:bodyPr wrap="square" lIns="0" tIns="0" rIns="0" bIns="0" rtlCol="0" anchor="t"/>
-          <a:lstStyle/>
-          <a:p>
-            <a:pPr algn="l" indent="0" marL="0">
-              <a:buNone/>
-            </a:pPr>
-            <a:r>
-              <a:rPr lang="en-US" sz="2400" b="1" dirty="0">
-                <a:solidFill>
-                  <a:srgbClr val="1B1B1B"/>
-                </a:solidFill>
-                <a:latin typeface="Arial" pitchFamily="34" charset="0"/>
-                <a:ea typeface="Arial" pitchFamily="34" charset="-122"/>
-                <a:cs typeface="Arial" pitchFamily="34" charset="-120"/>
-              </a:rPr>
-              <a:t>RD6 supplement: training and the March 2026 plan</a:t>
-            </a:r>
-            <a:endParaRPr lang="en-US" sz="2400" dirty="0"/>
-          </a:p>
-        </p:txBody>
-      </p:sp>
-      <p:sp>
-        <p:nvSpPr>
-          <p:cNvPr id="4" name="text"/>
-          <p:cNvSpPr txBox="1"/>
-          <p:nvPr/>
-        </p:nvSpPr>
-        <p:spPr>
-          <a:xfrm>
-            <a:off x="548640" y="1463040"/>
-            <a:ext cx="5303520" cy="320040"/>
-          </a:xfrm>
-          <a:prstGeom prst="rect">
-            <a:avLst/>
-          </a:prstGeom>
-          <a:noFill/>
-          <a:ln/>
-        </p:spPr>
-        <p:txBody>
-          <a:bodyPr wrap="square" lIns="0" tIns="0" rIns="0" bIns="0" rtlCol="0" anchor="t"/>
-          <a:lstStyle/>
-          <a:p>
-            <a:pPr algn="l" indent="0" marL="0">
-              <a:buNone/>
-            </a:pPr>
-            <a:r>
-              <a:rPr lang="en-US" sz="1500" b="1" dirty="0">
-                <a:solidFill>
-                  <a:srgbClr val="C8102E"/>
-                </a:solidFill>
-              </a:rPr>
-              <a:t>Training</a:t>
-            </a:r>
-            <a:endParaRPr lang="en-US" sz="1500" dirty="0"/>
-          </a:p>
-        </p:txBody>
-      </p:sp>
-      <p:sp>
-        <p:nvSpPr>
-          <p:cNvPr id="5" name="list"/>
-          <p:cNvSpPr txBox="1"/>
-          <p:nvPr/>
-        </p:nvSpPr>
-        <p:spPr>
-          <a:xfrm>
-            <a:off x="548640" y="1828800"/>
-            <a:ext cx="5303520" cy="3657600"/>
-          </a:xfrm>
-          <a:prstGeom prst="rect">
-            <a:avLst/>
-          </a:prstGeom>
-          <a:noFill/>
-          <a:ln/>
-        </p:spPr>
-        <p:txBody>
-          <a:bodyPr wrap="square" lIns="0" tIns="0" rIns="0" bIns="0" rtlCol="0" anchor="t"/>
-          <a:lstStyle/>
-          <a:p>
-            <a:pPr marL="203200" indent="-203200">
-              <a:spcAft>
-                <a:spcPts val="800"/>
-              </a:spcAft>
-              <a:buSzPct val="100000"/>
-              <a:buChar char="•"/>
-            </a:pPr>
-            <a:r>
-              <a:rPr lang="en-US" sz="1350" dirty="0">
-                <a:solidFill>
-                  <a:srgbClr val="1B1B1B"/>
-                </a:solidFill>
-              </a:rPr>
-              <a:t>Harvard PPCR: Clinical Trials Design, Implementation and Analysis (completed Feb 2026)</a:t>
-            </a:r>
-            <a:endParaRPr lang="en-US" sz="1350" dirty="0"/>
-          </a:p>
-          <a:p>
-            <a:pPr marL="203200" indent="-203200">
-              <a:spcAft>
-                <a:spcPts val="800"/>
-              </a:spcAft>
-              <a:buSzPct val="100000"/>
-              <a:buChar char="•"/>
-            </a:pPr>
-            <a:r>
-              <a:rPr lang="en-US" sz="1350" dirty="0">
-                <a:solidFill>
-                  <a:srgbClr val="1B1B1B"/>
-                </a:solidFill>
-              </a:rPr>
-              <a:t>Iowa State University: Machine Learning Programme (completed Dec 2025)</a:t>
-            </a:r>
-            <a:endParaRPr lang="en-US" sz="1350" dirty="0"/>
-          </a:p>
-          <a:p>
-            <a:pPr marL="203200" indent="-203200">
-              <a:spcAft>
-                <a:spcPts val="800"/>
-              </a:spcAft>
-              <a:buSzPct val="100000"/>
-              <a:buChar char="•"/>
-            </a:pPr>
-            <a:r>
-              <a:rPr lang="en-US" sz="1350" dirty="0">
-                <a:solidFill>
-                  <a:srgbClr val="1B1B1B"/>
-                </a:solidFill>
-              </a:rPr>
-              <a:t>DataCamp Python Data Science Career Track (in progress)</a:t>
-            </a:r>
-            <a:endParaRPr lang="en-US" sz="1350" dirty="0"/>
-          </a:p>
-          <a:p>
-            <a:pPr marL="203200" indent="-203200">
-              <a:spcAft>
-                <a:spcPts val="800"/>
-              </a:spcAft>
-              <a:buSzPct val="100000"/>
-              <a:buChar char="•"/>
-            </a:pPr>
-            <a:r>
-              <a:rPr lang="en-US" sz="1350" dirty="0">
-                <a:solidFill>
-                  <a:srgbClr val="1B1B1B"/>
-                </a:solidFill>
-              </a:rPr>
-              <a:t>PhysioNet credentialed access: MIMIC-IV 3.1, eICU-CRD 2.0</a:t>
-            </a:r>
-            <a:endParaRPr lang="en-US" sz="1350" dirty="0"/>
-          </a:p>
-        </p:txBody>
-      </p:sp>
-      <p:sp>
-        <p:nvSpPr>
-          <p:cNvPr id="6" name="text"/>
-          <p:cNvSpPr txBox="1"/>
-          <p:nvPr/>
-        </p:nvSpPr>
-        <p:spPr>
-          <a:xfrm>
-            <a:off x="6309360" y="1463040"/>
-            <a:ext cx="5303520" cy="320040"/>
-          </a:xfrm>
-          <a:prstGeom prst="rect">
-            <a:avLst/>
-          </a:prstGeom>
-          <a:noFill/>
-          <a:ln/>
-        </p:spPr>
-        <p:txBody>
-          <a:bodyPr wrap="square" lIns="0" tIns="0" rIns="0" bIns="0" rtlCol="0" anchor="t"/>
-          <a:lstStyle/>
-          <a:p>
-            <a:pPr algn="l" indent="0" marL="0">
-              <a:buNone/>
-            </a:pPr>
-            <a:r>
-              <a:rPr lang="en-US" sz="1500" b="1" dirty="0">
-                <a:solidFill>
-                  <a:srgbClr val="C8102E"/>
-                </a:solidFill>
-              </a:rPr>
-              <a:t>March 2026 plan: what happened</a:t>
-            </a:r>
-            <a:endParaRPr lang="en-US" sz="1500" dirty="0"/>
-          </a:p>
-        </p:txBody>
-      </p:sp>
-      <p:sp>
-        <p:nvSpPr>
-          <p:cNvPr id="7" name="list"/>
-          <p:cNvSpPr txBox="1"/>
-          <p:nvPr/>
-        </p:nvSpPr>
-        <p:spPr>
-          <a:xfrm>
-            <a:off x="6309360" y="1828800"/>
-            <a:ext cx="5333695" cy="3657600"/>
-          </a:xfrm>
-          <a:prstGeom prst="rect">
-            <a:avLst/>
-          </a:prstGeom>
-          <a:noFill/>
-          <a:ln/>
-        </p:spPr>
-        <p:txBody>
-          <a:bodyPr wrap="square" lIns="0" tIns="0" rIns="0" bIns="0" rtlCol="0" anchor="t"/>
-          <a:lstStyle/>
-          <a:p>
-            <a:pPr marL="203200" indent="-203200">
-              <a:spcAft>
-                <a:spcPts val="800"/>
-              </a:spcAft>
-              <a:buSzPct val="100000"/>
-              <a:buChar char="•"/>
-            </a:pPr>
-            <a:r>
-              <a:rPr lang="en-US" sz="1350" dirty="0">
-                <a:solidFill>
-                  <a:srgbClr val="1B1B1B"/>
-                </a:solidFill>
-              </a:rPr>
-              <a:t>External validation on MIMIC-IV: became the core programme, extended to eICU.</a:t>
-            </a:r>
-            <a:endParaRPr lang="en-US" sz="1350" dirty="0"/>
-          </a:p>
-          <a:p>
-            <a:pPr marL="203200" indent="-203200">
-              <a:spcAft>
-                <a:spcPts val="800"/>
-              </a:spcAft>
-              <a:buSzPct val="100000"/>
-              <a:buChar char="•"/>
-            </a:pPr>
-            <a:r>
-              <a:rPr lang="en-US" sz="1350" dirty="0">
-                <a:solidFill>
-                  <a:srgbClr val="1B1B1B"/>
-                </a:solidFill>
-              </a:rPr>
-              <a:t>CNN-Transformer and OSTA papers: withheld after the leakage audit.</a:t>
-            </a:r>
-            <a:endParaRPr lang="en-US" sz="1350" dirty="0"/>
-          </a:p>
-          <a:p>
-            <a:pPr marL="203200" indent="-203200">
-              <a:spcAft>
-                <a:spcPts val="800"/>
-              </a:spcAft>
-              <a:buSzPct val="100000"/>
-              <a:buChar char="•"/>
-            </a:pPr>
-            <a:r>
-              <a:rPr lang="en-US" sz="1350" dirty="0">
-                <a:solidFill>
-                  <a:srgbClr val="1B1B1B"/>
-                </a:solidFill>
-              </a:rPr>
-              <a:t>AMR review: revised and submitted to Int J Antimicrob Agents.</a:t>
-            </a:r>
-            <a:endParaRPr lang="en-US" sz="1350" dirty="0"/>
-          </a:p>
-          <a:p>
-            <a:pPr marL="203200" indent="-203200">
-              <a:spcAft>
-                <a:spcPts val="800"/>
-              </a:spcAft>
-              <a:buSzPct val="100000"/>
-              <a:buChar char="•"/>
-            </a:pPr>
-            <a:r>
-              <a:rPr lang="en-US" sz="1350" dirty="0">
-                <a:solidFill>
-                  <a:srgbClr val="1B1B1B"/>
-                </a:solidFill>
-              </a:rPr>
-              <a:t>Clinician study: now the qualitative phase (20 consultants), nearly complete.</a:t>
-            </a:r>
-            <a:endParaRPr lang="en-US" sz="1350" dirty="0"/>
-          </a:p>
-          <a:p>
-            <a:pPr marL="203200" indent="-203200">
-              <a:spcAft>
-                <a:spcPts val="800"/>
-              </a:spcAft>
-              <a:buSzPct val="100000"/>
-              <a:buChar char="•"/>
-            </a:pPr>
-            <a:r>
-              <a:rPr lang="en-US" sz="1350" dirty="0">
-                <a:solidFill>
-                  <a:srgbClr val="1B1B1B"/>
-                </a:solidFill>
-              </a:rPr>
-              <a:t>Conference presentation: this talk.</a:t>
-            </a:r>
-            <a:endParaRPr lang="en-US" sz="1350" dirty="0"/>
-          </a:p>
-        </p:txBody>
-      </p:sp>
-      <p:sp>
-        <p:nvSpPr>
-          <p:cNvPr id="25" name="Slide Number Placeholder 0"/>
-          <p:cNvSpPr>
-            <a:spLocks noGrp="1"/>
-          </p:cNvSpPr>
-          <p:nvPr>
-            <p:ph type="sldNum" sz="quarter" idx="4294967295"/>
-          </p:nvPr>
-        </p:nvSpPr>
-        <p:spPr>
-          <a:xfrm>
-            <a:off x="10911535" y="6437376"/>
-            <a:ext cx="731520" cy="274320"/>
-          </a:xfrm>
-          <a:prstGeom prst="rect">
-            <a:avLst/>
-          </a:prstGeom>
-          <a:extLst>
-            <a:ext uri="{C572A759-6A51-4108-AA02-DFA0A04FC94B}">
-              <ma14:wrappingTextBoxFlag xmlns:ma14="http://schemas.microsoft.com/office/mac/drawingml/2011/main" val="0"/>
-            </a:ext>
-          </a:extLst>
-        </p:spPr>
-        <p:txBody>
-          <a:bodyPr/>
-          <a:lstStyle>
-            <a:lvl1pPr>
-              <a:defRPr sz="1200">
-                <a:solidFill>
-                  <a:srgbClr val="C8102E"/>
-                </a:solidFill>
-              </a:defRPr>
-            </a:lvl1pPr>
-          </a:lstStyle>
-          <a:p>
-            <a:pPr algn="r"/>
-            <a:fld id="{F7021451-1387-4CA6-816F-3879F97B5CBC}" type="slidenum">
-              <a:rPr b="1" lang="en-US"/>
-              <a:t>23</a:t>
-            </a:fld>
-            <a:endParaRPr lang="en-US"/>
-          </a:p>
-        </p:txBody>
-      </p:sp>
-    </p:spTree>
-  </p:cSld>
-  <p:clrMapOvr>
-    <a:masterClrMapping/>
-  </p:clrMapOvr>
-</p:sld>
-</file>
-
-<file path=ppt/slides/slide24.xml><?xml version="1.0" encoding="utf-8"?>
-<p:sld xmlns:a="http://schemas.openxmlformats.org/drawingml/2006/main" xmlns:r="http://schemas.openxmlformats.org/officeDocument/2006/relationships" xmlns:p="http://schemas.openxmlformats.org/presentationml/2006/main">
-  <p:cSld name="Slide 24">
-    <p:spTree>
-      <p:nvGrpSpPr>
-        <p:cNvPr id="1" name=""/>
-        <p:cNvGrpSpPr/>
-        <p:nvPr/>
-      </p:nvGrpSpPr>
-      <p:grpSpPr>
-        <a:xfrm>
-          <a:off x="0" y="0"/>
-          <a:ext cx="0" cy="0"/>
-          <a:chOff x="0" y="0"/>
-          <a:chExt cx="0" cy="0"/>
-        </a:xfrm>
-      </p:grpSpPr>
-      <p:sp>
-        <p:nvSpPr>
-          <p:cNvPr id="2" name="text"/>
-          <p:cNvSpPr txBox="1"/>
-          <p:nvPr/>
-        </p:nvSpPr>
-        <p:spPr>
-          <a:xfrm>
-            <a:off x="548640" y="237744"/>
-            <a:ext cx="7315200" cy="274320"/>
-          </a:xfrm>
-          <a:prstGeom prst="rect">
-            <a:avLst/>
-          </a:prstGeom>
-          <a:noFill/>
-          <a:ln/>
-        </p:spPr>
-        <p:txBody>
-          <a:bodyPr wrap="square" lIns="0" tIns="0" rIns="0" bIns="0" rtlCol="0" anchor="t"/>
-          <a:lstStyle/>
-          <a:p>
-            <a:pPr algn="l" indent="0" marL="0">
-              <a:buNone/>
-            </a:pPr>
-            <a:r>
-              <a:rPr lang="en-US" sz="1100" b="1" dirty="0">
-                <a:solidFill>
-                  <a:srgbClr val="C8102E"/>
-                </a:solidFill>
-              </a:rPr>
-              <a:t>BACKUP</a:t>
-            </a:r>
-            <a:endParaRPr lang="en-US" sz="1100" dirty="0"/>
-          </a:p>
-        </p:txBody>
-      </p:sp>
-      <p:sp>
-        <p:nvSpPr>
-          <p:cNvPr id="3" name="Text 0"/>
-          <p:cNvSpPr/>
-          <p:nvPr>
-            <p:ph idx="100" type="title" hasCustomPrompt="1"/>
-          </p:nvPr>
-        </p:nvSpPr>
-        <p:spPr>
-          <a:xfrm>
-            <a:off x="548640" y="548640"/>
-            <a:ext cx="11094415" cy="868680"/>
-          </a:xfrm>
-          <a:prstGeom prst="rect">
-            <a:avLst/>
-          </a:prstGeom>
-          <a:noFill/>
-          <a:ln/>
-        </p:spPr>
-        <p:txBody>
-          <a:bodyPr wrap="square" lIns="0" tIns="0" rIns="0" bIns="0" rtlCol="0" anchor="t"/>
-          <a:lstStyle/>
-          <a:p>
-            <a:pPr algn="l" indent="0" marL="0">
-              <a:buNone/>
-            </a:pPr>
-            <a:r>
-              <a:rPr lang="en-US" sz="2400" b="1" dirty="0">
-                <a:solidFill>
-                  <a:srgbClr val="1B1B1B"/>
-                </a:solidFill>
-                <a:latin typeface="Arial" pitchFamily="34" charset="0"/>
-                <a:ea typeface="Arial" pitchFamily="34" charset="-122"/>
-                <a:cs typeface="Arial" pitchFamily="34" charset="-120"/>
-              </a:rPr>
-              <a:t>References (1 of 2)</a:t>
-            </a:r>
-            <a:endParaRPr lang="en-US" sz="2400" dirty="0"/>
-          </a:p>
-        </p:txBody>
-      </p:sp>
-      <p:sp>
-        <p:nvSpPr>
-          <p:cNvPr id="4" name="reference list"/>
-          <p:cNvSpPr txBox="1"/>
-          <p:nvPr/>
-        </p:nvSpPr>
-        <p:spPr>
-          <a:xfrm>
-            <a:off x="548640" y="1234440"/>
-            <a:ext cx="5440680" cy="5120640"/>
-          </a:xfrm>
-          <a:prstGeom prst="rect">
-            <a:avLst/>
-          </a:prstGeom>
-          <a:noFill/>
-          <a:ln/>
-        </p:spPr>
-        <p:txBody>
-          <a:bodyPr wrap="square" lIns="0" tIns="0" rIns="0" bIns="0" rtlCol="0" anchor="t"/>
-          <a:lstStyle/>
-          <a:p>
-            <a:pPr indent="0" marL="0">
-              <a:spcAft>
-                <a:spcPts val="400"/>
-              </a:spcAft>
-              <a:buNone/>
-            </a:pPr>
-            <a:r>
-              <a:rPr lang="en-US" sz="1000" dirty="0">
-                <a:solidFill>
-                  <a:srgbClr val="1B1B1B"/>
-                </a:solidFill>
-              </a:rPr>
-              <a:t>[1] Rudd KE, Johnson SC, Agesa KM, et al. Global, regional, and national sepsis incidence and mortality, 1990-2017: analysis for the Global Burden of Disease Study. Lancet. 2020;395:200-211.</a:t>
-            </a:r>
-            <a:endParaRPr lang="en-US" sz="1000" dirty="0"/>
-          </a:p>
-          <a:p>
-            <a:pPr indent="0" marL="0">
-              <a:spcAft>
-                <a:spcPts val="400"/>
-              </a:spcAft>
-              <a:buNone/>
-            </a:pPr>
-            <a:r>
-              <a:rPr lang="en-US" sz="1000" dirty="0">
-                <a:solidFill>
-                  <a:srgbClr val="1B1B1B"/>
-                </a:solidFill>
-              </a:rPr>
-              <a:t>[2] Antimicrobial Resistance Collaborators. Global burden of bacterial antimicrobial resistance in 2019: a systematic analysis. Lancet. 2022;399:629-655.</a:t>
-            </a:r>
-            <a:endParaRPr lang="en-US" sz="1000" dirty="0"/>
-          </a:p>
-          <a:p>
-            <a:pPr indent="0" marL="0">
-              <a:spcAft>
-                <a:spcPts val="400"/>
-              </a:spcAft>
-              <a:buNone/>
-            </a:pPr>
-            <a:r>
-              <a:rPr lang="en-US" sz="1000" dirty="0">
-                <a:solidFill>
-                  <a:srgbClr val="1B1B1B"/>
-                </a:solidFill>
-              </a:rPr>
-              <a:t>[3] Timbrook TT, Morton JB, McConeghy KW, et al. The effect of molecular rapid diagnostic testing on clinical outcomes in bloodstream infections: a systematic review and meta-analysis. Clin Infect Dis. 2017;64:15-23.</a:t>
-            </a:r>
-            <a:endParaRPr lang="en-US" sz="1000" dirty="0"/>
-          </a:p>
-          <a:p>
-            <a:pPr indent="0" marL="0">
-              <a:spcAft>
-                <a:spcPts val="400"/>
-              </a:spcAft>
-              <a:buNone/>
-            </a:pPr>
-            <a:r>
-              <a:rPr lang="en-US" sz="1000" dirty="0">
-                <a:solidFill>
-                  <a:srgbClr val="1B1B1B"/>
-                </a:solidFill>
-              </a:rPr>
-              <a:t>[4] Adams R, Henry KE, Sridharan A, et al. Prospective, multi-site study of patient outcomes after implementation of the TREWS machine learning-based early warning system for sepsis. Nat Med. 2022;28:1455-1460.</a:t>
-            </a:r>
-            <a:endParaRPr lang="en-US" sz="1000" dirty="0"/>
-          </a:p>
-          <a:p>
-            <a:pPr indent="0" marL="0">
-              <a:spcAft>
-                <a:spcPts val="400"/>
-              </a:spcAft>
-              <a:buNone/>
-            </a:pPr>
-            <a:r>
-              <a:rPr lang="en-US" sz="1000" dirty="0">
-                <a:solidFill>
-                  <a:srgbClr val="1B1B1B"/>
-                </a:solidFill>
-              </a:rPr>
-              <a:t>[5] Elrggal ME, et al. Artificial intelligence in the diagnosis of antimicrobial resistance: rapid diagnostics and imaging innovations. Submitted, Int J Antimicrob Agents, 2026.</a:t>
-            </a:r>
-            <a:endParaRPr lang="en-US" sz="1000" dirty="0"/>
-          </a:p>
-          <a:p>
-            <a:pPr indent="0" marL="0">
-              <a:spcAft>
-                <a:spcPts val="400"/>
-              </a:spcAft>
-              <a:buNone/>
-            </a:pPr>
-            <a:r>
-              <a:rPr lang="en-US" sz="1000" dirty="0">
-                <a:solidFill>
-                  <a:srgbClr val="1B1B1B"/>
-                </a:solidFill>
-              </a:rPr>
-              <a:t>[6] Singer M, Deutschman CS, Seymour CW, et al. The Third International Consensus Definitions for Sepsis and Septic Shock (Sepsis-3). JAMA. 2016;315:801-810.</a:t>
-            </a:r>
-            <a:endParaRPr lang="en-US" sz="1000" dirty="0"/>
-          </a:p>
-          <a:p>
-            <a:pPr indent="0" marL="0">
-              <a:spcAft>
-                <a:spcPts val="400"/>
-              </a:spcAft>
-              <a:buNone/>
-            </a:pPr>
-            <a:r>
-              <a:rPr lang="en-US" sz="1000" dirty="0">
-                <a:solidFill>
-                  <a:srgbClr val="1B1B1B"/>
-                </a:solidFill>
-              </a:rPr>
-              <a:t>[7] Vincent JL, Moreno R, Takala J, et al. The SOFA (Sepsis-related Organ Failure Assessment) score to describe organ dysfunction/failure. Intensive Care Med. 1996;22:707-710.</a:t>
-            </a:r>
-            <a:endParaRPr lang="en-US" sz="1000" dirty="0"/>
-          </a:p>
-          <a:p>
-            <a:pPr indent="0" marL="0">
-              <a:spcAft>
-                <a:spcPts val="400"/>
-              </a:spcAft>
-              <a:buNone/>
-            </a:pPr>
-            <a:r>
-              <a:rPr lang="en-US" sz="1000" dirty="0">
-                <a:solidFill>
-                  <a:srgbClr val="1B1B1B"/>
-                </a:solidFill>
-              </a:rPr>
-              <a:t>[8] Liu V, Escobar GJ, Greene JD, et al. Hospital deaths in patients with sepsis from 2 independent cohorts. JAMA. 2014;312:90-92.</a:t>
-            </a:r>
-            <a:endParaRPr lang="en-US" sz="1000" dirty="0"/>
-          </a:p>
-          <a:p>
-            <a:pPr indent="0" marL="0">
-              <a:spcAft>
-                <a:spcPts val="400"/>
-              </a:spcAft>
-              <a:buNone/>
-            </a:pPr>
-            <a:r>
-              <a:rPr lang="en-US" sz="1000" dirty="0">
-                <a:solidFill>
-                  <a:srgbClr val="1B1B1B"/>
-                </a:solidFill>
-              </a:rPr>
-              <a:t>[9] Seymour CW, Gesten F, Prescott HC, et al. Time to treatment and mortality during mandated emergency care for sepsis. N Engl J Med. 2017;376:2235-2244.</a:t>
-            </a:r>
-            <a:endParaRPr lang="en-US" sz="1000" dirty="0"/>
-          </a:p>
-          <a:p>
-            <a:pPr indent="0" marL="0">
-              <a:spcAft>
-                <a:spcPts val="400"/>
-              </a:spcAft>
-              <a:buNone/>
-            </a:pPr>
-            <a:r>
-              <a:rPr lang="en-US" sz="1000" dirty="0">
-                <a:solidFill>
-                  <a:srgbClr val="1B1B1B"/>
-                </a:solidFill>
-              </a:rPr>
-              <a:t>[10] Kumar A, Roberts D, Wood KE, et al. Duration of hypotension before initiation of effective antimicrobial therapy is the critical determinant of survival in human septic shock. Crit Care Med. 2006;34:1589-1596.</a:t>
-            </a:r>
-            <a:endParaRPr lang="en-US" sz="1000" dirty="0"/>
-          </a:p>
-          <a:p>
-            <a:pPr indent="0" marL="0">
-              <a:spcAft>
-                <a:spcPts val="400"/>
-              </a:spcAft>
-              <a:buNone/>
-            </a:pPr>
-            <a:r>
-              <a:rPr lang="en-US" sz="1000" dirty="0">
-                <a:solidFill>
-                  <a:srgbClr val="1B1B1B"/>
-                </a:solidFill>
-              </a:rPr>
-              <a:t>[11] Churpek MM, Snyder A, Han X, et al. Quick SOFA, SIRS, and early warning scores for detecting clinical deterioration in infected patients outside the ICU. Am J Respir Crit Care Med. 2017;195:906-911.</a:t>
-            </a:r>
-            <a:endParaRPr lang="en-US" sz="1000" dirty="0"/>
-          </a:p>
-          <a:p>
-            <a:pPr indent="0" marL="0">
-              <a:spcAft>
-                <a:spcPts val="400"/>
-              </a:spcAft>
-              <a:buNone/>
-            </a:pPr>
-            <a:r>
-              <a:rPr lang="en-US" sz="1000" dirty="0">
-                <a:solidFill>
-                  <a:srgbClr val="1B1B1B"/>
-                </a:solidFill>
-              </a:rPr>
-              <a:t>[12] Yu AC, Mohajer B, Eng J. External validation of deep learning algorithms for radiologic diagnosis: a systematic review. Radiol Artif Intell. 2022;4:e210064.</a:t>
-            </a:r>
-            <a:endParaRPr lang="en-US" sz="1000" dirty="0"/>
-          </a:p>
-        </p:txBody>
-      </p:sp>
-      <p:sp>
-        <p:nvSpPr>
-          <p:cNvPr id="5" name="reference list"/>
-          <p:cNvSpPr txBox="1"/>
-          <p:nvPr/>
-        </p:nvSpPr>
-        <p:spPr>
-          <a:xfrm>
-            <a:off x="6172200" y="1234440"/>
-            <a:ext cx="5440680" cy="5120640"/>
-          </a:xfrm>
-          <a:prstGeom prst="rect">
-            <a:avLst/>
-          </a:prstGeom>
-          <a:noFill/>
-          <a:ln/>
-        </p:spPr>
-        <p:txBody>
-          <a:bodyPr wrap="square" lIns="0" tIns="0" rIns="0" bIns="0" rtlCol="0" anchor="t"/>
-          <a:lstStyle/>
-          <a:p>
-            <a:pPr indent="0" marL="0">
-              <a:spcAft>
-                <a:spcPts val="400"/>
-              </a:spcAft>
-              <a:buNone/>
-            </a:pPr>
-            <a:r>
-              <a:rPr lang="en-US" sz="1000" dirty="0">
-                <a:solidFill>
-                  <a:srgbClr val="1B1B1B"/>
-                </a:solidFill>
-              </a:rPr>
-              <a:t>[13] Kwong JCC, Erdman L, Khondker A, et al. The silent trial: the bridge between bench-to-bedside clinical AI applications. Front Digit Health. 2022;4:929508.</a:t>
-            </a:r>
-            <a:endParaRPr lang="en-US" sz="1000" dirty="0"/>
-          </a:p>
-          <a:p>
-            <a:pPr indent="0" marL="0">
-              <a:spcAft>
-                <a:spcPts val="400"/>
-              </a:spcAft>
-              <a:buNone/>
-            </a:pPr>
-            <a:r>
-              <a:rPr lang="en-US" sz="1000" dirty="0">
-                <a:solidFill>
-                  <a:srgbClr val="1B1B1B"/>
-                </a:solidFill>
-              </a:rPr>
-              <a:t>[14] Nagendran M, Chen Y, Lovejoy CA, et al. Artificial intelligence versus clinicians: systematic review of design, reporting standards, and claims of deep learning studies. BMJ. 2020;368:m689.</a:t>
-            </a:r>
-            <a:endParaRPr lang="en-US" sz="1000" dirty="0"/>
-          </a:p>
-          <a:p>
-            <a:pPr indent="0" marL="0">
-              <a:spcAft>
-                <a:spcPts val="400"/>
-              </a:spcAft>
-              <a:buNone/>
-            </a:pPr>
-            <a:r>
-              <a:rPr lang="en-US" sz="1000" dirty="0">
-                <a:solidFill>
-                  <a:srgbClr val="1B1B1B"/>
-                </a:solidFill>
-              </a:rPr>
-              <a:t>[15] Reyna MA, Josef CS, Jeter R, et al. Early prediction of sepsis from clinical data: the PhysioNet/Computing in Cardiology Challenge 2019. Crit Care Med. 2020;48:210-217.</a:t>
-            </a:r>
-            <a:endParaRPr lang="en-US" sz="1000" dirty="0"/>
-          </a:p>
-          <a:p>
-            <a:pPr indent="0" marL="0">
-              <a:spcAft>
-                <a:spcPts val="400"/>
-              </a:spcAft>
-              <a:buNone/>
-            </a:pPr>
-            <a:r>
-              <a:rPr lang="en-US" sz="1000" dirty="0">
-                <a:solidFill>
-                  <a:srgbClr val="1B1B1B"/>
-                </a:solidFill>
-              </a:rPr>
-              <a:t>[16] Agniel D, Kohane IS, Weber GM. Biases in electronic health record data due to processes within the healthcare system: retrospective observational study. BMJ. 2018;361:k1479.</a:t>
-            </a:r>
-            <a:endParaRPr lang="en-US" sz="1000" dirty="0"/>
-          </a:p>
-          <a:p>
-            <a:pPr indent="0" marL="0">
-              <a:spcAft>
-                <a:spcPts val="400"/>
-              </a:spcAft>
-              <a:buNone/>
-            </a:pPr>
-            <a:r>
-              <a:rPr lang="en-US" sz="1000" dirty="0">
-                <a:solidFill>
-                  <a:srgbClr val="1B1B1B"/>
-                </a:solidFill>
-              </a:rPr>
-              <a:t>[17] Zech JR, Badgeley MA, Liu M, et al. Variable generalization performance of a deep learning model to detect pneumonia in chest radiographs: a cross-sectional study. PLoS Med. 2018;15:e1002683.</a:t>
-            </a:r>
-            <a:endParaRPr lang="en-US" sz="1000" dirty="0"/>
-          </a:p>
-          <a:p>
-            <a:pPr indent="0" marL="0">
-              <a:spcAft>
-                <a:spcPts val="400"/>
-              </a:spcAft>
-              <a:buNone/>
-            </a:pPr>
-            <a:r>
-              <a:rPr lang="en-US" sz="1000" dirty="0">
-                <a:solidFill>
-                  <a:srgbClr val="1B1B1B"/>
-                </a:solidFill>
-              </a:rPr>
-              <a:t>[18] Kapoor S, Narayanan A. Leakage and the reproducibility crisis in machine-learning-based science. Patterns. 2023;4:100804.</a:t>
-            </a:r>
-            <a:endParaRPr lang="en-US" sz="1000" dirty="0"/>
-          </a:p>
-          <a:p>
-            <a:pPr indent="0" marL="0">
-              <a:spcAft>
-                <a:spcPts val="400"/>
-              </a:spcAft>
-              <a:buNone/>
-            </a:pPr>
-            <a:r>
-              <a:rPr lang="en-US" sz="1000" dirty="0">
-                <a:solidFill>
-                  <a:srgbClr val="1B1B1B"/>
-                </a:solidFill>
-              </a:rPr>
-              <a:t>[19] Shah NH, Milstein A, Bagley SC. Making machine learning models clinically useful. JAMA. 2019;322:1351-1352.</a:t>
-            </a:r>
-            <a:endParaRPr lang="en-US" sz="1000" dirty="0"/>
-          </a:p>
-          <a:p>
-            <a:pPr indent="0" marL="0">
-              <a:spcAft>
-                <a:spcPts val="400"/>
-              </a:spcAft>
-              <a:buNone/>
-            </a:pPr>
-            <a:r>
-              <a:rPr lang="en-US" sz="1000" dirty="0">
-                <a:solidFill>
-                  <a:srgbClr val="1B1B1B"/>
-                </a:solidFill>
-              </a:rPr>
-              <a:t>[20] Kelly CJ, Karthikesalingam A, Suleyman M, Corrado G, King D. Key challenges for delivering clinical impact with artificial intelligence. BMC Med. 2019;17:195.</a:t>
-            </a:r>
-            <a:endParaRPr lang="en-US" sz="1000" dirty="0"/>
-          </a:p>
-          <a:p>
-            <a:pPr indent="0" marL="0">
-              <a:spcAft>
-                <a:spcPts val="400"/>
-              </a:spcAft>
-              <a:buNone/>
-            </a:pPr>
-            <a:r>
-              <a:rPr lang="en-US" sz="1000" dirty="0">
-                <a:solidFill>
-                  <a:srgbClr val="1B1B1B"/>
-                </a:solidFill>
-              </a:rPr>
-              <a:t>[21] Morrill JH, Kormilitzin A, Nevado-Holgado AJ, et al. Utilization of the signature method to identify the early onset of sepsis from multivariate physiological time series in critical care monitoring. Crit Care Med. 2020;48:e976-e981.</a:t>
-            </a:r>
-            <a:endParaRPr lang="en-US" sz="1000" dirty="0"/>
-          </a:p>
-          <a:p>
-            <a:pPr indent="0" marL="0">
-              <a:spcAft>
-                <a:spcPts val="400"/>
-              </a:spcAft>
-              <a:buNone/>
-            </a:pPr>
-            <a:r>
-              <a:rPr lang="en-US" sz="1000" dirty="0">
-                <a:solidFill>
-                  <a:srgbClr val="1B1B1B"/>
-                </a:solidFill>
-              </a:rPr>
-              <a:t>[22] Wong A, Otles E, Donnelly JP, et al. External validation of a widely implemented proprietary sepsis prediction model in hospitalized patients. JAMA Intern Med. 2021;181:1065-1070.</a:t>
-            </a:r>
-            <a:endParaRPr lang="en-US" sz="1000" dirty="0"/>
-          </a:p>
-          <a:p>
-            <a:pPr indent="0" marL="0">
-              <a:spcAft>
-                <a:spcPts val="400"/>
-              </a:spcAft>
-              <a:buNone/>
-            </a:pPr>
-            <a:r>
-              <a:rPr lang="en-US" sz="1000" dirty="0">
-                <a:solidFill>
-                  <a:srgbClr val="1B1B1B"/>
-                </a:solidFill>
-              </a:rPr>
-              <a:t>[23] Fleuren LM, Klausch TLT, Zwager CL, et al. Machine learning for the prediction of sepsis: a systematic review and meta-analysis of diagnostic test accuracy. Intensive Care Med. 2020;46:383-400.</a:t>
-            </a:r>
-            <a:endParaRPr lang="en-US" sz="1000" dirty="0"/>
-          </a:p>
-        </p:txBody>
-      </p:sp>
-      <p:sp>
-        <p:nvSpPr>
-          <p:cNvPr id="25" name="Slide Number Placeholder 0"/>
-          <p:cNvSpPr>
-            <a:spLocks noGrp="1"/>
-          </p:cNvSpPr>
-          <p:nvPr>
-            <p:ph type="sldNum" sz="quarter" idx="4294967295"/>
-          </p:nvPr>
-        </p:nvSpPr>
-        <p:spPr>
-          <a:xfrm>
-            <a:off x="10911535" y="6437376"/>
-            <a:ext cx="731520" cy="274320"/>
-          </a:xfrm>
-          <a:prstGeom prst="rect">
-            <a:avLst/>
-          </a:prstGeom>
-          <a:extLst>
-            <a:ext uri="{C572A759-6A51-4108-AA02-DFA0A04FC94B}">
-              <ma14:wrappingTextBoxFlag xmlns:ma14="http://schemas.microsoft.com/office/mac/drawingml/2011/main" val="0"/>
-            </a:ext>
-          </a:extLst>
-        </p:spPr>
-        <p:txBody>
-          <a:bodyPr/>
-          <a:lstStyle>
-            <a:lvl1pPr>
-              <a:defRPr sz="1200">
-                <a:solidFill>
-                  <a:srgbClr val="C8102E"/>
-                </a:solidFill>
-              </a:defRPr>
-            </a:lvl1pPr>
-          </a:lstStyle>
-          <a:p>
-            <a:pPr algn="r"/>
-            <a:fld id="{F7021451-1387-4CA6-816F-3879F97B5CBC}" type="slidenum">
-              <a:rPr b="1" lang="en-US"/>
               <a:t>24</a:t>
             </a:fld>
             <a:endParaRPr lang="en-US"/>
@@ -20514,7 +24929,7 @@
       </p:grpSpPr>
       <p:sp>
         <p:nvSpPr>
-          <p:cNvPr id="2" name="text"/>
+          <p:cNvPr id="2" name="section label"/>
           <p:cNvSpPr txBox="1"/>
           <p:nvPr/>
         </p:nvSpPr>
@@ -20583,7 +24998,7 @@
                 <a:ea typeface="Arial" pitchFamily="34" charset="-122"/>
                 <a:cs typeface="Arial" pitchFamily="34" charset="-120"/>
               </a:rPr>
-              <a:t>References (2 of 2)</a:t>
+              <a:t>RD6 supplement: training and the March 2026 plan</a:t>
             </a:r>
             <a:endParaRPr lang="en-US" sz="2400" dirty="0"/>
           </a:p>
@@ -20591,14 +25006,14 @@
       </p:sp>
       <p:sp>
         <p:nvSpPr>
-          <p:cNvPr id="4" name="reference list"/>
+          <p:cNvPr id="4" name="text"/>
           <p:cNvSpPr txBox="1"/>
           <p:nvPr/>
         </p:nvSpPr>
         <p:spPr>
           <a:xfrm>
-            <a:off x="548640" y="1234440"/>
-            <a:ext cx="5440680" cy="5120640"/>
+            <a:off x="548640" y="1463040"/>
+            <a:ext cx="5303520" cy="320040"/>
           </a:xfrm>
           <a:prstGeom prst="rect">
             <a:avLst/>
@@ -20610,400 +25025,260 @@
           <a:bodyPr wrap="square" lIns="0" tIns="0" rIns="0" bIns="0" rtlCol="0" anchor="t"/>
           <a:lstStyle/>
           <a:p>
-            <a:pPr indent="0" marL="0">
+            <a:pPr algn="l" indent="0" marL="0">
+              <a:buNone/>
+            </a:pPr>
+            <a:r>
+              <a:rPr lang="en-US" sz="1500" b="1" dirty="0">
+                <a:solidFill>
+                  <a:srgbClr val="C8102E"/>
+                </a:solidFill>
+              </a:rPr>
+              <a:t>Training</a:t>
+            </a:r>
+            <a:endParaRPr lang="en-US" sz="1500" dirty="0"/>
+          </a:p>
+        </p:txBody>
+      </p:sp>
+      <p:sp>
+        <p:nvSpPr>
+          <p:cNvPr id="5" name="list"/>
+          <p:cNvSpPr txBox="1"/>
+          <p:nvPr/>
+        </p:nvSpPr>
+        <p:spPr>
+          <a:xfrm>
+            <a:off x="548640" y="1828800"/>
+            <a:ext cx="5303520" cy="3657600"/>
+          </a:xfrm>
+          <a:prstGeom prst="rect">
+            <a:avLst/>
+          </a:prstGeom>
+          <a:noFill/>
+          <a:ln/>
+        </p:spPr>
+        <p:txBody>
+          <a:bodyPr wrap="square" lIns="0" tIns="0" rIns="0" bIns="0" rtlCol="0" anchor="t"/>
+          <a:lstStyle/>
+          <a:p>
+            <a:pPr marL="203200" indent="-203200">
               <a:spcAft>
-                <a:spcPts val="400"/>
+                <a:spcPts val="800"/>
               </a:spcAft>
-              <a:buNone/>
-            </a:pPr>
-            <a:r>
-              <a:rPr lang="en-US" sz="1000" dirty="0">
+              <a:buSzPct val="100000"/>
+              <a:buChar char="•"/>
+            </a:pPr>
+            <a:r>
+              <a:rPr lang="en-US" sz="1350" dirty="0">
                 <a:solidFill>
                   <a:srgbClr val="1B1B1B"/>
                 </a:solidFill>
               </a:rPr>
-              <a:t>[24] Moor M, Rieck B, Horn M, Jutzeler CR, Borgwardt K. Early prediction of sepsis in the ICU using machine learning: a systematic review. Front Med. 2021;8:607952.</a:t>
-            </a:r>
-            <a:endParaRPr lang="en-US" sz="1000" dirty="0"/>
-          </a:p>
-          <a:p>
-            <a:pPr indent="0" marL="0">
+              <a:t>Harvard PPCR: Clinical Trials Design, Implementation and Analysis (completed Feb 2026)</a:t>
+            </a:r>
+            <a:endParaRPr lang="en-US" sz="1350" dirty="0"/>
+          </a:p>
+          <a:p>
+            <a:pPr marL="203200" indent="-203200">
               <a:spcAft>
-                <a:spcPts val="400"/>
+                <a:spcPts val="800"/>
               </a:spcAft>
-              <a:buNone/>
-            </a:pPr>
-            <a:r>
-              <a:rPr lang="en-US" sz="1000" dirty="0">
+              <a:buSzPct val="100000"/>
+              <a:buChar char="•"/>
+            </a:pPr>
+            <a:r>
+              <a:rPr lang="en-US" sz="1350" dirty="0">
                 <a:solidFill>
                   <a:srgbClr val="1B1B1B"/>
                 </a:solidFill>
               </a:rPr>
-              <a:t>[25] Tschandl P, Rinner C, Apalla Z, et al. Human-computer collaboration for skin cancer recognition. Nat Med. 2020;26:1229-1234.</a:t>
-            </a:r>
-            <a:endParaRPr lang="en-US" sz="1000" dirty="0"/>
-          </a:p>
-          <a:p>
-            <a:pPr indent="0" marL="0">
+              <a:t>Iowa State University: Machine Learning Programme (completed Dec 2025)</a:t>
+            </a:r>
+            <a:endParaRPr lang="en-US" sz="1350" dirty="0"/>
+          </a:p>
+          <a:p>
+            <a:pPr marL="203200" indent="-203200">
               <a:spcAft>
-                <a:spcPts val="400"/>
+                <a:spcPts val="800"/>
               </a:spcAft>
-              <a:buNone/>
-            </a:pPr>
-            <a:r>
-              <a:rPr lang="en-US" sz="1000" dirty="0">
+              <a:buSzPct val="100000"/>
+              <a:buChar char="•"/>
+            </a:pPr>
+            <a:r>
+              <a:rPr lang="en-US" sz="1350" dirty="0">
                 <a:solidFill>
                   <a:srgbClr val="1B1B1B"/>
                 </a:solidFill>
               </a:rPr>
-              <a:t>[26] Henry KE, Kornfield R, Sridharan A, et al. Human-machine teaming is key to AI adoption: clinicians' experiences with a deployed machine learning system. NPJ Digit Med. 2022;5:97.</a:t>
-            </a:r>
-            <a:endParaRPr lang="en-US" sz="1000" dirty="0"/>
-          </a:p>
-          <a:p>
-            <a:pPr indent="0" marL="0">
+              <a:t>DataCamp Python Data Science Career Track (in progress)</a:t>
+            </a:r>
+            <a:endParaRPr lang="en-US" sz="1350" dirty="0"/>
+          </a:p>
+          <a:p>
+            <a:pPr marL="203200" indent="-203200">
               <a:spcAft>
-                <a:spcPts val="400"/>
+                <a:spcPts val="800"/>
               </a:spcAft>
-              <a:buNone/>
-            </a:pPr>
-            <a:r>
-              <a:rPr lang="en-US" sz="1000" dirty="0">
+              <a:buSzPct val="100000"/>
+              <a:buChar char="•"/>
+            </a:pPr>
+            <a:r>
+              <a:rPr lang="en-US" sz="1350" dirty="0">
                 <a:solidFill>
                   <a:srgbClr val="1B1B1B"/>
                 </a:solidFill>
               </a:rPr>
-              <a:t>[27] Wiens J, Saria S, Sendak M, et al. Do no harm: a roadmap for responsible machine learning for health care. Nat Med. 2019;25:1337-1340.</a:t>
-            </a:r>
-            <a:endParaRPr lang="en-US" sz="1000" dirty="0"/>
-          </a:p>
-          <a:p>
-            <a:pPr indent="0" marL="0">
+              <a:t>PhysioNet credentialed access: MIMIC-IV 3.1, eICU-CRD 2.0</a:t>
+            </a:r>
+            <a:endParaRPr lang="en-US" sz="1350" dirty="0"/>
+          </a:p>
+        </p:txBody>
+      </p:sp>
+      <p:sp>
+        <p:nvSpPr>
+          <p:cNvPr id="6" name="text"/>
+          <p:cNvSpPr txBox="1"/>
+          <p:nvPr/>
+        </p:nvSpPr>
+        <p:spPr>
+          <a:xfrm>
+            <a:off x="6309360" y="1463040"/>
+            <a:ext cx="5303520" cy="320040"/>
+          </a:xfrm>
+          <a:prstGeom prst="rect">
+            <a:avLst/>
+          </a:prstGeom>
+          <a:noFill/>
+          <a:ln/>
+        </p:spPr>
+        <p:txBody>
+          <a:bodyPr wrap="square" lIns="0" tIns="0" rIns="0" bIns="0" rtlCol="0" anchor="t"/>
+          <a:lstStyle/>
+          <a:p>
+            <a:pPr algn="l" indent="0" marL="0">
+              <a:buNone/>
+            </a:pPr>
+            <a:r>
+              <a:rPr lang="en-US" sz="1500" b="1" dirty="0">
+                <a:solidFill>
+                  <a:srgbClr val="C8102E"/>
+                </a:solidFill>
+              </a:rPr>
+              <a:t>March 2026 plan: what happened</a:t>
+            </a:r>
+            <a:endParaRPr lang="en-US" sz="1500" dirty="0"/>
+          </a:p>
+        </p:txBody>
+      </p:sp>
+      <p:sp>
+        <p:nvSpPr>
+          <p:cNvPr id="7" name="list"/>
+          <p:cNvSpPr txBox="1"/>
+          <p:nvPr/>
+        </p:nvSpPr>
+        <p:spPr>
+          <a:xfrm>
+            <a:off x="6309360" y="1828800"/>
+            <a:ext cx="5333695" cy="3657600"/>
+          </a:xfrm>
+          <a:prstGeom prst="rect">
+            <a:avLst/>
+          </a:prstGeom>
+          <a:noFill/>
+          <a:ln/>
+        </p:spPr>
+        <p:txBody>
+          <a:bodyPr wrap="square" lIns="0" tIns="0" rIns="0" bIns="0" rtlCol="0" anchor="t"/>
+          <a:lstStyle/>
+          <a:p>
+            <a:pPr marL="203200" indent="-203200">
               <a:spcAft>
-                <a:spcPts val="400"/>
+                <a:spcPts val="800"/>
               </a:spcAft>
-              <a:buNone/>
-            </a:pPr>
-            <a:r>
-              <a:rPr lang="en-US" sz="1000" dirty="0">
+              <a:buSzPct val="100000"/>
+              <a:buChar char="•"/>
+            </a:pPr>
+            <a:r>
+              <a:rPr lang="en-US" sz="1350" dirty="0">
                 <a:solidFill>
                   <a:srgbClr val="1B1B1B"/>
                 </a:solidFill>
               </a:rPr>
-              <a:t>[28] Bratzler DW, Dellinger EP, Olsen KM, et al. Clinical practice guidelines for antimicrobial prophylaxis in surgery. Am J Health Syst Pharm. 2013;70:195-283.</a:t>
-            </a:r>
-            <a:endParaRPr lang="en-US" sz="1000" dirty="0"/>
-          </a:p>
-          <a:p>
-            <a:pPr indent="0" marL="0">
+              <a:t>External validation on MIMIC-IV: became the core programme, extended to eICU.</a:t>
+            </a:r>
+            <a:endParaRPr lang="en-US" sz="1350" dirty="0"/>
+          </a:p>
+          <a:p>
+            <a:pPr marL="203200" indent="-203200">
               <a:spcAft>
-                <a:spcPts val="400"/>
+                <a:spcPts val="800"/>
               </a:spcAft>
-              <a:buNone/>
-            </a:pPr>
-            <a:r>
-              <a:rPr lang="en-US" sz="1000" dirty="0">
+              <a:buSzPct val="100000"/>
+              <a:buChar char="•"/>
+            </a:pPr>
+            <a:r>
+              <a:rPr lang="en-US" sz="1350" dirty="0">
                 <a:solidFill>
                   <a:srgbClr val="1B1B1B"/>
                 </a:solidFill>
               </a:rPr>
-              <a:t>[29] Evans L, Rhodes A, Alhazzani W, et al. Surviving Sepsis Campaign: international guidelines for management of sepsis and septic shock 2021. Intensive Care Med. 2021;47:1181-1247.</a:t>
-            </a:r>
-            <a:endParaRPr lang="en-US" sz="1000" dirty="0"/>
-          </a:p>
-          <a:p>
-            <a:pPr indent="0" marL="0">
+              <a:t>CNN-Transformer and OSTA papers: withheld after the leakage audit.</a:t>
+            </a:r>
+            <a:endParaRPr lang="en-US" sz="1350" dirty="0"/>
+          </a:p>
+          <a:p>
+            <a:pPr marL="203200" indent="-203200">
               <a:spcAft>
-                <a:spcPts val="400"/>
+                <a:spcPts val="800"/>
               </a:spcAft>
-              <a:buNone/>
-            </a:pPr>
-            <a:r>
-              <a:rPr lang="en-US" sz="1000" dirty="0">
+              <a:buSzPct val="100000"/>
+              <a:buChar char="•"/>
+            </a:pPr>
+            <a:r>
+              <a:rPr lang="en-US" sz="1350" dirty="0">
                 <a:solidFill>
                   <a:srgbClr val="1B1B1B"/>
                 </a:solidFill>
               </a:rPr>
-              <a:t>[30] Johnson AEW, Bulgarelli L, Shen L, et al. MIMIC-IV, a freely accessible electronic health record dataset. Sci Data. 2023;10:1.</a:t>
-            </a:r>
-            <a:endParaRPr lang="en-US" sz="1000" dirty="0"/>
-          </a:p>
-          <a:p>
-            <a:pPr indent="0" marL="0">
+              <a:t>AMR review: revised and submitted to Int J Antimicrob Agents.</a:t>
+            </a:r>
+            <a:endParaRPr lang="en-US" sz="1350" dirty="0"/>
+          </a:p>
+          <a:p>
+            <a:pPr marL="203200" indent="-203200">
               <a:spcAft>
-                <a:spcPts val="400"/>
+                <a:spcPts val="800"/>
               </a:spcAft>
-              <a:buNone/>
-            </a:pPr>
-            <a:r>
-              <a:rPr lang="en-US" sz="1000" dirty="0">
+              <a:buSzPct val="100000"/>
+              <a:buChar char="•"/>
+            </a:pPr>
+            <a:r>
+              <a:rPr lang="en-US" sz="1350" dirty="0">
                 <a:solidFill>
                   <a:srgbClr val="1B1B1B"/>
                 </a:solidFill>
               </a:rPr>
-              <a:t>[31] Pollard TJ, Johnson AEW, Raffa JD, et al. The eICU Collaborative Research Database, a freely available multi-center database for critical care research. Sci Data. 2018;5:180178.</a:t>
-            </a:r>
-            <a:endParaRPr lang="en-US" sz="1000" dirty="0"/>
-          </a:p>
-          <a:p>
-            <a:pPr indent="0" marL="0">
+              <a:t>Clinician study: now the qualitative phase (20 consultants), nearly complete.</a:t>
+            </a:r>
+            <a:endParaRPr lang="en-US" sz="1350" dirty="0"/>
+          </a:p>
+          <a:p>
+            <a:pPr marL="203200" indent="-203200">
               <a:spcAft>
-                <a:spcPts val="400"/>
+                <a:spcPts val="800"/>
               </a:spcAft>
-              <a:buNone/>
-            </a:pPr>
-            <a:r>
-              <a:rPr lang="en-US" sz="1000" dirty="0">
+              <a:buSzPct val="100000"/>
+              <a:buChar char="•"/>
+            </a:pPr>
+            <a:r>
+              <a:rPr lang="en-US" sz="1350" dirty="0">
                 <a:solidFill>
                   <a:srgbClr val="1B1B1B"/>
                 </a:solidFill>
               </a:rPr>
-              <a:t>[32] Goldberger AL, Amaral LAN, Glass L, et al. PhysioBank, PhysioToolkit, and PhysioNet: components of a new research resource for complex physiologic signals. Circulation. 2000;101:e215-e220.</a:t>
-            </a:r>
-            <a:endParaRPr lang="en-US" sz="1000" dirty="0"/>
-          </a:p>
-          <a:p>
-            <a:pPr indent="0" marL="0">
-              <a:spcAft>
-                <a:spcPts val="400"/>
-              </a:spcAft>
-              <a:buNone/>
-            </a:pPr>
-            <a:r>
-              <a:rPr lang="en-US" sz="1000" dirty="0">
-                <a:solidFill>
-                  <a:srgbClr val="1B1B1B"/>
-                </a:solidFill>
-              </a:rPr>
-              <a:t>[33] van de Water R, Schmidt HNA, Elbers PWG, et al. Yet Another ICU Benchmark: a flexible multi-center framework for clinical machine learning. ICLR 2024.</a:t>
-            </a:r>
-            <a:endParaRPr lang="en-US" sz="1000" dirty="0"/>
-          </a:p>
-          <a:p>
-            <a:pPr indent="0" marL="0">
-              <a:spcAft>
-                <a:spcPts val="400"/>
-              </a:spcAft>
-              <a:buNone/>
-            </a:pPr>
-            <a:r>
-              <a:rPr lang="en-US" sz="1000" dirty="0">
-                <a:solidFill>
-                  <a:srgbClr val="1B1B1B"/>
-                </a:solidFill>
-              </a:rPr>
-              <a:t>[34] Bennett N, Plecko D, Ukor IF, Meinshausen N, Buhlmann P. ricu: R's interface to intensive care data. GigaScience. 2023;12.</a:t>
-            </a:r>
-            <a:endParaRPr lang="en-US" sz="1000" dirty="0"/>
-          </a:p>
-        </p:txBody>
-      </p:sp>
-      <p:sp>
-        <p:nvSpPr>
-          <p:cNvPr id="5" name="reference list"/>
-          <p:cNvSpPr txBox="1"/>
-          <p:nvPr/>
-        </p:nvSpPr>
-        <p:spPr>
-          <a:xfrm>
-            <a:off x="6172200" y="1234440"/>
-            <a:ext cx="5440680" cy="5120640"/>
-          </a:xfrm>
-          <a:prstGeom prst="rect">
-            <a:avLst/>
-          </a:prstGeom>
-          <a:noFill/>
-          <a:ln/>
-        </p:spPr>
-        <p:txBody>
-          <a:bodyPr wrap="square" lIns="0" tIns="0" rIns="0" bIns="0" rtlCol="0" anchor="t"/>
-          <a:lstStyle/>
-          <a:p>
-            <a:pPr indent="0" marL="0">
-              <a:spcAft>
-                <a:spcPts val="400"/>
-              </a:spcAft>
-              <a:buNone/>
-            </a:pPr>
-            <a:r>
-              <a:rPr lang="en-US" sz="1000" dirty="0">
-                <a:solidFill>
-                  <a:srgbClr val="1B1B1B"/>
-                </a:solidFill>
-              </a:rPr>
-              <a:t>[35] Seymour CW, Liu VX, Iwashyna TJ, et al. Assessment of clinical criteria for sepsis (Sepsis-3). JAMA. 2016;315:762-774.</a:t>
-            </a:r>
-            <a:endParaRPr lang="en-US" sz="1000" dirty="0"/>
-          </a:p>
-          <a:p>
-            <a:pPr indent="0" marL="0">
-              <a:spcAft>
-                <a:spcPts val="400"/>
-              </a:spcAft>
-              <a:buNone/>
-            </a:pPr>
-            <a:r>
-              <a:rPr lang="en-US" sz="1000" dirty="0">
-                <a:solidFill>
-                  <a:srgbClr val="1B1B1B"/>
-                </a:solidFill>
-              </a:rPr>
-              <a:t>[36] Vaswani A, Shazeer N, Parmar N, et al. Attention is all you need. Advances in Neural Information Processing Systems (NeurIPS). 2017.</a:t>
-            </a:r>
-            <a:endParaRPr lang="en-US" sz="1000" dirty="0"/>
-          </a:p>
-          <a:p>
-            <a:pPr indent="0" marL="0">
-              <a:spcAft>
-                <a:spcPts val="400"/>
-              </a:spcAft>
-              <a:buNone/>
-            </a:pPr>
-            <a:r>
-              <a:rPr lang="en-US" sz="1000" dirty="0">
-                <a:solidFill>
-                  <a:srgbClr val="1B1B1B"/>
-                </a:solidFill>
-              </a:rPr>
-              <a:t>[37] Che Z, Purushotham S, Cho K, Sontag D, Liu Y. Recurrent neural networks for multivariate time series with missing values. Sci Rep. 2018;8:6085.</a:t>
-            </a:r>
-            <a:endParaRPr lang="en-US" sz="1000" dirty="0"/>
-          </a:p>
-          <a:p>
-            <a:pPr indent="0" marL="0">
-              <a:spcAft>
-                <a:spcPts val="400"/>
-              </a:spcAft>
-              <a:buNone/>
-            </a:pPr>
-            <a:r>
-              <a:rPr lang="en-US" sz="1000" dirty="0">
-                <a:solidFill>
-                  <a:srgbClr val="1B1B1B"/>
-                </a:solidFill>
-              </a:rPr>
-              <a:t>[38] Bai S, Kolter JZ, Koltun V. An empirical evaluation of generic convolutional and recurrent networks for sequence modeling. arXiv:1803.01271. 2018.</a:t>
-            </a:r>
-            <a:endParaRPr lang="en-US" sz="1000" dirty="0"/>
-          </a:p>
-          <a:p>
-            <a:pPr indent="0" marL="0">
-              <a:spcAft>
-                <a:spcPts val="400"/>
-              </a:spcAft>
-              <a:buNone/>
-            </a:pPr>
-            <a:r>
-              <a:rPr lang="en-US" sz="1000" dirty="0">
-                <a:solidFill>
-                  <a:srgbClr val="1B1B1B"/>
-                </a:solidFill>
-              </a:rPr>
-              <a:t>[39] Yeche H, Dresdner G, Locatello F, Huser M, Ratsch G. Neighborhood contrastive learning applied to online patient monitoring. International Conference on Machine Learning (ICML). 2021.</a:t>
-            </a:r>
-            <a:endParaRPr lang="en-US" sz="1000" dirty="0"/>
-          </a:p>
-          <a:p>
-            <a:pPr indent="0" marL="0">
-              <a:spcAft>
-                <a:spcPts val="400"/>
-              </a:spcAft>
-              <a:buNone/>
-            </a:pPr>
-            <a:r>
-              <a:rPr lang="en-US" sz="1000" dirty="0">
-                <a:solidFill>
-                  <a:srgbClr val="1B1B1B"/>
-                </a:solidFill>
-              </a:rPr>
-              <a:t>[40] Yeche H, Pace A, Ratsch G, Kuznetsova R. Temporal label smoothing for early event prediction. International Conference on Machine Learning (ICML). 2023.</a:t>
-            </a:r>
-            <a:endParaRPr lang="en-US" sz="1000" dirty="0"/>
-          </a:p>
-          <a:p>
-            <a:pPr indent="0" marL="0">
-              <a:spcAft>
-                <a:spcPts val="400"/>
-              </a:spcAft>
-              <a:buNone/>
-            </a:pPr>
-            <a:r>
-              <a:rPr lang="en-US" sz="1000" dirty="0">
-                <a:solidFill>
-                  <a:srgbClr val="1B1B1B"/>
-                </a:solidFill>
-              </a:rPr>
-              <a:t>[41] Elrggal ME, et al. Early sepsis warning on MIMIC-IV and eICU: preliminary development-split results, October 2026. Unpublished; manuscript in preparation.</a:t>
-            </a:r>
-            <a:endParaRPr lang="en-US" sz="1000" dirty="0"/>
-          </a:p>
-          <a:p>
-            <a:pPr indent="0" marL="0">
-              <a:spcAft>
-                <a:spcPts val="400"/>
-              </a:spcAft>
-              <a:buNone/>
-            </a:pPr>
-            <a:r>
-              <a:rPr lang="en-US" sz="1000" dirty="0">
-                <a:solidFill>
-                  <a:srgbClr val="1B1B1B"/>
-                </a:solidFill>
-              </a:rPr>
-              <a:t>[42] Elrggal ME, et al. Temporal patterns and predictors of sepsis onset in ICU patients: a retrospective cohort study using PhysioNet data. Submitted, Front Med, 2026.</a:t>
-            </a:r>
-            <a:endParaRPr lang="en-US" sz="1000" dirty="0"/>
-          </a:p>
-          <a:p>
-            <a:pPr indent="0" marL="0">
-              <a:spcAft>
-                <a:spcPts val="400"/>
-              </a:spcAft>
-              <a:buNone/>
-            </a:pPr>
-            <a:r>
-              <a:rPr lang="en-US" sz="1000" dirty="0">
-                <a:solidFill>
-                  <a:srgbClr val="1B1B1B"/>
-                </a:solidFill>
-              </a:rPr>
-              <a:t>[43] Elrggal ME, et al. Diagnostic applications of infrared thermography across infectious diseases: a systematic review with a subgroup meta-analysis. Submitted, JMIR, 2026.</a:t>
-            </a:r>
-            <a:endParaRPr lang="en-US" sz="1000" dirty="0"/>
-          </a:p>
-          <a:p>
-            <a:pPr indent="0" marL="0">
-              <a:spcAft>
-                <a:spcPts val="400"/>
-              </a:spcAft>
-              <a:buNone/>
-            </a:pPr>
-            <a:r>
-              <a:rPr lang="en-US" sz="1000" dirty="0">
-                <a:solidFill>
-                  <a:srgbClr val="1B1B1B"/>
-                </a:solidFill>
-              </a:rPr>
-              <a:t>[44] Royal College of Physicians. National Early Warning Score (NEWS) 2: standardising the assessment of acute-illness severity in the NHS. London: RCP; 2017.</a:t>
-            </a:r>
-            <a:endParaRPr lang="en-US" sz="1000" dirty="0"/>
-          </a:p>
-          <a:p>
-            <a:pPr indent="0" marL="0">
-              <a:spcAft>
-                <a:spcPts val="400"/>
-              </a:spcAft>
-              <a:buNone/>
-            </a:pPr>
-            <a:r>
-              <a:rPr lang="en-US" sz="1000" dirty="0">
-                <a:solidFill>
-                  <a:srgbClr val="1B1B1B"/>
-                </a:solidFill>
-              </a:rPr>
-              <a:t>[45] Kidney Disease: Improving Global Outcomes (KDIGO) AKI Work Group. KDIGO clinical practice guideline for acute kidney injury. Kidney Int Suppl. 2012;2:1-138.</a:t>
-            </a:r>
-            <a:endParaRPr lang="en-US" sz="1000" dirty="0"/>
+              <a:t>Conference presentation: this talk.</a:t>
+            </a:r>
+            <a:endParaRPr lang="en-US" sz="1350" dirty="0"/>
           </a:p>
         </p:txBody>
       </p:sp>
@@ -21047,6 +25322,1204 @@
             <a:fld id="{F7021451-1387-4CA6-816F-3879F97B5CBC}" type="slidenum">
               <a:rPr b="1" lang="en-US"/>
               <a:t>25</a:t>
+            </a:fld>
+            <a:endParaRPr lang="en-US"/>
+          </a:p>
+        </p:txBody>
+      </p:sp>
+    </p:spTree>
+  </p:cSld>
+  <p:clrMapOvr>
+    <a:masterClrMapping/>
+  </p:clrMapOvr>
+</p:sld>
+</file>
+
+<file path=ppt/slides/slide26.xml><?xml version="1.0" encoding="utf-8"?>
+<p:sld xmlns:a="http://schemas.openxmlformats.org/drawingml/2006/main" xmlns:r="http://schemas.openxmlformats.org/officeDocument/2006/relationships" xmlns:p="http://schemas.openxmlformats.org/presentationml/2006/main">
+  <p:cSld name="Slide 26">
+    <p:spTree>
+      <p:nvGrpSpPr>
+        <p:cNvPr id="1" name=""/>
+        <p:cNvGrpSpPr/>
+        <p:nvPr/>
+      </p:nvGrpSpPr>
+      <p:grpSpPr>
+        <a:xfrm>
+          <a:off x="0" y="0"/>
+          <a:ext cx="0" cy="0"/>
+          <a:chOff x="0" y="0"/>
+          <a:chExt cx="0" cy="0"/>
+        </a:xfrm>
+      </p:grpSpPr>
+      <p:sp>
+        <p:nvSpPr>
+          <p:cNvPr id="2" name="text"/>
+          <p:cNvSpPr txBox="1"/>
+          <p:nvPr/>
+        </p:nvSpPr>
+        <p:spPr>
+          <a:xfrm>
+            <a:off x="548640" y="237744"/>
+            <a:ext cx="7315200" cy="274320"/>
+          </a:xfrm>
+          <a:prstGeom prst="rect">
+            <a:avLst/>
+          </a:prstGeom>
+          <a:noFill/>
+          <a:ln/>
+        </p:spPr>
+        <p:txBody>
+          <a:bodyPr wrap="square" lIns="0" tIns="0" rIns="0" bIns="0" rtlCol="0" anchor="t"/>
+          <a:lstStyle/>
+          <a:p>
+            <a:pPr algn="l" indent="0" marL="0">
+              <a:buNone/>
+            </a:pPr>
+            <a:r>
+              <a:rPr lang="en-US" sz="1100" b="1" dirty="0">
+                <a:solidFill>
+                  <a:srgbClr val="C8102E"/>
+                </a:solidFill>
+              </a:rPr>
+              <a:t>BACKUP</a:t>
+            </a:r>
+            <a:endParaRPr lang="en-US" sz="1100" dirty="0"/>
+          </a:p>
+        </p:txBody>
+      </p:sp>
+      <p:sp>
+        <p:nvSpPr>
+          <p:cNvPr id="3" name="Text 0"/>
+          <p:cNvSpPr/>
+          <p:nvPr>
+            <p:ph idx="100" type="title" hasCustomPrompt="1"/>
+          </p:nvPr>
+        </p:nvSpPr>
+        <p:spPr>
+          <a:xfrm>
+            <a:off x="548640" y="548640"/>
+            <a:ext cx="11094415" cy="868680"/>
+          </a:xfrm>
+          <a:prstGeom prst="rect">
+            <a:avLst/>
+          </a:prstGeom>
+          <a:noFill/>
+          <a:ln/>
+        </p:spPr>
+        <p:txBody>
+          <a:bodyPr wrap="square" lIns="0" tIns="0" rIns="0" bIns="0" rtlCol="0" anchor="t"/>
+          <a:lstStyle/>
+          <a:p>
+            <a:pPr algn="l" indent="0" marL="0">
+              <a:buNone/>
+            </a:pPr>
+            <a:r>
+              <a:rPr lang="en-US" sz="2400" b="1" dirty="0">
+                <a:solidFill>
+                  <a:srgbClr val="1B1B1B"/>
+                </a:solidFill>
+                <a:latin typeface="Arial" pitchFamily="34" charset="0"/>
+                <a:ea typeface="Arial" pitchFamily="34" charset="-122"/>
+                <a:cs typeface="Arial" pitchFamily="34" charset="-120"/>
+              </a:rPr>
+              <a:t>References (1 of 2)</a:t>
+            </a:r>
+            <a:endParaRPr lang="en-US" sz="2400" dirty="0"/>
+          </a:p>
+        </p:txBody>
+      </p:sp>
+      <p:sp>
+        <p:nvSpPr>
+          <p:cNvPr id="4" name="reference list"/>
+          <p:cNvSpPr txBox="1"/>
+          <p:nvPr/>
+        </p:nvSpPr>
+        <p:spPr>
+          <a:xfrm>
+            <a:off x="548640" y="1234440"/>
+            <a:ext cx="5440680" cy="5120640"/>
+          </a:xfrm>
+          <a:prstGeom prst="rect">
+            <a:avLst/>
+          </a:prstGeom>
+          <a:noFill/>
+          <a:ln/>
+        </p:spPr>
+        <p:txBody>
+          <a:bodyPr wrap="square" lIns="0" tIns="0" rIns="0" bIns="0" rtlCol="0" anchor="t"/>
+          <a:lstStyle/>
+          <a:p>
+            <a:pPr indent="0" marL="0">
+              <a:spcAft>
+                <a:spcPts val="400"/>
+              </a:spcAft>
+              <a:buNone/>
+            </a:pPr>
+            <a:r>
+              <a:rPr lang="en-US" sz="1000" dirty="0">
+                <a:solidFill>
+                  <a:srgbClr val="1B1B1B"/>
+                </a:solidFill>
+              </a:rPr>
+              <a:t>[1] Rudd KE, Johnson SC, Agesa KM, et al. Global, regional, and national sepsis incidence and mortality, 1990-2017: analysis for the Global Burden of Disease Study. Lancet. 2020;395:200-211.</a:t>
+            </a:r>
+            <a:endParaRPr lang="en-US" sz="1000" dirty="0"/>
+          </a:p>
+          <a:p>
+            <a:pPr indent="0" marL="0">
+              <a:spcAft>
+                <a:spcPts val="400"/>
+              </a:spcAft>
+              <a:buNone/>
+            </a:pPr>
+            <a:r>
+              <a:rPr lang="en-US" sz="1000" dirty="0">
+                <a:solidFill>
+                  <a:srgbClr val="1B1B1B"/>
+                </a:solidFill>
+              </a:rPr>
+              <a:t>[2] Antimicrobial Resistance Collaborators. Global burden of bacterial antimicrobial resistance in 2019: a systematic analysis. Lancet. 2022;399:629-655.</a:t>
+            </a:r>
+            <a:endParaRPr lang="en-US" sz="1000" dirty="0"/>
+          </a:p>
+          <a:p>
+            <a:pPr indent="0" marL="0">
+              <a:spcAft>
+                <a:spcPts val="400"/>
+              </a:spcAft>
+              <a:buNone/>
+            </a:pPr>
+            <a:r>
+              <a:rPr lang="en-US" sz="1000" dirty="0">
+                <a:solidFill>
+                  <a:srgbClr val="1B1B1B"/>
+                </a:solidFill>
+              </a:rPr>
+              <a:t>[3] Timbrook TT, Morton JB, McConeghy KW, et al. The effect of molecular rapid diagnostic testing on clinical outcomes in bloodstream infections: a systematic review and meta-analysis. Clin Infect Dis. 2017;64:15-23.</a:t>
+            </a:r>
+            <a:endParaRPr lang="en-US" sz="1000" dirty="0"/>
+          </a:p>
+          <a:p>
+            <a:pPr indent="0" marL="0">
+              <a:spcAft>
+                <a:spcPts val="400"/>
+              </a:spcAft>
+              <a:buNone/>
+            </a:pPr>
+            <a:r>
+              <a:rPr lang="en-US" sz="1000" dirty="0">
+                <a:solidFill>
+                  <a:srgbClr val="1B1B1B"/>
+                </a:solidFill>
+              </a:rPr>
+              <a:t>[4] Adams R, Henry KE, Sridharan A, et al. Prospective, multi-site study of patient outcomes after implementation of the TREWS machine learning-based early warning system for sepsis. Nat Med. 2022;28:1455-1460.</a:t>
+            </a:r>
+            <a:endParaRPr lang="en-US" sz="1000" dirty="0"/>
+          </a:p>
+          <a:p>
+            <a:pPr indent="0" marL="0">
+              <a:spcAft>
+                <a:spcPts val="400"/>
+              </a:spcAft>
+              <a:buNone/>
+            </a:pPr>
+            <a:r>
+              <a:rPr lang="en-US" sz="1000" dirty="0">
+                <a:solidFill>
+                  <a:srgbClr val="1B1B1B"/>
+                </a:solidFill>
+              </a:rPr>
+              <a:t>[5] Elrggal ME, et al. Artificial intelligence in the diagnosis of antimicrobial resistance: rapid diagnostics and imaging innovations. Submitted, Int J Antimicrob Agents, 2026.</a:t>
+            </a:r>
+            <a:endParaRPr lang="en-US" sz="1000" dirty="0"/>
+          </a:p>
+          <a:p>
+            <a:pPr indent="0" marL="0">
+              <a:spcAft>
+                <a:spcPts val="400"/>
+              </a:spcAft>
+              <a:buNone/>
+            </a:pPr>
+            <a:r>
+              <a:rPr lang="en-US" sz="1000" dirty="0">
+                <a:solidFill>
+                  <a:srgbClr val="1B1B1B"/>
+                </a:solidFill>
+              </a:rPr>
+              <a:t>[6] Singer M, Deutschman CS, Seymour CW, et al. The Third International Consensus Definitions for Sepsis and Septic Shock (Sepsis-3). JAMA. 2016;315:801-810.</a:t>
+            </a:r>
+            <a:endParaRPr lang="en-US" sz="1000" dirty="0"/>
+          </a:p>
+          <a:p>
+            <a:pPr indent="0" marL="0">
+              <a:spcAft>
+                <a:spcPts val="400"/>
+              </a:spcAft>
+              <a:buNone/>
+            </a:pPr>
+            <a:r>
+              <a:rPr lang="en-US" sz="1000" dirty="0">
+                <a:solidFill>
+                  <a:srgbClr val="1B1B1B"/>
+                </a:solidFill>
+              </a:rPr>
+              <a:t>[7] Vincent JL, Moreno R, Takala J, et al. The SOFA (Sepsis-related Organ Failure Assessment) score to describe organ dysfunction/failure. Intensive Care Med. 1996;22:707-710.</a:t>
+            </a:r>
+            <a:endParaRPr lang="en-US" sz="1000" dirty="0"/>
+          </a:p>
+          <a:p>
+            <a:pPr indent="0" marL="0">
+              <a:spcAft>
+                <a:spcPts val="400"/>
+              </a:spcAft>
+              <a:buNone/>
+            </a:pPr>
+            <a:r>
+              <a:rPr lang="en-US" sz="1000" dirty="0">
+                <a:solidFill>
+                  <a:srgbClr val="1B1B1B"/>
+                </a:solidFill>
+              </a:rPr>
+              <a:t>[8] Liu V, Escobar GJ, Greene JD, et al. Hospital deaths in patients with sepsis from 2 independent cohorts. JAMA. 2014;312:90-92.</a:t>
+            </a:r>
+            <a:endParaRPr lang="en-US" sz="1000" dirty="0"/>
+          </a:p>
+          <a:p>
+            <a:pPr indent="0" marL="0">
+              <a:spcAft>
+                <a:spcPts val="400"/>
+              </a:spcAft>
+              <a:buNone/>
+            </a:pPr>
+            <a:r>
+              <a:rPr lang="en-US" sz="1000" dirty="0">
+                <a:solidFill>
+                  <a:srgbClr val="1B1B1B"/>
+                </a:solidFill>
+              </a:rPr>
+              <a:t>[9] Seymour CW, Gesten F, Prescott HC, et al. Time to treatment and mortality during mandated emergency care for sepsis. N Engl J Med. 2017;376:2235-2244.</a:t>
+            </a:r>
+            <a:endParaRPr lang="en-US" sz="1000" dirty="0"/>
+          </a:p>
+          <a:p>
+            <a:pPr indent="0" marL="0">
+              <a:spcAft>
+                <a:spcPts val="400"/>
+              </a:spcAft>
+              <a:buNone/>
+            </a:pPr>
+            <a:r>
+              <a:rPr lang="en-US" sz="1000" dirty="0">
+                <a:solidFill>
+                  <a:srgbClr val="1B1B1B"/>
+                </a:solidFill>
+              </a:rPr>
+              <a:t>[10] Kumar A, Roberts D, Wood KE, et al. Duration of hypotension before initiation of effective antimicrobial therapy is the critical determinant of survival in human septic shock. Crit Care Med. 2006;34:1589-1596.</a:t>
+            </a:r>
+            <a:endParaRPr lang="en-US" sz="1000" dirty="0"/>
+          </a:p>
+          <a:p>
+            <a:pPr indent="0" marL="0">
+              <a:spcAft>
+                <a:spcPts val="400"/>
+              </a:spcAft>
+              <a:buNone/>
+            </a:pPr>
+            <a:r>
+              <a:rPr lang="en-US" sz="1000" dirty="0">
+                <a:solidFill>
+                  <a:srgbClr val="1B1B1B"/>
+                </a:solidFill>
+              </a:rPr>
+              <a:t>[11] Churpek MM, Snyder A, Han X, et al. Quick SOFA, SIRS, and early warning scores for detecting clinical deterioration in infected patients outside the ICU. Am J Respir Crit Care Med. 2017;195:906-911.</a:t>
+            </a:r>
+            <a:endParaRPr lang="en-US" sz="1000" dirty="0"/>
+          </a:p>
+          <a:p>
+            <a:pPr indent="0" marL="0">
+              <a:spcAft>
+                <a:spcPts val="400"/>
+              </a:spcAft>
+              <a:buNone/>
+            </a:pPr>
+            <a:r>
+              <a:rPr lang="en-US" sz="1000" dirty="0">
+                <a:solidFill>
+                  <a:srgbClr val="1B1B1B"/>
+                </a:solidFill>
+              </a:rPr>
+              <a:t>[12] Yu AC, Mohajer B, Eng J. External validation of deep learning algorithms for radiologic diagnosis: a systematic review. Radiol Artif Intell. 2022;4:e210064.</a:t>
+            </a:r>
+            <a:endParaRPr lang="en-US" sz="1000" dirty="0"/>
+          </a:p>
+        </p:txBody>
+      </p:sp>
+      <p:sp>
+        <p:nvSpPr>
+          <p:cNvPr id="5" name="reference list"/>
+          <p:cNvSpPr txBox="1"/>
+          <p:nvPr/>
+        </p:nvSpPr>
+        <p:spPr>
+          <a:xfrm>
+            <a:off x="6172200" y="1234440"/>
+            <a:ext cx="5440680" cy="5120640"/>
+          </a:xfrm>
+          <a:prstGeom prst="rect">
+            <a:avLst/>
+          </a:prstGeom>
+          <a:noFill/>
+          <a:ln/>
+        </p:spPr>
+        <p:txBody>
+          <a:bodyPr wrap="square" lIns="0" tIns="0" rIns="0" bIns="0" rtlCol="0" anchor="t"/>
+          <a:lstStyle/>
+          <a:p>
+            <a:pPr indent="0" marL="0">
+              <a:spcAft>
+                <a:spcPts val="400"/>
+              </a:spcAft>
+              <a:buNone/>
+            </a:pPr>
+            <a:r>
+              <a:rPr lang="en-US" sz="1000" dirty="0">
+                <a:solidFill>
+                  <a:srgbClr val="1B1B1B"/>
+                </a:solidFill>
+              </a:rPr>
+              <a:t>[13] Kwong JCC, Erdman L, Khondker A, et al. The silent trial: the bridge between bench-to-bedside clinical AI applications. Front Digit Health. 2022;4:929508.</a:t>
+            </a:r>
+            <a:endParaRPr lang="en-US" sz="1000" dirty="0"/>
+          </a:p>
+          <a:p>
+            <a:pPr indent="0" marL="0">
+              <a:spcAft>
+                <a:spcPts val="400"/>
+              </a:spcAft>
+              <a:buNone/>
+            </a:pPr>
+            <a:r>
+              <a:rPr lang="en-US" sz="1000" dirty="0">
+                <a:solidFill>
+                  <a:srgbClr val="1B1B1B"/>
+                </a:solidFill>
+              </a:rPr>
+              <a:t>[14] Nagendran M, Chen Y, Lovejoy CA, et al. Artificial intelligence versus clinicians: systematic review of design, reporting standards, and claims of deep learning studies. BMJ. 2020;368:m689.</a:t>
+            </a:r>
+            <a:endParaRPr lang="en-US" sz="1000" dirty="0"/>
+          </a:p>
+          <a:p>
+            <a:pPr indent="0" marL="0">
+              <a:spcAft>
+                <a:spcPts val="400"/>
+              </a:spcAft>
+              <a:buNone/>
+            </a:pPr>
+            <a:r>
+              <a:rPr lang="en-US" sz="1000" dirty="0">
+                <a:solidFill>
+                  <a:srgbClr val="1B1B1B"/>
+                </a:solidFill>
+              </a:rPr>
+              <a:t>[15] Reyna MA, Josef CS, Jeter R, et al. Early prediction of sepsis from clinical data: the PhysioNet/Computing in Cardiology Challenge 2019. Crit Care Med. 2020;48:210-217.</a:t>
+            </a:r>
+            <a:endParaRPr lang="en-US" sz="1000" dirty="0"/>
+          </a:p>
+          <a:p>
+            <a:pPr indent="0" marL="0">
+              <a:spcAft>
+                <a:spcPts val="400"/>
+              </a:spcAft>
+              <a:buNone/>
+            </a:pPr>
+            <a:r>
+              <a:rPr lang="en-US" sz="1000" dirty="0">
+                <a:solidFill>
+                  <a:srgbClr val="1B1B1B"/>
+                </a:solidFill>
+              </a:rPr>
+              <a:t>[16] Agniel D, Kohane IS, Weber GM. Biases in electronic health record data due to processes within the healthcare system: retrospective observational study. BMJ. 2018;361:k1479.</a:t>
+            </a:r>
+            <a:endParaRPr lang="en-US" sz="1000" dirty="0"/>
+          </a:p>
+          <a:p>
+            <a:pPr indent="0" marL="0">
+              <a:spcAft>
+                <a:spcPts val="400"/>
+              </a:spcAft>
+              <a:buNone/>
+            </a:pPr>
+            <a:r>
+              <a:rPr lang="en-US" sz="1000" dirty="0">
+                <a:solidFill>
+                  <a:srgbClr val="1B1B1B"/>
+                </a:solidFill>
+              </a:rPr>
+              <a:t>[17] Zech JR, Badgeley MA, Liu M, et al. Variable generalization performance of a deep learning model to detect pneumonia in chest radiographs: a cross-sectional study. PLoS Med. 2018;15:e1002683.</a:t>
+            </a:r>
+            <a:endParaRPr lang="en-US" sz="1000" dirty="0"/>
+          </a:p>
+          <a:p>
+            <a:pPr indent="0" marL="0">
+              <a:spcAft>
+                <a:spcPts val="400"/>
+              </a:spcAft>
+              <a:buNone/>
+            </a:pPr>
+            <a:r>
+              <a:rPr lang="en-US" sz="1000" dirty="0">
+                <a:solidFill>
+                  <a:srgbClr val="1B1B1B"/>
+                </a:solidFill>
+              </a:rPr>
+              <a:t>[18] Kapoor S, Narayanan A. Leakage and the reproducibility crisis in machine-learning-based science. Patterns. 2023;4:100804.</a:t>
+            </a:r>
+            <a:endParaRPr lang="en-US" sz="1000" dirty="0"/>
+          </a:p>
+          <a:p>
+            <a:pPr indent="0" marL="0">
+              <a:spcAft>
+                <a:spcPts val="400"/>
+              </a:spcAft>
+              <a:buNone/>
+            </a:pPr>
+            <a:r>
+              <a:rPr lang="en-US" sz="1000" dirty="0">
+                <a:solidFill>
+                  <a:srgbClr val="1B1B1B"/>
+                </a:solidFill>
+              </a:rPr>
+              <a:t>[19] Shah NH, Milstein A, Bagley SC. Making machine learning models clinically useful. JAMA. 2019;322:1351-1352.</a:t>
+            </a:r>
+            <a:endParaRPr lang="en-US" sz="1000" dirty="0"/>
+          </a:p>
+          <a:p>
+            <a:pPr indent="0" marL="0">
+              <a:spcAft>
+                <a:spcPts val="400"/>
+              </a:spcAft>
+              <a:buNone/>
+            </a:pPr>
+            <a:r>
+              <a:rPr lang="en-US" sz="1000" dirty="0">
+                <a:solidFill>
+                  <a:srgbClr val="1B1B1B"/>
+                </a:solidFill>
+              </a:rPr>
+              <a:t>[20] Kelly CJ, Karthikesalingam A, Suleyman M, Corrado G, King D. Key challenges for delivering clinical impact with artificial intelligence. BMC Med. 2019;17:195.</a:t>
+            </a:r>
+            <a:endParaRPr lang="en-US" sz="1000" dirty="0"/>
+          </a:p>
+          <a:p>
+            <a:pPr indent="0" marL="0">
+              <a:spcAft>
+                <a:spcPts val="400"/>
+              </a:spcAft>
+              <a:buNone/>
+            </a:pPr>
+            <a:r>
+              <a:rPr lang="en-US" sz="1000" dirty="0">
+                <a:solidFill>
+                  <a:srgbClr val="1B1B1B"/>
+                </a:solidFill>
+              </a:rPr>
+              <a:t>[21] Morrill JH, Kormilitzin A, Nevado-Holgado AJ, et al. Utilization of the signature method to identify the early onset of sepsis from multivariate physiological time series in critical care monitoring. Crit Care Med. 2020;48:e976-e981.</a:t>
+            </a:r>
+            <a:endParaRPr lang="en-US" sz="1000" dirty="0"/>
+          </a:p>
+          <a:p>
+            <a:pPr indent="0" marL="0">
+              <a:spcAft>
+                <a:spcPts val="400"/>
+              </a:spcAft>
+              <a:buNone/>
+            </a:pPr>
+            <a:r>
+              <a:rPr lang="en-US" sz="1000" dirty="0">
+                <a:solidFill>
+                  <a:srgbClr val="1B1B1B"/>
+                </a:solidFill>
+              </a:rPr>
+              <a:t>[22] Wong A, Otles E, Donnelly JP, et al. External validation of a widely implemented proprietary sepsis prediction model in hospitalized patients. JAMA Intern Med. 2021;181:1065-1070.</a:t>
+            </a:r>
+            <a:endParaRPr lang="en-US" sz="1000" dirty="0"/>
+          </a:p>
+          <a:p>
+            <a:pPr indent="0" marL="0">
+              <a:spcAft>
+                <a:spcPts val="400"/>
+              </a:spcAft>
+              <a:buNone/>
+            </a:pPr>
+            <a:r>
+              <a:rPr lang="en-US" sz="1000" dirty="0">
+                <a:solidFill>
+                  <a:srgbClr val="1B1B1B"/>
+                </a:solidFill>
+              </a:rPr>
+              <a:t>[23] Fleuren LM, Klausch TLT, Zwager CL, et al. Machine learning for the prediction of sepsis: a systematic review and meta-analysis of diagnostic test accuracy. Intensive Care Med. 2020;46:383-400.</a:t>
+            </a:r>
+            <a:endParaRPr lang="en-US" sz="1000" dirty="0"/>
+          </a:p>
+          <a:p>
+            <a:pPr indent="0" marL="0">
+              <a:spcAft>
+                <a:spcPts val="400"/>
+              </a:spcAft>
+              <a:buNone/>
+            </a:pPr>
+            <a:r>
+              <a:rPr lang="en-US" sz="1000" dirty="0">
+                <a:solidFill>
+                  <a:srgbClr val="1B1B1B"/>
+                </a:solidFill>
+              </a:rPr>
+              <a:t>[24] Moor M, Rieck B, Horn M, Jutzeler CR, Borgwardt K. Early prediction of sepsis in the ICU using machine learning: a systematic review. Front Med. 2021;8:607952.</a:t>
+            </a:r>
+            <a:endParaRPr lang="en-US" sz="1000" dirty="0"/>
+          </a:p>
+        </p:txBody>
+      </p:sp>
+      <p:sp>
+        <p:nvSpPr>
+          <p:cNvPr id="25" name="Slide Number Placeholder 0"/>
+          <p:cNvSpPr>
+            <a:spLocks noGrp="1"/>
+          </p:cNvSpPr>
+          <p:nvPr>
+            <p:ph type="sldNum" sz="quarter" idx="4294967295"/>
+          </p:nvPr>
+        </p:nvSpPr>
+        <p:spPr>
+          <a:xfrm>
+            <a:off x="10911535" y="6437376"/>
+            <a:ext cx="731520" cy="274320"/>
+          </a:xfrm>
+          <a:prstGeom prst="rect">
+            <a:avLst/>
+          </a:prstGeom>
+          <a:extLst>
+            <a:ext uri="{C572A759-6A51-4108-AA02-DFA0A04FC94B}">
+              <ma14:wrappingTextBoxFlag xmlns:ma14="http://schemas.microsoft.com/office/mac/drawingml/2011/main" val="0"/>
+            </a:ext>
+          </a:extLst>
+        </p:spPr>
+        <p:txBody>
+          <a:bodyPr/>
+          <a:lstStyle>
+            <a:lvl1pPr>
+              <a:defRPr sz="1200">
+                <a:solidFill>
+                  <a:srgbClr val="C8102E"/>
+                </a:solidFill>
+              </a:defRPr>
+            </a:lvl1pPr>
+          </a:lstStyle>
+          <a:p>
+            <a:pPr algn="r"/>
+            <a:fld id="{F7021451-1387-4CA6-816F-3879F97B5CBC}" type="slidenum">
+              <a:rPr b="1" lang="en-US"/>
+              <a:t>26</a:t>
+            </a:fld>
+            <a:endParaRPr lang="en-US"/>
+          </a:p>
+        </p:txBody>
+      </p:sp>
+    </p:spTree>
+  </p:cSld>
+  <p:clrMapOvr>
+    <a:masterClrMapping/>
+  </p:clrMapOvr>
+</p:sld>
+</file>
+
+<file path=ppt/slides/slide27.xml><?xml version="1.0" encoding="utf-8"?>
+<p:sld xmlns:a="http://schemas.openxmlformats.org/drawingml/2006/main" xmlns:r="http://schemas.openxmlformats.org/officeDocument/2006/relationships" xmlns:p="http://schemas.openxmlformats.org/presentationml/2006/main">
+  <p:cSld name="Slide 27">
+    <p:spTree>
+      <p:nvGrpSpPr>
+        <p:cNvPr id="1" name=""/>
+        <p:cNvGrpSpPr/>
+        <p:nvPr/>
+      </p:nvGrpSpPr>
+      <p:grpSpPr>
+        <a:xfrm>
+          <a:off x="0" y="0"/>
+          <a:ext cx="0" cy="0"/>
+          <a:chOff x="0" y="0"/>
+          <a:chExt cx="0" cy="0"/>
+        </a:xfrm>
+      </p:grpSpPr>
+      <p:sp>
+        <p:nvSpPr>
+          <p:cNvPr id="2" name="text"/>
+          <p:cNvSpPr txBox="1"/>
+          <p:nvPr/>
+        </p:nvSpPr>
+        <p:spPr>
+          <a:xfrm>
+            <a:off x="548640" y="237744"/>
+            <a:ext cx="7315200" cy="274320"/>
+          </a:xfrm>
+          <a:prstGeom prst="rect">
+            <a:avLst/>
+          </a:prstGeom>
+          <a:noFill/>
+          <a:ln/>
+        </p:spPr>
+        <p:txBody>
+          <a:bodyPr wrap="square" lIns="0" tIns="0" rIns="0" bIns="0" rtlCol="0" anchor="t"/>
+          <a:lstStyle/>
+          <a:p>
+            <a:pPr algn="l" indent="0" marL="0">
+              <a:buNone/>
+            </a:pPr>
+            <a:r>
+              <a:rPr lang="en-US" sz="1100" b="1" dirty="0">
+                <a:solidFill>
+                  <a:srgbClr val="C8102E"/>
+                </a:solidFill>
+              </a:rPr>
+              <a:t>BACKUP</a:t>
+            </a:r>
+            <a:endParaRPr lang="en-US" sz="1100" dirty="0"/>
+          </a:p>
+        </p:txBody>
+      </p:sp>
+      <p:sp>
+        <p:nvSpPr>
+          <p:cNvPr id="3" name="Text 0"/>
+          <p:cNvSpPr/>
+          <p:nvPr>
+            <p:ph idx="100" type="title" hasCustomPrompt="1"/>
+          </p:nvPr>
+        </p:nvSpPr>
+        <p:spPr>
+          <a:xfrm>
+            <a:off x="548640" y="548640"/>
+            <a:ext cx="11094415" cy="868680"/>
+          </a:xfrm>
+          <a:prstGeom prst="rect">
+            <a:avLst/>
+          </a:prstGeom>
+          <a:noFill/>
+          <a:ln/>
+        </p:spPr>
+        <p:txBody>
+          <a:bodyPr wrap="square" lIns="0" tIns="0" rIns="0" bIns="0" rtlCol="0" anchor="t"/>
+          <a:lstStyle/>
+          <a:p>
+            <a:pPr algn="l" indent="0" marL="0">
+              <a:buNone/>
+            </a:pPr>
+            <a:r>
+              <a:rPr lang="en-US" sz="2400" b="1" dirty="0">
+                <a:solidFill>
+                  <a:srgbClr val="1B1B1B"/>
+                </a:solidFill>
+                <a:latin typeface="Arial" pitchFamily="34" charset="0"/>
+                <a:ea typeface="Arial" pitchFamily="34" charset="-122"/>
+                <a:cs typeface="Arial" pitchFamily="34" charset="-120"/>
+              </a:rPr>
+              <a:t>References (2 of 2)</a:t>
+            </a:r>
+            <a:endParaRPr lang="en-US" sz="2400" dirty="0"/>
+          </a:p>
+        </p:txBody>
+      </p:sp>
+      <p:sp>
+        <p:nvSpPr>
+          <p:cNvPr id="4" name="reference list"/>
+          <p:cNvSpPr txBox="1"/>
+          <p:nvPr/>
+        </p:nvSpPr>
+        <p:spPr>
+          <a:xfrm>
+            <a:off x="548640" y="1234440"/>
+            <a:ext cx="5440680" cy="5120640"/>
+          </a:xfrm>
+          <a:prstGeom prst="rect">
+            <a:avLst/>
+          </a:prstGeom>
+          <a:noFill/>
+          <a:ln/>
+        </p:spPr>
+        <p:txBody>
+          <a:bodyPr wrap="square" lIns="0" tIns="0" rIns="0" bIns="0" rtlCol="0" anchor="t"/>
+          <a:lstStyle/>
+          <a:p>
+            <a:pPr indent="0" marL="0">
+              <a:spcAft>
+                <a:spcPts val="400"/>
+              </a:spcAft>
+              <a:buNone/>
+            </a:pPr>
+            <a:r>
+              <a:rPr lang="en-US" sz="1000" dirty="0">
+                <a:solidFill>
+                  <a:srgbClr val="1B1B1B"/>
+                </a:solidFill>
+              </a:rPr>
+              <a:t>[25] Tschandl P, Rinner C, Apalla Z, et al. Human-computer collaboration for skin cancer recognition. Nat Med. 2020;26:1229-1234.</a:t>
+            </a:r>
+            <a:endParaRPr lang="en-US" sz="1000" dirty="0"/>
+          </a:p>
+          <a:p>
+            <a:pPr indent="0" marL="0">
+              <a:spcAft>
+                <a:spcPts val="400"/>
+              </a:spcAft>
+              <a:buNone/>
+            </a:pPr>
+            <a:r>
+              <a:rPr lang="en-US" sz="1000" dirty="0">
+                <a:solidFill>
+                  <a:srgbClr val="1B1B1B"/>
+                </a:solidFill>
+              </a:rPr>
+              <a:t>[26] Henry KE, Kornfield R, Sridharan A, et al. Human-machine teaming is key to AI adoption: clinicians' experiences with a deployed machine learning system. NPJ Digit Med. 2022;5:97.</a:t>
+            </a:r>
+            <a:endParaRPr lang="en-US" sz="1000" dirty="0"/>
+          </a:p>
+          <a:p>
+            <a:pPr indent="0" marL="0">
+              <a:spcAft>
+                <a:spcPts val="400"/>
+              </a:spcAft>
+              <a:buNone/>
+            </a:pPr>
+            <a:r>
+              <a:rPr lang="en-US" sz="1000" dirty="0">
+                <a:solidFill>
+                  <a:srgbClr val="1B1B1B"/>
+                </a:solidFill>
+              </a:rPr>
+              <a:t>[27] Wiens J, Saria S, Sendak M, et al. Do no harm: a roadmap for responsible machine learning for health care. Nat Med. 2019;25:1337-1340.</a:t>
+            </a:r>
+            <a:endParaRPr lang="en-US" sz="1000" dirty="0"/>
+          </a:p>
+          <a:p>
+            <a:pPr indent="0" marL="0">
+              <a:spcAft>
+                <a:spcPts val="400"/>
+              </a:spcAft>
+              <a:buNone/>
+            </a:pPr>
+            <a:r>
+              <a:rPr lang="en-US" sz="1000" dirty="0">
+                <a:solidFill>
+                  <a:srgbClr val="1B1B1B"/>
+                </a:solidFill>
+              </a:rPr>
+              <a:t>[28] Bratzler DW, Dellinger EP, Olsen KM, et al. Clinical practice guidelines for antimicrobial prophylaxis in surgery. Am J Health Syst Pharm. 2013;70:195-283.</a:t>
+            </a:r>
+            <a:endParaRPr lang="en-US" sz="1000" dirty="0"/>
+          </a:p>
+          <a:p>
+            <a:pPr indent="0" marL="0">
+              <a:spcAft>
+                <a:spcPts val="400"/>
+              </a:spcAft>
+              <a:buNone/>
+            </a:pPr>
+            <a:r>
+              <a:rPr lang="en-US" sz="1000" dirty="0">
+                <a:solidFill>
+                  <a:srgbClr val="1B1B1B"/>
+                </a:solidFill>
+              </a:rPr>
+              <a:t>[29] Evans L, Rhodes A, Alhazzani W, et al. Surviving Sepsis Campaign: international guidelines for management of sepsis and septic shock 2021. Intensive Care Med. 2021;47:1181-1247.</a:t>
+            </a:r>
+            <a:endParaRPr lang="en-US" sz="1000" dirty="0"/>
+          </a:p>
+          <a:p>
+            <a:pPr indent="0" marL="0">
+              <a:spcAft>
+                <a:spcPts val="400"/>
+              </a:spcAft>
+              <a:buNone/>
+            </a:pPr>
+            <a:r>
+              <a:rPr lang="en-US" sz="1000" dirty="0">
+                <a:solidFill>
+                  <a:srgbClr val="1B1B1B"/>
+                </a:solidFill>
+              </a:rPr>
+              <a:t>[30] Johnson AEW, Bulgarelli L, Shen L, et al. MIMIC-IV, a freely accessible electronic health record dataset. Sci Data. 2023;10:1.</a:t>
+            </a:r>
+            <a:endParaRPr lang="en-US" sz="1000" dirty="0"/>
+          </a:p>
+          <a:p>
+            <a:pPr indent="0" marL="0">
+              <a:spcAft>
+                <a:spcPts val="400"/>
+              </a:spcAft>
+              <a:buNone/>
+            </a:pPr>
+            <a:r>
+              <a:rPr lang="en-US" sz="1000" dirty="0">
+                <a:solidFill>
+                  <a:srgbClr val="1B1B1B"/>
+                </a:solidFill>
+              </a:rPr>
+              <a:t>[31] Pollard TJ, Johnson AEW, Raffa JD, et al. The eICU Collaborative Research Database, a freely available multi-center database for critical care research. Sci Data. 2018;5:180178.</a:t>
+            </a:r>
+            <a:endParaRPr lang="en-US" sz="1000" dirty="0"/>
+          </a:p>
+          <a:p>
+            <a:pPr indent="0" marL="0">
+              <a:spcAft>
+                <a:spcPts val="400"/>
+              </a:spcAft>
+              <a:buNone/>
+            </a:pPr>
+            <a:r>
+              <a:rPr lang="en-US" sz="1000" dirty="0">
+                <a:solidFill>
+                  <a:srgbClr val="1B1B1B"/>
+                </a:solidFill>
+              </a:rPr>
+              <a:t>[32] Goldberger AL, Amaral LAN, Glass L, et al. PhysioBank, PhysioToolkit, and PhysioNet: components of a new research resource for complex physiologic signals. Circulation. 2000;101:e215-e220.</a:t>
+            </a:r>
+            <a:endParaRPr lang="en-US" sz="1000" dirty="0"/>
+          </a:p>
+          <a:p>
+            <a:pPr indent="0" marL="0">
+              <a:spcAft>
+                <a:spcPts val="400"/>
+              </a:spcAft>
+              <a:buNone/>
+            </a:pPr>
+            <a:r>
+              <a:rPr lang="en-US" sz="1000" dirty="0">
+                <a:solidFill>
+                  <a:srgbClr val="1B1B1B"/>
+                </a:solidFill>
+              </a:rPr>
+              <a:t>[33] van de Water R, Schmidt HNA, Elbers PWG, et al. Yet Another ICU Benchmark: a flexible multi-center framework for clinical machine learning. ICLR 2024.</a:t>
+            </a:r>
+            <a:endParaRPr lang="en-US" sz="1000" dirty="0"/>
+          </a:p>
+          <a:p>
+            <a:pPr indent="0" marL="0">
+              <a:spcAft>
+                <a:spcPts val="400"/>
+              </a:spcAft>
+              <a:buNone/>
+            </a:pPr>
+            <a:r>
+              <a:rPr lang="en-US" sz="1000" dirty="0">
+                <a:solidFill>
+                  <a:srgbClr val="1B1B1B"/>
+                </a:solidFill>
+              </a:rPr>
+              <a:t>[34] Bennett N, Plecko D, Ukor IF, Meinshausen N, Buhlmann P. ricu: R's interface to intensive care data. GigaScience. 2023;12.</a:t>
+            </a:r>
+            <a:endParaRPr lang="en-US" sz="1000" dirty="0"/>
+          </a:p>
+          <a:p>
+            <a:pPr indent="0" marL="0">
+              <a:spcAft>
+                <a:spcPts val="400"/>
+              </a:spcAft>
+              <a:buNone/>
+            </a:pPr>
+            <a:r>
+              <a:rPr lang="en-US" sz="1000" dirty="0">
+                <a:solidFill>
+                  <a:srgbClr val="1B1B1B"/>
+                </a:solidFill>
+              </a:rPr>
+              <a:t>[35] Seymour CW, Liu VX, Iwashyna TJ, et al. Assessment of clinical criteria for sepsis (Sepsis-3). JAMA. 2016;315:762-774.</a:t>
+            </a:r>
+            <a:endParaRPr lang="en-US" sz="1000" dirty="0"/>
+          </a:p>
+          <a:p>
+            <a:pPr indent="0" marL="0">
+              <a:spcAft>
+                <a:spcPts val="400"/>
+              </a:spcAft>
+              <a:buNone/>
+            </a:pPr>
+            <a:r>
+              <a:rPr lang="en-US" sz="1000" dirty="0">
+                <a:solidFill>
+                  <a:srgbClr val="1B1B1B"/>
+                </a:solidFill>
+              </a:rPr>
+              <a:t>[36] Vaswani A, Shazeer N, Parmar N, et al. Attention is all you need. Advances in Neural Information Processing Systems (NeurIPS). 2017.</a:t>
+            </a:r>
+            <a:endParaRPr lang="en-US" sz="1000" dirty="0"/>
+          </a:p>
+        </p:txBody>
+      </p:sp>
+      <p:sp>
+        <p:nvSpPr>
+          <p:cNvPr id="5" name="reference list"/>
+          <p:cNvSpPr txBox="1"/>
+          <p:nvPr/>
+        </p:nvSpPr>
+        <p:spPr>
+          <a:xfrm>
+            <a:off x="6172200" y="1234440"/>
+            <a:ext cx="5440680" cy="5120640"/>
+          </a:xfrm>
+          <a:prstGeom prst="rect">
+            <a:avLst/>
+          </a:prstGeom>
+          <a:noFill/>
+          <a:ln/>
+        </p:spPr>
+        <p:txBody>
+          <a:bodyPr wrap="square" lIns="0" tIns="0" rIns="0" bIns="0" rtlCol="0" anchor="t"/>
+          <a:lstStyle/>
+          <a:p>
+            <a:pPr indent="0" marL="0">
+              <a:spcAft>
+                <a:spcPts val="400"/>
+              </a:spcAft>
+              <a:buNone/>
+            </a:pPr>
+            <a:r>
+              <a:rPr lang="en-US" sz="1000" dirty="0">
+                <a:solidFill>
+                  <a:srgbClr val="1B1B1B"/>
+                </a:solidFill>
+              </a:rPr>
+              <a:t>[37] Che Z, Purushotham S, Cho K, Sontag D, Liu Y. Recurrent neural networks for multivariate time series with missing values. Sci Rep. 2018;8:6085.</a:t>
+            </a:r>
+            <a:endParaRPr lang="en-US" sz="1000" dirty="0"/>
+          </a:p>
+          <a:p>
+            <a:pPr indent="0" marL="0">
+              <a:spcAft>
+                <a:spcPts val="400"/>
+              </a:spcAft>
+              <a:buNone/>
+            </a:pPr>
+            <a:r>
+              <a:rPr lang="en-US" sz="1000" dirty="0">
+                <a:solidFill>
+                  <a:srgbClr val="1B1B1B"/>
+                </a:solidFill>
+              </a:rPr>
+              <a:t>[38] Bai S, Kolter JZ, Koltun V. An empirical evaluation of generic convolutional and recurrent networks for sequence modeling. arXiv:1803.01271. 2018.</a:t>
+            </a:r>
+            <a:endParaRPr lang="en-US" sz="1000" dirty="0"/>
+          </a:p>
+          <a:p>
+            <a:pPr indent="0" marL="0">
+              <a:spcAft>
+                <a:spcPts val="400"/>
+              </a:spcAft>
+              <a:buNone/>
+            </a:pPr>
+            <a:r>
+              <a:rPr lang="en-US" sz="1000" dirty="0">
+                <a:solidFill>
+                  <a:srgbClr val="1B1B1B"/>
+                </a:solidFill>
+              </a:rPr>
+              <a:t>[39] Yeche H, Dresdner G, Locatello F, Huser M, Ratsch G. Neighborhood contrastive learning applied to online patient monitoring. International Conference on Machine Learning (ICML). 2021.</a:t>
+            </a:r>
+            <a:endParaRPr lang="en-US" sz="1000" dirty="0"/>
+          </a:p>
+          <a:p>
+            <a:pPr indent="0" marL="0">
+              <a:spcAft>
+                <a:spcPts val="400"/>
+              </a:spcAft>
+              <a:buNone/>
+            </a:pPr>
+            <a:r>
+              <a:rPr lang="en-US" sz="1000" dirty="0">
+                <a:solidFill>
+                  <a:srgbClr val="1B1B1B"/>
+                </a:solidFill>
+              </a:rPr>
+              <a:t>[40] Yeche H, Pace A, Ratsch G, Kuznetsova R. Temporal label smoothing for early event prediction. International Conference on Machine Learning (ICML). 2023.</a:t>
+            </a:r>
+            <a:endParaRPr lang="en-US" sz="1000" dirty="0"/>
+          </a:p>
+          <a:p>
+            <a:pPr indent="0" marL="0">
+              <a:spcAft>
+                <a:spcPts val="400"/>
+              </a:spcAft>
+              <a:buNone/>
+            </a:pPr>
+            <a:r>
+              <a:rPr lang="en-US" sz="1000" dirty="0">
+                <a:solidFill>
+                  <a:srgbClr val="1B1B1B"/>
+                </a:solidFill>
+              </a:rPr>
+              <a:t>[41] Elrggal ME, et al. Early sepsis warning on MIMIC-IV and eICU: preliminary development-split results, October 2026. Unpublished; manuscript in preparation.</a:t>
+            </a:r>
+            <a:endParaRPr lang="en-US" sz="1000" dirty="0"/>
+          </a:p>
+          <a:p>
+            <a:pPr indent="0" marL="0">
+              <a:spcAft>
+                <a:spcPts val="400"/>
+              </a:spcAft>
+              <a:buNone/>
+            </a:pPr>
+            <a:r>
+              <a:rPr lang="en-US" sz="1000" dirty="0">
+                <a:solidFill>
+                  <a:srgbClr val="1B1B1B"/>
+                </a:solidFill>
+              </a:rPr>
+              <a:t>[42] Elrggal ME, et al. Temporal patterns and predictors of sepsis onset in ICU patients: a retrospective cohort study using PhysioNet data. Submitted, Front Med, 2026.</a:t>
+            </a:r>
+            <a:endParaRPr lang="en-US" sz="1000" dirty="0"/>
+          </a:p>
+          <a:p>
+            <a:pPr indent="0" marL="0">
+              <a:spcAft>
+                <a:spcPts val="400"/>
+              </a:spcAft>
+              <a:buNone/>
+            </a:pPr>
+            <a:r>
+              <a:rPr lang="en-US" sz="1000" dirty="0">
+                <a:solidFill>
+                  <a:srgbClr val="1B1B1B"/>
+                </a:solidFill>
+              </a:rPr>
+              <a:t>[43] Elrggal ME, et al. Diagnostic applications of infrared thermography across infectious diseases: a systematic review with a subgroup meta-analysis. Submitted, JMIR, 2026.</a:t>
+            </a:r>
+            <a:endParaRPr lang="en-US" sz="1000" dirty="0"/>
+          </a:p>
+          <a:p>
+            <a:pPr indent="0" marL="0">
+              <a:spcAft>
+                <a:spcPts val="400"/>
+              </a:spcAft>
+              <a:buNone/>
+            </a:pPr>
+            <a:r>
+              <a:rPr lang="en-US" sz="1000" dirty="0">
+                <a:solidFill>
+                  <a:srgbClr val="1B1B1B"/>
+                </a:solidFill>
+              </a:rPr>
+              <a:t>[44] Royal College of Physicians. National Early Warning Score (NEWS) 2: standardising the assessment of acute-illness severity in the NHS. London: RCP; 2017.</a:t>
+            </a:r>
+            <a:endParaRPr lang="en-US" sz="1000" dirty="0"/>
+          </a:p>
+          <a:p>
+            <a:pPr indent="0" marL="0">
+              <a:spcAft>
+                <a:spcPts val="400"/>
+              </a:spcAft>
+              <a:buNone/>
+            </a:pPr>
+            <a:r>
+              <a:rPr lang="en-US" sz="1000" dirty="0">
+                <a:solidFill>
+                  <a:srgbClr val="1B1B1B"/>
+                </a:solidFill>
+              </a:rPr>
+              <a:t>[45] Kidney Disease: Improving Global Outcomes (KDIGO) AKI Work Group. KDIGO clinical practice guideline for acute kidney injury. Kidney Int Suppl. 2012;2:1-138.</a:t>
+            </a:r>
+            <a:endParaRPr lang="en-US" sz="1000" dirty="0"/>
+          </a:p>
+          <a:p>
+            <a:pPr indent="0" marL="0">
+              <a:spcAft>
+                <a:spcPts val="400"/>
+              </a:spcAft>
+              <a:buNone/>
+            </a:pPr>
+            <a:r>
+              <a:rPr lang="en-US" sz="1000" dirty="0">
+                <a:solidFill>
+                  <a:srgbClr val="1B1B1B"/>
+                </a:solidFill>
+              </a:rPr>
+              <a:t>[46] Friedman JH. Greedy function approximation: a gradient boosting machine. Ann Stat. 2001;29:1189-1232.</a:t>
+            </a:r>
+            <a:endParaRPr lang="en-US" sz="1000" dirty="0"/>
+          </a:p>
+          <a:p>
+            <a:pPr indent="0" marL="0">
+              <a:spcAft>
+                <a:spcPts val="400"/>
+              </a:spcAft>
+              <a:buNone/>
+            </a:pPr>
+            <a:r>
+              <a:rPr lang="en-US" sz="1000" dirty="0">
+                <a:solidFill>
+                  <a:srgbClr val="1B1B1B"/>
+                </a:solidFill>
+              </a:rPr>
+              <a:t>[47] Horn M, Moor M, Bock C, Rieck B, Borgwardt K. Set functions for time series. International Conference on Machine Learning (ICML). 2020.</a:t>
+            </a:r>
+            <a:endParaRPr lang="en-US" sz="1000" dirty="0"/>
+          </a:p>
+          <a:p>
+            <a:pPr indent="0" marL="0">
+              <a:spcAft>
+                <a:spcPts val="400"/>
+              </a:spcAft>
+              <a:buNone/>
+            </a:pPr>
+            <a:r>
+              <a:rPr lang="en-US" sz="1000" dirty="0">
+                <a:solidFill>
+                  <a:srgbClr val="1B1B1B"/>
+                </a:solidFill>
+              </a:rPr>
+              <a:t>[48] Gensheimer MF, Narasimhan B. A scalable discrete-time survival model for neural networks. PeerJ. 2019;7:e6257.</a:t>
+            </a:r>
+            <a:endParaRPr lang="en-US" sz="1000" dirty="0"/>
+          </a:p>
+        </p:txBody>
+      </p:sp>
+      <p:sp>
+        <p:nvSpPr>
+          <p:cNvPr id="25" name="Slide Number Placeholder 0"/>
+          <p:cNvSpPr>
+            <a:spLocks noGrp="1"/>
+          </p:cNvSpPr>
+          <p:nvPr>
+            <p:ph type="sldNum" sz="quarter" idx="4294967295"/>
+          </p:nvPr>
+        </p:nvSpPr>
+        <p:spPr>
+          <a:xfrm>
+            <a:off x="10911535" y="6437376"/>
+            <a:ext cx="731520" cy="274320"/>
+          </a:xfrm>
+          <a:prstGeom prst="rect">
+            <a:avLst/>
+          </a:prstGeom>
+          <a:extLst>
+            <a:ext uri="{C572A759-6A51-4108-AA02-DFA0A04FC94B}">
+              <ma14:wrappingTextBoxFlag xmlns:ma14="http://schemas.microsoft.com/office/mac/drawingml/2011/main" val="0"/>
+            </a:ext>
+          </a:extLst>
+        </p:spPr>
+        <p:txBody>
+          <a:bodyPr/>
+          <a:lstStyle>
+            <a:lvl1pPr>
+              <a:defRPr sz="1200">
+                <a:solidFill>
+                  <a:srgbClr val="C8102E"/>
+                </a:solidFill>
+              </a:defRPr>
+            </a:lvl1pPr>
+          </a:lstStyle>
+          <a:p>
+            <a:pPr algn="r"/>
+            <a:fld id="{F7021451-1387-4CA6-816F-3879F97B5CBC}" type="slidenum">
+              <a:rPr b="1" lang="en-US"/>
+              <a:t>27</a:t>
             </a:fld>
             <a:endParaRPr lang="en-US"/>
           </a:p>

--- a/dev/presentation/Elrggal_Mahmoud_SCEBE2026.pptx
+++ b/dev/presentation/Elrggal_Mahmoud_SCEBE2026.pptx
@@ -32,9 +32,10 @@
     <p:sldId id="280" r:id="rId26"/>
     <p:sldId id="281" r:id="rId27"/>
     <p:sldId id="282" r:id="rId28"/>
+    <p:sldId id="283" r:id="rId29"/>
   </p:sldIdLst>
   <p:notesMasterIdLst>
-    <p:notesMasterId r:id="rId29"/>
+    <p:notesMasterId r:id="rId30"/>
   </p:notesMasterIdLst>
   <p:sldSz cx="12192000" cy="6858000"/>
   <p:notesSz cx="6858000" cy="12192000"/>
@@ -133,7 +134,7 @@
   <p:extLst>
     <p:ext uri="{521415D9-36F7-43E2-AB2F-B90AF26B5E84}">
       <p14:sectionLst xmlns:p14="http://schemas.microsoft.com/office/powerpoint/2010/main">
-        <p14:section name="Context" id="{3e9c826c-a672-7f20-801e-983ec1b5a4fd}">
+        <p14:section name="Context" id="{65761b91-fd18-9147-f466-5be96fbf8367}">
           <p14:sldIdLst>
             <p14:sldId id="256"/>
             <p14:sldId id="257"/>
@@ -142,7 +143,7 @@
             <p14:sldId id="260"/>
           </p14:sldIdLst>
         </p14:section>
-        <p14:section name="Question and approach" id="{f8ac2c04-29d4-a52d-49ed-797650485893}">
+        <p14:section name="Question and approach" id="{885e5baf-3d98-0595-fae8-6c77fe57e6b1}">
           <p14:sldIdLst>
             <p14:sldId id="261"/>
             <p14:sldId id="262"/>
@@ -151,24 +152,24 @@
             <p14:sldId id="265"/>
           </p14:sldIdLst>
         </p14:section>
-        <p14:section name="Preliminary results" id="{b366a3b1-2409-a743-6b9a-d9cb749e3c89}">
+        <p14:section name="Preliminary results" id="{1efb7e9c-16d2-1a6e-97d2-fec677007659}">
           <p14:sldIdLst>
             <p14:sldId id="266"/>
             <p14:sldId id="267"/>
             <p14:sldId id="268"/>
           </p14:sldIdLst>
         </p14:section>
-        <p14:section name="Contribution and next steps" id="{b995f1ea-cfa9-4bf5-5e04-749c57113cf2}">
+        <p14:section name="Contribution and next steps" id="{d30e2750-ff7b-76a0-4a7b-bc9516c457fb}">
           <p14:sldIdLst>
             <p14:sldId id="269"/>
           </p14:sldIdLst>
         </p14:section>
-        <p14:section name="Input" id="{b2ac687c-848b-3909-87cb-02bc22bbda62}">
+        <p14:section name="Input" id="{7bb0c6c2-753b-10e6-dfa0-b98e1642e902}">
           <p14:sldIdLst>
             <p14:sldId id="270"/>
           </p14:sldIdLst>
         </p14:section>
-        <p14:section name="Backup" id="{b371ebf0-5a24-3e14-fdfb-904622e0f3bf}">
+        <p14:section name="Backup" id="{03065c7a-640d-3cb2-8513-87ba0efd6609}">
           <p14:sldIdLst>
             <p14:sldId id="271"/>
             <p14:sldId id="272"/>
@@ -182,6 +183,7 @@
             <p14:sldId id="280"/>
             <p14:sldId id="281"/>
             <p14:sldId id="282"/>
+            <p14:sldId id="283"/>
           </p14:sldIdLst>
         </p14:section>
       </p14:sectionLst>
@@ -3540,6 +3542,94 @@
             <a:fld id="{F7021451-1387-4CA6-816F-3879F97B5CBC}" type="slidenum">
               <a:rPr lang="en-US"/>
               <a:t>27</a:t>
+            </a:fld>
+            <a:endParaRPr lang="en-US"/>
+          </a:p>
+        </p:txBody>
+      </p:sp>
+    </p:spTree>
+    <p:extLst>
+      <p:ext uri="{BB962C8B-B14F-4D97-AF65-F5344CB8AC3E}">
+        <p14:creationId xmlns:p14="http://schemas.microsoft.com/office/powerpoint/2010/main" val="1024086991"/>
+      </p:ext>
+    </p:extLst>
+  </p:cSld>
+  <p:clrMapOvr>
+    <a:masterClrMapping/>
+  </p:clrMapOvr>
+</p:notes>
+</file>
+
+<file path=ppt/notesSlides/notesSlide28.xml><?xml version="1.0" encoding="utf-8"?>
+<p:notes xmlns:a="http://schemas.openxmlformats.org/drawingml/2006/main" xmlns:r="http://schemas.openxmlformats.org/officeDocument/2006/relationships" xmlns:p="http://schemas.openxmlformats.org/presentationml/2006/main">
+  <p:cSld>
+    <p:spTree>
+      <p:nvGrpSpPr>
+        <p:cNvPr id="1" name=""/>
+        <p:cNvGrpSpPr/>
+        <p:nvPr/>
+      </p:nvGrpSpPr>
+      <p:grpSpPr>
+        <a:xfrm>
+          <a:off x="0" y="0"/>
+          <a:ext cx="0" cy="0"/>
+          <a:chOff x="0" y="0"/>
+          <a:chExt cx="0" cy="0"/>
+        </a:xfrm>
+      </p:grpSpPr>
+      <p:sp>
+        <p:nvSpPr>
+          <p:cNvPr id="2" name="Slide Image Placeholder 1"/>
+          <p:cNvSpPr>
+            <a:spLocks noGrp="1" noRot="1" noChangeAspect="1"/>
+          </p:cNvSpPr>
+          <p:nvPr>
+            <p:ph type="sldImg"/>
+          </p:nvPr>
+        </p:nvSpPr>
+        <p:spPr/>
+      </p:sp>
+      <p:sp>
+        <p:nvSpPr>
+          <p:cNvPr id="3" name="Notes Placeholder 2"/>
+          <p:cNvSpPr>
+            <a:spLocks noGrp="1"/>
+          </p:cNvSpPr>
+          <p:nvPr>
+            <p:ph type="body" idx="1"/>
+          </p:nvPr>
+        </p:nvSpPr>
+        <p:spPr/>
+        <p:txBody>
+          <a:bodyPr/>
+          <a:lstStyle/>
+          <a:p>
+            <a:r>
+              <a:rPr lang="en-US" dirty="0"/>
+              <a:t/>
+            </a:r>
+            <a:endParaRPr lang="en-US" dirty="0"/>
+          </a:p>
+        </p:txBody>
+      </p:sp>
+      <p:sp>
+        <p:nvSpPr>
+          <p:cNvPr id="4" name="Slide Number Placeholder 3"/>
+          <p:cNvSpPr>
+            <a:spLocks noGrp="1"/>
+          </p:cNvSpPr>
+          <p:nvPr>
+            <p:ph type="sldNum" sz="quarter" idx="10"/>
+          </p:nvPr>
+        </p:nvSpPr>
+        <p:spPr/>
+        <p:txBody>
+          <a:bodyPr/>
+          <a:lstStyle/>
+          <a:p>
+            <a:fld id="{F7021451-1387-4CA6-816F-3879F97B5CBC}" type="slidenum">
+              <a:rPr lang="en-US"/>
+              <a:t>28</a:t>
             </a:fld>
             <a:endParaRPr lang="en-US"/>
           </a:p>
@@ -16456,2676 +16546,37 @@
                 <a:ea typeface="Arial" pitchFamily="34" charset="-122"/>
                 <a:cs typeface="Arial" pitchFamily="34" charset="-120"/>
               </a:rPr>
-              <a:t>Every model compared (1 of 2): baselines, the winner's method and sequence models</a:t>
+              <a:t>How the models evolved: each stage was triggered by a finding from the one before</a:t>
             </a:r>
             <a:endParaRPr lang="en-US" sz="2400" dirty="0"/>
           </a:p>
         </p:txBody>
       </p:sp>
-      <p:graphicFrame>
-        <p:nvGraphicFramePr>
-          <p:cNvPr id="21" name="models table"/>
-          <p:cNvGraphicFramePr>
-            <a:graphicFrameLocks noGrp="1"/>
-          </p:cNvGraphicFramePr>
-          <p:nvPr>
-            <p:extLst>
-              <p:ext uri="{D42A27DB-BD31-4B8C-83A1-F6EECF244321}">
-                <p14:modId xmlns:p14="http://schemas.microsoft.com/office/powerpoint/2010/main" val="1579011935"/>
-              </p:ext>
-            </p:extLst>
-          </p:nvPr>
-        </p:nvGraphicFramePr>
-        <p:xfrm>
-          <a:off x="548640" y="1417320"/>
-          <a:ext cx="11094415" cy="914400"/>
-        </p:xfrm>
-        <a:graphic>
-          <a:graphicData uri="http://schemas.openxmlformats.org/drawingml/2006/table">
-            <a:tbl>
-              <a:tblPr/>
-              <a:tblGrid>
-                <a:gridCol w="2331720"/>
-                <a:gridCol w="4069080"/>
-                <a:gridCol w="3776472"/>
-                <a:gridCol w="914400"/>
-              </a:tblGrid>
-              <a:tr h="0">
-                <a:tc>
-                  <a:txBody>
-                    <a:bodyPr/>
-                    <a:lstStyle/>
-                    <a:p>
-                      <a:pPr indent="0" marL="0">
-                        <a:buNone/>
-                      </a:pPr>
-                      <a:r>
-                        <a:rPr lang="en-US" sz="1200" b="1" dirty="0">
-                          <a:solidFill>
-                            <a:srgbClr val="FFFFFF"/>
-                          </a:solidFill>
-                          <a:latin typeface="Arial" pitchFamily="34" charset="0"/>
-                          <a:ea typeface="Arial" pitchFamily="34" charset="-122"/>
-                          <a:cs typeface="Arial" pitchFamily="34" charset="-120"/>
-                        </a:rPr>
-                        <a:t>Model</a:t>
-                      </a:r>
-                      <a:endParaRPr lang="en-US" sz="1200" dirty="0">
-                        <a:latin typeface="Arial" charset="0"/>
-                        <a:ea typeface="Arial" charset="0"/>
-                        <a:cs typeface="Arial" charset="0"/>
-                      </a:endParaRPr>
-                    </a:p>
-                  </a:txBody>
-                  <a:tcPr marL="45720" marR="45720" marT="45720" marB="45720" anchor="ctr">
-                    <a:lnL w="9525" cap="flat" cmpd="sng" algn="ctr">
-                      <a:solidFill>
-                        <a:srgbClr val="BDBDBD"/>
-                      </a:solidFill>
-                      <a:prstDash val="solid"/>
-                      <a:round/>
-                      <a:headEnd type="none" w="med" len="med"/>
-                      <a:tailEnd type="none" w="med" len="med"/>
-                    </a:lnL>
-                    <a:lnR w="9525" cap="flat" cmpd="sng" algn="ctr">
-                      <a:solidFill>
-                        <a:srgbClr val="BDBDBD"/>
-                      </a:solidFill>
-                      <a:prstDash val="solid"/>
-                      <a:round/>
-                      <a:headEnd type="none" w="med" len="med"/>
-                      <a:tailEnd type="none" w="med" len="med"/>
-                    </a:lnR>
-                    <a:lnT w="9525" cap="flat" cmpd="sng" algn="ctr">
-                      <a:solidFill>
-                        <a:srgbClr val="BDBDBD"/>
-                      </a:solidFill>
-                      <a:prstDash val="solid"/>
-                      <a:round/>
-                      <a:headEnd type="none" w="med" len="med"/>
-                      <a:tailEnd type="none" w="med" len="med"/>
-                    </a:lnT>
-                    <a:lnB w="9525" cap="flat" cmpd="sng" algn="ctr">
-                      <a:solidFill>
-                        <a:srgbClr val="BDBDBD"/>
-                      </a:solidFill>
-                      <a:prstDash val="solid"/>
-                      <a:round/>
-                      <a:headEnd type="none" w="med" len="med"/>
-                      <a:tailEnd type="none" w="med" len="med"/>
-                    </a:lnB>
-                    <a:solidFill>
-                      <a:srgbClr val="1B1B1B"/>
-                    </a:solidFill>
-                  </a:tcPr>
-                </a:tc>
-                <a:tc>
-                  <a:txBody>
-                    <a:bodyPr/>
-                    <a:lstStyle/>
-                    <a:p>
-                      <a:pPr indent="0" marL="0">
-                        <a:buNone/>
-                      </a:pPr>
-                      <a:r>
-                        <a:rPr lang="en-US" sz="1200" b="1" dirty="0">
-                          <a:solidFill>
-                            <a:srgbClr val="FFFFFF"/>
-                          </a:solidFill>
-                          <a:latin typeface="Arial" pitchFamily="34" charset="0"/>
-                          <a:ea typeface="Arial" pitchFamily="34" charset="-122"/>
-                          <a:cs typeface="Arial" pitchFamily="34" charset="-120"/>
-                        </a:rPr>
-                        <a:t>Core idea</a:t>
-                      </a:r>
-                      <a:endParaRPr lang="en-US" sz="1200" dirty="0">
-                        <a:latin typeface="Arial" charset="0"/>
-                        <a:ea typeface="Arial" charset="0"/>
-                        <a:cs typeface="Arial" charset="0"/>
-                      </a:endParaRPr>
-                    </a:p>
-                  </a:txBody>
-                  <a:tcPr marL="45720" marR="45720" marT="45720" marB="45720" anchor="ctr">
-                    <a:lnL w="9525" cap="flat" cmpd="sng" algn="ctr">
-                      <a:solidFill>
-                        <a:srgbClr val="BDBDBD"/>
-                      </a:solidFill>
-                      <a:prstDash val="solid"/>
-                      <a:round/>
-                      <a:headEnd type="none" w="med" len="med"/>
-                      <a:tailEnd type="none" w="med" len="med"/>
-                    </a:lnL>
-                    <a:lnR w="9525" cap="flat" cmpd="sng" algn="ctr">
-                      <a:solidFill>
-                        <a:srgbClr val="BDBDBD"/>
-                      </a:solidFill>
-                      <a:prstDash val="solid"/>
-                      <a:round/>
-                      <a:headEnd type="none" w="med" len="med"/>
-                      <a:tailEnd type="none" w="med" len="med"/>
-                    </a:lnR>
-                    <a:lnT w="9525" cap="flat" cmpd="sng" algn="ctr">
-                      <a:solidFill>
-                        <a:srgbClr val="BDBDBD"/>
-                      </a:solidFill>
-                      <a:prstDash val="solid"/>
-                      <a:round/>
-                      <a:headEnd type="none" w="med" len="med"/>
-                      <a:tailEnd type="none" w="med" len="med"/>
-                    </a:lnT>
-                    <a:lnB w="9525" cap="flat" cmpd="sng" algn="ctr">
-                      <a:solidFill>
-                        <a:srgbClr val="BDBDBD"/>
-                      </a:solidFill>
-                      <a:prstDash val="solid"/>
-                      <a:round/>
-                      <a:headEnd type="none" w="med" len="med"/>
-                      <a:tailEnd type="none" w="med" len="med"/>
-                    </a:lnB>
-                    <a:solidFill>
-                      <a:srgbClr val="1B1B1B"/>
-                    </a:solidFill>
-                  </a:tcPr>
-                </a:tc>
-                <a:tc>
-                  <a:txBody>
-                    <a:bodyPr/>
-                    <a:lstStyle/>
-                    <a:p>
-                      <a:pPr indent="0" marL="0">
-                        <a:buNone/>
-                      </a:pPr>
-                      <a:r>
-                        <a:rPr lang="en-US" sz="1200" b="1" dirty="0">
-                          <a:solidFill>
-                            <a:srgbClr val="FFFFFF"/>
-                          </a:solidFill>
-                          <a:latin typeface="Arial" pitchFamily="34" charset="0"/>
-                          <a:ea typeface="Arial" pitchFamily="34" charset="-122"/>
-                          <a:cs typeface="Arial" pitchFamily="34" charset="-120"/>
-                        </a:rPr>
-                        <a:t>How it differs</a:t>
-                      </a:r>
-                      <a:endParaRPr lang="en-US" sz="1200" dirty="0">
-                        <a:latin typeface="Arial" charset="0"/>
-                        <a:ea typeface="Arial" charset="0"/>
-                        <a:cs typeface="Arial" charset="0"/>
-                      </a:endParaRPr>
-                    </a:p>
-                  </a:txBody>
-                  <a:tcPr marL="45720" marR="45720" marT="45720" marB="45720" anchor="ctr">
-                    <a:lnL w="9525" cap="flat" cmpd="sng" algn="ctr">
-                      <a:solidFill>
-                        <a:srgbClr val="BDBDBD"/>
-                      </a:solidFill>
-                      <a:prstDash val="solid"/>
-                      <a:round/>
-                      <a:headEnd type="none" w="med" len="med"/>
-                      <a:tailEnd type="none" w="med" len="med"/>
-                    </a:lnL>
-                    <a:lnR w="9525" cap="flat" cmpd="sng" algn="ctr">
-                      <a:solidFill>
-                        <a:srgbClr val="BDBDBD"/>
-                      </a:solidFill>
-                      <a:prstDash val="solid"/>
-                      <a:round/>
-                      <a:headEnd type="none" w="med" len="med"/>
-                      <a:tailEnd type="none" w="med" len="med"/>
-                    </a:lnR>
-                    <a:lnT w="9525" cap="flat" cmpd="sng" algn="ctr">
-                      <a:solidFill>
-                        <a:srgbClr val="BDBDBD"/>
-                      </a:solidFill>
-                      <a:prstDash val="solid"/>
-                      <a:round/>
-                      <a:headEnd type="none" w="med" len="med"/>
-                      <a:tailEnd type="none" w="med" len="med"/>
-                    </a:lnT>
-                    <a:lnB w="9525" cap="flat" cmpd="sng" algn="ctr">
-                      <a:solidFill>
-                        <a:srgbClr val="BDBDBD"/>
-                      </a:solidFill>
-                      <a:prstDash val="solid"/>
-                      <a:round/>
-                      <a:headEnd type="none" w="med" len="med"/>
-                      <a:tailEnd type="none" w="med" len="med"/>
-                    </a:lnB>
-                    <a:solidFill>
-                      <a:srgbClr val="1B1B1B"/>
-                    </a:solidFill>
-                  </a:tcPr>
-                </a:tc>
-                <a:tc>
-                  <a:txBody>
-                    <a:bodyPr/>
-                    <a:lstStyle/>
-                    <a:p>
-                      <a:pPr indent="0" marL="0">
-                        <a:buNone/>
-                      </a:pPr>
-                      <a:r>
-                        <a:rPr lang="en-US" sz="1200" b="1" dirty="0">
-                          <a:solidFill>
-                            <a:srgbClr val="FFFFFF"/>
-                          </a:solidFill>
-                          <a:latin typeface="Arial" pitchFamily="34" charset="0"/>
-                          <a:ea typeface="Arial" pitchFamily="34" charset="-122"/>
-                          <a:cs typeface="Arial" pitchFamily="34" charset="-120"/>
-                        </a:rPr>
-                        <a:t>Utility</a:t>
-                      </a:r>
-                      <a:endParaRPr lang="en-US" sz="1200" dirty="0">
-                        <a:latin typeface="Arial" charset="0"/>
-                        <a:ea typeface="Arial" charset="0"/>
-                        <a:cs typeface="Arial" charset="0"/>
-                      </a:endParaRPr>
-                    </a:p>
-                  </a:txBody>
-                  <a:tcPr marL="45720" marR="45720" marT="45720" marB="45720" anchor="ctr">
-                    <a:lnL w="9525" cap="flat" cmpd="sng" algn="ctr">
-                      <a:solidFill>
-                        <a:srgbClr val="BDBDBD"/>
-                      </a:solidFill>
-                      <a:prstDash val="solid"/>
-                      <a:round/>
-                      <a:headEnd type="none" w="med" len="med"/>
-                      <a:tailEnd type="none" w="med" len="med"/>
-                    </a:lnL>
-                    <a:lnR w="9525" cap="flat" cmpd="sng" algn="ctr">
-                      <a:solidFill>
-                        <a:srgbClr val="BDBDBD"/>
-                      </a:solidFill>
-                      <a:prstDash val="solid"/>
-                      <a:round/>
-                      <a:headEnd type="none" w="med" len="med"/>
-                      <a:tailEnd type="none" w="med" len="med"/>
-                    </a:lnR>
-                    <a:lnT w="9525" cap="flat" cmpd="sng" algn="ctr">
-                      <a:solidFill>
-                        <a:srgbClr val="BDBDBD"/>
-                      </a:solidFill>
-                      <a:prstDash val="solid"/>
-                      <a:round/>
-                      <a:headEnd type="none" w="med" len="med"/>
-                      <a:tailEnd type="none" w="med" len="med"/>
-                    </a:lnT>
-                    <a:lnB w="9525" cap="flat" cmpd="sng" algn="ctr">
-                      <a:solidFill>
-                        <a:srgbClr val="BDBDBD"/>
-                      </a:solidFill>
-                      <a:prstDash val="solid"/>
-                      <a:round/>
-                      <a:headEnd type="none" w="med" len="med"/>
-                      <a:tailEnd type="none" w="med" len="med"/>
-                    </a:lnB>
-                    <a:solidFill>
-                      <a:srgbClr val="1B1B1B"/>
-                    </a:solidFill>
-                  </a:tcPr>
-                </a:tc>
-              </a:tr>
-              <a:tr h="0">
-                <a:tc>
-                  <a:txBody>
-                    <a:bodyPr/>
-                    <a:lstStyle/>
-                    <a:p>
-                      <a:pPr indent="0" marL="0">
-                        <a:buNone/>
-                      </a:pPr>
-                      <a:r>
-                        <a:rPr lang="en-US" sz="1250" b="1" dirty="0">
-                          <a:solidFill>
-                            <a:srgbClr val="1B1B1B"/>
-                          </a:solidFill>
-                          <a:latin typeface="Arial" pitchFamily="34" charset="0"/>
-                          <a:ea typeface="Arial" pitchFamily="34" charset="-122"/>
-                          <a:cs typeface="Arial" pitchFamily="34" charset="-120"/>
-                        </a:rPr>
-                        <a:t>Logistic regression</a:t>
-                      </a:r>
-                      <a:endParaRPr lang="en-US" sz="1250" dirty="0">
-                        <a:latin typeface="Arial" charset="0"/>
-                        <a:ea typeface="Arial" charset="0"/>
-                        <a:cs typeface="Arial" charset="0"/>
-                      </a:endParaRPr>
-                    </a:p>
-                  </a:txBody>
-                  <a:tcPr marL="45720" marR="45720" marT="45720" marB="45720" anchor="ctr">
-                    <a:lnL w="9525" cap="flat" cmpd="sng" algn="ctr">
-                      <a:solidFill>
-                        <a:srgbClr val="BDBDBD"/>
-                      </a:solidFill>
-                      <a:prstDash val="solid"/>
-                      <a:round/>
-                      <a:headEnd type="none" w="med" len="med"/>
-                      <a:tailEnd type="none" w="med" len="med"/>
-                    </a:lnL>
-                    <a:lnR w="9525" cap="flat" cmpd="sng" algn="ctr">
-                      <a:solidFill>
-                        <a:srgbClr val="BDBDBD"/>
-                      </a:solidFill>
-                      <a:prstDash val="solid"/>
-                      <a:round/>
-                      <a:headEnd type="none" w="med" len="med"/>
-                      <a:tailEnd type="none" w="med" len="med"/>
-                    </a:lnR>
-                    <a:lnT w="9525" cap="flat" cmpd="sng" algn="ctr">
-                      <a:solidFill>
-                        <a:srgbClr val="BDBDBD"/>
-                      </a:solidFill>
-                      <a:prstDash val="solid"/>
-                      <a:round/>
-                      <a:headEnd type="none" w="med" len="med"/>
-                      <a:tailEnd type="none" w="med" len="med"/>
-                    </a:lnT>
-                    <a:lnB w="9525" cap="flat" cmpd="sng" algn="ctr">
-                      <a:solidFill>
-                        <a:srgbClr val="BDBDBD"/>
-                      </a:solidFill>
-                      <a:prstDash val="solid"/>
-                      <a:round/>
-                      <a:headEnd type="none" w="med" len="med"/>
-                      <a:tailEnd type="none" w="med" len="med"/>
-                    </a:lnB>
-                  </a:tcPr>
-                </a:tc>
-                <a:tc>
-                  <a:txBody>
-                    <a:bodyPr/>
-                    <a:lstStyle/>
-                    <a:p>
-                      <a:pPr indent="0" marL="0">
-                        <a:buNone/>
-                      </a:pPr>
-                      <a:r>
-                        <a:rPr lang="en-US" sz="1250" dirty="0">
-                          <a:solidFill>
-                            <a:srgbClr val="1B1B1B"/>
-                          </a:solidFill>
-                          <a:latin typeface="Arial" pitchFamily="34" charset="0"/>
-                          <a:ea typeface="Arial" pitchFamily="34" charset="-122"/>
-                          <a:cs typeface="Arial" pitchFamily="34" charset="-120"/>
-                        </a:rPr>
-                        <a:t>One weighted sum of the current hour's predictors</a:t>
-                      </a:r>
-                      <a:endParaRPr lang="en-US" sz="1250" dirty="0">
-                        <a:latin typeface="Arial" charset="0"/>
-                        <a:ea typeface="Arial" charset="0"/>
-                        <a:cs typeface="Arial" charset="0"/>
-                      </a:endParaRPr>
-                    </a:p>
-                  </a:txBody>
-                  <a:tcPr marL="45720" marR="45720" marT="45720" marB="45720" anchor="ctr">
-                    <a:lnL w="9525" cap="flat" cmpd="sng" algn="ctr">
-                      <a:solidFill>
-                        <a:srgbClr val="BDBDBD"/>
-                      </a:solidFill>
-                      <a:prstDash val="solid"/>
-                      <a:round/>
-                      <a:headEnd type="none" w="med" len="med"/>
-                      <a:tailEnd type="none" w="med" len="med"/>
-                    </a:lnL>
-                    <a:lnR w="9525" cap="flat" cmpd="sng" algn="ctr">
-                      <a:solidFill>
-                        <a:srgbClr val="BDBDBD"/>
-                      </a:solidFill>
-                      <a:prstDash val="solid"/>
-                      <a:round/>
-                      <a:headEnd type="none" w="med" len="med"/>
-                      <a:tailEnd type="none" w="med" len="med"/>
-                    </a:lnR>
-                    <a:lnT w="9525" cap="flat" cmpd="sng" algn="ctr">
-                      <a:solidFill>
-                        <a:srgbClr val="BDBDBD"/>
-                      </a:solidFill>
-                      <a:prstDash val="solid"/>
-                      <a:round/>
-                      <a:headEnd type="none" w="med" len="med"/>
-                      <a:tailEnd type="none" w="med" len="med"/>
-                    </a:lnT>
-                    <a:lnB w="9525" cap="flat" cmpd="sng" algn="ctr">
-                      <a:solidFill>
-                        <a:srgbClr val="BDBDBD"/>
-                      </a:solidFill>
-                      <a:prstDash val="solid"/>
-                      <a:round/>
-                      <a:headEnd type="none" w="med" len="med"/>
-                      <a:tailEnd type="none" w="med" len="med"/>
-                    </a:lnB>
-                  </a:tcPr>
-                </a:tc>
-                <a:tc>
-                  <a:txBody>
-                    <a:bodyPr/>
-                    <a:lstStyle/>
-                    <a:p>
-                      <a:pPr indent="0" marL="0">
-                        <a:buNone/>
-                      </a:pPr>
-                      <a:r>
-                        <a:rPr lang="en-US" sz="1250" dirty="0">
-                          <a:solidFill>
-                            <a:srgbClr val="1B1B1B"/>
-                          </a:solidFill>
-                          <a:latin typeface="Arial" pitchFamily="34" charset="0"/>
-                          <a:ea typeface="Arial" pitchFamily="34" charset="-122"/>
-                          <a:cs typeface="Arial" pitchFamily="34" charset="-120"/>
-                        </a:rPr>
-                        <a:t>No time modelling: the floor every model must beat</a:t>
-                      </a:r>
-                      <a:endParaRPr lang="en-US" sz="1250" dirty="0">
-                        <a:latin typeface="Arial" charset="0"/>
-                        <a:ea typeface="Arial" charset="0"/>
-                        <a:cs typeface="Arial" charset="0"/>
-                      </a:endParaRPr>
-                    </a:p>
-                  </a:txBody>
-                  <a:tcPr marL="45720" marR="45720" marT="45720" marB="45720" anchor="ctr">
-                    <a:lnL w="9525" cap="flat" cmpd="sng" algn="ctr">
-                      <a:solidFill>
-                        <a:srgbClr val="BDBDBD"/>
-                      </a:solidFill>
-                      <a:prstDash val="solid"/>
-                      <a:round/>
-                      <a:headEnd type="none" w="med" len="med"/>
-                      <a:tailEnd type="none" w="med" len="med"/>
-                    </a:lnL>
-                    <a:lnR w="9525" cap="flat" cmpd="sng" algn="ctr">
-                      <a:solidFill>
-                        <a:srgbClr val="BDBDBD"/>
-                      </a:solidFill>
-                      <a:prstDash val="solid"/>
-                      <a:round/>
-                      <a:headEnd type="none" w="med" len="med"/>
-                      <a:tailEnd type="none" w="med" len="med"/>
-                    </a:lnR>
-                    <a:lnT w="9525" cap="flat" cmpd="sng" algn="ctr">
-                      <a:solidFill>
-                        <a:srgbClr val="BDBDBD"/>
-                      </a:solidFill>
-                      <a:prstDash val="solid"/>
-                      <a:round/>
-                      <a:headEnd type="none" w="med" len="med"/>
-                      <a:tailEnd type="none" w="med" len="med"/>
-                    </a:lnT>
-                    <a:lnB w="9525" cap="flat" cmpd="sng" algn="ctr">
-                      <a:solidFill>
-                        <a:srgbClr val="BDBDBD"/>
-                      </a:solidFill>
-                      <a:prstDash val="solid"/>
-                      <a:round/>
-                      <a:headEnd type="none" w="med" len="med"/>
-                      <a:tailEnd type="none" w="med" len="med"/>
-                    </a:lnB>
-                  </a:tcPr>
-                </a:tc>
-                <a:tc>
-                  <a:txBody>
-                    <a:bodyPr/>
-                    <a:lstStyle/>
-                    <a:p>
-                      <a:pPr algn="ctr" indent="0" marL="0">
-                        <a:buNone/>
-                      </a:pPr>
-                      <a:r>
-                        <a:rPr lang="en-US" sz="1250" b="1" dirty="0">
-                          <a:solidFill>
-                            <a:srgbClr val="C8102E"/>
-                          </a:solidFill>
-                          <a:latin typeface="Arial" pitchFamily="34" charset="0"/>
-                          <a:ea typeface="Arial" pitchFamily="34" charset="-122"/>
-                          <a:cs typeface="Arial" pitchFamily="34" charset="-120"/>
-                        </a:rPr>
-                        <a:t>0.08</a:t>
-                      </a:r>
-                      <a:endParaRPr lang="en-US" sz="1250" dirty="0">
-                        <a:latin typeface="Arial" charset="0"/>
-                        <a:ea typeface="Arial" charset="0"/>
-                        <a:cs typeface="Arial" charset="0"/>
-                      </a:endParaRPr>
-                    </a:p>
-                  </a:txBody>
-                  <a:tcPr marL="45720" marR="45720" marT="45720" marB="45720" anchor="ctr">
-                    <a:lnL w="9525" cap="flat" cmpd="sng" algn="ctr">
-                      <a:solidFill>
-                        <a:srgbClr val="BDBDBD"/>
-                      </a:solidFill>
-                      <a:prstDash val="solid"/>
-                      <a:round/>
-                      <a:headEnd type="none" w="med" len="med"/>
-                      <a:tailEnd type="none" w="med" len="med"/>
-                    </a:lnL>
-                    <a:lnR w="9525" cap="flat" cmpd="sng" algn="ctr">
-                      <a:solidFill>
-                        <a:srgbClr val="BDBDBD"/>
-                      </a:solidFill>
-                      <a:prstDash val="solid"/>
-                      <a:round/>
-                      <a:headEnd type="none" w="med" len="med"/>
-                      <a:tailEnd type="none" w="med" len="med"/>
-                    </a:lnR>
-                    <a:lnT w="9525" cap="flat" cmpd="sng" algn="ctr">
-                      <a:solidFill>
-                        <a:srgbClr val="BDBDBD"/>
-                      </a:solidFill>
-                      <a:prstDash val="solid"/>
-                      <a:round/>
-                      <a:headEnd type="none" w="med" len="med"/>
-                      <a:tailEnd type="none" w="med" len="med"/>
-                    </a:lnT>
-                    <a:lnB w="9525" cap="flat" cmpd="sng" algn="ctr">
-                      <a:solidFill>
-                        <a:srgbClr val="BDBDBD"/>
-                      </a:solidFill>
-                      <a:prstDash val="solid"/>
-                      <a:round/>
-                      <a:headEnd type="none" w="med" len="med"/>
-                      <a:tailEnd type="none" w="med" len="med"/>
-                    </a:lnB>
-                  </a:tcPr>
-                </a:tc>
-              </a:tr>
-              <a:tr h="0">
-                <a:tc>
-                  <a:txBody>
-                    <a:bodyPr/>
-                    <a:lstStyle/>
-                    <a:p>
-                      <a:pPr indent="0" marL="0">
-                        <a:buNone/>
-                      </a:pPr>
-                      <a:r>
-                        <a:rPr lang="en-US" sz="1250" b="1" dirty="0">
-                          <a:solidFill>
-                            <a:srgbClr val="1B1B1B"/>
-                          </a:solidFill>
-                          <a:latin typeface="Arial" pitchFamily="34" charset="0"/>
-                          <a:ea typeface="Arial" pitchFamily="34" charset="-122"/>
-                          <a:cs typeface="Arial" pitchFamily="34" charset="-120"/>
-                        </a:rPr>
-                        <a:t>Boosted trees [46]</a:t>
-                      </a:r>
-                      <a:endParaRPr lang="en-US" sz="1250" dirty="0">
-                        <a:latin typeface="Arial" charset="0"/>
-                        <a:ea typeface="Arial" charset="0"/>
-                        <a:cs typeface="Arial" charset="0"/>
-                      </a:endParaRPr>
-                    </a:p>
-                  </a:txBody>
-                  <a:tcPr marL="45720" marR="45720" marT="45720" marB="45720" anchor="ctr">
-                    <a:lnL w="9525" cap="flat" cmpd="sng" algn="ctr">
-                      <a:solidFill>
-                        <a:srgbClr val="BDBDBD"/>
-                      </a:solidFill>
-                      <a:prstDash val="solid"/>
-                      <a:round/>
-                      <a:headEnd type="none" w="med" len="med"/>
-                      <a:tailEnd type="none" w="med" len="med"/>
-                    </a:lnL>
-                    <a:lnR w="9525" cap="flat" cmpd="sng" algn="ctr">
-                      <a:solidFill>
-                        <a:srgbClr val="BDBDBD"/>
-                      </a:solidFill>
-                      <a:prstDash val="solid"/>
-                      <a:round/>
-                      <a:headEnd type="none" w="med" len="med"/>
-                      <a:tailEnd type="none" w="med" len="med"/>
-                    </a:lnR>
-                    <a:lnT w="9525" cap="flat" cmpd="sng" algn="ctr">
-                      <a:solidFill>
-                        <a:srgbClr val="BDBDBD"/>
-                      </a:solidFill>
-                      <a:prstDash val="solid"/>
-                      <a:round/>
-                      <a:headEnd type="none" w="med" len="med"/>
-                      <a:tailEnd type="none" w="med" len="med"/>
-                    </a:lnT>
-                    <a:lnB w="9525" cap="flat" cmpd="sng" algn="ctr">
-                      <a:solidFill>
-                        <a:srgbClr val="BDBDBD"/>
-                      </a:solidFill>
-                      <a:prstDash val="solid"/>
-                      <a:round/>
-                      <a:headEnd type="none" w="med" len="med"/>
-                      <a:tailEnd type="none" w="med" len="med"/>
-                    </a:lnB>
-                  </a:tcPr>
-                </a:tc>
-                <a:tc>
-                  <a:txBody>
-                    <a:bodyPr/>
-                    <a:lstStyle/>
-                    <a:p>
-                      <a:pPr indent="0" marL="0">
-                        <a:buNone/>
-                      </a:pPr>
-                      <a:r>
-                        <a:rPr lang="en-US" sz="1250" dirty="0">
-                          <a:solidFill>
-                            <a:srgbClr val="1B1B1B"/>
-                          </a:solidFill>
-                          <a:latin typeface="Arial" pitchFamily="34" charset="0"/>
-                          <a:ea typeface="Arial" pitchFamily="34" charset="-122"/>
-                          <a:cs typeface="Arial" pitchFamily="34" charset="-120"/>
-                        </a:rPr>
-                        <a:t>Many small decision trees, each correcting the last</a:t>
-                      </a:r>
-                      <a:endParaRPr lang="en-US" sz="1250" dirty="0">
-                        <a:latin typeface="Arial" charset="0"/>
-                        <a:ea typeface="Arial" charset="0"/>
-                        <a:cs typeface="Arial" charset="0"/>
-                      </a:endParaRPr>
-                    </a:p>
-                  </a:txBody>
-                  <a:tcPr marL="45720" marR="45720" marT="45720" marB="45720" anchor="ctr">
-                    <a:lnL w="9525" cap="flat" cmpd="sng" algn="ctr">
-                      <a:solidFill>
-                        <a:srgbClr val="BDBDBD"/>
-                      </a:solidFill>
-                      <a:prstDash val="solid"/>
-                      <a:round/>
-                      <a:headEnd type="none" w="med" len="med"/>
-                      <a:tailEnd type="none" w="med" len="med"/>
-                    </a:lnL>
-                    <a:lnR w="9525" cap="flat" cmpd="sng" algn="ctr">
-                      <a:solidFill>
-                        <a:srgbClr val="BDBDBD"/>
-                      </a:solidFill>
-                      <a:prstDash val="solid"/>
-                      <a:round/>
-                      <a:headEnd type="none" w="med" len="med"/>
-                      <a:tailEnd type="none" w="med" len="med"/>
-                    </a:lnR>
-                    <a:lnT w="9525" cap="flat" cmpd="sng" algn="ctr">
-                      <a:solidFill>
-                        <a:srgbClr val="BDBDBD"/>
-                      </a:solidFill>
-                      <a:prstDash val="solid"/>
-                      <a:round/>
-                      <a:headEnd type="none" w="med" len="med"/>
-                      <a:tailEnd type="none" w="med" len="med"/>
-                    </a:lnT>
-                    <a:lnB w="9525" cap="flat" cmpd="sng" algn="ctr">
-                      <a:solidFill>
-                        <a:srgbClr val="BDBDBD"/>
-                      </a:solidFill>
-                      <a:prstDash val="solid"/>
-                      <a:round/>
-                      <a:headEnd type="none" w="med" len="med"/>
-                      <a:tailEnd type="none" w="med" len="med"/>
-                    </a:lnB>
-                  </a:tcPr>
-                </a:tc>
-                <a:tc>
-                  <a:txBody>
-                    <a:bodyPr/>
-                    <a:lstStyle/>
-                    <a:p>
-                      <a:pPr indent="0" marL="0">
-                        <a:buNone/>
-                      </a:pPr>
-                      <a:r>
-                        <a:rPr lang="en-US" sz="1250" dirty="0">
-                          <a:solidFill>
-                            <a:srgbClr val="1B1B1B"/>
-                          </a:solidFill>
-                          <a:latin typeface="Arial" pitchFamily="34" charset="0"/>
-                          <a:ea typeface="Arial" pitchFamily="34" charset="-122"/>
-                          <a:cs typeface="Arial" pitchFamily="34" charset="-120"/>
-                        </a:rPr>
-                        <a:t>Non-linear thresholds, but sees one hour at a time</a:t>
-                      </a:r>
-                      <a:endParaRPr lang="en-US" sz="1250" dirty="0">
-                        <a:latin typeface="Arial" charset="0"/>
-                        <a:ea typeface="Arial" charset="0"/>
-                        <a:cs typeface="Arial" charset="0"/>
-                      </a:endParaRPr>
-                    </a:p>
-                  </a:txBody>
-                  <a:tcPr marL="45720" marR="45720" marT="45720" marB="45720" anchor="ctr">
-                    <a:lnL w="9525" cap="flat" cmpd="sng" algn="ctr">
-                      <a:solidFill>
-                        <a:srgbClr val="BDBDBD"/>
-                      </a:solidFill>
-                      <a:prstDash val="solid"/>
-                      <a:round/>
-                      <a:headEnd type="none" w="med" len="med"/>
-                      <a:tailEnd type="none" w="med" len="med"/>
-                    </a:lnL>
-                    <a:lnR w="9525" cap="flat" cmpd="sng" algn="ctr">
-                      <a:solidFill>
-                        <a:srgbClr val="BDBDBD"/>
-                      </a:solidFill>
-                      <a:prstDash val="solid"/>
-                      <a:round/>
-                      <a:headEnd type="none" w="med" len="med"/>
-                      <a:tailEnd type="none" w="med" len="med"/>
-                    </a:lnR>
-                    <a:lnT w="9525" cap="flat" cmpd="sng" algn="ctr">
-                      <a:solidFill>
-                        <a:srgbClr val="BDBDBD"/>
-                      </a:solidFill>
-                      <a:prstDash val="solid"/>
-                      <a:round/>
-                      <a:headEnd type="none" w="med" len="med"/>
-                      <a:tailEnd type="none" w="med" len="med"/>
-                    </a:lnT>
-                    <a:lnB w="9525" cap="flat" cmpd="sng" algn="ctr">
-                      <a:solidFill>
-                        <a:srgbClr val="BDBDBD"/>
-                      </a:solidFill>
-                      <a:prstDash val="solid"/>
-                      <a:round/>
-                      <a:headEnd type="none" w="med" len="med"/>
-                      <a:tailEnd type="none" w="med" len="med"/>
-                    </a:lnB>
-                  </a:tcPr>
-                </a:tc>
-                <a:tc>
-                  <a:txBody>
-                    <a:bodyPr/>
-                    <a:lstStyle/>
-                    <a:p>
-                      <a:pPr algn="ctr" indent="0" marL="0">
-                        <a:buNone/>
-                      </a:pPr>
-                      <a:r>
-                        <a:rPr lang="en-US" sz="1250" b="1" dirty="0">
-                          <a:solidFill>
-                            <a:srgbClr val="C8102E"/>
-                          </a:solidFill>
-                          <a:latin typeface="Arial" pitchFamily="34" charset="0"/>
-                          <a:ea typeface="Arial" pitchFamily="34" charset="-122"/>
-                          <a:cs typeface="Arial" pitchFamily="34" charset="-120"/>
-                        </a:rPr>
-                        <a:t>0.10</a:t>
-                      </a:r>
-                      <a:endParaRPr lang="en-US" sz="1250" dirty="0">
-                        <a:latin typeface="Arial" charset="0"/>
-                        <a:ea typeface="Arial" charset="0"/>
-                        <a:cs typeface="Arial" charset="0"/>
-                      </a:endParaRPr>
-                    </a:p>
-                  </a:txBody>
-                  <a:tcPr marL="45720" marR="45720" marT="45720" marB="45720" anchor="ctr">
-                    <a:lnL w="9525" cap="flat" cmpd="sng" algn="ctr">
-                      <a:solidFill>
-                        <a:srgbClr val="BDBDBD"/>
-                      </a:solidFill>
-                      <a:prstDash val="solid"/>
-                      <a:round/>
-                      <a:headEnd type="none" w="med" len="med"/>
-                      <a:tailEnd type="none" w="med" len="med"/>
-                    </a:lnL>
-                    <a:lnR w="9525" cap="flat" cmpd="sng" algn="ctr">
-                      <a:solidFill>
-                        <a:srgbClr val="BDBDBD"/>
-                      </a:solidFill>
-                      <a:prstDash val="solid"/>
-                      <a:round/>
-                      <a:headEnd type="none" w="med" len="med"/>
-                      <a:tailEnd type="none" w="med" len="med"/>
-                    </a:lnR>
-                    <a:lnT w="9525" cap="flat" cmpd="sng" algn="ctr">
-                      <a:solidFill>
-                        <a:srgbClr val="BDBDBD"/>
-                      </a:solidFill>
-                      <a:prstDash val="solid"/>
-                      <a:round/>
-                      <a:headEnd type="none" w="med" len="med"/>
-                      <a:tailEnd type="none" w="med" len="med"/>
-                    </a:lnT>
-                    <a:lnB w="9525" cap="flat" cmpd="sng" algn="ctr">
-                      <a:solidFill>
-                        <a:srgbClr val="BDBDBD"/>
-                      </a:solidFill>
-                      <a:prstDash val="solid"/>
-                      <a:round/>
-                      <a:headEnd type="none" w="med" len="med"/>
-                      <a:tailEnd type="none" w="med" len="med"/>
-                    </a:lnB>
-                  </a:tcPr>
-                </a:tc>
-              </a:tr>
-              <a:tr h="0">
-                <a:tc>
-                  <a:txBody>
-                    <a:bodyPr/>
-                    <a:lstStyle/>
-                    <a:p>
-                      <a:pPr indent="0" marL="0">
-                        <a:buNone/>
-                      </a:pPr>
-                      <a:r>
-                        <a:rPr lang="en-US" sz="1250" b="1" dirty="0">
-                          <a:solidFill>
-                            <a:srgbClr val="1B1B1B"/>
-                          </a:solidFill>
-                          <a:latin typeface="Arial" pitchFamily="34" charset="0"/>
-                          <a:ea typeface="Arial" pitchFamily="34" charset="-122"/>
-                          <a:cs typeface="Arial" pitchFamily="34" charset="-120"/>
-                        </a:rPr>
-                        <a:t>Signatures + boosted trees [21]</a:t>
-                      </a:r>
-                      <a:endParaRPr lang="en-US" sz="1250" dirty="0">
-                        <a:latin typeface="Arial" charset="0"/>
-                        <a:ea typeface="Arial" charset="0"/>
-                        <a:cs typeface="Arial" charset="0"/>
-                      </a:endParaRPr>
-                    </a:p>
-                  </a:txBody>
-                  <a:tcPr marL="45720" marR="45720" marT="45720" marB="45720" anchor="ctr">
-                    <a:lnL w="9525" cap="flat" cmpd="sng" algn="ctr">
-                      <a:solidFill>
-                        <a:srgbClr val="BDBDBD"/>
-                      </a:solidFill>
-                      <a:prstDash val="solid"/>
-                      <a:round/>
-                      <a:headEnd type="none" w="med" len="med"/>
-                      <a:tailEnd type="none" w="med" len="med"/>
-                    </a:lnL>
-                    <a:lnR w="9525" cap="flat" cmpd="sng" algn="ctr">
-                      <a:solidFill>
-                        <a:srgbClr val="BDBDBD"/>
-                      </a:solidFill>
-                      <a:prstDash val="solid"/>
-                      <a:round/>
-                      <a:headEnd type="none" w="med" len="med"/>
-                      <a:tailEnd type="none" w="med" len="med"/>
-                    </a:lnR>
-                    <a:lnT w="9525" cap="flat" cmpd="sng" algn="ctr">
-                      <a:solidFill>
-                        <a:srgbClr val="BDBDBD"/>
-                      </a:solidFill>
-                      <a:prstDash val="solid"/>
-                      <a:round/>
-                      <a:headEnd type="none" w="med" len="med"/>
-                      <a:tailEnd type="none" w="med" len="med"/>
-                    </a:lnT>
-                    <a:lnB w="9525" cap="flat" cmpd="sng" algn="ctr">
-                      <a:solidFill>
-                        <a:srgbClr val="BDBDBD"/>
-                      </a:solidFill>
-                      <a:prstDash val="solid"/>
-                      <a:round/>
-                      <a:headEnd type="none" w="med" len="med"/>
-                      <a:tailEnd type="none" w="med" len="med"/>
-                    </a:lnB>
-                  </a:tcPr>
-                </a:tc>
-                <a:tc>
-                  <a:txBody>
-                    <a:bodyPr/>
-                    <a:lstStyle/>
-                    <a:p>
-                      <a:pPr indent="0" marL="0">
-                        <a:buNone/>
-                      </a:pPr>
-                      <a:r>
-                        <a:rPr lang="en-US" sz="1250" dirty="0">
-                          <a:solidFill>
-                            <a:srgbClr val="1B1B1B"/>
-                          </a:solidFill>
-                          <a:latin typeface="Arial" pitchFamily="34" charset="0"/>
-                          <a:ea typeface="Arial" pitchFamily="34" charset="-122"/>
-                          <a:cs typeface="Arial" pitchFamily="34" charset="-120"/>
-                        </a:rPr>
-                        <a:t>Recent trajectories summarised as path signatures, then boosted trees</a:t>
-                      </a:r>
-                      <a:endParaRPr lang="en-US" sz="1250" dirty="0">
-                        <a:latin typeface="Arial" charset="0"/>
-                        <a:ea typeface="Arial" charset="0"/>
-                        <a:cs typeface="Arial" charset="0"/>
-                      </a:endParaRPr>
-                    </a:p>
-                  </a:txBody>
-                  <a:tcPr marL="45720" marR="45720" marT="45720" marB="45720" anchor="ctr">
-                    <a:lnL w="9525" cap="flat" cmpd="sng" algn="ctr">
-                      <a:solidFill>
-                        <a:srgbClr val="BDBDBD"/>
-                      </a:solidFill>
-                      <a:prstDash val="solid"/>
-                      <a:round/>
-                      <a:headEnd type="none" w="med" len="med"/>
-                      <a:tailEnd type="none" w="med" len="med"/>
-                    </a:lnL>
-                    <a:lnR w="9525" cap="flat" cmpd="sng" algn="ctr">
-                      <a:solidFill>
-                        <a:srgbClr val="BDBDBD"/>
-                      </a:solidFill>
-                      <a:prstDash val="solid"/>
-                      <a:round/>
-                      <a:headEnd type="none" w="med" len="med"/>
-                      <a:tailEnd type="none" w="med" len="med"/>
-                    </a:lnR>
-                    <a:lnT w="9525" cap="flat" cmpd="sng" algn="ctr">
-                      <a:solidFill>
-                        <a:srgbClr val="BDBDBD"/>
-                      </a:solidFill>
-                      <a:prstDash val="solid"/>
-                      <a:round/>
-                      <a:headEnd type="none" w="med" len="med"/>
-                      <a:tailEnd type="none" w="med" len="med"/>
-                    </a:lnT>
-                    <a:lnB w="9525" cap="flat" cmpd="sng" algn="ctr">
-                      <a:solidFill>
-                        <a:srgbClr val="BDBDBD"/>
-                      </a:solidFill>
-                      <a:prstDash val="solid"/>
-                      <a:round/>
-                      <a:headEnd type="none" w="med" len="med"/>
-                      <a:tailEnd type="none" w="med" len="med"/>
-                    </a:lnB>
-                  </a:tcPr>
-                </a:tc>
-                <a:tc>
-                  <a:txBody>
-                    <a:bodyPr/>
-                    <a:lstStyle/>
-                    <a:p>
-                      <a:pPr indent="0" marL="0">
-                        <a:buNone/>
-                      </a:pPr>
-                      <a:r>
-                        <a:rPr lang="en-US" sz="1250" dirty="0">
-                          <a:solidFill>
-                            <a:srgbClr val="1B1B1B"/>
-                          </a:solidFill>
-                          <a:latin typeface="Arial" pitchFamily="34" charset="0"/>
-                          <a:ea typeface="Arial" pitchFamily="34" charset="-122"/>
-                          <a:cs typeface="Arial" pitchFamily="34" charset="-120"/>
-                        </a:rPr>
-                        <a:t>The PhysioNet 2019 winner's method; time enters through fixed summaries</a:t>
-                      </a:r>
-                      <a:endParaRPr lang="en-US" sz="1250" dirty="0">
-                        <a:latin typeface="Arial" charset="0"/>
-                        <a:ea typeface="Arial" charset="0"/>
-                        <a:cs typeface="Arial" charset="0"/>
-                      </a:endParaRPr>
-                    </a:p>
-                  </a:txBody>
-                  <a:tcPr marL="45720" marR="45720" marT="45720" marB="45720" anchor="ctr">
-                    <a:lnL w="9525" cap="flat" cmpd="sng" algn="ctr">
-                      <a:solidFill>
-                        <a:srgbClr val="BDBDBD"/>
-                      </a:solidFill>
-                      <a:prstDash val="solid"/>
-                      <a:round/>
-                      <a:headEnd type="none" w="med" len="med"/>
-                      <a:tailEnd type="none" w="med" len="med"/>
-                    </a:lnL>
-                    <a:lnR w="9525" cap="flat" cmpd="sng" algn="ctr">
-                      <a:solidFill>
-                        <a:srgbClr val="BDBDBD"/>
-                      </a:solidFill>
-                      <a:prstDash val="solid"/>
-                      <a:round/>
-                      <a:headEnd type="none" w="med" len="med"/>
-                      <a:tailEnd type="none" w="med" len="med"/>
-                    </a:lnR>
-                    <a:lnT w="9525" cap="flat" cmpd="sng" algn="ctr">
-                      <a:solidFill>
-                        <a:srgbClr val="BDBDBD"/>
-                      </a:solidFill>
-                      <a:prstDash val="solid"/>
-                      <a:round/>
-                      <a:headEnd type="none" w="med" len="med"/>
-                      <a:tailEnd type="none" w="med" len="med"/>
-                    </a:lnT>
-                    <a:lnB w="9525" cap="flat" cmpd="sng" algn="ctr">
-                      <a:solidFill>
-                        <a:srgbClr val="BDBDBD"/>
-                      </a:solidFill>
-                      <a:prstDash val="solid"/>
-                      <a:round/>
-                      <a:headEnd type="none" w="med" len="med"/>
-                      <a:tailEnd type="none" w="med" len="med"/>
-                    </a:lnB>
-                  </a:tcPr>
-                </a:tc>
-                <a:tc>
-                  <a:txBody>
-                    <a:bodyPr/>
-                    <a:lstStyle/>
-                    <a:p>
-                      <a:pPr algn="ctr" indent="0" marL="0">
-                        <a:buNone/>
-                      </a:pPr>
-                      <a:r>
-                        <a:rPr lang="en-US" sz="1250" b="1" dirty="0">
-                          <a:solidFill>
-                            <a:srgbClr val="C8102E"/>
-                          </a:solidFill>
-                          <a:latin typeface="Arial" pitchFamily="34" charset="0"/>
-                          <a:ea typeface="Arial" pitchFamily="34" charset="-122"/>
-                          <a:cs typeface="Arial" pitchFamily="34" charset="-120"/>
-                        </a:rPr>
-                        <a:t>0.15</a:t>
-                      </a:r>
-                      <a:endParaRPr lang="en-US" sz="1250" dirty="0">
-                        <a:latin typeface="Arial" charset="0"/>
-                        <a:ea typeface="Arial" charset="0"/>
-                        <a:cs typeface="Arial" charset="0"/>
-                      </a:endParaRPr>
-                    </a:p>
-                  </a:txBody>
-                  <a:tcPr marL="45720" marR="45720" marT="45720" marB="45720" anchor="ctr">
-                    <a:lnL w="9525" cap="flat" cmpd="sng" algn="ctr">
-                      <a:solidFill>
-                        <a:srgbClr val="BDBDBD"/>
-                      </a:solidFill>
-                      <a:prstDash val="solid"/>
-                      <a:round/>
-                      <a:headEnd type="none" w="med" len="med"/>
-                      <a:tailEnd type="none" w="med" len="med"/>
-                    </a:lnL>
-                    <a:lnR w="9525" cap="flat" cmpd="sng" algn="ctr">
-                      <a:solidFill>
-                        <a:srgbClr val="BDBDBD"/>
-                      </a:solidFill>
-                      <a:prstDash val="solid"/>
-                      <a:round/>
-                      <a:headEnd type="none" w="med" len="med"/>
-                      <a:tailEnd type="none" w="med" len="med"/>
-                    </a:lnR>
-                    <a:lnT w="9525" cap="flat" cmpd="sng" algn="ctr">
-                      <a:solidFill>
-                        <a:srgbClr val="BDBDBD"/>
-                      </a:solidFill>
-                      <a:prstDash val="solid"/>
-                      <a:round/>
-                      <a:headEnd type="none" w="med" len="med"/>
-                      <a:tailEnd type="none" w="med" len="med"/>
-                    </a:lnT>
-                    <a:lnB w="9525" cap="flat" cmpd="sng" algn="ctr">
-                      <a:solidFill>
-                        <a:srgbClr val="BDBDBD"/>
-                      </a:solidFill>
-                      <a:prstDash val="solid"/>
-                      <a:round/>
-                      <a:headEnd type="none" w="med" len="med"/>
-                      <a:tailEnd type="none" w="med" len="med"/>
-                    </a:lnB>
-                  </a:tcPr>
-                </a:tc>
-              </a:tr>
-              <a:tr h="0">
-                <a:tc>
-                  <a:txBody>
-                    <a:bodyPr/>
-                    <a:lstStyle/>
-                    <a:p>
-                      <a:pPr indent="0" marL="0">
-                        <a:buNone/>
-                      </a:pPr>
-                      <a:r>
-                        <a:rPr lang="en-US" sz="1250" b="1" dirty="0">
-                          <a:solidFill>
-                            <a:srgbClr val="1B1B1B"/>
-                          </a:solidFill>
-                          <a:latin typeface="Arial" pitchFamily="34" charset="0"/>
-                          <a:ea typeface="Arial" pitchFamily="34" charset="-122"/>
-                          <a:cs typeface="Arial" pitchFamily="34" charset="-120"/>
-                        </a:rPr>
-                        <a:t>OSTA (earlier work)</a:t>
-                      </a:r>
-                      <a:endParaRPr lang="en-US" sz="1250" dirty="0">
-                        <a:latin typeface="Arial" charset="0"/>
-                        <a:ea typeface="Arial" charset="0"/>
-                        <a:cs typeface="Arial" charset="0"/>
-                      </a:endParaRPr>
-                    </a:p>
-                  </a:txBody>
-                  <a:tcPr marL="45720" marR="45720" marT="45720" marB="45720" anchor="ctr">
-                    <a:lnL w="9525" cap="flat" cmpd="sng" algn="ctr">
-                      <a:solidFill>
-                        <a:srgbClr val="BDBDBD"/>
-                      </a:solidFill>
-                      <a:prstDash val="solid"/>
-                      <a:round/>
-                      <a:headEnd type="none" w="med" len="med"/>
-                      <a:tailEnd type="none" w="med" len="med"/>
-                    </a:lnL>
-                    <a:lnR w="9525" cap="flat" cmpd="sng" algn="ctr">
-                      <a:solidFill>
-                        <a:srgbClr val="BDBDBD"/>
-                      </a:solidFill>
-                      <a:prstDash val="solid"/>
-                      <a:round/>
-                      <a:headEnd type="none" w="med" len="med"/>
-                      <a:tailEnd type="none" w="med" len="med"/>
-                    </a:lnR>
-                    <a:lnT w="9525" cap="flat" cmpd="sng" algn="ctr">
-                      <a:solidFill>
-                        <a:srgbClr val="BDBDBD"/>
-                      </a:solidFill>
-                      <a:prstDash val="solid"/>
-                      <a:round/>
-                      <a:headEnd type="none" w="med" len="med"/>
-                      <a:tailEnd type="none" w="med" len="med"/>
-                    </a:lnT>
-                    <a:lnB w="9525" cap="flat" cmpd="sng" algn="ctr">
-                      <a:solidFill>
-                        <a:srgbClr val="BDBDBD"/>
-                      </a:solidFill>
-                      <a:prstDash val="solid"/>
-                      <a:round/>
-                      <a:headEnd type="none" w="med" len="med"/>
-                      <a:tailEnd type="none" w="med" len="med"/>
-                    </a:lnB>
-                  </a:tcPr>
-                </a:tc>
-                <a:tc>
-                  <a:txBody>
-                    <a:bodyPr/>
-                    <a:lstStyle/>
-                    <a:p>
-                      <a:pPr indent="0" marL="0">
-                        <a:buNone/>
-                      </a:pPr>
-                      <a:r>
-                        <a:rPr lang="en-US" sz="1250" dirty="0">
-                          <a:solidFill>
-                            <a:srgbClr val="1B1B1B"/>
-                          </a:solidFill>
-                          <a:latin typeface="Arial" pitchFamily="34" charset="0"/>
-                          <a:ea typeface="Arial" pitchFamily="34" charset="-122"/>
-                          <a:cs typeface="Arial" pitchFamily="34" charset="-120"/>
-                        </a:rPr>
-                        <a:t>Predictors grouped by organ, attention over time per organ, then across organs</a:t>
-                      </a:r>
-                      <a:endParaRPr lang="en-US" sz="1250" dirty="0">
-                        <a:latin typeface="Arial" charset="0"/>
-                        <a:ea typeface="Arial" charset="0"/>
-                        <a:cs typeface="Arial" charset="0"/>
-                      </a:endParaRPr>
-                    </a:p>
-                  </a:txBody>
-                  <a:tcPr marL="45720" marR="45720" marT="45720" marB="45720" anchor="ctr">
-                    <a:lnL w="9525" cap="flat" cmpd="sng" algn="ctr">
-                      <a:solidFill>
-                        <a:srgbClr val="BDBDBD"/>
-                      </a:solidFill>
-                      <a:prstDash val="solid"/>
-                      <a:round/>
-                      <a:headEnd type="none" w="med" len="med"/>
-                      <a:tailEnd type="none" w="med" len="med"/>
-                    </a:lnL>
-                    <a:lnR w="9525" cap="flat" cmpd="sng" algn="ctr">
-                      <a:solidFill>
-                        <a:srgbClr val="BDBDBD"/>
-                      </a:solidFill>
-                      <a:prstDash val="solid"/>
-                      <a:round/>
-                      <a:headEnd type="none" w="med" len="med"/>
-                      <a:tailEnd type="none" w="med" len="med"/>
-                    </a:lnR>
-                    <a:lnT w="9525" cap="flat" cmpd="sng" algn="ctr">
-                      <a:solidFill>
-                        <a:srgbClr val="BDBDBD"/>
-                      </a:solidFill>
-                      <a:prstDash val="solid"/>
-                      <a:round/>
-                      <a:headEnd type="none" w="med" len="med"/>
-                      <a:tailEnd type="none" w="med" len="med"/>
-                    </a:lnT>
-                    <a:lnB w="9525" cap="flat" cmpd="sng" algn="ctr">
-                      <a:solidFill>
-                        <a:srgbClr val="BDBDBD"/>
-                      </a:solidFill>
-                      <a:prstDash val="solid"/>
-                      <a:round/>
-                      <a:headEnd type="none" w="med" len="med"/>
-                      <a:tailEnd type="none" w="med" len="med"/>
-                    </a:lnB>
-                  </a:tcPr>
-                </a:tc>
-                <a:tc>
-                  <a:txBody>
-                    <a:bodyPr/>
-                    <a:lstStyle/>
-                    <a:p>
-                      <a:pPr indent="0" marL="0">
-                        <a:buNone/>
-                      </a:pPr>
-                      <a:r>
-                        <a:rPr lang="en-US" sz="1250" dirty="0">
-                          <a:solidFill>
-                            <a:srgbClr val="1B1B1B"/>
-                          </a:solidFill>
-                          <a:latin typeface="Arial" pitchFamily="34" charset="0"/>
-                          <a:ea typeface="Arial" pitchFamily="34" charset="-122"/>
-                          <a:cs typeface="Arial" pitchFamily="34" charset="-120"/>
-                        </a:rPr>
-                        <a:t>The reference model; risk per organ</a:t>
-                      </a:r>
-                      <a:endParaRPr lang="en-US" sz="1250" dirty="0">
-                        <a:latin typeface="Arial" charset="0"/>
-                        <a:ea typeface="Arial" charset="0"/>
-                        <a:cs typeface="Arial" charset="0"/>
-                      </a:endParaRPr>
-                    </a:p>
-                  </a:txBody>
-                  <a:tcPr marL="45720" marR="45720" marT="45720" marB="45720" anchor="ctr">
-                    <a:lnL w="9525" cap="flat" cmpd="sng" algn="ctr">
-                      <a:solidFill>
-                        <a:srgbClr val="BDBDBD"/>
-                      </a:solidFill>
-                      <a:prstDash val="solid"/>
-                      <a:round/>
-                      <a:headEnd type="none" w="med" len="med"/>
-                      <a:tailEnd type="none" w="med" len="med"/>
-                    </a:lnL>
-                    <a:lnR w="9525" cap="flat" cmpd="sng" algn="ctr">
-                      <a:solidFill>
-                        <a:srgbClr val="BDBDBD"/>
-                      </a:solidFill>
-                      <a:prstDash val="solid"/>
-                      <a:round/>
-                      <a:headEnd type="none" w="med" len="med"/>
-                      <a:tailEnd type="none" w="med" len="med"/>
-                    </a:lnR>
-                    <a:lnT w="9525" cap="flat" cmpd="sng" algn="ctr">
-                      <a:solidFill>
-                        <a:srgbClr val="BDBDBD"/>
-                      </a:solidFill>
-                      <a:prstDash val="solid"/>
-                      <a:round/>
-                      <a:headEnd type="none" w="med" len="med"/>
-                      <a:tailEnd type="none" w="med" len="med"/>
-                    </a:lnT>
-                    <a:lnB w="9525" cap="flat" cmpd="sng" algn="ctr">
-                      <a:solidFill>
-                        <a:srgbClr val="BDBDBD"/>
-                      </a:solidFill>
-                      <a:prstDash val="solid"/>
-                      <a:round/>
-                      <a:headEnd type="none" w="med" len="med"/>
-                      <a:tailEnd type="none" w="med" len="med"/>
-                    </a:lnB>
-                  </a:tcPr>
-                </a:tc>
-                <a:tc>
-                  <a:txBody>
-                    <a:bodyPr/>
-                    <a:lstStyle/>
-                    <a:p>
-                      <a:pPr algn="ctr" indent="0" marL="0">
-                        <a:buNone/>
-                      </a:pPr>
-                      <a:r>
-                        <a:rPr lang="en-US" sz="1250" b="1" dirty="0">
-                          <a:solidFill>
-                            <a:srgbClr val="C8102E"/>
-                          </a:solidFill>
-                          <a:latin typeface="Arial" pitchFamily="34" charset="0"/>
-                          <a:ea typeface="Arial" pitchFamily="34" charset="-122"/>
-                          <a:cs typeface="Arial" pitchFamily="34" charset="-120"/>
-                        </a:rPr>
-                        <a:t>0.23</a:t>
-                      </a:r>
-                      <a:endParaRPr lang="en-US" sz="1250" dirty="0">
-                        <a:latin typeface="Arial" charset="0"/>
-                        <a:ea typeface="Arial" charset="0"/>
-                        <a:cs typeface="Arial" charset="0"/>
-                      </a:endParaRPr>
-                    </a:p>
-                  </a:txBody>
-                  <a:tcPr marL="45720" marR="45720" marT="45720" marB="45720" anchor="ctr">
-                    <a:lnL w="9525" cap="flat" cmpd="sng" algn="ctr">
-                      <a:solidFill>
-                        <a:srgbClr val="BDBDBD"/>
-                      </a:solidFill>
-                      <a:prstDash val="solid"/>
-                      <a:round/>
-                      <a:headEnd type="none" w="med" len="med"/>
-                      <a:tailEnd type="none" w="med" len="med"/>
-                    </a:lnL>
-                    <a:lnR w="9525" cap="flat" cmpd="sng" algn="ctr">
-                      <a:solidFill>
-                        <a:srgbClr val="BDBDBD"/>
-                      </a:solidFill>
-                      <a:prstDash val="solid"/>
-                      <a:round/>
-                      <a:headEnd type="none" w="med" len="med"/>
-                      <a:tailEnd type="none" w="med" len="med"/>
-                    </a:lnR>
-                    <a:lnT w="9525" cap="flat" cmpd="sng" algn="ctr">
-                      <a:solidFill>
-                        <a:srgbClr val="BDBDBD"/>
-                      </a:solidFill>
-                      <a:prstDash val="solid"/>
-                      <a:round/>
-                      <a:headEnd type="none" w="med" len="med"/>
-                      <a:tailEnd type="none" w="med" len="med"/>
-                    </a:lnT>
-                    <a:lnB w="9525" cap="flat" cmpd="sng" algn="ctr">
-                      <a:solidFill>
-                        <a:srgbClr val="BDBDBD"/>
-                      </a:solidFill>
-                      <a:prstDash val="solid"/>
-                      <a:round/>
-                      <a:headEnd type="none" w="med" len="med"/>
-                      <a:tailEnd type="none" w="med" len="med"/>
-                    </a:lnB>
-                  </a:tcPr>
-                </a:tc>
-              </a:tr>
-              <a:tr h="0">
-                <a:tc>
-                  <a:txBody>
-                    <a:bodyPr/>
-                    <a:lstStyle/>
-                    <a:p>
-                      <a:pPr indent="0" marL="0">
-                        <a:buNone/>
-                      </a:pPr>
-                      <a:r>
-                        <a:rPr lang="en-US" sz="1250" b="1" dirty="0">
-                          <a:solidFill>
-                            <a:srgbClr val="1B1B1B"/>
-                          </a:solidFill>
-                          <a:latin typeface="Arial" pitchFamily="34" charset="0"/>
-                          <a:ea typeface="Arial" pitchFamily="34" charset="-122"/>
-                          <a:cs typeface="Arial" pitchFamily="34" charset="-120"/>
-                        </a:rPr>
-                        <a:t>Output fusion (earlier work)</a:t>
-                      </a:r>
-                      <a:endParaRPr lang="en-US" sz="1250" dirty="0">
-                        <a:latin typeface="Arial" charset="0"/>
-                        <a:ea typeface="Arial" charset="0"/>
-                        <a:cs typeface="Arial" charset="0"/>
-                      </a:endParaRPr>
-                    </a:p>
-                  </a:txBody>
-                  <a:tcPr marL="45720" marR="45720" marT="45720" marB="45720" anchor="ctr">
-                    <a:lnL w="9525" cap="flat" cmpd="sng" algn="ctr">
-                      <a:solidFill>
-                        <a:srgbClr val="BDBDBD"/>
-                      </a:solidFill>
-                      <a:prstDash val="solid"/>
-                      <a:round/>
-                      <a:headEnd type="none" w="med" len="med"/>
-                      <a:tailEnd type="none" w="med" len="med"/>
-                    </a:lnL>
-                    <a:lnR w="9525" cap="flat" cmpd="sng" algn="ctr">
-                      <a:solidFill>
-                        <a:srgbClr val="BDBDBD"/>
-                      </a:solidFill>
-                      <a:prstDash val="solid"/>
-                      <a:round/>
-                      <a:headEnd type="none" w="med" len="med"/>
-                      <a:tailEnd type="none" w="med" len="med"/>
-                    </a:lnR>
-                    <a:lnT w="9525" cap="flat" cmpd="sng" algn="ctr">
-                      <a:solidFill>
-                        <a:srgbClr val="BDBDBD"/>
-                      </a:solidFill>
-                      <a:prstDash val="solid"/>
-                      <a:round/>
-                      <a:headEnd type="none" w="med" len="med"/>
-                      <a:tailEnd type="none" w="med" len="med"/>
-                    </a:lnT>
-                    <a:lnB w="9525" cap="flat" cmpd="sng" algn="ctr">
-                      <a:solidFill>
-                        <a:srgbClr val="BDBDBD"/>
-                      </a:solidFill>
-                      <a:prstDash val="solid"/>
-                      <a:round/>
-                      <a:headEnd type="none" w="med" len="med"/>
-                      <a:tailEnd type="none" w="med" len="med"/>
-                    </a:lnB>
-                  </a:tcPr>
-                </a:tc>
-                <a:tc>
-                  <a:txBody>
-                    <a:bodyPr/>
-                    <a:lstStyle/>
-                    <a:p>
-                      <a:pPr indent="0" marL="0">
-                        <a:buNone/>
-                      </a:pPr>
-                      <a:r>
-                        <a:rPr lang="en-US" sz="1250" dirty="0">
-                          <a:solidFill>
-                            <a:srgbClr val="1B1B1B"/>
-                          </a:solidFill>
-                          <a:latin typeface="Arial" pitchFamily="34" charset="0"/>
-                          <a:ea typeface="Arial" pitchFamily="34" charset="-122"/>
-                          <a:cs typeface="Arial" pitchFamily="34" charset="-120"/>
-                        </a:rPr>
-                        <a:t>OSTA plus small per-organ models trained on separate patients, added at the output</a:t>
-                      </a:r>
-                      <a:endParaRPr lang="en-US" sz="1250" dirty="0">
-                        <a:latin typeface="Arial" charset="0"/>
-                        <a:ea typeface="Arial" charset="0"/>
-                        <a:cs typeface="Arial" charset="0"/>
-                      </a:endParaRPr>
-                    </a:p>
-                  </a:txBody>
-                  <a:tcPr marL="45720" marR="45720" marT="45720" marB="45720" anchor="ctr">
-                    <a:lnL w="9525" cap="flat" cmpd="sng" algn="ctr">
-                      <a:solidFill>
-                        <a:srgbClr val="BDBDBD"/>
-                      </a:solidFill>
-                      <a:prstDash val="solid"/>
-                      <a:round/>
-                      <a:headEnd type="none" w="med" len="med"/>
-                      <a:tailEnd type="none" w="med" len="med"/>
-                    </a:lnL>
-                    <a:lnR w="9525" cap="flat" cmpd="sng" algn="ctr">
-                      <a:solidFill>
-                        <a:srgbClr val="BDBDBD"/>
-                      </a:solidFill>
-                      <a:prstDash val="solid"/>
-                      <a:round/>
-                      <a:headEnd type="none" w="med" len="med"/>
-                      <a:tailEnd type="none" w="med" len="med"/>
-                    </a:lnR>
-                    <a:lnT w="9525" cap="flat" cmpd="sng" algn="ctr">
-                      <a:solidFill>
-                        <a:srgbClr val="BDBDBD"/>
-                      </a:solidFill>
-                      <a:prstDash val="solid"/>
-                      <a:round/>
-                      <a:headEnd type="none" w="med" len="med"/>
-                      <a:tailEnd type="none" w="med" len="med"/>
-                    </a:lnT>
-                    <a:lnB w="9525" cap="flat" cmpd="sng" algn="ctr">
-                      <a:solidFill>
-                        <a:srgbClr val="BDBDBD"/>
-                      </a:solidFill>
-                      <a:prstDash val="solid"/>
-                      <a:round/>
-                      <a:headEnd type="none" w="med" len="med"/>
-                      <a:tailEnd type="none" w="med" len="med"/>
-                    </a:lnB>
-                  </a:tcPr>
-                </a:tc>
-                <a:tc>
-                  <a:txBody>
-                    <a:bodyPr/>
-                    <a:lstStyle/>
-                    <a:p>
-                      <a:pPr indent="0" marL="0">
-                        <a:buNone/>
-                      </a:pPr>
-                      <a:r>
-                        <a:rPr lang="en-US" sz="1250" dirty="0">
-                          <a:solidFill>
-                            <a:srgbClr val="1B1B1B"/>
-                          </a:solidFill>
-                          <a:latin typeface="Arial" pitchFamily="34" charset="0"/>
-                          <a:ea typeface="Arial" pitchFamily="34" charset="-122"/>
-                          <a:cs typeface="Arial" pitchFamily="34" charset="-120"/>
-                        </a:rPr>
-                        <a:t>Independent per-organ second opinions fused at the end</a:t>
-                      </a:r>
-                      <a:endParaRPr lang="en-US" sz="1250" dirty="0">
-                        <a:latin typeface="Arial" charset="0"/>
-                        <a:ea typeface="Arial" charset="0"/>
-                        <a:cs typeface="Arial" charset="0"/>
-                      </a:endParaRPr>
-                    </a:p>
-                  </a:txBody>
-                  <a:tcPr marL="45720" marR="45720" marT="45720" marB="45720" anchor="ctr">
-                    <a:lnL w="9525" cap="flat" cmpd="sng" algn="ctr">
-                      <a:solidFill>
-                        <a:srgbClr val="BDBDBD"/>
-                      </a:solidFill>
-                      <a:prstDash val="solid"/>
-                      <a:round/>
-                      <a:headEnd type="none" w="med" len="med"/>
-                      <a:tailEnd type="none" w="med" len="med"/>
-                    </a:lnL>
-                    <a:lnR w="9525" cap="flat" cmpd="sng" algn="ctr">
-                      <a:solidFill>
-                        <a:srgbClr val="BDBDBD"/>
-                      </a:solidFill>
-                      <a:prstDash val="solid"/>
-                      <a:round/>
-                      <a:headEnd type="none" w="med" len="med"/>
-                      <a:tailEnd type="none" w="med" len="med"/>
-                    </a:lnR>
-                    <a:lnT w="9525" cap="flat" cmpd="sng" algn="ctr">
-                      <a:solidFill>
-                        <a:srgbClr val="BDBDBD"/>
-                      </a:solidFill>
-                      <a:prstDash val="solid"/>
-                      <a:round/>
-                      <a:headEnd type="none" w="med" len="med"/>
-                      <a:tailEnd type="none" w="med" len="med"/>
-                    </a:lnT>
-                    <a:lnB w="9525" cap="flat" cmpd="sng" algn="ctr">
-                      <a:solidFill>
-                        <a:srgbClr val="BDBDBD"/>
-                      </a:solidFill>
-                      <a:prstDash val="solid"/>
-                      <a:round/>
-                      <a:headEnd type="none" w="med" len="med"/>
-                      <a:tailEnd type="none" w="med" len="med"/>
-                    </a:lnB>
-                  </a:tcPr>
-                </a:tc>
-                <a:tc>
-                  <a:txBody>
-                    <a:bodyPr/>
-                    <a:lstStyle/>
-                    <a:p>
-                      <a:pPr algn="ctr" indent="0" marL="0">
-                        <a:buNone/>
-                      </a:pPr>
-                      <a:r>
-                        <a:rPr lang="en-US" sz="1250" b="1" dirty="0">
-                          <a:solidFill>
-                            <a:srgbClr val="C8102E"/>
-                          </a:solidFill>
-                          <a:latin typeface="Arial" pitchFamily="34" charset="0"/>
-                          <a:ea typeface="Arial" pitchFamily="34" charset="-122"/>
-                          <a:cs typeface="Arial" pitchFamily="34" charset="-120"/>
-                        </a:rPr>
-                        <a:t>0.25</a:t>
-                      </a:r>
-                      <a:endParaRPr lang="en-US" sz="1250" dirty="0">
-                        <a:latin typeface="Arial" charset="0"/>
-                        <a:ea typeface="Arial" charset="0"/>
-                        <a:cs typeface="Arial" charset="0"/>
-                      </a:endParaRPr>
-                    </a:p>
-                  </a:txBody>
-                  <a:tcPr marL="45720" marR="45720" marT="45720" marB="45720" anchor="ctr">
-                    <a:lnL w="9525" cap="flat" cmpd="sng" algn="ctr">
-                      <a:solidFill>
-                        <a:srgbClr val="BDBDBD"/>
-                      </a:solidFill>
-                      <a:prstDash val="solid"/>
-                      <a:round/>
-                      <a:headEnd type="none" w="med" len="med"/>
-                      <a:tailEnd type="none" w="med" len="med"/>
-                    </a:lnL>
-                    <a:lnR w="9525" cap="flat" cmpd="sng" algn="ctr">
-                      <a:solidFill>
-                        <a:srgbClr val="BDBDBD"/>
-                      </a:solidFill>
-                      <a:prstDash val="solid"/>
-                      <a:round/>
-                      <a:headEnd type="none" w="med" len="med"/>
-                      <a:tailEnd type="none" w="med" len="med"/>
-                    </a:lnR>
-                    <a:lnT w="9525" cap="flat" cmpd="sng" algn="ctr">
-                      <a:solidFill>
-                        <a:srgbClr val="BDBDBD"/>
-                      </a:solidFill>
-                      <a:prstDash val="solid"/>
-                      <a:round/>
-                      <a:headEnd type="none" w="med" len="med"/>
-                      <a:tailEnd type="none" w="med" len="med"/>
-                    </a:lnT>
-                    <a:lnB w="9525" cap="flat" cmpd="sng" algn="ctr">
-                      <a:solidFill>
-                        <a:srgbClr val="BDBDBD"/>
-                      </a:solidFill>
-                      <a:prstDash val="solid"/>
-                      <a:round/>
-                      <a:headEnd type="none" w="med" len="med"/>
-                      <a:tailEnd type="none" w="med" len="med"/>
-                    </a:lnB>
-                  </a:tcPr>
-                </a:tc>
-              </a:tr>
-              <a:tr h="0">
-                <a:tc>
-                  <a:txBody>
-                    <a:bodyPr/>
-                    <a:lstStyle/>
-                    <a:p>
-                      <a:pPr indent="0" marL="0">
-                        <a:buNone/>
-                      </a:pPr>
-                      <a:r>
-                        <a:rPr lang="en-US" sz="1250" b="1" dirty="0">
-                          <a:solidFill>
-                            <a:srgbClr val="1B1B1B"/>
-                          </a:solidFill>
-                          <a:latin typeface="Arial" pitchFamily="34" charset="0"/>
-                          <a:ea typeface="Arial" pitchFamily="34" charset="-122"/>
-                          <a:cs typeface="Arial" pitchFamily="34" charset="-120"/>
-                        </a:rPr>
-                        <a:t>CNN-Transformer (earlier work) [36]</a:t>
-                      </a:r>
-                      <a:endParaRPr lang="en-US" sz="1250" dirty="0">
-                        <a:latin typeface="Arial" charset="0"/>
-                        <a:ea typeface="Arial" charset="0"/>
-                        <a:cs typeface="Arial" charset="0"/>
-                      </a:endParaRPr>
-                    </a:p>
-                  </a:txBody>
-                  <a:tcPr marL="45720" marR="45720" marT="45720" marB="45720" anchor="ctr">
-                    <a:lnL w="9525" cap="flat" cmpd="sng" algn="ctr">
-                      <a:solidFill>
-                        <a:srgbClr val="BDBDBD"/>
-                      </a:solidFill>
-                      <a:prstDash val="solid"/>
-                      <a:round/>
-                      <a:headEnd type="none" w="med" len="med"/>
-                      <a:tailEnd type="none" w="med" len="med"/>
-                    </a:lnL>
-                    <a:lnR w="9525" cap="flat" cmpd="sng" algn="ctr">
-                      <a:solidFill>
-                        <a:srgbClr val="BDBDBD"/>
-                      </a:solidFill>
-                      <a:prstDash val="solid"/>
-                      <a:round/>
-                      <a:headEnd type="none" w="med" len="med"/>
-                      <a:tailEnd type="none" w="med" len="med"/>
-                    </a:lnR>
-                    <a:lnT w="9525" cap="flat" cmpd="sng" algn="ctr">
-                      <a:solidFill>
-                        <a:srgbClr val="BDBDBD"/>
-                      </a:solidFill>
-                      <a:prstDash val="solid"/>
-                      <a:round/>
-                      <a:headEnd type="none" w="med" len="med"/>
-                      <a:tailEnd type="none" w="med" len="med"/>
-                    </a:lnT>
-                    <a:lnB w="9525" cap="flat" cmpd="sng" algn="ctr">
-                      <a:solidFill>
-                        <a:srgbClr val="BDBDBD"/>
-                      </a:solidFill>
-                      <a:prstDash val="solid"/>
-                      <a:round/>
-                      <a:headEnd type="none" w="med" len="med"/>
-                      <a:tailEnd type="none" w="med" len="med"/>
-                    </a:lnB>
-                  </a:tcPr>
-                </a:tc>
-                <a:tc>
-                  <a:txBody>
-                    <a:bodyPr/>
-                    <a:lstStyle/>
-                    <a:p>
-                      <a:pPr indent="0" marL="0">
-                        <a:buNone/>
-                      </a:pPr>
-                      <a:r>
-                        <a:rPr lang="en-US" sz="1250" dirty="0">
-                          <a:solidFill>
-                            <a:srgbClr val="1B1B1B"/>
-                          </a:solidFill>
-                          <a:latin typeface="Arial" pitchFamily="34" charset="0"/>
-                          <a:ea typeface="Arial" pitchFamily="34" charset="-122"/>
-                          <a:cs typeface="Arial" pitchFamily="34" charset="-120"/>
-                        </a:rPr>
-                        <a:t>Convolution finds 1 to 12 h patterns, then attention</a:t>
-                      </a:r>
-                      <a:endParaRPr lang="en-US" sz="1250" dirty="0">
-                        <a:latin typeface="Arial" charset="0"/>
-                        <a:ea typeface="Arial" charset="0"/>
-                        <a:cs typeface="Arial" charset="0"/>
-                      </a:endParaRPr>
-                    </a:p>
-                  </a:txBody>
-                  <a:tcPr marL="45720" marR="45720" marT="45720" marB="45720" anchor="ctr">
-                    <a:lnL w="9525" cap="flat" cmpd="sng" algn="ctr">
-                      <a:solidFill>
-                        <a:srgbClr val="BDBDBD"/>
-                      </a:solidFill>
-                      <a:prstDash val="solid"/>
-                      <a:round/>
-                      <a:headEnd type="none" w="med" len="med"/>
-                      <a:tailEnd type="none" w="med" len="med"/>
-                    </a:lnL>
-                    <a:lnR w="9525" cap="flat" cmpd="sng" algn="ctr">
-                      <a:solidFill>
-                        <a:srgbClr val="BDBDBD"/>
-                      </a:solidFill>
-                      <a:prstDash val="solid"/>
-                      <a:round/>
-                      <a:headEnd type="none" w="med" len="med"/>
-                      <a:tailEnd type="none" w="med" len="med"/>
-                    </a:lnR>
-                    <a:lnT w="9525" cap="flat" cmpd="sng" algn="ctr">
-                      <a:solidFill>
-                        <a:srgbClr val="BDBDBD"/>
-                      </a:solidFill>
-                      <a:prstDash val="solid"/>
-                      <a:round/>
-                      <a:headEnd type="none" w="med" len="med"/>
-                      <a:tailEnd type="none" w="med" len="med"/>
-                    </a:lnT>
-                    <a:lnB w="9525" cap="flat" cmpd="sng" algn="ctr">
-                      <a:solidFill>
-                        <a:srgbClr val="BDBDBD"/>
-                      </a:solidFill>
-                      <a:prstDash val="solid"/>
-                      <a:round/>
-                      <a:headEnd type="none" w="med" len="med"/>
-                      <a:tailEnd type="none" w="med" len="med"/>
-                    </a:lnB>
-                  </a:tcPr>
-                </a:tc>
-                <a:tc>
-                  <a:txBody>
-                    <a:bodyPr/>
-                    <a:lstStyle/>
-                    <a:p>
-                      <a:pPr indent="0" marL="0">
-                        <a:buNone/>
-                      </a:pPr>
-                      <a:r>
-                        <a:rPr lang="en-US" sz="1250" dirty="0">
-                          <a:solidFill>
-                            <a:srgbClr val="1B1B1B"/>
-                          </a:solidFill>
-                          <a:latin typeface="Arial" pitchFamily="34" charset="0"/>
-                          <a:ea typeface="Arial" pitchFamily="34" charset="-122"/>
-                          <a:cs typeface="Arial" pitchFamily="34" charset="-120"/>
-                        </a:rPr>
-                        <a:t>No organ grouping</a:t>
-                      </a:r>
-                      <a:endParaRPr lang="en-US" sz="1250" dirty="0">
-                        <a:latin typeface="Arial" charset="0"/>
-                        <a:ea typeface="Arial" charset="0"/>
-                        <a:cs typeface="Arial" charset="0"/>
-                      </a:endParaRPr>
-                    </a:p>
-                  </a:txBody>
-                  <a:tcPr marL="45720" marR="45720" marT="45720" marB="45720" anchor="ctr">
-                    <a:lnL w="9525" cap="flat" cmpd="sng" algn="ctr">
-                      <a:solidFill>
-                        <a:srgbClr val="BDBDBD"/>
-                      </a:solidFill>
-                      <a:prstDash val="solid"/>
-                      <a:round/>
-                      <a:headEnd type="none" w="med" len="med"/>
-                      <a:tailEnd type="none" w="med" len="med"/>
-                    </a:lnL>
-                    <a:lnR w="9525" cap="flat" cmpd="sng" algn="ctr">
-                      <a:solidFill>
-                        <a:srgbClr val="BDBDBD"/>
-                      </a:solidFill>
-                      <a:prstDash val="solid"/>
-                      <a:round/>
-                      <a:headEnd type="none" w="med" len="med"/>
-                      <a:tailEnd type="none" w="med" len="med"/>
-                    </a:lnR>
-                    <a:lnT w="9525" cap="flat" cmpd="sng" algn="ctr">
-                      <a:solidFill>
-                        <a:srgbClr val="BDBDBD"/>
-                      </a:solidFill>
-                      <a:prstDash val="solid"/>
-                      <a:round/>
-                      <a:headEnd type="none" w="med" len="med"/>
-                      <a:tailEnd type="none" w="med" len="med"/>
-                    </a:lnT>
-                    <a:lnB w="9525" cap="flat" cmpd="sng" algn="ctr">
-                      <a:solidFill>
-                        <a:srgbClr val="BDBDBD"/>
-                      </a:solidFill>
-                      <a:prstDash val="solid"/>
-                      <a:round/>
-                      <a:headEnd type="none" w="med" len="med"/>
-                      <a:tailEnd type="none" w="med" len="med"/>
-                    </a:lnB>
-                  </a:tcPr>
-                </a:tc>
-                <a:tc>
-                  <a:txBody>
-                    <a:bodyPr/>
-                    <a:lstStyle/>
-                    <a:p>
-                      <a:pPr algn="ctr" indent="0" marL="0">
-                        <a:buNone/>
-                      </a:pPr>
-                      <a:r>
-                        <a:rPr lang="en-US" sz="1250" b="1" dirty="0">
-                          <a:solidFill>
-                            <a:srgbClr val="C8102E"/>
-                          </a:solidFill>
-                          <a:latin typeface="Arial" pitchFamily="34" charset="0"/>
-                          <a:ea typeface="Arial" pitchFamily="34" charset="-122"/>
-                          <a:cs typeface="Arial" pitchFamily="34" charset="-120"/>
-                        </a:rPr>
-                        <a:t>0.24</a:t>
-                      </a:r>
-                      <a:endParaRPr lang="en-US" sz="1250" dirty="0">
-                        <a:latin typeface="Arial" charset="0"/>
-                        <a:ea typeface="Arial" charset="0"/>
-                        <a:cs typeface="Arial" charset="0"/>
-                      </a:endParaRPr>
-                    </a:p>
-                  </a:txBody>
-                  <a:tcPr marL="45720" marR="45720" marT="45720" marB="45720" anchor="ctr">
-                    <a:lnL w="9525" cap="flat" cmpd="sng" algn="ctr">
-                      <a:solidFill>
-                        <a:srgbClr val="BDBDBD"/>
-                      </a:solidFill>
-                      <a:prstDash val="solid"/>
-                      <a:round/>
-                      <a:headEnd type="none" w="med" len="med"/>
-                      <a:tailEnd type="none" w="med" len="med"/>
-                    </a:lnL>
-                    <a:lnR w="9525" cap="flat" cmpd="sng" algn="ctr">
-                      <a:solidFill>
-                        <a:srgbClr val="BDBDBD"/>
-                      </a:solidFill>
-                      <a:prstDash val="solid"/>
-                      <a:round/>
-                      <a:headEnd type="none" w="med" len="med"/>
-                      <a:tailEnd type="none" w="med" len="med"/>
-                    </a:lnR>
-                    <a:lnT w="9525" cap="flat" cmpd="sng" algn="ctr">
-                      <a:solidFill>
-                        <a:srgbClr val="BDBDBD"/>
-                      </a:solidFill>
-                      <a:prstDash val="solid"/>
-                      <a:round/>
-                      <a:headEnd type="none" w="med" len="med"/>
-                      <a:tailEnd type="none" w="med" len="med"/>
-                    </a:lnT>
-                    <a:lnB w="9525" cap="flat" cmpd="sng" algn="ctr">
-                      <a:solidFill>
-                        <a:srgbClr val="BDBDBD"/>
-                      </a:solidFill>
-                      <a:prstDash val="solid"/>
-                      <a:round/>
-                      <a:headEnd type="none" w="med" len="med"/>
-                      <a:tailEnd type="none" w="med" len="med"/>
-                    </a:lnB>
-                  </a:tcPr>
-                </a:tc>
-              </a:tr>
-              <a:tr h="0">
-                <a:tc>
-                  <a:txBody>
-                    <a:bodyPr/>
-                    <a:lstStyle/>
-                    <a:p>
-                      <a:pPr indent="0" marL="0">
-                        <a:buNone/>
-                      </a:pPr>
-                      <a:r>
-                        <a:rPr lang="en-US" sz="1250" b="1" dirty="0">
-                          <a:solidFill>
-                            <a:srgbClr val="1B1B1B"/>
-                          </a:solidFill>
-                          <a:latin typeface="Arial" pitchFamily="34" charset="0"/>
-                          <a:ea typeface="Arial" pitchFamily="34" charset="-122"/>
-                          <a:cs typeface="Arial" pitchFamily="34" charset="-120"/>
-                        </a:rPr>
-                        <a:t>Flat OSTA</a:t>
-                      </a:r>
-                      <a:endParaRPr lang="en-US" sz="1250" dirty="0">
-                        <a:latin typeface="Arial" charset="0"/>
-                        <a:ea typeface="Arial" charset="0"/>
-                        <a:cs typeface="Arial" charset="0"/>
-                      </a:endParaRPr>
-                    </a:p>
-                  </a:txBody>
-                  <a:tcPr marL="45720" marR="45720" marT="45720" marB="45720" anchor="ctr">
-                    <a:lnL w="9525" cap="flat" cmpd="sng" algn="ctr">
-                      <a:solidFill>
-                        <a:srgbClr val="BDBDBD"/>
-                      </a:solidFill>
-                      <a:prstDash val="solid"/>
-                      <a:round/>
-                      <a:headEnd type="none" w="med" len="med"/>
-                      <a:tailEnd type="none" w="med" len="med"/>
-                    </a:lnL>
-                    <a:lnR w="9525" cap="flat" cmpd="sng" algn="ctr">
-                      <a:solidFill>
-                        <a:srgbClr val="BDBDBD"/>
-                      </a:solidFill>
-                      <a:prstDash val="solid"/>
-                      <a:round/>
-                      <a:headEnd type="none" w="med" len="med"/>
-                      <a:tailEnd type="none" w="med" len="med"/>
-                    </a:lnR>
-                    <a:lnT w="9525" cap="flat" cmpd="sng" algn="ctr">
-                      <a:solidFill>
-                        <a:srgbClr val="BDBDBD"/>
-                      </a:solidFill>
-                      <a:prstDash val="solid"/>
-                      <a:round/>
-                      <a:headEnd type="none" w="med" len="med"/>
-                      <a:tailEnd type="none" w="med" len="med"/>
-                    </a:lnT>
-                    <a:lnB w="9525" cap="flat" cmpd="sng" algn="ctr">
-                      <a:solidFill>
-                        <a:srgbClr val="BDBDBD"/>
-                      </a:solidFill>
-                      <a:prstDash val="solid"/>
-                      <a:round/>
-                      <a:headEnd type="none" w="med" len="med"/>
-                      <a:tailEnd type="none" w="med" len="med"/>
-                    </a:lnB>
-                  </a:tcPr>
-                </a:tc>
-                <a:tc>
-                  <a:txBody>
-                    <a:bodyPr/>
-                    <a:lstStyle/>
-                    <a:p>
-                      <a:pPr indent="0" marL="0">
-                        <a:buNone/>
-                      </a:pPr>
-                      <a:r>
-                        <a:rPr lang="en-US" sz="1250" dirty="0">
-                          <a:solidFill>
-                            <a:srgbClr val="1B1B1B"/>
-                          </a:solidFill>
-                          <a:latin typeface="Arial" pitchFamily="34" charset="0"/>
-                          <a:ea typeface="Arial" pitchFamily="34" charset="-122"/>
-                          <a:cs typeface="Arial" pitchFamily="34" charset="-120"/>
-                        </a:rPr>
-                        <a:t>OSTA with every predictor in one group</a:t>
-                      </a:r>
-                      <a:endParaRPr lang="en-US" sz="1250" dirty="0">
-                        <a:latin typeface="Arial" charset="0"/>
-                        <a:ea typeface="Arial" charset="0"/>
-                        <a:cs typeface="Arial" charset="0"/>
-                      </a:endParaRPr>
-                    </a:p>
-                  </a:txBody>
-                  <a:tcPr marL="45720" marR="45720" marT="45720" marB="45720" anchor="ctr">
-                    <a:lnL w="9525" cap="flat" cmpd="sng" algn="ctr">
-                      <a:solidFill>
-                        <a:srgbClr val="BDBDBD"/>
-                      </a:solidFill>
-                      <a:prstDash val="solid"/>
-                      <a:round/>
-                      <a:headEnd type="none" w="med" len="med"/>
-                      <a:tailEnd type="none" w="med" len="med"/>
-                    </a:lnL>
-                    <a:lnR w="9525" cap="flat" cmpd="sng" algn="ctr">
-                      <a:solidFill>
-                        <a:srgbClr val="BDBDBD"/>
-                      </a:solidFill>
-                      <a:prstDash val="solid"/>
-                      <a:round/>
-                      <a:headEnd type="none" w="med" len="med"/>
-                      <a:tailEnd type="none" w="med" len="med"/>
-                    </a:lnR>
-                    <a:lnT w="9525" cap="flat" cmpd="sng" algn="ctr">
-                      <a:solidFill>
-                        <a:srgbClr val="BDBDBD"/>
-                      </a:solidFill>
-                      <a:prstDash val="solid"/>
-                      <a:round/>
-                      <a:headEnd type="none" w="med" len="med"/>
-                      <a:tailEnd type="none" w="med" len="med"/>
-                    </a:lnT>
-                    <a:lnB w="9525" cap="flat" cmpd="sng" algn="ctr">
-                      <a:solidFill>
-                        <a:srgbClr val="BDBDBD"/>
-                      </a:solidFill>
-                      <a:prstDash val="solid"/>
-                      <a:round/>
-                      <a:headEnd type="none" w="med" len="med"/>
-                      <a:tailEnd type="none" w="med" len="med"/>
-                    </a:lnB>
-                  </a:tcPr>
-                </a:tc>
-                <a:tc>
-                  <a:txBody>
-                    <a:bodyPr/>
-                    <a:lstStyle/>
-                    <a:p>
-                      <a:pPr indent="0" marL="0">
-                        <a:buNone/>
-                      </a:pPr>
-                      <a:r>
-                        <a:rPr lang="en-US" sz="1250" dirty="0">
-                          <a:solidFill>
-                            <a:srgbClr val="1B1B1B"/>
-                          </a:solidFill>
-                          <a:latin typeface="Arial" pitchFamily="34" charset="0"/>
-                          <a:ea typeface="Arial" pitchFamily="34" charset="-122"/>
-                          <a:cs typeface="Arial" pitchFamily="34" charset="-120"/>
-                        </a:rPr>
-                        <a:t>Removes only the organ grouping: the decisive test</a:t>
-                      </a:r>
-                      <a:endParaRPr lang="en-US" sz="1250" dirty="0">
-                        <a:latin typeface="Arial" charset="0"/>
-                        <a:ea typeface="Arial" charset="0"/>
-                        <a:cs typeface="Arial" charset="0"/>
-                      </a:endParaRPr>
-                    </a:p>
-                  </a:txBody>
-                  <a:tcPr marL="45720" marR="45720" marT="45720" marB="45720" anchor="ctr">
-                    <a:lnL w="9525" cap="flat" cmpd="sng" algn="ctr">
-                      <a:solidFill>
-                        <a:srgbClr val="BDBDBD"/>
-                      </a:solidFill>
-                      <a:prstDash val="solid"/>
-                      <a:round/>
-                      <a:headEnd type="none" w="med" len="med"/>
-                      <a:tailEnd type="none" w="med" len="med"/>
-                    </a:lnL>
-                    <a:lnR w="9525" cap="flat" cmpd="sng" algn="ctr">
-                      <a:solidFill>
-                        <a:srgbClr val="BDBDBD"/>
-                      </a:solidFill>
-                      <a:prstDash val="solid"/>
-                      <a:round/>
-                      <a:headEnd type="none" w="med" len="med"/>
-                      <a:tailEnd type="none" w="med" len="med"/>
-                    </a:lnR>
-                    <a:lnT w="9525" cap="flat" cmpd="sng" algn="ctr">
-                      <a:solidFill>
-                        <a:srgbClr val="BDBDBD"/>
-                      </a:solidFill>
-                      <a:prstDash val="solid"/>
-                      <a:round/>
-                      <a:headEnd type="none" w="med" len="med"/>
-                      <a:tailEnd type="none" w="med" len="med"/>
-                    </a:lnT>
-                    <a:lnB w="9525" cap="flat" cmpd="sng" algn="ctr">
-                      <a:solidFill>
-                        <a:srgbClr val="BDBDBD"/>
-                      </a:solidFill>
-                      <a:prstDash val="solid"/>
-                      <a:round/>
-                      <a:headEnd type="none" w="med" len="med"/>
-                      <a:tailEnd type="none" w="med" len="med"/>
-                    </a:lnB>
-                  </a:tcPr>
-                </a:tc>
-                <a:tc>
-                  <a:txBody>
-                    <a:bodyPr/>
-                    <a:lstStyle/>
-                    <a:p>
-                      <a:pPr algn="ctr" indent="0" marL="0">
-                        <a:buNone/>
-                      </a:pPr>
-                      <a:r>
-                        <a:rPr lang="en-US" sz="1250" b="1" dirty="0">
-                          <a:solidFill>
-                            <a:srgbClr val="C8102E"/>
-                          </a:solidFill>
-                          <a:latin typeface="Arial" pitchFamily="34" charset="0"/>
-                          <a:ea typeface="Arial" pitchFamily="34" charset="-122"/>
-                          <a:cs typeface="Arial" pitchFamily="34" charset="-120"/>
-                        </a:rPr>
-                        <a:t>0.23</a:t>
-                      </a:r>
-                      <a:endParaRPr lang="en-US" sz="1250" dirty="0">
-                        <a:latin typeface="Arial" charset="0"/>
-                        <a:ea typeface="Arial" charset="0"/>
-                        <a:cs typeface="Arial" charset="0"/>
-                      </a:endParaRPr>
-                    </a:p>
-                  </a:txBody>
-                  <a:tcPr marL="45720" marR="45720" marT="45720" marB="45720" anchor="ctr">
-                    <a:lnL w="9525" cap="flat" cmpd="sng" algn="ctr">
-                      <a:solidFill>
-                        <a:srgbClr val="BDBDBD"/>
-                      </a:solidFill>
-                      <a:prstDash val="solid"/>
-                      <a:round/>
-                      <a:headEnd type="none" w="med" len="med"/>
-                      <a:tailEnd type="none" w="med" len="med"/>
-                    </a:lnL>
-                    <a:lnR w="9525" cap="flat" cmpd="sng" algn="ctr">
-                      <a:solidFill>
-                        <a:srgbClr val="BDBDBD"/>
-                      </a:solidFill>
-                      <a:prstDash val="solid"/>
-                      <a:round/>
-                      <a:headEnd type="none" w="med" len="med"/>
-                      <a:tailEnd type="none" w="med" len="med"/>
-                    </a:lnR>
-                    <a:lnT w="9525" cap="flat" cmpd="sng" algn="ctr">
-                      <a:solidFill>
-                        <a:srgbClr val="BDBDBD"/>
-                      </a:solidFill>
-                      <a:prstDash val="solid"/>
-                      <a:round/>
-                      <a:headEnd type="none" w="med" len="med"/>
-                      <a:tailEnd type="none" w="med" len="med"/>
-                    </a:lnT>
-                    <a:lnB w="9525" cap="flat" cmpd="sng" algn="ctr">
-                      <a:solidFill>
-                        <a:srgbClr val="BDBDBD"/>
-                      </a:solidFill>
-                      <a:prstDash val="solid"/>
-                      <a:round/>
-                      <a:headEnd type="none" w="med" len="med"/>
-                      <a:tailEnd type="none" w="med" len="med"/>
-                    </a:lnB>
-                  </a:tcPr>
-                </a:tc>
-              </a:tr>
-              <a:tr h="0">
-                <a:tc>
-                  <a:txBody>
-                    <a:bodyPr/>
-                    <a:lstStyle/>
-                    <a:p>
-                      <a:pPr indent="0" marL="0">
-                        <a:buNone/>
-                      </a:pPr>
-                      <a:r>
-                        <a:rPr lang="en-US" sz="1250" b="1" dirty="0">
-                          <a:solidFill>
-                            <a:srgbClr val="1B1B1B"/>
-                          </a:solidFill>
-                          <a:latin typeface="Arial" pitchFamily="34" charset="0"/>
-                          <a:ea typeface="Arial" pitchFamily="34" charset="-122"/>
-                          <a:cs typeface="Arial" pitchFamily="34" charset="-120"/>
-                        </a:rPr>
-                        <a:t>GRU-D [37]</a:t>
-                      </a:r>
-                      <a:endParaRPr lang="en-US" sz="1250" dirty="0">
-                        <a:latin typeface="Arial" charset="0"/>
-                        <a:ea typeface="Arial" charset="0"/>
-                        <a:cs typeface="Arial" charset="0"/>
-                      </a:endParaRPr>
-                    </a:p>
-                  </a:txBody>
-                  <a:tcPr marL="45720" marR="45720" marT="45720" marB="45720" anchor="ctr">
-                    <a:lnL w="9525" cap="flat" cmpd="sng" algn="ctr">
-                      <a:solidFill>
-                        <a:srgbClr val="BDBDBD"/>
-                      </a:solidFill>
-                      <a:prstDash val="solid"/>
-                      <a:round/>
-                      <a:headEnd type="none" w="med" len="med"/>
-                      <a:tailEnd type="none" w="med" len="med"/>
-                    </a:lnL>
-                    <a:lnR w="9525" cap="flat" cmpd="sng" algn="ctr">
-                      <a:solidFill>
-                        <a:srgbClr val="BDBDBD"/>
-                      </a:solidFill>
-                      <a:prstDash val="solid"/>
-                      <a:round/>
-                      <a:headEnd type="none" w="med" len="med"/>
-                      <a:tailEnd type="none" w="med" len="med"/>
-                    </a:lnR>
-                    <a:lnT w="9525" cap="flat" cmpd="sng" algn="ctr">
-                      <a:solidFill>
-                        <a:srgbClr val="BDBDBD"/>
-                      </a:solidFill>
-                      <a:prstDash val="solid"/>
-                      <a:round/>
-                      <a:headEnd type="none" w="med" len="med"/>
-                      <a:tailEnd type="none" w="med" len="med"/>
-                    </a:lnT>
-                    <a:lnB w="9525" cap="flat" cmpd="sng" algn="ctr">
-                      <a:solidFill>
-                        <a:srgbClr val="BDBDBD"/>
-                      </a:solidFill>
-                      <a:prstDash val="solid"/>
-                      <a:round/>
-                      <a:headEnd type="none" w="med" len="med"/>
-                      <a:tailEnd type="none" w="med" len="med"/>
-                    </a:lnB>
-                  </a:tcPr>
-                </a:tc>
-                <a:tc>
-                  <a:txBody>
-                    <a:bodyPr/>
-                    <a:lstStyle/>
-                    <a:p>
-                      <a:pPr indent="0" marL="0">
-                        <a:buNone/>
-                      </a:pPr>
-                      <a:r>
-                        <a:rPr lang="en-US" sz="1250" dirty="0">
-                          <a:solidFill>
-                            <a:srgbClr val="1B1B1B"/>
-                          </a:solidFill>
-                          <a:latin typeface="Arial" pitchFamily="34" charset="0"/>
-                          <a:ea typeface="Arial" pitchFamily="34" charset="-122"/>
-                          <a:cs typeface="Arial" pitchFamily="34" charset="-120"/>
-                        </a:rPr>
-                        <a:t>Recurrent memory; values fade towards normal as they age</a:t>
-                      </a:r>
-                      <a:endParaRPr lang="en-US" sz="1250" dirty="0">
-                        <a:latin typeface="Arial" charset="0"/>
-                        <a:ea typeface="Arial" charset="0"/>
-                        <a:cs typeface="Arial" charset="0"/>
-                      </a:endParaRPr>
-                    </a:p>
-                  </a:txBody>
-                  <a:tcPr marL="45720" marR="45720" marT="45720" marB="45720" anchor="ctr">
-                    <a:lnL w="9525" cap="flat" cmpd="sng" algn="ctr">
-                      <a:solidFill>
-                        <a:srgbClr val="BDBDBD"/>
-                      </a:solidFill>
-                      <a:prstDash val="solid"/>
-                      <a:round/>
-                      <a:headEnd type="none" w="med" len="med"/>
-                      <a:tailEnd type="none" w="med" len="med"/>
-                    </a:lnL>
-                    <a:lnR w="9525" cap="flat" cmpd="sng" algn="ctr">
-                      <a:solidFill>
-                        <a:srgbClr val="BDBDBD"/>
-                      </a:solidFill>
-                      <a:prstDash val="solid"/>
-                      <a:round/>
-                      <a:headEnd type="none" w="med" len="med"/>
-                      <a:tailEnd type="none" w="med" len="med"/>
-                    </a:lnR>
-                    <a:lnT w="9525" cap="flat" cmpd="sng" algn="ctr">
-                      <a:solidFill>
-                        <a:srgbClr val="BDBDBD"/>
-                      </a:solidFill>
-                      <a:prstDash val="solid"/>
-                      <a:round/>
-                      <a:headEnd type="none" w="med" len="med"/>
-                      <a:tailEnd type="none" w="med" len="med"/>
-                    </a:lnT>
-                    <a:lnB w="9525" cap="flat" cmpd="sng" algn="ctr">
-                      <a:solidFill>
-                        <a:srgbClr val="BDBDBD"/>
-                      </a:solidFill>
-                      <a:prstDash val="solid"/>
-                      <a:round/>
-                      <a:headEnd type="none" w="med" len="med"/>
-                      <a:tailEnd type="none" w="med" len="med"/>
-                    </a:lnB>
-                  </a:tcPr>
-                </a:tc>
-                <a:tc>
-                  <a:txBody>
-                    <a:bodyPr/>
-                    <a:lstStyle/>
-                    <a:p>
-                      <a:pPr indent="0" marL="0">
-                        <a:buNone/>
-                      </a:pPr>
-                      <a:r>
-                        <a:rPr lang="en-US" sz="1250" dirty="0">
-                          <a:solidFill>
-                            <a:srgbClr val="1B1B1B"/>
-                          </a:solidFill>
-                          <a:latin typeface="Arial" pitchFamily="34" charset="0"/>
-                          <a:ea typeface="Arial" pitchFamily="34" charset="-122"/>
-                          <a:cs typeface="Arial" pitchFamily="34" charset="-120"/>
-                        </a:rPr>
-                        <a:t>Models missing and stale data explicitly</a:t>
-                      </a:r>
-                      <a:endParaRPr lang="en-US" sz="1250" dirty="0">
-                        <a:latin typeface="Arial" charset="0"/>
-                        <a:ea typeface="Arial" charset="0"/>
-                        <a:cs typeface="Arial" charset="0"/>
-                      </a:endParaRPr>
-                    </a:p>
-                  </a:txBody>
-                  <a:tcPr marL="45720" marR="45720" marT="45720" marB="45720" anchor="ctr">
-                    <a:lnL w="9525" cap="flat" cmpd="sng" algn="ctr">
-                      <a:solidFill>
-                        <a:srgbClr val="BDBDBD"/>
-                      </a:solidFill>
-                      <a:prstDash val="solid"/>
-                      <a:round/>
-                      <a:headEnd type="none" w="med" len="med"/>
-                      <a:tailEnd type="none" w="med" len="med"/>
-                    </a:lnL>
-                    <a:lnR w="9525" cap="flat" cmpd="sng" algn="ctr">
-                      <a:solidFill>
-                        <a:srgbClr val="BDBDBD"/>
-                      </a:solidFill>
-                      <a:prstDash val="solid"/>
-                      <a:round/>
-                      <a:headEnd type="none" w="med" len="med"/>
-                      <a:tailEnd type="none" w="med" len="med"/>
-                    </a:lnR>
-                    <a:lnT w="9525" cap="flat" cmpd="sng" algn="ctr">
-                      <a:solidFill>
-                        <a:srgbClr val="BDBDBD"/>
-                      </a:solidFill>
-                      <a:prstDash val="solid"/>
-                      <a:round/>
-                      <a:headEnd type="none" w="med" len="med"/>
-                      <a:tailEnd type="none" w="med" len="med"/>
-                    </a:lnT>
-                    <a:lnB w="9525" cap="flat" cmpd="sng" algn="ctr">
-                      <a:solidFill>
-                        <a:srgbClr val="BDBDBD"/>
-                      </a:solidFill>
-                      <a:prstDash val="solid"/>
-                      <a:round/>
-                      <a:headEnd type="none" w="med" len="med"/>
-                      <a:tailEnd type="none" w="med" len="med"/>
-                    </a:lnB>
-                  </a:tcPr>
-                </a:tc>
-                <a:tc>
-                  <a:txBody>
-                    <a:bodyPr/>
-                    <a:lstStyle/>
-                    <a:p>
-                      <a:pPr algn="ctr" indent="0" marL="0">
-                        <a:buNone/>
-                      </a:pPr>
-                      <a:r>
-                        <a:rPr lang="en-US" sz="1250" b="1" dirty="0">
-                          <a:solidFill>
-                            <a:srgbClr val="C8102E"/>
-                          </a:solidFill>
-                          <a:latin typeface="Arial" pitchFamily="34" charset="0"/>
-                          <a:ea typeface="Arial" pitchFamily="34" charset="-122"/>
-                          <a:cs typeface="Arial" pitchFamily="34" charset="-120"/>
-                        </a:rPr>
-                        <a:t>0.19</a:t>
-                      </a:r>
-                      <a:endParaRPr lang="en-US" sz="1250" dirty="0">
-                        <a:latin typeface="Arial" charset="0"/>
-                        <a:ea typeface="Arial" charset="0"/>
-                        <a:cs typeface="Arial" charset="0"/>
-                      </a:endParaRPr>
-                    </a:p>
-                  </a:txBody>
-                  <a:tcPr marL="45720" marR="45720" marT="45720" marB="45720" anchor="ctr">
-                    <a:lnL w="9525" cap="flat" cmpd="sng" algn="ctr">
-                      <a:solidFill>
-                        <a:srgbClr val="BDBDBD"/>
-                      </a:solidFill>
-                      <a:prstDash val="solid"/>
-                      <a:round/>
-                      <a:headEnd type="none" w="med" len="med"/>
-                      <a:tailEnd type="none" w="med" len="med"/>
-                    </a:lnL>
-                    <a:lnR w="9525" cap="flat" cmpd="sng" algn="ctr">
-                      <a:solidFill>
-                        <a:srgbClr val="BDBDBD"/>
-                      </a:solidFill>
-                      <a:prstDash val="solid"/>
-                      <a:round/>
-                      <a:headEnd type="none" w="med" len="med"/>
-                      <a:tailEnd type="none" w="med" len="med"/>
-                    </a:lnR>
-                    <a:lnT w="9525" cap="flat" cmpd="sng" algn="ctr">
-                      <a:solidFill>
-                        <a:srgbClr val="BDBDBD"/>
-                      </a:solidFill>
-                      <a:prstDash val="solid"/>
-                      <a:round/>
-                      <a:headEnd type="none" w="med" len="med"/>
-                      <a:tailEnd type="none" w="med" len="med"/>
-                    </a:lnT>
-                    <a:lnB w="9525" cap="flat" cmpd="sng" algn="ctr">
-                      <a:solidFill>
-                        <a:srgbClr val="BDBDBD"/>
-                      </a:solidFill>
-                      <a:prstDash val="solid"/>
-                      <a:round/>
-                      <a:headEnd type="none" w="med" len="med"/>
-                      <a:tailEnd type="none" w="med" len="med"/>
-                    </a:lnB>
-                  </a:tcPr>
-                </a:tc>
-              </a:tr>
-              <a:tr h="0">
-                <a:tc>
-                  <a:txBody>
-                    <a:bodyPr/>
-                    <a:lstStyle/>
-                    <a:p>
-                      <a:pPr indent="0" marL="0">
-                        <a:buNone/>
-                      </a:pPr>
-                      <a:r>
-                        <a:rPr lang="en-US" sz="1250" b="1" dirty="0">
-                          <a:solidFill>
-                            <a:srgbClr val="1B1B1B"/>
-                          </a:solidFill>
-                          <a:latin typeface="Arial" pitchFamily="34" charset="0"/>
-                          <a:ea typeface="Arial" pitchFamily="34" charset="-122"/>
-                          <a:cs typeface="Arial" pitchFamily="34" charset="-120"/>
-                        </a:rPr>
-                        <a:t>TCN [38]</a:t>
-                      </a:r>
-                      <a:endParaRPr lang="en-US" sz="1250" dirty="0">
-                        <a:latin typeface="Arial" charset="0"/>
-                        <a:ea typeface="Arial" charset="0"/>
-                        <a:cs typeface="Arial" charset="0"/>
-                      </a:endParaRPr>
-                    </a:p>
-                  </a:txBody>
-                  <a:tcPr marL="45720" marR="45720" marT="45720" marB="45720" anchor="ctr">
-                    <a:lnL w="9525" cap="flat" cmpd="sng" algn="ctr">
-                      <a:solidFill>
-                        <a:srgbClr val="BDBDBD"/>
-                      </a:solidFill>
-                      <a:prstDash val="solid"/>
-                      <a:round/>
-                      <a:headEnd type="none" w="med" len="med"/>
-                      <a:tailEnd type="none" w="med" len="med"/>
-                    </a:lnL>
-                    <a:lnR w="9525" cap="flat" cmpd="sng" algn="ctr">
-                      <a:solidFill>
-                        <a:srgbClr val="BDBDBD"/>
-                      </a:solidFill>
-                      <a:prstDash val="solid"/>
-                      <a:round/>
-                      <a:headEnd type="none" w="med" len="med"/>
-                      <a:tailEnd type="none" w="med" len="med"/>
-                    </a:lnR>
-                    <a:lnT w="9525" cap="flat" cmpd="sng" algn="ctr">
-                      <a:solidFill>
-                        <a:srgbClr val="BDBDBD"/>
-                      </a:solidFill>
-                      <a:prstDash val="solid"/>
-                      <a:round/>
-                      <a:headEnd type="none" w="med" len="med"/>
-                      <a:tailEnd type="none" w="med" len="med"/>
-                    </a:lnT>
-                    <a:lnB w="9525" cap="flat" cmpd="sng" algn="ctr">
-                      <a:solidFill>
-                        <a:srgbClr val="BDBDBD"/>
-                      </a:solidFill>
-                      <a:prstDash val="solid"/>
-                      <a:round/>
-                      <a:headEnd type="none" w="med" len="med"/>
-                      <a:tailEnd type="none" w="med" len="med"/>
-                    </a:lnB>
-                  </a:tcPr>
-                </a:tc>
-                <a:tc>
-                  <a:txBody>
-                    <a:bodyPr/>
-                    <a:lstStyle/>
-                    <a:p>
-                      <a:pPr indent="0" marL="0">
-                        <a:buNone/>
-                      </a:pPr>
-                      <a:r>
-                        <a:rPr lang="en-US" sz="1250" dirty="0">
-                          <a:solidFill>
-                            <a:srgbClr val="1B1B1B"/>
-                          </a:solidFill>
-                          <a:latin typeface="Arial" pitchFamily="34" charset="0"/>
-                          <a:ea typeface="Arial" pitchFamily="34" charset="-122"/>
-                          <a:cs typeface="Arial" pitchFamily="34" charset="-120"/>
-                        </a:rPr>
-                        <a:t>Stacked causal convolutions with a widening reach</a:t>
-                      </a:r>
-                      <a:endParaRPr lang="en-US" sz="1250" dirty="0">
-                        <a:latin typeface="Arial" charset="0"/>
-                        <a:ea typeface="Arial" charset="0"/>
-                        <a:cs typeface="Arial" charset="0"/>
-                      </a:endParaRPr>
-                    </a:p>
-                  </a:txBody>
-                  <a:tcPr marL="45720" marR="45720" marT="45720" marB="45720" anchor="ctr">
-                    <a:lnL w="9525" cap="flat" cmpd="sng" algn="ctr">
-                      <a:solidFill>
-                        <a:srgbClr val="BDBDBD"/>
-                      </a:solidFill>
-                      <a:prstDash val="solid"/>
-                      <a:round/>
-                      <a:headEnd type="none" w="med" len="med"/>
-                      <a:tailEnd type="none" w="med" len="med"/>
-                    </a:lnL>
-                    <a:lnR w="9525" cap="flat" cmpd="sng" algn="ctr">
-                      <a:solidFill>
-                        <a:srgbClr val="BDBDBD"/>
-                      </a:solidFill>
-                      <a:prstDash val="solid"/>
-                      <a:round/>
-                      <a:headEnd type="none" w="med" len="med"/>
-                      <a:tailEnd type="none" w="med" len="med"/>
-                    </a:lnR>
-                    <a:lnT w="9525" cap="flat" cmpd="sng" algn="ctr">
-                      <a:solidFill>
-                        <a:srgbClr val="BDBDBD"/>
-                      </a:solidFill>
-                      <a:prstDash val="solid"/>
-                      <a:round/>
-                      <a:headEnd type="none" w="med" len="med"/>
-                      <a:tailEnd type="none" w="med" len="med"/>
-                    </a:lnT>
-                    <a:lnB w="9525" cap="flat" cmpd="sng" algn="ctr">
-                      <a:solidFill>
-                        <a:srgbClr val="BDBDBD"/>
-                      </a:solidFill>
-                      <a:prstDash val="solid"/>
-                      <a:round/>
-                      <a:headEnd type="none" w="med" len="med"/>
-                      <a:tailEnd type="none" w="med" len="med"/>
-                    </a:lnB>
-                  </a:tcPr>
-                </a:tc>
-                <a:tc>
-                  <a:txBody>
-                    <a:bodyPr/>
-                    <a:lstStyle/>
-                    <a:p>
-                      <a:pPr indent="0" marL="0">
-                        <a:buNone/>
-                      </a:pPr>
-                      <a:r>
-                        <a:rPr lang="en-US" sz="1250" dirty="0">
-                          <a:solidFill>
-                            <a:srgbClr val="1B1B1B"/>
-                          </a:solidFill>
-                          <a:latin typeface="Arial" pitchFamily="34" charset="0"/>
-                          <a:ea typeface="Arial" pitchFamily="34" charset="-122"/>
-                          <a:cs typeface="Arial" pitchFamily="34" charset="-120"/>
-                        </a:rPr>
-                        <a:t>No attention; fixed look-back</a:t>
-                      </a:r>
-                      <a:endParaRPr lang="en-US" sz="1250" dirty="0">
-                        <a:latin typeface="Arial" charset="0"/>
-                        <a:ea typeface="Arial" charset="0"/>
-                        <a:cs typeface="Arial" charset="0"/>
-                      </a:endParaRPr>
-                    </a:p>
-                  </a:txBody>
-                  <a:tcPr marL="45720" marR="45720" marT="45720" marB="45720" anchor="ctr">
-                    <a:lnL w="9525" cap="flat" cmpd="sng" algn="ctr">
-                      <a:solidFill>
-                        <a:srgbClr val="BDBDBD"/>
-                      </a:solidFill>
-                      <a:prstDash val="solid"/>
-                      <a:round/>
-                      <a:headEnd type="none" w="med" len="med"/>
-                      <a:tailEnd type="none" w="med" len="med"/>
-                    </a:lnL>
-                    <a:lnR w="9525" cap="flat" cmpd="sng" algn="ctr">
-                      <a:solidFill>
-                        <a:srgbClr val="BDBDBD"/>
-                      </a:solidFill>
-                      <a:prstDash val="solid"/>
-                      <a:round/>
-                      <a:headEnd type="none" w="med" len="med"/>
-                      <a:tailEnd type="none" w="med" len="med"/>
-                    </a:lnR>
-                    <a:lnT w="9525" cap="flat" cmpd="sng" algn="ctr">
-                      <a:solidFill>
-                        <a:srgbClr val="BDBDBD"/>
-                      </a:solidFill>
-                      <a:prstDash val="solid"/>
-                      <a:round/>
-                      <a:headEnd type="none" w="med" len="med"/>
-                      <a:tailEnd type="none" w="med" len="med"/>
-                    </a:lnT>
-                    <a:lnB w="9525" cap="flat" cmpd="sng" algn="ctr">
-                      <a:solidFill>
-                        <a:srgbClr val="BDBDBD"/>
-                      </a:solidFill>
-                      <a:prstDash val="solid"/>
-                      <a:round/>
-                      <a:headEnd type="none" w="med" len="med"/>
-                      <a:tailEnd type="none" w="med" len="med"/>
-                    </a:lnB>
-                  </a:tcPr>
-                </a:tc>
-                <a:tc>
-                  <a:txBody>
-                    <a:bodyPr/>
-                    <a:lstStyle/>
-                    <a:p>
-                      <a:pPr algn="ctr" indent="0" marL="0">
-                        <a:buNone/>
-                      </a:pPr>
-                      <a:r>
-                        <a:rPr lang="en-US" sz="1250" b="1" dirty="0">
-                          <a:solidFill>
-                            <a:srgbClr val="C8102E"/>
-                          </a:solidFill>
-                          <a:latin typeface="Arial" pitchFamily="34" charset="0"/>
-                          <a:ea typeface="Arial" pitchFamily="34" charset="-122"/>
-                          <a:cs typeface="Arial" pitchFamily="34" charset="-120"/>
-                        </a:rPr>
-                        <a:t>0.17</a:t>
-                      </a:r>
-                      <a:endParaRPr lang="en-US" sz="1250" dirty="0">
-                        <a:latin typeface="Arial" charset="0"/>
-                        <a:ea typeface="Arial" charset="0"/>
-                        <a:cs typeface="Arial" charset="0"/>
-                      </a:endParaRPr>
-                    </a:p>
-                  </a:txBody>
-                  <a:tcPr marL="45720" marR="45720" marT="45720" marB="45720" anchor="ctr">
-                    <a:lnL w="9525" cap="flat" cmpd="sng" algn="ctr">
-                      <a:solidFill>
-                        <a:srgbClr val="BDBDBD"/>
-                      </a:solidFill>
-                      <a:prstDash val="solid"/>
-                      <a:round/>
-                      <a:headEnd type="none" w="med" len="med"/>
-                      <a:tailEnd type="none" w="med" len="med"/>
-                    </a:lnL>
-                    <a:lnR w="9525" cap="flat" cmpd="sng" algn="ctr">
-                      <a:solidFill>
-                        <a:srgbClr val="BDBDBD"/>
-                      </a:solidFill>
-                      <a:prstDash val="solid"/>
-                      <a:round/>
-                      <a:headEnd type="none" w="med" len="med"/>
-                      <a:tailEnd type="none" w="med" len="med"/>
-                    </a:lnR>
-                    <a:lnT w="9525" cap="flat" cmpd="sng" algn="ctr">
-                      <a:solidFill>
-                        <a:srgbClr val="BDBDBD"/>
-                      </a:solidFill>
-                      <a:prstDash val="solid"/>
-                      <a:round/>
-                      <a:headEnd type="none" w="med" len="med"/>
-                      <a:tailEnd type="none" w="med" len="med"/>
-                    </a:lnT>
-                    <a:lnB w="9525" cap="flat" cmpd="sng" algn="ctr">
-                      <a:solidFill>
-                        <a:srgbClr val="BDBDBD"/>
-                      </a:solidFill>
-                      <a:prstDash val="solid"/>
-                      <a:round/>
-                      <a:headEnd type="none" w="med" len="med"/>
-                      <a:tailEnd type="none" w="med" len="med"/>
-                    </a:lnB>
-                  </a:tcPr>
-                </a:tc>
-              </a:tr>
-            </a:tbl>
-          </a:graphicData>
-        </a:graphic>
-      </p:graphicFrame>
+      <p:sp>
+        <p:nvSpPr>
+          <p:cNvPr id="4" name="box"/>
+          <p:cNvSpPr/>
+          <p:nvPr/>
+        </p:nvSpPr>
+        <p:spPr>
+          <a:xfrm>
+            <a:off x="548640" y="1463040"/>
+            <a:ext cx="3429000" cy="457200"/>
+          </a:xfrm>
+          <a:prstGeom prst="rect">
+            <a:avLst/>
+          </a:prstGeom>
+          <a:solidFill>
+            <a:srgbClr val="1B1B1B"/>
+          </a:solidFill>
+          <a:ln w="12700">
+            <a:solidFill>
+              <a:srgbClr val="1B1B1B"/>
+            </a:solidFill>
+            <a:prstDash val="solid"/>
+          </a:ln>
+        </p:spPr>
+      </p:sp>
       <p:sp>
         <p:nvSpPr>
           <p:cNvPr id="5" name="text"/>
@@ -19134,8 +16585,69 @@
         </p:nvSpPr>
         <p:spPr>
           <a:xfrm>
-            <a:off x="548640" y="5760720"/>
-            <a:ext cx="11094415" cy="365760"/>
+            <a:off x="658368" y="1463040"/>
+            <a:ext cx="3209544" cy="457200"/>
+          </a:xfrm>
+          <a:prstGeom prst="rect">
+            <a:avLst/>
+          </a:prstGeom>
+          <a:noFill/>
+          <a:ln/>
+        </p:spPr>
+        <p:txBody>
+          <a:bodyPr wrap="square" lIns="0" tIns="0" rIns="0" bIns="0" rtlCol="0" anchor="ctr"/>
+          <a:lstStyle/>
+          <a:p>
+            <a:pPr algn="l" indent="0" marL="0">
+              <a:buNone/>
+            </a:pPr>
+            <a:r>
+              <a:rPr lang="en-US" sz="1350" b="1" dirty="0">
+                <a:solidFill>
+                  <a:srgbClr val="FFFFFF"/>
+                </a:solidFill>
+              </a:rPr>
+              <a:t>Earlier work: PhysioNet 2019</a:t>
+            </a:r>
+            <a:endParaRPr lang="en-US" sz="1350" dirty="0"/>
+          </a:p>
+        </p:txBody>
+      </p:sp>
+      <p:sp>
+        <p:nvSpPr>
+          <p:cNvPr id="6" name="box"/>
+          <p:cNvSpPr/>
+          <p:nvPr/>
+        </p:nvSpPr>
+        <p:spPr>
+          <a:xfrm>
+            <a:off x="548640" y="2029968"/>
+            <a:ext cx="3429000" cy="886968"/>
+          </a:xfrm>
+          <a:prstGeom prst="rect">
+            <a:avLst/>
+          </a:prstGeom>
+          <a:solidFill>
+            <a:srgbClr val="F2F2F2"/>
+          </a:solidFill>
+          <a:ln w="12700">
+            <a:solidFill>
+              <a:srgbClr val="F2F2F2"/>
+            </a:solidFill>
+            <a:prstDash val="solid"/>
+          </a:ln>
+        </p:spPr>
+      </p:sp>
+      <p:sp>
+        <p:nvSpPr>
+          <p:cNvPr id="7" name="text"/>
+          <p:cNvSpPr txBox="1"/>
+          <p:nvPr/>
+        </p:nvSpPr>
+        <p:spPr>
+          <a:xfrm>
+            <a:off x="658368" y="2066544"/>
+            <a:ext cx="3209544" cy="274320"/>
           </a:xfrm>
           <a:prstGeom prst="rect">
             <a:avLst/>
@@ -19151,20 +16663,1185 @@
               <a:buNone/>
             </a:pPr>
             <a:r>
-              <a:rPr lang="en-US" sz="1100" dirty="0">
-                <a:solidFill>
-                  <a:srgbClr val="5E5E5E"/>
-                </a:solidFill>
-              </a:rPr>
-              <a:t>Utility: normalised utility on the MIMIC-IV development test split, one seed, preliminary [41]. Every 95 % CI is above zero and the intervals overlap, so the order is not a ranking.</a:t>
-            </a:r>
-            <a:endParaRPr lang="en-US" sz="1100" dirty="0"/>
-          </a:p>
-        </p:txBody>
-      </p:sp>
-      <p:sp>
-        <p:nvSpPr>
-          <p:cNvPr id="6" name="references"/>
+              <a:rPr lang="en-US" sz="1300" b="1" dirty="0">
+                <a:solidFill>
+                  <a:srgbClr val="C8102E"/>
+                </a:solidFill>
+              </a:rPr>
+              <a:t>CNN-Transformer</a:t>
+            </a:r>
+            <a:endParaRPr lang="en-US" sz="1300" dirty="0"/>
+          </a:p>
+        </p:txBody>
+      </p:sp>
+      <p:sp>
+        <p:nvSpPr>
+          <p:cNvPr id="8" name="text"/>
+          <p:cNvSpPr txBox="1"/>
+          <p:nvPr/>
+        </p:nvSpPr>
+        <p:spPr>
+          <a:xfrm>
+            <a:off x="658368" y="2340864"/>
+            <a:ext cx="3209544" cy="548640"/>
+          </a:xfrm>
+          <a:prstGeom prst="rect">
+            <a:avLst/>
+          </a:prstGeom>
+          <a:noFill/>
+          <a:ln/>
+        </p:spPr>
+        <p:txBody>
+          <a:bodyPr wrap="square" lIns="0" tIns="0" rIns="0" bIns="0" rtlCol="0" anchor="t"/>
+          <a:lstStyle/>
+          <a:p>
+            <a:pPr algn="l" indent="0" marL="0">
+              <a:buNone/>
+            </a:pPr>
+            <a:r>
+              <a:rPr lang="en-US" sz="1150" dirty="0">
+                <a:solidFill>
+                  <a:srgbClr val="1B1B1B"/>
+                </a:solidFill>
+              </a:rPr>
+              <a:t>Convolution for local patterns, then attention; no clinical structure [36]</a:t>
+            </a:r>
+            <a:endParaRPr lang="en-US" sz="1150" dirty="0"/>
+          </a:p>
+        </p:txBody>
+      </p:sp>
+      <p:sp>
+        <p:nvSpPr>
+          <p:cNvPr id="9" name="box"/>
+          <p:cNvSpPr/>
+          <p:nvPr/>
+        </p:nvSpPr>
+        <p:spPr>
+          <a:xfrm>
+            <a:off x="548640" y="3008376"/>
+            <a:ext cx="3429000" cy="886968"/>
+          </a:xfrm>
+          <a:prstGeom prst="rect">
+            <a:avLst/>
+          </a:prstGeom>
+          <a:solidFill>
+            <a:srgbClr val="F2F2F2"/>
+          </a:solidFill>
+          <a:ln w="12700">
+            <a:solidFill>
+              <a:srgbClr val="F2F2F2"/>
+            </a:solidFill>
+            <a:prstDash val="solid"/>
+          </a:ln>
+        </p:spPr>
+      </p:sp>
+      <p:sp>
+        <p:nvSpPr>
+          <p:cNvPr id="10" name="text"/>
+          <p:cNvSpPr txBox="1"/>
+          <p:nvPr/>
+        </p:nvSpPr>
+        <p:spPr>
+          <a:xfrm>
+            <a:off x="658368" y="3044952"/>
+            <a:ext cx="3209544" cy="274320"/>
+          </a:xfrm>
+          <a:prstGeom prst="rect">
+            <a:avLst/>
+          </a:prstGeom>
+          <a:noFill/>
+          <a:ln/>
+        </p:spPr>
+        <p:txBody>
+          <a:bodyPr wrap="square" lIns="0" tIns="0" rIns="0" bIns="0" rtlCol="0" anchor="t"/>
+          <a:lstStyle/>
+          <a:p>
+            <a:pPr algn="l" indent="0" marL="0">
+              <a:buNone/>
+            </a:pPr>
+            <a:r>
+              <a:rPr lang="en-US" sz="1300" b="1" dirty="0">
+                <a:solidFill>
+                  <a:srgbClr val="C8102E"/>
+                </a:solidFill>
+              </a:rPr>
+              <a:t>OSTA</a:t>
+            </a:r>
+            <a:endParaRPr lang="en-US" sz="1300" dirty="0"/>
+          </a:p>
+        </p:txBody>
+      </p:sp>
+      <p:sp>
+        <p:nvSpPr>
+          <p:cNvPr id="11" name="text"/>
+          <p:cNvSpPr txBox="1"/>
+          <p:nvPr/>
+        </p:nvSpPr>
+        <p:spPr>
+          <a:xfrm>
+            <a:off x="658368" y="3319272"/>
+            <a:ext cx="3209544" cy="548640"/>
+          </a:xfrm>
+          <a:prstGeom prst="rect">
+            <a:avLst/>
+          </a:prstGeom>
+          <a:noFill/>
+          <a:ln/>
+        </p:spPr>
+        <p:txBody>
+          <a:bodyPr wrap="square" lIns="0" tIns="0" rIns="0" bIns="0" rtlCol="0" anchor="t"/>
+          <a:lstStyle/>
+          <a:p>
+            <a:pPr algn="l" indent="0" marL="0">
+              <a:buNone/>
+            </a:pPr>
+            <a:r>
+              <a:rPr lang="en-US" sz="1150" dirty="0">
+                <a:solidFill>
+                  <a:srgbClr val="1B1B1B"/>
+                </a:solidFill>
+              </a:rPr>
+              <a:t>Predictors grouped by organ, as SOFA does, with a risk per organ [7]</a:t>
+            </a:r>
+            <a:endParaRPr lang="en-US" sz="1150" dirty="0"/>
+          </a:p>
+        </p:txBody>
+      </p:sp>
+      <p:sp>
+        <p:nvSpPr>
+          <p:cNvPr id="12" name="box"/>
+          <p:cNvSpPr/>
+          <p:nvPr/>
+        </p:nvSpPr>
+        <p:spPr>
+          <a:xfrm>
+            <a:off x="548640" y="3986784"/>
+            <a:ext cx="3429000" cy="886968"/>
+          </a:xfrm>
+          <a:prstGeom prst="rect">
+            <a:avLst/>
+          </a:prstGeom>
+          <a:solidFill>
+            <a:srgbClr val="F2F2F2"/>
+          </a:solidFill>
+          <a:ln w="12700">
+            <a:solidFill>
+              <a:srgbClr val="F2F2F2"/>
+            </a:solidFill>
+            <a:prstDash val="solid"/>
+          </a:ln>
+        </p:spPr>
+      </p:sp>
+      <p:sp>
+        <p:nvSpPr>
+          <p:cNvPr id="13" name="text"/>
+          <p:cNvSpPr txBox="1"/>
+          <p:nvPr/>
+        </p:nvSpPr>
+        <p:spPr>
+          <a:xfrm>
+            <a:off x="658368" y="4023360"/>
+            <a:ext cx="3209544" cy="274320"/>
+          </a:xfrm>
+          <a:prstGeom prst="rect">
+            <a:avLst/>
+          </a:prstGeom>
+          <a:noFill/>
+          <a:ln/>
+        </p:spPr>
+        <p:txBody>
+          <a:bodyPr wrap="square" lIns="0" tIns="0" rIns="0" bIns="0" rtlCol="0" anchor="t"/>
+          <a:lstStyle/>
+          <a:p>
+            <a:pPr algn="l" indent="0" marL="0">
+              <a:buNone/>
+            </a:pPr>
+            <a:r>
+              <a:rPr lang="en-US" sz="1300" b="1" dirty="0">
+                <a:solidFill>
+                  <a:srgbClr val="C8102E"/>
+                </a:solidFill>
+              </a:rPr>
+              <a:t>Leakage audit</a:t>
+            </a:r>
+            <a:endParaRPr lang="en-US" sz="1300" dirty="0"/>
+          </a:p>
+        </p:txBody>
+      </p:sp>
+      <p:sp>
+        <p:nvSpPr>
+          <p:cNvPr id="14" name="text"/>
+          <p:cNvSpPr txBox="1"/>
+          <p:nvPr/>
+        </p:nvSpPr>
+        <p:spPr>
+          <a:xfrm>
+            <a:off x="658368" y="4297680"/>
+            <a:ext cx="3209544" cy="548640"/>
+          </a:xfrm>
+          <a:prstGeom prst="rect">
+            <a:avLst/>
+          </a:prstGeom>
+          <a:noFill/>
+          <a:ln/>
+        </p:spPr>
+        <p:txBody>
+          <a:bodyPr wrap="square" lIns="0" tIns="0" rIns="0" bIns="0" rtlCol="0" anchor="t"/>
+          <a:lstStyle/>
+          <a:p>
+            <a:pPr algn="l" indent="0" marL="0">
+              <a:buNone/>
+            </a:pPr>
+            <a:r>
+              <a:rPr lang="en-US" sz="1150" dirty="0">
+                <a:solidFill>
+                  <a:srgbClr val="1B1B1B"/>
+                </a:solidFill>
+              </a:rPr>
+              <a:t>Future information found; both retired, OSTA rebuilt causally [18]</a:t>
+            </a:r>
+            <a:endParaRPr lang="en-US" sz="1150" dirty="0"/>
+          </a:p>
+        </p:txBody>
+      </p:sp>
+      <p:sp>
+        <p:nvSpPr>
+          <p:cNvPr id="15" name="box"/>
+          <p:cNvSpPr/>
+          <p:nvPr/>
+        </p:nvSpPr>
+        <p:spPr>
+          <a:xfrm>
+            <a:off x="548640" y="5029200"/>
+            <a:ext cx="3429000" cy="731520"/>
+          </a:xfrm>
+          <a:prstGeom prst="rect">
+            <a:avLst/>
+          </a:prstGeom>
+          <a:solidFill>
+            <a:srgbClr val="FBE3E6"/>
+          </a:solidFill>
+          <a:ln w="12700">
+            <a:solidFill>
+              <a:srgbClr val="FBE3E6"/>
+            </a:solidFill>
+            <a:prstDash val="solid"/>
+          </a:ln>
+        </p:spPr>
+      </p:sp>
+      <p:sp>
+        <p:nvSpPr>
+          <p:cNvPr id="16" name="text"/>
+          <p:cNvSpPr txBox="1"/>
+          <p:nvPr/>
+        </p:nvSpPr>
+        <p:spPr>
+          <a:xfrm>
+            <a:off x="658368" y="5029200"/>
+            <a:ext cx="3209544" cy="731520"/>
+          </a:xfrm>
+          <a:prstGeom prst="rect">
+            <a:avLst/>
+          </a:prstGeom>
+          <a:noFill/>
+          <a:ln/>
+        </p:spPr>
+        <p:txBody>
+          <a:bodyPr wrap="square" lIns="0" tIns="0" rIns="0" bIns="0" rtlCol="0" anchor="ctr"/>
+          <a:lstStyle/>
+          <a:p>
+            <a:pPr algn="l" indent="0" marL="0">
+              <a:buNone/>
+            </a:pPr>
+            <a:r>
+              <a:rPr lang="en-US" sz="1200" b="1" dirty="0">
+                <a:solidFill>
+                  <a:srgbClr val="1B1B1B"/>
+                </a:solidFill>
+              </a:rPr>
+              <a:t>Found: the honest baseline is modest (utility 0.22) [41]</a:t>
+            </a:r>
+            <a:endParaRPr lang="en-US" sz="1200" dirty="0"/>
+          </a:p>
+        </p:txBody>
+      </p:sp>
+      <p:sp>
+        <p:nvSpPr>
+          <p:cNvPr id="17" name="arrow"/>
+          <p:cNvSpPr/>
+          <p:nvPr/>
+        </p:nvSpPr>
+        <p:spPr>
+          <a:xfrm>
+            <a:off x="4014216" y="5394960"/>
+            <a:ext cx="330556" cy="914"/>
+          </a:xfrm>
+          <a:prstGeom prst="line">
+            <a:avLst/>
+          </a:prstGeom>
+          <a:noFill/>
+          <a:ln w="25400">
+            <a:solidFill>
+              <a:srgbClr val="C8102E"/>
+            </a:solidFill>
+            <a:prstDash val="solid"/>
+            <a:tailEnd type="triangle"/>
+          </a:ln>
+        </p:spPr>
+      </p:sp>
+      <p:sp>
+        <p:nvSpPr>
+          <p:cNvPr id="18" name="box"/>
+          <p:cNvSpPr/>
+          <p:nvPr/>
+        </p:nvSpPr>
+        <p:spPr>
+          <a:xfrm>
+            <a:off x="4381348" y="1463040"/>
+            <a:ext cx="3429000" cy="457200"/>
+          </a:xfrm>
+          <a:prstGeom prst="rect">
+            <a:avLst/>
+          </a:prstGeom>
+          <a:solidFill>
+            <a:srgbClr val="1B1B1B"/>
+          </a:solidFill>
+          <a:ln w="12700">
+            <a:solidFill>
+              <a:srgbClr val="1B1B1B"/>
+            </a:solidFill>
+            <a:prstDash val="solid"/>
+          </a:ln>
+        </p:spPr>
+      </p:sp>
+      <p:sp>
+        <p:nvSpPr>
+          <p:cNvPr id="19" name="text"/>
+          <p:cNvSpPr txBox="1"/>
+          <p:nvPr/>
+        </p:nvSpPr>
+        <p:spPr>
+          <a:xfrm>
+            <a:off x="4491076" y="1463040"/>
+            <a:ext cx="3209544" cy="457200"/>
+          </a:xfrm>
+          <a:prstGeom prst="rect">
+            <a:avLst/>
+          </a:prstGeom>
+          <a:noFill/>
+          <a:ln/>
+        </p:spPr>
+        <p:txBody>
+          <a:bodyPr wrap="square" lIns="0" tIns="0" rIns="0" bIns="0" rtlCol="0" anchor="ctr"/>
+          <a:lstStyle/>
+          <a:p>
+            <a:pPr algn="l" indent="0" marL="0">
+              <a:buNone/>
+            </a:pPr>
+            <a:r>
+              <a:rPr lang="en-US" sz="1350" b="1" dirty="0">
+                <a:solidFill>
+                  <a:srgbClr val="FFFFFF"/>
+                </a:solidFill>
+              </a:rPr>
+              <a:t>V10: MIMIC-IV and eICU</a:t>
+            </a:r>
+            <a:endParaRPr lang="en-US" sz="1350" dirty="0"/>
+          </a:p>
+        </p:txBody>
+      </p:sp>
+      <p:sp>
+        <p:nvSpPr>
+          <p:cNvPr id="20" name="box"/>
+          <p:cNvSpPr/>
+          <p:nvPr/>
+        </p:nvSpPr>
+        <p:spPr>
+          <a:xfrm>
+            <a:off x="4381348" y="2029968"/>
+            <a:ext cx="3429000" cy="886968"/>
+          </a:xfrm>
+          <a:prstGeom prst="rect">
+            <a:avLst/>
+          </a:prstGeom>
+          <a:solidFill>
+            <a:srgbClr val="F2F2F2"/>
+          </a:solidFill>
+          <a:ln w="12700">
+            <a:solidFill>
+              <a:srgbClr val="F2F2F2"/>
+            </a:solidFill>
+            <a:prstDash val="solid"/>
+          </a:ln>
+        </p:spPr>
+      </p:sp>
+      <p:sp>
+        <p:nvSpPr>
+          <p:cNvPr id="21" name="text"/>
+          <p:cNvSpPr txBox="1"/>
+          <p:nvPr/>
+        </p:nvSpPr>
+        <p:spPr>
+          <a:xfrm>
+            <a:off x="4491076" y="2066544"/>
+            <a:ext cx="3209544" cy="274320"/>
+          </a:xfrm>
+          <a:prstGeom prst="rect">
+            <a:avLst/>
+          </a:prstGeom>
+          <a:noFill/>
+          <a:ln/>
+        </p:spPr>
+        <p:txBody>
+          <a:bodyPr wrap="square" lIns="0" tIns="0" rIns="0" bIns="0" rtlCol="0" anchor="t"/>
+          <a:lstStyle/>
+          <a:p>
+            <a:pPr algn="l" indent="0" marL="0">
+              <a:buNone/>
+            </a:pPr>
+            <a:r>
+              <a:rPr lang="en-US" sz="1300" b="1" dirty="0">
+                <a:solidFill>
+                  <a:srgbClr val="C8102E"/>
+                </a:solidFill>
+              </a:rPr>
+              <a:t>OSTA + per-organ observers</a:t>
+            </a:r>
+            <a:endParaRPr lang="en-US" sz="1300" dirty="0"/>
+          </a:p>
+        </p:txBody>
+      </p:sp>
+      <p:sp>
+        <p:nvSpPr>
+          <p:cNvPr id="22" name="text"/>
+          <p:cNvSpPr txBox="1"/>
+          <p:nvPr/>
+        </p:nvSpPr>
+        <p:spPr>
+          <a:xfrm>
+            <a:off x="4491076" y="2340864"/>
+            <a:ext cx="3209544" cy="548640"/>
+          </a:xfrm>
+          <a:prstGeom prst="rect">
+            <a:avLst/>
+          </a:prstGeom>
+          <a:noFill/>
+          <a:ln/>
+        </p:spPr>
+        <p:txBody>
+          <a:bodyPr wrap="square" lIns="0" tIns="0" rIns="0" bIns="0" rtlCol="0" anchor="t"/>
+          <a:lstStyle/>
+          <a:p>
+            <a:pPr algn="l" indent="0" marL="0">
+              <a:buNone/>
+            </a:pPr>
+            <a:r>
+              <a:rPr lang="en-US" sz="1150" dirty="0">
+                <a:solidFill>
+                  <a:srgbClr val="1B1B1B"/>
+                </a:solidFill>
+              </a:rPr>
+              <a:t>Small organ models trained on separate patients, like specialty consults</a:t>
+            </a:r>
+            <a:endParaRPr lang="en-US" sz="1150" dirty="0"/>
+          </a:p>
+        </p:txBody>
+      </p:sp>
+      <p:sp>
+        <p:nvSpPr>
+          <p:cNvPr id="23" name="box"/>
+          <p:cNvSpPr/>
+          <p:nvPr/>
+        </p:nvSpPr>
+        <p:spPr>
+          <a:xfrm>
+            <a:off x="4381348" y="3008376"/>
+            <a:ext cx="3429000" cy="886968"/>
+          </a:xfrm>
+          <a:prstGeom prst="rect">
+            <a:avLst/>
+          </a:prstGeom>
+          <a:solidFill>
+            <a:srgbClr val="F2F2F2"/>
+          </a:solidFill>
+          <a:ln w="12700">
+            <a:solidFill>
+              <a:srgbClr val="F2F2F2"/>
+            </a:solidFill>
+            <a:prstDash val="solid"/>
+          </a:ln>
+        </p:spPr>
+      </p:sp>
+      <p:sp>
+        <p:nvSpPr>
+          <p:cNvPr id="24" name="text"/>
+          <p:cNvSpPr txBox="1"/>
+          <p:nvPr/>
+        </p:nvSpPr>
+        <p:spPr>
+          <a:xfrm>
+            <a:off x="4491076" y="3044952"/>
+            <a:ext cx="3209544" cy="274320"/>
+          </a:xfrm>
+          <a:prstGeom prst="rect">
+            <a:avLst/>
+          </a:prstGeom>
+          <a:noFill/>
+          <a:ln/>
+        </p:spPr>
+        <p:txBody>
+          <a:bodyPr wrap="square" lIns="0" tIns="0" rIns="0" bIns="0" rtlCol="0" anchor="t"/>
+          <a:lstStyle/>
+          <a:p>
+            <a:pPr algn="l" indent="0" marL="0">
+              <a:buNone/>
+            </a:pPr>
+            <a:r>
+              <a:rPr lang="en-US" sz="1300" b="1" dirty="0">
+                <a:solidFill>
+                  <a:srgbClr val="C8102E"/>
+                </a:solidFill>
+              </a:rPr>
+              <a:t>Four ways to use them</a:t>
+            </a:r>
+            <a:endParaRPr lang="en-US" sz="1300" dirty="0"/>
+          </a:p>
+        </p:txBody>
+      </p:sp>
+      <p:sp>
+        <p:nvSpPr>
+          <p:cNvPr id="25" name="text"/>
+          <p:cNvSpPr txBox="1"/>
+          <p:nvPr/>
+        </p:nvSpPr>
+        <p:spPr>
+          <a:xfrm>
+            <a:off x="4491076" y="3319272"/>
+            <a:ext cx="3209544" cy="548640"/>
+          </a:xfrm>
+          <a:prstGeom prst="rect">
+            <a:avLst/>
+          </a:prstGeom>
+          <a:noFill/>
+          <a:ln/>
+        </p:spPr>
+        <p:txBody>
+          <a:bodyPr wrap="square" lIns="0" tIns="0" rIns="0" bIns="0" rtlCol="0" anchor="t"/>
+          <a:lstStyle/>
+          <a:p>
+            <a:pPr algn="l" indent="0" marL="0">
+              <a:buNone/>
+            </a:pPr>
+            <a:r>
+              <a:rPr lang="en-US" sz="1150" dirty="0">
+                <a:solidFill>
+                  <a:srgbClr val="1B1B1B"/>
+                </a:solidFill>
+              </a:rPr>
+              <a:t>As inputs; added at the output (fusion); steering cross-organ attention, gated or ungated</a:t>
+            </a:r>
+            <a:endParaRPr lang="en-US" sz="1150" dirty="0"/>
+          </a:p>
+        </p:txBody>
+      </p:sp>
+      <p:sp>
+        <p:nvSpPr>
+          <p:cNvPr id="26" name="box"/>
+          <p:cNvSpPr/>
+          <p:nvPr/>
+        </p:nvSpPr>
+        <p:spPr>
+          <a:xfrm>
+            <a:off x="4381348" y="3986784"/>
+            <a:ext cx="3429000" cy="886968"/>
+          </a:xfrm>
+          <a:prstGeom prst="rect">
+            <a:avLst/>
+          </a:prstGeom>
+          <a:solidFill>
+            <a:srgbClr val="F2F2F2"/>
+          </a:solidFill>
+          <a:ln w="12700">
+            <a:solidFill>
+              <a:srgbClr val="F2F2F2"/>
+            </a:solidFill>
+            <a:prstDash val="solid"/>
+          </a:ln>
+        </p:spPr>
+      </p:sp>
+      <p:sp>
+        <p:nvSpPr>
+          <p:cNvPr id="27" name="text"/>
+          <p:cNvSpPr txBox="1"/>
+          <p:nvPr/>
+        </p:nvSpPr>
+        <p:spPr>
+          <a:xfrm>
+            <a:off x="4491076" y="4023360"/>
+            <a:ext cx="3209544" cy="274320"/>
+          </a:xfrm>
+          <a:prstGeom prst="rect">
+            <a:avLst/>
+          </a:prstGeom>
+          <a:noFill/>
+          <a:ln/>
+        </p:spPr>
+        <p:txBody>
+          <a:bodyPr wrap="square" lIns="0" tIns="0" rIns="0" bIns="0" rtlCol="0" anchor="t"/>
+          <a:lstStyle/>
+          <a:p>
+            <a:pPr algn="l" indent="0" marL="0">
+              <a:buNone/>
+            </a:pPr>
+            <a:r>
+              <a:rPr lang="en-US" sz="1300" b="1" dirty="0">
+                <a:solidFill>
+                  <a:srgbClr val="C8102E"/>
+                </a:solidFill>
+              </a:rPr>
+              <a:t>Controls</a:t>
+            </a:r>
+            <a:endParaRPr lang="en-US" sz="1300" dirty="0"/>
+          </a:p>
+        </p:txBody>
+      </p:sp>
+      <p:sp>
+        <p:nvSpPr>
+          <p:cNvPr id="28" name="text"/>
+          <p:cNvSpPr txBox="1"/>
+          <p:nvPr/>
+        </p:nvSpPr>
+        <p:spPr>
+          <a:xfrm>
+            <a:off x="4491076" y="4297680"/>
+            <a:ext cx="3209544" cy="548640"/>
+          </a:xfrm>
+          <a:prstGeom prst="rect">
+            <a:avLst/>
+          </a:prstGeom>
+          <a:noFill/>
+          <a:ln/>
+        </p:spPr>
+        <p:txBody>
+          <a:bodyPr wrap="square" lIns="0" tIns="0" rIns="0" bIns="0" rtlCol="0" anchor="t"/>
+          <a:lstStyle/>
+          <a:p>
+            <a:pPr algn="l" indent="0" marL="0">
+              <a:buNone/>
+            </a:pPr>
+            <a:r>
+              <a:rPr lang="en-US" sz="1150" dirty="0">
+                <a:solidFill>
+                  <a:srgbClr val="1B1B1B"/>
+                </a:solidFill>
+              </a:rPr>
+              <a:t>Raw values only; extra labelled patients; the original OSTA loss restored</a:t>
+            </a:r>
+            <a:endParaRPr lang="en-US" sz="1150" dirty="0"/>
+          </a:p>
+        </p:txBody>
+      </p:sp>
+      <p:sp>
+        <p:nvSpPr>
+          <p:cNvPr id="29" name="box"/>
+          <p:cNvSpPr/>
+          <p:nvPr/>
+        </p:nvSpPr>
+        <p:spPr>
+          <a:xfrm>
+            <a:off x="4381348" y="5029200"/>
+            <a:ext cx="3429000" cy="731520"/>
+          </a:xfrm>
+          <a:prstGeom prst="rect">
+            <a:avLst/>
+          </a:prstGeom>
+          <a:solidFill>
+            <a:srgbClr val="FBE3E6"/>
+          </a:solidFill>
+          <a:ln w="12700">
+            <a:solidFill>
+              <a:srgbClr val="FBE3E6"/>
+            </a:solidFill>
+            <a:prstDash val="solid"/>
+          </a:ln>
+        </p:spPr>
+      </p:sp>
+      <p:sp>
+        <p:nvSpPr>
+          <p:cNvPr id="30" name="text"/>
+          <p:cNvSpPr txBox="1"/>
+          <p:nvPr/>
+        </p:nvSpPr>
+        <p:spPr>
+          <a:xfrm>
+            <a:off x="4491076" y="5029200"/>
+            <a:ext cx="3209544" cy="731520"/>
+          </a:xfrm>
+          <a:prstGeom prst="rect">
+            <a:avLst/>
+          </a:prstGeom>
+          <a:noFill/>
+          <a:ln/>
+        </p:spPr>
+        <p:txBody>
+          <a:bodyPr wrap="square" lIns="0" tIns="0" rIns="0" bIns="0" rtlCol="0" anchor="ctr"/>
+          <a:lstStyle/>
+          <a:p>
+            <a:pPr algn="l" indent="0" marL="0">
+              <a:buNone/>
+            </a:pPr>
+            <a:r>
+              <a:rPr lang="en-US" sz="1200" b="1" dirty="0">
+                <a:solidFill>
+                  <a:srgbClr val="1B1B1B"/>
+                </a:solidFill>
+              </a:rPr>
+              <a:t>Found: no variant beat OSTA; models peaked within 1 to 3 epochs [41]</a:t>
+            </a:r>
+            <a:endParaRPr lang="en-US" sz="1200" dirty="0"/>
+          </a:p>
+        </p:txBody>
+      </p:sp>
+      <p:sp>
+        <p:nvSpPr>
+          <p:cNvPr id="31" name="arrow"/>
+          <p:cNvSpPr/>
+          <p:nvPr/>
+        </p:nvSpPr>
+        <p:spPr>
+          <a:xfrm>
+            <a:off x="7846924" y="5394960"/>
+            <a:ext cx="330556" cy="914"/>
+          </a:xfrm>
+          <a:prstGeom prst="line">
+            <a:avLst/>
+          </a:prstGeom>
+          <a:noFill/>
+          <a:ln w="25400">
+            <a:solidFill>
+              <a:srgbClr val="C8102E"/>
+            </a:solidFill>
+            <a:prstDash val="solid"/>
+            <a:tailEnd type="triangle"/>
+          </a:ln>
+        </p:spPr>
+      </p:sp>
+      <p:sp>
+        <p:nvSpPr>
+          <p:cNvPr id="32" name="box"/>
+          <p:cNvSpPr/>
+          <p:nvPr/>
+        </p:nvSpPr>
+        <p:spPr>
+          <a:xfrm>
+            <a:off x="8214055" y="1463040"/>
+            <a:ext cx="3429000" cy="457200"/>
+          </a:xfrm>
+          <a:prstGeom prst="rect">
+            <a:avLst/>
+          </a:prstGeom>
+          <a:solidFill>
+            <a:srgbClr val="1B1B1B"/>
+          </a:solidFill>
+          <a:ln w="12700">
+            <a:solidFill>
+              <a:srgbClr val="1B1B1B"/>
+            </a:solidFill>
+            <a:prstDash val="solid"/>
+          </a:ln>
+        </p:spPr>
+      </p:sp>
+      <p:sp>
+        <p:nvSpPr>
+          <p:cNvPr id="33" name="text"/>
+          <p:cNvSpPr txBox="1"/>
+          <p:nvPr/>
+        </p:nvSpPr>
+        <p:spPr>
+          <a:xfrm>
+            <a:off x="8323783" y="1463040"/>
+            <a:ext cx="3209544" cy="457200"/>
+          </a:xfrm>
+          <a:prstGeom prst="rect">
+            <a:avLst/>
+          </a:prstGeom>
+          <a:noFill/>
+          <a:ln/>
+        </p:spPr>
+        <p:txBody>
+          <a:bodyPr wrap="square" lIns="0" tIns="0" rIns="0" bIns="0" rtlCol="0" anchor="ctr"/>
+          <a:lstStyle/>
+          <a:p>
+            <a:pPr algn="l" indent="0" marL="0">
+              <a:buNone/>
+            </a:pPr>
+            <a:r>
+              <a:rPr lang="en-US" sz="1350" b="1" dirty="0">
+                <a:solidFill>
+                  <a:srgbClr val="FFFFFF"/>
+                </a:solidFill>
+              </a:rPr>
+              <a:t>V11: prespecified comparison</a:t>
+            </a:r>
+            <a:endParaRPr lang="en-US" sz="1350" dirty="0"/>
+          </a:p>
+        </p:txBody>
+      </p:sp>
+      <p:sp>
+        <p:nvSpPr>
+          <p:cNvPr id="34" name="box"/>
+          <p:cNvSpPr/>
+          <p:nvPr/>
+        </p:nvSpPr>
+        <p:spPr>
+          <a:xfrm>
+            <a:off x="8214055" y="2029968"/>
+            <a:ext cx="3429000" cy="886968"/>
+          </a:xfrm>
+          <a:prstGeom prst="rect">
+            <a:avLst/>
+          </a:prstGeom>
+          <a:solidFill>
+            <a:srgbClr val="F2F2F2"/>
+          </a:solidFill>
+          <a:ln w="12700">
+            <a:solidFill>
+              <a:srgbClr val="F2F2F2"/>
+            </a:solidFill>
+            <a:prstDash val="solid"/>
+          </a:ln>
+        </p:spPr>
+      </p:sp>
+      <p:sp>
+        <p:nvSpPr>
+          <p:cNvPr id="35" name="text"/>
+          <p:cNvSpPr txBox="1"/>
+          <p:nvPr/>
+        </p:nvSpPr>
+        <p:spPr>
+          <a:xfrm>
+            <a:off x="8323783" y="2066544"/>
+            <a:ext cx="3209544" cy="274320"/>
+          </a:xfrm>
+          <a:prstGeom prst="rect">
+            <a:avLst/>
+          </a:prstGeom>
+          <a:noFill/>
+          <a:ln/>
+        </p:spPr>
+        <p:txBody>
+          <a:bodyPr wrap="square" lIns="0" tIns="0" rIns="0" bIns="0" rtlCol="0" anchor="t"/>
+          <a:lstStyle/>
+          <a:p>
+            <a:pPr algn="l" indent="0" marL="0">
+              <a:buNone/>
+            </a:pPr>
+            <a:r>
+              <a:rPr lang="en-US" sz="1300" b="1" dirty="0">
+                <a:solidFill>
+                  <a:srgbClr val="C8102E"/>
+                </a:solidFill>
+              </a:rPr>
+              <a:t>Test the organ idea</a:t>
+            </a:r>
+            <a:endParaRPr lang="en-US" sz="1300" dirty="0"/>
+          </a:p>
+        </p:txBody>
+      </p:sp>
+      <p:sp>
+        <p:nvSpPr>
+          <p:cNvPr id="36" name="text"/>
+          <p:cNvSpPr txBox="1"/>
+          <p:nvPr/>
+        </p:nvSpPr>
+        <p:spPr>
+          <a:xfrm>
+            <a:off x="8323783" y="2340864"/>
+            <a:ext cx="3209544" cy="548640"/>
+          </a:xfrm>
+          <a:prstGeom prst="rect">
+            <a:avLst/>
+          </a:prstGeom>
+          <a:noFill/>
+          <a:ln/>
+        </p:spPr>
+        <p:txBody>
+          <a:bodyPr wrap="square" lIns="0" tIns="0" rIns="0" bIns="0" rtlCol="0" anchor="t"/>
+          <a:lstStyle/>
+          <a:p>
+            <a:pPr algn="l" indent="0" marL="0">
+              <a:buNone/>
+            </a:pPr>
+            <a:r>
+              <a:rPr lang="en-US" sz="1150" dirty="0">
+                <a:solidFill>
+                  <a:srgbClr val="1B1B1B"/>
+                </a:solidFill>
+              </a:rPr>
+              <a:t>Flat OSTA: the same model without organ grouping</a:t>
+            </a:r>
+            <a:endParaRPr lang="en-US" sz="1150" dirty="0"/>
+          </a:p>
+        </p:txBody>
+      </p:sp>
+      <p:sp>
+        <p:nvSpPr>
+          <p:cNvPr id="37" name="box"/>
+          <p:cNvSpPr/>
+          <p:nvPr/>
+        </p:nvSpPr>
+        <p:spPr>
+          <a:xfrm>
+            <a:off x="8214055" y="3008376"/>
+            <a:ext cx="3429000" cy="886968"/>
+          </a:xfrm>
+          <a:prstGeom prst="rect">
+            <a:avLst/>
+          </a:prstGeom>
+          <a:solidFill>
+            <a:srgbClr val="F2F2F2"/>
+          </a:solidFill>
+          <a:ln w="12700">
+            <a:solidFill>
+              <a:srgbClr val="F2F2F2"/>
+            </a:solidFill>
+            <a:prstDash val="solid"/>
+          </a:ln>
+        </p:spPr>
+      </p:sp>
+      <p:sp>
+        <p:nvSpPr>
+          <p:cNvPr id="38" name="text"/>
+          <p:cNvSpPr txBox="1"/>
+          <p:nvPr/>
+        </p:nvSpPr>
+        <p:spPr>
+          <a:xfrm>
+            <a:off x="8323783" y="3044952"/>
+            <a:ext cx="3209544" cy="274320"/>
+          </a:xfrm>
+          <a:prstGeom prst="rect">
+            <a:avLst/>
+          </a:prstGeom>
+          <a:noFill/>
+          <a:ln/>
+        </p:spPr>
+        <p:txBody>
+          <a:bodyPr wrap="square" lIns="0" tIns="0" rIns="0" bIns="0" rtlCol="0" anchor="t"/>
+          <a:lstStyle/>
+          <a:p>
+            <a:pPr algn="l" indent="0" marL="0">
+              <a:buNone/>
+            </a:pPr>
+            <a:r>
+              <a:rPr lang="en-US" sz="1300" b="1" dirty="0">
+                <a:solidFill>
+                  <a:srgbClr val="C8102E"/>
+                </a:solidFill>
+              </a:rPr>
+              <a:t>Learn from the literature</a:t>
+            </a:r>
+            <a:endParaRPr lang="en-US" sz="1300" dirty="0"/>
+          </a:p>
+        </p:txBody>
+      </p:sp>
+      <p:sp>
+        <p:nvSpPr>
+          <p:cNvPr id="39" name="text"/>
+          <p:cNvSpPr txBox="1"/>
+          <p:nvPr/>
+        </p:nvSpPr>
+        <p:spPr>
+          <a:xfrm>
+            <a:off x="8323783" y="3319272"/>
+            <a:ext cx="3209544" cy="548640"/>
+          </a:xfrm>
+          <a:prstGeom prst="rect">
+            <a:avLst/>
+          </a:prstGeom>
+          <a:noFill/>
+          <a:ln/>
+        </p:spPr>
+        <p:txBody>
+          <a:bodyPr wrap="square" lIns="0" tIns="0" rIns="0" bIns="0" rtlCol="0" anchor="t"/>
+          <a:lstStyle/>
+          <a:p>
+            <a:pPr algn="l" indent="0" marL="0">
+              <a:buNone/>
+            </a:pPr>
+            <a:r>
+              <a:rPr lang="en-US" sz="1150" dirty="0">
+                <a:solidFill>
+                  <a:srgbClr val="1B1B1B"/>
+                </a:solidFill>
+              </a:rPr>
+              <a:t>GRU-D, temporal CNN, the winner's method [37, 38, 21]</a:t>
+            </a:r>
+            <a:endParaRPr lang="en-US" sz="1150" dirty="0"/>
+          </a:p>
+        </p:txBody>
+      </p:sp>
+      <p:sp>
+        <p:nvSpPr>
+          <p:cNvPr id="40" name="box"/>
+          <p:cNvSpPr/>
+          <p:nvPr/>
+        </p:nvSpPr>
+        <p:spPr>
+          <a:xfrm>
+            <a:off x="8214055" y="3986784"/>
+            <a:ext cx="3429000" cy="886968"/>
+          </a:xfrm>
+          <a:prstGeom prst="rect">
+            <a:avLst/>
+          </a:prstGeom>
+          <a:solidFill>
+            <a:srgbClr val="F2F2F2"/>
+          </a:solidFill>
+          <a:ln w="12700">
+            <a:solidFill>
+              <a:srgbClr val="F2F2F2"/>
+            </a:solidFill>
+            <a:prstDash val="solid"/>
+          </a:ln>
+        </p:spPr>
+      </p:sp>
+      <p:sp>
+        <p:nvSpPr>
+          <p:cNvPr id="41" name="text"/>
+          <p:cNvSpPr txBox="1"/>
+          <p:nvPr/>
+        </p:nvSpPr>
+        <p:spPr>
+          <a:xfrm>
+            <a:off x="8323783" y="4023360"/>
+            <a:ext cx="3209544" cy="274320"/>
+          </a:xfrm>
+          <a:prstGeom prst="rect">
+            <a:avLst/>
+          </a:prstGeom>
+          <a:noFill/>
+          <a:ln/>
+        </p:spPr>
+        <p:txBody>
+          <a:bodyPr wrap="square" lIns="0" tIns="0" rIns="0" bIns="0" rtlCol="0" anchor="t"/>
+          <a:lstStyle/>
+          <a:p>
+            <a:pPr algn="l" indent="0" marL="0">
+              <a:buNone/>
+            </a:pPr>
+            <a:r>
+              <a:rPr lang="en-US" sz="1300" b="1" dirty="0">
+                <a:solidFill>
+                  <a:srgbClr val="C8102E"/>
+                </a:solidFill>
+              </a:rPr>
+              <a:t>Use scarce labels better</a:t>
+            </a:r>
+            <a:endParaRPr lang="en-US" sz="1300" dirty="0"/>
+          </a:p>
+        </p:txBody>
+      </p:sp>
+      <p:sp>
+        <p:nvSpPr>
+          <p:cNvPr id="42" name="text"/>
+          <p:cNvSpPr txBox="1"/>
+          <p:nvPr/>
+        </p:nvSpPr>
+        <p:spPr>
+          <a:xfrm>
+            <a:off x="8323783" y="4297680"/>
+            <a:ext cx="3209544" cy="548640"/>
+          </a:xfrm>
+          <a:prstGeom prst="rect">
+            <a:avLst/>
+          </a:prstGeom>
+          <a:noFill/>
+          <a:ln/>
+        </p:spPr>
+        <p:txBody>
+          <a:bodyPr wrap="square" lIns="0" tIns="0" rIns="0" bIns="0" rtlCol="0" anchor="t"/>
+          <a:lstStyle/>
+          <a:p>
+            <a:pPr algn="l" indent="0" marL="0">
+              <a:buNone/>
+            </a:pPr>
+            <a:r>
+              <a:rPr lang="en-US" sz="1150" dirty="0">
+                <a:solidFill>
+                  <a:srgbClr val="1B1B1B"/>
+                </a:solidFill>
+              </a:rPr>
+              <a:t>Self-supervised pretraining, per-channel encoders, hazard head, utility-weighted loss [39]</a:t>
+            </a:r>
+            <a:endParaRPr lang="en-US" sz="1150" dirty="0"/>
+          </a:p>
+        </p:txBody>
+      </p:sp>
+      <p:sp>
+        <p:nvSpPr>
+          <p:cNvPr id="43" name="box"/>
+          <p:cNvSpPr/>
+          <p:nvPr/>
+        </p:nvSpPr>
+        <p:spPr>
+          <a:xfrm>
+            <a:off x="8214055" y="5029200"/>
+            <a:ext cx="3429000" cy="731520"/>
+          </a:xfrm>
+          <a:prstGeom prst="rect">
+            <a:avLst/>
+          </a:prstGeom>
+          <a:solidFill>
+            <a:srgbClr val="FBE3E6"/>
+          </a:solidFill>
+          <a:ln w="12700">
+            <a:solidFill>
+              <a:srgbClr val="FBE3E6"/>
+            </a:solidFill>
+            <a:prstDash val="solid"/>
+          </a:ln>
+        </p:spPr>
+      </p:sp>
+      <p:sp>
+        <p:nvSpPr>
+          <p:cNvPr id="44" name="text"/>
+          <p:cNvSpPr txBox="1"/>
+          <p:nvPr/>
+        </p:nvSpPr>
+        <p:spPr>
+          <a:xfrm>
+            <a:off x="8323783" y="5029200"/>
+            <a:ext cx="3209544" cy="731520"/>
+          </a:xfrm>
+          <a:prstGeom prst="rect">
+            <a:avLst/>
+          </a:prstGeom>
+          <a:noFill/>
+          <a:ln/>
+        </p:spPr>
+        <p:txBody>
+          <a:bodyPr wrap="square" lIns="0" tIns="0" rIns="0" bIns="0" rtlCol="0" anchor="ctr"/>
+          <a:lstStyle/>
+          <a:p>
+            <a:pPr algn="l" indent="0" marL="0">
+              <a:buNone/>
+            </a:pPr>
+            <a:r>
+              <a:rPr lang="en-US" sz="1200" b="1" dirty="0">
+                <a:solidFill>
+                  <a:srgbClr val="1B1B1B"/>
+                </a:solidFill>
+              </a:rPr>
+              <a:t>Found: all 21 models above zero; organ grouping not supported; scale decides [41]</a:t>
+            </a:r>
+            <a:endParaRPr lang="en-US" sz="1200" dirty="0"/>
+          </a:p>
+        </p:txBody>
+      </p:sp>
+      <p:sp>
+        <p:nvSpPr>
+          <p:cNvPr id="45" name="references"/>
           <p:cNvSpPr txBox="1"/>
           <p:nvPr/>
         </p:nvSpPr>
@@ -19192,7 +17869,7 @@
                   <a:srgbClr val="5E5E5E"/>
                 </a:solidFill>
               </a:rPr>
-              <a:t>[21] Morrill et al., Crit Care Med 2020   [36] Vaswani et al., NeurIPS 2017   [37] Che et al., Sci Rep 2018   [38] Bai et al., arXiv 2018   [46] Friedman, Ann Stat 2001</a:t>
+              <a:t>[7] Vincent et al., Intensive Care Med 1996   [18] Kapoor et al., Patterns 2023   [21] Morrill et al., Crit Care Med 2020   [36] Vaswani et al., NeurIPS 2017   [37] Che et al., Sci Rep 2018   [38] Bai et al., arXiv 2018   [39] Yeche et al., ICML 2021   [41] This work, preliminary, unpublished</a:t>
             </a:r>
             <a:endParaRPr lang="en-US" sz="950" dirty="0"/>
           </a:p>
@@ -19339,7 +18016,7 @@
                 <a:ea typeface="Arial" pitchFamily="34" charset="-122"/>
                 <a:cs typeface="Arial" pitchFamily="34" charset="-120"/>
               </a:rPr>
-              <a:t>Every model compared (2 of 2): channel encoders, self-supervised pretraining, ensemble</a:t>
+              <a:t>Every model compared (1 of 2): baselines, the winner's method and sequence models</a:t>
             </a:r>
             <a:endParaRPr lang="en-US" sz="2400" dirty="0"/>
           </a:p>
@@ -19665,6 +18342,2889 @@
                           <a:ea typeface="Arial" pitchFamily="34" charset="-122"/>
                           <a:cs typeface="Arial" pitchFamily="34" charset="-120"/>
                         </a:rPr>
+                        <a:t>Logistic regression</a:t>
+                      </a:r>
+                      <a:endParaRPr lang="en-US" sz="1250" dirty="0">
+                        <a:latin typeface="Arial" charset="0"/>
+                        <a:ea typeface="Arial" charset="0"/>
+                        <a:cs typeface="Arial" charset="0"/>
+                      </a:endParaRPr>
+                    </a:p>
+                  </a:txBody>
+                  <a:tcPr marL="45720" marR="45720" marT="45720" marB="45720" anchor="ctr">
+                    <a:lnL w="9525" cap="flat" cmpd="sng" algn="ctr">
+                      <a:solidFill>
+                        <a:srgbClr val="BDBDBD"/>
+                      </a:solidFill>
+                      <a:prstDash val="solid"/>
+                      <a:round/>
+                      <a:headEnd type="none" w="med" len="med"/>
+                      <a:tailEnd type="none" w="med" len="med"/>
+                    </a:lnL>
+                    <a:lnR w="9525" cap="flat" cmpd="sng" algn="ctr">
+                      <a:solidFill>
+                        <a:srgbClr val="BDBDBD"/>
+                      </a:solidFill>
+                      <a:prstDash val="solid"/>
+                      <a:round/>
+                      <a:headEnd type="none" w="med" len="med"/>
+                      <a:tailEnd type="none" w="med" len="med"/>
+                    </a:lnR>
+                    <a:lnT w="9525" cap="flat" cmpd="sng" algn="ctr">
+                      <a:solidFill>
+                        <a:srgbClr val="BDBDBD"/>
+                      </a:solidFill>
+                      <a:prstDash val="solid"/>
+                      <a:round/>
+                      <a:headEnd type="none" w="med" len="med"/>
+                      <a:tailEnd type="none" w="med" len="med"/>
+                    </a:lnT>
+                    <a:lnB w="9525" cap="flat" cmpd="sng" algn="ctr">
+                      <a:solidFill>
+                        <a:srgbClr val="BDBDBD"/>
+                      </a:solidFill>
+                      <a:prstDash val="solid"/>
+                      <a:round/>
+                      <a:headEnd type="none" w="med" len="med"/>
+                      <a:tailEnd type="none" w="med" len="med"/>
+                    </a:lnB>
+                  </a:tcPr>
+                </a:tc>
+                <a:tc>
+                  <a:txBody>
+                    <a:bodyPr/>
+                    <a:lstStyle/>
+                    <a:p>
+                      <a:pPr indent="0" marL="0">
+                        <a:buNone/>
+                      </a:pPr>
+                      <a:r>
+                        <a:rPr lang="en-US" sz="1250" dirty="0">
+                          <a:solidFill>
+                            <a:srgbClr val="1B1B1B"/>
+                          </a:solidFill>
+                          <a:latin typeface="Arial" pitchFamily="34" charset="0"/>
+                          <a:ea typeface="Arial" pitchFamily="34" charset="-122"/>
+                          <a:cs typeface="Arial" pitchFamily="34" charset="-120"/>
+                        </a:rPr>
+                        <a:t>One weighted sum of the current hour's predictors</a:t>
+                      </a:r>
+                      <a:endParaRPr lang="en-US" sz="1250" dirty="0">
+                        <a:latin typeface="Arial" charset="0"/>
+                        <a:ea typeface="Arial" charset="0"/>
+                        <a:cs typeface="Arial" charset="0"/>
+                      </a:endParaRPr>
+                    </a:p>
+                  </a:txBody>
+                  <a:tcPr marL="45720" marR="45720" marT="45720" marB="45720" anchor="ctr">
+                    <a:lnL w="9525" cap="flat" cmpd="sng" algn="ctr">
+                      <a:solidFill>
+                        <a:srgbClr val="BDBDBD"/>
+                      </a:solidFill>
+                      <a:prstDash val="solid"/>
+                      <a:round/>
+                      <a:headEnd type="none" w="med" len="med"/>
+                      <a:tailEnd type="none" w="med" len="med"/>
+                    </a:lnL>
+                    <a:lnR w="9525" cap="flat" cmpd="sng" algn="ctr">
+                      <a:solidFill>
+                        <a:srgbClr val="BDBDBD"/>
+                      </a:solidFill>
+                      <a:prstDash val="solid"/>
+                      <a:round/>
+                      <a:headEnd type="none" w="med" len="med"/>
+                      <a:tailEnd type="none" w="med" len="med"/>
+                    </a:lnR>
+                    <a:lnT w="9525" cap="flat" cmpd="sng" algn="ctr">
+                      <a:solidFill>
+                        <a:srgbClr val="BDBDBD"/>
+                      </a:solidFill>
+                      <a:prstDash val="solid"/>
+                      <a:round/>
+                      <a:headEnd type="none" w="med" len="med"/>
+                      <a:tailEnd type="none" w="med" len="med"/>
+                    </a:lnT>
+                    <a:lnB w="9525" cap="flat" cmpd="sng" algn="ctr">
+                      <a:solidFill>
+                        <a:srgbClr val="BDBDBD"/>
+                      </a:solidFill>
+                      <a:prstDash val="solid"/>
+                      <a:round/>
+                      <a:headEnd type="none" w="med" len="med"/>
+                      <a:tailEnd type="none" w="med" len="med"/>
+                    </a:lnB>
+                  </a:tcPr>
+                </a:tc>
+                <a:tc>
+                  <a:txBody>
+                    <a:bodyPr/>
+                    <a:lstStyle/>
+                    <a:p>
+                      <a:pPr indent="0" marL="0">
+                        <a:buNone/>
+                      </a:pPr>
+                      <a:r>
+                        <a:rPr lang="en-US" sz="1250" dirty="0">
+                          <a:solidFill>
+                            <a:srgbClr val="1B1B1B"/>
+                          </a:solidFill>
+                          <a:latin typeface="Arial" pitchFamily="34" charset="0"/>
+                          <a:ea typeface="Arial" pitchFamily="34" charset="-122"/>
+                          <a:cs typeface="Arial" pitchFamily="34" charset="-120"/>
+                        </a:rPr>
+                        <a:t>No time modelling: the floor every model must beat</a:t>
+                      </a:r>
+                      <a:endParaRPr lang="en-US" sz="1250" dirty="0">
+                        <a:latin typeface="Arial" charset="0"/>
+                        <a:ea typeface="Arial" charset="0"/>
+                        <a:cs typeface="Arial" charset="0"/>
+                      </a:endParaRPr>
+                    </a:p>
+                  </a:txBody>
+                  <a:tcPr marL="45720" marR="45720" marT="45720" marB="45720" anchor="ctr">
+                    <a:lnL w="9525" cap="flat" cmpd="sng" algn="ctr">
+                      <a:solidFill>
+                        <a:srgbClr val="BDBDBD"/>
+                      </a:solidFill>
+                      <a:prstDash val="solid"/>
+                      <a:round/>
+                      <a:headEnd type="none" w="med" len="med"/>
+                      <a:tailEnd type="none" w="med" len="med"/>
+                    </a:lnL>
+                    <a:lnR w="9525" cap="flat" cmpd="sng" algn="ctr">
+                      <a:solidFill>
+                        <a:srgbClr val="BDBDBD"/>
+                      </a:solidFill>
+                      <a:prstDash val="solid"/>
+                      <a:round/>
+                      <a:headEnd type="none" w="med" len="med"/>
+                      <a:tailEnd type="none" w="med" len="med"/>
+                    </a:lnR>
+                    <a:lnT w="9525" cap="flat" cmpd="sng" algn="ctr">
+                      <a:solidFill>
+                        <a:srgbClr val="BDBDBD"/>
+                      </a:solidFill>
+                      <a:prstDash val="solid"/>
+                      <a:round/>
+                      <a:headEnd type="none" w="med" len="med"/>
+                      <a:tailEnd type="none" w="med" len="med"/>
+                    </a:lnT>
+                    <a:lnB w="9525" cap="flat" cmpd="sng" algn="ctr">
+                      <a:solidFill>
+                        <a:srgbClr val="BDBDBD"/>
+                      </a:solidFill>
+                      <a:prstDash val="solid"/>
+                      <a:round/>
+                      <a:headEnd type="none" w="med" len="med"/>
+                      <a:tailEnd type="none" w="med" len="med"/>
+                    </a:lnB>
+                  </a:tcPr>
+                </a:tc>
+                <a:tc>
+                  <a:txBody>
+                    <a:bodyPr/>
+                    <a:lstStyle/>
+                    <a:p>
+                      <a:pPr algn="ctr" indent="0" marL="0">
+                        <a:buNone/>
+                      </a:pPr>
+                      <a:r>
+                        <a:rPr lang="en-US" sz="1250" b="1" dirty="0">
+                          <a:solidFill>
+                            <a:srgbClr val="C8102E"/>
+                          </a:solidFill>
+                          <a:latin typeface="Arial" pitchFamily="34" charset="0"/>
+                          <a:ea typeface="Arial" pitchFamily="34" charset="-122"/>
+                          <a:cs typeface="Arial" pitchFamily="34" charset="-120"/>
+                        </a:rPr>
+                        <a:t>0.08</a:t>
+                      </a:r>
+                      <a:endParaRPr lang="en-US" sz="1250" dirty="0">
+                        <a:latin typeface="Arial" charset="0"/>
+                        <a:ea typeface="Arial" charset="0"/>
+                        <a:cs typeface="Arial" charset="0"/>
+                      </a:endParaRPr>
+                    </a:p>
+                  </a:txBody>
+                  <a:tcPr marL="45720" marR="45720" marT="45720" marB="45720" anchor="ctr">
+                    <a:lnL w="9525" cap="flat" cmpd="sng" algn="ctr">
+                      <a:solidFill>
+                        <a:srgbClr val="BDBDBD"/>
+                      </a:solidFill>
+                      <a:prstDash val="solid"/>
+                      <a:round/>
+                      <a:headEnd type="none" w="med" len="med"/>
+                      <a:tailEnd type="none" w="med" len="med"/>
+                    </a:lnL>
+                    <a:lnR w="9525" cap="flat" cmpd="sng" algn="ctr">
+                      <a:solidFill>
+                        <a:srgbClr val="BDBDBD"/>
+                      </a:solidFill>
+                      <a:prstDash val="solid"/>
+                      <a:round/>
+                      <a:headEnd type="none" w="med" len="med"/>
+                      <a:tailEnd type="none" w="med" len="med"/>
+                    </a:lnR>
+                    <a:lnT w="9525" cap="flat" cmpd="sng" algn="ctr">
+                      <a:solidFill>
+                        <a:srgbClr val="BDBDBD"/>
+                      </a:solidFill>
+                      <a:prstDash val="solid"/>
+                      <a:round/>
+                      <a:headEnd type="none" w="med" len="med"/>
+                      <a:tailEnd type="none" w="med" len="med"/>
+                    </a:lnT>
+                    <a:lnB w="9525" cap="flat" cmpd="sng" algn="ctr">
+                      <a:solidFill>
+                        <a:srgbClr val="BDBDBD"/>
+                      </a:solidFill>
+                      <a:prstDash val="solid"/>
+                      <a:round/>
+                      <a:headEnd type="none" w="med" len="med"/>
+                      <a:tailEnd type="none" w="med" len="med"/>
+                    </a:lnB>
+                  </a:tcPr>
+                </a:tc>
+              </a:tr>
+              <a:tr h="0">
+                <a:tc>
+                  <a:txBody>
+                    <a:bodyPr/>
+                    <a:lstStyle/>
+                    <a:p>
+                      <a:pPr indent="0" marL="0">
+                        <a:buNone/>
+                      </a:pPr>
+                      <a:r>
+                        <a:rPr lang="en-US" sz="1250" b="1" dirty="0">
+                          <a:solidFill>
+                            <a:srgbClr val="1B1B1B"/>
+                          </a:solidFill>
+                          <a:latin typeface="Arial" pitchFamily="34" charset="0"/>
+                          <a:ea typeface="Arial" pitchFamily="34" charset="-122"/>
+                          <a:cs typeface="Arial" pitchFamily="34" charset="-120"/>
+                        </a:rPr>
+                        <a:t>Boosted trees [46]</a:t>
+                      </a:r>
+                      <a:endParaRPr lang="en-US" sz="1250" dirty="0">
+                        <a:latin typeface="Arial" charset="0"/>
+                        <a:ea typeface="Arial" charset="0"/>
+                        <a:cs typeface="Arial" charset="0"/>
+                      </a:endParaRPr>
+                    </a:p>
+                  </a:txBody>
+                  <a:tcPr marL="45720" marR="45720" marT="45720" marB="45720" anchor="ctr">
+                    <a:lnL w="9525" cap="flat" cmpd="sng" algn="ctr">
+                      <a:solidFill>
+                        <a:srgbClr val="BDBDBD"/>
+                      </a:solidFill>
+                      <a:prstDash val="solid"/>
+                      <a:round/>
+                      <a:headEnd type="none" w="med" len="med"/>
+                      <a:tailEnd type="none" w="med" len="med"/>
+                    </a:lnL>
+                    <a:lnR w="9525" cap="flat" cmpd="sng" algn="ctr">
+                      <a:solidFill>
+                        <a:srgbClr val="BDBDBD"/>
+                      </a:solidFill>
+                      <a:prstDash val="solid"/>
+                      <a:round/>
+                      <a:headEnd type="none" w="med" len="med"/>
+                      <a:tailEnd type="none" w="med" len="med"/>
+                    </a:lnR>
+                    <a:lnT w="9525" cap="flat" cmpd="sng" algn="ctr">
+                      <a:solidFill>
+                        <a:srgbClr val="BDBDBD"/>
+                      </a:solidFill>
+                      <a:prstDash val="solid"/>
+                      <a:round/>
+                      <a:headEnd type="none" w="med" len="med"/>
+                      <a:tailEnd type="none" w="med" len="med"/>
+                    </a:lnT>
+                    <a:lnB w="9525" cap="flat" cmpd="sng" algn="ctr">
+                      <a:solidFill>
+                        <a:srgbClr val="BDBDBD"/>
+                      </a:solidFill>
+                      <a:prstDash val="solid"/>
+                      <a:round/>
+                      <a:headEnd type="none" w="med" len="med"/>
+                      <a:tailEnd type="none" w="med" len="med"/>
+                    </a:lnB>
+                  </a:tcPr>
+                </a:tc>
+                <a:tc>
+                  <a:txBody>
+                    <a:bodyPr/>
+                    <a:lstStyle/>
+                    <a:p>
+                      <a:pPr indent="0" marL="0">
+                        <a:buNone/>
+                      </a:pPr>
+                      <a:r>
+                        <a:rPr lang="en-US" sz="1250" dirty="0">
+                          <a:solidFill>
+                            <a:srgbClr val="1B1B1B"/>
+                          </a:solidFill>
+                          <a:latin typeface="Arial" pitchFamily="34" charset="0"/>
+                          <a:ea typeface="Arial" pitchFamily="34" charset="-122"/>
+                          <a:cs typeface="Arial" pitchFamily="34" charset="-120"/>
+                        </a:rPr>
+                        <a:t>Many small decision trees, each correcting the last</a:t>
+                      </a:r>
+                      <a:endParaRPr lang="en-US" sz="1250" dirty="0">
+                        <a:latin typeface="Arial" charset="0"/>
+                        <a:ea typeface="Arial" charset="0"/>
+                        <a:cs typeface="Arial" charset="0"/>
+                      </a:endParaRPr>
+                    </a:p>
+                  </a:txBody>
+                  <a:tcPr marL="45720" marR="45720" marT="45720" marB="45720" anchor="ctr">
+                    <a:lnL w="9525" cap="flat" cmpd="sng" algn="ctr">
+                      <a:solidFill>
+                        <a:srgbClr val="BDBDBD"/>
+                      </a:solidFill>
+                      <a:prstDash val="solid"/>
+                      <a:round/>
+                      <a:headEnd type="none" w="med" len="med"/>
+                      <a:tailEnd type="none" w="med" len="med"/>
+                    </a:lnL>
+                    <a:lnR w="9525" cap="flat" cmpd="sng" algn="ctr">
+                      <a:solidFill>
+                        <a:srgbClr val="BDBDBD"/>
+                      </a:solidFill>
+                      <a:prstDash val="solid"/>
+                      <a:round/>
+                      <a:headEnd type="none" w="med" len="med"/>
+                      <a:tailEnd type="none" w="med" len="med"/>
+                    </a:lnR>
+                    <a:lnT w="9525" cap="flat" cmpd="sng" algn="ctr">
+                      <a:solidFill>
+                        <a:srgbClr val="BDBDBD"/>
+                      </a:solidFill>
+                      <a:prstDash val="solid"/>
+                      <a:round/>
+                      <a:headEnd type="none" w="med" len="med"/>
+                      <a:tailEnd type="none" w="med" len="med"/>
+                    </a:lnT>
+                    <a:lnB w="9525" cap="flat" cmpd="sng" algn="ctr">
+                      <a:solidFill>
+                        <a:srgbClr val="BDBDBD"/>
+                      </a:solidFill>
+                      <a:prstDash val="solid"/>
+                      <a:round/>
+                      <a:headEnd type="none" w="med" len="med"/>
+                      <a:tailEnd type="none" w="med" len="med"/>
+                    </a:lnB>
+                  </a:tcPr>
+                </a:tc>
+                <a:tc>
+                  <a:txBody>
+                    <a:bodyPr/>
+                    <a:lstStyle/>
+                    <a:p>
+                      <a:pPr indent="0" marL="0">
+                        <a:buNone/>
+                      </a:pPr>
+                      <a:r>
+                        <a:rPr lang="en-US" sz="1250" dirty="0">
+                          <a:solidFill>
+                            <a:srgbClr val="1B1B1B"/>
+                          </a:solidFill>
+                          <a:latin typeface="Arial" pitchFamily="34" charset="0"/>
+                          <a:ea typeface="Arial" pitchFamily="34" charset="-122"/>
+                          <a:cs typeface="Arial" pitchFamily="34" charset="-120"/>
+                        </a:rPr>
+                        <a:t>Non-linear thresholds, but sees one hour at a time</a:t>
+                      </a:r>
+                      <a:endParaRPr lang="en-US" sz="1250" dirty="0">
+                        <a:latin typeface="Arial" charset="0"/>
+                        <a:ea typeface="Arial" charset="0"/>
+                        <a:cs typeface="Arial" charset="0"/>
+                      </a:endParaRPr>
+                    </a:p>
+                  </a:txBody>
+                  <a:tcPr marL="45720" marR="45720" marT="45720" marB="45720" anchor="ctr">
+                    <a:lnL w="9525" cap="flat" cmpd="sng" algn="ctr">
+                      <a:solidFill>
+                        <a:srgbClr val="BDBDBD"/>
+                      </a:solidFill>
+                      <a:prstDash val="solid"/>
+                      <a:round/>
+                      <a:headEnd type="none" w="med" len="med"/>
+                      <a:tailEnd type="none" w="med" len="med"/>
+                    </a:lnL>
+                    <a:lnR w="9525" cap="flat" cmpd="sng" algn="ctr">
+                      <a:solidFill>
+                        <a:srgbClr val="BDBDBD"/>
+                      </a:solidFill>
+                      <a:prstDash val="solid"/>
+                      <a:round/>
+                      <a:headEnd type="none" w="med" len="med"/>
+                      <a:tailEnd type="none" w="med" len="med"/>
+                    </a:lnR>
+                    <a:lnT w="9525" cap="flat" cmpd="sng" algn="ctr">
+                      <a:solidFill>
+                        <a:srgbClr val="BDBDBD"/>
+                      </a:solidFill>
+                      <a:prstDash val="solid"/>
+                      <a:round/>
+                      <a:headEnd type="none" w="med" len="med"/>
+                      <a:tailEnd type="none" w="med" len="med"/>
+                    </a:lnT>
+                    <a:lnB w="9525" cap="flat" cmpd="sng" algn="ctr">
+                      <a:solidFill>
+                        <a:srgbClr val="BDBDBD"/>
+                      </a:solidFill>
+                      <a:prstDash val="solid"/>
+                      <a:round/>
+                      <a:headEnd type="none" w="med" len="med"/>
+                      <a:tailEnd type="none" w="med" len="med"/>
+                    </a:lnB>
+                  </a:tcPr>
+                </a:tc>
+                <a:tc>
+                  <a:txBody>
+                    <a:bodyPr/>
+                    <a:lstStyle/>
+                    <a:p>
+                      <a:pPr algn="ctr" indent="0" marL="0">
+                        <a:buNone/>
+                      </a:pPr>
+                      <a:r>
+                        <a:rPr lang="en-US" sz="1250" b="1" dirty="0">
+                          <a:solidFill>
+                            <a:srgbClr val="C8102E"/>
+                          </a:solidFill>
+                          <a:latin typeface="Arial" pitchFamily="34" charset="0"/>
+                          <a:ea typeface="Arial" pitchFamily="34" charset="-122"/>
+                          <a:cs typeface="Arial" pitchFamily="34" charset="-120"/>
+                        </a:rPr>
+                        <a:t>0.10</a:t>
+                      </a:r>
+                      <a:endParaRPr lang="en-US" sz="1250" dirty="0">
+                        <a:latin typeface="Arial" charset="0"/>
+                        <a:ea typeface="Arial" charset="0"/>
+                        <a:cs typeface="Arial" charset="0"/>
+                      </a:endParaRPr>
+                    </a:p>
+                  </a:txBody>
+                  <a:tcPr marL="45720" marR="45720" marT="45720" marB="45720" anchor="ctr">
+                    <a:lnL w="9525" cap="flat" cmpd="sng" algn="ctr">
+                      <a:solidFill>
+                        <a:srgbClr val="BDBDBD"/>
+                      </a:solidFill>
+                      <a:prstDash val="solid"/>
+                      <a:round/>
+                      <a:headEnd type="none" w="med" len="med"/>
+                      <a:tailEnd type="none" w="med" len="med"/>
+                    </a:lnL>
+                    <a:lnR w="9525" cap="flat" cmpd="sng" algn="ctr">
+                      <a:solidFill>
+                        <a:srgbClr val="BDBDBD"/>
+                      </a:solidFill>
+                      <a:prstDash val="solid"/>
+                      <a:round/>
+                      <a:headEnd type="none" w="med" len="med"/>
+                      <a:tailEnd type="none" w="med" len="med"/>
+                    </a:lnR>
+                    <a:lnT w="9525" cap="flat" cmpd="sng" algn="ctr">
+                      <a:solidFill>
+                        <a:srgbClr val="BDBDBD"/>
+                      </a:solidFill>
+                      <a:prstDash val="solid"/>
+                      <a:round/>
+                      <a:headEnd type="none" w="med" len="med"/>
+                      <a:tailEnd type="none" w="med" len="med"/>
+                    </a:lnT>
+                    <a:lnB w="9525" cap="flat" cmpd="sng" algn="ctr">
+                      <a:solidFill>
+                        <a:srgbClr val="BDBDBD"/>
+                      </a:solidFill>
+                      <a:prstDash val="solid"/>
+                      <a:round/>
+                      <a:headEnd type="none" w="med" len="med"/>
+                      <a:tailEnd type="none" w="med" len="med"/>
+                    </a:lnB>
+                  </a:tcPr>
+                </a:tc>
+              </a:tr>
+              <a:tr h="0">
+                <a:tc>
+                  <a:txBody>
+                    <a:bodyPr/>
+                    <a:lstStyle/>
+                    <a:p>
+                      <a:pPr indent="0" marL="0">
+                        <a:buNone/>
+                      </a:pPr>
+                      <a:r>
+                        <a:rPr lang="en-US" sz="1250" b="1" dirty="0">
+                          <a:solidFill>
+                            <a:srgbClr val="1B1B1B"/>
+                          </a:solidFill>
+                          <a:latin typeface="Arial" pitchFamily="34" charset="0"/>
+                          <a:ea typeface="Arial" pitchFamily="34" charset="-122"/>
+                          <a:cs typeface="Arial" pitchFamily="34" charset="-120"/>
+                        </a:rPr>
+                        <a:t>Signatures + boosted trees [21]</a:t>
+                      </a:r>
+                      <a:endParaRPr lang="en-US" sz="1250" dirty="0">
+                        <a:latin typeface="Arial" charset="0"/>
+                        <a:ea typeface="Arial" charset="0"/>
+                        <a:cs typeface="Arial" charset="0"/>
+                      </a:endParaRPr>
+                    </a:p>
+                  </a:txBody>
+                  <a:tcPr marL="45720" marR="45720" marT="45720" marB="45720" anchor="ctr">
+                    <a:lnL w="9525" cap="flat" cmpd="sng" algn="ctr">
+                      <a:solidFill>
+                        <a:srgbClr val="BDBDBD"/>
+                      </a:solidFill>
+                      <a:prstDash val="solid"/>
+                      <a:round/>
+                      <a:headEnd type="none" w="med" len="med"/>
+                      <a:tailEnd type="none" w="med" len="med"/>
+                    </a:lnL>
+                    <a:lnR w="9525" cap="flat" cmpd="sng" algn="ctr">
+                      <a:solidFill>
+                        <a:srgbClr val="BDBDBD"/>
+                      </a:solidFill>
+                      <a:prstDash val="solid"/>
+                      <a:round/>
+                      <a:headEnd type="none" w="med" len="med"/>
+                      <a:tailEnd type="none" w="med" len="med"/>
+                    </a:lnR>
+                    <a:lnT w="9525" cap="flat" cmpd="sng" algn="ctr">
+                      <a:solidFill>
+                        <a:srgbClr val="BDBDBD"/>
+                      </a:solidFill>
+                      <a:prstDash val="solid"/>
+                      <a:round/>
+                      <a:headEnd type="none" w="med" len="med"/>
+                      <a:tailEnd type="none" w="med" len="med"/>
+                    </a:lnT>
+                    <a:lnB w="9525" cap="flat" cmpd="sng" algn="ctr">
+                      <a:solidFill>
+                        <a:srgbClr val="BDBDBD"/>
+                      </a:solidFill>
+                      <a:prstDash val="solid"/>
+                      <a:round/>
+                      <a:headEnd type="none" w="med" len="med"/>
+                      <a:tailEnd type="none" w="med" len="med"/>
+                    </a:lnB>
+                  </a:tcPr>
+                </a:tc>
+                <a:tc>
+                  <a:txBody>
+                    <a:bodyPr/>
+                    <a:lstStyle/>
+                    <a:p>
+                      <a:pPr indent="0" marL="0">
+                        <a:buNone/>
+                      </a:pPr>
+                      <a:r>
+                        <a:rPr lang="en-US" sz="1250" dirty="0">
+                          <a:solidFill>
+                            <a:srgbClr val="1B1B1B"/>
+                          </a:solidFill>
+                          <a:latin typeface="Arial" pitchFamily="34" charset="0"/>
+                          <a:ea typeface="Arial" pitchFamily="34" charset="-122"/>
+                          <a:cs typeface="Arial" pitchFamily="34" charset="-120"/>
+                        </a:rPr>
+                        <a:t>Recent trajectories summarised as path signatures, then boosted trees</a:t>
+                      </a:r>
+                      <a:endParaRPr lang="en-US" sz="1250" dirty="0">
+                        <a:latin typeface="Arial" charset="0"/>
+                        <a:ea typeface="Arial" charset="0"/>
+                        <a:cs typeface="Arial" charset="0"/>
+                      </a:endParaRPr>
+                    </a:p>
+                  </a:txBody>
+                  <a:tcPr marL="45720" marR="45720" marT="45720" marB="45720" anchor="ctr">
+                    <a:lnL w="9525" cap="flat" cmpd="sng" algn="ctr">
+                      <a:solidFill>
+                        <a:srgbClr val="BDBDBD"/>
+                      </a:solidFill>
+                      <a:prstDash val="solid"/>
+                      <a:round/>
+                      <a:headEnd type="none" w="med" len="med"/>
+                      <a:tailEnd type="none" w="med" len="med"/>
+                    </a:lnL>
+                    <a:lnR w="9525" cap="flat" cmpd="sng" algn="ctr">
+                      <a:solidFill>
+                        <a:srgbClr val="BDBDBD"/>
+                      </a:solidFill>
+                      <a:prstDash val="solid"/>
+                      <a:round/>
+                      <a:headEnd type="none" w="med" len="med"/>
+                      <a:tailEnd type="none" w="med" len="med"/>
+                    </a:lnR>
+                    <a:lnT w="9525" cap="flat" cmpd="sng" algn="ctr">
+                      <a:solidFill>
+                        <a:srgbClr val="BDBDBD"/>
+                      </a:solidFill>
+                      <a:prstDash val="solid"/>
+                      <a:round/>
+                      <a:headEnd type="none" w="med" len="med"/>
+                      <a:tailEnd type="none" w="med" len="med"/>
+                    </a:lnT>
+                    <a:lnB w="9525" cap="flat" cmpd="sng" algn="ctr">
+                      <a:solidFill>
+                        <a:srgbClr val="BDBDBD"/>
+                      </a:solidFill>
+                      <a:prstDash val="solid"/>
+                      <a:round/>
+                      <a:headEnd type="none" w="med" len="med"/>
+                      <a:tailEnd type="none" w="med" len="med"/>
+                    </a:lnB>
+                  </a:tcPr>
+                </a:tc>
+                <a:tc>
+                  <a:txBody>
+                    <a:bodyPr/>
+                    <a:lstStyle/>
+                    <a:p>
+                      <a:pPr indent="0" marL="0">
+                        <a:buNone/>
+                      </a:pPr>
+                      <a:r>
+                        <a:rPr lang="en-US" sz="1250" dirty="0">
+                          <a:solidFill>
+                            <a:srgbClr val="1B1B1B"/>
+                          </a:solidFill>
+                          <a:latin typeface="Arial" pitchFamily="34" charset="0"/>
+                          <a:ea typeface="Arial" pitchFamily="34" charset="-122"/>
+                          <a:cs typeface="Arial" pitchFamily="34" charset="-120"/>
+                        </a:rPr>
+                        <a:t>The PhysioNet 2019 winner's method; time enters through fixed summaries</a:t>
+                      </a:r>
+                      <a:endParaRPr lang="en-US" sz="1250" dirty="0">
+                        <a:latin typeface="Arial" charset="0"/>
+                        <a:ea typeface="Arial" charset="0"/>
+                        <a:cs typeface="Arial" charset="0"/>
+                      </a:endParaRPr>
+                    </a:p>
+                  </a:txBody>
+                  <a:tcPr marL="45720" marR="45720" marT="45720" marB="45720" anchor="ctr">
+                    <a:lnL w="9525" cap="flat" cmpd="sng" algn="ctr">
+                      <a:solidFill>
+                        <a:srgbClr val="BDBDBD"/>
+                      </a:solidFill>
+                      <a:prstDash val="solid"/>
+                      <a:round/>
+                      <a:headEnd type="none" w="med" len="med"/>
+                      <a:tailEnd type="none" w="med" len="med"/>
+                    </a:lnL>
+                    <a:lnR w="9525" cap="flat" cmpd="sng" algn="ctr">
+                      <a:solidFill>
+                        <a:srgbClr val="BDBDBD"/>
+                      </a:solidFill>
+                      <a:prstDash val="solid"/>
+                      <a:round/>
+                      <a:headEnd type="none" w="med" len="med"/>
+                      <a:tailEnd type="none" w="med" len="med"/>
+                    </a:lnR>
+                    <a:lnT w="9525" cap="flat" cmpd="sng" algn="ctr">
+                      <a:solidFill>
+                        <a:srgbClr val="BDBDBD"/>
+                      </a:solidFill>
+                      <a:prstDash val="solid"/>
+                      <a:round/>
+                      <a:headEnd type="none" w="med" len="med"/>
+                      <a:tailEnd type="none" w="med" len="med"/>
+                    </a:lnT>
+                    <a:lnB w="9525" cap="flat" cmpd="sng" algn="ctr">
+                      <a:solidFill>
+                        <a:srgbClr val="BDBDBD"/>
+                      </a:solidFill>
+                      <a:prstDash val="solid"/>
+                      <a:round/>
+                      <a:headEnd type="none" w="med" len="med"/>
+                      <a:tailEnd type="none" w="med" len="med"/>
+                    </a:lnB>
+                  </a:tcPr>
+                </a:tc>
+                <a:tc>
+                  <a:txBody>
+                    <a:bodyPr/>
+                    <a:lstStyle/>
+                    <a:p>
+                      <a:pPr algn="ctr" indent="0" marL="0">
+                        <a:buNone/>
+                      </a:pPr>
+                      <a:r>
+                        <a:rPr lang="en-US" sz="1250" b="1" dirty="0">
+                          <a:solidFill>
+                            <a:srgbClr val="C8102E"/>
+                          </a:solidFill>
+                          <a:latin typeface="Arial" pitchFamily="34" charset="0"/>
+                          <a:ea typeface="Arial" pitchFamily="34" charset="-122"/>
+                          <a:cs typeface="Arial" pitchFamily="34" charset="-120"/>
+                        </a:rPr>
+                        <a:t>0.15</a:t>
+                      </a:r>
+                      <a:endParaRPr lang="en-US" sz="1250" dirty="0">
+                        <a:latin typeface="Arial" charset="0"/>
+                        <a:ea typeface="Arial" charset="0"/>
+                        <a:cs typeface="Arial" charset="0"/>
+                      </a:endParaRPr>
+                    </a:p>
+                  </a:txBody>
+                  <a:tcPr marL="45720" marR="45720" marT="45720" marB="45720" anchor="ctr">
+                    <a:lnL w="9525" cap="flat" cmpd="sng" algn="ctr">
+                      <a:solidFill>
+                        <a:srgbClr val="BDBDBD"/>
+                      </a:solidFill>
+                      <a:prstDash val="solid"/>
+                      <a:round/>
+                      <a:headEnd type="none" w="med" len="med"/>
+                      <a:tailEnd type="none" w="med" len="med"/>
+                    </a:lnL>
+                    <a:lnR w="9525" cap="flat" cmpd="sng" algn="ctr">
+                      <a:solidFill>
+                        <a:srgbClr val="BDBDBD"/>
+                      </a:solidFill>
+                      <a:prstDash val="solid"/>
+                      <a:round/>
+                      <a:headEnd type="none" w="med" len="med"/>
+                      <a:tailEnd type="none" w="med" len="med"/>
+                    </a:lnR>
+                    <a:lnT w="9525" cap="flat" cmpd="sng" algn="ctr">
+                      <a:solidFill>
+                        <a:srgbClr val="BDBDBD"/>
+                      </a:solidFill>
+                      <a:prstDash val="solid"/>
+                      <a:round/>
+                      <a:headEnd type="none" w="med" len="med"/>
+                      <a:tailEnd type="none" w="med" len="med"/>
+                    </a:lnT>
+                    <a:lnB w="9525" cap="flat" cmpd="sng" algn="ctr">
+                      <a:solidFill>
+                        <a:srgbClr val="BDBDBD"/>
+                      </a:solidFill>
+                      <a:prstDash val="solid"/>
+                      <a:round/>
+                      <a:headEnd type="none" w="med" len="med"/>
+                      <a:tailEnd type="none" w="med" len="med"/>
+                    </a:lnB>
+                  </a:tcPr>
+                </a:tc>
+              </a:tr>
+              <a:tr h="0">
+                <a:tc>
+                  <a:txBody>
+                    <a:bodyPr/>
+                    <a:lstStyle/>
+                    <a:p>
+                      <a:pPr indent="0" marL="0">
+                        <a:buNone/>
+                      </a:pPr>
+                      <a:r>
+                        <a:rPr lang="en-US" sz="1250" b="1" dirty="0">
+                          <a:solidFill>
+                            <a:srgbClr val="1B1B1B"/>
+                          </a:solidFill>
+                          <a:latin typeface="Arial" pitchFamily="34" charset="0"/>
+                          <a:ea typeface="Arial" pitchFamily="34" charset="-122"/>
+                          <a:cs typeface="Arial" pitchFamily="34" charset="-120"/>
+                        </a:rPr>
+                        <a:t>OSTA (earlier work)</a:t>
+                      </a:r>
+                      <a:endParaRPr lang="en-US" sz="1250" dirty="0">
+                        <a:latin typeface="Arial" charset="0"/>
+                        <a:ea typeface="Arial" charset="0"/>
+                        <a:cs typeface="Arial" charset="0"/>
+                      </a:endParaRPr>
+                    </a:p>
+                  </a:txBody>
+                  <a:tcPr marL="45720" marR="45720" marT="45720" marB="45720" anchor="ctr">
+                    <a:lnL w="9525" cap="flat" cmpd="sng" algn="ctr">
+                      <a:solidFill>
+                        <a:srgbClr val="BDBDBD"/>
+                      </a:solidFill>
+                      <a:prstDash val="solid"/>
+                      <a:round/>
+                      <a:headEnd type="none" w="med" len="med"/>
+                      <a:tailEnd type="none" w="med" len="med"/>
+                    </a:lnL>
+                    <a:lnR w="9525" cap="flat" cmpd="sng" algn="ctr">
+                      <a:solidFill>
+                        <a:srgbClr val="BDBDBD"/>
+                      </a:solidFill>
+                      <a:prstDash val="solid"/>
+                      <a:round/>
+                      <a:headEnd type="none" w="med" len="med"/>
+                      <a:tailEnd type="none" w="med" len="med"/>
+                    </a:lnR>
+                    <a:lnT w="9525" cap="flat" cmpd="sng" algn="ctr">
+                      <a:solidFill>
+                        <a:srgbClr val="BDBDBD"/>
+                      </a:solidFill>
+                      <a:prstDash val="solid"/>
+                      <a:round/>
+                      <a:headEnd type="none" w="med" len="med"/>
+                      <a:tailEnd type="none" w="med" len="med"/>
+                    </a:lnT>
+                    <a:lnB w="9525" cap="flat" cmpd="sng" algn="ctr">
+                      <a:solidFill>
+                        <a:srgbClr val="BDBDBD"/>
+                      </a:solidFill>
+                      <a:prstDash val="solid"/>
+                      <a:round/>
+                      <a:headEnd type="none" w="med" len="med"/>
+                      <a:tailEnd type="none" w="med" len="med"/>
+                    </a:lnB>
+                  </a:tcPr>
+                </a:tc>
+                <a:tc>
+                  <a:txBody>
+                    <a:bodyPr/>
+                    <a:lstStyle/>
+                    <a:p>
+                      <a:pPr indent="0" marL="0">
+                        <a:buNone/>
+                      </a:pPr>
+                      <a:r>
+                        <a:rPr lang="en-US" sz="1250" dirty="0">
+                          <a:solidFill>
+                            <a:srgbClr val="1B1B1B"/>
+                          </a:solidFill>
+                          <a:latin typeface="Arial" pitchFamily="34" charset="0"/>
+                          <a:ea typeface="Arial" pitchFamily="34" charset="-122"/>
+                          <a:cs typeface="Arial" pitchFamily="34" charset="-120"/>
+                        </a:rPr>
+                        <a:t>Predictors grouped by organ, attention over time per organ, then across organs</a:t>
+                      </a:r>
+                      <a:endParaRPr lang="en-US" sz="1250" dirty="0">
+                        <a:latin typeface="Arial" charset="0"/>
+                        <a:ea typeface="Arial" charset="0"/>
+                        <a:cs typeface="Arial" charset="0"/>
+                      </a:endParaRPr>
+                    </a:p>
+                  </a:txBody>
+                  <a:tcPr marL="45720" marR="45720" marT="45720" marB="45720" anchor="ctr">
+                    <a:lnL w="9525" cap="flat" cmpd="sng" algn="ctr">
+                      <a:solidFill>
+                        <a:srgbClr val="BDBDBD"/>
+                      </a:solidFill>
+                      <a:prstDash val="solid"/>
+                      <a:round/>
+                      <a:headEnd type="none" w="med" len="med"/>
+                      <a:tailEnd type="none" w="med" len="med"/>
+                    </a:lnL>
+                    <a:lnR w="9525" cap="flat" cmpd="sng" algn="ctr">
+                      <a:solidFill>
+                        <a:srgbClr val="BDBDBD"/>
+                      </a:solidFill>
+                      <a:prstDash val="solid"/>
+                      <a:round/>
+                      <a:headEnd type="none" w="med" len="med"/>
+                      <a:tailEnd type="none" w="med" len="med"/>
+                    </a:lnR>
+                    <a:lnT w="9525" cap="flat" cmpd="sng" algn="ctr">
+                      <a:solidFill>
+                        <a:srgbClr val="BDBDBD"/>
+                      </a:solidFill>
+                      <a:prstDash val="solid"/>
+                      <a:round/>
+                      <a:headEnd type="none" w="med" len="med"/>
+                      <a:tailEnd type="none" w="med" len="med"/>
+                    </a:lnT>
+                    <a:lnB w="9525" cap="flat" cmpd="sng" algn="ctr">
+                      <a:solidFill>
+                        <a:srgbClr val="BDBDBD"/>
+                      </a:solidFill>
+                      <a:prstDash val="solid"/>
+                      <a:round/>
+                      <a:headEnd type="none" w="med" len="med"/>
+                      <a:tailEnd type="none" w="med" len="med"/>
+                    </a:lnB>
+                  </a:tcPr>
+                </a:tc>
+                <a:tc>
+                  <a:txBody>
+                    <a:bodyPr/>
+                    <a:lstStyle/>
+                    <a:p>
+                      <a:pPr indent="0" marL="0">
+                        <a:buNone/>
+                      </a:pPr>
+                      <a:r>
+                        <a:rPr lang="en-US" sz="1250" dirty="0">
+                          <a:solidFill>
+                            <a:srgbClr val="1B1B1B"/>
+                          </a:solidFill>
+                          <a:latin typeface="Arial" pitchFamily="34" charset="0"/>
+                          <a:ea typeface="Arial" pitchFamily="34" charset="-122"/>
+                          <a:cs typeface="Arial" pitchFamily="34" charset="-120"/>
+                        </a:rPr>
+                        <a:t>The reference model; risk per organ</a:t>
+                      </a:r>
+                      <a:endParaRPr lang="en-US" sz="1250" dirty="0">
+                        <a:latin typeface="Arial" charset="0"/>
+                        <a:ea typeface="Arial" charset="0"/>
+                        <a:cs typeface="Arial" charset="0"/>
+                      </a:endParaRPr>
+                    </a:p>
+                  </a:txBody>
+                  <a:tcPr marL="45720" marR="45720" marT="45720" marB="45720" anchor="ctr">
+                    <a:lnL w="9525" cap="flat" cmpd="sng" algn="ctr">
+                      <a:solidFill>
+                        <a:srgbClr val="BDBDBD"/>
+                      </a:solidFill>
+                      <a:prstDash val="solid"/>
+                      <a:round/>
+                      <a:headEnd type="none" w="med" len="med"/>
+                      <a:tailEnd type="none" w="med" len="med"/>
+                    </a:lnL>
+                    <a:lnR w="9525" cap="flat" cmpd="sng" algn="ctr">
+                      <a:solidFill>
+                        <a:srgbClr val="BDBDBD"/>
+                      </a:solidFill>
+                      <a:prstDash val="solid"/>
+                      <a:round/>
+                      <a:headEnd type="none" w="med" len="med"/>
+                      <a:tailEnd type="none" w="med" len="med"/>
+                    </a:lnR>
+                    <a:lnT w="9525" cap="flat" cmpd="sng" algn="ctr">
+                      <a:solidFill>
+                        <a:srgbClr val="BDBDBD"/>
+                      </a:solidFill>
+                      <a:prstDash val="solid"/>
+                      <a:round/>
+                      <a:headEnd type="none" w="med" len="med"/>
+                      <a:tailEnd type="none" w="med" len="med"/>
+                    </a:lnT>
+                    <a:lnB w="9525" cap="flat" cmpd="sng" algn="ctr">
+                      <a:solidFill>
+                        <a:srgbClr val="BDBDBD"/>
+                      </a:solidFill>
+                      <a:prstDash val="solid"/>
+                      <a:round/>
+                      <a:headEnd type="none" w="med" len="med"/>
+                      <a:tailEnd type="none" w="med" len="med"/>
+                    </a:lnB>
+                  </a:tcPr>
+                </a:tc>
+                <a:tc>
+                  <a:txBody>
+                    <a:bodyPr/>
+                    <a:lstStyle/>
+                    <a:p>
+                      <a:pPr algn="ctr" indent="0" marL="0">
+                        <a:buNone/>
+                      </a:pPr>
+                      <a:r>
+                        <a:rPr lang="en-US" sz="1250" b="1" dirty="0">
+                          <a:solidFill>
+                            <a:srgbClr val="C8102E"/>
+                          </a:solidFill>
+                          <a:latin typeface="Arial" pitchFamily="34" charset="0"/>
+                          <a:ea typeface="Arial" pitchFamily="34" charset="-122"/>
+                          <a:cs typeface="Arial" pitchFamily="34" charset="-120"/>
+                        </a:rPr>
+                        <a:t>0.23</a:t>
+                      </a:r>
+                      <a:endParaRPr lang="en-US" sz="1250" dirty="0">
+                        <a:latin typeface="Arial" charset="0"/>
+                        <a:ea typeface="Arial" charset="0"/>
+                        <a:cs typeface="Arial" charset="0"/>
+                      </a:endParaRPr>
+                    </a:p>
+                  </a:txBody>
+                  <a:tcPr marL="45720" marR="45720" marT="45720" marB="45720" anchor="ctr">
+                    <a:lnL w="9525" cap="flat" cmpd="sng" algn="ctr">
+                      <a:solidFill>
+                        <a:srgbClr val="BDBDBD"/>
+                      </a:solidFill>
+                      <a:prstDash val="solid"/>
+                      <a:round/>
+                      <a:headEnd type="none" w="med" len="med"/>
+                      <a:tailEnd type="none" w="med" len="med"/>
+                    </a:lnL>
+                    <a:lnR w="9525" cap="flat" cmpd="sng" algn="ctr">
+                      <a:solidFill>
+                        <a:srgbClr val="BDBDBD"/>
+                      </a:solidFill>
+                      <a:prstDash val="solid"/>
+                      <a:round/>
+                      <a:headEnd type="none" w="med" len="med"/>
+                      <a:tailEnd type="none" w="med" len="med"/>
+                    </a:lnR>
+                    <a:lnT w="9525" cap="flat" cmpd="sng" algn="ctr">
+                      <a:solidFill>
+                        <a:srgbClr val="BDBDBD"/>
+                      </a:solidFill>
+                      <a:prstDash val="solid"/>
+                      <a:round/>
+                      <a:headEnd type="none" w="med" len="med"/>
+                      <a:tailEnd type="none" w="med" len="med"/>
+                    </a:lnT>
+                    <a:lnB w="9525" cap="flat" cmpd="sng" algn="ctr">
+                      <a:solidFill>
+                        <a:srgbClr val="BDBDBD"/>
+                      </a:solidFill>
+                      <a:prstDash val="solid"/>
+                      <a:round/>
+                      <a:headEnd type="none" w="med" len="med"/>
+                      <a:tailEnd type="none" w="med" len="med"/>
+                    </a:lnB>
+                  </a:tcPr>
+                </a:tc>
+              </a:tr>
+              <a:tr h="0">
+                <a:tc>
+                  <a:txBody>
+                    <a:bodyPr/>
+                    <a:lstStyle/>
+                    <a:p>
+                      <a:pPr indent="0" marL="0">
+                        <a:buNone/>
+                      </a:pPr>
+                      <a:r>
+                        <a:rPr lang="en-US" sz="1250" b="1" dirty="0">
+                          <a:solidFill>
+                            <a:srgbClr val="1B1B1B"/>
+                          </a:solidFill>
+                          <a:latin typeface="Arial" pitchFamily="34" charset="0"/>
+                          <a:ea typeface="Arial" pitchFamily="34" charset="-122"/>
+                          <a:cs typeface="Arial" pitchFamily="34" charset="-120"/>
+                        </a:rPr>
+                        <a:t>Output fusion (earlier work)</a:t>
+                      </a:r>
+                      <a:endParaRPr lang="en-US" sz="1250" dirty="0">
+                        <a:latin typeface="Arial" charset="0"/>
+                        <a:ea typeface="Arial" charset="0"/>
+                        <a:cs typeface="Arial" charset="0"/>
+                      </a:endParaRPr>
+                    </a:p>
+                  </a:txBody>
+                  <a:tcPr marL="45720" marR="45720" marT="45720" marB="45720" anchor="ctr">
+                    <a:lnL w="9525" cap="flat" cmpd="sng" algn="ctr">
+                      <a:solidFill>
+                        <a:srgbClr val="BDBDBD"/>
+                      </a:solidFill>
+                      <a:prstDash val="solid"/>
+                      <a:round/>
+                      <a:headEnd type="none" w="med" len="med"/>
+                      <a:tailEnd type="none" w="med" len="med"/>
+                    </a:lnL>
+                    <a:lnR w="9525" cap="flat" cmpd="sng" algn="ctr">
+                      <a:solidFill>
+                        <a:srgbClr val="BDBDBD"/>
+                      </a:solidFill>
+                      <a:prstDash val="solid"/>
+                      <a:round/>
+                      <a:headEnd type="none" w="med" len="med"/>
+                      <a:tailEnd type="none" w="med" len="med"/>
+                    </a:lnR>
+                    <a:lnT w="9525" cap="flat" cmpd="sng" algn="ctr">
+                      <a:solidFill>
+                        <a:srgbClr val="BDBDBD"/>
+                      </a:solidFill>
+                      <a:prstDash val="solid"/>
+                      <a:round/>
+                      <a:headEnd type="none" w="med" len="med"/>
+                      <a:tailEnd type="none" w="med" len="med"/>
+                    </a:lnT>
+                    <a:lnB w="9525" cap="flat" cmpd="sng" algn="ctr">
+                      <a:solidFill>
+                        <a:srgbClr val="BDBDBD"/>
+                      </a:solidFill>
+                      <a:prstDash val="solid"/>
+                      <a:round/>
+                      <a:headEnd type="none" w="med" len="med"/>
+                      <a:tailEnd type="none" w="med" len="med"/>
+                    </a:lnB>
+                  </a:tcPr>
+                </a:tc>
+                <a:tc>
+                  <a:txBody>
+                    <a:bodyPr/>
+                    <a:lstStyle/>
+                    <a:p>
+                      <a:pPr indent="0" marL="0">
+                        <a:buNone/>
+                      </a:pPr>
+                      <a:r>
+                        <a:rPr lang="en-US" sz="1250" dirty="0">
+                          <a:solidFill>
+                            <a:srgbClr val="1B1B1B"/>
+                          </a:solidFill>
+                          <a:latin typeface="Arial" pitchFamily="34" charset="0"/>
+                          <a:ea typeface="Arial" pitchFamily="34" charset="-122"/>
+                          <a:cs typeface="Arial" pitchFamily="34" charset="-120"/>
+                        </a:rPr>
+                        <a:t>OSTA plus small per-organ models trained on separate patients, added at the output</a:t>
+                      </a:r>
+                      <a:endParaRPr lang="en-US" sz="1250" dirty="0">
+                        <a:latin typeface="Arial" charset="0"/>
+                        <a:ea typeface="Arial" charset="0"/>
+                        <a:cs typeface="Arial" charset="0"/>
+                      </a:endParaRPr>
+                    </a:p>
+                  </a:txBody>
+                  <a:tcPr marL="45720" marR="45720" marT="45720" marB="45720" anchor="ctr">
+                    <a:lnL w="9525" cap="flat" cmpd="sng" algn="ctr">
+                      <a:solidFill>
+                        <a:srgbClr val="BDBDBD"/>
+                      </a:solidFill>
+                      <a:prstDash val="solid"/>
+                      <a:round/>
+                      <a:headEnd type="none" w="med" len="med"/>
+                      <a:tailEnd type="none" w="med" len="med"/>
+                    </a:lnL>
+                    <a:lnR w="9525" cap="flat" cmpd="sng" algn="ctr">
+                      <a:solidFill>
+                        <a:srgbClr val="BDBDBD"/>
+                      </a:solidFill>
+                      <a:prstDash val="solid"/>
+                      <a:round/>
+                      <a:headEnd type="none" w="med" len="med"/>
+                      <a:tailEnd type="none" w="med" len="med"/>
+                    </a:lnR>
+                    <a:lnT w="9525" cap="flat" cmpd="sng" algn="ctr">
+                      <a:solidFill>
+                        <a:srgbClr val="BDBDBD"/>
+                      </a:solidFill>
+                      <a:prstDash val="solid"/>
+                      <a:round/>
+                      <a:headEnd type="none" w="med" len="med"/>
+                      <a:tailEnd type="none" w="med" len="med"/>
+                    </a:lnT>
+                    <a:lnB w="9525" cap="flat" cmpd="sng" algn="ctr">
+                      <a:solidFill>
+                        <a:srgbClr val="BDBDBD"/>
+                      </a:solidFill>
+                      <a:prstDash val="solid"/>
+                      <a:round/>
+                      <a:headEnd type="none" w="med" len="med"/>
+                      <a:tailEnd type="none" w="med" len="med"/>
+                    </a:lnB>
+                  </a:tcPr>
+                </a:tc>
+                <a:tc>
+                  <a:txBody>
+                    <a:bodyPr/>
+                    <a:lstStyle/>
+                    <a:p>
+                      <a:pPr indent="0" marL="0">
+                        <a:buNone/>
+                      </a:pPr>
+                      <a:r>
+                        <a:rPr lang="en-US" sz="1250" dirty="0">
+                          <a:solidFill>
+                            <a:srgbClr val="1B1B1B"/>
+                          </a:solidFill>
+                          <a:latin typeface="Arial" pitchFamily="34" charset="0"/>
+                          <a:ea typeface="Arial" pitchFamily="34" charset="-122"/>
+                          <a:cs typeface="Arial" pitchFamily="34" charset="-120"/>
+                        </a:rPr>
+                        <a:t>Independent per-organ second opinions fused at the end</a:t>
+                      </a:r>
+                      <a:endParaRPr lang="en-US" sz="1250" dirty="0">
+                        <a:latin typeface="Arial" charset="0"/>
+                        <a:ea typeface="Arial" charset="0"/>
+                        <a:cs typeface="Arial" charset="0"/>
+                      </a:endParaRPr>
+                    </a:p>
+                  </a:txBody>
+                  <a:tcPr marL="45720" marR="45720" marT="45720" marB="45720" anchor="ctr">
+                    <a:lnL w="9525" cap="flat" cmpd="sng" algn="ctr">
+                      <a:solidFill>
+                        <a:srgbClr val="BDBDBD"/>
+                      </a:solidFill>
+                      <a:prstDash val="solid"/>
+                      <a:round/>
+                      <a:headEnd type="none" w="med" len="med"/>
+                      <a:tailEnd type="none" w="med" len="med"/>
+                    </a:lnL>
+                    <a:lnR w="9525" cap="flat" cmpd="sng" algn="ctr">
+                      <a:solidFill>
+                        <a:srgbClr val="BDBDBD"/>
+                      </a:solidFill>
+                      <a:prstDash val="solid"/>
+                      <a:round/>
+                      <a:headEnd type="none" w="med" len="med"/>
+                      <a:tailEnd type="none" w="med" len="med"/>
+                    </a:lnR>
+                    <a:lnT w="9525" cap="flat" cmpd="sng" algn="ctr">
+                      <a:solidFill>
+                        <a:srgbClr val="BDBDBD"/>
+                      </a:solidFill>
+                      <a:prstDash val="solid"/>
+                      <a:round/>
+                      <a:headEnd type="none" w="med" len="med"/>
+                      <a:tailEnd type="none" w="med" len="med"/>
+                    </a:lnT>
+                    <a:lnB w="9525" cap="flat" cmpd="sng" algn="ctr">
+                      <a:solidFill>
+                        <a:srgbClr val="BDBDBD"/>
+                      </a:solidFill>
+                      <a:prstDash val="solid"/>
+                      <a:round/>
+                      <a:headEnd type="none" w="med" len="med"/>
+                      <a:tailEnd type="none" w="med" len="med"/>
+                    </a:lnB>
+                  </a:tcPr>
+                </a:tc>
+                <a:tc>
+                  <a:txBody>
+                    <a:bodyPr/>
+                    <a:lstStyle/>
+                    <a:p>
+                      <a:pPr algn="ctr" indent="0" marL="0">
+                        <a:buNone/>
+                      </a:pPr>
+                      <a:r>
+                        <a:rPr lang="en-US" sz="1250" b="1" dirty="0">
+                          <a:solidFill>
+                            <a:srgbClr val="C8102E"/>
+                          </a:solidFill>
+                          <a:latin typeface="Arial" pitchFamily="34" charset="0"/>
+                          <a:ea typeface="Arial" pitchFamily="34" charset="-122"/>
+                          <a:cs typeface="Arial" pitchFamily="34" charset="-120"/>
+                        </a:rPr>
+                        <a:t>0.25</a:t>
+                      </a:r>
+                      <a:endParaRPr lang="en-US" sz="1250" dirty="0">
+                        <a:latin typeface="Arial" charset="0"/>
+                        <a:ea typeface="Arial" charset="0"/>
+                        <a:cs typeface="Arial" charset="0"/>
+                      </a:endParaRPr>
+                    </a:p>
+                  </a:txBody>
+                  <a:tcPr marL="45720" marR="45720" marT="45720" marB="45720" anchor="ctr">
+                    <a:lnL w="9525" cap="flat" cmpd="sng" algn="ctr">
+                      <a:solidFill>
+                        <a:srgbClr val="BDBDBD"/>
+                      </a:solidFill>
+                      <a:prstDash val="solid"/>
+                      <a:round/>
+                      <a:headEnd type="none" w="med" len="med"/>
+                      <a:tailEnd type="none" w="med" len="med"/>
+                    </a:lnL>
+                    <a:lnR w="9525" cap="flat" cmpd="sng" algn="ctr">
+                      <a:solidFill>
+                        <a:srgbClr val="BDBDBD"/>
+                      </a:solidFill>
+                      <a:prstDash val="solid"/>
+                      <a:round/>
+                      <a:headEnd type="none" w="med" len="med"/>
+                      <a:tailEnd type="none" w="med" len="med"/>
+                    </a:lnR>
+                    <a:lnT w="9525" cap="flat" cmpd="sng" algn="ctr">
+                      <a:solidFill>
+                        <a:srgbClr val="BDBDBD"/>
+                      </a:solidFill>
+                      <a:prstDash val="solid"/>
+                      <a:round/>
+                      <a:headEnd type="none" w="med" len="med"/>
+                      <a:tailEnd type="none" w="med" len="med"/>
+                    </a:lnT>
+                    <a:lnB w="9525" cap="flat" cmpd="sng" algn="ctr">
+                      <a:solidFill>
+                        <a:srgbClr val="BDBDBD"/>
+                      </a:solidFill>
+                      <a:prstDash val="solid"/>
+                      <a:round/>
+                      <a:headEnd type="none" w="med" len="med"/>
+                      <a:tailEnd type="none" w="med" len="med"/>
+                    </a:lnB>
+                  </a:tcPr>
+                </a:tc>
+              </a:tr>
+              <a:tr h="0">
+                <a:tc>
+                  <a:txBody>
+                    <a:bodyPr/>
+                    <a:lstStyle/>
+                    <a:p>
+                      <a:pPr indent="0" marL="0">
+                        <a:buNone/>
+                      </a:pPr>
+                      <a:r>
+                        <a:rPr lang="en-US" sz="1250" b="1" dirty="0">
+                          <a:solidFill>
+                            <a:srgbClr val="1B1B1B"/>
+                          </a:solidFill>
+                          <a:latin typeface="Arial" pitchFamily="34" charset="0"/>
+                          <a:ea typeface="Arial" pitchFamily="34" charset="-122"/>
+                          <a:cs typeface="Arial" pitchFamily="34" charset="-120"/>
+                        </a:rPr>
+                        <a:t>CNN-Transformer (earlier work) [36]</a:t>
+                      </a:r>
+                      <a:endParaRPr lang="en-US" sz="1250" dirty="0">
+                        <a:latin typeface="Arial" charset="0"/>
+                        <a:ea typeface="Arial" charset="0"/>
+                        <a:cs typeface="Arial" charset="0"/>
+                      </a:endParaRPr>
+                    </a:p>
+                  </a:txBody>
+                  <a:tcPr marL="45720" marR="45720" marT="45720" marB="45720" anchor="ctr">
+                    <a:lnL w="9525" cap="flat" cmpd="sng" algn="ctr">
+                      <a:solidFill>
+                        <a:srgbClr val="BDBDBD"/>
+                      </a:solidFill>
+                      <a:prstDash val="solid"/>
+                      <a:round/>
+                      <a:headEnd type="none" w="med" len="med"/>
+                      <a:tailEnd type="none" w="med" len="med"/>
+                    </a:lnL>
+                    <a:lnR w="9525" cap="flat" cmpd="sng" algn="ctr">
+                      <a:solidFill>
+                        <a:srgbClr val="BDBDBD"/>
+                      </a:solidFill>
+                      <a:prstDash val="solid"/>
+                      <a:round/>
+                      <a:headEnd type="none" w="med" len="med"/>
+                      <a:tailEnd type="none" w="med" len="med"/>
+                    </a:lnR>
+                    <a:lnT w="9525" cap="flat" cmpd="sng" algn="ctr">
+                      <a:solidFill>
+                        <a:srgbClr val="BDBDBD"/>
+                      </a:solidFill>
+                      <a:prstDash val="solid"/>
+                      <a:round/>
+                      <a:headEnd type="none" w="med" len="med"/>
+                      <a:tailEnd type="none" w="med" len="med"/>
+                    </a:lnT>
+                    <a:lnB w="9525" cap="flat" cmpd="sng" algn="ctr">
+                      <a:solidFill>
+                        <a:srgbClr val="BDBDBD"/>
+                      </a:solidFill>
+                      <a:prstDash val="solid"/>
+                      <a:round/>
+                      <a:headEnd type="none" w="med" len="med"/>
+                      <a:tailEnd type="none" w="med" len="med"/>
+                    </a:lnB>
+                  </a:tcPr>
+                </a:tc>
+                <a:tc>
+                  <a:txBody>
+                    <a:bodyPr/>
+                    <a:lstStyle/>
+                    <a:p>
+                      <a:pPr indent="0" marL="0">
+                        <a:buNone/>
+                      </a:pPr>
+                      <a:r>
+                        <a:rPr lang="en-US" sz="1250" dirty="0">
+                          <a:solidFill>
+                            <a:srgbClr val="1B1B1B"/>
+                          </a:solidFill>
+                          <a:latin typeface="Arial" pitchFamily="34" charset="0"/>
+                          <a:ea typeface="Arial" pitchFamily="34" charset="-122"/>
+                          <a:cs typeface="Arial" pitchFamily="34" charset="-120"/>
+                        </a:rPr>
+                        <a:t>Convolution finds 1 to 12 h patterns, then attention</a:t>
+                      </a:r>
+                      <a:endParaRPr lang="en-US" sz="1250" dirty="0">
+                        <a:latin typeface="Arial" charset="0"/>
+                        <a:ea typeface="Arial" charset="0"/>
+                        <a:cs typeface="Arial" charset="0"/>
+                      </a:endParaRPr>
+                    </a:p>
+                  </a:txBody>
+                  <a:tcPr marL="45720" marR="45720" marT="45720" marB="45720" anchor="ctr">
+                    <a:lnL w="9525" cap="flat" cmpd="sng" algn="ctr">
+                      <a:solidFill>
+                        <a:srgbClr val="BDBDBD"/>
+                      </a:solidFill>
+                      <a:prstDash val="solid"/>
+                      <a:round/>
+                      <a:headEnd type="none" w="med" len="med"/>
+                      <a:tailEnd type="none" w="med" len="med"/>
+                    </a:lnL>
+                    <a:lnR w="9525" cap="flat" cmpd="sng" algn="ctr">
+                      <a:solidFill>
+                        <a:srgbClr val="BDBDBD"/>
+                      </a:solidFill>
+                      <a:prstDash val="solid"/>
+                      <a:round/>
+                      <a:headEnd type="none" w="med" len="med"/>
+                      <a:tailEnd type="none" w="med" len="med"/>
+                    </a:lnR>
+                    <a:lnT w="9525" cap="flat" cmpd="sng" algn="ctr">
+                      <a:solidFill>
+                        <a:srgbClr val="BDBDBD"/>
+                      </a:solidFill>
+                      <a:prstDash val="solid"/>
+                      <a:round/>
+                      <a:headEnd type="none" w="med" len="med"/>
+                      <a:tailEnd type="none" w="med" len="med"/>
+                    </a:lnT>
+                    <a:lnB w="9525" cap="flat" cmpd="sng" algn="ctr">
+                      <a:solidFill>
+                        <a:srgbClr val="BDBDBD"/>
+                      </a:solidFill>
+                      <a:prstDash val="solid"/>
+                      <a:round/>
+                      <a:headEnd type="none" w="med" len="med"/>
+                      <a:tailEnd type="none" w="med" len="med"/>
+                    </a:lnB>
+                  </a:tcPr>
+                </a:tc>
+                <a:tc>
+                  <a:txBody>
+                    <a:bodyPr/>
+                    <a:lstStyle/>
+                    <a:p>
+                      <a:pPr indent="0" marL="0">
+                        <a:buNone/>
+                      </a:pPr>
+                      <a:r>
+                        <a:rPr lang="en-US" sz="1250" dirty="0">
+                          <a:solidFill>
+                            <a:srgbClr val="1B1B1B"/>
+                          </a:solidFill>
+                          <a:latin typeface="Arial" pitchFamily="34" charset="0"/>
+                          <a:ea typeface="Arial" pitchFamily="34" charset="-122"/>
+                          <a:cs typeface="Arial" pitchFamily="34" charset="-120"/>
+                        </a:rPr>
+                        <a:t>No organ grouping</a:t>
+                      </a:r>
+                      <a:endParaRPr lang="en-US" sz="1250" dirty="0">
+                        <a:latin typeface="Arial" charset="0"/>
+                        <a:ea typeface="Arial" charset="0"/>
+                        <a:cs typeface="Arial" charset="0"/>
+                      </a:endParaRPr>
+                    </a:p>
+                  </a:txBody>
+                  <a:tcPr marL="45720" marR="45720" marT="45720" marB="45720" anchor="ctr">
+                    <a:lnL w="9525" cap="flat" cmpd="sng" algn="ctr">
+                      <a:solidFill>
+                        <a:srgbClr val="BDBDBD"/>
+                      </a:solidFill>
+                      <a:prstDash val="solid"/>
+                      <a:round/>
+                      <a:headEnd type="none" w="med" len="med"/>
+                      <a:tailEnd type="none" w="med" len="med"/>
+                    </a:lnL>
+                    <a:lnR w="9525" cap="flat" cmpd="sng" algn="ctr">
+                      <a:solidFill>
+                        <a:srgbClr val="BDBDBD"/>
+                      </a:solidFill>
+                      <a:prstDash val="solid"/>
+                      <a:round/>
+                      <a:headEnd type="none" w="med" len="med"/>
+                      <a:tailEnd type="none" w="med" len="med"/>
+                    </a:lnR>
+                    <a:lnT w="9525" cap="flat" cmpd="sng" algn="ctr">
+                      <a:solidFill>
+                        <a:srgbClr val="BDBDBD"/>
+                      </a:solidFill>
+                      <a:prstDash val="solid"/>
+                      <a:round/>
+                      <a:headEnd type="none" w="med" len="med"/>
+                      <a:tailEnd type="none" w="med" len="med"/>
+                    </a:lnT>
+                    <a:lnB w="9525" cap="flat" cmpd="sng" algn="ctr">
+                      <a:solidFill>
+                        <a:srgbClr val="BDBDBD"/>
+                      </a:solidFill>
+                      <a:prstDash val="solid"/>
+                      <a:round/>
+                      <a:headEnd type="none" w="med" len="med"/>
+                      <a:tailEnd type="none" w="med" len="med"/>
+                    </a:lnB>
+                  </a:tcPr>
+                </a:tc>
+                <a:tc>
+                  <a:txBody>
+                    <a:bodyPr/>
+                    <a:lstStyle/>
+                    <a:p>
+                      <a:pPr algn="ctr" indent="0" marL="0">
+                        <a:buNone/>
+                      </a:pPr>
+                      <a:r>
+                        <a:rPr lang="en-US" sz="1250" b="1" dirty="0">
+                          <a:solidFill>
+                            <a:srgbClr val="C8102E"/>
+                          </a:solidFill>
+                          <a:latin typeface="Arial" pitchFamily="34" charset="0"/>
+                          <a:ea typeface="Arial" pitchFamily="34" charset="-122"/>
+                          <a:cs typeface="Arial" pitchFamily="34" charset="-120"/>
+                        </a:rPr>
+                        <a:t>0.24</a:t>
+                      </a:r>
+                      <a:endParaRPr lang="en-US" sz="1250" dirty="0">
+                        <a:latin typeface="Arial" charset="0"/>
+                        <a:ea typeface="Arial" charset="0"/>
+                        <a:cs typeface="Arial" charset="0"/>
+                      </a:endParaRPr>
+                    </a:p>
+                  </a:txBody>
+                  <a:tcPr marL="45720" marR="45720" marT="45720" marB="45720" anchor="ctr">
+                    <a:lnL w="9525" cap="flat" cmpd="sng" algn="ctr">
+                      <a:solidFill>
+                        <a:srgbClr val="BDBDBD"/>
+                      </a:solidFill>
+                      <a:prstDash val="solid"/>
+                      <a:round/>
+                      <a:headEnd type="none" w="med" len="med"/>
+                      <a:tailEnd type="none" w="med" len="med"/>
+                    </a:lnL>
+                    <a:lnR w="9525" cap="flat" cmpd="sng" algn="ctr">
+                      <a:solidFill>
+                        <a:srgbClr val="BDBDBD"/>
+                      </a:solidFill>
+                      <a:prstDash val="solid"/>
+                      <a:round/>
+                      <a:headEnd type="none" w="med" len="med"/>
+                      <a:tailEnd type="none" w="med" len="med"/>
+                    </a:lnR>
+                    <a:lnT w="9525" cap="flat" cmpd="sng" algn="ctr">
+                      <a:solidFill>
+                        <a:srgbClr val="BDBDBD"/>
+                      </a:solidFill>
+                      <a:prstDash val="solid"/>
+                      <a:round/>
+                      <a:headEnd type="none" w="med" len="med"/>
+                      <a:tailEnd type="none" w="med" len="med"/>
+                    </a:lnT>
+                    <a:lnB w="9525" cap="flat" cmpd="sng" algn="ctr">
+                      <a:solidFill>
+                        <a:srgbClr val="BDBDBD"/>
+                      </a:solidFill>
+                      <a:prstDash val="solid"/>
+                      <a:round/>
+                      <a:headEnd type="none" w="med" len="med"/>
+                      <a:tailEnd type="none" w="med" len="med"/>
+                    </a:lnB>
+                  </a:tcPr>
+                </a:tc>
+              </a:tr>
+              <a:tr h="0">
+                <a:tc>
+                  <a:txBody>
+                    <a:bodyPr/>
+                    <a:lstStyle/>
+                    <a:p>
+                      <a:pPr indent="0" marL="0">
+                        <a:buNone/>
+                      </a:pPr>
+                      <a:r>
+                        <a:rPr lang="en-US" sz="1250" b="1" dirty="0">
+                          <a:solidFill>
+                            <a:srgbClr val="1B1B1B"/>
+                          </a:solidFill>
+                          <a:latin typeface="Arial" pitchFamily="34" charset="0"/>
+                          <a:ea typeface="Arial" pitchFamily="34" charset="-122"/>
+                          <a:cs typeface="Arial" pitchFamily="34" charset="-120"/>
+                        </a:rPr>
+                        <a:t>Flat OSTA</a:t>
+                      </a:r>
+                      <a:endParaRPr lang="en-US" sz="1250" dirty="0">
+                        <a:latin typeface="Arial" charset="0"/>
+                        <a:ea typeface="Arial" charset="0"/>
+                        <a:cs typeface="Arial" charset="0"/>
+                      </a:endParaRPr>
+                    </a:p>
+                  </a:txBody>
+                  <a:tcPr marL="45720" marR="45720" marT="45720" marB="45720" anchor="ctr">
+                    <a:lnL w="9525" cap="flat" cmpd="sng" algn="ctr">
+                      <a:solidFill>
+                        <a:srgbClr val="BDBDBD"/>
+                      </a:solidFill>
+                      <a:prstDash val="solid"/>
+                      <a:round/>
+                      <a:headEnd type="none" w="med" len="med"/>
+                      <a:tailEnd type="none" w="med" len="med"/>
+                    </a:lnL>
+                    <a:lnR w="9525" cap="flat" cmpd="sng" algn="ctr">
+                      <a:solidFill>
+                        <a:srgbClr val="BDBDBD"/>
+                      </a:solidFill>
+                      <a:prstDash val="solid"/>
+                      <a:round/>
+                      <a:headEnd type="none" w="med" len="med"/>
+                      <a:tailEnd type="none" w="med" len="med"/>
+                    </a:lnR>
+                    <a:lnT w="9525" cap="flat" cmpd="sng" algn="ctr">
+                      <a:solidFill>
+                        <a:srgbClr val="BDBDBD"/>
+                      </a:solidFill>
+                      <a:prstDash val="solid"/>
+                      <a:round/>
+                      <a:headEnd type="none" w="med" len="med"/>
+                      <a:tailEnd type="none" w="med" len="med"/>
+                    </a:lnT>
+                    <a:lnB w="9525" cap="flat" cmpd="sng" algn="ctr">
+                      <a:solidFill>
+                        <a:srgbClr val="BDBDBD"/>
+                      </a:solidFill>
+                      <a:prstDash val="solid"/>
+                      <a:round/>
+                      <a:headEnd type="none" w="med" len="med"/>
+                      <a:tailEnd type="none" w="med" len="med"/>
+                    </a:lnB>
+                  </a:tcPr>
+                </a:tc>
+                <a:tc>
+                  <a:txBody>
+                    <a:bodyPr/>
+                    <a:lstStyle/>
+                    <a:p>
+                      <a:pPr indent="0" marL="0">
+                        <a:buNone/>
+                      </a:pPr>
+                      <a:r>
+                        <a:rPr lang="en-US" sz="1250" dirty="0">
+                          <a:solidFill>
+                            <a:srgbClr val="1B1B1B"/>
+                          </a:solidFill>
+                          <a:latin typeface="Arial" pitchFamily="34" charset="0"/>
+                          <a:ea typeface="Arial" pitchFamily="34" charset="-122"/>
+                          <a:cs typeface="Arial" pitchFamily="34" charset="-120"/>
+                        </a:rPr>
+                        <a:t>OSTA with every predictor in one group</a:t>
+                      </a:r>
+                      <a:endParaRPr lang="en-US" sz="1250" dirty="0">
+                        <a:latin typeface="Arial" charset="0"/>
+                        <a:ea typeface="Arial" charset="0"/>
+                        <a:cs typeface="Arial" charset="0"/>
+                      </a:endParaRPr>
+                    </a:p>
+                  </a:txBody>
+                  <a:tcPr marL="45720" marR="45720" marT="45720" marB="45720" anchor="ctr">
+                    <a:lnL w="9525" cap="flat" cmpd="sng" algn="ctr">
+                      <a:solidFill>
+                        <a:srgbClr val="BDBDBD"/>
+                      </a:solidFill>
+                      <a:prstDash val="solid"/>
+                      <a:round/>
+                      <a:headEnd type="none" w="med" len="med"/>
+                      <a:tailEnd type="none" w="med" len="med"/>
+                    </a:lnL>
+                    <a:lnR w="9525" cap="flat" cmpd="sng" algn="ctr">
+                      <a:solidFill>
+                        <a:srgbClr val="BDBDBD"/>
+                      </a:solidFill>
+                      <a:prstDash val="solid"/>
+                      <a:round/>
+                      <a:headEnd type="none" w="med" len="med"/>
+                      <a:tailEnd type="none" w="med" len="med"/>
+                    </a:lnR>
+                    <a:lnT w="9525" cap="flat" cmpd="sng" algn="ctr">
+                      <a:solidFill>
+                        <a:srgbClr val="BDBDBD"/>
+                      </a:solidFill>
+                      <a:prstDash val="solid"/>
+                      <a:round/>
+                      <a:headEnd type="none" w="med" len="med"/>
+                      <a:tailEnd type="none" w="med" len="med"/>
+                    </a:lnT>
+                    <a:lnB w="9525" cap="flat" cmpd="sng" algn="ctr">
+                      <a:solidFill>
+                        <a:srgbClr val="BDBDBD"/>
+                      </a:solidFill>
+                      <a:prstDash val="solid"/>
+                      <a:round/>
+                      <a:headEnd type="none" w="med" len="med"/>
+                      <a:tailEnd type="none" w="med" len="med"/>
+                    </a:lnB>
+                  </a:tcPr>
+                </a:tc>
+                <a:tc>
+                  <a:txBody>
+                    <a:bodyPr/>
+                    <a:lstStyle/>
+                    <a:p>
+                      <a:pPr indent="0" marL="0">
+                        <a:buNone/>
+                      </a:pPr>
+                      <a:r>
+                        <a:rPr lang="en-US" sz="1250" dirty="0">
+                          <a:solidFill>
+                            <a:srgbClr val="1B1B1B"/>
+                          </a:solidFill>
+                          <a:latin typeface="Arial" pitchFamily="34" charset="0"/>
+                          <a:ea typeface="Arial" pitchFamily="34" charset="-122"/>
+                          <a:cs typeface="Arial" pitchFamily="34" charset="-120"/>
+                        </a:rPr>
+                        <a:t>Removes only the organ grouping: the decisive test</a:t>
+                      </a:r>
+                      <a:endParaRPr lang="en-US" sz="1250" dirty="0">
+                        <a:latin typeface="Arial" charset="0"/>
+                        <a:ea typeface="Arial" charset="0"/>
+                        <a:cs typeface="Arial" charset="0"/>
+                      </a:endParaRPr>
+                    </a:p>
+                  </a:txBody>
+                  <a:tcPr marL="45720" marR="45720" marT="45720" marB="45720" anchor="ctr">
+                    <a:lnL w="9525" cap="flat" cmpd="sng" algn="ctr">
+                      <a:solidFill>
+                        <a:srgbClr val="BDBDBD"/>
+                      </a:solidFill>
+                      <a:prstDash val="solid"/>
+                      <a:round/>
+                      <a:headEnd type="none" w="med" len="med"/>
+                      <a:tailEnd type="none" w="med" len="med"/>
+                    </a:lnL>
+                    <a:lnR w="9525" cap="flat" cmpd="sng" algn="ctr">
+                      <a:solidFill>
+                        <a:srgbClr val="BDBDBD"/>
+                      </a:solidFill>
+                      <a:prstDash val="solid"/>
+                      <a:round/>
+                      <a:headEnd type="none" w="med" len="med"/>
+                      <a:tailEnd type="none" w="med" len="med"/>
+                    </a:lnR>
+                    <a:lnT w="9525" cap="flat" cmpd="sng" algn="ctr">
+                      <a:solidFill>
+                        <a:srgbClr val="BDBDBD"/>
+                      </a:solidFill>
+                      <a:prstDash val="solid"/>
+                      <a:round/>
+                      <a:headEnd type="none" w="med" len="med"/>
+                      <a:tailEnd type="none" w="med" len="med"/>
+                    </a:lnT>
+                    <a:lnB w="9525" cap="flat" cmpd="sng" algn="ctr">
+                      <a:solidFill>
+                        <a:srgbClr val="BDBDBD"/>
+                      </a:solidFill>
+                      <a:prstDash val="solid"/>
+                      <a:round/>
+                      <a:headEnd type="none" w="med" len="med"/>
+                      <a:tailEnd type="none" w="med" len="med"/>
+                    </a:lnB>
+                  </a:tcPr>
+                </a:tc>
+                <a:tc>
+                  <a:txBody>
+                    <a:bodyPr/>
+                    <a:lstStyle/>
+                    <a:p>
+                      <a:pPr algn="ctr" indent="0" marL="0">
+                        <a:buNone/>
+                      </a:pPr>
+                      <a:r>
+                        <a:rPr lang="en-US" sz="1250" b="1" dirty="0">
+                          <a:solidFill>
+                            <a:srgbClr val="C8102E"/>
+                          </a:solidFill>
+                          <a:latin typeface="Arial" pitchFamily="34" charset="0"/>
+                          <a:ea typeface="Arial" pitchFamily="34" charset="-122"/>
+                          <a:cs typeface="Arial" pitchFamily="34" charset="-120"/>
+                        </a:rPr>
+                        <a:t>0.23</a:t>
+                      </a:r>
+                      <a:endParaRPr lang="en-US" sz="1250" dirty="0">
+                        <a:latin typeface="Arial" charset="0"/>
+                        <a:ea typeface="Arial" charset="0"/>
+                        <a:cs typeface="Arial" charset="0"/>
+                      </a:endParaRPr>
+                    </a:p>
+                  </a:txBody>
+                  <a:tcPr marL="45720" marR="45720" marT="45720" marB="45720" anchor="ctr">
+                    <a:lnL w="9525" cap="flat" cmpd="sng" algn="ctr">
+                      <a:solidFill>
+                        <a:srgbClr val="BDBDBD"/>
+                      </a:solidFill>
+                      <a:prstDash val="solid"/>
+                      <a:round/>
+                      <a:headEnd type="none" w="med" len="med"/>
+                      <a:tailEnd type="none" w="med" len="med"/>
+                    </a:lnL>
+                    <a:lnR w="9525" cap="flat" cmpd="sng" algn="ctr">
+                      <a:solidFill>
+                        <a:srgbClr val="BDBDBD"/>
+                      </a:solidFill>
+                      <a:prstDash val="solid"/>
+                      <a:round/>
+                      <a:headEnd type="none" w="med" len="med"/>
+                      <a:tailEnd type="none" w="med" len="med"/>
+                    </a:lnR>
+                    <a:lnT w="9525" cap="flat" cmpd="sng" algn="ctr">
+                      <a:solidFill>
+                        <a:srgbClr val="BDBDBD"/>
+                      </a:solidFill>
+                      <a:prstDash val="solid"/>
+                      <a:round/>
+                      <a:headEnd type="none" w="med" len="med"/>
+                      <a:tailEnd type="none" w="med" len="med"/>
+                    </a:lnT>
+                    <a:lnB w="9525" cap="flat" cmpd="sng" algn="ctr">
+                      <a:solidFill>
+                        <a:srgbClr val="BDBDBD"/>
+                      </a:solidFill>
+                      <a:prstDash val="solid"/>
+                      <a:round/>
+                      <a:headEnd type="none" w="med" len="med"/>
+                      <a:tailEnd type="none" w="med" len="med"/>
+                    </a:lnB>
+                  </a:tcPr>
+                </a:tc>
+              </a:tr>
+              <a:tr h="0">
+                <a:tc>
+                  <a:txBody>
+                    <a:bodyPr/>
+                    <a:lstStyle/>
+                    <a:p>
+                      <a:pPr indent="0" marL="0">
+                        <a:buNone/>
+                      </a:pPr>
+                      <a:r>
+                        <a:rPr lang="en-US" sz="1250" b="1" dirty="0">
+                          <a:solidFill>
+                            <a:srgbClr val="1B1B1B"/>
+                          </a:solidFill>
+                          <a:latin typeface="Arial" pitchFamily="34" charset="0"/>
+                          <a:ea typeface="Arial" pitchFamily="34" charset="-122"/>
+                          <a:cs typeface="Arial" pitchFamily="34" charset="-120"/>
+                        </a:rPr>
+                        <a:t>GRU-D [37]</a:t>
+                      </a:r>
+                      <a:endParaRPr lang="en-US" sz="1250" dirty="0">
+                        <a:latin typeface="Arial" charset="0"/>
+                        <a:ea typeface="Arial" charset="0"/>
+                        <a:cs typeface="Arial" charset="0"/>
+                      </a:endParaRPr>
+                    </a:p>
+                  </a:txBody>
+                  <a:tcPr marL="45720" marR="45720" marT="45720" marB="45720" anchor="ctr">
+                    <a:lnL w="9525" cap="flat" cmpd="sng" algn="ctr">
+                      <a:solidFill>
+                        <a:srgbClr val="BDBDBD"/>
+                      </a:solidFill>
+                      <a:prstDash val="solid"/>
+                      <a:round/>
+                      <a:headEnd type="none" w="med" len="med"/>
+                      <a:tailEnd type="none" w="med" len="med"/>
+                    </a:lnL>
+                    <a:lnR w="9525" cap="flat" cmpd="sng" algn="ctr">
+                      <a:solidFill>
+                        <a:srgbClr val="BDBDBD"/>
+                      </a:solidFill>
+                      <a:prstDash val="solid"/>
+                      <a:round/>
+                      <a:headEnd type="none" w="med" len="med"/>
+                      <a:tailEnd type="none" w="med" len="med"/>
+                    </a:lnR>
+                    <a:lnT w="9525" cap="flat" cmpd="sng" algn="ctr">
+                      <a:solidFill>
+                        <a:srgbClr val="BDBDBD"/>
+                      </a:solidFill>
+                      <a:prstDash val="solid"/>
+                      <a:round/>
+                      <a:headEnd type="none" w="med" len="med"/>
+                      <a:tailEnd type="none" w="med" len="med"/>
+                    </a:lnT>
+                    <a:lnB w="9525" cap="flat" cmpd="sng" algn="ctr">
+                      <a:solidFill>
+                        <a:srgbClr val="BDBDBD"/>
+                      </a:solidFill>
+                      <a:prstDash val="solid"/>
+                      <a:round/>
+                      <a:headEnd type="none" w="med" len="med"/>
+                      <a:tailEnd type="none" w="med" len="med"/>
+                    </a:lnB>
+                  </a:tcPr>
+                </a:tc>
+                <a:tc>
+                  <a:txBody>
+                    <a:bodyPr/>
+                    <a:lstStyle/>
+                    <a:p>
+                      <a:pPr indent="0" marL="0">
+                        <a:buNone/>
+                      </a:pPr>
+                      <a:r>
+                        <a:rPr lang="en-US" sz="1250" dirty="0">
+                          <a:solidFill>
+                            <a:srgbClr val="1B1B1B"/>
+                          </a:solidFill>
+                          <a:latin typeface="Arial" pitchFamily="34" charset="0"/>
+                          <a:ea typeface="Arial" pitchFamily="34" charset="-122"/>
+                          <a:cs typeface="Arial" pitchFamily="34" charset="-120"/>
+                        </a:rPr>
+                        <a:t>Recurrent memory; values fade towards normal as they age</a:t>
+                      </a:r>
+                      <a:endParaRPr lang="en-US" sz="1250" dirty="0">
+                        <a:latin typeface="Arial" charset="0"/>
+                        <a:ea typeface="Arial" charset="0"/>
+                        <a:cs typeface="Arial" charset="0"/>
+                      </a:endParaRPr>
+                    </a:p>
+                  </a:txBody>
+                  <a:tcPr marL="45720" marR="45720" marT="45720" marB="45720" anchor="ctr">
+                    <a:lnL w="9525" cap="flat" cmpd="sng" algn="ctr">
+                      <a:solidFill>
+                        <a:srgbClr val="BDBDBD"/>
+                      </a:solidFill>
+                      <a:prstDash val="solid"/>
+                      <a:round/>
+                      <a:headEnd type="none" w="med" len="med"/>
+                      <a:tailEnd type="none" w="med" len="med"/>
+                    </a:lnL>
+                    <a:lnR w="9525" cap="flat" cmpd="sng" algn="ctr">
+                      <a:solidFill>
+                        <a:srgbClr val="BDBDBD"/>
+                      </a:solidFill>
+                      <a:prstDash val="solid"/>
+                      <a:round/>
+                      <a:headEnd type="none" w="med" len="med"/>
+                      <a:tailEnd type="none" w="med" len="med"/>
+                    </a:lnR>
+                    <a:lnT w="9525" cap="flat" cmpd="sng" algn="ctr">
+                      <a:solidFill>
+                        <a:srgbClr val="BDBDBD"/>
+                      </a:solidFill>
+                      <a:prstDash val="solid"/>
+                      <a:round/>
+                      <a:headEnd type="none" w="med" len="med"/>
+                      <a:tailEnd type="none" w="med" len="med"/>
+                    </a:lnT>
+                    <a:lnB w="9525" cap="flat" cmpd="sng" algn="ctr">
+                      <a:solidFill>
+                        <a:srgbClr val="BDBDBD"/>
+                      </a:solidFill>
+                      <a:prstDash val="solid"/>
+                      <a:round/>
+                      <a:headEnd type="none" w="med" len="med"/>
+                      <a:tailEnd type="none" w="med" len="med"/>
+                    </a:lnB>
+                  </a:tcPr>
+                </a:tc>
+                <a:tc>
+                  <a:txBody>
+                    <a:bodyPr/>
+                    <a:lstStyle/>
+                    <a:p>
+                      <a:pPr indent="0" marL="0">
+                        <a:buNone/>
+                      </a:pPr>
+                      <a:r>
+                        <a:rPr lang="en-US" sz="1250" dirty="0">
+                          <a:solidFill>
+                            <a:srgbClr val="1B1B1B"/>
+                          </a:solidFill>
+                          <a:latin typeface="Arial" pitchFamily="34" charset="0"/>
+                          <a:ea typeface="Arial" pitchFamily="34" charset="-122"/>
+                          <a:cs typeface="Arial" pitchFamily="34" charset="-120"/>
+                        </a:rPr>
+                        <a:t>Models missing and stale data explicitly</a:t>
+                      </a:r>
+                      <a:endParaRPr lang="en-US" sz="1250" dirty="0">
+                        <a:latin typeface="Arial" charset="0"/>
+                        <a:ea typeface="Arial" charset="0"/>
+                        <a:cs typeface="Arial" charset="0"/>
+                      </a:endParaRPr>
+                    </a:p>
+                  </a:txBody>
+                  <a:tcPr marL="45720" marR="45720" marT="45720" marB="45720" anchor="ctr">
+                    <a:lnL w="9525" cap="flat" cmpd="sng" algn="ctr">
+                      <a:solidFill>
+                        <a:srgbClr val="BDBDBD"/>
+                      </a:solidFill>
+                      <a:prstDash val="solid"/>
+                      <a:round/>
+                      <a:headEnd type="none" w="med" len="med"/>
+                      <a:tailEnd type="none" w="med" len="med"/>
+                    </a:lnL>
+                    <a:lnR w="9525" cap="flat" cmpd="sng" algn="ctr">
+                      <a:solidFill>
+                        <a:srgbClr val="BDBDBD"/>
+                      </a:solidFill>
+                      <a:prstDash val="solid"/>
+                      <a:round/>
+                      <a:headEnd type="none" w="med" len="med"/>
+                      <a:tailEnd type="none" w="med" len="med"/>
+                    </a:lnR>
+                    <a:lnT w="9525" cap="flat" cmpd="sng" algn="ctr">
+                      <a:solidFill>
+                        <a:srgbClr val="BDBDBD"/>
+                      </a:solidFill>
+                      <a:prstDash val="solid"/>
+                      <a:round/>
+                      <a:headEnd type="none" w="med" len="med"/>
+                      <a:tailEnd type="none" w="med" len="med"/>
+                    </a:lnT>
+                    <a:lnB w="9525" cap="flat" cmpd="sng" algn="ctr">
+                      <a:solidFill>
+                        <a:srgbClr val="BDBDBD"/>
+                      </a:solidFill>
+                      <a:prstDash val="solid"/>
+                      <a:round/>
+                      <a:headEnd type="none" w="med" len="med"/>
+                      <a:tailEnd type="none" w="med" len="med"/>
+                    </a:lnB>
+                  </a:tcPr>
+                </a:tc>
+                <a:tc>
+                  <a:txBody>
+                    <a:bodyPr/>
+                    <a:lstStyle/>
+                    <a:p>
+                      <a:pPr algn="ctr" indent="0" marL="0">
+                        <a:buNone/>
+                      </a:pPr>
+                      <a:r>
+                        <a:rPr lang="en-US" sz="1250" b="1" dirty="0">
+                          <a:solidFill>
+                            <a:srgbClr val="C8102E"/>
+                          </a:solidFill>
+                          <a:latin typeface="Arial" pitchFamily="34" charset="0"/>
+                          <a:ea typeface="Arial" pitchFamily="34" charset="-122"/>
+                          <a:cs typeface="Arial" pitchFamily="34" charset="-120"/>
+                        </a:rPr>
+                        <a:t>0.19</a:t>
+                      </a:r>
+                      <a:endParaRPr lang="en-US" sz="1250" dirty="0">
+                        <a:latin typeface="Arial" charset="0"/>
+                        <a:ea typeface="Arial" charset="0"/>
+                        <a:cs typeface="Arial" charset="0"/>
+                      </a:endParaRPr>
+                    </a:p>
+                  </a:txBody>
+                  <a:tcPr marL="45720" marR="45720" marT="45720" marB="45720" anchor="ctr">
+                    <a:lnL w="9525" cap="flat" cmpd="sng" algn="ctr">
+                      <a:solidFill>
+                        <a:srgbClr val="BDBDBD"/>
+                      </a:solidFill>
+                      <a:prstDash val="solid"/>
+                      <a:round/>
+                      <a:headEnd type="none" w="med" len="med"/>
+                      <a:tailEnd type="none" w="med" len="med"/>
+                    </a:lnL>
+                    <a:lnR w="9525" cap="flat" cmpd="sng" algn="ctr">
+                      <a:solidFill>
+                        <a:srgbClr val="BDBDBD"/>
+                      </a:solidFill>
+                      <a:prstDash val="solid"/>
+                      <a:round/>
+                      <a:headEnd type="none" w="med" len="med"/>
+                      <a:tailEnd type="none" w="med" len="med"/>
+                    </a:lnR>
+                    <a:lnT w="9525" cap="flat" cmpd="sng" algn="ctr">
+                      <a:solidFill>
+                        <a:srgbClr val="BDBDBD"/>
+                      </a:solidFill>
+                      <a:prstDash val="solid"/>
+                      <a:round/>
+                      <a:headEnd type="none" w="med" len="med"/>
+                      <a:tailEnd type="none" w="med" len="med"/>
+                    </a:lnT>
+                    <a:lnB w="9525" cap="flat" cmpd="sng" algn="ctr">
+                      <a:solidFill>
+                        <a:srgbClr val="BDBDBD"/>
+                      </a:solidFill>
+                      <a:prstDash val="solid"/>
+                      <a:round/>
+                      <a:headEnd type="none" w="med" len="med"/>
+                      <a:tailEnd type="none" w="med" len="med"/>
+                    </a:lnB>
+                  </a:tcPr>
+                </a:tc>
+              </a:tr>
+              <a:tr h="0">
+                <a:tc>
+                  <a:txBody>
+                    <a:bodyPr/>
+                    <a:lstStyle/>
+                    <a:p>
+                      <a:pPr indent="0" marL="0">
+                        <a:buNone/>
+                      </a:pPr>
+                      <a:r>
+                        <a:rPr lang="en-US" sz="1250" b="1" dirty="0">
+                          <a:solidFill>
+                            <a:srgbClr val="1B1B1B"/>
+                          </a:solidFill>
+                          <a:latin typeface="Arial" pitchFamily="34" charset="0"/>
+                          <a:ea typeface="Arial" pitchFamily="34" charset="-122"/>
+                          <a:cs typeface="Arial" pitchFamily="34" charset="-120"/>
+                        </a:rPr>
+                        <a:t>TCN [38]</a:t>
+                      </a:r>
+                      <a:endParaRPr lang="en-US" sz="1250" dirty="0">
+                        <a:latin typeface="Arial" charset="0"/>
+                        <a:ea typeface="Arial" charset="0"/>
+                        <a:cs typeface="Arial" charset="0"/>
+                      </a:endParaRPr>
+                    </a:p>
+                  </a:txBody>
+                  <a:tcPr marL="45720" marR="45720" marT="45720" marB="45720" anchor="ctr">
+                    <a:lnL w="9525" cap="flat" cmpd="sng" algn="ctr">
+                      <a:solidFill>
+                        <a:srgbClr val="BDBDBD"/>
+                      </a:solidFill>
+                      <a:prstDash val="solid"/>
+                      <a:round/>
+                      <a:headEnd type="none" w="med" len="med"/>
+                      <a:tailEnd type="none" w="med" len="med"/>
+                    </a:lnL>
+                    <a:lnR w="9525" cap="flat" cmpd="sng" algn="ctr">
+                      <a:solidFill>
+                        <a:srgbClr val="BDBDBD"/>
+                      </a:solidFill>
+                      <a:prstDash val="solid"/>
+                      <a:round/>
+                      <a:headEnd type="none" w="med" len="med"/>
+                      <a:tailEnd type="none" w="med" len="med"/>
+                    </a:lnR>
+                    <a:lnT w="9525" cap="flat" cmpd="sng" algn="ctr">
+                      <a:solidFill>
+                        <a:srgbClr val="BDBDBD"/>
+                      </a:solidFill>
+                      <a:prstDash val="solid"/>
+                      <a:round/>
+                      <a:headEnd type="none" w="med" len="med"/>
+                      <a:tailEnd type="none" w="med" len="med"/>
+                    </a:lnT>
+                    <a:lnB w="9525" cap="flat" cmpd="sng" algn="ctr">
+                      <a:solidFill>
+                        <a:srgbClr val="BDBDBD"/>
+                      </a:solidFill>
+                      <a:prstDash val="solid"/>
+                      <a:round/>
+                      <a:headEnd type="none" w="med" len="med"/>
+                      <a:tailEnd type="none" w="med" len="med"/>
+                    </a:lnB>
+                  </a:tcPr>
+                </a:tc>
+                <a:tc>
+                  <a:txBody>
+                    <a:bodyPr/>
+                    <a:lstStyle/>
+                    <a:p>
+                      <a:pPr indent="0" marL="0">
+                        <a:buNone/>
+                      </a:pPr>
+                      <a:r>
+                        <a:rPr lang="en-US" sz="1250" dirty="0">
+                          <a:solidFill>
+                            <a:srgbClr val="1B1B1B"/>
+                          </a:solidFill>
+                          <a:latin typeface="Arial" pitchFamily="34" charset="0"/>
+                          <a:ea typeface="Arial" pitchFamily="34" charset="-122"/>
+                          <a:cs typeface="Arial" pitchFamily="34" charset="-120"/>
+                        </a:rPr>
+                        <a:t>Stacked causal convolutions with a widening reach</a:t>
+                      </a:r>
+                      <a:endParaRPr lang="en-US" sz="1250" dirty="0">
+                        <a:latin typeface="Arial" charset="0"/>
+                        <a:ea typeface="Arial" charset="0"/>
+                        <a:cs typeface="Arial" charset="0"/>
+                      </a:endParaRPr>
+                    </a:p>
+                  </a:txBody>
+                  <a:tcPr marL="45720" marR="45720" marT="45720" marB="45720" anchor="ctr">
+                    <a:lnL w="9525" cap="flat" cmpd="sng" algn="ctr">
+                      <a:solidFill>
+                        <a:srgbClr val="BDBDBD"/>
+                      </a:solidFill>
+                      <a:prstDash val="solid"/>
+                      <a:round/>
+                      <a:headEnd type="none" w="med" len="med"/>
+                      <a:tailEnd type="none" w="med" len="med"/>
+                    </a:lnL>
+                    <a:lnR w="9525" cap="flat" cmpd="sng" algn="ctr">
+                      <a:solidFill>
+                        <a:srgbClr val="BDBDBD"/>
+                      </a:solidFill>
+                      <a:prstDash val="solid"/>
+                      <a:round/>
+                      <a:headEnd type="none" w="med" len="med"/>
+                      <a:tailEnd type="none" w="med" len="med"/>
+                    </a:lnR>
+                    <a:lnT w="9525" cap="flat" cmpd="sng" algn="ctr">
+                      <a:solidFill>
+                        <a:srgbClr val="BDBDBD"/>
+                      </a:solidFill>
+                      <a:prstDash val="solid"/>
+                      <a:round/>
+                      <a:headEnd type="none" w="med" len="med"/>
+                      <a:tailEnd type="none" w="med" len="med"/>
+                    </a:lnT>
+                    <a:lnB w="9525" cap="flat" cmpd="sng" algn="ctr">
+                      <a:solidFill>
+                        <a:srgbClr val="BDBDBD"/>
+                      </a:solidFill>
+                      <a:prstDash val="solid"/>
+                      <a:round/>
+                      <a:headEnd type="none" w="med" len="med"/>
+                      <a:tailEnd type="none" w="med" len="med"/>
+                    </a:lnB>
+                  </a:tcPr>
+                </a:tc>
+                <a:tc>
+                  <a:txBody>
+                    <a:bodyPr/>
+                    <a:lstStyle/>
+                    <a:p>
+                      <a:pPr indent="0" marL="0">
+                        <a:buNone/>
+                      </a:pPr>
+                      <a:r>
+                        <a:rPr lang="en-US" sz="1250" dirty="0">
+                          <a:solidFill>
+                            <a:srgbClr val="1B1B1B"/>
+                          </a:solidFill>
+                          <a:latin typeface="Arial" pitchFamily="34" charset="0"/>
+                          <a:ea typeface="Arial" pitchFamily="34" charset="-122"/>
+                          <a:cs typeface="Arial" pitchFamily="34" charset="-120"/>
+                        </a:rPr>
+                        <a:t>No attention; fixed look-back</a:t>
+                      </a:r>
+                      <a:endParaRPr lang="en-US" sz="1250" dirty="0">
+                        <a:latin typeface="Arial" charset="0"/>
+                        <a:ea typeface="Arial" charset="0"/>
+                        <a:cs typeface="Arial" charset="0"/>
+                      </a:endParaRPr>
+                    </a:p>
+                  </a:txBody>
+                  <a:tcPr marL="45720" marR="45720" marT="45720" marB="45720" anchor="ctr">
+                    <a:lnL w="9525" cap="flat" cmpd="sng" algn="ctr">
+                      <a:solidFill>
+                        <a:srgbClr val="BDBDBD"/>
+                      </a:solidFill>
+                      <a:prstDash val="solid"/>
+                      <a:round/>
+                      <a:headEnd type="none" w="med" len="med"/>
+                      <a:tailEnd type="none" w="med" len="med"/>
+                    </a:lnL>
+                    <a:lnR w="9525" cap="flat" cmpd="sng" algn="ctr">
+                      <a:solidFill>
+                        <a:srgbClr val="BDBDBD"/>
+                      </a:solidFill>
+                      <a:prstDash val="solid"/>
+                      <a:round/>
+                      <a:headEnd type="none" w="med" len="med"/>
+                      <a:tailEnd type="none" w="med" len="med"/>
+                    </a:lnR>
+                    <a:lnT w="9525" cap="flat" cmpd="sng" algn="ctr">
+                      <a:solidFill>
+                        <a:srgbClr val="BDBDBD"/>
+                      </a:solidFill>
+                      <a:prstDash val="solid"/>
+                      <a:round/>
+                      <a:headEnd type="none" w="med" len="med"/>
+                      <a:tailEnd type="none" w="med" len="med"/>
+                    </a:lnT>
+                    <a:lnB w="9525" cap="flat" cmpd="sng" algn="ctr">
+                      <a:solidFill>
+                        <a:srgbClr val="BDBDBD"/>
+                      </a:solidFill>
+                      <a:prstDash val="solid"/>
+                      <a:round/>
+                      <a:headEnd type="none" w="med" len="med"/>
+                      <a:tailEnd type="none" w="med" len="med"/>
+                    </a:lnB>
+                  </a:tcPr>
+                </a:tc>
+                <a:tc>
+                  <a:txBody>
+                    <a:bodyPr/>
+                    <a:lstStyle/>
+                    <a:p>
+                      <a:pPr algn="ctr" indent="0" marL="0">
+                        <a:buNone/>
+                      </a:pPr>
+                      <a:r>
+                        <a:rPr lang="en-US" sz="1250" b="1" dirty="0">
+                          <a:solidFill>
+                            <a:srgbClr val="C8102E"/>
+                          </a:solidFill>
+                          <a:latin typeface="Arial" pitchFamily="34" charset="0"/>
+                          <a:ea typeface="Arial" pitchFamily="34" charset="-122"/>
+                          <a:cs typeface="Arial" pitchFamily="34" charset="-120"/>
+                        </a:rPr>
+                        <a:t>0.17</a:t>
+                      </a:r>
+                      <a:endParaRPr lang="en-US" sz="1250" dirty="0">
+                        <a:latin typeface="Arial" charset="0"/>
+                        <a:ea typeface="Arial" charset="0"/>
+                        <a:cs typeface="Arial" charset="0"/>
+                      </a:endParaRPr>
+                    </a:p>
+                  </a:txBody>
+                  <a:tcPr marL="45720" marR="45720" marT="45720" marB="45720" anchor="ctr">
+                    <a:lnL w="9525" cap="flat" cmpd="sng" algn="ctr">
+                      <a:solidFill>
+                        <a:srgbClr val="BDBDBD"/>
+                      </a:solidFill>
+                      <a:prstDash val="solid"/>
+                      <a:round/>
+                      <a:headEnd type="none" w="med" len="med"/>
+                      <a:tailEnd type="none" w="med" len="med"/>
+                    </a:lnL>
+                    <a:lnR w="9525" cap="flat" cmpd="sng" algn="ctr">
+                      <a:solidFill>
+                        <a:srgbClr val="BDBDBD"/>
+                      </a:solidFill>
+                      <a:prstDash val="solid"/>
+                      <a:round/>
+                      <a:headEnd type="none" w="med" len="med"/>
+                      <a:tailEnd type="none" w="med" len="med"/>
+                    </a:lnR>
+                    <a:lnT w="9525" cap="flat" cmpd="sng" algn="ctr">
+                      <a:solidFill>
+                        <a:srgbClr val="BDBDBD"/>
+                      </a:solidFill>
+                      <a:prstDash val="solid"/>
+                      <a:round/>
+                      <a:headEnd type="none" w="med" len="med"/>
+                      <a:tailEnd type="none" w="med" len="med"/>
+                    </a:lnT>
+                    <a:lnB w="9525" cap="flat" cmpd="sng" algn="ctr">
+                      <a:solidFill>
+                        <a:srgbClr val="BDBDBD"/>
+                      </a:solidFill>
+                      <a:prstDash val="solid"/>
+                      <a:round/>
+                      <a:headEnd type="none" w="med" len="med"/>
+                      <a:tailEnd type="none" w="med" len="med"/>
+                    </a:lnB>
+                  </a:tcPr>
+                </a:tc>
+              </a:tr>
+            </a:tbl>
+          </a:graphicData>
+        </a:graphic>
+      </p:graphicFrame>
+      <p:sp>
+        <p:nvSpPr>
+          <p:cNvPr id="5" name="text"/>
+          <p:cNvSpPr txBox="1"/>
+          <p:nvPr/>
+        </p:nvSpPr>
+        <p:spPr>
+          <a:xfrm>
+            <a:off x="548640" y="5760720"/>
+            <a:ext cx="11094415" cy="365760"/>
+          </a:xfrm>
+          <a:prstGeom prst="rect">
+            <a:avLst/>
+          </a:prstGeom>
+          <a:noFill/>
+          <a:ln/>
+        </p:spPr>
+        <p:txBody>
+          <a:bodyPr wrap="square" lIns="0" tIns="0" rIns="0" bIns="0" rtlCol="0" anchor="t"/>
+          <a:lstStyle/>
+          <a:p>
+            <a:pPr algn="l" indent="0" marL="0">
+              <a:buNone/>
+            </a:pPr>
+            <a:r>
+              <a:rPr lang="en-US" sz="1100" dirty="0">
+                <a:solidFill>
+                  <a:srgbClr val="5E5E5E"/>
+                </a:solidFill>
+              </a:rPr>
+              <a:t>Utility: normalised utility on the MIMIC-IV development test split, one seed, preliminary [41]. Every 95 % CI is above zero and the intervals overlap, so the order is not a ranking.</a:t>
+            </a:r>
+            <a:endParaRPr lang="en-US" sz="1100" dirty="0"/>
+          </a:p>
+        </p:txBody>
+      </p:sp>
+      <p:sp>
+        <p:nvSpPr>
+          <p:cNvPr id="6" name="references"/>
+          <p:cNvSpPr txBox="1"/>
+          <p:nvPr/>
+        </p:nvSpPr>
+        <p:spPr>
+          <a:xfrm>
+            <a:off x="548640" y="5943600"/>
+            <a:ext cx="10180015" cy="457200"/>
+          </a:xfrm>
+          <a:prstGeom prst="rect">
+            <a:avLst/>
+          </a:prstGeom>
+          <a:noFill/>
+          <a:ln/>
+        </p:spPr>
+        <p:txBody>
+          <a:bodyPr wrap="square" lIns="0" tIns="0" rIns="0" bIns="0" rtlCol="0" anchor="b"/>
+          <a:lstStyle/>
+          <a:p>
+            <a:pPr indent="0" marL="0">
+              <a:buNone/>
+            </a:pPr>
+            <a:r>
+              <a:rPr lang="en-US" sz="950" dirty="0">
+                <a:solidFill>
+                  <a:srgbClr val="5E5E5E"/>
+                </a:solidFill>
+              </a:rPr>
+              <a:t>[21] Morrill et al., Crit Care Med 2020   [36] Vaswani et al., NeurIPS 2017   [37] Che et al., Sci Rep 2018   [38] Bai et al., arXiv 2018   [46] Friedman, Ann Stat 2001</a:t>
+            </a:r>
+            <a:endParaRPr lang="en-US" sz="950" dirty="0"/>
+          </a:p>
+        </p:txBody>
+      </p:sp>
+      <p:sp>
+        <p:nvSpPr>
+          <p:cNvPr id="25" name="Slide Number Placeholder 0"/>
+          <p:cNvSpPr>
+            <a:spLocks noGrp="1"/>
+          </p:cNvSpPr>
+          <p:nvPr>
+            <p:ph type="sldNum" sz="quarter" idx="4294967295"/>
+          </p:nvPr>
+        </p:nvSpPr>
+        <p:spPr>
+          <a:xfrm>
+            <a:off x="10911535" y="6437376"/>
+            <a:ext cx="731520" cy="274320"/>
+          </a:xfrm>
+          <a:prstGeom prst="rect">
+            <a:avLst/>
+          </a:prstGeom>
+          <a:extLst>
+            <a:ext uri="{C572A759-6A51-4108-AA02-DFA0A04FC94B}">
+              <ma14:wrappingTextBoxFlag xmlns:ma14="http://schemas.microsoft.com/office/mac/drawingml/2011/main" val="0"/>
+            </a:ext>
+          </a:extLst>
+        </p:spPr>
+        <p:txBody>
+          <a:bodyPr/>
+          <a:lstStyle>
+            <a:lvl1pPr>
+              <a:defRPr sz="1200">
+                <a:solidFill>
+                  <a:srgbClr val="C8102E"/>
+                </a:solidFill>
+              </a:defRPr>
+            </a:lvl1pPr>
+          </a:lstStyle>
+          <a:p>
+            <a:pPr algn="r"/>
+            <a:fld id="{F7021451-1387-4CA6-816F-3879F97B5CBC}" type="slidenum">
+              <a:rPr b="1" lang="en-US"/>
+              <a:t>21</a:t>
+            </a:fld>
+            <a:endParaRPr lang="en-US"/>
+          </a:p>
+        </p:txBody>
+      </p:sp>
+    </p:spTree>
+  </p:cSld>
+  <p:clrMapOvr>
+    <a:masterClrMapping/>
+  </p:clrMapOvr>
+</p:sld>
+</file>
+
+<file path=ppt/slides/slide22.xml><?xml version="1.0" encoding="utf-8"?>
+<p:sld xmlns:a="http://schemas.openxmlformats.org/drawingml/2006/main" xmlns:r="http://schemas.openxmlformats.org/officeDocument/2006/relationships" xmlns:p="http://schemas.openxmlformats.org/presentationml/2006/main">
+  <p:cSld name="Slide 22">
+    <p:spTree>
+      <p:nvGrpSpPr>
+        <p:cNvPr id="1" name=""/>
+        <p:cNvGrpSpPr/>
+        <p:nvPr/>
+      </p:nvGrpSpPr>
+      <p:grpSpPr>
+        <a:xfrm>
+          <a:off x="0" y="0"/>
+          <a:ext cx="0" cy="0"/>
+          <a:chOff x="0" y="0"/>
+          <a:chExt cx="0" cy="0"/>
+        </a:xfrm>
+      </p:grpSpPr>
+      <p:sp>
+        <p:nvSpPr>
+          <p:cNvPr id="2" name="section label"/>
+          <p:cNvSpPr txBox="1"/>
+          <p:nvPr/>
+        </p:nvSpPr>
+        <p:spPr>
+          <a:xfrm>
+            <a:off x="548640" y="237744"/>
+            <a:ext cx="7315200" cy="274320"/>
+          </a:xfrm>
+          <a:prstGeom prst="rect">
+            <a:avLst/>
+          </a:prstGeom>
+          <a:noFill/>
+          <a:ln/>
+        </p:spPr>
+        <p:txBody>
+          <a:bodyPr wrap="square" lIns="0" tIns="0" rIns="0" bIns="0" rtlCol="0" anchor="t"/>
+          <a:lstStyle/>
+          <a:p>
+            <a:pPr algn="l" indent="0" marL="0">
+              <a:buNone/>
+            </a:pPr>
+            <a:r>
+              <a:rPr lang="en-US" sz="1100" b="1" dirty="0">
+                <a:solidFill>
+                  <a:srgbClr val="C8102E"/>
+                </a:solidFill>
+              </a:rPr>
+              <a:t>BACKUP</a:t>
+            </a:r>
+            <a:endParaRPr lang="en-US" sz="1100" dirty="0"/>
+          </a:p>
+        </p:txBody>
+      </p:sp>
+      <p:sp>
+        <p:nvSpPr>
+          <p:cNvPr id="3" name="Text 0"/>
+          <p:cNvSpPr/>
+          <p:nvPr>
+            <p:ph idx="100" type="title" hasCustomPrompt="1"/>
+          </p:nvPr>
+        </p:nvSpPr>
+        <p:spPr>
+          <a:xfrm>
+            <a:off x="548640" y="548640"/>
+            <a:ext cx="11094415" cy="868680"/>
+          </a:xfrm>
+          <a:prstGeom prst="rect">
+            <a:avLst/>
+          </a:prstGeom>
+          <a:noFill/>
+          <a:ln/>
+        </p:spPr>
+        <p:txBody>
+          <a:bodyPr wrap="square" lIns="0" tIns="0" rIns="0" bIns="0" rtlCol="0" anchor="t"/>
+          <a:lstStyle/>
+          <a:p>
+            <a:pPr algn="l" indent="0" marL="0">
+              <a:buNone/>
+            </a:pPr>
+            <a:r>
+              <a:rPr lang="en-US" sz="2400" b="1" dirty="0">
+                <a:solidFill>
+                  <a:srgbClr val="1B1B1B"/>
+                </a:solidFill>
+                <a:latin typeface="Arial" pitchFamily="34" charset="0"/>
+                <a:ea typeface="Arial" pitchFamily="34" charset="-122"/>
+                <a:cs typeface="Arial" pitchFamily="34" charset="-120"/>
+              </a:rPr>
+              <a:t>Every model compared (2 of 2): channel encoders, self-supervised pretraining, ensemble</a:t>
+            </a:r>
+            <a:endParaRPr lang="en-US" sz="2400" dirty="0"/>
+          </a:p>
+        </p:txBody>
+      </p:sp>
+      <p:graphicFrame>
+        <p:nvGraphicFramePr>
+          <p:cNvPr id="23" name="models table"/>
+          <p:cNvGraphicFramePr>
+            <a:graphicFrameLocks noGrp="1"/>
+          </p:cNvGraphicFramePr>
+          <p:nvPr>
+            <p:extLst>
+              <p:ext uri="{D42A27DB-BD31-4B8C-83A1-F6EECF244321}">
+                <p14:modId xmlns:p14="http://schemas.microsoft.com/office/powerpoint/2010/main" val="1579011935"/>
+              </p:ext>
+            </p:extLst>
+          </p:nvPr>
+        </p:nvGraphicFramePr>
+        <p:xfrm>
+          <a:off x="548640" y="1417320"/>
+          <a:ext cx="11094415" cy="914400"/>
+        </p:xfrm>
+        <a:graphic>
+          <a:graphicData uri="http://schemas.openxmlformats.org/drawingml/2006/table">
+            <a:tbl>
+              <a:tblPr/>
+              <a:tblGrid>
+                <a:gridCol w="2331720"/>
+                <a:gridCol w="4069080"/>
+                <a:gridCol w="3776472"/>
+                <a:gridCol w="914400"/>
+              </a:tblGrid>
+              <a:tr h="0">
+                <a:tc>
+                  <a:txBody>
+                    <a:bodyPr/>
+                    <a:lstStyle/>
+                    <a:p>
+                      <a:pPr indent="0" marL="0">
+                        <a:buNone/>
+                      </a:pPr>
+                      <a:r>
+                        <a:rPr lang="en-US" sz="1200" b="1" dirty="0">
+                          <a:solidFill>
+                            <a:srgbClr val="FFFFFF"/>
+                          </a:solidFill>
+                          <a:latin typeface="Arial" pitchFamily="34" charset="0"/>
+                          <a:ea typeface="Arial" pitchFamily="34" charset="-122"/>
+                          <a:cs typeface="Arial" pitchFamily="34" charset="-120"/>
+                        </a:rPr>
+                        <a:t>Model</a:t>
+                      </a:r>
+                      <a:endParaRPr lang="en-US" sz="1200" dirty="0">
+                        <a:latin typeface="Arial" charset="0"/>
+                        <a:ea typeface="Arial" charset="0"/>
+                        <a:cs typeface="Arial" charset="0"/>
+                      </a:endParaRPr>
+                    </a:p>
+                  </a:txBody>
+                  <a:tcPr marL="45720" marR="45720" marT="45720" marB="45720" anchor="ctr">
+                    <a:lnL w="9525" cap="flat" cmpd="sng" algn="ctr">
+                      <a:solidFill>
+                        <a:srgbClr val="BDBDBD"/>
+                      </a:solidFill>
+                      <a:prstDash val="solid"/>
+                      <a:round/>
+                      <a:headEnd type="none" w="med" len="med"/>
+                      <a:tailEnd type="none" w="med" len="med"/>
+                    </a:lnL>
+                    <a:lnR w="9525" cap="flat" cmpd="sng" algn="ctr">
+                      <a:solidFill>
+                        <a:srgbClr val="BDBDBD"/>
+                      </a:solidFill>
+                      <a:prstDash val="solid"/>
+                      <a:round/>
+                      <a:headEnd type="none" w="med" len="med"/>
+                      <a:tailEnd type="none" w="med" len="med"/>
+                    </a:lnR>
+                    <a:lnT w="9525" cap="flat" cmpd="sng" algn="ctr">
+                      <a:solidFill>
+                        <a:srgbClr val="BDBDBD"/>
+                      </a:solidFill>
+                      <a:prstDash val="solid"/>
+                      <a:round/>
+                      <a:headEnd type="none" w="med" len="med"/>
+                      <a:tailEnd type="none" w="med" len="med"/>
+                    </a:lnT>
+                    <a:lnB w="9525" cap="flat" cmpd="sng" algn="ctr">
+                      <a:solidFill>
+                        <a:srgbClr val="BDBDBD"/>
+                      </a:solidFill>
+                      <a:prstDash val="solid"/>
+                      <a:round/>
+                      <a:headEnd type="none" w="med" len="med"/>
+                      <a:tailEnd type="none" w="med" len="med"/>
+                    </a:lnB>
+                    <a:solidFill>
+                      <a:srgbClr val="1B1B1B"/>
+                    </a:solidFill>
+                  </a:tcPr>
+                </a:tc>
+                <a:tc>
+                  <a:txBody>
+                    <a:bodyPr/>
+                    <a:lstStyle/>
+                    <a:p>
+                      <a:pPr indent="0" marL="0">
+                        <a:buNone/>
+                      </a:pPr>
+                      <a:r>
+                        <a:rPr lang="en-US" sz="1200" b="1" dirty="0">
+                          <a:solidFill>
+                            <a:srgbClr val="FFFFFF"/>
+                          </a:solidFill>
+                          <a:latin typeface="Arial" pitchFamily="34" charset="0"/>
+                          <a:ea typeface="Arial" pitchFamily="34" charset="-122"/>
+                          <a:cs typeface="Arial" pitchFamily="34" charset="-120"/>
+                        </a:rPr>
+                        <a:t>Core idea</a:t>
+                      </a:r>
+                      <a:endParaRPr lang="en-US" sz="1200" dirty="0">
+                        <a:latin typeface="Arial" charset="0"/>
+                        <a:ea typeface="Arial" charset="0"/>
+                        <a:cs typeface="Arial" charset="0"/>
+                      </a:endParaRPr>
+                    </a:p>
+                  </a:txBody>
+                  <a:tcPr marL="45720" marR="45720" marT="45720" marB="45720" anchor="ctr">
+                    <a:lnL w="9525" cap="flat" cmpd="sng" algn="ctr">
+                      <a:solidFill>
+                        <a:srgbClr val="BDBDBD"/>
+                      </a:solidFill>
+                      <a:prstDash val="solid"/>
+                      <a:round/>
+                      <a:headEnd type="none" w="med" len="med"/>
+                      <a:tailEnd type="none" w="med" len="med"/>
+                    </a:lnL>
+                    <a:lnR w="9525" cap="flat" cmpd="sng" algn="ctr">
+                      <a:solidFill>
+                        <a:srgbClr val="BDBDBD"/>
+                      </a:solidFill>
+                      <a:prstDash val="solid"/>
+                      <a:round/>
+                      <a:headEnd type="none" w="med" len="med"/>
+                      <a:tailEnd type="none" w="med" len="med"/>
+                    </a:lnR>
+                    <a:lnT w="9525" cap="flat" cmpd="sng" algn="ctr">
+                      <a:solidFill>
+                        <a:srgbClr val="BDBDBD"/>
+                      </a:solidFill>
+                      <a:prstDash val="solid"/>
+                      <a:round/>
+                      <a:headEnd type="none" w="med" len="med"/>
+                      <a:tailEnd type="none" w="med" len="med"/>
+                    </a:lnT>
+                    <a:lnB w="9525" cap="flat" cmpd="sng" algn="ctr">
+                      <a:solidFill>
+                        <a:srgbClr val="BDBDBD"/>
+                      </a:solidFill>
+                      <a:prstDash val="solid"/>
+                      <a:round/>
+                      <a:headEnd type="none" w="med" len="med"/>
+                      <a:tailEnd type="none" w="med" len="med"/>
+                    </a:lnB>
+                    <a:solidFill>
+                      <a:srgbClr val="1B1B1B"/>
+                    </a:solidFill>
+                  </a:tcPr>
+                </a:tc>
+                <a:tc>
+                  <a:txBody>
+                    <a:bodyPr/>
+                    <a:lstStyle/>
+                    <a:p>
+                      <a:pPr indent="0" marL="0">
+                        <a:buNone/>
+                      </a:pPr>
+                      <a:r>
+                        <a:rPr lang="en-US" sz="1200" b="1" dirty="0">
+                          <a:solidFill>
+                            <a:srgbClr val="FFFFFF"/>
+                          </a:solidFill>
+                          <a:latin typeface="Arial" pitchFamily="34" charset="0"/>
+                          <a:ea typeface="Arial" pitchFamily="34" charset="-122"/>
+                          <a:cs typeface="Arial" pitchFamily="34" charset="-120"/>
+                        </a:rPr>
+                        <a:t>How it differs</a:t>
+                      </a:r>
+                      <a:endParaRPr lang="en-US" sz="1200" dirty="0">
+                        <a:latin typeface="Arial" charset="0"/>
+                        <a:ea typeface="Arial" charset="0"/>
+                        <a:cs typeface="Arial" charset="0"/>
+                      </a:endParaRPr>
+                    </a:p>
+                  </a:txBody>
+                  <a:tcPr marL="45720" marR="45720" marT="45720" marB="45720" anchor="ctr">
+                    <a:lnL w="9525" cap="flat" cmpd="sng" algn="ctr">
+                      <a:solidFill>
+                        <a:srgbClr val="BDBDBD"/>
+                      </a:solidFill>
+                      <a:prstDash val="solid"/>
+                      <a:round/>
+                      <a:headEnd type="none" w="med" len="med"/>
+                      <a:tailEnd type="none" w="med" len="med"/>
+                    </a:lnL>
+                    <a:lnR w="9525" cap="flat" cmpd="sng" algn="ctr">
+                      <a:solidFill>
+                        <a:srgbClr val="BDBDBD"/>
+                      </a:solidFill>
+                      <a:prstDash val="solid"/>
+                      <a:round/>
+                      <a:headEnd type="none" w="med" len="med"/>
+                      <a:tailEnd type="none" w="med" len="med"/>
+                    </a:lnR>
+                    <a:lnT w="9525" cap="flat" cmpd="sng" algn="ctr">
+                      <a:solidFill>
+                        <a:srgbClr val="BDBDBD"/>
+                      </a:solidFill>
+                      <a:prstDash val="solid"/>
+                      <a:round/>
+                      <a:headEnd type="none" w="med" len="med"/>
+                      <a:tailEnd type="none" w="med" len="med"/>
+                    </a:lnT>
+                    <a:lnB w="9525" cap="flat" cmpd="sng" algn="ctr">
+                      <a:solidFill>
+                        <a:srgbClr val="BDBDBD"/>
+                      </a:solidFill>
+                      <a:prstDash val="solid"/>
+                      <a:round/>
+                      <a:headEnd type="none" w="med" len="med"/>
+                      <a:tailEnd type="none" w="med" len="med"/>
+                    </a:lnB>
+                    <a:solidFill>
+                      <a:srgbClr val="1B1B1B"/>
+                    </a:solidFill>
+                  </a:tcPr>
+                </a:tc>
+                <a:tc>
+                  <a:txBody>
+                    <a:bodyPr/>
+                    <a:lstStyle/>
+                    <a:p>
+                      <a:pPr indent="0" marL="0">
+                        <a:buNone/>
+                      </a:pPr>
+                      <a:r>
+                        <a:rPr lang="en-US" sz="1200" b="1" dirty="0">
+                          <a:solidFill>
+                            <a:srgbClr val="FFFFFF"/>
+                          </a:solidFill>
+                          <a:latin typeface="Arial" pitchFamily="34" charset="0"/>
+                          <a:ea typeface="Arial" pitchFamily="34" charset="-122"/>
+                          <a:cs typeface="Arial" pitchFamily="34" charset="-120"/>
+                        </a:rPr>
+                        <a:t>Utility</a:t>
+                      </a:r>
+                      <a:endParaRPr lang="en-US" sz="1200" dirty="0">
+                        <a:latin typeface="Arial" charset="0"/>
+                        <a:ea typeface="Arial" charset="0"/>
+                        <a:cs typeface="Arial" charset="0"/>
+                      </a:endParaRPr>
+                    </a:p>
+                  </a:txBody>
+                  <a:tcPr marL="45720" marR="45720" marT="45720" marB="45720" anchor="ctr">
+                    <a:lnL w="9525" cap="flat" cmpd="sng" algn="ctr">
+                      <a:solidFill>
+                        <a:srgbClr val="BDBDBD"/>
+                      </a:solidFill>
+                      <a:prstDash val="solid"/>
+                      <a:round/>
+                      <a:headEnd type="none" w="med" len="med"/>
+                      <a:tailEnd type="none" w="med" len="med"/>
+                    </a:lnL>
+                    <a:lnR w="9525" cap="flat" cmpd="sng" algn="ctr">
+                      <a:solidFill>
+                        <a:srgbClr val="BDBDBD"/>
+                      </a:solidFill>
+                      <a:prstDash val="solid"/>
+                      <a:round/>
+                      <a:headEnd type="none" w="med" len="med"/>
+                      <a:tailEnd type="none" w="med" len="med"/>
+                    </a:lnR>
+                    <a:lnT w="9525" cap="flat" cmpd="sng" algn="ctr">
+                      <a:solidFill>
+                        <a:srgbClr val="BDBDBD"/>
+                      </a:solidFill>
+                      <a:prstDash val="solid"/>
+                      <a:round/>
+                      <a:headEnd type="none" w="med" len="med"/>
+                      <a:tailEnd type="none" w="med" len="med"/>
+                    </a:lnT>
+                    <a:lnB w="9525" cap="flat" cmpd="sng" algn="ctr">
+                      <a:solidFill>
+                        <a:srgbClr val="BDBDBD"/>
+                      </a:solidFill>
+                      <a:prstDash val="solid"/>
+                      <a:round/>
+                      <a:headEnd type="none" w="med" len="med"/>
+                      <a:tailEnd type="none" w="med" len="med"/>
+                    </a:lnB>
+                    <a:solidFill>
+                      <a:srgbClr val="1B1B1B"/>
+                    </a:solidFill>
+                  </a:tcPr>
+                </a:tc>
+              </a:tr>
+              <a:tr h="0">
+                <a:tc>
+                  <a:txBody>
+                    <a:bodyPr/>
+                    <a:lstStyle/>
+                    <a:p>
+                      <a:pPr indent="0" marL="0">
+                        <a:buNone/>
+                      </a:pPr>
+                      <a:r>
+                        <a:rPr lang="en-US" sz="1250" b="1" dirty="0">
+                          <a:solidFill>
+                            <a:srgbClr val="1B1B1B"/>
+                          </a:solidFill>
+                          <a:latin typeface="Arial" pitchFamily="34" charset="0"/>
+                          <a:ea typeface="Arial" pitchFamily="34" charset="-122"/>
+                          <a:cs typeface="Arial" pitchFamily="34" charset="-120"/>
+                        </a:rPr>
                         <a:t>CNN to OSTA</a:t>
                       </a:r>
                       <a:endParaRPr lang="en-US" sz="1250" dirty="0">
@@ -21596,7 +23156,7 @@
             <a:pPr algn="r"/>
             <a:fld id="{F7021451-1387-4CA6-816F-3879F97B5CBC}" type="slidenum">
               <a:rPr b="1" lang="en-US"/>
-              <a:t>21</a:t>
+              <a:t>22</a:t>
             </a:fld>
             <a:endParaRPr lang="en-US"/>
           </a:p>
@@ -21610,9 +23170,9 @@
 </p:sld>
 </file>
 
-<file path=ppt/slides/slide22.xml><?xml version="1.0" encoding="utf-8"?>
+<file path=ppt/slides/slide23.xml><?xml version="1.0" encoding="utf-8"?>
 <p:sld xmlns:a="http://schemas.openxmlformats.org/drawingml/2006/main" xmlns:r="http://schemas.openxmlformats.org/officeDocument/2006/relationships" xmlns:p="http://schemas.openxmlformats.org/presentationml/2006/main">
-  <p:cSld name="Slide 22">
+  <p:cSld name="Slide 23">
     <p:spTree>
       <p:nvGrpSpPr>
         <p:cNvPr id="1" name=""/>
@@ -21706,7 +23266,7 @@
       </p:sp>
       <p:graphicFrame>
         <p:nvGraphicFramePr>
-          <p:cNvPr id="23" name="cohort table"/>
+          <p:cNvPr id="24" name="cohort table"/>
           <p:cNvGraphicFramePr>
             <a:graphicFrameLocks noGrp="1"/>
           </p:cNvGraphicFramePr>
@@ -22902,463 +24462,6 @@
             <a:pPr algn="r"/>
             <a:fld id="{F7021451-1387-4CA6-816F-3879F97B5CBC}" type="slidenum">
               <a:rPr b="1" lang="en-US"/>
-              <a:t>22</a:t>
-            </a:fld>
-            <a:endParaRPr lang="en-US"/>
-          </a:p>
-        </p:txBody>
-      </p:sp>
-    </p:spTree>
-  </p:cSld>
-  <p:clrMapOvr>
-    <a:masterClrMapping/>
-  </p:clrMapOvr>
-</p:sld>
-</file>
-
-<file path=ppt/slides/slide23.xml><?xml version="1.0" encoding="utf-8"?>
-<p:sld xmlns:a="http://schemas.openxmlformats.org/drawingml/2006/main" xmlns:r="http://schemas.openxmlformats.org/officeDocument/2006/relationships" xmlns:p="http://schemas.openxmlformats.org/presentationml/2006/main">
-  <p:cSld name="Slide 23">
-    <p:spTree>
-      <p:nvGrpSpPr>
-        <p:cNvPr id="1" name=""/>
-        <p:cNvGrpSpPr/>
-        <p:nvPr/>
-      </p:nvGrpSpPr>
-      <p:grpSpPr>
-        <a:xfrm>
-          <a:off x="0" y="0"/>
-          <a:ext cx="0" cy="0"/>
-          <a:chOff x="0" y="0"/>
-          <a:chExt cx="0" cy="0"/>
-        </a:xfrm>
-      </p:grpSpPr>
-      <p:sp>
-        <p:nvSpPr>
-          <p:cNvPr id="2" name="section label"/>
-          <p:cNvSpPr txBox="1"/>
-          <p:nvPr/>
-        </p:nvSpPr>
-        <p:spPr>
-          <a:xfrm>
-            <a:off x="548640" y="237744"/>
-            <a:ext cx="7315200" cy="274320"/>
-          </a:xfrm>
-          <a:prstGeom prst="rect">
-            <a:avLst/>
-          </a:prstGeom>
-          <a:noFill/>
-          <a:ln/>
-        </p:spPr>
-        <p:txBody>
-          <a:bodyPr wrap="square" lIns="0" tIns="0" rIns="0" bIns="0" rtlCol="0" anchor="t"/>
-          <a:lstStyle/>
-          <a:p>
-            <a:pPr algn="l" indent="0" marL="0">
-              <a:buNone/>
-            </a:pPr>
-            <a:r>
-              <a:rPr lang="en-US" sz="1100" b="1" dirty="0">
-                <a:solidFill>
-                  <a:srgbClr val="C8102E"/>
-                </a:solidFill>
-              </a:rPr>
-              <a:t>BACKUP</a:t>
-            </a:r>
-            <a:endParaRPr lang="en-US" sz="1100" dirty="0"/>
-          </a:p>
-        </p:txBody>
-      </p:sp>
-      <p:sp>
-        <p:nvSpPr>
-          <p:cNvPr id="3" name="Text 0"/>
-          <p:cNvSpPr/>
-          <p:nvPr>
-            <p:ph idx="100" type="title" hasCustomPrompt="1"/>
-          </p:nvPr>
-        </p:nvSpPr>
-        <p:spPr>
-          <a:xfrm>
-            <a:off x="548640" y="548640"/>
-            <a:ext cx="11094415" cy="868680"/>
-          </a:xfrm>
-          <a:prstGeom prst="rect">
-            <a:avLst/>
-          </a:prstGeom>
-          <a:noFill/>
-          <a:ln/>
-        </p:spPr>
-        <p:txBody>
-          <a:bodyPr wrap="square" lIns="0" tIns="0" rIns="0" bIns="0" rtlCol="0" anchor="t"/>
-          <a:lstStyle/>
-          <a:p>
-            <a:pPr algn="l" indent="0" marL="0">
-              <a:buNone/>
-            </a:pPr>
-            <a:r>
-              <a:rPr lang="en-US" sz="2400" b="1" dirty="0">
-                <a:solidFill>
-                  <a:srgbClr val="1B1B1B"/>
-                </a:solidFill>
-                <a:latin typeface="Arial" pitchFamily="34" charset="0"/>
-                <a:ea typeface="Arial" pitchFamily="34" charset="-122"/>
-                <a:cs typeface="Arial" pitchFamily="34" charset="-120"/>
-              </a:rPr>
-              <a:t>On 10,000 stays models overfit fast and the validation split is too small to rank them</a:t>
-            </a:r>
-            <a:endParaRPr lang="en-US" sz="2400" dirty="0"/>
-          </a:p>
-        </p:txBody>
-      </p:sp>
-      <p:sp>
-        <p:nvSpPr>
-          <p:cNvPr id="4" name="text"/>
-          <p:cNvSpPr txBox="1"/>
-          <p:nvPr/>
-        </p:nvSpPr>
-        <p:spPr>
-          <a:xfrm>
-            <a:off x="548640" y="1645920"/>
-            <a:ext cx="3566160" cy="731520"/>
-          </a:xfrm>
-          <a:prstGeom prst="rect">
-            <a:avLst/>
-          </a:prstGeom>
-          <a:noFill/>
-          <a:ln/>
-        </p:spPr>
-        <p:txBody>
-          <a:bodyPr wrap="square" lIns="0" tIns="0" rIns="0" bIns="0" rtlCol="0" anchor="t"/>
-          <a:lstStyle/>
-          <a:p>
-            <a:pPr algn="l" indent="0" marL="0">
-              <a:buNone/>
-            </a:pPr>
-            <a:r>
-              <a:rPr lang="en-US" sz="3600" b="1" dirty="0">
-                <a:solidFill>
-                  <a:srgbClr val="C8102E"/>
-                </a:solidFill>
-              </a:rPr>
-              <a:t>1 to 3</a:t>
-            </a:r>
-            <a:endParaRPr lang="en-US" sz="3600" dirty="0"/>
-          </a:p>
-        </p:txBody>
-      </p:sp>
-      <p:sp>
-        <p:nvSpPr>
-          <p:cNvPr id="5" name="text"/>
-          <p:cNvSpPr txBox="1"/>
-          <p:nvPr/>
-        </p:nvSpPr>
-        <p:spPr>
-          <a:xfrm>
-            <a:off x="548640" y="2423160"/>
-            <a:ext cx="3474720" cy="1005840"/>
-          </a:xfrm>
-          <a:prstGeom prst="rect">
-            <a:avLst/>
-          </a:prstGeom>
-          <a:noFill/>
-          <a:ln/>
-        </p:spPr>
-        <p:txBody>
-          <a:bodyPr wrap="square" lIns="0" tIns="0" rIns="0" bIns="0" rtlCol="0" anchor="t"/>
-          <a:lstStyle/>
-          <a:p>
-            <a:pPr algn="l" indent="0" marL="0">
-              <a:buNone/>
-            </a:pPr>
-            <a:r>
-              <a:rPr lang="en-US" sz="1400" dirty="0">
-                <a:solidFill>
-                  <a:srgbClr val="1B1B1B"/>
-                </a:solidFill>
-              </a:rPr>
-              <a:t>epochs to the best validation score, while training loss keeps falling</a:t>
-            </a:r>
-            <a:endParaRPr lang="en-US" sz="1400" dirty="0"/>
-          </a:p>
-        </p:txBody>
-      </p:sp>
-      <p:sp>
-        <p:nvSpPr>
-          <p:cNvPr id="6" name="text"/>
-          <p:cNvSpPr txBox="1"/>
-          <p:nvPr/>
-        </p:nvSpPr>
-        <p:spPr>
-          <a:xfrm>
-            <a:off x="4297680" y="1645920"/>
-            <a:ext cx="3566160" cy="731520"/>
-          </a:xfrm>
-          <a:prstGeom prst="rect">
-            <a:avLst/>
-          </a:prstGeom>
-          <a:noFill/>
-          <a:ln/>
-        </p:spPr>
-        <p:txBody>
-          <a:bodyPr wrap="square" lIns="0" tIns="0" rIns="0" bIns="0" rtlCol="0" anchor="t"/>
-          <a:lstStyle/>
-          <a:p>
-            <a:pPr algn="l" indent="0" marL="0">
-              <a:buNone/>
-            </a:pPr>
-            <a:r>
-              <a:rPr lang="en-US" sz="3600" b="1" dirty="0">
-                <a:solidFill>
-                  <a:srgbClr val="C8102E"/>
-                </a:solidFill>
-              </a:rPr>
-              <a:t>175</a:t>
-            </a:r>
-            <a:endParaRPr lang="en-US" sz="3600" dirty="0"/>
-          </a:p>
-        </p:txBody>
-      </p:sp>
-      <p:sp>
-        <p:nvSpPr>
-          <p:cNvPr id="7" name="text"/>
-          <p:cNvSpPr txBox="1"/>
-          <p:nvPr/>
-        </p:nvSpPr>
-        <p:spPr>
-          <a:xfrm>
-            <a:off x="4297680" y="2423160"/>
-            <a:ext cx="3474720" cy="1005840"/>
-          </a:xfrm>
-          <a:prstGeom prst="rect">
-            <a:avLst/>
-          </a:prstGeom>
-          <a:noFill/>
-          <a:ln/>
-        </p:spPr>
-        <p:txBody>
-          <a:bodyPr wrap="square" lIns="0" tIns="0" rIns="0" bIns="0" rtlCol="0" anchor="t"/>
-          <a:lstStyle/>
-          <a:p>
-            <a:pPr algn="l" indent="0" marL="0">
-              <a:buNone/>
-            </a:pPr>
-            <a:r>
-              <a:rPr lang="en-US" sz="1400" dirty="0">
-                <a:solidFill>
-                  <a:srgbClr val="1B1B1B"/>
-                </a:solidFill>
-              </a:rPr>
-              <a:t>septic stays per training split, against 300 to 655 predictors</a:t>
-            </a:r>
-            <a:endParaRPr lang="en-US" sz="1400" dirty="0"/>
-          </a:p>
-        </p:txBody>
-      </p:sp>
-      <p:sp>
-        <p:nvSpPr>
-          <p:cNvPr id="8" name="text"/>
-          <p:cNvSpPr txBox="1"/>
-          <p:nvPr/>
-        </p:nvSpPr>
-        <p:spPr>
-          <a:xfrm>
-            <a:off x="8046720" y="1645920"/>
-            <a:ext cx="3566160" cy="731520"/>
-          </a:xfrm>
-          <a:prstGeom prst="rect">
-            <a:avLst/>
-          </a:prstGeom>
-          <a:noFill/>
-          <a:ln/>
-        </p:spPr>
-        <p:txBody>
-          <a:bodyPr wrap="square" lIns="0" tIns="0" rIns="0" bIns="0" rtlCol="0" anchor="t"/>
-          <a:lstStyle/>
-          <a:p>
-            <a:pPr algn="l" indent="0" marL="0">
-              <a:buNone/>
-            </a:pPr>
-            <a:r>
-              <a:rPr lang="en-US" sz="3600" b="1" dirty="0">
-                <a:solidFill>
-                  <a:srgbClr val="C8102E"/>
-                </a:solidFill>
-              </a:rPr>
-              <a:t>0.12 vs 0.28</a:t>
-            </a:r>
-            <a:endParaRPr lang="en-US" sz="3600" dirty="0"/>
-          </a:p>
-        </p:txBody>
-      </p:sp>
-      <p:sp>
-        <p:nvSpPr>
-          <p:cNvPr id="9" name="text"/>
-          <p:cNvSpPr txBox="1"/>
-          <p:nvPr/>
-        </p:nvSpPr>
-        <p:spPr>
-          <a:xfrm>
-            <a:off x="8046720" y="2423160"/>
-            <a:ext cx="3474720" cy="1005840"/>
-          </a:xfrm>
-          <a:prstGeom prst="rect">
-            <a:avLst/>
-          </a:prstGeom>
-          <a:noFill/>
-          <a:ln/>
-        </p:spPr>
-        <p:txBody>
-          <a:bodyPr wrap="square" lIns="0" tIns="0" rIns="0" bIns="0" rtlCol="0" anchor="t"/>
-          <a:lstStyle/>
-          <a:p>
-            <a:pPr algn="l" indent="0" marL="0">
-              <a:buNone/>
-            </a:pPr>
-            <a:r>
-              <a:rPr lang="en-US" sz="1400" dirty="0">
-                <a:solidFill>
-                  <a:srgbClr val="1B1B1B"/>
-                </a:solidFill>
-              </a:rPr>
-              <a:t>validation utility of OSTA and flat OSTA, which tie on test (0.23): validation and test rankings disagree</a:t>
-            </a:r>
-            <a:endParaRPr lang="en-US" sz="1400" dirty="0"/>
-          </a:p>
-        </p:txBody>
-      </p:sp>
-      <p:sp>
-        <p:nvSpPr>
-          <p:cNvPr id="10" name="list"/>
-          <p:cNvSpPr txBox="1"/>
-          <p:nvPr/>
-        </p:nvSpPr>
-        <p:spPr>
-          <a:xfrm>
-            <a:off x="548640" y="3749040"/>
-            <a:ext cx="11094415" cy="1828800"/>
-          </a:xfrm>
-          <a:prstGeom prst="rect">
-            <a:avLst/>
-          </a:prstGeom>
-          <a:noFill/>
-          <a:ln/>
-        </p:spPr>
-        <p:txBody>
-          <a:bodyPr wrap="square" lIns="0" tIns="0" rIns="0" bIns="0" rtlCol="0" anchor="t"/>
-          <a:lstStyle/>
-          <a:p>
-            <a:pPr marL="203200" indent="-203200">
-              <a:spcAft>
-                <a:spcPts val="800"/>
-              </a:spcAft>
-              <a:buSzPct val="100000"/>
-              <a:buChar char="•"/>
-            </a:pPr>
-            <a:r>
-              <a:rPr lang="en-US" sz="1400" dirty="0">
-                <a:solidFill>
-                  <a:srgbClr val="1B1B1B"/>
-                </a:solidFill>
-              </a:rPr>
-              <a:t>Response: full cohort (about nine times more sepsis cases), self-supervised pretraining on unlabelled stays [39], loss chosen by utility [40], three seeds.</a:t>
-            </a:r>
-            <a:endParaRPr lang="en-US" sz="1400" dirty="0"/>
-          </a:p>
-          <a:p>
-            <a:pPr marL="203200" indent="-203200">
-              <a:spcAft>
-                <a:spcPts val="800"/>
-              </a:spcAft>
-              <a:buSzPct val="100000"/>
-              <a:buChar char="•"/>
-            </a:pPr>
-            <a:r>
-              <a:rPr lang="en-US" sz="1400" dirty="0">
-                <a:solidFill>
-                  <a:srgbClr val="1B1B1B"/>
-                </a:solidFill>
-              </a:rPr>
-              <a:t>All figures: this work, preliminary [41].</a:t>
-            </a:r>
-            <a:endParaRPr lang="en-US" sz="1400" dirty="0"/>
-          </a:p>
-        </p:txBody>
-      </p:sp>
-      <p:sp>
-        <p:nvSpPr>
-          <p:cNvPr id="11" name="references"/>
-          <p:cNvSpPr txBox="1"/>
-          <p:nvPr/>
-        </p:nvSpPr>
-        <p:spPr>
-          <a:xfrm>
-            <a:off x="548640" y="5943600"/>
-            <a:ext cx="10180015" cy="457200"/>
-          </a:xfrm>
-          <a:prstGeom prst="rect">
-            <a:avLst/>
-          </a:prstGeom>
-          <a:noFill/>
-          <a:ln/>
-        </p:spPr>
-        <p:txBody>
-          <a:bodyPr wrap="square" lIns="0" tIns="0" rIns="0" bIns="0" rtlCol="0" anchor="b"/>
-          <a:lstStyle/>
-          <a:p>
-            <a:pPr indent="0" marL="0">
-              <a:buNone/>
-            </a:pPr>
-            <a:r>
-              <a:rPr lang="en-US" sz="950" dirty="0">
-                <a:solidFill>
-                  <a:srgbClr val="5E5E5E"/>
-                </a:solidFill>
-              </a:rPr>
-              <a:t>[39] Yeche et al., ICML 2021   [40] Yeche et al., ICML 2023   [41] This work, preliminary, unpublished</a:t>
-            </a:r>
-            <a:endParaRPr lang="en-US" sz="950" dirty="0"/>
-          </a:p>
-        </p:txBody>
-      </p:sp>
-      <p:sp>
-        <p:nvSpPr>
-          <p:cNvPr id="25" name="Slide Number Placeholder 0"/>
-          <p:cNvSpPr>
-            <a:spLocks noGrp="1"/>
-          </p:cNvSpPr>
-          <p:nvPr>
-            <p:ph type="sldNum" sz="quarter" idx="4294967295"/>
-          </p:nvPr>
-        </p:nvSpPr>
-        <p:spPr>
-          <a:xfrm>
-            <a:off x="10911535" y="6437376"/>
-            <a:ext cx="731520" cy="274320"/>
-          </a:xfrm>
-          <a:prstGeom prst="rect">
-            <a:avLst/>
-          </a:prstGeom>
-          <a:extLst>
-            <a:ext uri="{C572A759-6A51-4108-AA02-DFA0A04FC94B}">
-              <ma14:wrappingTextBoxFlag xmlns:ma14="http://schemas.microsoft.com/office/mac/drawingml/2011/main" val="0"/>
-            </a:ext>
-          </a:extLst>
-        </p:spPr>
-        <p:txBody>
-          <a:bodyPr/>
-          <a:lstStyle>
-            <a:lvl1pPr>
-              <a:defRPr sz="1200">
-                <a:solidFill>
-                  <a:srgbClr val="C8102E"/>
-                </a:solidFill>
-              </a:defRPr>
-            </a:lvl1pPr>
-          </a:lstStyle>
-          <a:p>
-            <a:pPr algn="r"/>
-            <a:fld id="{F7021451-1387-4CA6-816F-3879F97B5CBC}" type="slidenum">
-              <a:rPr b="1" lang="en-US"/>
               <a:t>23</a:t>
             </a:fld>
             <a:endParaRPr lang="en-US"/>
@@ -23461,6 +24564,463 @@
                 <a:ea typeface="Arial" pitchFamily="34" charset="-122"/>
                 <a:cs typeface="Arial" pitchFamily="34" charset="-120"/>
               </a:rPr>
+              <a:t>On 10,000 stays models overfit fast and the validation split is too small to rank them</a:t>
+            </a:r>
+            <a:endParaRPr lang="en-US" sz="2400" dirty="0"/>
+          </a:p>
+        </p:txBody>
+      </p:sp>
+      <p:sp>
+        <p:nvSpPr>
+          <p:cNvPr id="4" name="text"/>
+          <p:cNvSpPr txBox="1"/>
+          <p:nvPr/>
+        </p:nvSpPr>
+        <p:spPr>
+          <a:xfrm>
+            <a:off x="548640" y="1645920"/>
+            <a:ext cx="3566160" cy="731520"/>
+          </a:xfrm>
+          <a:prstGeom prst="rect">
+            <a:avLst/>
+          </a:prstGeom>
+          <a:noFill/>
+          <a:ln/>
+        </p:spPr>
+        <p:txBody>
+          <a:bodyPr wrap="square" lIns="0" tIns="0" rIns="0" bIns="0" rtlCol="0" anchor="t"/>
+          <a:lstStyle/>
+          <a:p>
+            <a:pPr algn="l" indent="0" marL="0">
+              <a:buNone/>
+            </a:pPr>
+            <a:r>
+              <a:rPr lang="en-US" sz="3600" b="1" dirty="0">
+                <a:solidFill>
+                  <a:srgbClr val="C8102E"/>
+                </a:solidFill>
+              </a:rPr>
+              <a:t>1 to 3</a:t>
+            </a:r>
+            <a:endParaRPr lang="en-US" sz="3600" dirty="0"/>
+          </a:p>
+        </p:txBody>
+      </p:sp>
+      <p:sp>
+        <p:nvSpPr>
+          <p:cNvPr id="5" name="text"/>
+          <p:cNvSpPr txBox="1"/>
+          <p:nvPr/>
+        </p:nvSpPr>
+        <p:spPr>
+          <a:xfrm>
+            <a:off x="548640" y="2423160"/>
+            <a:ext cx="3474720" cy="1005840"/>
+          </a:xfrm>
+          <a:prstGeom prst="rect">
+            <a:avLst/>
+          </a:prstGeom>
+          <a:noFill/>
+          <a:ln/>
+        </p:spPr>
+        <p:txBody>
+          <a:bodyPr wrap="square" lIns="0" tIns="0" rIns="0" bIns="0" rtlCol="0" anchor="t"/>
+          <a:lstStyle/>
+          <a:p>
+            <a:pPr algn="l" indent="0" marL="0">
+              <a:buNone/>
+            </a:pPr>
+            <a:r>
+              <a:rPr lang="en-US" sz="1400" dirty="0">
+                <a:solidFill>
+                  <a:srgbClr val="1B1B1B"/>
+                </a:solidFill>
+              </a:rPr>
+              <a:t>epochs to the best validation score, while training loss keeps falling</a:t>
+            </a:r>
+            <a:endParaRPr lang="en-US" sz="1400" dirty="0"/>
+          </a:p>
+        </p:txBody>
+      </p:sp>
+      <p:sp>
+        <p:nvSpPr>
+          <p:cNvPr id="6" name="text"/>
+          <p:cNvSpPr txBox="1"/>
+          <p:nvPr/>
+        </p:nvSpPr>
+        <p:spPr>
+          <a:xfrm>
+            <a:off x="4297680" y="1645920"/>
+            <a:ext cx="3566160" cy="731520"/>
+          </a:xfrm>
+          <a:prstGeom prst="rect">
+            <a:avLst/>
+          </a:prstGeom>
+          <a:noFill/>
+          <a:ln/>
+        </p:spPr>
+        <p:txBody>
+          <a:bodyPr wrap="square" lIns="0" tIns="0" rIns="0" bIns="0" rtlCol="0" anchor="t"/>
+          <a:lstStyle/>
+          <a:p>
+            <a:pPr algn="l" indent="0" marL="0">
+              <a:buNone/>
+            </a:pPr>
+            <a:r>
+              <a:rPr lang="en-US" sz="3600" b="1" dirty="0">
+                <a:solidFill>
+                  <a:srgbClr val="C8102E"/>
+                </a:solidFill>
+              </a:rPr>
+              <a:t>175</a:t>
+            </a:r>
+            <a:endParaRPr lang="en-US" sz="3600" dirty="0"/>
+          </a:p>
+        </p:txBody>
+      </p:sp>
+      <p:sp>
+        <p:nvSpPr>
+          <p:cNvPr id="7" name="text"/>
+          <p:cNvSpPr txBox="1"/>
+          <p:nvPr/>
+        </p:nvSpPr>
+        <p:spPr>
+          <a:xfrm>
+            <a:off x="4297680" y="2423160"/>
+            <a:ext cx="3474720" cy="1005840"/>
+          </a:xfrm>
+          <a:prstGeom prst="rect">
+            <a:avLst/>
+          </a:prstGeom>
+          <a:noFill/>
+          <a:ln/>
+        </p:spPr>
+        <p:txBody>
+          <a:bodyPr wrap="square" lIns="0" tIns="0" rIns="0" bIns="0" rtlCol="0" anchor="t"/>
+          <a:lstStyle/>
+          <a:p>
+            <a:pPr algn="l" indent="0" marL="0">
+              <a:buNone/>
+            </a:pPr>
+            <a:r>
+              <a:rPr lang="en-US" sz="1400" dirty="0">
+                <a:solidFill>
+                  <a:srgbClr val="1B1B1B"/>
+                </a:solidFill>
+              </a:rPr>
+              <a:t>septic stays per training split, against 300 to 655 predictors</a:t>
+            </a:r>
+            <a:endParaRPr lang="en-US" sz="1400" dirty="0"/>
+          </a:p>
+        </p:txBody>
+      </p:sp>
+      <p:sp>
+        <p:nvSpPr>
+          <p:cNvPr id="8" name="text"/>
+          <p:cNvSpPr txBox="1"/>
+          <p:nvPr/>
+        </p:nvSpPr>
+        <p:spPr>
+          <a:xfrm>
+            <a:off x="8046720" y="1645920"/>
+            <a:ext cx="3566160" cy="731520"/>
+          </a:xfrm>
+          <a:prstGeom prst="rect">
+            <a:avLst/>
+          </a:prstGeom>
+          <a:noFill/>
+          <a:ln/>
+        </p:spPr>
+        <p:txBody>
+          <a:bodyPr wrap="square" lIns="0" tIns="0" rIns="0" bIns="0" rtlCol="0" anchor="t"/>
+          <a:lstStyle/>
+          <a:p>
+            <a:pPr algn="l" indent="0" marL="0">
+              <a:buNone/>
+            </a:pPr>
+            <a:r>
+              <a:rPr lang="en-US" sz="3600" b="1" dirty="0">
+                <a:solidFill>
+                  <a:srgbClr val="C8102E"/>
+                </a:solidFill>
+              </a:rPr>
+              <a:t>0.12 vs 0.28</a:t>
+            </a:r>
+            <a:endParaRPr lang="en-US" sz="3600" dirty="0"/>
+          </a:p>
+        </p:txBody>
+      </p:sp>
+      <p:sp>
+        <p:nvSpPr>
+          <p:cNvPr id="9" name="text"/>
+          <p:cNvSpPr txBox="1"/>
+          <p:nvPr/>
+        </p:nvSpPr>
+        <p:spPr>
+          <a:xfrm>
+            <a:off x="8046720" y="2423160"/>
+            <a:ext cx="3474720" cy="1005840"/>
+          </a:xfrm>
+          <a:prstGeom prst="rect">
+            <a:avLst/>
+          </a:prstGeom>
+          <a:noFill/>
+          <a:ln/>
+        </p:spPr>
+        <p:txBody>
+          <a:bodyPr wrap="square" lIns="0" tIns="0" rIns="0" bIns="0" rtlCol="0" anchor="t"/>
+          <a:lstStyle/>
+          <a:p>
+            <a:pPr algn="l" indent="0" marL="0">
+              <a:buNone/>
+            </a:pPr>
+            <a:r>
+              <a:rPr lang="en-US" sz="1400" dirty="0">
+                <a:solidFill>
+                  <a:srgbClr val="1B1B1B"/>
+                </a:solidFill>
+              </a:rPr>
+              <a:t>validation utility of OSTA and flat OSTA, which tie on test (0.23): validation and test rankings disagree</a:t>
+            </a:r>
+            <a:endParaRPr lang="en-US" sz="1400" dirty="0"/>
+          </a:p>
+        </p:txBody>
+      </p:sp>
+      <p:sp>
+        <p:nvSpPr>
+          <p:cNvPr id="10" name="list"/>
+          <p:cNvSpPr txBox="1"/>
+          <p:nvPr/>
+        </p:nvSpPr>
+        <p:spPr>
+          <a:xfrm>
+            <a:off x="548640" y="3749040"/>
+            <a:ext cx="11094415" cy="1828800"/>
+          </a:xfrm>
+          <a:prstGeom prst="rect">
+            <a:avLst/>
+          </a:prstGeom>
+          <a:noFill/>
+          <a:ln/>
+        </p:spPr>
+        <p:txBody>
+          <a:bodyPr wrap="square" lIns="0" tIns="0" rIns="0" bIns="0" rtlCol="0" anchor="t"/>
+          <a:lstStyle/>
+          <a:p>
+            <a:pPr marL="203200" indent="-203200">
+              <a:spcAft>
+                <a:spcPts val="800"/>
+              </a:spcAft>
+              <a:buSzPct val="100000"/>
+              <a:buChar char="•"/>
+            </a:pPr>
+            <a:r>
+              <a:rPr lang="en-US" sz="1400" dirty="0">
+                <a:solidFill>
+                  <a:srgbClr val="1B1B1B"/>
+                </a:solidFill>
+              </a:rPr>
+              <a:t>Response: full cohort (about nine times more sepsis cases), self-supervised pretraining on unlabelled stays [39], loss chosen by utility [40], three seeds.</a:t>
+            </a:r>
+            <a:endParaRPr lang="en-US" sz="1400" dirty="0"/>
+          </a:p>
+          <a:p>
+            <a:pPr marL="203200" indent="-203200">
+              <a:spcAft>
+                <a:spcPts val="800"/>
+              </a:spcAft>
+              <a:buSzPct val="100000"/>
+              <a:buChar char="•"/>
+            </a:pPr>
+            <a:r>
+              <a:rPr lang="en-US" sz="1400" dirty="0">
+                <a:solidFill>
+                  <a:srgbClr val="1B1B1B"/>
+                </a:solidFill>
+              </a:rPr>
+              <a:t>All figures: this work, preliminary [41].</a:t>
+            </a:r>
+            <a:endParaRPr lang="en-US" sz="1400" dirty="0"/>
+          </a:p>
+        </p:txBody>
+      </p:sp>
+      <p:sp>
+        <p:nvSpPr>
+          <p:cNvPr id="11" name="references"/>
+          <p:cNvSpPr txBox="1"/>
+          <p:nvPr/>
+        </p:nvSpPr>
+        <p:spPr>
+          <a:xfrm>
+            <a:off x="548640" y="5943600"/>
+            <a:ext cx="10180015" cy="457200"/>
+          </a:xfrm>
+          <a:prstGeom prst="rect">
+            <a:avLst/>
+          </a:prstGeom>
+          <a:noFill/>
+          <a:ln/>
+        </p:spPr>
+        <p:txBody>
+          <a:bodyPr wrap="square" lIns="0" tIns="0" rIns="0" bIns="0" rtlCol="0" anchor="b"/>
+          <a:lstStyle/>
+          <a:p>
+            <a:pPr indent="0" marL="0">
+              <a:buNone/>
+            </a:pPr>
+            <a:r>
+              <a:rPr lang="en-US" sz="950" dirty="0">
+                <a:solidFill>
+                  <a:srgbClr val="5E5E5E"/>
+                </a:solidFill>
+              </a:rPr>
+              <a:t>[39] Yeche et al., ICML 2021   [40] Yeche et al., ICML 2023   [41] This work, preliminary, unpublished</a:t>
+            </a:r>
+            <a:endParaRPr lang="en-US" sz="950" dirty="0"/>
+          </a:p>
+        </p:txBody>
+      </p:sp>
+      <p:sp>
+        <p:nvSpPr>
+          <p:cNvPr id="25" name="Slide Number Placeholder 0"/>
+          <p:cNvSpPr>
+            <a:spLocks noGrp="1"/>
+          </p:cNvSpPr>
+          <p:nvPr>
+            <p:ph type="sldNum" sz="quarter" idx="4294967295"/>
+          </p:nvPr>
+        </p:nvSpPr>
+        <p:spPr>
+          <a:xfrm>
+            <a:off x="10911535" y="6437376"/>
+            <a:ext cx="731520" cy="274320"/>
+          </a:xfrm>
+          <a:prstGeom prst="rect">
+            <a:avLst/>
+          </a:prstGeom>
+          <a:extLst>
+            <a:ext uri="{C572A759-6A51-4108-AA02-DFA0A04FC94B}">
+              <ma14:wrappingTextBoxFlag xmlns:ma14="http://schemas.microsoft.com/office/mac/drawingml/2011/main" val="0"/>
+            </a:ext>
+          </a:extLst>
+        </p:spPr>
+        <p:txBody>
+          <a:bodyPr/>
+          <a:lstStyle>
+            <a:lvl1pPr>
+              <a:defRPr sz="1200">
+                <a:solidFill>
+                  <a:srgbClr val="C8102E"/>
+                </a:solidFill>
+              </a:defRPr>
+            </a:lvl1pPr>
+          </a:lstStyle>
+          <a:p>
+            <a:pPr algn="r"/>
+            <a:fld id="{F7021451-1387-4CA6-816F-3879F97B5CBC}" type="slidenum">
+              <a:rPr b="1" lang="en-US"/>
+              <a:t>24</a:t>
+            </a:fld>
+            <a:endParaRPr lang="en-US"/>
+          </a:p>
+        </p:txBody>
+      </p:sp>
+    </p:spTree>
+  </p:cSld>
+  <p:clrMapOvr>
+    <a:masterClrMapping/>
+  </p:clrMapOvr>
+</p:sld>
+</file>
+
+<file path=ppt/slides/slide25.xml><?xml version="1.0" encoding="utf-8"?>
+<p:sld xmlns:a="http://schemas.openxmlformats.org/drawingml/2006/main" xmlns:r="http://schemas.openxmlformats.org/officeDocument/2006/relationships" xmlns:p="http://schemas.openxmlformats.org/presentationml/2006/main">
+  <p:cSld name="Slide 25">
+    <p:spTree>
+      <p:nvGrpSpPr>
+        <p:cNvPr id="1" name=""/>
+        <p:cNvGrpSpPr/>
+        <p:nvPr/>
+      </p:nvGrpSpPr>
+      <p:grpSpPr>
+        <a:xfrm>
+          <a:off x="0" y="0"/>
+          <a:ext cx="0" cy="0"/>
+          <a:chOff x="0" y="0"/>
+          <a:chExt cx="0" cy="0"/>
+        </a:xfrm>
+      </p:grpSpPr>
+      <p:sp>
+        <p:nvSpPr>
+          <p:cNvPr id="2" name="section label"/>
+          <p:cNvSpPr txBox="1"/>
+          <p:nvPr/>
+        </p:nvSpPr>
+        <p:spPr>
+          <a:xfrm>
+            <a:off x="548640" y="237744"/>
+            <a:ext cx="7315200" cy="274320"/>
+          </a:xfrm>
+          <a:prstGeom prst="rect">
+            <a:avLst/>
+          </a:prstGeom>
+          <a:noFill/>
+          <a:ln/>
+        </p:spPr>
+        <p:txBody>
+          <a:bodyPr wrap="square" lIns="0" tIns="0" rIns="0" bIns="0" rtlCol="0" anchor="t"/>
+          <a:lstStyle/>
+          <a:p>
+            <a:pPr algn="l" indent="0" marL="0">
+              <a:buNone/>
+            </a:pPr>
+            <a:r>
+              <a:rPr lang="en-US" sz="1100" b="1" dirty="0">
+                <a:solidFill>
+                  <a:srgbClr val="C8102E"/>
+                </a:solidFill>
+              </a:rPr>
+              <a:t>BACKUP</a:t>
+            </a:r>
+            <a:endParaRPr lang="en-US" sz="1100" dirty="0"/>
+          </a:p>
+        </p:txBody>
+      </p:sp>
+      <p:sp>
+        <p:nvSpPr>
+          <p:cNvPr id="3" name="Text 0"/>
+          <p:cNvSpPr/>
+          <p:nvPr>
+            <p:ph idx="100" type="title" hasCustomPrompt="1"/>
+          </p:nvPr>
+        </p:nvSpPr>
+        <p:spPr>
+          <a:xfrm>
+            <a:off x="548640" y="548640"/>
+            <a:ext cx="11094415" cy="868680"/>
+          </a:xfrm>
+          <a:prstGeom prst="rect">
+            <a:avLst/>
+          </a:prstGeom>
+          <a:noFill/>
+          <a:ln/>
+        </p:spPr>
+        <p:txBody>
+          <a:bodyPr wrap="square" lIns="0" tIns="0" rIns="0" bIns="0" rtlCol="0" anchor="t"/>
+          <a:lstStyle/>
+          <a:p>
+            <a:pPr algn="l" indent="0" marL="0">
+              <a:buNone/>
+            </a:pPr>
+            <a:r>
+              <a:rPr lang="en-US" sz="2400" b="1" dirty="0">
+                <a:solidFill>
+                  <a:srgbClr val="1B1B1B"/>
+                </a:solidFill>
+                <a:latin typeface="Arial" pitchFamily="34" charset="0"/>
+                <a:ea typeface="Arial" pitchFamily="34" charset="-122"/>
+                <a:cs typeface="Arial" pitchFamily="34" charset="-120"/>
+              </a:rPr>
               <a:t>RD6 supplement: publications and outputs</a:t>
             </a:r>
             <a:endParaRPr lang="en-US" sz="2400" dirty="0"/>
@@ -23469,7 +25029,7 @@
       </p:sp>
       <p:graphicFrame>
         <p:nvGraphicFramePr>
-          <p:cNvPr id="25" name="publications table"/>
+          <p:cNvPr id="26" name="publications table"/>
           <p:cNvGraphicFramePr>
             <a:graphicFrameLocks noGrp="1"/>
           </p:cNvGraphicFramePr>
@@ -24896,431 +26456,6 @@
             <a:pPr algn="r"/>
             <a:fld id="{F7021451-1387-4CA6-816F-3879F97B5CBC}" type="slidenum">
               <a:rPr b="1" lang="en-US"/>
-              <a:t>24</a:t>
-            </a:fld>
-            <a:endParaRPr lang="en-US"/>
-          </a:p>
-        </p:txBody>
-      </p:sp>
-    </p:spTree>
-  </p:cSld>
-  <p:clrMapOvr>
-    <a:masterClrMapping/>
-  </p:clrMapOvr>
-</p:sld>
-</file>
-
-<file path=ppt/slides/slide25.xml><?xml version="1.0" encoding="utf-8"?>
-<p:sld xmlns:a="http://schemas.openxmlformats.org/drawingml/2006/main" xmlns:r="http://schemas.openxmlformats.org/officeDocument/2006/relationships" xmlns:p="http://schemas.openxmlformats.org/presentationml/2006/main">
-  <p:cSld name="Slide 25">
-    <p:spTree>
-      <p:nvGrpSpPr>
-        <p:cNvPr id="1" name=""/>
-        <p:cNvGrpSpPr/>
-        <p:nvPr/>
-      </p:nvGrpSpPr>
-      <p:grpSpPr>
-        <a:xfrm>
-          <a:off x="0" y="0"/>
-          <a:ext cx="0" cy="0"/>
-          <a:chOff x="0" y="0"/>
-          <a:chExt cx="0" cy="0"/>
-        </a:xfrm>
-      </p:grpSpPr>
-      <p:sp>
-        <p:nvSpPr>
-          <p:cNvPr id="2" name="section label"/>
-          <p:cNvSpPr txBox="1"/>
-          <p:nvPr/>
-        </p:nvSpPr>
-        <p:spPr>
-          <a:xfrm>
-            <a:off x="548640" y="237744"/>
-            <a:ext cx="7315200" cy="274320"/>
-          </a:xfrm>
-          <a:prstGeom prst="rect">
-            <a:avLst/>
-          </a:prstGeom>
-          <a:noFill/>
-          <a:ln/>
-        </p:spPr>
-        <p:txBody>
-          <a:bodyPr wrap="square" lIns="0" tIns="0" rIns="0" bIns="0" rtlCol="0" anchor="t"/>
-          <a:lstStyle/>
-          <a:p>
-            <a:pPr algn="l" indent="0" marL="0">
-              <a:buNone/>
-            </a:pPr>
-            <a:r>
-              <a:rPr lang="en-US" sz="1100" b="1" dirty="0">
-                <a:solidFill>
-                  <a:srgbClr val="C8102E"/>
-                </a:solidFill>
-              </a:rPr>
-              <a:t>BACKUP</a:t>
-            </a:r>
-            <a:endParaRPr lang="en-US" sz="1100" dirty="0"/>
-          </a:p>
-        </p:txBody>
-      </p:sp>
-      <p:sp>
-        <p:nvSpPr>
-          <p:cNvPr id="3" name="Text 0"/>
-          <p:cNvSpPr/>
-          <p:nvPr>
-            <p:ph idx="100" type="title" hasCustomPrompt="1"/>
-          </p:nvPr>
-        </p:nvSpPr>
-        <p:spPr>
-          <a:xfrm>
-            <a:off x="548640" y="548640"/>
-            <a:ext cx="11094415" cy="868680"/>
-          </a:xfrm>
-          <a:prstGeom prst="rect">
-            <a:avLst/>
-          </a:prstGeom>
-          <a:noFill/>
-          <a:ln/>
-        </p:spPr>
-        <p:txBody>
-          <a:bodyPr wrap="square" lIns="0" tIns="0" rIns="0" bIns="0" rtlCol="0" anchor="t"/>
-          <a:lstStyle/>
-          <a:p>
-            <a:pPr algn="l" indent="0" marL="0">
-              <a:buNone/>
-            </a:pPr>
-            <a:r>
-              <a:rPr lang="en-US" sz="2400" b="1" dirty="0">
-                <a:solidFill>
-                  <a:srgbClr val="1B1B1B"/>
-                </a:solidFill>
-                <a:latin typeface="Arial" pitchFamily="34" charset="0"/>
-                <a:ea typeface="Arial" pitchFamily="34" charset="-122"/>
-                <a:cs typeface="Arial" pitchFamily="34" charset="-120"/>
-              </a:rPr>
-              <a:t>RD6 supplement: training and the March 2026 plan</a:t>
-            </a:r>
-            <a:endParaRPr lang="en-US" sz="2400" dirty="0"/>
-          </a:p>
-        </p:txBody>
-      </p:sp>
-      <p:sp>
-        <p:nvSpPr>
-          <p:cNvPr id="4" name="text"/>
-          <p:cNvSpPr txBox="1"/>
-          <p:nvPr/>
-        </p:nvSpPr>
-        <p:spPr>
-          <a:xfrm>
-            <a:off x="548640" y="1463040"/>
-            <a:ext cx="5303520" cy="320040"/>
-          </a:xfrm>
-          <a:prstGeom prst="rect">
-            <a:avLst/>
-          </a:prstGeom>
-          <a:noFill/>
-          <a:ln/>
-        </p:spPr>
-        <p:txBody>
-          <a:bodyPr wrap="square" lIns="0" tIns="0" rIns="0" bIns="0" rtlCol="0" anchor="t"/>
-          <a:lstStyle/>
-          <a:p>
-            <a:pPr algn="l" indent="0" marL="0">
-              <a:buNone/>
-            </a:pPr>
-            <a:r>
-              <a:rPr lang="en-US" sz="1500" b="1" dirty="0">
-                <a:solidFill>
-                  <a:srgbClr val="C8102E"/>
-                </a:solidFill>
-              </a:rPr>
-              <a:t>Training</a:t>
-            </a:r>
-            <a:endParaRPr lang="en-US" sz="1500" dirty="0"/>
-          </a:p>
-        </p:txBody>
-      </p:sp>
-      <p:sp>
-        <p:nvSpPr>
-          <p:cNvPr id="5" name="list"/>
-          <p:cNvSpPr txBox="1"/>
-          <p:nvPr/>
-        </p:nvSpPr>
-        <p:spPr>
-          <a:xfrm>
-            <a:off x="548640" y="1828800"/>
-            <a:ext cx="5303520" cy="3657600"/>
-          </a:xfrm>
-          <a:prstGeom prst="rect">
-            <a:avLst/>
-          </a:prstGeom>
-          <a:noFill/>
-          <a:ln/>
-        </p:spPr>
-        <p:txBody>
-          <a:bodyPr wrap="square" lIns="0" tIns="0" rIns="0" bIns="0" rtlCol="0" anchor="t"/>
-          <a:lstStyle/>
-          <a:p>
-            <a:pPr marL="203200" indent="-203200">
-              <a:spcAft>
-                <a:spcPts val="800"/>
-              </a:spcAft>
-              <a:buSzPct val="100000"/>
-              <a:buChar char="•"/>
-            </a:pPr>
-            <a:r>
-              <a:rPr lang="en-US" sz="1350" dirty="0">
-                <a:solidFill>
-                  <a:srgbClr val="1B1B1B"/>
-                </a:solidFill>
-              </a:rPr>
-              <a:t>Harvard PPCR: Clinical Trials Design, Implementation and Analysis (completed Feb 2026)</a:t>
-            </a:r>
-            <a:endParaRPr lang="en-US" sz="1350" dirty="0"/>
-          </a:p>
-          <a:p>
-            <a:pPr marL="203200" indent="-203200">
-              <a:spcAft>
-                <a:spcPts val="800"/>
-              </a:spcAft>
-              <a:buSzPct val="100000"/>
-              <a:buChar char="•"/>
-            </a:pPr>
-            <a:r>
-              <a:rPr lang="en-US" sz="1350" dirty="0">
-                <a:solidFill>
-                  <a:srgbClr val="1B1B1B"/>
-                </a:solidFill>
-              </a:rPr>
-              <a:t>Iowa State University: Machine Learning Programme (completed Dec 2025)</a:t>
-            </a:r>
-            <a:endParaRPr lang="en-US" sz="1350" dirty="0"/>
-          </a:p>
-          <a:p>
-            <a:pPr marL="203200" indent="-203200">
-              <a:spcAft>
-                <a:spcPts val="800"/>
-              </a:spcAft>
-              <a:buSzPct val="100000"/>
-              <a:buChar char="•"/>
-            </a:pPr>
-            <a:r>
-              <a:rPr lang="en-US" sz="1350" dirty="0">
-                <a:solidFill>
-                  <a:srgbClr val="1B1B1B"/>
-                </a:solidFill>
-              </a:rPr>
-              <a:t>DataCamp Python Data Science Career Track (in progress)</a:t>
-            </a:r>
-            <a:endParaRPr lang="en-US" sz="1350" dirty="0"/>
-          </a:p>
-          <a:p>
-            <a:pPr marL="203200" indent="-203200">
-              <a:spcAft>
-                <a:spcPts val="800"/>
-              </a:spcAft>
-              <a:buSzPct val="100000"/>
-              <a:buChar char="•"/>
-            </a:pPr>
-            <a:r>
-              <a:rPr lang="en-US" sz="1350" dirty="0">
-                <a:solidFill>
-                  <a:srgbClr val="1B1B1B"/>
-                </a:solidFill>
-              </a:rPr>
-              <a:t>PhysioNet credentialed access: MIMIC-IV 3.1, eICU-CRD 2.0</a:t>
-            </a:r>
-            <a:endParaRPr lang="en-US" sz="1350" dirty="0"/>
-          </a:p>
-        </p:txBody>
-      </p:sp>
-      <p:sp>
-        <p:nvSpPr>
-          <p:cNvPr id="6" name="text"/>
-          <p:cNvSpPr txBox="1"/>
-          <p:nvPr/>
-        </p:nvSpPr>
-        <p:spPr>
-          <a:xfrm>
-            <a:off x="6309360" y="1463040"/>
-            <a:ext cx="5303520" cy="320040"/>
-          </a:xfrm>
-          <a:prstGeom prst="rect">
-            <a:avLst/>
-          </a:prstGeom>
-          <a:noFill/>
-          <a:ln/>
-        </p:spPr>
-        <p:txBody>
-          <a:bodyPr wrap="square" lIns="0" tIns="0" rIns="0" bIns="0" rtlCol="0" anchor="t"/>
-          <a:lstStyle/>
-          <a:p>
-            <a:pPr algn="l" indent="0" marL="0">
-              <a:buNone/>
-            </a:pPr>
-            <a:r>
-              <a:rPr lang="en-US" sz="1500" b="1" dirty="0">
-                <a:solidFill>
-                  <a:srgbClr val="C8102E"/>
-                </a:solidFill>
-              </a:rPr>
-              <a:t>March 2026 plan: what happened</a:t>
-            </a:r>
-            <a:endParaRPr lang="en-US" sz="1500" dirty="0"/>
-          </a:p>
-        </p:txBody>
-      </p:sp>
-      <p:sp>
-        <p:nvSpPr>
-          <p:cNvPr id="7" name="list"/>
-          <p:cNvSpPr txBox="1"/>
-          <p:nvPr/>
-        </p:nvSpPr>
-        <p:spPr>
-          <a:xfrm>
-            <a:off x="6309360" y="1828800"/>
-            <a:ext cx="5333695" cy="3657600"/>
-          </a:xfrm>
-          <a:prstGeom prst="rect">
-            <a:avLst/>
-          </a:prstGeom>
-          <a:noFill/>
-          <a:ln/>
-        </p:spPr>
-        <p:txBody>
-          <a:bodyPr wrap="square" lIns="0" tIns="0" rIns="0" bIns="0" rtlCol="0" anchor="t"/>
-          <a:lstStyle/>
-          <a:p>
-            <a:pPr marL="203200" indent="-203200">
-              <a:spcAft>
-                <a:spcPts val="800"/>
-              </a:spcAft>
-              <a:buSzPct val="100000"/>
-              <a:buChar char="•"/>
-            </a:pPr>
-            <a:r>
-              <a:rPr lang="en-US" sz="1350" dirty="0">
-                <a:solidFill>
-                  <a:srgbClr val="1B1B1B"/>
-                </a:solidFill>
-              </a:rPr>
-              <a:t>External validation on MIMIC-IV: became the core programme, extended to eICU.</a:t>
-            </a:r>
-            <a:endParaRPr lang="en-US" sz="1350" dirty="0"/>
-          </a:p>
-          <a:p>
-            <a:pPr marL="203200" indent="-203200">
-              <a:spcAft>
-                <a:spcPts val="800"/>
-              </a:spcAft>
-              <a:buSzPct val="100000"/>
-              <a:buChar char="•"/>
-            </a:pPr>
-            <a:r>
-              <a:rPr lang="en-US" sz="1350" dirty="0">
-                <a:solidFill>
-                  <a:srgbClr val="1B1B1B"/>
-                </a:solidFill>
-              </a:rPr>
-              <a:t>CNN-Transformer and OSTA papers: withheld after the leakage audit.</a:t>
-            </a:r>
-            <a:endParaRPr lang="en-US" sz="1350" dirty="0"/>
-          </a:p>
-          <a:p>
-            <a:pPr marL="203200" indent="-203200">
-              <a:spcAft>
-                <a:spcPts val="800"/>
-              </a:spcAft>
-              <a:buSzPct val="100000"/>
-              <a:buChar char="•"/>
-            </a:pPr>
-            <a:r>
-              <a:rPr lang="en-US" sz="1350" dirty="0">
-                <a:solidFill>
-                  <a:srgbClr val="1B1B1B"/>
-                </a:solidFill>
-              </a:rPr>
-              <a:t>AMR review: revised and submitted to Int J Antimicrob Agents.</a:t>
-            </a:r>
-            <a:endParaRPr lang="en-US" sz="1350" dirty="0"/>
-          </a:p>
-          <a:p>
-            <a:pPr marL="203200" indent="-203200">
-              <a:spcAft>
-                <a:spcPts val="800"/>
-              </a:spcAft>
-              <a:buSzPct val="100000"/>
-              <a:buChar char="•"/>
-            </a:pPr>
-            <a:r>
-              <a:rPr lang="en-US" sz="1350" dirty="0">
-                <a:solidFill>
-                  <a:srgbClr val="1B1B1B"/>
-                </a:solidFill>
-              </a:rPr>
-              <a:t>Clinician study: now the qualitative phase (20 consultants), nearly complete.</a:t>
-            </a:r>
-            <a:endParaRPr lang="en-US" sz="1350" dirty="0"/>
-          </a:p>
-          <a:p>
-            <a:pPr marL="203200" indent="-203200">
-              <a:spcAft>
-                <a:spcPts val="800"/>
-              </a:spcAft>
-              <a:buSzPct val="100000"/>
-              <a:buChar char="•"/>
-            </a:pPr>
-            <a:r>
-              <a:rPr lang="en-US" sz="1350" dirty="0">
-                <a:solidFill>
-                  <a:srgbClr val="1B1B1B"/>
-                </a:solidFill>
-              </a:rPr>
-              <a:t>Conference presentation: this talk.</a:t>
-            </a:r>
-            <a:endParaRPr lang="en-US" sz="1350" dirty="0"/>
-          </a:p>
-        </p:txBody>
-      </p:sp>
-      <p:sp>
-        <p:nvSpPr>
-          <p:cNvPr id="25" name="Slide Number Placeholder 0"/>
-          <p:cNvSpPr>
-            <a:spLocks noGrp="1"/>
-          </p:cNvSpPr>
-          <p:nvPr>
-            <p:ph type="sldNum" sz="quarter" idx="4294967295"/>
-          </p:nvPr>
-        </p:nvSpPr>
-        <p:spPr>
-          <a:xfrm>
-            <a:off x="10911535" y="6437376"/>
-            <a:ext cx="731520" cy="274320"/>
-          </a:xfrm>
-          <a:prstGeom prst="rect">
-            <a:avLst/>
-          </a:prstGeom>
-          <a:extLst>
-            <a:ext uri="{C572A759-6A51-4108-AA02-DFA0A04FC94B}">
-              <ma14:wrappingTextBoxFlag xmlns:ma14="http://schemas.microsoft.com/office/mac/drawingml/2011/main" val="0"/>
-            </a:ext>
-          </a:extLst>
-        </p:spPr>
-        <p:txBody>
-          <a:bodyPr/>
-          <a:lstStyle>
-            <a:lvl1pPr>
-              <a:defRPr sz="1200">
-                <a:solidFill>
-                  <a:srgbClr val="C8102E"/>
-                </a:solidFill>
-              </a:defRPr>
-            </a:lvl1pPr>
-          </a:lstStyle>
-          <a:p>
-            <a:pPr algn="r"/>
-            <a:fld id="{F7021451-1387-4CA6-816F-3879F97B5CBC}" type="slidenum">
-              <a:rPr b="1" lang="en-US"/>
               <a:t>25</a:t>
             </a:fld>
             <a:endParaRPr lang="en-US"/>
@@ -25354,7 +26489,7 @@
       </p:grpSpPr>
       <p:sp>
         <p:nvSpPr>
-          <p:cNvPr id="2" name="text"/>
+          <p:cNvPr id="2" name="section label"/>
           <p:cNvSpPr txBox="1"/>
           <p:nvPr/>
         </p:nvSpPr>
@@ -25423,7 +26558,7 @@
                 <a:ea typeface="Arial" pitchFamily="34" charset="-122"/>
                 <a:cs typeface="Arial" pitchFamily="34" charset="-120"/>
               </a:rPr>
-              <a:t>References (1 of 2)</a:t>
+              <a:t>RD6 supplement: training and the March 2026 plan</a:t>
             </a:r>
             <a:endParaRPr lang="en-US" sz="2400" dirty="0"/>
           </a:p>
@@ -25431,14 +26566,14 @@
       </p:sp>
       <p:sp>
         <p:nvSpPr>
-          <p:cNvPr id="4" name="reference list"/>
+          <p:cNvPr id="4" name="text"/>
           <p:cNvSpPr txBox="1"/>
           <p:nvPr/>
         </p:nvSpPr>
         <p:spPr>
           <a:xfrm>
-            <a:off x="548640" y="1234440"/>
-            <a:ext cx="5440680" cy="5120640"/>
+            <a:off x="548640" y="1463040"/>
+            <a:ext cx="5303520" cy="320040"/>
           </a:xfrm>
           <a:prstGeom prst="rect">
             <a:avLst/>
@@ -25450,434 +26585,260 @@
           <a:bodyPr wrap="square" lIns="0" tIns="0" rIns="0" bIns="0" rtlCol="0" anchor="t"/>
           <a:lstStyle/>
           <a:p>
-            <a:pPr indent="0" marL="0">
+            <a:pPr algn="l" indent="0" marL="0">
+              <a:buNone/>
+            </a:pPr>
+            <a:r>
+              <a:rPr lang="en-US" sz="1500" b="1" dirty="0">
+                <a:solidFill>
+                  <a:srgbClr val="C8102E"/>
+                </a:solidFill>
+              </a:rPr>
+              <a:t>Training</a:t>
+            </a:r>
+            <a:endParaRPr lang="en-US" sz="1500" dirty="0"/>
+          </a:p>
+        </p:txBody>
+      </p:sp>
+      <p:sp>
+        <p:nvSpPr>
+          <p:cNvPr id="5" name="list"/>
+          <p:cNvSpPr txBox="1"/>
+          <p:nvPr/>
+        </p:nvSpPr>
+        <p:spPr>
+          <a:xfrm>
+            <a:off x="548640" y="1828800"/>
+            <a:ext cx="5303520" cy="3657600"/>
+          </a:xfrm>
+          <a:prstGeom prst="rect">
+            <a:avLst/>
+          </a:prstGeom>
+          <a:noFill/>
+          <a:ln/>
+        </p:spPr>
+        <p:txBody>
+          <a:bodyPr wrap="square" lIns="0" tIns="0" rIns="0" bIns="0" rtlCol="0" anchor="t"/>
+          <a:lstStyle/>
+          <a:p>
+            <a:pPr marL="203200" indent="-203200">
               <a:spcAft>
-                <a:spcPts val="400"/>
+                <a:spcPts val="800"/>
               </a:spcAft>
-              <a:buNone/>
-            </a:pPr>
-            <a:r>
-              <a:rPr lang="en-US" sz="1000" dirty="0">
+              <a:buSzPct val="100000"/>
+              <a:buChar char="•"/>
+            </a:pPr>
+            <a:r>
+              <a:rPr lang="en-US" sz="1350" dirty="0">
                 <a:solidFill>
                   <a:srgbClr val="1B1B1B"/>
                 </a:solidFill>
               </a:rPr>
-              <a:t>[1] Rudd KE, Johnson SC, Agesa KM, et al. Global, regional, and national sepsis incidence and mortality, 1990-2017: analysis for the Global Burden of Disease Study. Lancet. 2020;395:200-211.</a:t>
-            </a:r>
-            <a:endParaRPr lang="en-US" sz="1000" dirty="0"/>
-          </a:p>
-          <a:p>
-            <a:pPr indent="0" marL="0">
+              <a:t>Harvard PPCR: Clinical Trials Design, Implementation and Analysis (completed Feb 2026)</a:t>
+            </a:r>
+            <a:endParaRPr lang="en-US" sz="1350" dirty="0"/>
+          </a:p>
+          <a:p>
+            <a:pPr marL="203200" indent="-203200">
               <a:spcAft>
-                <a:spcPts val="400"/>
+                <a:spcPts val="800"/>
               </a:spcAft>
-              <a:buNone/>
-            </a:pPr>
-            <a:r>
-              <a:rPr lang="en-US" sz="1000" dirty="0">
+              <a:buSzPct val="100000"/>
+              <a:buChar char="•"/>
+            </a:pPr>
+            <a:r>
+              <a:rPr lang="en-US" sz="1350" dirty="0">
                 <a:solidFill>
                   <a:srgbClr val="1B1B1B"/>
                 </a:solidFill>
               </a:rPr>
-              <a:t>[2] Antimicrobial Resistance Collaborators. Global burden of bacterial antimicrobial resistance in 2019: a systematic analysis. Lancet. 2022;399:629-655.</a:t>
-            </a:r>
-            <a:endParaRPr lang="en-US" sz="1000" dirty="0"/>
-          </a:p>
-          <a:p>
-            <a:pPr indent="0" marL="0">
+              <a:t>Iowa State University: Machine Learning Programme (completed Dec 2025)</a:t>
+            </a:r>
+            <a:endParaRPr lang="en-US" sz="1350" dirty="0"/>
+          </a:p>
+          <a:p>
+            <a:pPr marL="203200" indent="-203200">
               <a:spcAft>
-                <a:spcPts val="400"/>
+                <a:spcPts val="800"/>
               </a:spcAft>
-              <a:buNone/>
-            </a:pPr>
-            <a:r>
-              <a:rPr lang="en-US" sz="1000" dirty="0">
+              <a:buSzPct val="100000"/>
+              <a:buChar char="•"/>
+            </a:pPr>
+            <a:r>
+              <a:rPr lang="en-US" sz="1350" dirty="0">
                 <a:solidFill>
                   <a:srgbClr val="1B1B1B"/>
                 </a:solidFill>
               </a:rPr>
-              <a:t>[3] Timbrook TT, Morton JB, McConeghy KW, et al. The effect of molecular rapid diagnostic testing on clinical outcomes in bloodstream infections: a systematic review and meta-analysis. Clin Infect Dis. 2017;64:15-23.</a:t>
-            </a:r>
-            <a:endParaRPr lang="en-US" sz="1000" dirty="0"/>
-          </a:p>
-          <a:p>
-            <a:pPr indent="0" marL="0">
+              <a:t>DataCamp Python Data Science Career Track (in progress)</a:t>
+            </a:r>
+            <a:endParaRPr lang="en-US" sz="1350" dirty="0"/>
+          </a:p>
+          <a:p>
+            <a:pPr marL="203200" indent="-203200">
               <a:spcAft>
-                <a:spcPts val="400"/>
+                <a:spcPts val="800"/>
               </a:spcAft>
-              <a:buNone/>
-            </a:pPr>
-            <a:r>
-              <a:rPr lang="en-US" sz="1000" dirty="0">
+              <a:buSzPct val="100000"/>
+              <a:buChar char="•"/>
+            </a:pPr>
+            <a:r>
+              <a:rPr lang="en-US" sz="1350" dirty="0">
                 <a:solidFill>
                   <a:srgbClr val="1B1B1B"/>
                 </a:solidFill>
               </a:rPr>
-              <a:t>[4] Adams R, Henry KE, Sridharan A, et al. Prospective, multi-site study of patient outcomes after implementation of the TREWS machine learning-based early warning system for sepsis. Nat Med. 2022;28:1455-1460.</a:t>
-            </a:r>
-            <a:endParaRPr lang="en-US" sz="1000" dirty="0"/>
-          </a:p>
-          <a:p>
-            <a:pPr indent="0" marL="0">
+              <a:t>PhysioNet credentialed access: MIMIC-IV 3.1, eICU-CRD 2.0</a:t>
+            </a:r>
+            <a:endParaRPr lang="en-US" sz="1350" dirty="0"/>
+          </a:p>
+        </p:txBody>
+      </p:sp>
+      <p:sp>
+        <p:nvSpPr>
+          <p:cNvPr id="6" name="text"/>
+          <p:cNvSpPr txBox="1"/>
+          <p:nvPr/>
+        </p:nvSpPr>
+        <p:spPr>
+          <a:xfrm>
+            <a:off x="6309360" y="1463040"/>
+            <a:ext cx="5303520" cy="320040"/>
+          </a:xfrm>
+          <a:prstGeom prst="rect">
+            <a:avLst/>
+          </a:prstGeom>
+          <a:noFill/>
+          <a:ln/>
+        </p:spPr>
+        <p:txBody>
+          <a:bodyPr wrap="square" lIns="0" tIns="0" rIns="0" bIns="0" rtlCol="0" anchor="t"/>
+          <a:lstStyle/>
+          <a:p>
+            <a:pPr algn="l" indent="0" marL="0">
+              <a:buNone/>
+            </a:pPr>
+            <a:r>
+              <a:rPr lang="en-US" sz="1500" b="1" dirty="0">
+                <a:solidFill>
+                  <a:srgbClr val="C8102E"/>
+                </a:solidFill>
+              </a:rPr>
+              <a:t>March 2026 plan: what happened</a:t>
+            </a:r>
+            <a:endParaRPr lang="en-US" sz="1500" dirty="0"/>
+          </a:p>
+        </p:txBody>
+      </p:sp>
+      <p:sp>
+        <p:nvSpPr>
+          <p:cNvPr id="7" name="list"/>
+          <p:cNvSpPr txBox="1"/>
+          <p:nvPr/>
+        </p:nvSpPr>
+        <p:spPr>
+          <a:xfrm>
+            <a:off x="6309360" y="1828800"/>
+            <a:ext cx="5333695" cy="3657600"/>
+          </a:xfrm>
+          <a:prstGeom prst="rect">
+            <a:avLst/>
+          </a:prstGeom>
+          <a:noFill/>
+          <a:ln/>
+        </p:spPr>
+        <p:txBody>
+          <a:bodyPr wrap="square" lIns="0" tIns="0" rIns="0" bIns="0" rtlCol="0" anchor="t"/>
+          <a:lstStyle/>
+          <a:p>
+            <a:pPr marL="203200" indent="-203200">
               <a:spcAft>
-                <a:spcPts val="400"/>
+                <a:spcPts val="800"/>
               </a:spcAft>
-              <a:buNone/>
-            </a:pPr>
-            <a:r>
-              <a:rPr lang="en-US" sz="1000" dirty="0">
+              <a:buSzPct val="100000"/>
+              <a:buChar char="•"/>
+            </a:pPr>
+            <a:r>
+              <a:rPr lang="en-US" sz="1350" dirty="0">
                 <a:solidFill>
                   <a:srgbClr val="1B1B1B"/>
                 </a:solidFill>
               </a:rPr>
-              <a:t>[5] Elrggal ME, et al. Artificial intelligence in the diagnosis of antimicrobial resistance: rapid diagnostics and imaging innovations. Submitted, Int J Antimicrob Agents, 2026.</a:t>
-            </a:r>
-            <a:endParaRPr lang="en-US" sz="1000" dirty="0"/>
-          </a:p>
-          <a:p>
-            <a:pPr indent="0" marL="0">
+              <a:t>External validation on MIMIC-IV: became the core programme, extended to eICU.</a:t>
+            </a:r>
+            <a:endParaRPr lang="en-US" sz="1350" dirty="0"/>
+          </a:p>
+          <a:p>
+            <a:pPr marL="203200" indent="-203200">
               <a:spcAft>
-                <a:spcPts val="400"/>
+                <a:spcPts val="800"/>
               </a:spcAft>
-              <a:buNone/>
-            </a:pPr>
-            <a:r>
-              <a:rPr lang="en-US" sz="1000" dirty="0">
+              <a:buSzPct val="100000"/>
+              <a:buChar char="•"/>
+            </a:pPr>
+            <a:r>
+              <a:rPr lang="en-US" sz="1350" dirty="0">
                 <a:solidFill>
                   <a:srgbClr val="1B1B1B"/>
                 </a:solidFill>
               </a:rPr>
-              <a:t>[6] Singer M, Deutschman CS, Seymour CW, et al. The Third International Consensus Definitions for Sepsis and Septic Shock (Sepsis-3). JAMA. 2016;315:801-810.</a:t>
-            </a:r>
-            <a:endParaRPr lang="en-US" sz="1000" dirty="0"/>
-          </a:p>
-          <a:p>
-            <a:pPr indent="0" marL="0">
+              <a:t>CNN-Transformer and OSTA papers: withheld after the leakage audit.</a:t>
+            </a:r>
+            <a:endParaRPr lang="en-US" sz="1350" dirty="0"/>
+          </a:p>
+          <a:p>
+            <a:pPr marL="203200" indent="-203200">
               <a:spcAft>
-                <a:spcPts val="400"/>
+                <a:spcPts val="800"/>
               </a:spcAft>
-              <a:buNone/>
-            </a:pPr>
-            <a:r>
-              <a:rPr lang="en-US" sz="1000" dirty="0">
+              <a:buSzPct val="100000"/>
+              <a:buChar char="•"/>
+            </a:pPr>
+            <a:r>
+              <a:rPr lang="en-US" sz="1350" dirty="0">
                 <a:solidFill>
                   <a:srgbClr val="1B1B1B"/>
                 </a:solidFill>
               </a:rPr>
-              <a:t>[7] Vincent JL, Moreno R, Takala J, et al. The SOFA (Sepsis-related Organ Failure Assessment) score to describe organ dysfunction/failure. Intensive Care Med. 1996;22:707-710.</a:t>
-            </a:r>
-            <a:endParaRPr lang="en-US" sz="1000" dirty="0"/>
-          </a:p>
-          <a:p>
-            <a:pPr indent="0" marL="0">
+              <a:t>AMR review: revised and submitted to Int J Antimicrob Agents.</a:t>
+            </a:r>
+            <a:endParaRPr lang="en-US" sz="1350" dirty="0"/>
+          </a:p>
+          <a:p>
+            <a:pPr marL="203200" indent="-203200">
               <a:spcAft>
-                <a:spcPts val="400"/>
+                <a:spcPts val="800"/>
               </a:spcAft>
-              <a:buNone/>
-            </a:pPr>
-            <a:r>
-              <a:rPr lang="en-US" sz="1000" dirty="0">
+              <a:buSzPct val="100000"/>
+              <a:buChar char="•"/>
+            </a:pPr>
+            <a:r>
+              <a:rPr lang="en-US" sz="1350" dirty="0">
                 <a:solidFill>
                   <a:srgbClr val="1B1B1B"/>
                 </a:solidFill>
               </a:rPr>
-              <a:t>[8] Liu V, Escobar GJ, Greene JD, et al. Hospital deaths in patients with sepsis from 2 independent cohorts. JAMA. 2014;312:90-92.</a:t>
-            </a:r>
-            <a:endParaRPr lang="en-US" sz="1000" dirty="0"/>
-          </a:p>
-          <a:p>
-            <a:pPr indent="0" marL="0">
+              <a:t>Clinician study: now the qualitative phase (20 consultants), nearly complete.</a:t>
+            </a:r>
+            <a:endParaRPr lang="en-US" sz="1350" dirty="0"/>
+          </a:p>
+          <a:p>
+            <a:pPr marL="203200" indent="-203200">
               <a:spcAft>
-                <a:spcPts val="400"/>
+                <a:spcPts val="800"/>
               </a:spcAft>
-              <a:buNone/>
-            </a:pPr>
-            <a:r>
-              <a:rPr lang="en-US" sz="1000" dirty="0">
+              <a:buSzPct val="100000"/>
+              <a:buChar char="•"/>
+            </a:pPr>
+            <a:r>
+              <a:rPr lang="en-US" sz="1350" dirty="0">
                 <a:solidFill>
                   <a:srgbClr val="1B1B1B"/>
                 </a:solidFill>
               </a:rPr>
-              <a:t>[9] Seymour CW, Gesten F, Prescott HC, et al. Time to treatment and mortality during mandated emergency care for sepsis. N Engl J Med. 2017;376:2235-2244.</a:t>
-            </a:r>
-            <a:endParaRPr lang="en-US" sz="1000" dirty="0"/>
-          </a:p>
-          <a:p>
-            <a:pPr indent="0" marL="0">
-              <a:spcAft>
-                <a:spcPts val="400"/>
-              </a:spcAft>
-              <a:buNone/>
-            </a:pPr>
-            <a:r>
-              <a:rPr lang="en-US" sz="1000" dirty="0">
-                <a:solidFill>
-                  <a:srgbClr val="1B1B1B"/>
-                </a:solidFill>
-              </a:rPr>
-              <a:t>[10] Kumar A, Roberts D, Wood KE, et al. Duration of hypotension before initiation of effective antimicrobial therapy is the critical determinant of survival in human septic shock. Crit Care Med. 2006;34:1589-1596.</a:t>
-            </a:r>
-            <a:endParaRPr lang="en-US" sz="1000" dirty="0"/>
-          </a:p>
-          <a:p>
-            <a:pPr indent="0" marL="0">
-              <a:spcAft>
-                <a:spcPts val="400"/>
-              </a:spcAft>
-              <a:buNone/>
-            </a:pPr>
-            <a:r>
-              <a:rPr lang="en-US" sz="1000" dirty="0">
-                <a:solidFill>
-                  <a:srgbClr val="1B1B1B"/>
-                </a:solidFill>
-              </a:rPr>
-              <a:t>[11] Churpek MM, Snyder A, Han X, et al. Quick SOFA, SIRS, and early warning scores for detecting clinical deterioration in infected patients outside the ICU. Am J Respir Crit Care Med. 2017;195:906-911.</a:t>
-            </a:r>
-            <a:endParaRPr lang="en-US" sz="1000" dirty="0"/>
-          </a:p>
-          <a:p>
-            <a:pPr indent="0" marL="0">
-              <a:spcAft>
-                <a:spcPts val="400"/>
-              </a:spcAft>
-              <a:buNone/>
-            </a:pPr>
-            <a:r>
-              <a:rPr lang="en-US" sz="1000" dirty="0">
-                <a:solidFill>
-                  <a:srgbClr val="1B1B1B"/>
-                </a:solidFill>
-              </a:rPr>
-              <a:t>[12] Yu AC, Mohajer B, Eng J. External validation of deep learning algorithms for radiologic diagnosis: a systematic review. Radiol Artif Intell. 2022;4:e210064.</a:t>
-            </a:r>
-            <a:endParaRPr lang="en-US" sz="1000" dirty="0"/>
-          </a:p>
-        </p:txBody>
-      </p:sp>
-      <p:sp>
-        <p:nvSpPr>
-          <p:cNvPr id="5" name="reference list"/>
-          <p:cNvSpPr txBox="1"/>
-          <p:nvPr/>
-        </p:nvSpPr>
-        <p:spPr>
-          <a:xfrm>
-            <a:off x="6172200" y="1234440"/>
-            <a:ext cx="5440680" cy="5120640"/>
-          </a:xfrm>
-          <a:prstGeom prst="rect">
-            <a:avLst/>
-          </a:prstGeom>
-          <a:noFill/>
-          <a:ln/>
-        </p:spPr>
-        <p:txBody>
-          <a:bodyPr wrap="square" lIns="0" tIns="0" rIns="0" bIns="0" rtlCol="0" anchor="t"/>
-          <a:lstStyle/>
-          <a:p>
-            <a:pPr indent="0" marL="0">
-              <a:spcAft>
-                <a:spcPts val="400"/>
-              </a:spcAft>
-              <a:buNone/>
-            </a:pPr>
-            <a:r>
-              <a:rPr lang="en-US" sz="1000" dirty="0">
-                <a:solidFill>
-                  <a:srgbClr val="1B1B1B"/>
-                </a:solidFill>
-              </a:rPr>
-              <a:t>[13] Kwong JCC, Erdman L, Khondker A, et al. The silent trial: the bridge between bench-to-bedside clinical AI applications. Front Digit Health. 2022;4:929508.</a:t>
-            </a:r>
-            <a:endParaRPr lang="en-US" sz="1000" dirty="0"/>
-          </a:p>
-          <a:p>
-            <a:pPr indent="0" marL="0">
-              <a:spcAft>
-                <a:spcPts val="400"/>
-              </a:spcAft>
-              <a:buNone/>
-            </a:pPr>
-            <a:r>
-              <a:rPr lang="en-US" sz="1000" dirty="0">
-                <a:solidFill>
-                  <a:srgbClr val="1B1B1B"/>
-                </a:solidFill>
-              </a:rPr>
-              <a:t>[14] Nagendran M, Chen Y, Lovejoy CA, et al. Artificial intelligence versus clinicians: systematic review of design, reporting standards, and claims of deep learning studies. BMJ. 2020;368:m689.</a:t>
-            </a:r>
-            <a:endParaRPr lang="en-US" sz="1000" dirty="0"/>
-          </a:p>
-          <a:p>
-            <a:pPr indent="0" marL="0">
-              <a:spcAft>
-                <a:spcPts val="400"/>
-              </a:spcAft>
-              <a:buNone/>
-            </a:pPr>
-            <a:r>
-              <a:rPr lang="en-US" sz="1000" dirty="0">
-                <a:solidFill>
-                  <a:srgbClr val="1B1B1B"/>
-                </a:solidFill>
-              </a:rPr>
-              <a:t>[15] Reyna MA, Josef CS, Jeter R, et al. Early prediction of sepsis from clinical data: the PhysioNet/Computing in Cardiology Challenge 2019. Crit Care Med. 2020;48:210-217.</a:t>
-            </a:r>
-            <a:endParaRPr lang="en-US" sz="1000" dirty="0"/>
-          </a:p>
-          <a:p>
-            <a:pPr indent="0" marL="0">
-              <a:spcAft>
-                <a:spcPts val="400"/>
-              </a:spcAft>
-              <a:buNone/>
-            </a:pPr>
-            <a:r>
-              <a:rPr lang="en-US" sz="1000" dirty="0">
-                <a:solidFill>
-                  <a:srgbClr val="1B1B1B"/>
-                </a:solidFill>
-              </a:rPr>
-              <a:t>[16] Agniel D, Kohane IS, Weber GM. Biases in electronic health record data due to processes within the healthcare system: retrospective observational study. BMJ. 2018;361:k1479.</a:t>
-            </a:r>
-            <a:endParaRPr lang="en-US" sz="1000" dirty="0"/>
-          </a:p>
-          <a:p>
-            <a:pPr indent="0" marL="0">
-              <a:spcAft>
-                <a:spcPts val="400"/>
-              </a:spcAft>
-              <a:buNone/>
-            </a:pPr>
-            <a:r>
-              <a:rPr lang="en-US" sz="1000" dirty="0">
-                <a:solidFill>
-                  <a:srgbClr val="1B1B1B"/>
-                </a:solidFill>
-              </a:rPr>
-              <a:t>[17] Zech JR, Badgeley MA, Liu M, et al. Variable generalization performance of a deep learning model to detect pneumonia in chest radiographs: a cross-sectional study. PLoS Med. 2018;15:e1002683.</a:t>
-            </a:r>
-            <a:endParaRPr lang="en-US" sz="1000" dirty="0"/>
-          </a:p>
-          <a:p>
-            <a:pPr indent="0" marL="0">
-              <a:spcAft>
-                <a:spcPts val="400"/>
-              </a:spcAft>
-              <a:buNone/>
-            </a:pPr>
-            <a:r>
-              <a:rPr lang="en-US" sz="1000" dirty="0">
-                <a:solidFill>
-                  <a:srgbClr val="1B1B1B"/>
-                </a:solidFill>
-              </a:rPr>
-              <a:t>[18] Kapoor S, Narayanan A. Leakage and the reproducibility crisis in machine-learning-based science. Patterns. 2023;4:100804.</a:t>
-            </a:r>
-            <a:endParaRPr lang="en-US" sz="1000" dirty="0"/>
-          </a:p>
-          <a:p>
-            <a:pPr indent="0" marL="0">
-              <a:spcAft>
-                <a:spcPts val="400"/>
-              </a:spcAft>
-              <a:buNone/>
-            </a:pPr>
-            <a:r>
-              <a:rPr lang="en-US" sz="1000" dirty="0">
-                <a:solidFill>
-                  <a:srgbClr val="1B1B1B"/>
-                </a:solidFill>
-              </a:rPr>
-              <a:t>[19] Shah NH, Milstein A, Bagley SC. Making machine learning models clinically useful. JAMA. 2019;322:1351-1352.</a:t>
-            </a:r>
-            <a:endParaRPr lang="en-US" sz="1000" dirty="0"/>
-          </a:p>
-          <a:p>
-            <a:pPr indent="0" marL="0">
-              <a:spcAft>
-                <a:spcPts val="400"/>
-              </a:spcAft>
-              <a:buNone/>
-            </a:pPr>
-            <a:r>
-              <a:rPr lang="en-US" sz="1000" dirty="0">
-                <a:solidFill>
-                  <a:srgbClr val="1B1B1B"/>
-                </a:solidFill>
-              </a:rPr>
-              <a:t>[20] Kelly CJ, Karthikesalingam A, Suleyman M, Corrado G, King D. Key challenges for delivering clinical impact with artificial intelligence. BMC Med. 2019;17:195.</a:t>
-            </a:r>
-            <a:endParaRPr lang="en-US" sz="1000" dirty="0"/>
-          </a:p>
-          <a:p>
-            <a:pPr indent="0" marL="0">
-              <a:spcAft>
-                <a:spcPts val="400"/>
-              </a:spcAft>
-              <a:buNone/>
-            </a:pPr>
-            <a:r>
-              <a:rPr lang="en-US" sz="1000" dirty="0">
-                <a:solidFill>
-                  <a:srgbClr val="1B1B1B"/>
-                </a:solidFill>
-              </a:rPr>
-              <a:t>[21] Morrill JH, Kormilitzin A, Nevado-Holgado AJ, et al. Utilization of the signature method to identify the early onset of sepsis from multivariate physiological time series in critical care monitoring. Crit Care Med. 2020;48:e976-e981.</a:t>
-            </a:r>
-            <a:endParaRPr lang="en-US" sz="1000" dirty="0"/>
-          </a:p>
-          <a:p>
-            <a:pPr indent="0" marL="0">
-              <a:spcAft>
-                <a:spcPts val="400"/>
-              </a:spcAft>
-              <a:buNone/>
-            </a:pPr>
-            <a:r>
-              <a:rPr lang="en-US" sz="1000" dirty="0">
-                <a:solidFill>
-                  <a:srgbClr val="1B1B1B"/>
-                </a:solidFill>
-              </a:rPr>
-              <a:t>[22] Wong A, Otles E, Donnelly JP, et al. External validation of a widely implemented proprietary sepsis prediction model in hospitalized patients. JAMA Intern Med. 2021;181:1065-1070.</a:t>
-            </a:r>
-            <a:endParaRPr lang="en-US" sz="1000" dirty="0"/>
-          </a:p>
-          <a:p>
-            <a:pPr indent="0" marL="0">
-              <a:spcAft>
-                <a:spcPts val="400"/>
-              </a:spcAft>
-              <a:buNone/>
-            </a:pPr>
-            <a:r>
-              <a:rPr lang="en-US" sz="1000" dirty="0">
-                <a:solidFill>
-                  <a:srgbClr val="1B1B1B"/>
-                </a:solidFill>
-              </a:rPr>
-              <a:t>[23] Fleuren LM, Klausch TLT, Zwager CL, et al. Machine learning for the prediction of sepsis: a systematic review and meta-analysis of diagnostic test accuracy. Intensive Care Med. 2020;46:383-400.</a:t>
-            </a:r>
-            <a:endParaRPr lang="en-US" sz="1000" dirty="0"/>
-          </a:p>
-          <a:p>
-            <a:pPr indent="0" marL="0">
-              <a:spcAft>
-                <a:spcPts val="400"/>
-              </a:spcAft>
-              <a:buNone/>
-            </a:pPr>
-            <a:r>
-              <a:rPr lang="en-US" sz="1000" dirty="0">
-                <a:solidFill>
-                  <a:srgbClr val="1B1B1B"/>
-                </a:solidFill>
-              </a:rPr>
-              <a:t>[24] Moor M, Rieck B, Horn M, Jutzeler CR, Borgwardt K. Early prediction of sepsis in the ICU using machine learning: a systematic review. Front Med. 2021;8:607952.</a:t>
-            </a:r>
-            <a:endParaRPr lang="en-US" sz="1000" dirty="0"/>
+              <a:t>Conference presentation: this talk.</a:t>
+            </a:r>
+            <a:endParaRPr lang="en-US" sz="1350" dirty="0"/>
           </a:p>
         </p:txBody>
       </p:sp>
@@ -26022,7 +26983,7 @@
                 <a:ea typeface="Arial" pitchFamily="34" charset="-122"/>
                 <a:cs typeface="Arial" pitchFamily="34" charset="-120"/>
               </a:rPr>
-              <a:t>References (2 of 2)</a:t>
+              <a:t>References (1 of 2)</a:t>
             </a:r>
             <a:endParaRPr lang="en-US" sz="2400" dirty="0"/>
           </a:p>
@@ -26061,7 +27022,7 @@
                   <a:srgbClr val="1B1B1B"/>
                 </a:solidFill>
               </a:rPr>
-              <a:t>[25] Tschandl P, Rinner C, Apalla Z, et al. Human-computer collaboration for skin cancer recognition. Nat Med. 2020;26:1229-1234.</a:t>
+              <a:t>[1] Rudd KE, Johnson SC, Agesa KM, et al. Global, regional, and national sepsis incidence and mortality, 1990-2017: analysis for the Global Burden of Disease Study. Lancet. 2020;395:200-211.</a:t>
             </a:r>
             <a:endParaRPr lang="en-US" sz="1000" dirty="0"/>
           </a:p>
@@ -26078,7 +27039,7 @@
                   <a:srgbClr val="1B1B1B"/>
                 </a:solidFill>
               </a:rPr>
-              <a:t>[26] Henry KE, Kornfield R, Sridharan A, et al. Human-machine teaming is key to AI adoption: clinicians' experiences with a deployed machine learning system. NPJ Digit Med. 2022;5:97.</a:t>
+              <a:t>[2] Antimicrobial Resistance Collaborators. Global burden of bacterial antimicrobial resistance in 2019: a systematic analysis. Lancet. 2022;399:629-655.</a:t>
             </a:r>
             <a:endParaRPr lang="en-US" sz="1000" dirty="0"/>
           </a:p>
@@ -26095,7 +27056,7 @@
                   <a:srgbClr val="1B1B1B"/>
                 </a:solidFill>
               </a:rPr>
-              <a:t>[27] Wiens J, Saria S, Sendak M, et al. Do no harm: a roadmap for responsible machine learning for health care. Nat Med. 2019;25:1337-1340.</a:t>
+              <a:t>[3] Timbrook TT, Morton JB, McConeghy KW, et al. The effect of molecular rapid diagnostic testing on clinical outcomes in bloodstream infections: a systematic review and meta-analysis. Clin Infect Dis. 2017;64:15-23.</a:t>
             </a:r>
             <a:endParaRPr lang="en-US" sz="1000" dirty="0"/>
           </a:p>
@@ -26112,7 +27073,7 @@
                   <a:srgbClr val="1B1B1B"/>
                 </a:solidFill>
               </a:rPr>
-              <a:t>[28] Bratzler DW, Dellinger EP, Olsen KM, et al. Clinical practice guidelines for antimicrobial prophylaxis in surgery. Am J Health Syst Pharm. 2013;70:195-283.</a:t>
+              <a:t>[4] Adams R, Henry KE, Sridharan A, et al. Prospective, multi-site study of patient outcomes after implementation of the TREWS machine learning-based early warning system for sepsis. Nat Med. 2022;28:1455-1460.</a:t>
             </a:r>
             <a:endParaRPr lang="en-US" sz="1000" dirty="0"/>
           </a:p>
@@ -26129,7 +27090,7 @@
                   <a:srgbClr val="1B1B1B"/>
                 </a:solidFill>
               </a:rPr>
-              <a:t>[29] Evans L, Rhodes A, Alhazzani W, et al. Surviving Sepsis Campaign: international guidelines for management of sepsis and septic shock 2021. Intensive Care Med. 2021;47:1181-1247.</a:t>
+              <a:t>[5] Elrggal ME, et al. Artificial intelligence in the diagnosis of antimicrobial resistance: rapid diagnostics and imaging innovations. Submitted, Int J Antimicrob Agents, 2026.</a:t>
             </a:r>
             <a:endParaRPr lang="en-US" sz="1000" dirty="0"/>
           </a:p>
@@ -26146,7 +27107,7 @@
                   <a:srgbClr val="1B1B1B"/>
                 </a:solidFill>
               </a:rPr>
-              <a:t>[30] Johnson AEW, Bulgarelli L, Shen L, et al. MIMIC-IV, a freely accessible electronic health record dataset. Sci Data. 2023;10:1.</a:t>
+              <a:t>[6] Singer M, Deutschman CS, Seymour CW, et al. The Third International Consensus Definitions for Sepsis and Septic Shock (Sepsis-3). JAMA. 2016;315:801-810.</a:t>
             </a:r>
             <a:endParaRPr lang="en-US" sz="1000" dirty="0"/>
           </a:p>
@@ -26163,7 +27124,7 @@
                   <a:srgbClr val="1B1B1B"/>
                 </a:solidFill>
               </a:rPr>
-              <a:t>[31] Pollard TJ, Johnson AEW, Raffa JD, et al. The eICU Collaborative Research Database, a freely available multi-center database for critical care research. Sci Data. 2018;5:180178.</a:t>
+              <a:t>[7] Vincent JL, Moreno R, Takala J, et al. The SOFA (Sepsis-related Organ Failure Assessment) score to describe organ dysfunction/failure. Intensive Care Med. 1996;22:707-710.</a:t>
             </a:r>
             <a:endParaRPr lang="en-US" sz="1000" dirty="0"/>
           </a:p>
@@ -26180,7 +27141,7 @@
                   <a:srgbClr val="1B1B1B"/>
                 </a:solidFill>
               </a:rPr>
-              <a:t>[32] Goldberger AL, Amaral LAN, Glass L, et al. PhysioBank, PhysioToolkit, and PhysioNet: components of a new research resource for complex physiologic signals. Circulation. 2000;101:e215-e220.</a:t>
+              <a:t>[8] Liu V, Escobar GJ, Greene JD, et al. Hospital deaths in patients with sepsis from 2 independent cohorts. JAMA. 2014;312:90-92.</a:t>
             </a:r>
             <a:endParaRPr lang="en-US" sz="1000" dirty="0"/>
           </a:p>
@@ -26197,7 +27158,7 @@
                   <a:srgbClr val="1B1B1B"/>
                 </a:solidFill>
               </a:rPr>
-              <a:t>[33] van de Water R, Schmidt HNA, Elbers PWG, et al. Yet Another ICU Benchmark: a flexible multi-center framework for clinical machine learning. ICLR 2024.</a:t>
+              <a:t>[9] Seymour CW, Gesten F, Prescott HC, et al. Time to treatment and mortality during mandated emergency care for sepsis. N Engl J Med. 2017;376:2235-2244.</a:t>
             </a:r>
             <a:endParaRPr lang="en-US" sz="1000" dirty="0"/>
           </a:p>
@@ -26214,7 +27175,7 @@
                   <a:srgbClr val="1B1B1B"/>
                 </a:solidFill>
               </a:rPr>
-              <a:t>[34] Bennett N, Plecko D, Ukor IF, Meinshausen N, Buhlmann P. ricu: R's interface to intensive care data. GigaScience. 2023;12.</a:t>
+              <a:t>[10] Kumar A, Roberts D, Wood KE, et al. Duration of hypotension before initiation of effective antimicrobial therapy is the critical determinant of survival in human septic shock. Crit Care Med. 2006;34:1589-1596.</a:t>
             </a:r>
             <a:endParaRPr lang="en-US" sz="1000" dirty="0"/>
           </a:p>
@@ -26231,7 +27192,7 @@
                   <a:srgbClr val="1B1B1B"/>
                 </a:solidFill>
               </a:rPr>
-              <a:t>[35] Seymour CW, Liu VX, Iwashyna TJ, et al. Assessment of clinical criteria for sepsis (Sepsis-3). JAMA. 2016;315:762-774.</a:t>
+              <a:t>[11] Churpek MM, Snyder A, Han X, et al. Quick SOFA, SIRS, and early warning scores for detecting clinical deterioration in infected patients outside the ICU. Am J Respir Crit Care Med. 2017;195:906-911.</a:t>
             </a:r>
             <a:endParaRPr lang="en-US" sz="1000" dirty="0"/>
           </a:p>
@@ -26248,7 +27209,7 @@
                   <a:srgbClr val="1B1B1B"/>
                 </a:solidFill>
               </a:rPr>
-              <a:t>[36] Vaswani A, Shazeer N, Parmar N, et al. Attention is all you need. Advances in Neural Information Processing Systems (NeurIPS). 2017.</a:t>
+              <a:t>[12] Yu AC, Mohajer B, Eng J. External validation of deep learning algorithms for radiologic diagnosis: a systematic review. Radiol Artif Intell. 2022;4:e210064.</a:t>
             </a:r>
             <a:endParaRPr lang="en-US" sz="1000" dirty="0"/>
           </a:p>
@@ -26287,7 +27248,7 @@
                   <a:srgbClr val="1B1B1B"/>
                 </a:solidFill>
               </a:rPr>
-              <a:t>[37] Che Z, Purushotham S, Cho K, Sontag D, Liu Y. Recurrent neural networks for multivariate time series with missing values. Sci Rep. 2018;8:6085.</a:t>
+              <a:t>[13] Kwong JCC, Erdman L, Khondker A, et al. The silent trial: the bridge between bench-to-bedside clinical AI applications. Front Digit Health. 2022;4:929508.</a:t>
             </a:r>
             <a:endParaRPr lang="en-US" sz="1000" dirty="0"/>
           </a:p>
@@ -26304,7 +27265,7 @@
                   <a:srgbClr val="1B1B1B"/>
                 </a:solidFill>
               </a:rPr>
-              <a:t>[38] Bai S, Kolter JZ, Koltun V. An empirical evaluation of generic convolutional and recurrent networks for sequence modeling. arXiv:1803.01271. 2018.</a:t>
+              <a:t>[14] Nagendran M, Chen Y, Lovejoy CA, et al. Artificial intelligence versus clinicians: systematic review of design, reporting standards, and claims of deep learning studies. BMJ. 2020;368:m689.</a:t>
             </a:r>
             <a:endParaRPr lang="en-US" sz="1000" dirty="0"/>
           </a:p>
@@ -26321,7 +27282,7 @@
                   <a:srgbClr val="1B1B1B"/>
                 </a:solidFill>
               </a:rPr>
-              <a:t>[39] Yeche H, Dresdner G, Locatello F, Huser M, Ratsch G. Neighborhood contrastive learning applied to online patient monitoring. International Conference on Machine Learning (ICML). 2021.</a:t>
+              <a:t>[15] Reyna MA, Josef CS, Jeter R, et al. Early prediction of sepsis from clinical data: the PhysioNet/Computing in Cardiology Challenge 2019. Crit Care Med. 2020;48:210-217.</a:t>
             </a:r>
             <a:endParaRPr lang="en-US" sz="1000" dirty="0"/>
           </a:p>
@@ -26338,7 +27299,7 @@
                   <a:srgbClr val="1B1B1B"/>
                 </a:solidFill>
               </a:rPr>
-              <a:t>[40] Yeche H, Pace A, Ratsch G, Kuznetsova R. Temporal label smoothing for early event prediction. International Conference on Machine Learning (ICML). 2023.</a:t>
+              <a:t>[16] Agniel D, Kohane IS, Weber GM. Biases in electronic health record data due to processes within the healthcare system: retrospective observational study. BMJ. 2018;361:k1479.</a:t>
             </a:r>
             <a:endParaRPr lang="en-US" sz="1000" dirty="0"/>
           </a:p>
@@ -26355,7 +27316,7 @@
                   <a:srgbClr val="1B1B1B"/>
                 </a:solidFill>
               </a:rPr>
-              <a:t>[41] Elrggal ME, et al. Early sepsis warning on MIMIC-IV and eICU: preliminary development-split results, October 2026. Unpublished; manuscript in preparation.</a:t>
+              <a:t>[17] Zech JR, Badgeley MA, Liu M, et al. Variable generalization performance of a deep learning model to detect pneumonia in chest radiographs: a cross-sectional study. PLoS Med. 2018;15:e1002683.</a:t>
             </a:r>
             <a:endParaRPr lang="en-US" sz="1000" dirty="0"/>
           </a:p>
@@ -26372,7 +27333,7 @@
                   <a:srgbClr val="1B1B1B"/>
                 </a:solidFill>
               </a:rPr>
-              <a:t>[42] Elrggal ME, et al. Temporal patterns and predictors of sepsis onset in ICU patients: a retrospective cohort study using PhysioNet data. Submitted, Front Med, 2026.</a:t>
+              <a:t>[18] Kapoor S, Narayanan A. Leakage and the reproducibility crisis in machine-learning-based science. Patterns. 2023;4:100804.</a:t>
             </a:r>
             <a:endParaRPr lang="en-US" sz="1000" dirty="0"/>
           </a:p>
@@ -26389,7 +27350,7 @@
                   <a:srgbClr val="1B1B1B"/>
                 </a:solidFill>
               </a:rPr>
-              <a:t>[43] Elrggal ME, et al. Diagnostic applications of infrared thermography across infectious diseases: a systematic review with a subgroup meta-analysis. Submitted, JMIR, 2026.</a:t>
+              <a:t>[19] Shah NH, Milstein A, Bagley SC. Making machine learning models clinically useful. JAMA. 2019;322:1351-1352.</a:t>
             </a:r>
             <a:endParaRPr lang="en-US" sz="1000" dirty="0"/>
           </a:p>
@@ -26406,7 +27367,7 @@
                   <a:srgbClr val="1B1B1B"/>
                 </a:solidFill>
               </a:rPr>
-              <a:t>[44] Royal College of Physicians. National Early Warning Score (NEWS) 2: standardising the assessment of acute-illness severity in the NHS. London: RCP; 2017.</a:t>
+              <a:t>[20] Kelly CJ, Karthikesalingam A, Suleyman M, Corrado G, King D. Key challenges for delivering clinical impact with artificial intelligence. BMC Med. 2019;17:195.</a:t>
             </a:r>
             <a:endParaRPr lang="en-US" sz="1000" dirty="0"/>
           </a:p>
@@ -26423,7 +27384,7 @@
                   <a:srgbClr val="1B1B1B"/>
                 </a:solidFill>
               </a:rPr>
-              <a:t>[45] Kidney Disease: Improving Global Outcomes (KDIGO) AKI Work Group. KDIGO clinical practice guideline for acute kidney injury. Kidney Int Suppl. 2012;2:1-138.</a:t>
+              <a:t>[21] Morrill JH, Kormilitzin A, Nevado-Holgado AJ, et al. Utilization of the signature method to identify the early onset of sepsis from multivariate physiological time series in critical care monitoring. Crit Care Med. 2020;48:e976-e981.</a:t>
             </a:r>
             <a:endParaRPr lang="en-US" sz="1000" dirty="0"/>
           </a:p>
@@ -26440,7 +27401,7 @@
                   <a:srgbClr val="1B1B1B"/>
                 </a:solidFill>
               </a:rPr>
-              <a:t>[46] Friedman JH. Greedy function approximation: a gradient boosting machine. Ann Stat. 2001;29:1189-1232.</a:t>
+              <a:t>[22] Wong A, Otles E, Donnelly JP, et al. External validation of a widely implemented proprietary sepsis prediction model in hospitalized patients. JAMA Intern Med. 2021;181:1065-1070.</a:t>
             </a:r>
             <a:endParaRPr lang="en-US" sz="1000" dirty="0"/>
           </a:p>
@@ -26457,7 +27418,7 @@
                   <a:srgbClr val="1B1B1B"/>
                 </a:solidFill>
               </a:rPr>
-              <a:t>[47] Horn M, Moor M, Bock C, Rieck B, Borgwardt K. Set functions for time series. International Conference on Machine Learning (ICML). 2020.</a:t>
+              <a:t>[23] Fleuren LM, Klausch TLT, Zwager CL, et al. Machine learning for the prediction of sepsis: a systematic review and meta-analysis of diagnostic test accuracy. Intensive Care Med. 2020;46:383-400.</a:t>
             </a:r>
             <a:endParaRPr lang="en-US" sz="1000" dirty="0"/>
           </a:p>
@@ -26474,7 +27435,7 @@
                   <a:srgbClr val="1B1B1B"/>
                 </a:solidFill>
               </a:rPr>
-              <a:t>[48] Gensheimer MF, Narasimhan B. A scalable discrete-time survival model for neural networks. PeerJ. 2019;7:e6257.</a:t>
+              <a:t>[24] Moor M, Rieck B, Horn M, Jutzeler CR, Borgwardt K. Early prediction of sepsis in the ICU using machine learning: a systematic review. Front Med. 2021;8:607952.</a:t>
             </a:r>
             <a:endParaRPr lang="en-US" sz="1000" dirty="0"/>
           </a:p>
@@ -26520,6 +27481,605 @@
             <a:fld id="{F7021451-1387-4CA6-816F-3879F97B5CBC}" type="slidenum">
               <a:rPr b="1" lang="en-US"/>
               <a:t>27</a:t>
+            </a:fld>
+            <a:endParaRPr lang="en-US"/>
+          </a:p>
+        </p:txBody>
+      </p:sp>
+    </p:spTree>
+  </p:cSld>
+  <p:clrMapOvr>
+    <a:masterClrMapping/>
+  </p:clrMapOvr>
+</p:sld>
+</file>
+
+<file path=ppt/slides/slide28.xml><?xml version="1.0" encoding="utf-8"?>
+<p:sld xmlns:a="http://schemas.openxmlformats.org/drawingml/2006/main" xmlns:r="http://schemas.openxmlformats.org/officeDocument/2006/relationships" xmlns:p="http://schemas.openxmlformats.org/presentationml/2006/main">
+  <p:cSld name="Slide 28">
+    <p:spTree>
+      <p:nvGrpSpPr>
+        <p:cNvPr id="1" name=""/>
+        <p:cNvGrpSpPr/>
+        <p:nvPr/>
+      </p:nvGrpSpPr>
+      <p:grpSpPr>
+        <a:xfrm>
+          <a:off x="0" y="0"/>
+          <a:ext cx="0" cy="0"/>
+          <a:chOff x="0" y="0"/>
+          <a:chExt cx="0" cy="0"/>
+        </a:xfrm>
+      </p:grpSpPr>
+      <p:sp>
+        <p:nvSpPr>
+          <p:cNvPr id="2" name="text"/>
+          <p:cNvSpPr txBox="1"/>
+          <p:nvPr/>
+        </p:nvSpPr>
+        <p:spPr>
+          <a:xfrm>
+            <a:off x="548640" y="237744"/>
+            <a:ext cx="7315200" cy="274320"/>
+          </a:xfrm>
+          <a:prstGeom prst="rect">
+            <a:avLst/>
+          </a:prstGeom>
+          <a:noFill/>
+          <a:ln/>
+        </p:spPr>
+        <p:txBody>
+          <a:bodyPr wrap="square" lIns="0" tIns="0" rIns="0" bIns="0" rtlCol="0" anchor="t"/>
+          <a:lstStyle/>
+          <a:p>
+            <a:pPr algn="l" indent="0" marL="0">
+              <a:buNone/>
+            </a:pPr>
+            <a:r>
+              <a:rPr lang="en-US" sz="1100" b="1" dirty="0">
+                <a:solidFill>
+                  <a:srgbClr val="C8102E"/>
+                </a:solidFill>
+              </a:rPr>
+              <a:t>BACKUP</a:t>
+            </a:r>
+            <a:endParaRPr lang="en-US" sz="1100" dirty="0"/>
+          </a:p>
+        </p:txBody>
+      </p:sp>
+      <p:sp>
+        <p:nvSpPr>
+          <p:cNvPr id="3" name="Text 0"/>
+          <p:cNvSpPr/>
+          <p:nvPr>
+            <p:ph idx="100" type="title" hasCustomPrompt="1"/>
+          </p:nvPr>
+        </p:nvSpPr>
+        <p:spPr>
+          <a:xfrm>
+            <a:off x="548640" y="548640"/>
+            <a:ext cx="11094415" cy="868680"/>
+          </a:xfrm>
+          <a:prstGeom prst="rect">
+            <a:avLst/>
+          </a:prstGeom>
+          <a:noFill/>
+          <a:ln/>
+        </p:spPr>
+        <p:txBody>
+          <a:bodyPr wrap="square" lIns="0" tIns="0" rIns="0" bIns="0" rtlCol="0" anchor="t"/>
+          <a:lstStyle/>
+          <a:p>
+            <a:pPr algn="l" indent="0" marL="0">
+              <a:buNone/>
+            </a:pPr>
+            <a:r>
+              <a:rPr lang="en-US" sz="2400" b="1" dirty="0">
+                <a:solidFill>
+                  <a:srgbClr val="1B1B1B"/>
+                </a:solidFill>
+                <a:latin typeface="Arial" pitchFamily="34" charset="0"/>
+                <a:ea typeface="Arial" pitchFamily="34" charset="-122"/>
+                <a:cs typeface="Arial" pitchFamily="34" charset="-120"/>
+              </a:rPr>
+              <a:t>References (2 of 2)</a:t>
+            </a:r>
+            <a:endParaRPr lang="en-US" sz="2400" dirty="0"/>
+          </a:p>
+        </p:txBody>
+      </p:sp>
+      <p:sp>
+        <p:nvSpPr>
+          <p:cNvPr id="4" name="reference list"/>
+          <p:cNvSpPr txBox="1"/>
+          <p:nvPr/>
+        </p:nvSpPr>
+        <p:spPr>
+          <a:xfrm>
+            <a:off x="548640" y="1234440"/>
+            <a:ext cx="5440680" cy="5120640"/>
+          </a:xfrm>
+          <a:prstGeom prst="rect">
+            <a:avLst/>
+          </a:prstGeom>
+          <a:noFill/>
+          <a:ln/>
+        </p:spPr>
+        <p:txBody>
+          <a:bodyPr wrap="square" lIns="0" tIns="0" rIns="0" bIns="0" rtlCol="0" anchor="t"/>
+          <a:lstStyle/>
+          <a:p>
+            <a:pPr indent="0" marL="0">
+              <a:spcAft>
+                <a:spcPts val="400"/>
+              </a:spcAft>
+              <a:buNone/>
+            </a:pPr>
+            <a:r>
+              <a:rPr lang="en-US" sz="1000" dirty="0">
+                <a:solidFill>
+                  <a:srgbClr val="1B1B1B"/>
+                </a:solidFill>
+              </a:rPr>
+              <a:t>[25] Tschandl P, Rinner C, Apalla Z, et al. Human-computer collaboration for skin cancer recognition. Nat Med. 2020;26:1229-1234.</a:t>
+            </a:r>
+            <a:endParaRPr lang="en-US" sz="1000" dirty="0"/>
+          </a:p>
+          <a:p>
+            <a:pPr indent="0" marL="0">
+              <a:spcAft>
+                <a:spcPts val="400"/>
+              </a:spcAft>
+              <a:buNone/>
+            </a:pPr>
+            <a:r>
+              <a:rPr lang="en-US" sz="1000" dirty="0">
+                <a:solidFill>
+                  <a:srgbClr val="1B1B1B"/>
+                </a:solidFill>
+              </a:rPr>
+              <a:t>[26] Henry KE, Kornfield R, Sridharan A, et al. Human-machine teaming is key to AI adoption: clinicians' experiences with a deployed machine learning system. NPJ Digit Med. 2022;5:97.</a:t>
+            </a:r>
+            <a:endParaRPr lang="en-US" sz="1000" dirty="0"/>
+          </a:p>
+          <a:p>
+            <a:pPr indent="0" marL="0">
+              <a:spcAft>
+                <a:spcPts val="400"/>
+              </a:spcAft>
+              <a:buNone/>
+            </a:pPr>
+            <a:r>
+              <a:rPr lang="en-US" sz="1000" dirty="0">
+                <a:solidFill>
+                  <a:srgbClr val="1B1B1B"/>
+                </a:solidFill>
+              </a:rPr>
+              <a:t>[27] Wiens J, Saria S, Sendak M, et al. Do no harm: a roadmap for responsible machine learning for health care. Nat Med. 2019;25:1337-1340.</a:t>
+            </a:r>
+            <a:endParaRPr lang="en-US" sz="1000" dirty="0"/>
+          </a:p>
+          <a:p>
+            <a:pPr indent="0" marL="0">
+              <a:spcAft>
+                <a:spcPts val="400"/>
+              </a:spcAft>
+              <a:buNone/>
+            </a:pPr>
+            <a:r>
+              <a:rPr lang="en-US" sz="1000" dirty="0">
+                <a:solidFill>
+                  <a:srgbClr val="1B1B1B"/>
+                </a:solidFill>
+              </a:rPr>
+              <a:t>[28] Bratzler DW, Dellinger EP, Olsen KM, et al. Clinical practice guidelines for antimicrobial prophylaxis in surgery. Am J Health Syst Pharm. 2013;70:195-283.</a:t>
+            </a:r>
+            <a:endParaRPr lang="en-US" sz="1000" dirty="0"/>
+          </a:p>
+          <a:p>
+            <a:pPr indent="0" marL="0">
+              <a:spcAft>
+                <a:spcPts val="400"/>
+              </a:spcAft>
+              <a:buNone/>
+            </a:pPr>
+            <a:r>
+              <a:rPr lang="en-US" sz="1000" dirty="0">
+                <a:solidFill>
+                  <a:srgbClr val="1B1B1B"/>
+                </a:solidFill>
+              </a:rPr>
+              <a:t>[29] Evans L, Rhodes A, Alhazzani W, et al. Surviving Sepsis Campaign: international guidelines for management of sepsis and septic shock 2021. Intensive Care Med. 2021;47:1181-1247.</a:t>
+            </a:r>
+            <a:endParaRPr lang="en-US" sz="1000" dirty="0"/>
+          </a:p>
+          <a:p>
+            <a:pPr indent="0" marL="0">
+              <a:spcAft>
+                <a:spcPts val="400"/>
+              </a:spcAft>
+              <a:buNone/>
+            </a:pPr>
+            <a:r>
+              <a:rPr lang="en-US" sz="1000" dirty="0">
+                <a:solidFill>
+                  <a:srgbClr val="1B1B1B"/>
+                </a:solidFill>
+              </a:rPr>
+              <a:t>[30] Johnson AEW, Bulgarelli L, Shen L, et al. MIMIC-IV, a freely accessible electronic health record dataset. Sci Data. 2023;10:1.</a:t>
+            </a:r>
+            <a:endParaRPr lang="en-US" sz="1000" dirty="0"/>
+          </a:p>
+          <a:p>
+            <a:pPr indent="0" marL="0">
+              <a:spcAft>
+                <a:spcPts val="400"/>
+              </a:spcAft>
+              <a:buNone/>
+            </a:pPr>
+            <a:r>
+              <a:rPr lang="en-US" sz="1000" dirty="0">
+                <a:solidFill>
+                  <a:srgbClr val="1B1B1B"/>
+                </a:solidFill>
+              </a:rPr>
+              <a:t>[31] Pollard TJ, Johnson AEW, Raffa JD, et al. The eICU Collaborative Research Database, a freely available multi-center database for critical care research. Sci Data. 2018;5:180178.</a:t>
+            </a:r>
+            <a:endParaRPr lang="en-US" sz="1000" dirty="0"/>
+          </a:p>
+          <a:p>
+            <a:pPr indent="0" marL="0">
+              <a:spcAft>
+                <a:spcPts val="400"/>
+              </a:spcAft>
+              <a:buNone/>
+            </a:pPr>
+            <a:r>
+              <a:rPr lang="en-US" sz="1000" dirty="0">
+                <a:solidFill>
+                  <a:srgbClr val="1B1B1B"/>
+                </a:solidFill>
+              </a:rPr>
+              <a:t>[32] Goldberger AL, Amaral LAN, Glass L, et al. PhysioBank, PhysioToolkit, and PhysioNet: components of a new research resource for complex physiologic signals. Circulation. 2000;101:e215-e220.</a:t>
+            </a:r>
+            <a:endParaRPr lang="en-US" sz="1000" dirty="0"/>
+          </a:p>
+          <a:p>
+            <a:pPr indent="0" marL="0">
+              <a:spcAft>
+                <a:spcPts val="400"/>
+              </a:spcAft>
+              <a:buNone/>
+            </a:pPr>
+            <a:r>
+              <a:rPr lang="en-US" sz="1000" dirty="0">
+                <a:solidFill>
+                  <a:srgbClr val="1B1B1B"/>
+                </a:solidFill>
+              </a:rPr>
+              <a:t>[33] van de Water R, Schmidt HNA, Elbers PWG, et al. Yet Another ICU Benchmark: a flexible multi-center framework for clinical machine learning. ICLR 2024.</a:t>
+            </a:r>
+            <a:endParaRPr lang="en-US" sz="1000" dirty="0"/>
+          </a:p>
+          <a:p>
+            <a:pPr indent="0" marL="0">
+              <a:spcAft>
+                <a:spcPts val="400"/>
+              </a:spcAft>
+              <a:buNone/>
+            </a:pPr>
+            <a:r>
+              <a:rPr lang="en-US" sz="1000" dirty="0">
+                <a:solidFill>
+                  <a:srgbClr val="1B1B1B"/>
+                </a:solidFill>
+              </a:rPr>
+              <a:t>[34] Bennett N, Plecko D, Ukor IF, Meinshausen N, Buhlmann P. ricu: R's interface to intensive care data. GigaScience. 2023;12.</a:t>
+            </a:r>
+            <a:endParaRPr lang="en-US" sz="1000" dirty="0"/>
+          </a:p>
+          <a:p>
+            <a:pPr indent="0" marL="0">
+              <a:spcAft>
+                <a:spcPts val="400"/>
+              </a:spcAft>
+              <a:buNone/>
+            </a:pPr>
+            <a:r>
+              <a:rPr lang="en-US" sz="1000" dirty="0">
+                <a:solidFill>
+                  <a:srgbClr val="1B1B1B"/>
+                </a:solidFill>
+              </a:rPr>
+              <a:t>[35] Seymour CW, Liu VX, Iwashyna TJ, et al. Assessment of clinical criteria for sepsis (Sepsis-3). JAMA. 2016;315:762-774.</a:t>
+            </a:r>
+            <a:endParaRPr lang="en-US" sz="1000" dirty="0"/>
+          </a:p>
+          <a:p>
+            <a:pPr indent="0" marL="0">
+              <a:spcAft>
+                <a:spcPts val="400"/>
+              </a:spcAft>
+              <a:buNone/>
+            </a:pPr>
+            <a:r>
+              <a:rPr lang="en-US" sz="1000" dirty="0">
+                <a:solidFill>
+                  <a:srgbClr val="1B1B1B"/>
+                </a:solidFill>
+              </a:rPr>
+              <a:t>[36] Vaswani A, Shazeer N, Parmar N, et al. Attention is all you need. Advances in Neural Information Processing Systems (NeurIPS). 2017.</a:t>
+            </a:r>
+            <a:endParaRPr lang="en-US" sz="1000" dirty="0"/>
+          </a:p>
+        </p:txBody>
+      </p:sp>
+      <p:sp>
+        <p:nvSpPr>
+          <p:cNvPr id="5" name="reference list"/>
+          <p:cNvSpPr txBox="1"/>
+          <p:nvPr/>
+        </p:nvSpPr>
+        <p:spPr>
+          <a:xfrm>
+            <a:off x="6172200" y="1234440"/>
+            <a:ext cx="5440680" cy="5120640"/>
+          </a:xfrm>
+          <a:prstGeom prst="rect">
+            <a:avLst/>
+          </a:prstGeom>
+          <a:noFill/>
+          <a:ln/>
+        </p:spPr>
+        <p:txBody>
+          <a:bodyPr wrap="square" lIns="0" tIns="0" rIns="0" bIns="0" rtlCol="0" anchor="t"/>
+          <a:lstStyle/>
+          <a:p>
+            <a:pPr indent="0" marL="0">
+              <a:spcAft>
+                <a:spcPts val="400"/>
+              </a:spcAft>
+              <a:buNone/>
+            </a:pPr>
+            <a:r>
+              <a:rPr lang="en-US" sz="1000" dirty="0">
+                <a:solidFill>
+                  <a:srgbClr val="1B1B1B"/>
+                </a:solidFill>
+              </a:rPr>
+              <a:t>[37] Che Z, Purushotham S, Cho K, Sontag D, Liu Y. Recurrent neural networks for multivariate time series with missing values. Sci Rep. 2018;8:6085.</a:t>
+            </a:r>
+            <a:endParaRPr lang="en-US" sz="1000" dirty="0"/>
+          </a:p>
+          <a:p>
+            <a:pPr indent="0" marL="0">
+              <a:spcAft>
+                <a:spcPts val="400"/>
+              </a:spcAft>
+              <a:buNone/>
+            </a:pPr>
+            <a:r>
+              <a:rPr lang="en-US" sz="1000" dirty="0">
+                <a:solidFill>
+                  <a:srgbClr val="1B1B1B"/>
+                </a:solidFill>
+              </a:rPr>
+              <a:t>[38] Bai S, Kolter JZ, Koltun V. An empirical evaluation of generic convolutional and recurrent networks for sequence modeling. arXiv:1803.01271. 2018.</a:t>
+            </a:r>
+            <a:endParaRPr lang="en-US" sz="1000" dirty="0"/>
+          </a:p>
+          <a:p>
+            <a:pPr indent="0" marL="0">
+              <a:spcAft>
+                <a:spcPts val="400"/>
+              </a:spcAft>
+              <a:buNone/>
+            </a:pPr>
+            <a:r>
+              <a:rPr lang="en-US" sz="1000" dirty="0">
+                <a:solidFill>
+                  <a:srgbClr val="1B1B1B"/>
+                </a:solidFill>
+              </a:rPr>
+              <a:t>[39] Yeche H, Dresdner G, Locatello F, Huser M, Ratsch G. Neighborhood contrastive learning applied to online patient monitoring. International Conference on Machine Learning (ICML). 2021.</a:t>
+            </a:r>
+            <a:endParaRPr lang="en-US" sz="1000" dirty="0"/>
+          </a:p>
+          <a:p>
+            <a:pPr indent="0" marL="0">
+              <a:spcAft>
+                <a:spcPts val="400"/>
+              </a:spcAft>
+              <a:buNone/>
+            </a:pPr>
+            <a:r>
+              <a:rPr lang="en-US" sz="1000" dirty="0">
+                <a:solidFill>
+                  <a:srgbClr val="1B1B1B"/>
+                </a:solidFill>
+              </a:rPr>
+              <a:t>[40] Yeche H, Pace A, Ratsch G, Kuznetsova R. Temporal label smoothing for early event prediction. International Conference on Machine Learning (ICML). 2023.</a:t>
+            </a:r>
+            <a:endParaRPr lang="en-US" sz="1000" dirty="0"/>
+          </a:p>
+          <a:p>
+            <a:pPr indent="0" marL="0">
+              <a:spcAft>
+                <a:spcPts val="400"/>
+              </a:spcAft>
+              <a:buNone/>
+            </a:pPr>
+            <a:r>
+              <a:rPr lang="en-US" sz="1000" dirty="0">
+                <a:solidFill>
+                  <a:srgbClr val="1B1B1B"/>
+                </a:solidFill>
+              </a:rPr>
+              <a:t>[41] Elrggal ME, et al. Early sepsis warning on MIMIC-IV and eICU: preliminary development-split results, October 2026. Unpublished; manuscript in preparation.</a:t>
+            </a:r>
+            <a:endParaRPr lang="en-US" sz="1000" dirty="0"/>
+          </a:p>
+          <a:p>
+            <a:pPr indent="0" marL="0">
+              <a:spcAft>
+                <a:spcPts val="400"/>
+              </a:spcAft>
+              <a:buNone/>
+            </a:pPr>
+            <a:r>
+              <a:rPr lang="en-US" sz="1000" dirty="0">
+                <a:solidFill>
+                  <a:srgbClr val="1B1B1B"/>
+                </a:solidFill>
+              </a:rPr>
+              <a:t>[42] Elrggal ME, et al. Temporal patterns and predictors of sepsis onset in ICU patients: a retrospective cohort study using PhysioNet data. Submitted, Front Med, 2026.</a:t>
+            </a:r>
+            <a:endParaRPr lang="en-US" sz="1000" dirty="0"/>
+          </a:p>
+          <a:p>
+            <a:pPr indent="0" marL="0">
+              <a:spcAft>
+                <a:spcPts val="400"/>
+              </a:spcAft>
+              <a:buNone/>
+            </a:pPr>
+            <a:r>
+              <a:rPr lang="en-US" sz="1000" dirty="0">
+                <a:solidFill>
+                  <a:srgbClr val="1B1B1B"/>
+                </a:solidFill>
+              </a:rPr>
+              <a:t>[43] Elrggal ME, et al. Diagnostic applications of infrared thermography across infectious diseases: a systematic review with a subgroup meta-analysis. Submitted, JMIR, 2026.</a:t>
+            </a:r>
+            <a:endParaRPr lang="en-US" sz="1000" dirty="0"/>
+          </a:p>
+          <a:p>
+            <a:pPr indent="0" marL="0">
+              <a:spcAft>
+                <a:spcPts val="400"/>
+              </a:spcAft>
+              <a:buNone/>
+            </a:pPr>
+            <a:r>
+              <a:rPr lang="en-US" sz="1000" dirty="0">
+                <a:solidFill>
+                  <a:srgbClr val="1B1B1B"/>
+                </a:solidFill>
+              </a:rPr>
+              <a:t>[44] Royal College of Physicians. National Early Warning Score (NEWS) 2: standardising the assessment of acute-illness severity in the NHS. London: RCP; 2017.</a:t>
+            </a:r>
+            <a:endParaRPr lang="en-US" sz="1000" dirty="0"/>
+          </a:p>
+          <a:p>
+            <a:pPr indent="0" marL="0">
+              <a:spcAft>
+                <a:spcPts val="400"/>
+              </a:spcAft>
+              <a:buNone/>
+            </a:pPr>
+            <a:r>
+              <a:rPr lang="en-US" sz="1000" dirty="0">
+                <a:solidFill>
+                  <a:srgbClr val="1B1B1B"/>
+                </a:solidFill>
+              </a:rPr>
+              <a:t>[45] Kidney Disease: Improving Global Outcomes (KDIGO) AKI Work Group. KDIGO clinical practice guideline for acute kidney injury. Kidney Int Suppl. 2012;2:1-138.</a:t>
+            </a:r>
+            <a:endParaRPr lang="en-US" sz="1000" dirty="0"/>
+          </a:p>
+          <a:p>
+            <a:pPr indent="0" marL="0">
+              <a:spcAft>
+                <a:spcPts val="400"/>
+              </a:spcAft>
+              <a:buNone/>
+            </a:pPr>
+            <a:r>
+              <a:rPr lang="en-US" sz="1000" dirty="0">
+                <a:solidFill>
+                  <a:srgbClr val="1B1B1B"/>
+                </a:solidFill>
+              </a:rPr>
+              <a:t>[46] Friedman JH. Greedy function approximation: a gradient boosting machine. Ann Stat. 2001;29:1189-1232.</a:t>
+            </a:r>
+            <a:endParaRPr lang="en-US" sz="1000" dirty="0"/>
+          </a:p>
+          <a:p>
+            <a:pPr indent="0" marL="0">
+              <a:spcAft>
+                <a:spcPts val="400"/>
+              </a:spcAft>
+              <a:buNone/>
+            </a:pPr>
+            <a:r>
+              <a:rPr lang="en-US" sz="1000" dirty="0">
+                <a:solidFill>
+                  <a:srgbClr val="1B1B1B"/>
+                </a:solidFill>
+              </a:rPr>
+              <a:t>[47] Horn M, Moor M, Bock C, Rieck B, Borgwardt K. Set functions for time series. International Conference on Machine Learning (ICML). 2020.</a:t>
+            </a:r>
+            <a:endParaRPr lang="en-US" sz="1000" dirty="0"/>
+          </a:p>
+          <a:p>
+            <a:pPr indent="0" marL="0">
+              <a:spcAft>
+                <a:spcPts val="400"/>
+              </a:spcAft>
+              <a:buNone/>
+            </a:pPr>
+            <a:r>
+              <a:rPr lang="en-US" sz="1000" dirty="0">
+                <a:solidFill>
+                  <a:srgbClr val="1B1B1B"/>
+                </a:solidFill>
+              </a:rPr>
+              <a:t>[48] Gensheimer MF, Narasimhan B. A scalable discrete-time survival model for neural networks. PeerJ. 2019;7:e6257.</a:t>
+            </a:r>
+            <a:endParaRPr lang="en-US" sz="1000" dirty="0"/>
+          </a:p>
+        </p:txBody>
+      </p:sp>
+      <p:sp>
+        <p:nvSpPr>
+          <p:cNvPr id="25" name="Slide Number Placeholder 0"/>
+          <p:cNvSpPr>
+            <a:spLocks noGrp="1"/>
+          </p:cNvSpPr>
+          <p:nvPr>
+            <p:ph type="sldNum" sz="quarter" idx="4294967295"/>
+          </p:nvPr>
+        </p:nvSpPr>
+        <p:spPr>
+          <a:xfrm>
+            <a:off x="10911535" y="6437376"/>
+            <a:ext cx="731520" cy="274320"/>
+          </a:xfrm>
+          <a:prstGeom prst="rect">
+            <a:avLst/>
+          </a:prstGeom>
+          <a:extLst>
+            <a:ext uri="{C572A759-6A51-4108-AA02-DFA0A04FC94B}">
+              <ma14:wrappingTextBoxFlag xmlns:ma14="http://schemas.microsoft.com/office/mac/drawingml/2011/main" val="0"/>
+            </a:ext>
+          </a:extLst>
+        </p:spPr>
+        <p:txBody>
+          <a:bodyPr/>
+          <a:lstStyle>
+            <a:lvl1pPr>
+              <a:defRPr sz="1200">
+                <a:solidFill>
+                  <a:srgbClr val="C8102E"/>
+                </a:solidFill>
+              </a:defRPr>
+            </a:lvl1pPr>
+          </a:lstStyle>
+          <a:p>
+            <a:pPr algn="r"/>
+            <a:fld id="{F7021451-1387-4CA6-816F-3879F97B5CBC}" type="slidenum">
+              <a:rPr b="1" lang="en-US"/>
+              <a:t>28</a:t>
             </a:fld>
             <a:endParaRPr lang="en-US"/>
           </a:p>

--- a/dev/presentation/Elrggal_Mahmoud_SCEBE2026.pptx
+++ b/dev/presentation/Elrggal_Mahmoud_SCEBE2026.pptx
@@ -134,7 +134,7 @@
   <p:extLst>
     <p:ext uri="{521415D9-36F7-43E2-AB2F-B90AF26B5E84}">
       <p14:sectionLst xmlns:p14="http://schemas.microsoft.com/office/powerpoint/2010/main">
-        <p14:section name="Context" id="{65761b91-fd18-9147-f466-5be96fbf8367}">
+        <p14:section name="Context" id="{1bd875a1-9514-e5e1-068d-6a96299f9b55}">
           <p14:sldIdLst>
             <p14:sldId id="256"/>
             <p14:sldId id="257"/>
@@ -143,7 +143,7 @@
             <p14:sldId id="260"/>
           </p14:sldIdLst>
         </p14:section>
-        <p14:section name="Question and approach" id="{885e5baf-3d98-0595-fae8-6c77fe57e6b1}">
+        <p14:section name="Question and approach" id="{587ad090-13a0-b4e0-dea1-5ad1fda654a0}">
           <p14:sldIdLst>
             <p14:sldId id="261"/>
             <p14:sldId id="262"/>
@@ -152,24 +152,24 @@
             <p14:sldId id="265"/>
           </p14:sldIdLst>
         </p14:section>
-        <p14:section name="Preliminary results" id="{1efb7e9c-16d2-1a6e-97d2-fec677007659}">
+        <p14:section name="Preliminary results" id="{a521c475-c318-f49c-8ba1-39738fa92e94}">
           <p14:sldIdLst>
             <p14:sldId id="266"/>
             <p14:sldId id="267"/>
             <p14:sldId id="268"/>
           </p14:sldIdLst>
         </p14:section>
-        <p14:section name="Contribution and next steps" id="{d30e2750-ff7b-76a0-4a7b-bc9516c457fb}">
+        <p14:section name="Contribution and next steps" id="{026fd597-d914-bb0c-cf88-155c577a996f}">
           <p14:sldIdLst>
             <p14:sldId id="269"/>
           </p14:sldIdLst>
         </p14:section>
-        <p14:section name="Input" id="{7bb0c6c2-753b-10e6-dfa0-b98e1642e902}">
+        <p14:section name="Input" id="{4d04d5fa-b998-d075-37ed-8ea95c0d75f6}">
           <p14:sldIdLst>
             <p14:sldId id="270"/>
           </p14:sldIdLst>
         </p14:section>
-        <p14:section name="Backup" id="{03065c7a-640d-3cb2-8513-87ba0efd6609}">
+        <p14:section name="Backup" id="{34c9ebca-1a47-2550-08ca-cb1076509013}">
           <p14:sldIdLst>
             <p14:sldId id="271"/>
             <p14:sldId id="272"/>
@@ -10258,7 +10258,7 @@
                   <a:srgbClr val="5E5E5E"/>
                 </a:solidFill>
               </a:rPr>
-              <a:t>one sepsis definition, two hospital systems, 655 clinically defined predictors [41]</a:t>
+              <a:t>one sepsis definition, two hospital systems, 659 clinically defined predictors [41]</a:t>
             </a:r>
             <a:endParaRPr lang="en-US" sz="1250" dirty="0"/>
           </a:p>
@@ -13722,7 +13722,7 @@
                           <a:ea typeface="Arial" pitchFamily="34" charset="-122"/>
                           <a:cs typeface="Arial" pitchFamily="34" charset="-120"/>
                         </a:rPr>
-                        <a:t>655 clinically defined predictors</a:t>
+                        <a:t>659 clinically defined predictors</a:t>
                       </a:r>
                       <a:endParaRPr lang="en-US" sz="1150" dirty="0">
                         <a:latin typeface="Arial" charset="0"/>
@@ -14411,7 +14411,7 @@
                 <a:ea typeface="Arial" pitchFamily="34" charset="-122"/>
                 <a:cs typeface="Arial" pitchFamily="34" charset="-120"/>
               </a:rPr>
-              <a:t>The 655 predictors, each with a measured flag and an age</a:t>
+              <a:t>The 659 predictors, each with a measured flag and an age</a:t>
             </a:r>
             <a:endParaRPr lang="en-US" sz="2400" dirty="0"/>
           </a:p>
@@ -14993,7 +14993,7 @@
                   <a:srgbClr val="1B1B1B"/>
                 </a:solidFill>
               </a:rPr>
-              <a:t>admission source, ICU type, hours before ICU, prior admissions, prior positive cultures and antibiotics, 17 comorbidities, imaging orders</a:t>
+              <a:t>admission source, ICU type, hours before ICU, prior admissions, prior positive cultures and antibiotics (MIMIC-IV only), 17 comorbidities, imaging orders</a:t>
             </a:r>
             <a:endParaRPr lang="en-US" sz="1150" dirty="0"/>
           </a:p>
@@ -15187,7 +15187,7 @@
                   <a:srgbClr val="1B1B1B"/>
                 </a:solidFill>
               </a:rPr>
-              <a:t>label-defining antibiotics and cultures; race, ethnicity, insurance (fairness analysis only); anything after the prediction hour</a:t>
+              <a:t>label-defining antibiotics and cultures; race, ethnicity, insurance (reserved for a planned fairness analysis); anything after the prediction hour</a:t>
             </a:r>
             <a:endParaRPr lang="en-US" sz="1150" dirty="0"/>
           </a:p>
@@ -24708,7 +24708,7 @@
                   <a:srgbClr val="1B1B1B"/>
                 </a:solidFill>
               </a:rPr>
-              <a:t>septic stays per training split, against 300 to 655 predictors</a:t>
+              <a:t>septic stays per training split, against 300 to 659 predictors</a:t>
             </a:r>
             <a:endParaRPr lang="en-US" sz="1400" dirty="0"/>
           </a:p>
@@ -33989,7 +33989,7 @@
                   <a:srgbClr val="1B1B1B"/>
                 </a:solidFill>
               </a:rPr>
-              <a:t>655, each used only from the hour recorded</a:t>
+              <a:t>659, each used only from the hour recorded</a:t>
             </a:r>
             <a:endParaRPr lang="en-US" sz="1200" dirty="0"/>
           </a:p>

--- a/dev/presentation/Elrggal_Mahmoud_SCEBE2026.pptx
+++ b/dev/presentation/Elrggal_Mahmoud_SCEBE2026.pptx
@@ -134,7 +134,7 @@
   <p:extLst>
     <p:ext uri="{521415D9-36F7-43E2-AB2F-B90AF26B5E84}">
       <p14:sectionLst xmlns:p14="http://schemas.microsoft.com/office/powerpoint/2010/main">
-        <p14:section name="Context" id="{1bd875a1-9514-e5e1-068d-6a96299f9b55}">
+        <p14:section name="Context" id="{f8dd6fdd-f602-555c-f906-47072626ef8c}">
           <p14:sldIdLst>
             <p14:sldId id="256"/>
             <p14:sldId id="257"/>
@@ -143,7 +143,7 @@
             <p14:sldId id="260"/>
           </p14:sldIdLst>
         </p14:section>
-        <p14:section name="Question and approach" id="{587ad090-13a0-b4e0-dea1-5ad1fda654a0}">
+        <p14:section name="Question and approach" id="{dd6136c1-290f-1bfd-2dbf-4f8bd4c94fe6}">
           <p14:sldIdLst>
             <p14:sldId id="261"/>
             <p14:sldId id="262"/>
@@ -152,24 +152,24 @@
             <p14:sldId id="265"/>
           </p14:sldIdLst>
         </p14:section>
-        <p14:section name="Preliminary results" id="{a521c475-c318-f49c-8ba1-39738fa92e94}">
+        <p14:section name="Preliminary results" id="{2e9374e6-6146-4b59-1a69-f2ba246897b2}">
           <p14:sldIdLst>
             <p14:sldId id="266"/>
             <p14:sldId id="267"/>
             <p14:sldId id="268"/>
           </p14:sldIdLst>
         </p14:section>
-        <p14:section name="Contribution and next steps" id="{026fd597-d914-bb0c-cf88-155c577a996f}">
+        <p14:section name="Contribution and next steps" id="{9bd5aae4-1ed4-ea22-8eda-a7c5004ffc2f}">
           <p14:sldIdLst>
             <p14:sldId id="269"/>
           </p14:sldIdLst>
         </p14:section>
-        <p14:section name="Input" id="{4d04d5fa-b998-d075-37ed-8ea95c0d75f6}">
+        <p14:section name="Input" id="{8435e38e-0b49-4499-5a8f-c4ede434f37b}">
           <p14:sldIdLst>
             <p14:sldId id="270"/>
           </p14:sldIdLst>
         </p14:section>
-        <p14:section name="Backup" id="{34c9ebca-1a47-2550-08ca-cb1076509013}">
+        <p14:section name="Backup" id="{1ab791be-e7ab-2bef-d7e1-6e72de1dc0b0}">
           <p14:sldIdLst>
             <p14:sldId id="271"/>
             <p14:sldId id="272"/>
@@ -12315,7 +12315,7 @@
                   <a:srgbClr val="1B1B1B"/>
                 </a:solidFill>
               </a:rPr>
-              <a:t>Each value used only from the hour it was recorded, with a measured flag and its age; no hour after onset used</a:t>
+              <a:t>Each value used only from the hour it became available, with a measured flag and its age; hours after onset are never scored as warnings</a:t>
             </a:r>
             <a:endParaRPr lang="en-US" sz="1200" dirty="0"/>
           </a:p>
@@ -13525,7 +13525,7 @@
                           <a:ea typeface="Arial" pitchFamily="34" charset="-122"/>
                           <a:cs typeface="Arial" pitchFamily="34" charset="-120"/>
                         </a:rPr>
-                        <a:t>Each value used from the hour recorded, expires after 24 h; post-onset hours excluded</a:t>
+                        <a:t>Each value used from the hour available, most expire after 24 h; hours after onset never scored as warnings</a:t>
                       </a:r>
                       <a:endParaRPr lang="en-US" sz="1150" dirty="0">
                         <a:latin typeface="Arial" charset="0"/>

--- a/dev/presentation/Elrggal_Mahmoud_SCEBE2026.pptx
+++ b/dev/presentation/Elrggal_Mahmoud_SCEBE2026.pptx
@@ -134,7 +134,7 @@
   <p:extLst>
     <p:ext uri="{521415D9-36F7-43E2-AB2F-B90AF26B5E84}">
       <p14:sectionLst xmlns:p14="http://schemas.microsoft.com/office/powerpoint/2010/main">
-        <p14:section name="Context" id="{f8dd6fdd-f602-555c-f906-47072626ef8c}">
+        <p14:section name="Context" id="{c3199a21-2e46-8609-d8ce-2f5e0a2507c7}">
           <p14:sldIdLst>
             <p14:sldId id="256"/>
             <p14:sldId id="257"/>
@@ -143,7 +143,7 @@
             <p14:sldId id="260"/>
           </p14:sldIdLst>
         </p14:section>
-        <p14:section name="Question and approach" id="{dd6136c1-290f-1bfd-2dbf-4f8bd4c94fe6}">
+        <p14:section name="Question and approach" id="{9801c369-ee3e-8979-6984-ed3332f21d8e}">
           <p14:sldIdLst>
             <p14:sldId id="261"/>
             <p14:sldId id="262"/>
@@ -152,24 +152,24 @@
             <p14:sldId id="265"/>
           </p14:sldIdLst>
         </p14:section>
-        <p14:section name="Preliminary results" id="{2e9374e6-6146-4b59-1a69-f2ba246897b2}">
+        <p14:section name="Preliminary results" id="{576fe539-98bc-d1df-6206-8e06c9c77ab7}">
           <p14:sldIdLst>
             <p14:sldId id="266"/>
             <p14:sldId id="267"/>
             <p14:sldId id="268"/>
           </p14:sldIdLst>
         </p14:section>
-        <p14:section name="Contribution and next steps" id="{9bd5aae4-1ed4-ea22-8eda-a7c5004ffc2f}">
+        <p14:section name="Contribution and next steps" id="{3174f4de-803b-8bd4-d28c-19bddc9011e0}">
           <p14:sldIdLst>
             <p14:sldId id="269"/>
           </p14:sldIdLst>
         </p14:section>
-        <p14:section name="Input" id="{8435e38e-0b49-4499-5a8f-c4ede434f37b}">
+        <p14:section name="Input" id="{7017ff5d-df12-34e9-91d6-fc8812e0e4b5}">
           <p14:sldIdLst>
             <p14:sldId id="270"/>
           </p14:sldIdLst>
         </p14:section>
-        <p14:section name="Backup" id="{1ab791be-e7ab-2bef-d7e1-6e72de1dc0b0}">
+        <p14:section name="Backup" id="{7e410d07-857b-74c9-5055-fab9545392ae}">
           <p14:sldIdLst>
             <p14:sldId id="271"/>
             <p14:sldId id="272"/>
@@ -760,7 +760,7 @@
                     <c:v>Winner, published: unseen hospital</c:v>
                   </c:pt>
                   <c:pt idx="2">
-                    <c:v>Winner's method, rebuilt here</c:v>
+                    <c:v>Winner's approach, rebuilt here</c:v>
                   </c:pt>
                   <c:pt idx="3">
                     <c:v>OSTA (this project)</c:v>
@@ -2198,7 +2198,7 @@
           <a:p>
             <a:r>
               <a:rPr lang="en-US" dirty="0"/>
-              <a:t>1 min. Grey is the published winner: 0.43 on its own hospitals, minus 0.12 on an unseen one. Dark grey is the winner's own method rebuilt in our causal pipeline on MIMIC-IV: 0.15. Red is this project: OSTA 0.23, and GRU-D, the model the prespecified rule chose on validation, 0.19. All 21 models have positive utility with confidence intervals above zero. The organ grouping did not beat the same model without it at this sample size; that is reported as found. Say: preliminary, one run, development split.</a:t>
+              <a:t>1 min. Grey is the published winner: 0.43 on its own hospitals, minus 0.12 on an unseen one. Dark grey is the winner's approach, path signatures plus boosted trees, rebuilt in our causal pipeline on all our predictors: 0.15. Say clearly: our bars are the counterpart of the 0.43, an internal split, and the same hospital system, because PhysioNet hospital A is Beth Israel Deaconess, the MIMIC-IV hospital. The counterpart of minus 0.12 is the sealed cross-database holdout, not yet opened. Red is this project: OSTA 0.23, and GRU-D, the model the prespecified rule chose on validation, 0.19. All 21 models have positive utility with confidence intervals above zero. The organ grouping did not beat the same model without it at this sample size; that is reported as found. Say: preliminary, one run, development split.</a:t>
             </a:r>
             <a:endParaRPr lang="en-US" dirty="0"/>
           </a:p>
@@ -7246,7 +7246,7 @@
                   <a:srgbClr val="5E5E5E"/>
                 </a:solidFill>
               </a:rPr>
-              <a:t>the PhysioNet 2019 winner's method [21]</a:t>
+              <a:t>the PhysioNet 2019 winner's approach [21]</a:t>
             </a:r>
             <a:endParaRPr lang="en-US" sz="1200" dirty="0"/>
           </a:p>
@@ -9298,7 +9298,7 @@
                 <a:ea typeface="Arial" pitchFamily="34" charset="-122"/>
                 <a:cs typeface="Arial" pitchFamily="34" charset="-120"/>
               </a:rPr>
-              <a:t>Result 3: on identical MIMIC-IV hours, all 21 models have positive utility, including the winner's method</a:t>
+              <a:t>Result 3: on identical MIMIC-IV hours, all 21 models have positive utility, including the winner's approach</a:t>
             </a:r>
             <a:endParaRPr lang="en-US" sz="2600" dirty="0"/>
           </a:p>
@@ -9436,7 +9436,7 @@
                   <a:srgbClr val="1B1B1B"/>
                 </a:solidFill>
               </a:rPr>
-              <a:t>Winner's method, our pipeline</a:t>
+              <a:t>Winner's approach, our pipeline</a:t>
             </a:r>
             <a:endParaRPr lang="en-US" sz="1200" dirty="0"/>
           </a:p>
@@ -9505,7 +9505,43 @@
       </p:sp>
       <p:sp>
         <p:nvSpPr>
-          <p:cNvPr id="13" name="box"/>
+          <p:cNvPr id="13" name="text"/>
+          <p:cNvSpPr txBox="1"/>
+          <p:nvPr/>
+        </p:nvSpPr>
+        <p:spPr>
+          <a:xfrm>
+            <a:off x="548640" y="5760720"/>
+            <a:ext cx="6858000" cy="365760"/>
+          </a:xfrm>
+          <a:prstGeom prst="rect">
+            <a:avLst/>
+          </a:prstGeom>
+          <a:noFill/>
+          <a:ln/>
+        </p:spPr>
+        <p:txBody>
+          <a:bodyPr wrap="square" lIns="0" tIns="0" rIns="0" bIns="0" rtlCol="0" anchor="t"/>
+          <a:lstStyle/>
+          <a:p>
+            <a:pPr algn="l" indent="0" marL="0">
+              <a:buNone/>
+            </a:pPr>
+            <a:r>
+              <a:rPr lang="en-US" sz="1000" dirty="0">
+                <a:solidFill>
+                  <a:srgbClr val="5E5E5E"/>
+                </a:solidFill>
+              </a:rPr>
+              <a:t>Counterpart of the winner's 0.43, not of -0.12: an internal split, and the same hospital system (PhysioNet hospital A is Beth Israel Deaconess, the MIMIC-IV hospital) [15]. The transfer test is the sealed holdout, still closed.</a:t>
+            </a:r>
+            <a:endParaRPr lang="en-US" sz="1000" dirty="0"/>
+          </a:p>
+        </p:txBody>
+      </p:sp>
+      <p:sp>
+        <p:nvSpPr>
+          <p:cNvPr id="14" name="box"/>
           <p:cNvSpPr/>
           <p:nvPr/>
         </p:nvSpPr>
@@ -9530,7 +9566,7 @@
       </p:sp>
       <p:sp>
         <p:nvSpPr>
-          <p:cNvPr id="14" name="text"/>
+          <p:cNvPr id="15" name="text"/>
           <p:cNvSpPr txBox="1"/>
           <p:nvPr/>
         </p:nvSpPr>
@@ -9566,7 +9602,7 @@
       </p:sp>
       <p:sp>
         <p:nvSpPr>
-          <p:cNvPr id="15" name="text"/>
+          <p:cNvPr id="16" name="text"/>
           <p:cNvSpPr txBox="1"/>
           <p:nvPr/>
         </p:nvSpPr>
@@ -9602,7 +9638,7 @@
       </p:sp>
       <p:sp>
         <p:nvSpPr>
-          <p:cNvPr id="16" name="text"/>
+          <p:cNvPr id="17" name="text"/>
           <p:cNvSpPr txBox="1"/>
           <p:nvPr/>
         </p:nvSpPr>
@@ -9638,7 +9674,7 @@
       </p:sp>
       <p:sp>
         <p:nvSpPr>
-          <p:cNvPr id="17" name="text"/>
+          <p:cNvPr id="18" name="text"/>
           <p:cNvSpPr txBox="1"/>
           <p:nvPr/>
         </p:nvSpPr>
@@ -9674,7 +9710,7 @@
       </p:sp>
       <p:sp>
         <p:nvSpPr>
-          <p:cNvPr id="18" name="text"/>
+          <p:cNvPr id="19" name="text"/>
           <p:cNvSpPr txBox="1"/>
           <p:nvPr/>
         </p:nvSpPr>
@@ -9710,7 +9746,7 @@
       </p:sp>
       <p:sp>
         <p:nvSpPr>
-          <p:cNvPr id="19" name="text"/>
+          <p:cNvPr id="20" name="text"/>
           <p:cNvSpPr txBox="1"/>
           <p:nvPr/>
         </p:nvSpPr>
@@ -9746,7 +9782,7 @@
       </p:sp>
       <p:sp>
         <p:nvSpPr>
-          <p:cNvPr id="20" name="text"/>
+          <p:cNvPr id="21" name="text"/>
           <p:cNvSpPr txBox="1"/>
           <p:nvPr/>
         </p:nvSpPr>
@@ -9782,7 +9818,7 @@
       </p:sp>
       <p:sp>
         <p:nvSpPr>
-          <p:cNvPr id="21" name="text"/>
+          <p:cNvPr id="22" name="text"/>
           <p:cNvSpPr txBox="1"/>
           <p:nvPr/>
         </p:nvSpPr>
@@ -9818,7 +9854,7 @@
       </p:sp>
       <p:sp>
         <p:nvSpPr>
-          <p:cNvPr id="22" name="text"/>
+          <p:cNvPr id="23" name="text"/>
           <p:cNvSpPr txBox="1"/>
           <p:nvPr/>
         </p:nvSpPr>
@@ -9854,7 +9890,7 @@
       </p:sp>
       <p:sp>
         <p:nvSpPr>
-          <p:cNvPr id="23" name="text"/>
+          <p:cNvPr id="24" name="text"/>
           <p:cNvSpPr txBox="1"/>
           <p:nvPr/>
         </p:nvSpPr>
@@ -9882,7 +9918,7 @@
                   <a:srgbClr val="1B1B1B"/>
                 </a:solidFill>
               </a:rPr>
-              <a:t>winner's method, 95 % CI 0.06 to 0.22</a:t>
+              <a:t>winner's approach, 95 % CI 0.06 to 0.22</a:t>
             </a:r>
             <a:endParaRPr lang="en-US" sz="1150" dirty="0"/>
           </a:p>
@@ -9890,7 +9926,7 @@
       </p:sp>
       <p:sp>
         <p:nvSpPr>
-          <p:cNvPr id="24" name="text"/>
+          <p:cNvPr id="25" name="text"/>
           <p:cNvSpPr txBox="1"/>
           <p:nvPr/>
         </p:nvSpPr>
@@ -9926,7 +9962,7 @@
       </p:sp>
       <p:sp>
         <p:nvSpPr>
-          <p:cNvPr id="25" name="references"/>
+          <p:cNvPr id="26" name="references"/>
           <p:cNvSpPr txBox="1"/>
           <p:nvPr/>
         </p:nvSpPr>
@@ -17675,7 +17711,7 @@
                   <a:srgbClr val="1B1B1B"/>
                 </a:solidFill>
               </a:rPr>
-              <a:t>GRU-D, temporal CNN, the winner's method [37, 38, 21]</a:t>
+              <a:t>GRU-D, temporal CNN, the winner's approach [37, 38, 21]</a:t>
             </a:r>
             <a:endParaRPr lang="en-US" sz="1150" dirty="0"/>
           </a:p>
@@ -18016,7 +18052,7 @@
                 <a:ea typeface="Arial" pitchFamily="34" charset="-122"/>
                 <a:cs typeface="Arial" pitchFamily="34" charset="-120"/>
               </a:rPr>
-              <a:t>Every model compared (1 of 2): baselines, the winner's method and sequence models</a:t>
+              <a:t>Every model compared (1 of 2): baselines, the winner's approach and sequence models</a:t>
             </a:r>
             <a:endParaRPr lang="en-US" sz="2400" dirty="0"/>
           </a:p>
@@ -18996,7 +19032,7 @@
                           <a:ea typeface="Arial" pitchFamily="34" charset="-122"/>
                           <a:cs typeface="Arial" pitchFamily="34" charset="-120"/>
                         </a:rPr>
-                        <a:t>The PhysioNet 2019 winner's method; time enters through fixed summaries</a:t>
+                        <a:t>The PhysioNet 2019 winner's approach, not its full pipeline; time enters through fixed summaries</a:t>
                       </a:r>
                       <a:endParaRPr lang="en-US" sz="1250" dirty="0">
                         <a:latin typeface="Arial" charset="0"/>

--- a/dev/presentation/Elrggal_Mahmoud_SCEBE2026.pptx
+++ b/dev/presentation/Elrggal_Mahmoud_SCEBE2026.pptx
@@ -134,7 +134,7 @@
   <p:extLst>
     <p:ext uri="{521415D9-36F7-43E2-AB2F-B90AF26B5E84}">
       <p14:sectionLst xmlns:p14="http://schemas.microsoft.com/office/powerpoint/2010/main">
-        <p14:section name="Context" id="{c3199a21-2e46-8609-d8ce-2f5e0a2507c7}">
+        <p14:section name="Context" id="{c41f36e5-d2ef-87f7-d5cd-73aa297bfcd9}">
           <p14:sldIdLst>
             <p14:sldId id="256"/>
             <p14:sldId id="257"/>
@@ -143,7 +143,7 @@
             <p14:sldId id="260"/>
           </p14:sldIdLst>
         </p14:section>
-        <p14:section name="Question and approach" id="{9801c369-ee3e-8979-6984-ed3332f21d8e}">
+        <p14:section name="Question and approach" id="{dec547d7-01ec-539d-65c9-e9f325e61cae}">
           <p14:sldIdLst>
             <p14:sldId id="261"/>
             <p14:sldId id="262"/>
@@ -152,24 +152,24 @@
             <p14:sldId id="265"/>
           </p14:sldIdLst>
         </p14:section>
-        <p14:section name="Preliminary results" id="{576fe539-98bc-d1df-6206-8e06c9c77ab7}">
+        <p14:section name="Preliminary results" id="{d56433d4-3b02-e333-5951-dc2bcd3f7140}">
           <p14:sldIdLst>
             <p14:sldId id="266"/>
             <p14:sldId id="267"/>
             <p14:sldId id="268"/>
           </p14:sldIdLst>
         </p14:section>
-        <p14:section name="Contribution and next steps" id="{3174f4de-803b-8bd4-d28c-19bddc9011e0}">
+        <p14:section name="Contribution and next steps" id="{ca19e670-c072-ac69-1a15-4d1dc99b9976}">
           <p14:sldIdLst>
             <p14:sldId id="269"/>
           </p14:sldIdLst>
         </p14:section>
-        <p14:section name="Input" id="{7017ff5d-df12-34e9-91d6-fc8812e0e4b5}">
+        <p14:section name="Input" id="{9bc603d9-9daf-f5ad-232c-a5dff5e706ab}">
           <p14:sldIdLst>
             <p14:sldId id="270"/>
           </p14:sldIdLst>
         </p14:section>
-        <p14:section name="Backup" id="{7e410d07-857b-74c9-5055-fab9545392ae}">
+        <p14:section name="Backup" id="{91e58c41-6b17-37bc-b450-3ad6ce943ece}">
           <p14:sldIdLst>
             <p14:sldId id="271"/>
             <p14:sldId id="272"/>
@@ -632,7 +632,7 @@
                 </a:solidFill>
                 <a:latin typeface="+mn-lt"/>
               </a:rPr>
-              <a:t>Normalised utility: 1 = perfect, 0 = never alarming, below 0 = worse than silence</a:t>
+              <a:t>Normalised utility on identical hours: 1 = perfect, 0 = never alarming (8 of 21 models shown)</a:t>
             </a:r>
           </a:p>
         </c:rich>
@@ -747,26 +747,68 @@
               <a:effectLst/>
             </c:spPr>
           </c:dPt>
+          <c:dPt>
+            <c:idx val="5"/>
+            <c:invertIfNegative val="0"/>
+            <c:bubble3D val="0"/>
+            <c:spPr>
+              <a:solidFill>
+                <a:srgbClr val="C8102E"/>
+              </a:solidFill>
+              <a:effectLst/>
+            </c:spPr>
+          </c:dPt>
+          <c:dPt>
+            <c:idx val="6"/>
+            <c:invertIfNegative val="0"/>
+            <c:bubble3D val="0"/>
+            <c:spPr>
+              <a:solidFill>
+                <a:srgbClr val="C8102E"/>
+              </a:solidFill>
+              <a:effectLst/>
+            </c:spPr>
+          </c:dPt>
+          <c:dPt>
+            <c:idx val="7"/>
+            <c:invertIfNegative val="0"/>
+            <c:bubble3D val="0"/>
+            <c:spPr>
+              <a:solidFill>
+                <a:srgbClr val="C8102E"/>
+              </a:solidFill>
+              <a:effectLst/>
+            </c:spPr>
+          </c:dPt>
           <c:cat>
             <c:multiLvlStrRef>
-              <c:f>Sheet1!$A$2:$A$6</c:f>
+              <c:f>Sheet1!$A$2:$A$9</c:f>
               <c:multiLvlStrCache>
-                <c:ptCount val="5"/>
+                <c:ptCount val="8"/>
                 <c:lvl>
                   <c:pt idx="0">
-                    <c:v>Winner, published: its 2 hospitals</c:v>
+                    <c:v>Logistic regression</c:v>
                   </c:pt>
                   <c:pt idx="1">
-                    <c:v>Winner, published: unseen hospital</c:v>
+                    <c:v>Boosted trees</c:v>
                   </c:pt>
                   <c:pt idx="2">
                     <c:v>Winner's approach, rebuilt here</c:v>
                   </c:pt>
                   <c:pt idx="3">
-                    <c:v>OSTA (this project)</c:v>
+                    <c:v>Temporal CNN</c:v>
                   </c:pt>
                   <c:pt idx="4">
                     <c:v>GRU-D (chosen on validation)</c:v>
+                  </c:pt>
+                  <c:pt idx="5">
+                    <c:v>Flat OSTA (no organ grouping)</c:v>
+                  </c:pt>
+                  <c:pt idx="6">
+                    <c:v>OSTA</c:v>
+                  </c:pt>
+                  <c:pt idx="7">
+                    <c:v>Self-supervised CNN to OSTA</c:v>
                   </c:pt>
                 </c:lvl>
               </c:multiLvlStrCache>
@@ -774,24 +816,33 @@
           </c:cat>
           <c:val>
             <c:numRef>
-              <c:f>Sheet1!$B$2:$B$6</c:f>
+              <c:f>Sheet1!$B$2:$B$9</c:f>
               <c:numCache>
                 <c:formatCode>General</c:formatCode>
-                <c:ptCount val="5"/>
+                <c:ptCount val="8"/>
                 <c:pt idx="0">
-                  <c:v>0.43</c:v>
+                  <c:v>0.08</c:v>
                 </c:pt>
                 <c:pt idx="1">
-                  <c:v>-0.12</c:v>
+                  <c:v>0.1</c:v>
                 </c:pt>
                 <c:pt idx="2">
                   <c:v>0.15</c:v>
                 </c:pt>
                 <c:pt idx="3">
-                  <c:v>0.23</c:v>
+                  <c:v>0.17</c:v>
                 </c:pt>
                 <c:pt idx="4">
                   <c:v>0.19</c:v>
+                </c:pt>
+                <c:pt idx="5">
+                  <c:v>0.23</c:v>
+                </c:pt>
+                <c:pt idx="6">
+                  <c:v>0.23</c:v>
+                </c:pt>
+                <c:pt idx="7">
+                  <c:v>0.29</c:v>
                 </c:pt>
               </c:numCache>
             </c:numRef>
@@ -852,7 +903,7 @@
           <a:lstStyle/>
           <a:p>
             <a:pPr>
-              <a:defRPr sz="1200" b="0" i="0" u="none" strike="noStrike">
+              <a:defRPr sz="1150" b="0" i="0" u="none" strike="noStrike">
                 <a:solidFill>
                   <a:srgbClr val="1B1B1B"/>
                 </a:solidFill>
@@ -872,8 +923,8 @@
         <c:axId val="2094734552"/>
         <c:scaling>
           <c:orientation val="minMax"/>
-          <c:max val="0.6"/>
-          <c:min val="-0.4"/>
+          <c:max val="0.4"/>
+          <c:min val="0"/>
         </c:scaling>
         <c:delete val="0"/>
         <c:axPos val="b"/>
@@ -919,7 +970,7 @@
         <c:crossAx val="2094734554"/>
         <c:crosses val="autoZero"/>
         <c:crossBetween val="between"/>
-        <c:majorUnit val="0.2"/>
+        <c:majorUnit val="0.1"/>
       </c:valAx>
       <c:spPr>
         <a:noFill/>
@@ -2198,7 +2249,7 @@
           <a:p>
             <a:r>
               <a:rPr lang="en-US" dirty="0"/>
-              <a:t>1 min. Grey is the published winner: 0.43 on its own hospitals, minus 0.12 on an unseen one. Dark grey is the winner's approach, path signatures plus boosted trees, rebuilt in our causal pipeline on all our predictors: 0.15. Say clearly: our bars are the counterpart of the 0.43, an internal split, and the same hospital system, because PhysioNet hospital A is Beth Israel Deaconess, the MIMIC-IV hospital. The counterpart of minus 0.12 is the sealed cross-database holdout, not yet opened. Red is this project: OSTA 0.23, and GRU-D, the model the prespecified rule chose on validation, 0.19. All 21 models have positive utility with confidence intervals above zero. The organ grouping did not beat the same model without it at this sample size; that is reported as found. Say: preliminary, one run, development split.</a:t>
+              <a:t>1 min. Eight of the 21 models, all scored on identical hours. Grey: the two baselines, 0.08 and 0.10. Dark grey: the winner's approach, signatures plus boosted trees, in our causal pipeline on all our predictors, 0.15. Red: this project, 0.17 to 0.29. Every one of the 21 is above zero with its interval above zero, under the challenge's scoring rules. Do not call any model best: the differences are within what 71 events can resolve, and paired comparisons on utility have not been run yet. Organ grouping was not supported on validation; the rule shortlisted GRU-D, TCN and flat OSTA. Internal split only: transfer is untested here and the holdout is closed.</a:t>
             </a:r>
             <a:endParaRPr lang="en-US" dirty="0"/>
           </a:p>
@@ -8411,7 +8462,7 @@
                 <a:ea typeface="Arial" pitchFamily="34" charset="-122"/>
                 <a:cs typeface="Arial" pitchFamily="34" charset="-120"/>
               </a:rPr>
-              <a:t>Result 2: removing information from the future is the biggest single correction</a:t>
+              <a:t>Result 2: removing information from the future, and the honest baseline it leaves</a:t>
             </a:r>
             <a:endParaRPr lang="en-US" sz="2600" dirty="0"/>
           </a:p>
@@ -8561,7 +8612,7 @@
                   <a:srgbClr val="1B1B1B"/>
                 </a:solidFill>
               </a:rPr>
-              <a:t>Hours after sepsis onset labelled positive: the model learnt sepsis that had already started.</a:t>
+              <a:t>Hours after onset scored as correct early warnings: recognising sepsis already present counted as predicting it.</a:t>
             </a:r>
             <a:endParaRPr lang="en-US" sz="1400" dirty="0"/>
           </a:p>
@@ -9036,7 +9087,7 @@
                   <a:srgbClr val="1B1B1B"/>
                 </a:solidFill>
               </a:rPr>
-              <a:t>Utility 0.22: the alarms are worth about a fifth of perfect alarms after paying for false alarms.</a:t>
+              <a:t>Utility 0.22: about a fifth of the way from never alarming to perfect alarms, under the challenge's scoring rules; a score, not a measured clinical benefit.</a:t>
             </a:r>
             <a:endParaRPr lang="en-US" sz="1350" dirty="0"/>
           </a:p>
@@ -9298,7 +9349,7 @@
                 <a:ea typeface="Arial" pitchFamily="34" charset="-122"/>
                 <a:cs typeface="Arial" pitchFamily="34" charset="-120"/>
               </a:rPr>
-              <a:t>Result 3: on identical MIMIC-IV hours, all 21 models have positive utility, including the winner's approach</a:t>
+              <a:t>Result 3: on identical MIMIC-IV hours, all 21 models score above zero; none is shown to be best</a:t>
             </a:r>
             <a:endParaRPr lang="en-US" sz="2600" dirty="0"/>
           </a:p>
@@ -9375,7 +9426,7 @@
                   <a:srgbClr val="1B1B1B"/>
                 </a:solidFill>
               </a:rPr>
-              <a:t>Published [15, 21]</a:t>
+              <a:t>Baselines</a:t>
             </a:r>
             <a:endParaRPr lang="en-US" sz="1200" dirty="0"/>
           </a:p>
@@ -9436,7 +9487,7 @@
                   <a:srgbClr val="1B1B1B"/>
                 </a:solidFill>
               </a:rPr>
-              <a:t>Winner's approach, our pipeline</a:t>
+              <a:t>Winner's approach [21]</a:t>
             </a:r>
             <a:endParaRPr lang="en-US" sz="1200" dirty="0"/>
           </a:p>
@@ -9533,7 +9584,7 @@
                   <a:srgbClr val="5E5E5E"/>
                 </a:solidFill>
               </a:rPr>
-              <a:t>Counterpart of the winner's 0.43, not of -0.12: an internal split, and the same hospital system (PhysioNet hospital A is Beth Israel Deaconess, the MIMIC-IV hospital) [15]. The transfer test is the sealed holdout, still closed.</a:t>
+              <a:t>Internal MIMIC-IV test split. No model is shown to be better than another: the differences are within what 71 events can resolve. Transfer to another hospital system is untested here; the sealed holdout is still closed.</a:t>
             </a:r>
             <a:endParaRPr lang="en-US" sz="1000" dirty="0"/>
           </a:p>
@@ -9954,7 +10005,7 @@
                   <a:srgbClr val="5E5E5E"/>
                 </a:solidFill>
               </a:rPr>
-              <a:t>Rules fixed in advance, applied on validation: organ grouping did not beat the same model without it; GRU-D, TCN and flat OSTA shortlisted. Validation and test rankings disagree, so the full cohort decides.</a:t>
+              <a:t>Rules fixed in advance, applied on validation: organ grouping did not beat the same model without it; GRU-D, TCN and flat OSTA shortlisted. Validation and test rankings disagree; the full cohort will narrow the uncertainty.</a:t>
             </a:r>
             <a:endParaRPr lang="en-US" sz="1150" dirty="0"/>
           </a:p>
@@ -9990,7 +10041,7 @@
                   <a:srgbClr val="5E5E5E"/>
                 </a:solidFill>
               </a:rPr>
-              <a:t>[15] Reyna et al., Crit Care Med 2020   [21] Morrill et al., Crit Care Med 2020   [41] This work, preliminary, unpublished</a:t>
+              <a:t>[21] Morrill et al., Crit Care Med 2020   [41] This work, preliminary, unpublished</a:t>
             </a:r>
             <a:endParaRPr lang="en-US" sz="950" dirty="0"/>
           </a:p>
@@ -24363,7 +24414,7 @@
                   <a:srgbClr val="1B1B1B"/>
                 </a:solidFill>
               </a:rPr>
-              <a:t>Labels: Sepsis-3 via YAIB / ricu [33, 34]; onset within the next 6 h; post-onset hours excluded; up to 120 h per stay.</a:t>
+              <a:t>Labels: Sepsis-3 via YAIB / ricu [33, 34]; onset within the next 6 h; hours after onset never scored as warnings; up to 120 h per stay.</a:t>
             </a:r>
             <a:endParaRPr lang="en-US" sz="1400" dirty="0"/>
           </a:p>

--- a/dev/presentation/Elrggal_Mahmoud_SCEBE2026.pptx
+++ b/dev/presentation/Elrggal_Mahmoud_SCEBE2026.pptx
@@ -136,7 +136,7 @@
   <p:extLst>
     <p:ext uri="{521415D9-36F7-43E2-AB2F-B90AF26B5E84}">
       <p14:sectionLst xmlns:p14="http://schemas.microsoft.com/office/powerpoint/2010/main">
-        <p14:section name="Context" id="{8e09e19a-7ac4-187b-faab-f00c6243c650}">
+        <p14:section name="Context" id="{3b03f11f-ca15-610c-d5de-086c05a4a83c}">
           <p14:sldIdLst>
             <p14:sldId id="256"/>
             <p14:sldId id="257"/>
@@ -145,7 +145,7 @@
             <p14:sldId id="260"/>
           </p14:sldIdLst>
         </p14:section>
-        <p14:section name="Question and approach" id="{62371bae-b35a-0aee-de8b-d9180943dfc5}">
+        <p14:section name="Question and approach" id="{e02448e3-6c19-5f6d-66ef-b766d1a61505}">
           <p14:sldIdLst>
             <p14:sldId id="261"/>
             <p14:sldId id="262"/>
@@ -154,28 +154,28 @@
             <p14:sldId id="265"/>
           </p14:sldIdLst>
         </p14:section>
-        <p14:section name="Results" id="{896bec22-fbc0-5ae7-4d0e-006d2c8dbbdf}">
+        <p14:section name="Results" id="{66456693-9539-68af-01d6-610ea632acad}">
           <p14:sldIdLst>
             <p14:sldId id="266"/>
           </p14:sldIdLst>
         </p14:section>
-        <p14:section name="Preliminary results" id="{ef19e13d-ecd0-d329-e69b-ab2d8555b664}">
+        <p14:section name="Preliminary results" id="{a85622f1-2db9-85fb-a6d9-2ee5e3ccc535}">
           <p14:sldIdLst>
             <p14:sldId id="267"/>
             <p14:sldId id="268"/>
           </p14:sldIdLst>
         </p14:section>
-        <p14:section name="Contribution and next steps" id="{bd5a7cf2-fee2-d859-06e1-490e0b56d80a}">
+        <p14:section name="Contribution and next steps" id="{12350115-7e16-5055-9531-ecfc6a752440}">
           <p14:sldIdLst>
             <p14:sldId id="269"/>
           </p14:sldIdLst>
         </p14:section>
-        <p14:section name="Take-home" id="{85ce6b96-7b24-ca47-d504-2590f3a5dd26}">
+        <p14:section name="Take-home" id="{b197065e-d0b8-bc29-92f2-12610beb7807}">
           <p14:sldIdLst>
             <p14:sldId id="270"/>
           </p14:sldIdLst>
         </p14:section>
-        <p14:section name="Backup" id="{d05c25ce-81dd-788d-86ba-5531e665e40e}">
+        <p14:section name="Backup" id="{bbbce2e8-9ebd-f761-3886-f529c8f7f93a}">
           <p14:sldIdLst>
             <p14:sldId id="271"/>
             <p14:sldId id="272"/>
@@ -2245,7 +2245,7 @@
           <a:p>
             <a:r>
               <a:rPr lang="en-US" dirty="0"/>
-              <a:t>1 min. Left, own hospital system: the winner at 0.36 official (0.43 on its own hospitals) and this project on MIMIC-IV, 0.08 to 0.29, all above zero, none shown best. Right, unseen hospital system: the winner at minus 0.12; this project, MIMIC-IV models on eICU patients, about zero with intervals including zero. Say it plainly: at home every model keeps a positive utility; away, we are not below silence but not above it either, and the sealed holdout decides. Organ grouping not supported on validation; rule-chosen shortlist GRU-D, TCN, flat OSTA.</a:t>
+              <a:t>1 min. Left, own hospital system: the winner at 0.36 official (0.43 on its own hospitals) and this project on MIMIC-IV, 0.08 to 0.29, all above zero, none shown best. Right, unseen hospital system: the winner at minus 0.12; this project, the same eight models trained on MIMIC-IV and scored on eICU patients, minus 0.15 (logistic) to plus 0.04, about zero. The pink band is eICU's own models trained on eICU itself: 0.00 to 0.08 on the same 45 events. Say it plainly: at home on MIMIC-IV every model keeps a positive utility; on eICU, away and at home coincide near zero, so the problem there is the sample and the label as much as transfer, and the full cohort and the sealed holdout decide. Organ grouping not supported on either database; shortlists GRU-D, TCN, flat OSTA (MIMIC-IV) and GRU-D, flat OSTA, pooled self-supervised flat CNN (eICU).</a:t>
             </a:r>
             <a:endParaRPr lang="en-US" dirty="0"/>
           </a:p>
@@ -13350,7 +13350,7 @@
                   <a:srgbClr val="5E5E5E"/>
                 </a:solidFill>
               </a:rPr>
-              <a:t>the winner on a hidden third hospital; this project: MIMIC-IV models scored on eICU patients, development level</a:t>
+              <a:t>the winner on a hidden third hospital; this project: MIMIC-IV models scored on eICU patients (888 stays, 45 events), development level</a:t>
             </a:r>
             <a:endParaRPr lang="en-US" sz="1000" dirty="0"/>
           </a:p>
@@ -13364,8 +13364,8 @@
         </p:nvSpPr>
         <p:spPr>
           <a:xfrm>
-            <a:off x="9052560" y="4572000"/>
-            <a:ext cx="2361895" cy="914"/>
+            <a:off x="9098280" y="5029200"/>
+            <a:ext cx="2316175" cy="914"/>
           </a:xfrm>
           <a:prstGeom prst="line">
             <a:avLst/>
@@ -13387,7 +13387,7 @@
         </p:nvSpPr>
         <p:spPr>
           <a:xfrm>
-            <a:off x="9052560" y="4572000"/>
+            <a:off x="9098280" y="5029200"/>
             <a:ext cx="914" cy="73152"/>
           </a:xfrm>
           <a:prstGeom prst="line">
@@ -13410,7 +13410,7 @@
         </p:nvSpPr>
         <p:spPr>
           <a:xfrm>
-            <a:off x="8778240" y="4645152"/>
+            <a:off x="8823960" y="5084064"/>
             <a:ext cx="548640" cy="201168"/>
           </a:xfrm>
           <a:prstGeom prst="rect">
@@ -13427,14 +13427,14 @@
               <a:buNone/>
             </a:pPr>
             <a:r>
-              <a:rPr lang="en-US" sz="950" dirty="0">
+              <a:rPr lang="en-US" sz="900" dirty="0">
                 <a:solidFill>
                   <a:srgbClr val="5E5E5E"/>
                 </a:solidFill>
               </a:rPr>
               <a:t>-0.2</a:t>
             </a:r>
-            <a:endParaRPr lang="en-US" sz="950" dirty="0"/>
+            <a:endParaRPr lang="en-US" sz="900" dirty="0"/>
           </a:p>
         </p:txBody>
       </p:sp>
@@ -13446,7 +13446,7 @@
         </p:nvSpPr>
         <p:spPr>
           <a:xfrm>
-            <a:off x="9790652" y="4572000"/>
+            <a:off x="9822085" y="5029200"/>
             <a:ext cx="914" cy="73152"/>
           </a:xfrm>
           <a:prstGeom prst="line">
@@ -13469,7 +13469,7 @@
         </p:nvSpPr>
         <p:spPr>
           <a:xfrm>
-            <a:off x="9516332" y="4645152"/>
+            <a:off x="9547765" y="5084064"/>
             <a:ext cx="548640" cy="201168"/>
           </a:xfrm>
           <a:prstGeom prst="rect">
@@ -13486,14 +13486,14 @@
               <a:buNone/>
             </a:pPr>
             <a:r>
-              <a:rPr lang="en-US" sz="950" dirty="0">
+              <a:rPr lang="en-US" sz="900" dirty="0">
                 <a:solidFill>
                   <a:srgbClr val="5E5E5E"/>
                 </a:solidFill>
               </a:rPr>
               <a:t>-0.1</a:t>
             </a:r>
-            <a:endParaRPr lang="en-US" sz="950" dirty="0"/>
+            <a:endParaRPr lang="en-US" sz="900" dirty="0"/>
           </a:p>
         </p:txBody>
       </p:sp>
@@ -13505,7 +13505,7 @@
         </p:nvSpPr>
         <p:spPr>
           <a:xfrm>
-            <a:off x="10528745" y="4572000"/>
+            <a:off x="10545890" y="5029200"/>
             <a:ext cx="914" cy="73152"/>
           </a:xfrm>
           <a:prstGeom prst="line">
@@ -13528,7 +13528,7 @@
         </p:nvSpPr>
         <p:spPr>
           <a:xfrm>
-            <a:off x="10254425" y="4645152"/>
+            <a:off x="10271570" y="5084064"/>
             <a:ext cx="548640" cy="201168"/>
           </a:xfrm>
           <a:prstGeom prst="rect">
@@ -13545,14 +13545,14 @@
               <a:buNone/>
             </a:pPr>
             <a:r>
-              <a:rPr lang="en-US" sz="950" dirty="0">
+              <a:rPr lang="en-US" sz="900" dirty="0">
                 <a:solidFill>
                   <a:srgbClr val="5E5E5E"/>
                 </a:solidFill>
               </a:rPr>
               <a:t>0.0</a:t>
             </a:r>
-            <a:endParaRPr lang="en-US" sz="950" dirty="0"/>
+            <a:endParaRPr lang="en-US" sz="900" dirty="0"/>
           </a:p>
         </p:txBody>
       </p:sp>
@@ -13564,7 +13564,7 @@
         </p:nvSpPr>
         <p:spPr>
           <a:xfrm>
-            <a:off x="11266837" y="4572000"/>
+            <a:off x="11269694" y="5029200"/>
             <a:ext cx="914" cy="73152"/>
           </a:xfrm>
           <a:prstGeom prst="line">
@@ -13587,7 +13587,7 @@
         </p:nvSpPr>
         <p:spPr>
           <a:xfrm>
-            <a:off x="10992517" y="4645152"/>
+            <a:off x="10995374" y="5084064"/>
             <a:ext cx="548640" cy="201168"/>
           </a:xfrm>
           <a:prstGeom prst="rect">
@@ -13604,14 +13604,14 @@
               <a:buNone/>
             </a:pPr>
             <a:r>
-              <a:rPr lang="en-US" sz="950" dirty="0">
+              <a:rPr lang="en-US" sz="900" dirty="0">
                 <a:solidFill>
                   <a:srgbClr val="5E5E5E"/>
                 </a:solidFill>
               </a:rPr>
               <a:t>0.1</a:t>
             </a:r>
-            <a:endParaRPr lang="en-US" sz="950" dirty="0"/>
+            <a:endParaRPr lang="en-US" sz="900" dirty="0"/>
           </a:p>
         </p:txBody>
       </p:sp>
@@ -13623,8 +13623,8 @@
         </p:nvSpPr>
         <p:spPr>
           <a:xfrm>
-            <a:off x="10528745" y="2286000"/>
-            <a:ext cx="914" cy="2286000"/>
+            <a:off x="10545890" y="2176272"/>
+            <a:ext cx="914" cy="2852928"/>
           </a:xfrm>
           <a:prstGeom prst="line">
             <a:avLst/>
@@ -13646,8 +13646,8 @@
         </p:nvSpPr>
         <p:spPr>
           <a:xfrm>
-            <a:off x="7543800" y="2377440"/>
-            <a:ext cx="1463040" cy="274320"/>
+            <a:off x="7516368" y="2212848"/>
+            <a:ext cx="1554480" cy="237744"/>
           </a:xfrm>
           <a:prstGeom prst="rect">
             <a:avLst/>
@@ -13663,14 +13663,14 @@
               <a:buNone/>
             </a:pPr>
             <a:r>
-              <a:rPr lang="en-US" sz="1000" b="1" dirty="0">
+              <a:rPr lang="en-US" sz="950" b="1" dirty="0">
                 <a:solidFill>
                   <a:srgbClr val="1B1B1B"/>
                 </a:solidFill>
               </a:rPr>
               <a:t>Winner, published</a:t>
             </a:r>
-            <a:endParaRPr lang="en-US" sz="1000" dirty="0"/>
+            <a:endParaRPr lang="en-US" sz="950" dirty="0"/>
           </a:p>
         </p:txBody>
       </p:sp>
@@ -13682,8 +13682,8 @@
         </p:nvSpPr>
         <p:spPr>
           <a:xfrm>
-            <a:off x="9643034" y="2414016"/>
-            <a:ext cx="885711" cy="201168"/>
+            <a:off x="9677324" y="2249424"/>
+            <a:ext cx="868566" cy="164592"/>
           </a:xfrm>
           <a:prstGeom prst="rect">
             <a:avLst/>
@@ -13707,8 +13707,8 @@
         </p:nvSpPr>
         <p:spPr>
           <a:xfrm>
-            <a:off x="11432743" y="2377440"/>
-            <a:ext cx="868680" cy="274320"/>
+            <a:off x="11432743" y="2212848"/>
+            <a:ext cx="731520" cy="237744"/>
           </a:xfrm>
           <a:prstGeom prst="rect">
             <a:avLst/>
@@ -13724,14 +13724,14 @@
               <a:buNone/>
             </a:pPr>
             <a:r>
-              <a:rPr lang="en-US" sz="950" b="1" dirty="0">
+              <a:rPr lang="en-US" sz="900" b="1" dirty="0">
                 <a:solidFill>
                   <a:srgbClr val="1B1B1B"/>
                 </a:solidFill>
               </a:rPr>
               <a:t>-0.12</a:t>
             </a:r>
-            <a:endParaRPr lang="en-US" sz="950" dirty="0"/>
+            <a:endParaRPr lang="en-US" sz="900" dirty="0"/>
           </a:p>
         </p:txBody>
       </p:sp>
@@ -13743,8 +13743,8 @@
         </p:nvSpPr>
         <p:spPr>
           <a:xfrm>
-            <a:off x="7543800" y="2807208"/>
-            <a:ext cx="1463040" cy="274320"/>
+            <a:off x="7516368" y="2487168"/>
+            <a:ext cx="1554480" cy="237744"/>
           </a:xfrm>
           <a:prstGeom prst="rect">
             <a:avLst/>
@@ -13760,27 +13760,341 @@
               <a:buNone/>
             </a:pPr>
             <a:r>
-              <a:rPr lang="en-US" sz="1000" b="1" dirty="0">
+              <a:rPr lang="en-US" sz="950" dirty="0">
                 <a:solidFill>
                   <a:srgbClr val="1B1B1B"/>
                 </a:solidFill>
               </a:rPr>
-              <a:t>This project, 20 models</a:t>
-            </a:r>
-            <a:endParaRPr lang="en-US" sz="1000" dirty="0"/>
-          </a:p>
-        </p:txBody>
-      </p:sp>
-      <p:sp>
-        <p:nvSpPr>
-          <p:cNvPr id="36" name="range band"/>
+              <a:t>Logistic regression</a:t>
+            </a:r>
+            <a:endParaRPr lang="en-US" sz="950" dirty="0"/>
+          </a:p>
+        </p:txBody>
+      </p:sp>
+      <p:sp>
+        <p:nvSpPr>
+          <p:cNvPr id="36" name="bar"/>
           <p:cNvSpPr/>
           <p:nvPr/>
         </p:nvSpPr>
         <p:spPr>
           <a:xfrm>
-            <a:off x="10307317" y="2843784"/>
-            <a:ext cx="516665" cy="201168"/>
+            <a:off x="9460182" y="2523744"/>
+            <a:ext cx="1085707" cy="164592"/>
+          </a:xfrm>
+          <a:prstGeom prst="rect">
+            <a:avLst/>
+          </a:prstGeom>
+          <a:solidFill>
+            <a:srgbClr val="8C8C8C"/>
+          </a:solidFill>
+          <a:ln w="12700">
+            <a:solidFill>
+              <a:srgbClr val="8C8C8C"/>
+            </a:solidFill>
+            <a:prstDash val="solid"/>
+          </a:ln>
+        </p:spPr>
+      </p:sp>
+      <p:sp>
+        <p:nvSpPr>
+          <p:cNvPr id="37" name="text"/>
+          <p:cNvSpPr txBox="1"/>
+          <p:nvPr/>
+        </p:nvSpPr>
+        <p:spPr>
+          <a:xfrm>
+            <a:off x="11432743" y="2487168"/>
+            <a:ext cx="731520" cy="237744"/>
+          </a:xfrm>
+          <a:prstGeom prst="rect">
+            <a:avLst/>
+          </a:prstGeom>
+          <a:noFill/>
+          <a:ln/>
+        </p:spPr>
+        <p:txBody>
+          <a:bodyPr wrap="square" lIns="0" tIns="0" rIns="0" bIns="0" rtlCol="0" anchor="ctr"/>
+          <a:lstStyle/>
+          <a:p>
+            <a:pPr algn="l" indent="0" marL="0">
+              <a:buNone/>
+            </a:pPr>
+            <a:r>
+              <a:rPr lang="en-US" sz="900" b="1" dirty="0">
+                <a:solidFill>
+                  <a:srgbClr val="C8102E"/>
+                </a:solidFill>
+              </a:rPr>
+              <a:t>-0.15</a:t>
+            </a:r>
+            <a:endParaRPr lang="en-US" sz="900" dirty="0"/>
+          </a:p>
+        </p:txBody>
+      </p:sp>
+      <p:sp>
+        <p:nvSpPr>
+          <p:cNvPr id="38" name="text"/>
+          <p:cNvSpPr txBox="1"/>
+          <p:nvPr/>
+        </p:nvSpPr>
+        <p:spPr>
+          <a:xfrm>
+            <a:off x="7516368" y="2761488"/>
+            <a:ext cx="1554480" cy="237744"/>
+          </a:xfrm>
+          <a:prstGeom prst="rect">
+            <a:avLst/>
+          </a:prstGeom>
+          <a:noFill/>
+          <a:ln/>
+        </p:spPr>
+        <p:txBody>
+          <a:bodyPr wrap="square" lIns="0" tIns="0" rIns="0" bIns="0" rtlCol="0" anchor="ctr"/>
+          <a:lstStyle/>
+          <a:p>
+            <a:pPr algn="l" indent="0" marL="0">
+              <a:buNone/>
+            </a:pPr>
+            <a:r>
+              <a:rPr lang="en-US" sz="950" dirty="0">
+                <a:solidFill>
+                  <a:srgbClr val="1B1B1B"/>
+                </a:solidFill>
+              </a:rPr>
+              <a:t>Boosted trees</a:t>
+            </a:r>
+            <a:endParaRPr lang="en-US" sz="950" dirty="0"/>
+          </a:p>
+        </p:txBody>
+      </p:sp>
+      <p:sp>
+        <p:nvSpPr>
+          <p:cNvPr id="39" name="ci"/>
+          <p:cNvSpPr/>
+          <p:nvPr/>
+        </p:nvSpPr>
+        <p:spPr>
+          <a:xfrm>
+            <a:off x="10545890" y="2880360"/>
+            <a:ext cx="217141" cy="914"/>
+          </a:xfrm>
+          <a:prstGeom prst="line">
+            <a:avLst/>
+          </a:prstGeom>
+          <a:noFill/>
+          <a:ln w="19050">
+            <a:solidFill>
+              <a:srgbClr val="8C8C8C"/>
+            </a:solidFill>
+            <a:prstDash val="solid"/>
+          </a:ln>
+        </p:spPr>
+      </p:sp>
+      <p:sp>
+        <p:nvSpPr>
+          <p:cNvPr id="40" name="point"/>
+          <p:cNvSpPr/>
+          <p:nvPr/>
+        </p:nvSpPr>
+        <p:spPr>
+          <a:xfrm>
+            <a:off x="10572550" y="2834640"/>
+            <a:ext cx="91440" cy="91440"/>
+          </a:xfrm>
+          <a:prstGeom prst="rect">
+            <a:avLst/>
+          </a:prstGeom>
+          <a:solidFill>
+            <a:srgbClr val="8C8C8C"/>
+          </a:solidFill>
+          <a:ln w="12700">
+            <a:solidFill>
+              <a:srgbClr val="8C8C8C"/>
+            </a:solidFill>
+            <a:prstDash val="solid"/>
+          </a:ln>
+        </p:spPr>
+      </p:sp>
+      <p:sp>
+        <p:nvSpPr>
+          <p:cNvPr id="41" name="text"/>
+          <p:cNvSpPr txBox="1"/>
+          <p:nvPr/>
+        </p:nvSpPr>
+        <p:spPr>
+          <a:xfrm>
+            <a:off x="11432743" y="2761488"/>
+            <a:ext cx="731520" cy="237744"/>
+          </a:xfrm>
+          <a:prstGeom prst="rect">
+            <a:avLst/>
+          </a:prstGeom>
+          <a:noFill/>
+          <a:ln/>
+        </p:spPr>
+        <p:txBody>
+          <a:bodyPr wrap="square" lIns="0" tIns="0" rIns="0" bIns="0" rtlCol="0" anchor="ctr"/>
+          <a:lstStyle/>
+          <a:p>
+            <a:pPr algn="l" indent="0" marL="0">
+              <a:buNone/>
+            </a:pPr>
+            <a:r>
+              <a:rPr lang="en-US" sz="900" b="1" dirty="0">
+                <a:solidFill>
+                  <a:srgbClr val="C8102E"/>
+                </a:solidFill>
+              </a:rPr>
+              <a:t>0.01</a:t>
+            </a:r>
+            <a:endParaRPr lang="en-US" sz="900" dirty="0"/>
+          </a:p>
+        </p:txBody>
+      </p:sp>
+      <p:sp>
+        <p:nvSpPr>
+          <p:cNvPr id="42" name="text"/>
+          <p:cNvSpPr txBox="1"/>
+          <p:nvPr/>
+        </p:nvSpPr>
+        <p:spPr>
+          <a:xfrm>
+            <a:off x="7516368" y="3035808"/>
+            <a:ext cx="1554480" cy="237744"/>
+          </a:xfrm>
+          <a:prstGeom prst="rect">
+            <a:avLst/>
+          </a:prstGeom>
+          <a:noFill/>
+          <a:ln/>
+        </p:spPr>
+        <p:txBody>
+          <a:bodyPr wrap="square" lIns="0" tIns="0" rIns="0" bIns="0" rtlCol="0" anchor="ctr"/>
+          <a:lstStyle/>
+          <a:p>
+            <a:pPr algn="l" indent="0" marL="0">
+              <a:buNone/>
+            </a:pPr>
+            <a:r>
+              <a:rPr lang="en-US" sz="950" dirty="0">
+                <a:solidFill>
+                  <a:srgbClr val="1B1B1B"/>
+                </a:solidFill>
+              </a:rPr>
+              <a:t>Winner's approach</a:t>
+            </a:r>
+            <a:endParaRPr lang="en-US" sz="950" dirty="0"/>
+          </a:p>
+        </p:txBody>
+      </p:sp>
+      <p:sp>
+        <p:nvSpPr>
+          <p:cNvPr id="43" name="bar"/>
+          <p:cNvSpPr/>
+          <p:nvPr/>
+        </p:nvSpPr>
+        <p:spPr>
+          <a:xfrm>
+            <a:off x="10545890" y="3072384"/>
+            <a:ext cx="144761" cy="164592"/>
+          </a:xfrm>
+          <a:prstGeom prst="rect">
+            <a:avLst/>
+          </a:prstGeom>
+          <a:solidFill>
+            <a:srgbClr val="3A3A3A"/>
+          </a:solidFill>
+          <a:ln w="12700">
+            <a:solidFill>
+              <a:srgbClr val="3A3A3A"/>
+            </a:solidFill>
+            <a:prstDash val="solid"/>
+          </a:ln>
+        </p:spPr>
+      </p:sp>
+      <p:sp>
+        <p:nvSpPr>
+          <p:cNvPr id="44" name="text"/>
+          <p:cNvSpPr txBox="1"/>
+          <p:nvPr/>
+        </p:nvSpPr>
+        <p:spPr>
+          <a:xfrm>
+            <a:off x="11432743" y="3035808"/>
+            <a:ext cx="731520" cy="237744"/>
+          </a:xfrm>
+          <a:prstGeom prst="rect">
+            <a:avLst/>
+          </a:prstGeom>
+          <a:noFill/>
+          <a:ln/>
+        </p:spPr>
+        <p:txBody>
+          <a:bodyPr wrap="square" lIns="0" tIns="0" rIns="0" bIns="0" rtlCol="0" anchor="ctr"/>
+          <a:lstStyle/>
+          <a:p>
+            <a:pPr algn="l" indent="0" marL="0">
+              <a:buNone/>
+            </a:pPr>
+            <a:r>
+              <a:rPr lang="en-US" sz="900" b="1" dirty="0">
+                <a:solidFill>
+                  <a:srgbClr val="C8102E"/>
+                </a:solidFill>
+              </a:rPr>
+              <a:t>0.02</a:t>
+            </a:r>
+            <a:endParaRPr lang="en-US" sz="900" dirty="0"/>
+          </a:p>
+        </p:txBody>
+      </p:sp>
+      <p:sp>
+        <p:nvSpPr>
+          <p:cNvPr id="45" name="text"/>
+          <p:cNvSpPr txBox="1"/>
+          <p:nvPr/>
+        </p:nvSpPr>
+        <p:spPr>
+          <a:xfrm>
+            <a:off x="7516368" y="3310128"/>
+            <a:ext cx="1554480" cy="237744"/>
+          </a:xfrm>
+          <a:prstGeom prst="rect">
+            <a:avLst/>
+          </a:prstGeom>
+          <a:noFill/>
+          <a:ln/>
+        </p:spPr>
+        <p:txBody>
+          <a:bodyPr wrap="square" lIns="0" tIns="0" rIns="0" bIns="0" rtlCol="0" anchor="ctr"/>
+          <a:lstStyle/>
+          <a:p>
+            <a:pPr algn="l" indent="0" marL="0">
+              <a:buNone/>
+            </a:pPr>
+            <a:r>
+              <a:rPr lang="en-US" sz="950" dirty="0">
+                <a:solidFill>
+                  <a:srgbClr val="1B1B1B"/>
+                </a:solidFill>
+              </a:rPr>
+              <a:t>Temporal CNN</a:t>
+            </a:r>
+            <a:endParaRPr lang="en-US" sz="950" dirty="0"/>
+          </a:p>
+        </p:txBody>
+      </p:sp>
+      <p:sp>
+        <p:nvSpPr>
+          <p:cNvPr id="46" name="bar"/>
+          <p:cNvSpPr/>
+          <p:nvPr/>
+        </p:nvSpPr>
+        <p:spPr>
+          <a:xfrm>
+            <a:off x="10545890" y="3346704"/>
+            <a:ext cx="72380" cy="164592"/>
           </a:xfrm>
           <a:prstGeom prst="rect">
             <a:avLst/>
@@ -13798,14 +14112,14 @@
       </p:sp>
       <p:sp>
         <p:nvSpPr>
-          <p:cNvPr id="37" name="text"/>
+          <p:cNvPr id="47" name="text"/>
           <p:cNvSpPr txBox="1"/>
           <p:nvPr/>
         </p:nvSpPr>
         <p:spPr>
           <a:xfrm>
-            <a:off x="11432743" y="2807208"/>
-            <a:ext cx="868680" cy="274320"/>
+            <a:off x="11432743" y="3310128"/>
+            <a:ext cx="731520" cy="237744"/>
           </a:xfrm>
           <a:prstGeom prst="rect">
             <a:avLst/>
@@ -13821,12 +14135,48 @@
               <a:buNone/>
             </a:pPr>
             <a:r>
-              <a:rPr lang="en-US" sz="950" b="1" dirty="0">
+              <a:rPr lang="en-US" sz="900" b="1" dirty="0">
                 <a:solidFill>
                   <a:srgbClr val="C8102E"/>
                 </a:solidFill>
               </a:rPr>
-              <a:t>-0.03 to +0.04</a:t>
+              <a:t>0.01</a:t>
+            </a:r>
+            <a:endParaRPr lang="en-US" sz="900" dirty="0"/>
+          </a:p>
+        </p:txBody>
+      </p:sp>
+      <p:sp>
+        <p:nvSpPr>
+          <p:cNvPr id="48" name="text"/>
+          <p:cNvSpPr txBox="1"/>
+          <p:nvPr/>
+        </p:nvSpPr>
+        <p:spPr>
+          <a:xfrm>
+            <a:off x="7516368" y="3584448"/>
+            <a:ext cx="1554480" cy="237744"/>
+          </a:xfrm>
+          <a:prstGeom prst="rect">
+            <a:avLst/>
+          </a:prstGeom>
+          <a:noFill/>
+          <a:ln/>
+        </p:spPr>
+        <p:txBody>
+          <a:bodyPr wrap="square" lIns="0" tIns="0" rIns="0" bIns="0" rtlCol="0" anchor="ctr"/>
+          <a:lstStyle/>
+          <a:p>
+            <a:pPr algn="l" indent="0" marL="0">
+              <a:buNone/>
+            </a:pPr>
+            <a:r>
+              <a:rPr lang="en-US" sz="950" dirty="0">
+                <a:solidFill>
+                  <a:srgbClr val="1B1B1B"/>
+                </a:solidFill>
+              </a:rPr>
+              <a:t>GRU-D</a:t>
             </a:r>
             <a:endParaRPr lang="en-US" sz="950" dirty="0"/>
           </a:p>
@@ -13834,50 +14184,14 @@
       </p:sp>
       <p:sp>
         <p:nvSpPr>
-          <p:cNvPr id="38" name="text"/>
-          <p:cNvSpPr txBox="1"/>
-          <p:nvPr/>
-        </p:nvSpPr>
-        <p:spPr>
-          <a:xfrm>
-            <a:off x="7543800" y="3236976"/>
-            <a:ext cx="1463040" cy="274320"/>
-          </a:xfrm>
-          <a:prstGeom prst="rect">
-            <a:avLst/>
-          </a:prstGeom>
-          <a:noFill/>
-          <a:ln/>
-        </p:spPr>
-        <p:txBody>
-          <a:bodyPr wrap="square" lIns="0" tIns="0" rIns="0" bIns="0" rtlCol="0" anchor="ctr"/>
-          <a:lstStyle/>
-          <a:p>
-            <a:pPr algn="l" indent="0" marL="0">
-              <a:buNone/>
-            </a:pPr>
-            <a:r>
-              <a:rPr lang="en-US" sz="1000" dirty="0">
-                <a:solidFill>
-                  <a:srgbClr val="1B1B1B"/>
-                </a:solidFill>
-              </a:rPr>
-              <a:t>GRU-D</a:t>
-            </a:r>
-            <a:endParaRPr lang="en-US" sz="1000" dirty="0"/>
-          </a:p>
-        </p:txBody>
-      </p:sp>
-      <p:sp>
-        <p:nvSpPr>
-          <p:cNvPr id="39" name="ci"/>
+          <p:cNvPr id="49" name="ci"/>
           <p:cNvSpPr/>
           <p:nvPr/>
         </p:nvSpPr>
         <p:spPr>
           <a:xfrm>
-            <a:off x="10233508" y="3374136"/>
-            <a:ext cx="738092" cy="914"/>
+            <a:off x="10256368" y="3703320"/>
+            <a:ext cx="723805" cy="914"/>
           </a:xfrm>
           <a:prstGeom prst="line">
             <a:avLst/>
@@ -13893,13 +14207,13 @@
       </p:sp>
       <p:sp>
         <p:nvSpPr>
-          <p:cNvPr id="40" name="point"/>
+          <p:cNvPr id="50" name="point"/>
           <p:cNvSpPr/>
           <p:nvPr/>
         </p:nvSpPr>
         <p:spPr>
           <a:xfrm>
-            <a:off x="10556834" y="3328416"/>
+            <a:off x="10572550" y="3657600"/>
             <a:ext cx="91440" cy="91440"/>
           </a:xfrm>
           <a:prstGeom prst="rect">
@@ -13918,14 +14232,14 @@
       </p:sp>
       <p:sp>
         <p:nvSpPr>
-          <p:cNvPr id="41" name="text"/>
+          <p:cNvPr id="51" name="text"/>
           <p:cNvSpPr txBox="1"/>
           <p:nvPr/>
         </p:nvSpPr>
         <p:spPr>
           <a:xfrm>
-            <a:off x="11432743" y="3236976"/>
-            <a:ext cx="868680" cy="274320"/>
+            <a:off x="11432743" y="3584448"/>
+            <a:ext cx="731520" cy="237744"/>
           </a:xfrm>
           <a:prstGeom prst="rect">
             <a:avLst/>
@@ -13941,86 +14255,63 @@
               <a:buNone/>
             </a:pPr>
             <a:r>
-              <a:rPr lang="en-US" sz="950" b="1" dirty="0">
+              <a:rPr lang="en-US" sz="900" b="1" dirty="0">
                 <a:solidFill>
                   <a:srgbClr val="C8102E"/>
                 </a:solidFill>
               </a:rPr>
               <a:t>0.01</a:t>
             </a:r>
+            <a:endParaRPr lang="en-US" sz="900" dirty="0"/>
+          </a:p>
+        </p:txBody>
+      </p:sp>
+      <p:sp>
+        <p:nvSpPr>
+          <p:cNvPr id="52" name="text"/>
+          <p:cNvSpPr txBox="1"/>
+          <p:nvPr/>
+        </p:nvSpPr>
+        <p:spPr>
+          <a:xfrm>
+            <a:off x="7516368" y="3858768"/>
+            <a:ext cx="1554480" cy="237744"/>
+          </a:xfrm>
+          <a:prstGeom prst="rect">
+            <a:avLst/>
+          </a:prstGeom>
+          <a:noFill/>
+          <a:ln/>
+        </p:spPr>
+        <p:txBody>
+          <a:bodyPr wrap="square" lIns="0" tIns="0" rIns="0" bIns="0" rtlCol="0" anchor="ctr"/>
+          <a:lstStyle/>
+          <a:p>
+            <a:pPr algn="l" indent="0" marL="0">
+              <a:buNone/>
+            </a:pPr>
+            <a:r>
+              <a:rPr lang="en-US" sz="950" dirty="0">
+                <a:solidFill>
+                  <a:srgbClr val="1B1B1B"/>
+                </a:solidFill>
+              </a:rPr>
+              <a:t>Flat OSTA</a:t>
+            </a:r>
             <a:endParaRPr lang="en-US" sz="950" dirty="0"/>
           </a:p>
         </p:txBody>
       </p:sp>
       <p:sp>
         <p:nvSpPr>
-          <p:cNvPr id="42" name="text"/>
-          <p:cNvSpPr txBox="1"/>
-          <p:nvPr/>
-        </p:nvSpPr>
-        <p:spPr>
-          <a:xfrm>
-            <a:off x="7543800" y="3666744"/>
-            <a:ext cx="1463040" cy="274320"/>
-          </a:xfrm>
-          <a:prstGeom prst="rect">
-            <a:avLst/>
-          </a:prstGeom>
-          <a:noFill/>
-          <a:ln/>
-        </p:spPr>
-        <p:txBody>
-          <a:bodyPr wrap="square" lIns="0" tIns="0" rIns="0" bIns="0" rtlCol="0" anchor="ctr"/>
-          <a:lstStyle/>
-          <a:p>
-            <a:pPr algn="l" indent="0" marL="0">
-              <a:buNone/>
-            </a:pPr>
-            <a:r>
-              <a:rPr lang="en-US" sz="1000" dirty="0">
-                <a:solidFill>
-                  <a:srgbClr val="1B1B1B"/>
-                </a:solidFill>
-              </a:rPr>
-              <a:t>CNN to OSTA</a:t>
-            </a:r>
-            <a:endParaRPr lang="en-US" sz="1000" dirty="0"/>
-          </a:p>
-        </p:txBody>
-      </p:sp>
-      <p:sp>
-        <p:nvSpPr>
-          <p:cNvPr id="43" name="ci"/>
+          <p:cNvPr id="53" name="bar"/>
           <p:cNvSpPr/>
           <p:nvPr/>
         </p:nvSpPr>
         <p:spPr>
           <a:xfrm>
-            <a:off x="10454935" y="3803904"/>
-            <a:ext cx="369046" cy="914"/>
-          </a:xfrm>
-          <a:prstGeom prst="line">
-            <a:avLst/>
-          </a:prstGeom>
-          <a:noFill/>
-          <a:ln w="19050">
-            <a:solidFill>
-              <a:srgbClr val="C8102E"/>
-            </a:solidFill>
-            <a:prstDash val="solid"/>
-          </a:ln>
-        </p:spPr>
-      </p:sp>
-      <p:sp>
-        <p:nvSpPr>
-          <p:cNvPr id="44" name="point"/>
-          <p:cNvSpPr/>
-          <p:nvPr/>
-        </p:nvSpPr>
-        <p:spPr>
-          <a:xfrm>
-            <a:off x="10630643" y="3758184"/>
-            <a:ext cx="91440" cy="91440"/>
+            <a:off x="10545890" y="3895344"/>
+            <a:ext cx="217141" cy="164592"/>
           </a:xfrm>
           <a:prstGeom prst="rect">
             <a:avLst/>
@@ -14038,14 +14329,14 @@
       </p:sp>
       <p:sp>
         <p:nvSpPr>
-          <p:cNvPr id="45" name="text"/>
+          <p:cNvPr id="54" name="text"/>
           <p:cNvSpPr txBox="1"/>
           <p:nvPr/>
         </p:nvSpPr>
         <p:spPr>
           <a:xfrm>
-            <a:off x="11432743" y="3666744"/>
-            <a:ext cx="868680" cy="274320"/>
+            <a:off x="11432743" y="3858768"/>
+            <a:ext cx="731520" cy="237744"/>
           </a:xfrm>
           <a:prstGeom prst="rect">
             <a:avLst/>
@@ -14061,12 +14352,48 @@
               <a:buNone/>
             </a:pPr>
             <a:r>
-              <a:rPr lang="en-US" sz="950" b="1" dirty="0">
+              <a:rPr lang="en-US" sz="900" b="1" dirty="0">
                 <a:solidFill>
                   <a:srgbClr val="C8102E"/>
                 </a:solidFill>
               </a:rPr>
-              <a:t>0.02</a:t>
+              <a:t>0.03</a:t>
+            </a:r>
+            <a:endParaRPr lang="en-US" sz="900" dirty="0"/>
+          </a:p>
+        </p:txBody>
+      </p:sp>
+      <p:sp>
+        <p:nvSpPr>
+          <p:cNvPr id="55" name="text"/>
+          <p:cNvSpPr txBox="1"/>
+          <p:nvPr/>
+        </p:nvSpPr>
+        <p:spPr>
+          <a:xfrm>
+            <a:off x="7516368" y="4133088"/>
+            <a:ext cx="1554480" cy="237744"/>
+          </a:xfrm>
+          <a:prstGeom prst="rect">
+            <a:avLst/>
+          </a:prstGeom>
+          <a:noFill/>
+          <a:ln/>
+        </p:spPr>
+        <p:txBody>
+          <a:bodyPr wrap="square" lIns="0" tIns="0" rIns="0" bIns="0" rtlCol="0" anchor="ctr"/>
+          <a:lstStyle/>
+          <a:p>
+            <a:pPr algn="l" indent="0" marL="0">
+              <a:buNone/>
+            </a:pPr>
+            <a:r>
+              <a:rPr lang="en-US" sz="950" dirty="0">
+                <a:solidFill>
+                  <a:srgbClr val="1B1B1B"/>
+                </a:solidFill>
+              </a:rPr>
+              <a:t>OSTA</a:t>
             </a:r>
             <a:endParaRPr lang="en-US" sz="950" dirty="0"/>
           </a:p>
@@ -14074,58 +14401,24 @@
       </p:sp>
       <p:sp>
         <p:nvSpPr>
-          <p:cNvPr id="46" name="text"/>
-          <p:cNvSpPr txBox="1"/>
-          <p:nvPr/>
-        </p:nvSpPr>
-        <p:spPr>
-          <a:xfrm>
-            <a:off x="7543800" y="4096512"/>
-            <a:ext cx="1463040" cy="274320"/>
-          </a:xfrm>
-          <a:prstGeom prst="rect">
-            <a:avLst/>
-          </a:prstGeom>
-          <a:noFill/>
-          <a:ln/>
-        </p:spPr>
-        <p:txBody>
-          <a:bodyPr wrap="square" lIns="0" tIns="0" rIns="0" bIns="0" rtlCol="0" anchor="ctr"/>
-          <a:lstStyle/>
-          <a:p>
-            <a:pPr algn="l" indent="0" marL="0">
-              <a:buNone/>
-            </a:pPr>
-            <a:r>
-              <a:rPr lang="en-US" sz="1000" dirty="0">
-                <a:solidFill>
-                  <a:srgbClr val="1B1B1B"/>
-                </a:solidFill>
-              </a:rPr>
-              <a:t>Boosted trees</a:t>
-            </a:r>
-            <a:endParaRPr lang="en-US" sz="1000" dirty="0"/>
-          </a:p>
-        </p:txBody>
-      </p:sp>
-      <p:sp>
-        <p:nvSpPr>
-          <p:cNvPr id="47" name="ci"/>
+          <p:cNvPr id="56" name="bar"/>
           <p:cNvSpPr/>
           <p:nvPr/>
         </p:nvSpPr>
         <p:spPr>
           <a:xfrm>
-            <a:off x="10528745" y="4233672"/>
-            <a:ext cx="221428" cy="914"/>
-          </a:xfrm>
-          <a:prstGeom prst="line">
-            <a:avLst/>
-          </a:prstGeom>
-          <a:noFill/>
-          <a:ln w="19050">
+            <a:off x="10545890" y="4169664"/>
+            <a:ext cx="289522" cy="164592"/>
+          </a:xfrm>
+          <a:prstGeom prst="rect">
+            <a:avLst/>
+          </a:prstGeom>
+          <a:solidFill>
+            <a:srgbClr val="C8102E"/>
+          </a:solidFill>
+          <a:ln w="12700">
             <a:solidFill>
-              <a:srgbClr val="8C8C8C"/>
+              <a:srgbClr val="C8102E"/>
             </a:solidFill>
             <a:prstDash val="solid"/>
           </a:ln>
@@ -14133,24 +14426,96 @@
       </p:sp>
       <p:sp>
         <p:nvSpPr>
-          <p:cNvPr id="48" name="point"/>
+          <p:cNvPr id="57" name="text"/>
+          <p:cNvSpPr txBox="1"/>
+          <p:nvPr/>
+        </p:nvSpPr>
+        <p:spPr>
+          <a:xfrm>
+            <a:off x="11432743" y="4133088"/>
+            <a:ext cx="731520" cy="237744"/>
+          </a:xfrm>
+          <a:prstGeom prst="rect">
+            <a:avLst/>
+          </a:prstGeom>
+          <a:noFill/>
+          <a:ln/>
+        </p:spPr>
+        <p:txBody>
+          <a:bodyPr wrap="square" lIns="0" tIns="0" rIns="0" bIns="0" rtlCol="0" anchor="ctr"/>
+          <a:lstStyle/>
+          <a:p>
+            <a:pPr algn="l" indent="0" marL="0">
+              <a:buNone/>
+            </a:pPr>
+            <a:r>
+              <a:rPr lang="en-US" sz="900" b="1" dirty="0">
+                <a:solidFill>
+                  <a:srgbClr val="C8102E"/>
+                </a:solidFill>
+              </a:rPr>
+              <a:t>0.04</a:t>
+            </a:r>
+            <a:endParaRPr lang="en-US" sz="900" dirty="0"/>
+          </a:p>
+        </p:txBody>
+      </p:sp>
+      <p:sp>
+        <p:nvSpPr>
+          <p:cNvPr id="58" name="text"/>
+          <p:cNvSpPr txBox="1"/>
+          <p:nvPr/>
+        </p:nvSpPr>
+        <p:spPr>
+          <a:xfrm>
+            <a:off x="7516368" y="4407408"/>
+            <a:ext cx="1554480" cy="237744"/>
+          </a:xfrm>
+          <a:prstGeom prst="rect">
+            <a:avLst/>
+          </a:prstGeom>
+          <a:noFill/>
+          <a:ln/>
+        </p:spPr>
+        <p:txBody>
+          <a:bodyPr wrap="square" lIns="0" tIns="0" rIns="0" bIns="0" rtlCol="0" anchor="ctr"/>
+          <a:lstStyle/>
+          <a:p>
+            <a:pPr algn="l" indent="0" marL="0">
+              <a:buNone/>
+            </a:pPr>
+            <a:r>
+              <a:rPr lang="en-US" sz="950" dirty="0">
+                <a:solidFill>
+                  <a:srgbClr val="1B1B1B"/>
+                </a:solidFill>
+              </a:rPr>
+              <a:t>SSL CNN to OSTA</a:t>
+            </a:r>
+            <a:endParaRPr lang="en-US" sz="950" dirty="0"/>
+          </a:p>
+        </p:txBody>
+      </p:sp>
+      <p:sp>
+        <p:nvSpPr>
+          <p:cNvPr id="59" name="bar"/>
           <p:cNvSpPr/>
           <p:nvPr/>
         </p:nvSpPr>
         <p:spPr>
           <a:xfrm>
-            <a:off x="10556834" y="4187952"/>
-            <a:ext cx="91440" cy="91440"/>
+            <a:off x="10545890" y="4443984"/>
+            <a:ext cx="289522" cy="164592"/>
           </a:xfrm>
           <a:prstGeom prst="rect">
             <a:avLst/>
           </a:prstGeom>
           <a:solidFill>
-            <a:srgbClr val="8C8C8C"/>
+            <a:srgbClr val="C8102E"/>
           </a:solidFill>
           <a:ln w="12700">
             <a:solidFill>
-              <a:srgbClr val="8C8C8C"/>
+              <a:srgbClr val="C8102E"/>
             </a:solidFill>
             <a:prstDash val="solid"/>
           </a:ln>
@@ -14158,14 +14523,14 @@
       </p:sp>
       <p:sp>
         <p:nvSpPr>
-          <p:cNvPr id="49" name="text"/>
+          <p:cNvPr id="60" name="text"/>
           <p:cNvSpPr txBox="1"/>
           <p:nvPr/>
         </p:nvSpPr>
         <p:spPr>
           <a:xfrm>
-            <a:off x="11432743" y="4096512"/>
-            <a:ext cx="868680" cy="274320"/>
+            <a:off x="11432743" y="4407408"/>
+            <a:ext cx="731520" cy="237744"/>
           </a:xfrm>
           <a:prstGeom prst="rect">
             <a:avLst/>
@@ -14181,12 +14546,145 @@
               <a:buNone/>
             </a:pPr>
             <a:r>
+              <a:rPr lang="en-US" sz="900" b="1" dirty="0">
+                <a:solidFill>
+                  <a:srgbClr val="C8102E"/>
+                </a:solidFill>
+              </a:rPr>
+              <a:t>0.04</a:t>
+            </a:r>
+            <a:endParaRPr lang="en-US" sz="900" dirty="0"/>
+          </a:p>
+        </p:txBody>
+      </p:sp>
+      <p:sp>
+        <p:nvSpPr>
+          <p:cNvPr id="61" name="text"/>
+          <p:cNvSpPr txBox="1"/>
+          <p:nvPr/>
+        </p:nvSpPr>
+        <p:spPr>
+          <a:xfrm>
+            <a:off x="7516368" y="4681728"/>
+            <a:ext cx="1554480" cy="237744"/>
+          </a:xfrm>
+          <a:prstGeom prst="rect">
+            <a:avLst/>
+          </a:prstGeom>
+          <a:noFill/>
+          <a:ln/>
+        </p:spPr>
+        <p:txBody>
+          <a:bodyPr wrap="square" lIns="0" tIns="0" rIns="0" bIns="0" rtlCol="0" anchor="ctr"/>
+          <a:lstStyle/>
+          <a:p>
+            <a:pPr algn="l" indent="0" marL="0">
+              <a:buNone/>
+            </a:pPr>
+            <a:r>
               <a:rPr lang="en-US" sz="950" b="1" dirty="0">
                 <a:solidFill>
+                  <a:srgbClr val="1B1B1B"/>
+                </a:solidFill>
+              </a:rPr>
+              <a:t>eICU models at home (21)</a:t>
+            </a:r>
+            <a:endParaRPr lang="en-US" sz="950" dirty="0"/>
+          </a:p>
+        </p:txBody>
+      </p:sp>
+      <p:sp>
+        <p:nvSpPr>
+          <p:cNvPr id="62" name="range band"/>
+          <p:cNvSpPr/>
+          <p:nvPr/>
+        </p:nvSpPr>
+        <p:spPr>
+          <a:xfrm>
+            <a:off x="10545890" y="4718304"/>
+            <a:ext cx="579044" cy="164592"/>
+          </a:xfrm>
+          <a:prstGeom prst="rect">
+            <a:avLst/>
+          </a:prstGeom>
+          <a:solidFill>
+            <a:srgbClr val="F0A8A8"/>
+          </a:solidFill>
+          <a:ln w="12700">
+            <a:solidFill>
+              <a:srgbClr val="F0A8A8"/>
+            </a:solidFill>
+            <a:prstDash val="solid"/>
+          </a:ln>
+        </p:spPr>
+      </p:sp>
+      <p:sp>
+        <p:nvSpPr>
+          <p:cNvPr id="63" name="text"/>
+          <p:cNvSpPr txBox="1"/>
+          <p:nvPr/>
+        </p:nvSpPr>
+        <p:spPr>
+          <a:xfrm>
+            <a:off x="11432743" y="4681728"/>
+            <a:ext cx="731520" cy="237744"/>
+          </a:xfrm>
+          <a:prstGeom prst="rect">
+            <a:avLst/>
+          </a:prstGeom>
+          <a:noFill/>
+          <a:ln/>
+        </p:spPr>
+        <p:txBody>
+          <a:bodyPr wrap="square" lIns="0" tIns="0" rIns="0" bIns="0" rtlCol="0" anchor="ctr"/>
+          <a:lstStyle/>
+          <a:p>
+            <a:pPr algn="l" indent="0" marL="0">
+              <a:buNone/>
+            </a:pPr>
+            <a:r>
+              <a:rPr lang="en-US" sz="900" b="1" dirty="0">
+                <a:solidFill>
                   <a:srgbClr val="C8102E"/>
                 </a:solidFill>
               </a:rPr>
-              <a:t>0.01</a:t>
+              <a:t>0.00 to 0.08</a:t>
+            </a:r>
+            <a:endParaRPr lang="en-US" sz="900" dirty="0"/>
+          </a:p>
+        </p:txBody>
+      </p:sp>
+      <p:sp>
+        <p:nvSpPr>
+          <p:cNvPr id="64" name="text"/>
+          <p:cNvSpPr txBox="1"/>
+          <p:nvPr/>
+        </p:nvSpPr>
+        <p:spPr>
+          <a:xfrm>
+            <a:off x="7543800" y="5321808"/>
+            <a:ext cx="3962095" cy="566928"/>
+          </a:xfrm>
+          <a:prstGeom prst="rect">
+            <a:avLst/>
+          </a:prstGeom>
+          <a:noFill/>
+          <a:ln/>
+        </p:spPr>
+        <p:txBody>
+          <a:bodyPr wrap="square" lIns="0" tIns="0" rIns="0" bIns="0" rtlCol="0" anchor="t"/>
+          <a:lstStyle/>
+          <a:p>
+            <a:pPr algn="l" indent="0" marL="0">
+              <a:buNone/>
+            </a:pPr>
+            <a:r>
+              <a:rPr lang="en-US" sz="950" dirty="0">
+                <a:solidFill>
+                  <a:srgbClr val="5E5E5E"/>
+                </a:solidFill>
+              </a:rPr>
+              <a:t>MIMIC-IV models on eICU: -0.03 to +0.04 across 20 models, CIs include zero where computed. eICU's own models score 0.00 to 0.08 on the same 45 events: away and at home coincide there. The sealed holdout is the real test.</a:t>
             </a:r>
             <a:endParaRPr lang="en-US" sz="950" dirty="0"/>
           </a:p>
@@ -14194,43 +14692,7 @@
       </p:sp>
       <p:sp>
         <p:nvSpPr>
-          <p:cNvPr id="50" name="text"/>
-          <p:cNvSpPr txBox="1"/>
-          <p:nvPr/>
-        </p:nvSpPr>
-        <p:spPr>
-          <a:xfrm>
-            <a:off x="7543800" y="4983480"/>
-            <a:ext cx="3962095" cy="822960"/>
-          </a:xfrm>
-          <a:prstGeom prst="rect">
-            <a:avLst/>
-          </a:prstGeom>
-          <a:noFill/>
-          <a:ln/>
-        </p:spPr>
-        <p:txBody>
-          <a:bodyPr wrap="square" lIns="0" tIns="0" rIns="0" bIns="0" rtlCol="0" anchor="t"/>
-          <a:lstStyle/>
-          <a:p>
-            <a:pPr algn="l" indent="0" marL="0">
-              <a:buNone/>
-            </a:pPr>
-            <a:r>
-              <a:rPr lang="en-US" sz="1000" dirty="0">
-                <a:solidFill>
-                  <a:srgbClr val="5E5E5E"/>
-                </a:solidFill>
-              </a:rPr>
-              <a:t>Range of 20 models; every 95 % CI includes zero; logistic regression -0.15. Not below silence, where the winner was; not shown above it. The sealed holdout is the real test.</a:t>
-            </a:r>
-            <a:endParaRPr lang="en-US" sz="1000" dirty="0"/>
-          </a:p>
-        </p:txBody>
-      </p:sp>
-      <p:sp>
-        <p:nvSpPr>
-          <p:cNvPr id="51" name="references"/>
+          <p:cNvPr id="65" name="references"/>
           <p:cNvSpPr txBox="1"/>
           <p:nvPr/>
         </p:nvSpPr>
@@ -14541,7 +15003,7 @@
         <p:spPr>
           <a:xfrm>
             <a:off x="1143000" y="2176272"/>
-            <a:ext cx="5120640" cy="566928"/>
+            <a:ext cx="5257800" cy="566928"/>
           </a:xfrm>
           <a:prstGeom prst="rect">
             <a:avLst/>
@@ -14662,7 +15124,7 @@
         <p:spPr>
           <a:xfrm>
             <a:off x="1143000" y="3072384"/>
-            <a:ext cx="5120640" cy="566928"/>
+            <a:ext cx="5257800" cy="566928"/>
           </a:xfrm>
           <a:prstGeom prst="rect">
             <a:avLst/>
@@ -14783,7 +15245,7 @@
         <p:spPr>
           <a:xfrm>
             <a:off x="1143000" y="3968496"/>
-            <a:ext cx="5120640" cy="566928"/>
+            <a:ext cx="5257800" cy="566928"/>
           </a:xfrm>
           <a:prstGeom prst="rect">
             <a:avLst/>
@@ -14799,14 +15261,14 @@
               <a:buNone/>
             </a:pPr>
             <a:r>
-              <a:rPr lang="en-US" sz="1250" dirty="0">
+              <a:rPr lang="en-US" sz="1150" dirty="0">
                 <a:solidFill>
                   <a:srgbClr val="5E5E5E"/>
                 </a:solidFill>
               </a:rPr>
-              <a:t>harmonisation recovers the data; on honest data all 21 models stay above zero at home; small samples overfit, so no model is shown best</a:t>
-            </a:r>
-            <a:endParaRPr lang="en-US" sz="1250" dirty="0"/>
+              <a:t>harmonisation recovers the data; all 21 above zero on MIMIC-IV, near zero on eICU at home or transferred; small samples overfit, none shown best</a:t>
+            </a:r>
+            <a:endParaRPr lang="en-US" sz="1150" dirty="0"/>
           </a:p>
         </p:txBody>
       </p:sp>
@@ -14904,7 +15366,7 @@
         <p:spPr>
           <a:xfrm>
             <a:off x="1143000" y="4864608"/>
-            <a:ext cx="5120640" cy="566928"/>
+            <a:ext cx="5257800" cy="566928"/>
           </a:xfrm>
           <a:prstGeom prst="rect">
             <a:avLst/>
@@ -15058,7 +15520,7 @@
                   <a:srgbClr val="1B1B1B"/>
                 </a:solidFill>
               </a:rPr>
-              <a:t>Complete the qualitative study (20 infectious disease and critical care consultants); finish the eICU arm of the model comparison</a:t>
+              <a:t>Complete the qualitative study (20 infectious disease and critical care consultants); fix the full-cohort arms from the MIMIC-IV and eICU shortlists</a:t>
             </a:r>
             <a:endParaRPr lang="en-US" sz="1300" dirty="0"/>
           </a:p>
@@ -16389,7 +16851,7 @@
                   <a:srgbClr val="FFFFFF"/>
                 </a:solidFill>
               </a:rPr>
-              <a:t>On honest, harmonised data, all 21 models keep a positive utility at home [40].</a:t>
+              <a:t>On honest, harmonised data, all 21 models keep a positive utility on MIMIC-IV; on eICU, with 45 events, models trained there and models transferred sit near zero alike [40].</a:t>
             </a:r>
             <a:endParaRPr lang="en-US" sz="1150" dirty="0"/>
           </a:p>
@@ -16407,7 +16869,7 @@
                   <a:srgbClr val="FFFFFF"/>
                 </a:solidFill>
               </a:rPr>
-              <a:t>The project's own organ-grouping idea is not supported at this scale, and is reported as found.</a:t>
+              <a:t>The project's own organ-grouping idea is not supported on either database, and is reported as found.</a:t>
             </a:r>
             <a:endParaRPr lang="en-US" sz="1150" dirty="0"/>
           </a:p>
@@ -16425,7 +16887,7 @@
                   <a:srgbClr val="FFFFFF"/>
                 </a:solidFill>
               </a:rPr>
-              <a:t>Whether a warning travels to an unseen hospital system is the open question: the consultants' study and the sealed holdout answer next.</a:t>
+              <a:t>Whether a warning travels to an unseen hospital system is the open question: the full cohort, the consultants' study and the sealed holdout answer next.</a:t>
             </a:r>
             <a:endParaRPr lang="en-US" sz="1150" dirty="0"/>
           </a:p>
@@ -28753,7 +29215,7 @@
                           <a:ea typeface="Arial" pitchFamily="34" charset="-122"/>
                           <a:cs typeface="Arial" pitchFamily="34" charset="-120"/>
                         </a:rPr>
-                        <a:t>8,795</a:t>
+                        <a:t>8,758</a:t>
                       </a:r>
                       <a:endParaRPr lang="en-US" sz="1150" dirty="0">
                         <a:latin typeface="Arial" charset="0"/>
@@ -29080,7 +29542,7 @@
                           <a:ea typeface="Arial" pitchFamily="34" charset="-122"/>
                           <a:cs typeface="Arial" pitchFamily="34" charset="-120"/>
                         </a:rPr>
-                        <a:t>5,710</a:t>
+                        <a:t>5,623</a:t>
                       </a:r>
                       <a:endParaRPr lang="en-US" sz="1150" dirty="0">
                         <a:latin typeface="Arial" charset="0"/>
@@ -29286,7 +29748,7 @@
                   <a:srgbClr val="1B1B1B"/>
                 </a:solidFill>
               </a:rPr>
-              <a:t>Unlabelled pretraining corpus: 67,455 MIMIC-IV and 75,000 eICU stays outside the cohort and the holdout.</a:t>
+              <a:t>Unlabelled pretraining corpus: 67,193 MIMIC-IV and 74,139 eICU stays outside the cohort and the holdout.</a:t>
             </a:r>
             <a:endParaRPr lang="en-US" sz="1400" dirty="0"/>
           </a:p>
